--- a/final_dissertation_presentation.pptx
+++ b/final_dissertation_presentation.pptx
@@ -3879,7 +3879,7 @@
                   <a:srgbClr val="555555"/>
                 </a:solidFill>
               </a:rPr>
-              <a:t>•  Affinity surrogate head</a:t>
+              <a:t>•  Affinity surrogate head (since distilled — negative, slide 14)</a:t>
             </a:r>
           </a:p>
           <a:p>
@@ -4542,7 +4542,7 @@
                   <a:srgbClr val="0B2B52"/>
                 </a:solidFill>
               </a:rPr>
-              <a:t>•  Therefore the high-value next step is sampler distillation on the full model — not more weight tricks.</a:t>
+              <a:t>•  Sampler distillation remains the route to minutes → seconds. Measurement has since put replicate-averaged folding on GPU ahead of it in priority (slide 18).</a:t>
             </a:r>
           </a:p>
         </p:txBody>
@@ -6361,7 +6361,7 @@
                   <a:srgbClr val="0B2B52"/>
                 </a:solidFill>
               </a:rPr>
-              <a:t>DONE — profiled; and measured what the optimisations actually deliver on pretrained weights (slides 11–13).</a:t>
+              <a:t>DONE — profiled; and measured what the optimisations actually deliver on pretrained weights (slides 11–18).</a:t>
             </a:r>
           </a:p>
         </p:txBody>
@@ -9214,7 +9214,7 @@
                   <a:srgbClr val="8A5200"/>
                 </a:solidFill>
               </a:rPr>
-              <a:t>⚠  Honest scope: the headline speedups in this report are for the distilled surrogate. Accelerating the full Boltz-2 model is the next objective.</a:t>
+              <a:t>⚠  Honest scope: the headline speedups in this report are for the distilled surrogate. Track A was then tested end-to-end: the ipTM reference does not rank binders, so the screening objective is not reachable through it (slides 14–18).</a:t>
             </a:r>
           </a:p>
         </p:txBody>
@@ -13404,7 +13404,7 @@
                   <a:srgbClr val="0B2B52"/>
                 </a:solidFill>
               </a:rPr>
-              <a:t>•  Low-rank memory savings are large and real, and scale with sequence length — but only for a model trained around the layer (see slide 11).</a:t>
+              <a:t>•  Low-rank memory savings are large and real, and scale with sequence length — but only for a model trained around the layer (see slide 12).</a:t>
             </a:r>
           </a:p>
           <a:p>
@@ -13795,7 +13795,7 @@
                   <a:srgbClr val="0B2B52"/>
                 </a:solidFill>
               </a:rPr>
-              <a:t>–  Scope: component- and synthetic-level; full-model biological validation is covered by the PDB benchmark (slides 12–13).</a:t>
+              <a:t>–  Scope: component- and synthetic-level; full-model biological validation is covered by the PDB benchmark (slides 14–18).</a:t>
             </a:r>
           </a:p>
         </p:txBody>

--- a/final_dissertation_presentation.pptx
+++ b/final_dissertation_presentation.pptx
@@ -24,6 +24,8 @@
     <p:sldId id="271" r:id="rId22"/>
     <p:sldId id="275" r:id="rId26"/>
     <p:sldId id="276" r:id="rId27"/>
+    <p:sldId id="277" r:id="rId28"/>
+    <p:sldId id="278" r:id="rId29"/>
     <p:sldId id="267" r:id="rId18"/>
     <p:sldId id="268" r:id="rId19"/>
   </p:sldIdLst>
@@ -6261,7 +6263,7 @@
                   <a:srgbClr val="555555"/>
                 </a:solidFill>
               </a:rPr>
-              <a:t>19</a:t>
+              <a:t>21</a:t>
             </a:r>
           </a:p>
         </p:txBody>
@@ -6990,7 +6992,7 @@
                   <a:srgbClr val="555555"/>
                 </a:solidFill>
               </a:rPr>
-              <a:t>20</a:t>
+              <a:t>22</a:t>
             </a:r>
           </a:p>
         </p:txBody>
@@ -7577,7 +7579,7 @@
             <a:avLst/>
           </a:prstGeom>
           <a:solidFill>
-            <a:srgbClr val="0E8F9A"/>
+            <a:srgbClr val="2E7D32"/>
           </a:solidFill>
           <a:ln>
             <a:noFill/>
@@ -7608,7 +7610,7 @@
                   <a:srgbClr val="FFFFFF"/>
                 </a:solidFill>
               </a:rPr>
-              <a:t>264</a:t>
+              <a:t>8.6×</a:t>
             </a:r>
           </a:p>
           <a:p>
@@ -7619,8 +7621,8 @@
                   <a:srgbClr val="FFFFFF"/>
                 </a:solidFill>
               </a:rPr>
-              <a:t>activations captured
-for OPM distillation</a:t>
+              <a:t>interface pLDDT vs ipTM
+effect-to-noise</a:t>
             </a:r>
           </a:p>
         </p:txBody>
@@ -7925,7 +7927,7 @@
                   <a:srgbClr val="0B2B52"/>
                 </a:solidFill>
               </a:rPr>
-              <a:t>the low-rank OPM is unreachable on pretrained weights, and ipTM does not rank binders reproducibly enough to screen with.</a:t>
+              <a:t>the low-rank OPM is unreachable on pretrained weights, and ipTM does not rank binders reproducibly — but interface pLDDT does (slides 19–20).</a:t>
             </a:r>
           </a:p>
         </p:txBody>
@@ -9809,6 +9811,729 @@
                 </a:solidFill>
               </a:rPr>
               <a:t>Parametric bootstrap over the measured noise, 4,000 replications. The effect direction is robust; the significance verdict is a coin flip.</a:t>
+            </a:r>
+          </a:p>
+        </p:txBody>
+      </p:sp>
+    </p:spTree>
+  </p:cSld>
+  <p:clrMapOvr>
+    <a:masterClrMapping/>
+  </p:clrMapOvr>
+</p:sld>
+</file>
+
+<file path=ppt/slides/slide22.xml><?xml version="1.0" encoding="utf-8"?>
+<p:sld xmlns:a="http://schemas.openxmlformats.org/drawingml/2006/main" xmlns:p="http://schemas.openxmlformats.org/presentationml/2006/main" xmlns:r="http://schemas.openxmlformats.org/officeDocument/2006/relationships">
+  <p:cSld>
+    <p:spTree>
+      <p:nvGrpSpPr>
+        <p:cNvPr id="1" name=""/>
+        <p:cNvGrpSpPr/>
+        <p:nvPr/>
+      </p:nvGrpSpPr>
+      <p:grpSpPr/>
+      <p:sp>
+        <p:nvSpPr>
+          <p:cNvPr id="2" name="Rectangle 1"/>
+          <p:cNvSpPr/>
+          <p:nvPr/>
+        </p:nvSpPr>
+        <p:spPr>
+          <a:xfrm>
+            <a:off x="0" y="0"/>
+            <a:ext cx="12188952" cy="914400"/>
+          </a:xfrm>
+          <a:prstGeom prst="rect">
+            <a:avLst/>
+          </a:prstGeom>
+          <a:solidFill>
+            <a:srgbClr val="0B2B52"/>
+          </a:solidFill>
+          <a:ln>
+            <a:noFill/>
+          </a:ln>
+        </p:spPr>
+        <p:style>
+          <a:lnRef idx="1">
+            <a:schemeClr val="accent1"/>
+          </a:lnRef>
+          <a:fillRef idx="3">
+            <a:schemeClr val="accent1"/>
+          </a:fillRef>
+          <a:effectRef idx="2">
+            <a:schemeClr val="accent1"/>
+          </a:effectRef>
+          <a:fontRef idx="minor">
+            <a:schemeClr val="lt1"/>
+          </a:fontRef>
+        </p:style>
+        <p:txBody>
+          <a:bodyPr rtlCol="0" anchor="ctr"/>
+          <a:lstStyle/>
+          <a:p>
+            <a:pPr algn="ctr"/>
+          </a:p>
+        </p:txBody>
+      </p:sp>
+      <p:sp>
+        <p:nvSpPr>
+          <p:cNvPr id="3" name="Rectangle 2"/>
+          <p:cNvSpPr/>
+          <p:nvPr/>
+        </p:nvSpPr>
+        <p:spPr>
+          <a:xfrm>
+            <a:off x="0" y="914400"/>
+            <a:ext cx="12188952" cy="54864"/>
+          </a:xfrm>
+          <a:prstGeom prst="rect">
+            <a:avLst/>
+          </a:prstGeom>
+          <a:solidFill>
+            <a:srgbClr val="1E6FB8"/>
+          </a:solidFill>
+          <a:ln>
+            <a:noFill/>
+          </a:ln>
+        </p:spPr>
+        <p:style>
+          <a:lnRef idx="1">
+            <a:schemeClr val="accent1"/>
+          </a:lnRef>
+          <a:fillRef idx="3">
+            <a:schemeClr val="accent1"/>
+          </a:fillRef>
+          <a:effectRef idx="2">
+            <a:schemeClr val="accent1"/>
+          </a:effectRef>
+          <a:fontRef idx="minor">
+            <a:schemeClr val="lt1"/>
+          </a:fontRef>
+        </p:style>
+        <p:txBody>
+          <a:bodyPr rtlCol="0" anchor="ctr"/>
+          <a:lstStyle/>
+          <a:p>
+            <a:pPr algn="ctr"/>
+          </a:p>
+        </p:txBody>
+      </p:sp>
+      <p:sp>
+        <p:nvSpPr>
+          <p:cNvPr id="4" name="TextBox 3"/>
+          <p:cNvSpPr txBox="1"/>
+          <p:nvPr/>
+        </p:nvSpPr>
+        <p:spPr>
+          <a:xfrm>
+            <a:off x="502920" y="109728"/>
+            <a:ext cx="11155680" cy="777240"/>
+          </a:xfrm>
+          <a:prstGeom prst="rect">
+            <a:avLst/>
+          </a:prstGeom>
+          <a:noFill/>
+        </p:spPr>
+        <p:txBody>
+          <a:bodyPr wrap="square">
+            <a:spAutoFit/>
+          </a:bodyPr>
+          <a:lstStyle/>
+          <a:p>
+            <a:pPr>
+              <a:spcAft>
+                <a:spcPts val="600"/>
+              </a:spcAft>
+            </a:pPr>
+            <a:r>
+              <a:rPr sz="2600" b="1">
+                <a:solidFill>
+                  <a:srgbClr val="FFFFFF"/>
+                </a:solidFill>
+              </a:rPr>
+              <a:t>Measured — What ipTM Discards Is Recoverable</a:t>
+            </a:r>
+          </a:p>
+        </p:txBody>
+      </p:sp>
+      <p:sp>
+        <p:nvSpPr>
+          <p:cNvPr id="5" name="TextBox 4"/>
+          <p:cNvSpPr txBox="1"/>
+          <p:nvPr/>
+        </p:nvSpPr>
+        <p:spPr>
+          <a:xfrm>
+            <a:off x="502920" y="6473952"/>
+            <a:ext cx="8229600" cy="274320"/>
+          </a:xfrm>
+          <a:prstGeom prst="rect">
+            <a:avLst/>
+          </a:prstGeom>
+          <a:noFill/>
+        </p:spPr>
+        <p:txBody>
+          <a:bodyPr wrap="square">
+            <a:spAutoFit/>
+          </a:bodyPr>
+          <a:lstStyle/>
+          <a:p>
+            <a:pPr>
+              <a:spcAft>
+                <a:spcPts val="600"/>
+              </a:spcAft>
+            </a:pPr>
+            <a:r>
+              <a:rPr sz="900" b="0">
+                <a:solidFill>
+                  <a:srgbClr val="555555"/>
+                </a:solidFill>
+              </a:rPr>
+              <a:t>Boltz-Fast · Final Dissertation Report · Akik Jana (2024AB05287)</a:t>
+            </a:r>
+          </a:p>
+        </p:txBody>
+      </p:sp>
+      <p:sp>
+        <p:nvSpPr>
+          <p:cNvPr id="6" name="TextBox 5"/>
+          <p:cNvSpPr txBox="1"/>
+          <p:nvPr/>
+        </p:nvSpPr>
+        <p:spPr>
+          <a:xfrm>
+            <a:off x="11183112" y="6473952"/>
+            <a:ext cx="640080" cy="274320"/>
+          </a:xfrm>
+          <a:prstGeom prst="rect">
+            <a:avLst/>
+          </a:prstGeom>
+          <a:noFill/>
+        </p:spPr>
+        <p:txBody>
+          <a:bodyPr wrap="square">
+            <a:spAutoFit/>
+          </a:bodyPr>
+          <a:lstStyle/>
+          <a:p>
+            <a:pPr>
+              <a:spcAft>
+                <a:spcPts val="600"/>
+              </a:spcAft>
+            </a:pPr>
+            <a:r>
+              <a:rPr sz="1000" b="0">
+                <a:solidFill>
+                  <a:srgbClr val="555555"/>
+                </a:solidFill>
+              </a:rPr>
+              <a:t>19</a:t>
+            </a:r>
+          </a:p>
+        </p:txBody>
+      </p:sp>
+      <p:sp>
+        <p:nvSpPr>
+          <p:cNvPr id="7" name="Rounded Rectangle 6"/>
+          <p:cNvSpPr/>
+          <p:nvPr/>
+        </p:nvSpPr>
+        <p:spPr>
+          <a:xfrm>
+            <a:off x="548640" y="1234440"/>
+            <a:ext cx="11155680" cy="868680"/>
+          </a:xfrm>
+          <a:prstGeom prst="roundRect">
+            <a:avLst/>
+          </a:prstGeom>
+          <a:solidFill>
+            <a:srgbClr val="0B2B52"/>
+          </a:solidFill>
+          <a:ln>
+            <a:noFill/>
+          </a:ln>
+        </p:spPr>
+        <p:style>
+          <a:lnRef idx="1">
+            <a:schemeClr val="accent1"/>
+          </a:lnRef>
+          <a:fillRef idx="3">
+            <a:schemeClr val="accent1"/>
+          </a:fillRef>
+          <a:effectRef idx="2">
+            <a:schemeClr val="accent1"/>
+          </a:effectRef>
+          <a:fontRef idx="minor">
+            <a:schemeClr val="lt1"/>
+          </a:fontRef>
+        </p:style>
+        <p:txBody>
+          <a:bodyPr rtlCol="0" anchor="ctr" wrap="square"/>
+          <a:lstStyle/>
+          <a:p>
+            <a:pPr algn="ctr">
+              <a:spcAft>
+                <a:spcPts val="600"/>
+              </a:spcAft>
+            </a:pPr>
+            <a:r>
+              <a:rPr sz="1700" b="1">
+                <a:solidFill>
+                  <a:srgbClr val="FFFFFF"/>
+                </a:solidFill>
+              </a:rPr>
+              <a:t>The negative was about ipTM, not about the structures. 132 folds were still on disk — re-scoring them cost no compute at all.</a:t>
+            </a:r>
+          </a:p>
+        </p:txBody>
+      </p:sp>
+      <p:sp>
+        <p:nvSpPr>
+          <p:cNvPr id="8" name="TextBox 7"/>
+          <p:cNvSpPr txBox="1"/>
+          <p:nvPr/>
+        </p:nvSpPr>
+        <p:spPr>
+          <a:xfrm>
+            <a:off x="548640" y="2240280"/>
+            <a:ext cx="11155680" cy="2926080"/>
+          </a:xfrm>
+          <a:prstGeom prst="rect">
+            <a:avLst/>
+          </a:prstGeom>
+          <a:noFill/>
+        </p:spPr>
+        <p:txBody>
+          <a:bodyPr wrap="square">
+            <a:spAutoFit/>
+          </a:bodyPr>
+          <a:lstStyle/>
+          <a:p>
+            <a:pPr>
+              <a:spcAft>
+                <a:spcPts val="600"/>
+              </a:spcAft>
+            </a:pPr>
+            <a:r>
+              <a:rPr sz="1450" b="0">
+                <a:solidFill>
+                  <a:srgbClr val="0B2B52"/>
+                </a:solidFill>
+              </a:rPr>
+              <a:t>Six interface measures, same complexes, same tests. Only one beats a cognate's OWN scramble — the test that fixes composition and destroys only order:</a:t>
+            </a:r>
+          </a:p>
+          <a:p>
+            <a:pPr>
+              <a:spcAft>
+                <a:spcPts val="600"/>
+              </a:spcAft>
+            </a:pPr>
+            <a:r>
+              <a:rPr sz="1450" b="0">
+                <a:solidFill>
+                  <a:srgbClr val="0B2B52"/>
+                </a:solidFill>
+              </a:rPr>
+              <a:t>•  ipTM  p = 0.42        •  pDockQ  p = 0.80        •  contacts / density / buried SASA  p = 0.05–0.45</a:t>
+            </a:r>
+          </a:p>
+          <a:p>
+            <a:pPr>
+              <a:spcAft>
+                <a:spcPts val="600"/>
+              </a:spcAft>
+            </a:pPr>
+            <a:r>
+              <a:rPr sz="1450" b="0">
+                <a:solidFill>
+                  <a:srgbClr val="0B2B52"/>
+                </a:solidFill>
+              </a:rPr>
+              <a:t>•  INTERFACE pLDDT  p &lt; 0.0001    rank 1.91 of 4 (chance 2.50)</a:t>
+            </a:r>
+          </a:p>
+          <a:p>
+            <a:pPr>
+              <a:spcAft>
+                <a:spcPts val="600"/>
+              </a:spcAft>
+            </a:pPr>
+            <a:r>
+              <a:rPr sz="1450" b="0">
+                <a:solidFill>
+                  <a:srgbClr val="0B2B52"/>
+                </a:solidFill>
+              </a:rPr>
+              <a:t/>
+            </a:r>
+          </a:p>
+          <a:p>
+            <a:pPr>
+              <a:spcAft>
+                <a:spcPts val="600"/>
+              </a:spcAft>
+            </a:pPr>
+            <a:r>
+              <a:rPr sz="1450" b="0">
+                <a:solidFill>
+                  <a:srgbClr val="0B2B52"/>
+                </a:solidFill>
+              </a:rPr>
+              <a:t>It also survives the reproducibility test that demoted ipTM: effect +3.30 against run-to-run SD 1.92 = 1.72× noise, where ipTM managed 0.20× — an 8.6× better ratio. Reproduces at p &lt; 0.05 in 100% of re-runs.</a:t>
+            </a:r>
+          </a:p>
+        </p:txBody>
+      </p:sp>
+      <p:sp>
+        <p:nvSpPr>
+          <p:cNvPr id="9" name="Rounded Rectangle 8"/>
+          <p:cNvSpPr/>
+          <p:nvPr/>
+        </p:nvSpPr>
+        <p:spPr>
+          <a:xfrm>
+            <a:off x="548640" y="5440680"/>
+            <a:ext cx="11155680" cy="868680"/>
+          </a:xfrm>
+          <a:prstGeom prst="roundRect">
+            <a:avLst/>
+          </a:prstGeom>
+          <a:solidFill>
+            <a:srgbClr val="FDF3E0"/>
+          </a:solidFill>
+          <a:ln>
+            <a:noFill/>
+          </a:ln>
+        </p:spPr>
+        <p:style>
+          <a:lnRef idx="1">
+            <a:schemeClr val="accent1"/>
+          </a:lnRef>
+          <a:fillRef idx="3">
+            <a:schemeClr val="accent1"/>
+          </a:fillRef>
+          <a:effectRef idx="2">
+            <a:schemeClr val="accent1"/>
+          </a:effectRef>
+          <a:fontRef idx="minor">
+            <a:schemeClr val="lt1"/>
+          </a:fontRef>
+        </p:style>
+        <p:txBody>
+          <a:bodyPr rtlCol="0" anchor="ctr" wrap="square"/>
+          <a:lstStyle/>
+          <a:p>
+            <a:pPr algn="ctr">
+              <a:spcAft>
+                <a:spcPts val="600"/>
+              </a:spcAft>
+            </a:pPr>
+            <a:r>
+              <a:rPr sz="1250" b="0">
+                <a:solidFill>
+                  <a:srgbClr val="8A5200"/>
+                </a:solidFill>
+              </a:rPr>
+              <a:t>⚠  pDockQ multiplies interface pLDDT by a contact term — and contacts run the WRONG way here (scrambles make more: 38.5 vs 32.9), cancelling the signal. Order-sensitivity is established; receptor-specificity (p = 0.027) is not yet.</a:t>
+            </a:r>
+          </a:p>
+        </p:txBody>
+      </p:sp>
+    </p:spTree>
+  </p:cSld>
+  <p:clrMapOvr>
+    <a:masterClrMapping/>
+  </p:clrMapOvr>
+</p:sld>
+</file>
+
+<file path=ppt/slides/slide23.xml><?xml version="1.0" encoding="utf-8"?>
+<p:sld xmlns:a="http://schemas.openxmlformats.org/drawingml/2006/main" xmlns:p="http://schemas.openxmlformats.org/presentationml/2006/main" xmlns:r="http://schemas.openxmlformats.org/officeDocument/2006/relationships">
+  <p:cSld>
+    <p:spTree>
+      <p:nvGrpSpPr>
+        <p:cNvPr id="1" name=""/>
+        <p:cNvGrpSpPr/>
+        <p:nvPr/>
+      </p:nvGrpSpPr>
+      <p:grpSpPr/>
+      <p:sp>
+        <p:nvSpPr>
+          <p:cNvPr id="2" name="Rectangle 1"/>
+          <p:cNvSpPr/>
+          <p:nvPr/>
+        </p:nvSpPr>
+        <p:spPr>
+          <a:xfrm>
+            <a:off x="0" y="0"/>
+            <a:ext cx="12188952" cy="914400"/>
+          </a:xfrm>
+          <a:prstGeom prst="rect">
+            <a:avLst/>
+          </a:prstGeom>
+          <a:solidFill>
+            <a:srgbClr val="0B2B52"/>
+          </a:solidFill>
+          <a:ln>
+            <a:noFill/>
+          </a:ln>
+        </p:spPr>
+        <p:style>
+          <a:lnRef idx="1">
+            <a:schemeClr val="accent1"/>
+          </a:lnRef>
+          <a:fillRef idx="3">
+            <a:schemeClr val="accent1"/>
+          </a:fillRef>
+          <a:effectRef idx="2">
+            <a:schemeClr val="accent1"/>
+          </a:effectRef>
+          <a:fontRef idx="minor">
+            <a:schemeClr val="lt1"/>
+          </a:fontRef>
+        </p:style>
+        <p:txBody>
+          <a:bodyPr rtlCol="0" anchor="ctr"/>
+          <a:lstStyle/>
+          <a:p>
+            <a:pPr algn="ctr"/>
+          </a:p>
+        </p:txBody>
+      </p:sp>
+      <p:sp>
+        <p:nvSpPr>
+          <p:cNvPr id="3" name="Rectangle 2"/>
+          <p:cNvSpPr/>
+          <p:nvPr/>
+        </p:nvSpPr>
+        <p:spPr>
+          <a:xfrm>
+            <a:off x="0" y="914400"/>
+            <a:ext cx="12188952" cy="54864"/>
+          </a:xfrm>
+          <a:prstGeom prst="rect">
+            <a:avLst/>
+          </a:prstGeom>
+          <a:solidFill>
+            <a:srgbClr val="1E6FB8"/>
+          </a:solidFill>
+          <a:ln>
+            <a:noFill/>
+          </a:ln>
+        </p:spPr>
+        <p:style>
+          <a:lnRef idx="1">
+            <a:schemeClr val="accent1"/>
+          </a:lnRef>
+          <a:fillRef idx="3">
+            <a:schemeClr val="accent1"/>
+          </a:fillRef>
+          <a:effectRef idx="2">
+            <a:schemeClr val="accent1"/>
+          </a:effectRef>
+          <a:fontRef idx="minor">
+            <a:schemeClr val="lt1"/>
+          </a:fontRef>
+        </p:style>
+        <p:txBody>
+          <a:bodyPr rtlCol="0" anchor="ctr"/>
+          <a:lstStyle/>
+          <a:p>
+            <a:pPr algn="ctr"/>
+          </a:p>
+        </p:txBody>
+      </p:sp>
+      <p:sp>
+        <p:nvSpPr>
+          <p:cNvPr id="4" name="TextBox 3"/>
+          <p:cNvSpPr txBox="1"/>
+          <p:nvPr/>
+        </p:nvSpPr>
+        <p:spPr>
+          <a:xfrm>
+            <a:off x="502920" y="109728"/>
+            <a:ext cx="11155680" cy="777240"/>
+          </a:xfrm>
+          <a:prstGeom prst="rect">
+            <a:avLst/>
+          </a:prstGeom>
+          <a:noFill/>
+        </p:spPr>
+        <p:txBody>
+          <a:bodyPr wrap="square">
+            <a:spAutoFit/>
+          </a:bodyPr>
+          <a:lstStyle/>
+          <a:p>
+            <a:pPr>
+              <a:spcAft>
+                <a:spcPts val="600"/>
+              </a:spcAft>
+            </a:pPr>
+            <a:r>
+              <a:rPr sz="2600" b="1">
+                <a:solidFill>
+                  <a:srgbClr val="FFFFFF"/>
+                </a:solidFill>
+              </a:rPr>
+              <a:t>ipTM vs Interface pLDDT — the Scramble Control</a:t>
+            </a:r>
+          </a:p>
+        </p:txBody>
+      </p:sp>
+      <p:sp>
+        <p:nvSpPr>
+          <p:cNvPr id="5" name="TextBox 4"/>
+          <p:cNvSpPr txBox="1"/>
+          <p:nvPr/>
+        </p:nvSpPr>
+        <p:spPr>
+          <a:xfrm>
+            <a:off x="502920" y="6473952"/>
+            <a:ext cx="8229600" cy="274320"/>
+          </a:xfrm>
+          <a:prstGeom prst="rect">
+            <a:avLst/>
+          </a:prstGeom>
+          <a:noFill/>
+        </p:spPr>
+        <p:txBody>
+          <a:bodyPr wrap="square">
+            <a:spAutoFit/>
+          </a:bodyPr>
+          <a:lstStyle/>
+          <a:p>
+            <a:pPr>
+              <a:spcAft>
+                <a:spcPts val="600"/>
+              </a:spcAft>
+            </a:pPr>
+            <a:r>
+              <a:rPr sz="900" b="0">
+                <a:solidFill>
+                  <a:srgbClr val="555555"/>
+                </a:solidFill>
+              </a:rPr>
+              <a:t>Boltz-Fast · Final Dissertation Report · Akik Jana (2024AB05287)</a:t>
+            </a:r>
+          </a:p>
+        </p:txBody>
+      </p:sp>
+      <p:sp>
+        <p:nvSpPr>
+          <p:cNvPr id="6" name="TextBox 5"/>
+          <p:cNvSpPr txBox="1"/>
+          <p:nvPr/>
+        </p:nvSpPr>
+        <p:spPr>
+          <a:xfrm>
+            <a:off x="11183112" y="6473952"/>
+            <a:ext cx="640080" cy="274320"/>
+          </a:xfrm>
+          <a:prstGeom prst="rect">
+            <a:avLst/>
+          </a:prstGeom>
+          <a:noFill/>
+        </p:spPr>
+        <p:txBody>
+          <a:bodyPr wrap="square">
+            <a:spAutoFit/>
+          </a:bodyPr>
+          <a:lstStyle/>
+          <a:p>
+            <a:pPr>
+              <a:spcAft>
+                <a:spcPts val="600"/>
+              </a:spcAft>
+            </a:pPr>
+            <a:r>
+              <a:rPr sz="1000" b="0">
+                <a:solidFill>
+                  <a:srgbClr val="555555"/>
+                </a:solidFill>
+              </a:rPr>
+              <a:t>20</a:t>
+            </a:r>
+          </a:p>
+        </p:txBody>
+      </p:sp>
+      <p:pic>
+        <p:nvPicPr>
+          <p:cNvPr id="7" name="Picture 6" descr="fig_metric_comparison.png"/>
+          <p:cNvPicPr>
+            <a:picLocks noChangeAspect="1"/>
+          </p:cNvPicPr>
+          <p:nvPr/>
+        </p:nvPicPr>
+        <p:blipFill>
+          <a:blip r:embed="rId2"/>
+          <a:stretch>
+            <a:fillRect/>
+          </a:stretch>
+        </p:blipFill>
+        <p:spPr>
+          <a:xfrm>
+            <a:off x="1691640" y="1207008"/>
+            <a:ext cx="8778240" cy="4626370"/>
+          </a:xfrm>
+          <a:prstGeom prst="rect">
+            <a:avLst/>
+          </a:prstGeom>
+        </p:spPr>
+      </p:pic>
+      <p:sp>
+        <p:nvSpPr>
+          <p:cNvPr id="8" name="Rounded Rectangle 7"/>
+          <p:cNvSpPr/>
+          <p:nvPr/>
+        </p:nvSpPr>
+        <p:spPr>
+          <a:xfrm>
+            <a:off x="548640" y="5532120"/>
+            <a:ext cx="11155680" cy="777240"/>
+          </a:xfrm>
+          <a:prstGeom prst="roundRect">
+            <a:avLst/>
+          </a:prstGeom>
+          <a:solidFill>
+            <a:srgbClr val="FDF3E0"/>
+          </a:solidFill>
+          <a:ln>
+            <a:noFill/>
+          </a:ln>
+        </p:spPr>
+        <p:style>
+          <a:lnRef idx="1">
+            <a:schemeClr val="accent1"/>
+          </a:lnRef>
+          <a:fillRef idx="3">
+            <a:schemeClr val="accent1"/>
+          </a:fillRef>
+          <a:effectRef idx="2">
+            <a:schemeClr val="accent1"/>
+          </a:effectRef>
+          <a:fontRef idx="minor">
+            <a:schemeClr val="lt1"/>
+          </a:fontRef>
+        </p:style>
+        <p:txBody>
+          <a:bodyPr rtlCol="0" anchor="ctr" wrap="square"/>
+          <a:lstStyle/>
+          <a:p>
+            <a:pPr algn="ctr">
+              <a:spcAft>
+                <a:spcPts val="600"/>
+              </a:spcAft>
+            </a:pPr>
+            <a:r>
+              <a:rPr sz="1250" b="0">
+                <a:solidFill>
+                  <a:srgbClr val="8A5200"/>
+                </a:solidFill>
+              </a:rPr>
+              <a:t>Same structures, two readouts. ipTM cannot separate a cognate from its own scramble; interface pLDDT can. The information is in the prediction — ipTM discards it.</a:t>
             </a:r>
           </a:p>
         </p:txBody>

--- a/final_dissertation_presentation.pptx
+++ b/final_dissertation_presentation.pptx
@@ -26,6 +26,7 @@
     <p:sldId id="276" r:id="rId27"/>
     <p:sldId id="277" r:id="rId28"/>
     <p:sldId id="278" r:id="rId29"/>
+    <p:sldId id="279" r:id="rId30"/>
     <p:sldId id="267" r:id="rId18"/>
     <p:sldId id="268" r:id="rId19"/>
   </p:sldIdLst>
@@ -6263,7 +6264,7 @@
                   <a:srgbClr val="555555"/>
                 </a:solidFill>
               </a:rPr>
-              <a:t>21</a:t>
+              <a:t>22</a:t>
             </a:r>
           </a:p>
         </p:txBody>
@@ -6992,7 +6993,7 @@
                   <a:srgbClr val="555555"/>
                 </a:solidFill>
               </a:rPr>
-              <a:t>22</a:t>
+              <a:t>23</a:t>
             </a:r>
           </a:p>
         </p:txBody>
@@ -10534,6 +10535,477 @@
                 </a:solidFill>
               </a:rPr>
               <a:t>Same structures, two readouts. ipTM cannot separate a cognate from its own scramble; interface pLDDT can. The information is in the prediction — ipTM discards it.</a:t>
+            </a:r>
+          </a:p>
+        </p:txBody>
+      </p:sp>
+    </p:spTree>
+  </p:cSld>
+  <p:clrMapOvr>
+    <a:masterClrMapping/>
+  </p:clrMapOvr>
+</p:sld>
+</file>
+
+<file path=ppt/slides/slide24.xml><?xml version="1.0" encoding="utf-8"?>
+<p:sld xmlns:a="http://schemas.openxmlformats.org/drawingml/2006/main" xmlns:p="http://schemas.openxmlformats.org/presentationml/2006/main" xmlns:r="http://schemas.openxmlformats.org/officeDocument/2006/relationships">
+  <p:cSld>
+    <p:spTree>
+      <p:nvGrpSpPr>
+        <p:cNvPr id="1" name=""/>
+        <p:cNvGrpSpPr/>
+        <p:nvPr/>
+      </p:nvGrpSpPr>
+      <p:grpSpPr/>
+      <p:sp>
+        <p:nvSpPr>
+          <p:cNvPr id="2" name="Rectangle 1"/>
+          <p:cNvSpPr/>
+          <p:nvPr/>
+        </p:nvSpPr>
+        <p:spPr>
+          <a:xfrm>
+            <a:off x="0" y="0"/>
+            <a:ext cx="12188952" cy="914400"/>
+          </a:xfrm>
+          <a:prstGeom prst="rect">
+            <a:avLst/>
+          </a:prstGeom>
+          <a:solidFill>
+            <a:srgbClr val="0B2B52"/>
+          </a:solidFill>
+          <a:ln>
+            <a:noFill/>
+          </a:ln>
+        </p:spPr>
+        <p:style>
+          <a:lnRef idx="1">
+            <a:schemeClr val="accent1"/>
+          </a:lnRef>
+          <a:fillRef idx="3">
+            <a:schemeClr val="accent1"/>
+          </a:fillRef>
+          <a:effectRef idx="2">
+            <a:schemeClr val="accent1"/>
+          </a:effectRef>
+          <a:fontRef idx="minor">
+            <a:schemeClr val="lt1"/>
+          </a:fontRef>
+        </p:style>
+        <p:txBody>
+          <a:bodyPr rtlCol="0" anchor="ctr"/>
+          <a:lstStyle/>
+          <a:p>
+            <a:pPr algn="ctr"/>
+          </a:p>
+        </p:txBody>
+      </p:sp>
+      <p:sp>
+        <p:nvSpPr>
+          <p:cNvPr id="3" name="Rectangle 2"/>
+          <p:cNvSpPr/>
+          <p:nvPr/>
+        </p:nvSpPr>
+        <p:spPr>
+          <a:xfrm>
+            <a:off x="0" y="914400"/>
+            <a:ext cx="12188952" cy="54864"/>
+          </a:xfrm>
+          <a:prstGeom prst="rect">
+            <a:avLst/>
+          </a:prstGeom>
+          <a:solidFill>
+            <a:srgbClr val="1E6FB8"/>
+          </a:solidFill>
+          <a:ln>
+            <a:noFill/>
+          </a:ln>
+        </p:spPr>
+        <p:style>
+          <a:lnRef idx="1">
+            <a:schemeClr val="accent1"/>
+          </a:lnRef>
+          <a:fillRef idx="3">
+            <a:schemeClr val="accent1"/>
+          </a:fillRef>
+          <a:effectRef idx="2">
+            <a:schemeClr val="accent1"/>
+          </a:effectRef>
+          <a:fontRef idx="minor">
+            <a:schemeClr val="lt1"/>
+          </a:fontRef>
+        </p:style>
+        <p:txBody>
+          <a:bodyPr rtlCol="0" anchor="ctr"/>
+          <a:lstStyle/>
+          <a:p>
+            <a:pPr algn="ctr"/>
+          </a:p>
+        </p:txBody>
+      </p:sp>
+      <p:sp>
+        <p:nvSpPr>
+          <p:cNvPr id="4" name="TextBox 3"/>
+          <p:cNvSpPr txBox="1"/>
+          <p:nvPr/>
+        </p:nvSpPr>
+        <p:spPr>
+          <a:xfrm>
+            <a:off x="502920" y="109728"/>
+            <a:ext cx="11155680" cy="777240"/>
+          </a:xfrm>
+          <a:prstGeom prst="rect">
+            <a:avLst/>
+          </a:prstGeom>
+          <a:noFill/>
+        </p:spPr>
+        <p:txBody>
+          <a:bodyPr wrap="square">
+            <a:spAutoFit/>
+          </a:bodyPr>
+          <a:lstStyle/>
+          <a:p>
+            <a:pPr>
+              <a:spcAft>
+                <a:spcPts val="600"/>
+              </a:spcAft>
+            </a:pPr>
+            <a:r>
+              <a:rPr sz="2600" b="1">
+                <a:solidFill>
+                  <a:srgbClr val="FFFFFF"/>
+                </a:solidFill>
+              </a:rPr>
+              <a:t>Measured — Where That Signal Actually Comes From</a:t>
+            </a:r>
+          </a:p>
+        </p:txBody>
+      </p:sp>
+      <p:sp>
+        <p:nvSpPr>
+          <p:cNvPr id="5" name="TextBox 4"/>
+          <p:cNvSpPr txBox="1"/>
+          <p:nvPr/>
+        </p:nvSpPr>
+        <p:spPr>
+          <a:xfrm>
+            <a:off x="502920" y="6473952"/>
+            <a:ext cx="8229600" cy="274320"/>
+          </a:xfrm>
+          <a:prstGeom prst="rect">
+            <a:avLst/>
+          </a:prstGeom>
+          <a:noFill/>
+        </p:spPr>
+        <p:txBody>
+          <a:bodyPr wrap="square">
+            <a:spAutoFit/>
+          </a:bodyPr>
+          <a:lstStyle/>
+          <a:p>
+            <a:pPr>
+              <a:spcAft>
+                <a:spcPts val="600"/>
+              </a:spcAft>
+            </a:pPr>
+            <a:r>
+              <a:rPr sz="900" b="0">
+                <a:solidFill>
+                  <a:srgbClr val="555555"/>
+                </a:solidFill>
+              </a:rPr>
+              <a:t>Boltz-Fast · Final Dissertation Report · Akik Jana (2024AB05287)</a:t>
+            </a:r>
+          </a:p>
+        </p:txBody>
+      </p:sp>
+      <p:sp>
+        <p:nvSpPr>
+          <p:cNvPr id="6" name="TextBox 5"/>
+          <p:cNvSpPr txBox="1"/>
+          <p:nvPr/>
+        </p:nvSpPr>
+        <p:spPr>
+          <a:xfrm>
+            <a:off x="11183112" y="6473952"/>
+            <a:ext cx="640080" cy="274320"/>
+          </a:xfrm>
+          <a:prstGeom prst="rect">
+            <a:avLst/>
+          </a:prstGeom>
+          <a:noFill/>
+        </p:spPr>
+        <p:txBody>
+          <a:bodyPr wrap="square">
+            <a:spAutoFit/>
+          </a:bodyPr>
+          <a:lstStyle/>
+          <a:p>
+            <a:pPr>
+              <a:spcAft>
+                <a:spcPts val="600"/>
+              </a:spcAft>
+            </a:pPr>
+            <a:r>
+              <a:rPr sz="1000" b="0">
+                <a:solidFill>
+                  <a:srgbClr val="555555"/>
+                </a:solidFill>
+              </a:rPr>
+              <a:t>21</a:t>
+            </a:r>
+          </a:p>
+        </p:txBody>
+      </p:sp>
+      <p:sp>
+        <p:nvSpPr>
+          <p:cNvPr id="7" name="Rounded Rectangle 6"/>
+          <p:cNvSpPr/>
+          <p:nvPr/>
+        </p:nvSpPr>
+        <p:spPr>
+          <a:xfrm>
+            <a:off x="548640" y="1188720"/>
+            <a:ext cx="11155680" cy="777240"/>
+          </a:xfrm>
+          <a:prstGeom prst="roundRect">
+            <a:avLst/>
+          </a:prstGeom>
+          <a:solidFill>
+            <a:srgbClr val="0B2B52"/>
+          </a:solidFill>
+          <a:ln>
+            <a:noFill/>
+          </a:ln>
+        </p:spPr>
+        <p:style>
+          <a:lnRef idx="1">
+            <a:schemeClr val="accent1"/>
+          </a:lnRef>
+          <a:fillRef idx="3">
+            <a:schemeClr val="accent1"/>
+          </a:fillRef>
+          <a:effectRef idx="2">
+            <a:schemeClr val="accent1"/>
+          </a:effectRef>
+          <a:fontRef idx="minor">
+            <a:schemeClr val="lt1"/>
+          </a:fontRef>
+        </p:style>
+        <p:txBody>
+          <a:bodyPr rtlCol="0" anchor="ctr" wrap="square"/>
+          <a:lstStyle/>
+          <a:p>
+            <a:pPr algn="ctr">
+              <a:spcAft>
+                <a:spcPts val="600"/>
+              </a:spcAft>
+            </a:pPr>
+            <a:r>
+              <a:rPr sz="1700" b="1">
+                <a:solidFill>
+                  <a:srgbClr val="FFFFFF"/>
+                </a:solidFill>
+              </a:rPr>
+              <a:t>Interface pLDDT responds to sequence order. Does it respond to BINDING, or just to the peptide being better folded?</a:t>
+            </a:r>
+          </a:p>
+        </p:txBody>
+      </p:sp>
+      <p:sp>
+        <p:nvSpPr>
+          <p:cNvPr id="8" name="TextBox 7"/>
+          <p:cNvSpPr txBox="1"/>
+          <p:nvPr/>
+        </p:nvSpPr>
+        <p:spPr>
+          <a:xfrm>
+            <a:off x="548640" y="2103120"/>
+            <a:ext cx="11155680" cy="2926080"/>
+          </a:xfrm>
+          <a:prstGeom prst="rect">
+            <a:avLst/>
+          </a:prstGeom>
+          <a:noFill/>
+        </p:spPr>
+        <p:txBody>
+          <a:bodyPr wrap="square">
+            <a:spAutoFit/>
+          </a:bodyPr>
+          <a:lstStyle/>
+          <a:p>
+            <a:pPr>
+              <a:spcAft>
+                <a:spcPts val="600"/>
+              </a:spcAft>
+            </a:pPr>
+            <a:r>
+              <a:rPr sz="1400" b="0">
+                <a:solidFill>
+                  <a:srgbClr val="0B2B52"/>
+                </a:solidFill>
+              </a:rPr>
+              <a:t>Splitting the metric by chain — no new folding:</a:t>
+            </a:r>
+          </a:p>
+          <a:p>
+            <a:pPr>
+              <a:spcAft>
+                <a:spcPts val="600"/>
+              </a:spcAft>
+            </a:pPr>
+            <a:r>
+              <a:rPr sz="1400" b="0">
+                <a:solidFill>
+                  <a:srgbClr val="0B2B52"/>
+                </a:solidFill>
+              </a:rPr>
+              <a:t>•  peptide side  +5.25   but whole-chain peptide pLDDT  +4.87   →  mostly FOLDABILITY, not interface</a:t>
+            </a:r>
+          </a:p>
+          <a:p>
+            <a:pPr>
+              <a:spcAft>
+                <a:spcPts val="600"/>
+              </a:spcAft>
+            </a:pPr>
+            <a:r>
+              <a:rPr sz="1400" b="0">
+                <a:solidFill>
+                  <a:srgbClr val="0B2B52"/>
+                </a:solidFill>
+              </a:rPr>
+              <a:t>•  RECEPTOR side  +2.38  (p = 6e-5)  →  the receptor's own residues are placed better when given the right peptide.</a:t>
+            </a:r>
+          </a:p>
+          <a:p>
+            <a:pPr>
+              <a:spcAft>
+                <a:spcPts val="600"/>
+              </a:spcAft>
+            </a:pPr>
+            <a:r>
+              <a:rPr sz="1400" b="0">
+                <a:solidFill>
+                  <a:srgbClr val="0B2B52"/>
+                </a:solidFill>
+              </a:rPr>
+              <a:t>   A disordered peptide cannot do that. This term survives the objection.</a:t>
+            </a:r>
+          </a:p>
+          <a:p>
+            <a:pPr>
+              <a:spcAft>
+                <a:spcPts val="600"/>
+              </a:spcAft>
+            </a:pPr>
+            <a:r>
+              <a:rPr sz="1400" b="0">
+                <a:solidFill>
+                  <a:srgbClr val="0B2B52"/>
+                </a:solidFill>
+              </a:rPr>
+              <a:t/>
+            </a:r>
+          </a:p>
+          <a:p>
+            <a:pPr>
+              <a:spcAft>
+                <a:spcPts val="600"/>
+              </a:spcAft>
+            </a:pPr>
+            <a:r>
+              <a:rPr sz="1400" b="0">
+                <a:solidFill>
+                  <a:srgbClr val="0B2B52"/>
+                </a:solidFill>
+              </a:rPr>
+              <a:t>Is the response tied to the binding site?  88 folds, alanine scan:</a:t>
+            </a:r>
+          </a:p>
+          <a:p>
+            <a:pPr>
+              <a:spcAft>
+                <a:spcPts val="600"/>
+              </a:spcAft>
+            </a:pPr>
+            <a:r>
+              <a:rPr sz="1400" b="0">
+                <a:solidFill>
+                  <a:srgbClr val="0B2B52"/>
+                </a:solidFill>
+              </a:rPr>
+              <a:t>•  interface→Ala 36.77  vs  surface→Ala 38.62   diff −1.84, p = 0.244 — right direction, not significant</a:t>
+            </a:r>
+          </a:p>
+          <a:p>
+            <a:pPr>
+              <a:spcAft>
+                <a:spcPts val="600"/>
+              </a:spcAft>
+            </a:pPr>
+            <a:r>
+              <a:rPr sz="1400" b="0">
+                <a:solidFill>
+                  <a:srgbClr val="0B2B52"/>
+                </a:solidFill>
+              </a:rPr>
+              <a:t>•  80% power would need 123 receptors; every arm drops 7–12 pLDDT, so both may sit near a floor.</a:t>
+            </a:r>
+          </a:p>
+        </p:txBody>
+      </p:sp>
+      <p:sp>
+        <p:nvSpPr>
+          <p:cNvPr id="9" name="Rounded Rectangle 8"/>
+          <p:cNvSpPr/>
+          <p:nvPr/>
+        </p:nvSpPr>
+        <p:spPr>
+          <a:xfrm>
+            <a:off x="548640" y="5440680"/>
+            <a:ext cx="11155680" cy="868680"/>
+          </a:xfrm>
+          <a:prstGeom prst="roundRect">
+            <a:avLst/>
+          </a:prstGeom>
+          <a:solidFill>
+            <a:srgbClr val="FDF3E0"/>
+          </a:solidFill>
+          <a:ln>
+            <a:noFill/>
+          </a:ln>
+        </p:spPr>
+        <p:style>
+          <a:lnRef idx="1">
+            <a:schemeClr val="accent1"/>
+          </a:lnRef>
+          <a:fillRef idx="3">
+            <a:schemeClr val="accent1"/>
+          </a:fillRef>
+          <a:effectRef idx="2">
+            <a:schemeClr val="accent1"/>
+          </a:effectRef>
+          <a:fontRef idx="minor">
+            <a:schemeClr val="lt1"/>
+          </a:fontRef>
+        </p:style>
+        <p:txBody>
+          <a:bodyPr rtlCol="0" anchor="ctr" wrap="square"/>
+          <a:lstStyle/>
+          <a:p>
+            <a:pPr algn="ctr">
+              <a:spcAft>
+                <a:spcPts val="600"/>
+              </a:spcAft>
+            </a:pPr>
+            <a:r>
+              <a:rPr sz="1250" b="0">
+                <a:solidFill>
+                  <a:srgbClr val="8A5200"/>
+                </a:solidFill>
+              </a:rPr>
+              <a:t>⚠  This QUALIFIES slide 19. Half the pooled signal is peptide foldability, which slide 19 did not separate. What stands: the receptor responds to which peptide it is given. Not established: that the response is localised to the binding site.</a:t>
             </a:r>
           </a:p>
         </p:txBody>

--- a/final_dissertation_presentation.pptx
+++ b/final_dissertation_presentation.pptx
@@ -27,6 +27,8 @@
     <p:sldId id="277" r:id="rId28"/>
     <p:sldId id="278" r:id="rId29"/>
     <p:sldId id="279" r:id="rId30"/>
+    <p:sldId id="280" r:id="rId31"/>
+    <p:sldId id="281" r:id="rId32"/>
     <p:sldId id="267" r:id="rId18"/>
     <p:sldId id="268" r:id="rId19"/>
   </p:sldIdLst>
@@ -6264,7 +6266,7 @@
                   <a:srgbClr val="555555"/>
                 </a:solidFill>
               </a:rPr>
-              <a:t>22</a:t>
+              <a:t>24</a:t>
             </a:r>
           </a:p>
         </p:txBody>
@@ -6993,7 +6995,7 @@
                   <a:srgbClr val="555555"/>
                 </a:solidFill>
               </a:rPr>
-              <a:t>23</a:t>
+              <a:t>25</a:t>
             </a:r>
           </a:p>
         </p:txBody>
@@ -7832,7 +7834,7 @@
             <a:avLst/>
           </a:prstGeom>
           <a:solidFill>
-            <a:srgbClr val="C62828"/>
+            <a:srgbClr val="2E7D32"/>
           </a:solidFill>
           <a:ln>
             <a:noFill/>
@@ -7863,7 +7865,7 @@
                   <a:srgbClr val="FFFFFF"/>
                 </a:solidFill>
               </a:rPr>
-              <a:t>49%</a:t>
+              <a:t>1.73</a:t>
             </a:r>
           </a:p>
           <a:p>
@@ -7874,8 +7876,8 @@
                   <a:srgbClr val="FFFFFF"/>
                 </a:solidFill>
               </a:rPr>
-              <a:t>of re-runs reproduce
-the headline p &lt; 0.05</a:t>
+              <a:t>cognate rank on DeCAF
+(chance 2.50, p = 0.004)</a:t>
             </a:r>
           </a:p>
         </p:txBody>
@@ -7928,7 +7930,7 @@
                   <a:srgbClr val="0B2B52"/>
                 </a:solidFill>
               </a:rPr>
-              <a:t>the low-rank OPM is unreachable on pretrained weights, and ipTM does not rank binders reproducibly — but interface pLDDT does (slides 19–20).</a:t>
+              <a:t>the low-rank OPM is unreachable on pretrained weights, and ipTM does not rank binders reproducibly on the stock models — but interface pLDDT does (slides 19–20), and a few-step-distilled model does far better (slides 22–23).</a:t>
             </a:r>
           </a:p>
         </p:txBody>
@@ -7983,7 +7985,7 @@
                   <a:srgbClr val="8A5200"/>
                 </a:solidFill>
               </a:rPr>
-              <a:t>⚠  Settings throughout are far below Boltz defaults — 10 sampling steps vs 200, 1 recycling vs 3, MSA depth 32 vs 8192. The settings confound is stated, not resolved.</a:t>
+              <a:t>⚠  Settings throughout are far below Boltz defaults — 10 sampling steps vs 200, 1 recycling vs 3, MSA depth 32 vs 8192. Slide 22 probes this directly: it attenuates the signal but does not wholly explain the negatives.</a:t>
             </a:r>
           </a:p>
         </p:txBody>
@@ -10237,7 +10239,7 @@
                   <a:srgbClr val="8A5200"/>
                 </a:solidFill>
               </a:rPr>
-              <a:t>⚠  pDockQ multiplies interface pLDDT by a contact term — and contacts run the WRONG way here (scrambles make more: 38.5 vs 32.9), cancelling the signal. Order-sensitivity is established; receptor-specificity (p = 0.027) is not yet.</a:t>
+              <a:t>⚠  pDockQ multiplies interface pLDDT by a contact term — contacts run the WRONG way here (scrambles make more: 38.5 vs 32.9), cancelling the signal. NOTE: slide 22 shows this result is MODEL-DEPENDENT — it does not hold on Boltz-1 — and that receptor specificity IS established on a few-step-trained model.</a:t>
             </a:r>
           </a:p>
         </p:txBody>
@@ -11006,6 +11008,789 @@
                 </a:solidFill>
               </a:rPr>
               <a:t>⚠  This QUALIFIES slide 19. Half the pooled signal is peptide foldability, which slide 19 did not separate. What stands: the receptor responds to which peptide it is given. Not established: that the response is localised to the binding site.</a:t>
+            </a:r>
+          </a:p>
+        </p:txBody>
+      </p:sp>
+    </p:spTree>
+  </p:cSld>
+  <p:clrMapOvr>
+    <a:masterClrMapping/>
+  </p:clrMapOvr>
+</p:sld>
+</file>
+
+<file path=ppt/slides/slide25.xml><?xml version="1.0" encoding="utf-8"?>
+<p:sld xmlns:a="http://schemas.openxmlformats.org/drawingml/2006/main" xmlns:p="http://schemas.openxmlformats.org/presentationml/2006/main" xmlns:r="http://schemas.openxmlformats.org/officeDocument/2006/relationships">
+  <p:cSld>
+    <p:spTree>
+      <p:nvGrpSpPr>
+        <p:cNvPr id="1" name=""/>
+        <p:cNvGrpSpPr/>
+        <p:nvPr/>
+      </p:nvGrpSpPr>
+      <p:grpSpPr/>
+      <p:sp>
+        <p:nvSpPr>
+          <p:cNvPr id="2" name="Rectangle 1"/>
+          <p:cNvSpPr/>
+          <p:nvPr/>
+        </p:nvSpPr>
+        <p:spPr>
+          <a:xfrm>
+            <a:off x="0" y="0"/>
+            <a:ext cx="12188952" cy="914400"/>
+          </a:xfrm>
+          <a:prstGeom prst="rect">
+            <a:avLst/>
+          </a:prstGeom>
+          <a:solidFill>
+            <a:srgbClr val="0B2B52"/>
+          </a:solidFill>
+          <a:ln>
+            <a:noFill/>
+          </a:ln>
+        </p:spPr>
+        <p:style>
+          <a:lnRef idx="1">
+            <a:schemeClr val="accent1"/>
+          </a:lnRef>
+          <a:fillRef idx="3">
+            <a:schemeClr val="accent1"/>
+          </a:fillRef>
+          <a:effectRef idx="2">
+            <a:schemeClr val="accent1"/>
+          </a:effectRef>
+          <a:fontRef idx="minor">
+            <a:schemeClr val="lt1"/>
+          </a:fontRef>
+        </p:style>
+        <p:txBody>
+          <a:bodyPr rtlCol="0" anchor="ctr"/>
+          <a:lstStyle/>
+          <a:p>
+            <a:pPr algn="ctr"/>
+          </a:p>
+        </p:txBody>
+      </p:sp>
+      <p:sp>
+        <p:nvSpPr>
+          <p:cNvPr id="3" name="Rectangle 2"/>
+          <p:cNvSpPr/>
+          <p:nvPr/>
+        </p:nvSpPr>
+        <p:spPr>
+          <a:xfrm>
+            <a:off x="0" y="914400"/>
+            <a:ext cx="12188952" cy="54864"/>
+          </a:xfrm>
+          <a:prstGeom prst="rect">
+            <a:avLst/>
+          </a:prstGeom>
+          <a:solidFill>
+            <a:srgbClr val="1E6FB8"/>
+          </a:solidFill>
+          <a:ln>
+            <a:noFill/>
+          </a:ln>
+        </p:spPr>
+        <p:style>
+          <a:lnRef idx="1">
+            <a:schemeClr val="accent1"/>
+          </a:lnRef>
+          <a:fillRef idx="3">
+            <a:schemeClr val="accent1"/>
+          </a:fillRef>
+          <a:effectRef idx="2">
+            <a:schemeClr val="accent1"/>
+          </a:effectRef>
+          <a:fontRef idx="minor">
+            <a:schemeClr val="lt1"/>
+          </a:fontRef>
+        </p:style>
+        <p:txBody>
+          <a:bodyPr rtlCol="0" anchor="ctr"/>
+          <a:lstStyle/>
+          <a:p>
+            <a:pPr algn="ctr"/>
+          </a:p>
+        </p:txBody>
+      </p:sp>
+      <p:sp>
+        <p:nvSpPr>
+          <p:cNvPr id="4" name="TextBox 3"/>
+          <p:cNvSpPr txBox="1"/>
+          <p:nvPr/>
+        </p:nvSpPr>
+        <p:spPr>
+          <a:xfrm>
+            <a:off x="502920" y="109728"/>
+            <a:ext cx="11155680" cy="777240"/>
+          </a:xfrm>
+          <a:prstGeom prst="rect">
+            <a:avLst/>
+          </a:prstGeom>
+          <a:noFill/>
+        </p:spPr>
+        <p:txBody>
+          <a:bodyPr wrap="square">
+            <a:spAutoFit/>
+          </a:bodyPr>
+          <a:lstStyle/>
+          <a:p>
+            <a:pPr>
+              <a:spcAft>
+                <a:spcPts val="600"/>
+              </a:spcAft>
+            </a:pPr>
+            <a:r>
+              <a:rPr sz="2600" b="1">
+                <a:solidFill>
+                  <a:srgbClr val="FFFFFF"/>
+                </a:solidFill>
+              </a:rPr>
+              <a:t>Measured — Few-Step Distillation Changes the Picture</a:t>
+            </a:r>
+          </a:p>
+        </p:txBody>
+      </p:sp>
+      <p:sp>
+        <p:nvSpPr>
+          <p:cNvPr id="5" name="TextBox 4"/>
+          <p:cNvSpPr txBox="1"/>
+          <p:nvPr/>
+        </p:nvSpPr>
+        <p:spPr>
+          <a:xfrm>
+            <a:off x="502920" y="6473952"/>
+            <a:ext cx="8229600" cy="274320"/>
+          </a:xfrm>
+          <a:prstGeom prst="rect">
+            <a:avLst/>
+          </a:prstGeom>
+          <a:noFill/>
+        </p:spPr>
+        <p:txBody>
+          <a:bodyPr wrap="square">
+            <a:spAutoFit/>
+          </a:bodyPr>
+          <a:lstStyle/>
+          <a:p>
+            <a:pPr>
+              <a:spcAft>
+                <a:spcPts val="600"/>
+              </a:spcAft>
+            </a:pPr>
+            <a:r>
+              <a:rPr sz="900" b="0">
+                <a:solidFill>
+                  <a:srgbClr val="555555"/>
+                </a:solidFill>
+              </a:rPr>
+              <a:t>Boltz-Fast · Final Dissertation Report · Akik Jana (2024AB05287)</a:t>
+            </a:r>
+          </a:p>
+        </p:txBody>
+      </p:sp>
+      <p:sp>
+        <p:nvSpPr>
+          <p:cNvPr id="6" name="TextBox 5"/>
+          <p:cNvSpPr txBox="1"/>
+          <p:nvPr/>
+        </p:nvSpPr>
+        <p:spPr>
+          <a:xfrm>
+            <a:off x="11183112" y="6473952"/>
+            <a:ext cx="640080" cy="274320"/>
+          </a:xfrm>
+          <a:prstGeom prst="rect">
+            <a:avLst/>
+          </a:prstGeom>
+          <a:noFill/>
+        </p:spPr>
+        <p:txBody>
+          <a:bodyPr wrap="square">
+            <a:spAutoFit/>
+          </a:bodyPr>
+          <a:lstStyle/>
+          <a:p>
+            <a:pPr>
+              <a:spcAft>
+                <a:spcPts val="600"/>
+              </a:spcAft>
+            </a:pPr>
+            <a:r>
+              <a:rPr sz="1000" b="0">
+                <a:solidFill>
+                  <a:srgbClr val="555555"/>
+                </a:solidFill>
+              </a:rPr>
+              <a:t>22</a:t>
+            </a:r>
+          </a:p>
+        </p:txBody>
+      </p:sp>
+      <p:sp>
+        <p:nvSpPr>
+          <p:cNvPr id="7" name="Rounded Rectangle 6"/>
+          <p:cNvSpPr/>
+          <p:nvPr/>
+        </p:nvSpPr>
+        <p:spPr>
+          <a:xfrm>
+            <a:off x="548640" y="1170432"/>
+            <a:ext cx="11155680" cy="777240"/>
+          </a:xfrm>
+          <a:prstGeom prst="roundRect">
+            <a:avLst/>
+          </a:prstGeom>
+          <a:solidFill>
+            <a:srgbClr val="0B2B52"/>
+          </a:solidFill>
+          <a:ln>
+            <a:noFill/>
+          </a:ln>
+        </p:spPr>
+        <p:style>
+          <a:lnRef idx="1">
+            <a:schemeClr val="accent1"/>
+          </a:lnRef>
+          <a:fillRef idx="3">
+            <a:schemeClr val="accent1"/>
+          </a:fillRef>
+          <a:effectRef idx="2">
+            <a:schemeClr val="accent1"/>
+          </a:effectRef>
+          <a:fontRef idx="minor">
+            <a:schemeClr val="lt1"/>
+          </a:fontRef>
+        </p:style>
+        <p:txBody>
+          <a:bodyPr rtlCol="0" anchor="ctr" wrap="square"/>
+          <a:lstStyle/>
+          <a:p>
+            <a:pPr algn="ctr">
+              <a:spcAft>
+                <a:spcPts val="600"/>
+              </a:spcAft>
+            </a:pPr>
+            <a:r>
+              <a:rPr sz="1700" b="1">
+                <a:solidFill>
+                  <a:srgbClr val="FFFFFF"/>
+                </a:solidFill>
+              </a:rPr>
+              <a:t>Everything so far was folded at 10 steps on models built for 200. What happens on a model TRAINED for 10?</a:t>
+            </a:r>
+          </a:p>
+        </p:txBody>
+      </p:sp>
+      <p:sp>
+        <p:nvSpPr>
+          <p:cNvPr id="8" name="TextBox 7"/>
+          <p:cNvSpPr txBox="1"/>
+          <p:nvPr/>
+        </p:nvSpPr>
+        <p:spPr>
+          <a:xfrm>
+            <a:off x="548640" y="2057400"/>
+            <a:ext cx="11155680" cy="2926080"/>
+          </a:xfrm>
+          <a:prstGeom prst="rect">
+            <a:avLst/>
+          </a:prstGeom>
+          <a:noFill/>
+        </p:spPr>
+        <p:txBody>
+          <a:bodyPr wrap="square">
+            <a:spAutoFit/>
+          </a:bodyPr>
+          <a:lstStyle/>
+          <a:p>
+            <a:pPr>
+              <a:spcAft>
+                <a:spcPts val="600"/>
+              </a:spcAft>
+            </a:pPr>
+            <a:r>
+              <a:rPr sz="1350" b="0">
+                <a:solidFill>
+                  <a:srgbClr val="0B2B52"/>
+                </a:solidFill>
+              </a:rPr>
+              <a:t>Same 132 pairs. Boltz-1 added as a de-confounding arm — DeCAF changes the base model AND the sampling regime, and only Boltz-1 shares its base.</a:t>
+            </a:r>
+          </a:p>
+          <a:p>
+            <a:pPr>
+              <a:spcAft>
+                <a:spcPts val="600"/>
+              </a:spcAft>
+            </a:pPr>
+            <a:r>
+              <a:rPr sz="1350" b="0">
+                <a:solidFill>
+                  <a:srgbClr val="0B2B52"/>
+                </a:solidFill>
+              </a:rPr>
+              <a:t/>
+            </a:r>
+          </a:p>
+          <a:p>
+            <a:pPr>
+              <a:spcAft>
+                <a:spcPts val="600"/>
+              </a:spcAft>
+            </a:pPr>
+            <a:r>
+              <a:rPr sz="1350" b="0">
+                <a:solidFill>
+                  <a:srgbClr val="0B2B52"/>
+                </a:solidFill>
+              </a:rPr>
+              <a:t>cognate − own scramble        Boltz-2            Boltz-1            DeCAF</a:t>
+            </a:r>
+          </a:p>
+          <a:p>
+            <a:pPr>
+              <a:spcAft>
+                <a:spcPts val="600"/>
+              </a:spcAft>
+            </a:pPr>
+            <a:r>
+              <a:rPr sz="1350" b="0">
+                <a:solidFill>
+                  <a:srgbClr val="0B2B52"/>
+                </a:solidFill>
+              </a:rPr>
+              <a:t>  ipTM                        +0.013 (p=0.42)    +0.039 (p=.0043)   +0.201 (p=2e-5)</a:t>
+            </a:r>
+          </a:p>
+          <a:p>
+            <a:pPr>
+              <a:spcAft>
+                <a:spcPts val="600"/>
+              </a:spcAft>
+            </a:pPr>
+            <a:r>
+              <a:rPr sz="1350" b="0">
+                <a:solidFill>
+                  <a:srgbClr val="0B2B52"/>
+                </a:solidFill>
+              </a:rPr>
+              <a:t>  interface pLDDT             +3.30  (p&lt;1e-5)    +1.54  (p=0.067)   +9.54  (p&lt;1e-5)</a:t>
+            </a:r>
+          </a:p>
+          <a:p>
+            <a:pPr>
+              <a:spcAft>
+                <a:spcPts val="600"/>
+              </a:spcAft>
+            </a:pPr>
+            <a:r>
+              <a:rPr sz="1350" b="0">
+                <a:solidFill>
+                  <a:srgbClr val="0B2B52"/>
+                </a:solidFill>
+              </a:rPr>
+              <a:t/>
+            </a:r>
+          </a:p>
+          <a:p>
+            <a:pPr>
+              <a:spcAft>
+                <a:spcPts val="600"/>
+              </a:spcAft>
+            </a:pPr>
+            <a:r>
+              <a:rPr sz="1350" b="0">
+                <a:solidFill>
+                  <a:srgbClr val="0B2B52"/>
+                </a:solidFill>
+              </a:rPr>
+              <a:t>rank vs decoys (chance 2.50)  2.00 / 1.91        1.86 / 1.91        1.77 / 1.73</a:t>
+            </a:r>
+          </a:p>
+          <a:p>
+            <a:pPr>
+              <a:spcAft>
+                <a:spcPts val="600"/>
+              </a:spcAft>
+            </a:pPr>
+            <a:r>
+              <a:rPr sz="1350" b="0">
+                <a:solidFill>
+                  <a:srgbClr val="0B2B52"/>
+                </a:solidFill>
+              </a:rPr>
+              <a:t/>
+            </a:r>
+          </a:p>
+          <a:p>
+            <a:pPr>
+              <a:spcAft>
+                <a:spcPts val="600"/>
+              </a:spcAft>
+            </a:pPr>
+            <a:r>
+              <a:rPr sz="1350" b="0">
+                <a:solidFill>
+                  <a:srgbClr val="0B2B52"/>
+                </a:solidFill>
+              </a:rPr>
+              <a:t>DeCAF vs Boltz-1 — same base, device, step count — gives 5–6× larger effects. On DeCAF, interface pLDDT and receptor side CLEAR Bonferroni: receptor specificity is established for the first time in this work.</a:t>
+            </a:r>
+          </a:p>
+        </p:txBody>
+      </p:sp>
+      <p:sp>
+        <p:nvSpPr>
+          <p:cNvPr id="9" name="Rounded Rectangle 8"/>
+          <p:cNvSpPr/>
+          <p:nvPr/>
+        </p:nvSpPr>
+        <p:spPr>
+          <a:xfrm>
+            <a:off x="548640" y="5486400"/>
+            <a:ext cx="11155680" cy="868680"/>
+          </a:xfrm>
+          <a:prstGeom prst="roundRect">
+            <a:avLst/>
+          </a:prstGeom>
+          <a:solidFill>
+            <a:srgbClr val="FDF3E0"/>
+          </a:solidFill>
+          <a:ln>
+            <a:noFill/>
+          </a:ln>
+        </p:spPr>
+        <p:style>
+          <a:lnRef idx="1">
+            <a:schemeClr val="accent1"/>
+          </a:lnRef>
+          <a:fillRef idx="3">
+            <a:schemeClr val="accent1"/>
+          </a:fillRef>
+          <a:effectRef idx="2">
+            <a:schemeClr val="accent1"/>
+          </a:effectRef>
+          <a:fontRef idx="minor">
+            <a:schemeClr val="lt1"/>
+          </a:fontRef>
+        </p:style>
+        <p:txBody>
+          <a:bodyPr rtlCol="0" anchor="ctr" wrap="square"/>
+          <a:lstStyle/>
+          <a:p>
+            <a:pPr algn="ctr">
+              <a:spcAft>
+                <a:spcPts val="600"/>
+              </a:spcAft>
+            </a:pPr>
+            <a:r>
+              <a:rPr sz="1250" b="0">
+                <a:solidFill>
+                  <a:srgbClr val="8A5200"/>
+                </a:solidFill>
+              </a:rPr>
+              <a:t>⚠  Two claims weaken. Stock models are NOT signal-free — Boltz-1 separates on ipTM (p=0.0043). And slide 19's interface-pLDDT result is MODEL-DEPENDENT: strong on Boltz-2 and DeCAF, not significant on Boltz-1 (p=0.067). 'Settings explain the negatives' is too simple.</a:t>
+            </a:r>
+          </a:p>
+        </p:txBody>
+      </p:sp>
+    </p:spTree>
+  </p:cSld>
+  <p:clrMapOvr>
+    <a:masterClrMapping/>
+  </p:clrMapOvr>
+</p:sld>
+</file>
+
+<file path=ppt/slides/slide26.xml><?xml version="1.0" encoding="utf-8"?>
+<p:sld xmlns:a="http://schemas.openxmlformats.org/drawingml/2006/main" xmlns:p="http://schemas.openxmlformats.org/presentationml/2006/main" xmlns:r="http://schemas.openxmlformats.org/officeDocument/2006/relationships">
+  <p:cSld>
+    <p:spTree>
+      <p:nvGrpSpPr>
+        <p:cNvPr id="1" name=""/>
+        <p:cNvGrpSpPr/>
+        <p:nvPr/>
+      </p:nvGrpSpPr>
+      <p:grpSpPr/>
+      <p:sp>
+        <p:nvSpPr>
+          <p:cNvPr id="2" name="Rectangle 1"/>
+          <p:cNvSpPr/>
+          <p:nvPr/>
+        </p:nvSpPr>
+        <p:spPr>
+          <a:xfrm>
+            <a:off x="0" y="0"/>
+            <a:ext cx="12188952" cy="914400"/>
+          </a:xfrm>
+          <a:prstGeom prst="rect">
+            <a:avLst/>
+          </a:prstGeom>
+          <a:solidFill>
+            <a:srgbClr val="0B2B52"/>
+          </a:solidFill>
+          <a:ln>
+            <a:noFill/>
+          </a:ln>
+        </p:spPr>
+        <p:style>
+          <a:lnRef idx="1">
+            <a:schemeClr val="accent1"/>
+          </a:lnRef>
+          <a:fillRef idx="3">
+            <a:schemeClr val="accent1"/>
+          </a:fillRef>
+          <a:effectRef idx="2">
+            <a:schemeClr val="accent1"/>
+          </a:effectRef>
+          <a:fontRef idx="minor">
+            <a:schemeClr val="lt1"/>
+          </a:fontRef>
+        </p:style>
+        <p:txBody>
+          <a:bodyPr rtlCol="0" anchor="ctr"/>
+          <a:lstStyle/>
+          <a:p>
+            <a:pPr algn="ctr"/>
+          </a:p>
+        </p:txBody>
+      </p:sp>
+      <p:sp>
+        <p:nvSpPr>
+          <p:cNvPr id="3" name="Rectangle 2"/>
+          <p:cNvSpPr/>
+          <p:nvPr/>
+        </p:nvSpPr>
+        <p:spPr>
+          <a:xfrm>
+            <a:off x="0" y="914400"/>
+            <a:ext cx="12188952" cy="54864"/>
+          </a:xfrm>
+          <a:prstGeom prst="rect">
+            <a:avLst/>
+          </a:prstGeom>
+          <a:solidFill>
+            <a:srgbClr val="1E6FB8"/>
+          </a:solidFill>
+          <a:ln>
+            <a:noFill/>
+          </a:ln>
+        </p:spPr>
+        <p:style>
+          <a:lnRef idx="1">
+            <a:schemeClr val="accent1"/>
+          </a:lnRef>
+          <a:fillRef idx="3">
+            <a:schemeClr val="accent1"/>
+          </a:fillRef>
+          <a:effectRef idx="2">
+            <a:schemeClr val="accent1"/>
+          </a:effectRef>
+          <a:fontRef idx="minor">
+            <a:schemeClr val="lt1"/>
+          </a:fontRef>
+        </p:style>
+        <p:txBody>
+          <a:bodyPr rtlCol="0" anchor="ctr"/>
+          <a:lstStyle/>
+          <a:p>
+            <a:pPr algn="ctr"/>
+          </a:p>
+        </p:txBody>
+      </p:sp>
+      <p:sp>
+        <p:nvSpPr>
+          <p:cNvPr id="4" name="TextBox 3"/>
+          <p:cNvSpPr txBox="1"/>
+          <p:nvPr/>
+        </p:nvSpPr>
+        <p:spPr>
+          <a:xfrm>
+            <a:off x="502920" y="109728"/>
+            <a:ext cx="11155680" cy="777240"/>
+          </a:xfrm>
+          <a:prstGeom prst="rect">
+            <a:avLst/>
+          </a:prstGeom>
+          <a:noFill/>
+        </p:spPr>
+        <p:txBody>
+          <a:bodyPr wrap="square">
+            <a:spAutoFit/>
+          </a:bodyPr>
+          <a:lstStyle/>
+          <a:p>
+            <a:pPr>
+              <a:spcAft>
+                <a:spcPts val="600"/>
+              </a:spcAft>
+            </a:pPr>
+            <a:r>
+              <a:rPr sz="2600" b="1">
+                <a:solidFill>
+                  <a:srgbClr val="FFFFFF"/>
+                </a:solidFill>
+              </a:rPr>
+              <a:t>Three Arms — What Few-Step Training Buys</a:t>
+            </a:r>
+          </a:p>
+        </p:txBody>
+      </p:sp>
+      <p:sp>
+        <p:nvSpPr>
+          <p:cNvPr id="5" name="TextBox 4"/>
+          <p:cNvSpPr txBox="1"/>
+          <p:nvPr/>
+        </p:nvSpPr>
+        <p:spPr>
+          <a:xfrm>
+            <a:off x="502920" y="6473952"/>
+            <a:ext cx="8229600" cy="274320"/>
+          </a:xfrm>
+          <a:prstGeom prst="rect">
+            <a:avLst/>
+          </a:prstGeom>
+          <a:noFill/>
+        </p:spPr>
+        <p:txBody>
+          <a:bodyPr wrap="square">
+            <a:spAutoFit/>
+          </a:bodyPr>
+          <a:lstStyle/>
+          <a:p>
+            <a:pPr>
+              <a:spcAft>
+                <a:spcPts val="600"/>
+              </a:spcAft>
+            </a:pPr>
+            <a:r>
+              <a:rPr sz="900" b="0">
+                <a:solidFill>
+                  <a:srgbClr val="555555"/>
+                </a:solidFill>
+              </a:rPr>
+              <a:t>Boltz-Fast · Final Dissertation Report · Akik Jana (2024AB05287)</a:t>
+            </a:r>
+          </a:p>
+        </p:txBody>
+      </p:sp>
+      <p:sp>
+        <p:nvSpPr>
+          <p:cNvPr id="6" name="TextBox 5"/>
+          <p:cNvSpPr txBox="1"/>
+          <p:nvPr/>
+        </p:nvSpPr>
+        <p:spPr>
+          <a:xfrm>
+            <a:off x="11183112" y="6473952"/>
+            <a:ext cx="640080" cy="274320"/>
+          </a:xfrm>
+          <a:prstGeom prst="rect">
+            <a:avLst/>
+          </a:prstGeom>
+          <a:noFill/>
+        </p:spPr>
+        <p:txBody>
+          <a:bodyPr wrap="square">
+            <a:spAutoFit/>
+          </a:bodyPr>
+          <a:lstStyle/>
+          <a:p>
+            <a:pPr>
+              <a:spcAft>
+                <a:spcPts val="600"/>
+              </a:spcAft>
+            </a:pPr>
+            <a:r>
+              <a:rPr sz="1000" b="0">
+                <a:solidFill>
+                  <a:srgbClr val="555555"/>
+                </a:solidFill>
+              </a:rPr>
+              <a:t>23</a:t>
+            </a:r>
+          </a:p>
+        </p:txBody>
+      </p:sp>
+      <p:pic>
+        <p:nvPicPr>
+          <p:cNvPr id="7" name="Picture 6" descr="fig_few_step_arms.png"/>
+          <p:cNvPicPr>
+            <a:picLocks noChangeAspect="1"/>
+          </p:cNvPicPr>
+          <p:nvPr/>
+        </p:nvPicPr>
+        <p:blipFill>
+          <a:blip r:embed="rId2"/>
+          <a:stretch>
+            <a:fillRect/>
+          </a:stretch>
+        </p:blipFill>
+        <p:spPr>
+          <a:xfrm>
+            <a:off x="1691640" y="1207008"/>
+            <a:ext cx="8778240" cy="4626370"/>
+          </a:xfrm>
+          <a:prstGeom prst="rect">
+            <a:avLst/>
+          </a:prstGeom>
+        </p:spPr>
+      </p:pic>
+      <p:sp>
+        <p:nvSpPr>
+          <p:cNvPr id="8" name="Rounded Rectangle 7"/>
+          <p:cNvSpPr/>
+          <p:nvPr/>
+        </p:nvSpPr>
+        <p:spPr>
+          <a:xfrm>
+            <a:off x="548640" y="5532120"/>
+            <a:ext cx="11155680" cy="777240"/>
+          </a:xfrm>
+          <a:prstGeom prst="roundRect">
+            <a:avLst/>
+          </a:prstGeom>
+          <a:solidFill>
+            <a:srgbClr val="FDF3E0"/>
+          </a:solidFill>
+          <a:ln>
+            <a:noFill/>
+          </a:ln>
+        </p:spPr>
+        <p:style>
+          <a:lnRef idx="1">
+            <a:schemeClr val="accent1"/>
+          </a:lnRef>
+          <a:fillRef idx="3">
+            <a:schemeClr val="accent1"/>
+          </a:fillRef>
+          <a:effectRef idx="2">
+            <a:schemeClr val="accent1"/>
+          </a:effectRef>
+          <a:fontRef idx="minor">
+            <a:schemeClr val="lt1"/>
+          </a:fontRef>
+        </p:style>
+        <p:txBody>
+          <a:bodyPr rtlCol="0" anchor="ctr" wrap="square"/>
+          <a:lstStyle/>
+          <a:p>
+            <a:pPr algn="ctr">
+              <a:spcAft>
+                <a:spcPts val="600"/>
+              </a:spcAft>
+            </a:pPr>
+            <a:r>
+              <a:rPr sz="1250" b="0">
+                <a:solidFill>
+                  <a:srgbClr val="8A5200"/>
+                </a:solidFill>
+              </a:rPr>
+              <a:t>Effects normalised by the run-to-run noise of Section 7.5 so metrics on different scales compare. DeCAF vs Boltz-1 isolates few-step training; the Boltz-2 arm ran on CPU, the others on MPS.</a:t>
             </a:r>
           </a:p>
         </p:txBody>

--- a/final_dissertation_presentation.pptx
+++ b/final_dissertation_presentation.pptx
@@ -29,6 +29,10 @@
     <p:sldId id="279" r:id="rId30"/>
     <p:sldId id="280" r:id="rId31"/>
     <p:sldId id="281" r:id="rId32"/>
+    <p:sldId id="282" r:id="rId33"/>
+    <p:sldId id="283" r:id="rId34"/>
+    <p:sldId id="284" r:id="rId35"/>
+    <p:sldId id="285" r:id="rId36"/>
     <p:sldId id="267" r:id="rId18"/>
     <p:sldId id="268" r:id="rId19"/>
   </p:sldIdLst>
@@ -3611,10 +3615,10 @@
             <a:r>
               <a:rPr sz="1000" b="0">
                 <a:solidFill>
-                  <a:srgbClr val="555555"/>
-                </a:solidFill>
-              </a:rPr>
-              <a:t>9</a:t>
+                  <a:srgbClr val="0B2B52"/>
+                </a:solidFill>
+              </a:rPr>
+              <a:t>10</a:t>
             </a:r>
           </a:p>
         </p:txBody>
@@ -4408,10 +4412,10 @@
             <a:r>
               <a:rPr sz="1000" b="0">
                 <a:solidFill>
-                  <a:srgbClr val="555555"/>
-                </a:solidFill>
-              </a:rPr>
-              <a:t>10</a:t>
+                  <a:srgbClr val="0B2B52"/>
+                </a:solidFill>
+              </a:rPr>
+              <a:t>11</a:t>
             </a:r>
           </a:p>
         </p:txBody>
@@ -4689,7 +4693,7 @@
                   <a:srgbClr val="FFFFFF"/>
                 </a:solidFill>
               </a:rPr>
-              <a:t>Measured — Low-Rank OPM on Pretrained Weights</a:t>
+              <a:t>Results at a Glance</a:t>
             </a:r>
           </a:p>
         </p:txBody>
@@ -4762,7 +4766,7 @@
             <a:r>
               <a:rPr sz="1000" b="0">
                 <a:solidFill>
-                  <a:srgbClr val="555555"/>
+                  <a:srgbClr val="0B2B52"/>
                 </a:solidFill>
               </a:rPr>
               <a:t>12</a:t>
@@ -4778,14 +4782,14 @@
         </p:nvSpPr>
         <p:spPr>
           <a:xfrm>
-            <a:off x="548640" y="1298448"/>
-            <a:ext cx="11155680" cy="960120"/>
+            <a:off x="548640" y="1234440"/>
+            <a:ext cx="2651760" cy="1417320"/>
           </a:xfrm>
           <a:prstGeom prst="roundRect">
             <a:avLst/>
           </a:prstGeom>
           <a:solidFill>
-            <a:srgbClr val="0B2B52"/>
+            <a:srgbClr val="2E7D32"/>
           </a:solidFill>
           <a:ln>
             <a:noFill/>
@@ -4809,32 +4813,481 @@
           <a:bodyPr rtlCol="0" anchor="ctr" wrap="square"/>
           <a:lstStyle/>
           <a:p>
-            <a:pPr algn="ctr">
-              <a:spcAft>
-                <a:spcPts val="600"/>
-              </a:spcAft>
-            </a:pPr>
-            <a:r>
-              <a:rPr sz="1700" b="1">
+            <a:pPr algn="ctr"/>
+            <a:r>
+              <a:rPr sz="2100" b="1">
                 <a:solidFill>
                   <a:srgbClr val="FFFFFF"/>
                 </a:solidFill>
               </a:rPr>
-              <a:t>The ~97% activation saving is not reachable on released checkpoints. The reason is capacity, not optimisation or data.</a:t>
-            </a:r>
-          </a:p>
-        </p:txBody>
-      </p:sp>
-      <p:sp>
-        <p:nvSpPr>
-          <p:cNvPr id="8" name="TextBox 7"/>
+              <a:t>99 / 100%</a:t>
+            </a:r>
+          </a:p>
+          <a:p>
+            <a:pPr algn="ctr"/>
+            <a:r>
+              <a:rPr sz="1000">
+                <a:solidFill>
+                  <a:srgbClr val="FFFFFF"/>
+                </a:solidFill>
+              </a:rPr>
+              <a:t>tests passing
+under pytest in CI</a:t>
+            </a:r>
+          </a:p>
+        </p:txBody>
+      </p:sp>
+      <p:sp>
+        <p:nvSpPr>
+          <p:cNvPr id="8" name="Rounded Rectangle 7"/>
+          <p:cNvSpPr/>
+          <p:nvPr/>
+        </p:nvSpPr>
+        <p:spPr>
+          <a:xfrm>
+            <a:off x="3383280" y="1234440"/>
+            <a:ext cx="2651760" cy="1417320"/>
+          </a:xfrm>
+          <a:prstGeom prst="roundRect">
+            <a:avLst/>
+          </a:prstGeom>
+          <a:solidFill>
+            <a:srgbClr val="1E6FB8"/>
+          </a:solidFill>
+          <a:ln>
+            <a:noFill/>
+          </a:ln>
+        </p:spPr>
+        <p:style>
+          <a:lnRef idx="1">
+            <a:schemeClr val="accent1"/>
+          </a:lnRef>
+          <a:fillRef idx="3">
+            <a:schemeClr val="accent1"/>
+          </a:fillRef>
+          <a:effectRef idx="2">
+            <a:schemeClr val="accent1"/>
+          </a:effectRef>
+          <a:fontRef idx="minor">
+            <a:schemeClr val="lt1"/>
+          </a:fontRef>
+        </p:style>
+        <p:txBody>
+          <a:bodyPr rtlCol="0" anchor="ctr" wrap="square"/>
+          <a:lstStyle/>
+          <a:p>
+            <a:pPr algn="ctr"/>
+            <a:r>
+              <a:rPr sz="2100" b="1">
+                <a:solidFill>
+                  <a:srgbClr val="FFFFFF"/>
+                </a:solidFill>
+              </a:rPr>
+              <a:t>87.5%</a:t>
+            </a:r>
+          </a:p>
+          <a:p>
+            <a:pPr algn="ctr"/>
+            <a:r>
+              <a:rPr sz="1000">
+                <a:solidFill>
+                  <a:srgbClr val="FFFFFF"/>
+                </a:solidFill>
+              </a:rPr>
+              <a:t>MLA KV-cache
+reduction (measured)</a:t>
+            </a:r>
+          </a:p>
+        </p:txBody>
+      </p:sp>
+      <p:sp>
+        <p:nvSpPr>
+          <p:cNvPr id="9" name="Rounded Rectangle 8"/>
+          <p:cNvSpPr/>
+          <p:nvPr/>
+        </p:nvSpPr>
+        <p:spPr>
+          <a:xfrm>
+            <a:off x="6217920" y="1234440"/>
+            <a:ext cx="2651760" cy="1417320"/>
+          </a:xfrm>
+          <a:prstGeom prst="roundRect">
+            <a:avLst/>
+          </a:prstGeom>
+          <a:solidFill>
+            <a:srgbClr val="1E6FB8"/>
+          </a:solidFill>
+          <a:ln>
+            <a:noFill/>
+          </a:ln>
+        </p:spPr>
+        <p:style>
+          <a:lnRef idx="1">
+            <a:schemeClr val="accent1"/>
+          </a:lnRef>
+          <a:fillRef idx="3">
+            <a:schemeClr val="accent1"/>
+          </a:fillRef>
+          <a:effectRef idx="2">
+            <a:schemeClr val="accent1"/>
+          </a:effectRef>
+          <a:fontRef idx="minor">
+            <a:schemeClr val="lt1"/>
+          </a:fontRef>
+        </p:style>
+        <p:txBody>
+          <a:bodyPr rtlCol="0" anchor="ctr" wrap="square"/>
+          <a:lstStyle/>
+          <a:p>
+            <a:pPr algn="ctr"/>
+            <a:r>
+              <a:rPr sz="2100" b="1">
+                <a:solidFill>
+                  <a:srgbClr val="FFFFFF"/>
+                </a:solidFill>
+              </a:rPr>
+              <a:t>1502×</a:t>
+            </a:r>
+          </a:p>
+          <a:p>
+            <a:pPr algn="ctr"/>
+            <a:r>
+              <a:rPr sz="1000">
+                <a:solidFill>
+                  <a:srgbClr val="FFFFFF"/>
+                </a:solidFill>
+              </a:rPr>
+              <a:t>activation saving
+(trained low-rank only)</a:t>
+            </a:r>
+          </a:p>
+        </p:txBody>
+      </p:sp>
+      <p:sp>
+        <p:nvSpPr>
+          <p:cNvPr id="10" name="Rounded Rectangle 9"/>
+          <p:cNvSpPr/>
+          <p:nvPr/>
+        </p:nvSpPr>
+        <p:spPr>
+          <a:xfrm>
+            <a:off x="9052560" y="1234440"/>
+            <a:ext cx="2651760" cy="1417320"/>
+          </a:xfrm>
+          <a:prstGeom prst="roundRect">
+            <a:avLst/>
+          </a:prstGeom>
+          <a:solidFill>
+            <a:srgbClr val="2E7D32"/>
+          </a:solidFill>
+          <a:ln>
+            <a:noFill/>
+          </a:ln>
+        </p:spPr>
+        <p:style>
+          <a:lnRef idx="1">
+            <a:schemeClr val="accent1"/>
+          </a:lnRef>
+          <a:fillRef idx="3">
+            <a:schemeClr val="accent1"/>
+          </a:fillRef>
+          <a:effectRef idx="2">
+            <a:schemeClr val="accent1"/>
+          </a:effectRef>
+          <a:fontRef idx="minor">
+            <a:schemeClr val="lt1"/>
+          </a:fontRef>
+        </p:style>
+        <p:txBody>
+          <a:bodyPr rtlCol="0" anchor="ctr" wrap="square"/>
+          <a:lstStyle/>
+          <a:p>
+            <a:pPr algn="ctr"/>
+            <a:r>
+              <a:rPr sz="2100" b="1">
+                <a:solidFill>
+                  <a:srgbClr val="FFFFFF"/>
+                </a:solidFill>
+              </a:rPr>
+              <a:t>8.6×</a:t>
+            </a:r>
+          </a:p>
+          <a:p>
+            <a:pPr algn="ctr"/>
+            <a:r>
+              <a:rPr sz="1000">
+                <a:solidFill>
+                  <a:srgbClr val="FFFFFF"/>
+                </a:solidFill>
+              </a:rPr>
+              <a:t>interface pLDDT vs ipTM
+effect-to-noise</a:t>
+            </a:r>
+          </a:p>
+        </p:txBody>
+      </p:sp>
+      <p:sp>
+        <p:nvSpPr>
+          <p:cNvPr id="11" name="Rounded Rectangle 10"/>
+          <p:cNvSpPr/>
+          <p:nvPr/>
+        </p:nvSpPr>
+        <p:spPr>
+          <a:xfrm>
+            <a:off x="548640" y="2834640"/>
+            <a:ext cx="2651760" cy="1417320"/>
+          </a:xfrm>
+          <a:prstGeom prst="roundRect">
+            <a:avLst/>
+          </a:prstGeom>
+          <a:solidFill>
+            <a:srgbClr val="C62828"/>
+          </a:solidFill>
+          <a:ln>
+            <a:noFill/>
+          </a:ln>
+        </p:spPr>
+        <p:style>
+          <a:lnRef idx="1">
+            <a:schemeClr val="accent1"/>
+          </a:lnRef>
+          <a:fillRef idx="3">
+            <a:schemeClr val="accent1"/>
+          </a:fillRef>
+          <a:effectRef idx="2">
+            <a:schemeClr val="accent1"/>
+          </a:effectRef>
+          <a:fontRef idx="minor">
+            <a:schemeClr val="lt1"/>
+          </a:fontRef>
+        </p:style>
+        <p:txBody>
+          <a:bodyPr rtlCol="0" anchor="ctr" wrap="square"/>
+          <a:lstStyle/>
+          <a:p>
+            <a:pPr algn="ctr"/>
+            <a:r>
+              <a:rPr sz="2100" b="1">
+                <a:solidFill>
+                  <a:srgbClr val="FFFFFF"/>
+                </a:solidFill>
+              </a:rPr>
+              <a:t>0.378</a:t>
+            </a:r>
+          </a:p>
+          <a:p>
+            <a:pPr algn="ctr"/>
+            <a:r>
+              <a:rPr sz="1000">
+                <a:solidFill>
+                  <a:srgbClr val="FFFFFF"/>
+                </a:solidFill>
+              </a:rPr>
+              <a:t>OPM held-out error
+at rank 32 (at capacity)</a:t>
+            </a:r>
+          </a:p>
+        </p:txBody>
+      </p:sp>
+      <p:sp>
+        <p:nvSpPr>
+          <p:cNvPr id="12" name="Rounded Rectangle 11"/>
+          <p:cNvSpPr/>
+          <p:nvPr/>
+        </p:nvSpPr>
+        <p:spPr>
+          <a:xfrm>
+            <a:off x="3383280" y="2834640"/>
+            <a:ext cx="2651760" cy="1417320"/>
+          </a:xfrm>
+          <a:prstGeom prst="roundRect">
+            <a:avLst/>
+          </a:prstGeom>
+          <a:solidFill>
+            <a:srgbClr val="0E8F9A"/>
+          </a:solidFill>
+          <a:ln>
+            <a:noFill/>
+          </a:ln>
+        </p:spPr>
+        <p:style>
+          <a:lnRef idx="1">
+            <a:schemeClr val="accent1"/>
+          </a:lnRef>
+          <a:fillRef idx="3">
+            <a:schemeClr val="accent1"/>
+          </a:fillRef>
+          <a:effectRef idx="2">
+            <a:schemeClr val="accent1"/>
+          </a:effectRef>
+          <a:fontRef idx="minor">
+            <a:schemeClr val="lt1"/>
+          </a:fontRef>
+        </p:style>
+        <p:txBody>
+          <a:bodyPr rtlCol="0" anchor="ctr" wrap="square"/>
+          <a:lstStyle/>
+          <a:p>
+            <a:pPr algn="ctr"/>
+            <a:r>
+              <a:rPr sz="2100" b="1">
+                <a:solidFill>
+                  <a:srgbClr val="FFFFFF"/>
+                </a:solidFill>
+              </a:rPr>
+              <a:t>22 / 132</a:t>
+            </a:r>
+          </a:p>
+          <a:p>
+            <a:pPr algn="ctr"/>
+            <a:r>
+              <a:rPr sz="1000">
+                <a:solidFill>
+                  <a:srgbClr val="FFFFFF"/>
+                </a:solidFill>
+              </a:rPr>
+              <a:t>receptors / complexes
+PTM-clean panel</a:t>
+            </a:r>
+          </a:p>
+        </p:txBody>
+      </p:sp>
+      <p:sp>
+        <p:nvSpPr>
+          <p:cNvPr id="13" name="Rounded Rectangle 12"/>
+          <p:cNvSpPr/>
+          <p:nvPr/>
+        </p:nvSpPr>
+        <p:spPr>
+          <a:xfrm>
+            <a:off x="6217920" y="2834640"/>
+            <a:ext cx="2651760" cy="1417320"/>
+          </a:xfrm>
+          <a:prstGeom prst="roundRect">
+            <a:avLst/>
+          </a:prstGeom>
+          <a:solidFill>
+            <a:srgbClr val="C62828"/>
+          </a:solidFill>
+          <a:ln>
+            <a:noFill/>
+          </a:ln>
+        </p:spPr>
+        <p:style>
+          <a:lnRef idx="1">
+            <a:schemeClr val="accent1"/>
+          </a:lnRef>
+          <a:fillRef idx="3">
+            <a:schemeClr val="accent1"/>
+          </a:fillRef>
+          <a:effectRef idx="2">
+            <a:schemeClr val="accent1"/>
+          </a:effectRef>
+          <a:fontRef idx="minor">
+            <a:schemeClr val="lt1"/>
+          </a:fontRef>
+        </p:style>
+        <p:txBody>
+          <a:bodyPr rtlCol="0" anchor="ctr" wrap="square"/>
+          <a:lstStyle/>
+          <a:p>
+            <a:pPr algn="ctr"/>
+            <a:r>
+              <a:rPr sz="2100" b="1">
+                <a:solidFill>
+                  <a:srgbClr val="FFFFFF"/>
+                </a:solidFill>
+              </a:rPr>
+              <a:t>0.0628</a:t>
+            </a:r>
+          </a:p>
+          <a:p>
+            <a:pPr algn="ctr"/>
+            <a:r>
+              <a:rPr sz="1000">
+                <a:solidFill>
+                  <a:srgbClr val="FFFFFF"/>
+                </a:solidFill>
+              </a:rPr>
+              <a:t>ipTM run-to-run SD
+(24 × 4 replicates)</a:t>
+            </a:r>
+          </a:p>
+        </p:txBody>
+      </p:sp>
+      <p:sp>
+        <p:nvSpPr>
+          <p:cNvPr id="14" name="Rounded Rectangle 13"/>
+          <p:cNvSpPr/>
+          <p:nvPr/>
+        </p:nvSpPr>
+        <p:spPr>
+          <a:xfrm>
+            <a:off x="9052560" y="2834640"/>
+            <a:ext cx="2651760" cy="1417320"/>
+          </a:xfrm>
+          <a:prstGeom prst="roundRect">
+            <a:avLst/>
+          </a:prstGeom>
+          <a:solidFill>
+            <a:srgbClr val="2E7D32"/>
+          </a:solidFill>
+          <a:ln>
+            <a:noFill/>
+          </a:ln>
+        </p:spPr>
+        <p:style>
+          <a:lnRef idx="1">
+            <a:schemeClr val="accent1"/>
+          </a:lnRef>
+          <a:fillRef idx="3">
+            <a:schemeClr val="accent1"/>
+          </a:fillRef>
+          <a:effectRef idx="2">
+            <a:schemeClr val="accent1"/>
+          </a:effectRef>
+          <a:fontRef idx="minor">
+            <a:schemeClr val="lt1"/>
+          </a:fontRef>
+        </p:style>
+        <p:txBody>
+          <a:bodyPr rtlCol="0" anchor="ctr" wrap="square"/>
+          <a:lstStyle/>
+          <a:p>
+            <a:pPr algn="ctr"/>
+            <a:r>
+              <a:rPr sz="2100" b="1">
+                <a:solidFill>
+                  <a:srgbClr val="FFFFFF"/>
+                </a:solidFill>
+              </a:rPr>
+              <a:t>1.73</a:t>
+            </a:r>
+          </a:p>
+          <a:p>
+            <a:pPr algn="ctr"/>
+            <a:r>
+              <a:rPr sz="1000">
+                <a:solidFill>
+                  <a:srgbClr val="FFFFFF"/>
+                </a:solidFill>
+              </a:rPr>
+              <a:t>cognate rank on DeCAF
+(chance 2.50, p = 0.004)</a:t>
+            </a:r>
+          </a:p>
+        </p:txBody>
+      </p:sp>
+      <p:sp>
+        <p:nvSpPr>
+          <p:cNvPr id="15" name="TextBox 14"/>
           <p:cNvSpPr txBox="1"/>
           <p:nvPr/>
         </p:nvSpPr>
         <p:spPr>
           <a:xfrm>
-            <a:off x="548640" y="2468880"/>
-            <a:ext cx="11155680" cy="2651760"/>
+            <a:off x="548640" y="4480560"/>
+            <a:ext cx="11155680" cy="1005840"/>
           </a:xfrm>
           <a:prstGeom prst="rect">
             <a:avLst/>
@@ -4853,101 +5306,41 @@
               </a:spcAft>
             </a:pPr>
             <a:r>
-              <a:rPr sz="1500" b="0">
+              <a:rPr sz="1400" b="0">
                 <a:solidFill>
                   <a:srgbClr val="0B2B52"/>
                 </a:solidFill>
               </a:rPr>
-              <a:t>Three experiments, each stricter — held-out error at rank 32:</a:t>
-            </a:r>
-          </a:p>
-          <a:p>
-            <a:pPr>
-              <a:spcAft>
-                <a:spcPts val="600"/>
-              </a:spcAft>
-            </a:pPr>
-            <a:r>
-              <a:rPr sz="1500" b="0">
+              <a:t>Top row — engineering delivered.  Bottom row — measurement outcomes, which are what redirected the project:</a:t>
+            </a:r>
+          </a:p>
+          <a:p>
+            <a:pPr>
+              <a:spcAft>
+                <a:spcPts val="600"/>
+              </a:spcAft>
+            </a:pPr>
+            <a:r>
+              <a:rPr sz="1400" b="0">
                 <a:solidFill>
                   <a:srgbClr val="0B2B52"/>
                 </a:solidFill>
               </a:rPr>
-              <a:t>•  CP projection of weights (random inputs) ....................  0.77</a:t>
-            </a:r>
-          </a:p>
-          <a:p>
-            <a:pPr>
-              <a:spcAft>
-                <a:spcPts val="600"/>
-              </a:spcAft>
-            </a:pPr>
-            <a:r>
-              <a:rPr sz="1500" b="0">
-                <a:solidFill>
-                  <a:srgbClr val="0B2B52"/>
-                </a:solidFill>
-              </a:rPr>
-              <a:t>•  Fit on one target's activations (one protein) ...............  0.43</a:t>
-            </a:r>
-          </a:p>
-          <a:p>
-            <a:pPr>
-              <a:spcAft>
-                <a:spcPts val="600"/>
-              </a:spcAft>
-            </a:pPr>
-            <a:r>
-              <a:rPr sz="1500" b="0">
-                <a:solidFill>
-                  <a:srgbClr val="0B2B52"/>
-                </a:solidFill>
-              </a:rPr>
-              <a:t>•  Corpus distillation, 33 folds (at capacity) .................  0.378</a:t>
-            </a:r>
-          </a:p>
-          <a:p>
-            <a:pPr>
-              <a:spcAft>
-                <a:spcPts val="600"/>
-              </a:spcAft>
-            </a:pPr>
-            <a:r>
-              <a:rPr sz="1500" b="0">
-                <a:solidFill>
-                  <a:srgbClr val="0B2B52"/>
-                </a:solidFill>
-              </a:rPr>
-              <a:t/>
-            </a:r>
-          </a:p>
-          <a:p>
-            <a:pPr>
-              <a:spcAft>
-                <a:spcPts val="600"/>
-              </a:spcAft>
-            </a:pPr>
-            <a:r>
-              <a:rPr sz="1500" b="0">
-                <a:solidFill>
-                  <a:srgbClr val="0B2B52"/>
-                </a:solidFill>
-              </a:rPr>
-              <a:t>Train and held-out coincide (0.375 / 0.378) — the signature of a model at capacity, so more folding data cannot lower the floor.</a:t>
-            </a:r>
-          </a:p>
-        </p:txBody>
-      </p:sp>
-      <p:sp>
-        <p:nvSpPr>
-          <p:cNvPr id="9" name="Rounded Rectangle 8"/>
+              <a:t>the low-rank OPM is unreachable on pretrained weights, and ipTM does not rank binders reproducibly on the stock models — but interface pLDDT does (slides 19–20), and a few-step-distilled model does far better (slides 22–23).</a:t>
+            </a:r>
+          </a:p>
+        </p:txBody>
+      </p:sp>
+      <p:sp>
+        <p:nvSpPr>
+          <p:cNvPr id="16" name="Rounded Rectangle 15"/>
           <p:cNvSpPr/>
           <p:nvPr/>
         </p:nvSpPr>
         <p:spPr>
           <a:xfrm>
-            <a:off x="548640" y="5257800"/>
-            <a:ext cx="11155680" cy="868680"/>
+            <a:off x="548640" y="5532120"/>
+            <a:ext cx="11155680" cy="777240"/>
           </a:xfrm>
           <a:prstGeom prst="roundRect">
             <a:avLst/>
@@ -4988,7 +5381,7 @@
                   <a:srgbClr val="8A5200"/>
                 </a:solidFill>
               </a:rPr>
-              <a:t>⚠  Scaling law 1.32·rank^−0.356 puts 10% error at rank ≈1414, against c_hidden² = 1024 — the low-rank form costs MORE activation memory than stock before it is accurate enough to substitute.</a:t>
+              <a:t>⚠  Settings throughout are far below Boltz defaults — 10 sampling steps vs 200, 1 recycling vs 3, MSA depth 32 vs 8192. Slide 22 probes this directly: it attenuates the signal but does not wholly explain the negatives.</a:t>
             </a:r>
           </a:p>
         </p:txBody>
@@ -5130,7 +5523,7 @@
                   <a:srgbClr val="FFFFFF"/>
                 </a:solidFill>
               </a:rPr>
-              <a:t>Measured — Does ipTM Rank Binders?</a:t>
+              <a:t>Measured — Low-Rank OPM on Pretrained Weights</a:t>
             </a:r>
           </a:p>
         </p:txBody>
@@ -5203,10 +5596,10 @@
             <a:r>
               <a:rPr sz="1000" b="0">
                 <a:solidFill>
-                  <a:srgbClr val="555555"/>
-                </a:solidFill>
-              </a:rPr>
-              <a:t>14</a:t>
+                  <a:srgbClr val="0B2B52"/>
+                </a:solidFill>
+              </a:rPr>
+              <a:t>13</a:t>
             </a:r>
           </a:p>
         </p:txBody>
@@ -5220,13 +5613,13 @@
         <p:spPr>
           <a:xfrm>
             <a:off x="548640" y="1298448"/>
-            <a:ext cx="2697480" cy="1463040"/>
+            <a:ext cx="11155680" cy="960120"/>
           </a:xfrm>
           <a:prstGeom prst="roundRect">
             <a:avLst/>
           </a:prstGeom>
           <a:solidFill>
-            <a:srgbClr val="1E6FB8"/>
+            <a:srgbClr val="0B2B52"/>
           </a:solidFill>
           <a:ln>
             <a:noFill/>
@@ -5250,228 +5643,31 @@
           <a:bodyPr rtlCol="0" anchor="ctr" wrap="square"/>
           <a:lstStyle/>
           <a:p>
-            <a:pPr algn="ctr"/>
-            <a:r>
-              <a:rPr sz="2300" b="1">
+            <a:pPr algn="ctr">
+              <a:spcAft>
+                <a:spcPts val="600"/>
+              </a:spcAft>
+            </a:pPr>
+            <a:r>
+              <a:rPr sz="1700" b="1">
                 <a:solidFill>
                   <a:srgbClr val="FFFFFF"/>
                 </a:solidFill>
               </a:rPr>
-              <a:t>22 / 132</a:t>
-            </a:r>
-          </a:p>
-          <a:p>
-            <a:pPr algn="ctr"/>
-            <a:r>
-              <a:rPr sz="1050">
-                <a:solidFill>
-                  <a:srgbClr val="FFFFFF"/>
-                </a:solidFill>
-              </a:rPr>
-              <a:t>receptors / complexes
-PTM-clean panel</a:t>
-            </a:r>
-          </a:p>
-        </p:txBody>
-      </p:sp>
-      <p:sp>
-        <p:nvSpPr>
-          <p:cNvPr id="8" name="Rounded Rectangle 7"/>
-          <p:cNvSpPr/>
-          <p:nvPr/>
-        </p:nvSpPr>
-        <p:spPr>
-          <a:xfrm>
-            <a:off x="3429000" y="1298448"/>
-            <a:ext cx="2697480" cy="1463040"/>
-          </a:xfrm>
-          <a:prstGeom prst="roundRect">
-            <a:avLst/>
-          </a:prstGeom>
-          <a:solidFill>
-            <a:srgbClr val="0E8F9A"/>
-          </a:solidFill>
-          <a:ln>
-            <a:noFill/>
-          </a:ln>
-        </p:spPr>
-        <p:style>
-          <a:lnRef idx="1">
-            <a:schemeClr val="accent1"/>
-          </a:lnRef>
-          <a:fillRef idx="3">
-            <a:schemeClr val="accent1"/>
-          </a:fillRef>
-          <a:effectRef idx="2">
-            <a:schemeClr val="accent1"/>
-          </a:effectRef>
-          <a:fontRef idx="minor">
-            <a:schemeClr val="lt1"/>
-          </a:fontRef>
-        </p:style>
-        <p:txBody>
-          <a:bodyPr rtlCol="0" anchor="ctr" wrap="square"/>
-          <a:lstStyle/>
-          <a:p>
-            <a:pPr algn="ctr"/>
-            <a:r>
-              <a:rPr sz="2300" b="1">
-                <a:solidFill>
-                  <a:srgbClr val="FFFFFF"/>
-                </a:solidFill>
-              </a:rPr>
-              <a:t>0.5015</a:t>
-            </a:r>
-          </a:p>
-          <a:p>
-            <a:pPr algn="ctr"/>
-            <a:r>
-              <a:rPr sz="1050">
-                <a:solidFill>
-                  <a:srgbClr val="FFFFFF"/>
-                </a:solidFill>
-              </a:rPr>
-              <a:t>cognate
-mean ipTM</a:t>
-            </a:r>
-          </a:p>
-        </p:txBody>
-      </p:sp>
-      <p:sp>
-        <p:nvSpPr>
-          <p:cNvPr id="9" name="Rounded Rectangle 8"/>
-          <p:cNvSpPr/>
-          <p:nvPr/>
-        </p:nvSpPr>
-        <p:spPr>
-          <a:xfrm>
-            <a:off x="6309360" y="1298448"/>
-            <a:ext cx="2697480" cy="1463040"/>
-          </a:xfrm>
-          <a:prstGeom prst="roundRect">
-            <a:avLst/>
-          </a:prstGeom>
-          <a:solidFill>
-            <a:srgbClr val="C62828"/>
-          </a:solidFill>
-          <a:ln>
-            <a:noFill/>
-          </a:ln>
-        </p:spPr>
-        <p:style>
-          <a:lnRef idx="1">
-            <a:schemeClr val="accent1"/>
-          </a:lnRef>
-          <a:fillRef idx="3">
-            <a:schemeClr val="accent1"/>
-          </a:fillRef>
-          <a:effectRef idx="2">
-            <a:schemeClr val="accent1"/>
-          </a:effectRef>
-          <a:fontRef idx="minor">
-            <a:schemeClr val="lt1"/>
-          </a:fontRef>
-        </p:style>
-        <p:txBody>
-          <a:bodyPr rtlCol="0" anchor="ctr" wrap="square"/>
-          <a:lstStyle/>
-          <a:p>
-            <a:pPr algn="ctr"/>
-            <a:r>
-              <a:rPr sz="2300" b="1">
-                <a:solidFill>
-                  <a:srgbClr val="FFFFFF"/>
-                </a:solidFill>
-              </a:rPr>
-              <a:t>0.4888</a:t>
-            </a:r>
-          </a:p>
-          <a:p>
-            <a:pPr algn="ctr"/>
-            <a:r>
-              <a:rPr sz="1050">
-                <a:solidFill>
-                  <a:srgbClr val="FFFFFF"/>
-                </a:solidFill>
-              </a:rPr>
-              <a:t>SCRAMBLED
-mean ipTM</a:t>
-            </a:r>
-          </a:p>
-        </p:txBody>
-      </p:sp>
-      <p:sp>
-        <p:nvSpPr>
-          <p:cNvPr id="10" name="Rounded Rectangle 9"/>
-          <p:cNvSpPr/>
-          <p:nvPr/>
-        </p:nvSpPr>
-        <p:spPr>
-          <a:xfrm>
-            <a:off x="9189720" y="1298448"/>
-            <a:ext cx="2514600" cy="1463040"/>
-          </a:xfrm>
-          <a:prstGeom prst="roundRect">
-            <a:avLst/>
-          </a:prstGeom>
-          <a:solidFill>
-            <a:srgbClr val="2E7D32"/>
-          </a:solidFill>
-          <a:ln>
-            <a:noFill/>
-          </a:ln>
-        </p:spPr>
-        <p:style>
-          <a:lnRef idx="1">
-            <a:schemeClr val="accent1"/>
-          </a:lnRef>
-          <a:fillRef idx="3">
-            <a:schemeClr val="accent1"/>
-          </a:fillRef>
-          <a:effectRef idx="2">
-            <a:schemeClr val="accent1"/>
-          </a:effectRef>
-          <a:fontRef idx="minor">
-            <a:schemeClr val="lt1"/>
-          </a:fontRef>
-        </p:style>
-        <p:txBody>
-          <a:bodyPr rtlCol="0" anchor="ctr" wrap="square"/>
-          <a:lstStyle/>
-          <a:p>
-            <a:pPr algn="ctr"/>
-            <a:r>
-              <a:rPr sz="2300" b="1">
-                <a:solidFill>
-                  <a:srgbClr val="FFFFFF"/>
-                </a:solidFill>
-              </a:rPr>
-              <a:t>0.4317</a:t>
-            </a:r>
-          </a:p>
-          <a:p>
-            <a:pPr algn="ctr"/>
-            <a:r>
-              <a:rPr sz="1050">
-                <a:solidFill>
-                  <a:srgbClr val="FFFFFF"/>
-                </a:solidFill>
-              </a:rPr>
-              <a:t>decoy
-mean ipTM</a:t>
-            </a:r>
-          </a:p>
-        </p:txBody>
-      </p:sp>
-      <p:sp>
-        <p:nvSpPr>
-          <p:cNvPr id="11" name="TextBox 10"/>
+              <a:t>The ~97% activation saving is not reachable on released checkpoints. The reason is capacity, not optimisation or data.</a:t>
+            </a:r>
+          </a:p>
+        </p:txBody>
+      </p:sp>
+      <p:sp>
+        <p:nvSpPr>
+          <p:cNvPr id="8" name="TextBox 7"/>
           <p:cNvSpPr txBox="1"/>
           <p:nvPr/>
         </p:nvSpPr>
         <p:spPr>
           <a:xfrm>
-            <a:off x="548640" y="2971800"/>
+            <a:off x="548640" y="2468880"/>
             <a:ext cx="11155680" cy="2651760"/>
           </a:xfrm>
           <a:prstGeom prst="rect">
@@ -5496,7 +5692,7 @@
                   <a:srgbClr val="0B2B52"/>
                 </a:solidFill>
               </a:rPr>
-              <a:t>A scramble keeps composition and length exactly and destroys only order — and order is what makes a binder a binder.</a:t>
+              <a:t>Three experiments, each stricter — held-out error at rank 32:</a:t>
             </a:r>
           </a:p>
           <a:p>
@@ -5511,7 +5707,7 @@
                   <a:srgbClr val="0B2B52"/>
                 </a:solidFill>
               </a:rPr>
-              <a:t>•  Scrambles outscore genuine binders of other receptors:  AUC 0.632, p = 0.0096  (110 complexes)</a:t>
+              <a:t>•  CP projection of weights (random inputs) ....................  0.77</a:t>
             </a:r>
           </a:p>
           <a:p>
@@ -5526,7 +5722,7 @@
                   <a:srgbClr val="0B2B52"/>
                 </a:solidFill>
               </a:rPr>
-              <a:t>•  Cognate − own scramble:  +0.0128, 95% CI [−0.019, +0.044] — a bound, not a zero</a:t>
+              <a:t>•  Fit on one target's activations (one protein) ...............  0.43</a:t>
             </a:r>
           </a:p>
           <a:p>
@@ -5541,20 +5737,50 @@
                   <a:srgbClr val="0B2B52"/>
                 </a:solidFill>
               </a:rPr>
-              <a:t>•  Not a length artefact: the advantage survives length adjustment (intercept +0.075, p = 0.0001)</a:t>
-            </a:r>
-          </a:p>
-        </p:txBody>
-      </p:sp>
-      <p:sp>
-        <p:nvSpPr>
-          <p:cNvPr id="12" name="Rounded Rectangle 11"/>
+              <a:t>•  Corpus distillation, 33 folds (at capacity) .................  0.378</a:t>
+            </a:r>
+          </a:p>
+          <a:p>
+            <a:pPr>
+              <a:spcAft>
+                <a:spcPts val="600"/>
+              </a:spcAft>
+            </a:pPr>
+            <a:r>
+              <a:rPr sz="1500" b="0">
+                <a:solidFill>
+                  <a:srgbClr val="0B2B52"/>
+                </a:solidFill>
+              </a:rPr>
+              <a:t/>
+            </a:r>
+          </a:p>
+          <a:p>
+            <a:pPr>
+              <a:spcAft>
+                <a:spcPts val="600"/>
+              </a:spcAft>
+            </a:pPr>
+            <a:r>
+              <a:rPr sz="1500" b="0">
+                <a:solidFill>
+                  <a:srgbClr val="0B2B52"/>
+                </a:solidFill>
+              </a:rPr>
+              <a:t>Train and held-out coincide (0.375 / 0.378) — the signature of a model at capacity, so more folding data cannot lower the floor.</a:t>
+            </a:r>
+          </a:p>
+        </p:txBody>
+      </p:sp>
+      <p:sp>
+        <p:nvSpPr>
+          <p:cNvPr id="9" name="Rounded Rectangle 8"/>
           <p:cNvSpPr/>
           <p:nvPr/>
         </p:nvSpPr>
         <p:spPr>
           <a:xfrm>
-            <a:off x="548640" y="5394960"/>
+            <a:off x="548640" y="5257800"/>
             <a:ext cx="11155680" cy="868680"/>
           </a:xfrm>
           <a:prstGeom prst="roundRect">
@@ -5596,7 +5822,7 @@
                   <a:srgbClr val="8A5200"/>
                 </a:solidFill>
               </a:rPr>
-              <a:t>⚠  ipTM responds largely to peptide COMPOSITION. Any sequence-order effect is at most 63% of the composition effect. A ridge regression on composition independently beat the distilled surrogate (+0.103 vs −0.034).</a:t>
+              <a:t>⚠  Scaling law 1.32·rank^−0.356 puts 10% error at rank ≈1414, against c_hidden² = 1024 — the low-rank form costs MORE activation memory than stock before it is accurate enough to substitute.</a:t>
             </a:r>
           </a:p>
         </p:txBody>
@@ -5738,7 +5964,7 @@
                   <a:srgbClr val="FFFFFF"/>
                 </a:solidFill>
               </a:rPr>
-              <a:t>Measured — A Single Fold Does Not Reproduce Itself</a:t>
+              <a:t>Low-Rank OPM — Rank vs Fidelity</a:t>
             </a:r>
           </a:p>
         </p:txBody>
@@ -5811,192 +6037,48 @@
             <a:r>
               <a:rPr sz="1000" b="0">
                 <a:solidFill>
-                  <a:srgbClr val="555555"/>
-                </a:solidFill>
-              </a:rPr>
-              <a:t>16</a:t>
-            </a:r>
-          </a:p>
-        </p:txBody>
-      </p:sp>
-      <p:sp>
-        <p:nvSpPr>
-          <p:cNvPr id="7" name="Rounded Rectangle 6"/>
+                  <a:srgbClr val="0B2B52"/>
+                </a:solidFill>
+              </a:rPr>
+              <a:t>14</a:t>
+            </a:r>
+          </a:p>
+        </p:txBody>
+      </p:sp>
+      <p:pic>
+        <p:nvPicPr>
+          <p:cNvPr id="7" name="Picture 6" descr="fig_opm_rank.png"/>
+          <p:cNvPicPr>
+            <a:picLocks noChangeAspect="1"/>
+          </p:cNvPicPr>
+          <p:nvPr/>
+        </p:nvPicPr>
+        <p:blipFill>
+          <a:blip r:embed="rId2"/>
+          <a:stretch>
+            <a:fillRect/>
+          </a:stretch>
+        </p:blipFill>
+        <p:spPr>
+          <a:xfrm>
+            <a:off x="1691640" y="1207008"/>
+            <a:ext cx="8778240" cy="4744995"/>
+          </a:xfrm>
+          <a:prstGeom prst="rect">
+            <a:avLst/>
+          </a:prstGeom>
+        </p:spPr>
+      </p:pic>
+      <p:sp>
+        <p:nvSpPr>
+          <p:cNvPr id="8" name="Rounded Rectangle 7"/>
           <p:cNvSpPr/>
           <p:nvPr/>
         </p:nvSpPr>
         <p:spPr>
           <a:xfrm>
-            <a:off x="548640" y="1298448"/>
-            <a:ext cx="11155680" cy="960120"/>
-          </a:xfrm>
-          <a:prstGeom prst="roundRect">
-            <a:avLst/>
-          </a:prstGeom>
-          <a:solidFill>
-            <a:srgbClr val="0B2B52"/>
-          </a:solidFill>
-          <a:ln>
-            <a:noFill/>
-          </a:ln>
-        </p:spPr>
-        <p:style>
-          <a:lnRef idx="1">
-            <a:schemeClr val="accent1"/>
-          </a:lnRef>
-          <a:fillRef idx="3">
-            <a:schemeClr val="accent1"/>
-          </a:fillRef>
-          <a:effectRef idx="2">
-            <a:schemeClr val="accent1"/>
-          </a:effectRef>
-          <a:fontRef idx="minor">
-            <a:schemeClr val="lt1"/>
-          </a:fontRef>
-        </p:style>
-        <p:txBody>
-          <a:bodyPr rtlCol="0" anchor="ctr" wrap="square"/>
-          <a:lstStyle/>
-          <a:p>
-            <a:pPr algn="ctr">
-              <a:spcAft>
-                <a:spcPts val="600"/>
-              </a:spcAft>
-            </a:pPr>
-            <a:r>
-              <a:rPr sz="1700" b="1">
-                <a:solidFill>
-                  <a:srgbClr val="FFFFFF"/>
-                </a:solidFill>
-              </a:rPr>
-              <a:t>Boltz's --seed defaults to None. Every benchmark fold was a single unseeded draw from a distribution whose width had never been measured.</a:t>
-            </a:r>
-          </a:p>
-        </p:txBody>
-      </p:sp>
-      <p:sp>
-        <p:nvSpPr>
-          <p:cNvPr id="8" name="TextBox 7"/>
-          <p:cNvSpPr txBox="1"/>
-          <p:nvPr/>
-        </p:nvSpPr>
-        <p:spPr>
-          <a:xfrm>
-            <a:off x="548640" y="2468880"/>
-            <a:ext cx="11155680" cy="2651760"/>
-          </a:xfrm>
-          <a:prstGeom prst="rect">
-            <a:avLst/>
-          </a:prstGeom>
-          <a:noFill/>
-        </p:spPr>
-        <p:txBody>
-          <a:bodyPr wrap="square">
-            <a:spAutoFit/>
-          </a:bodyPr>
-          <a:lstStyle/>
-          <a:p>
-            <a:pPr>
-              <a:spcAft>
-                <a:spcPts val="600"/>
-              </a:spcAft>
-            </a:pPr>
-            <a:r>
-              <a:rPr sz="1500" b="0">
-                <a:solidFill>
-                  <a:srgbClr val="0B2B52"/>
-                </a:solidFill>
-              </a:rPr>
-              <a:t>24 complexes × 4 identical re-runs (96 folds), same settings:</a:t>
-            </a:r>
-          </a:p>
-          <a:p>
-            <a:pPr>
-              <a:spcAft>
-                <a:spcPts val="600"/>
-              </a:spcAft>
-            </a:pPr>
-            <a:r>
-              <a:rPr sz="1500" b="0">
-                <a:solidFill>
-                  <a:srgbClr val="0B2B52"/>
-                </a:solidFill>
-              </a:rPr>
-              <a:t>•  Pooled within-complex ipTM SD  0.0628   (median range 0.127)</a:t>
-            </a:r>
-          </a:p>
-          <a:p>
-            <a:pPr>
-              <a:spcAft>
-                <a:spcPts val="600"/>
-              </a:spcAft>
-            </a:pPr>
-            <a:r>
-              <a:rPr sz="1500" b="0">
-                <a:solidFill>
-                  <a:srgbClr val="0B2B52"/>
-                </a:solidFill>
-              </a:rPr>
-              <a:t>•  Cognate − decoy  +0.0698 = 1.11 × SD    comparable to noise</a:t>
-            </a:r>
-          </a:p>
-          <a:p>
-            <a:pPr>
-              <a:spcAft>
-                <a:spcPts val="600"/>
-              </a:spcAft>
-            </a:pPr>
-            <a:r>
-              <a:rPr sz="1500" b="0">
-                <a:solidFill>
-                  <a:srgbClr val="0B2B52"/>
-                </a:solidFill>
-              </a:rPr>
-              <a:t>•  Per-receptor rank flips for 4 of 4 receptors — 6YOO spans #1 to #4 on identical input</a:t>
-            </a:r>
-          </a:p>
-          <a:p>
-            <a:pPr>
-              <a:spcAft>
-                <a:spcPts val="600"/>
-              </a:spcAft>
-            </a:pPr>
-            <a:r>
-              <a:rPr sz="1500" b="0">
-                <a:solidFill>
-                  <a:srgbClr val="0B2B52"/>
-                </a:solidFill>
-              </a:rPr>
-              <a:t>•  Aggregate survives: mean rank 2.03, 95% range [1.77, 2.27], always below chance …</a:t>
-            </a:r>
-          </a:p>
-          <a:p>
-            <a:pPr>
-              <a:spcAft>
-                <a:spcPts val="600"/>
-              </a:spcAft>
-            </a:pPr>
-            <a:r>
-              <a:rPr sz="1500" b="0">
-                <a:solidFill>
-                  <a:srgbClr val="0B2B52"/>
-                </a:solidFill>
-              </a:rPr>
-              <a:t>•  … but p &lt; 0.05 in only 49% of simulated re-runs (median p = 0.054)</a:t>
-            </a:r>
-          </a:p>
-        </p:txBody>
-      </p:sp>
-      <p:sp>
-        <p:nvSpPr>
-          <p:cNvPr id="9" name="Rounded Rectangle 8"/>
-          <p:cNvSpPr/>
-          <p:nvPr/>
-        </p:nvSpPr>
-        <p:spPr>
-          <a:xfrm>
-            <a:off x="548640" y="5440680"/>
-            <a:ext cx="11155680" cy="868680"/>
+            <a:off x="548640" y="5532120"/>
+            <a:ext cx="11155680" cy="777240"/>
           </a:xfrm>
           <a:prstGeom prst="roundRect">
             <a:avLst/>
@@ -6037,7 +6119,7 @@
                   <a:srgbClr val="8A5200"/>
                 </a:solidFill>
               </a:rPr>
-              <a:t>⚠  Stabilising per-receptor ranks needs ~9–16 replicate folds per complex (1,200–2,100 folds) — GPU-scale. Ranking binders on a single AlphaFold/Boltz run is common practice, and does not reproduce.</a:t>
+              <a:t>Fitted on held-out points from the 33-fold corpus. Reaching 10% error needs rank ≈1,414 (layer_0) and ≈9,750 (layer_1) — both beyond the width stock actually materialises.</a:t>
             </a:r>
           </a:p>
         </p:txBody>
@@ -6069,7 +6151,7 @@
         <p:spPr>
           <a:xfrm>
             <a:off x="0" y="0"/>
-            <a:ext cx="12191695" cy="914400"/>
+            <a:ext cx="12188952" cy="914400"/>
           </a:xfrm>
           <a:prstGeom prst="rect">
             <a:avLst/>
@@ -6080,7 +6162,6 @@
           <a:ln>
             <a:noFill/>
           </a:ln>
-          <a:effectLst/>
         </p:spPr>
         <p:style>
           <a:lnRef idx="1">
@@ -6113,7 +6194,7 @@
         <p:spPr>
           <a:xfrm>
             <a:off x="0" y="914400"/>
-            <a:ext cx="12191695" cy="54864"/>
+            <a:ext cx="12188952" cy="54864"/>
           </a:xfrm>
           <a:prstGeom prst="rect">
             <a:avLst/>
@@ -6124,7 +6205,6 @@
           <a:ln>
             <a:noFill/>
           </a:ln>
-          <a:effectLst/>
         </p:spPr>
         <p:style>
           <a:lnRef idx="1">
@@ -6171,20 +6251,17 @@
           <a:lstStyle/>
           <a:p>
             <a:pPr>
-              <a:spcBef>
-                <a:spcPts val="0"/>
-              </a:spcBef>
-              <a:spcAft>
-                <a:spcPts val="400"/>
-              </a:spcAft>
-            </a:pPr>
-            <a:r>
-              <a:rPr sz="2600" b="1" i="0">
+              <a:spcAft>
+                <a:spcPts val="600"/>
+              </a:spcAft>
+            </a:pPr>
+            <a:r>
+              <a:rPr sz="2600" b="1">
                 <a:solidFill>
                   <a:srgbClr val="FFFFFF"/>
                 </a:solidFill>
               </a:rPr>
-              <a:t>Future Plan</a:t>
+              <a:t>Measured — Does ipTM Rank Binders?</a:t>
             </a:r>
           </a:p>
         </p:txBody>
@@ -6212,9 +6289,6 @@
           <a:lstStyle/>
           <a:p>
             <a:pPr>
-              <a:spcBef>
-                <a:spcPts val="0"/>
-              </a:spcBef>
               <a:spcAft>
                 <a:spcPts val="600"/>
               </a:spcAft>
@@ -6238,7 +6312,7 @@
         </p:nvSpPr>
         <p:spPr>
           <a:xfrm>
-            <a:off x="11185855" y="6473952"/>
+            <a:off x="11183112" y="6473952"/>
             <a:ext cx="640080" cy="274320"/>
           </a:xfrm>
           <a:prstGeom prst="rect">
@@ -6252,10 +6326,7 @@
           </a:bodyPr>
           <a:lstStyle/>
           <a:p>
-            <a:pPr algn="r">
-              <a:spcBef>
-                <a:spcPts val="0"/>
-              </a:spcBef>
+            <a:pPr>
               <a:spcAft>
                 <a:spcPts val="600"/>
               </a:spcAft>
@@ -6263,26 +6334,26 @@
             <a:r>
               <a:rPr sz="1000" b="0">
                 <a:solidFill>
-                  <a:srgbClr val="555555"/>
-                </a:solidFill>
-              </a:rPr>
-              <a:t>24</a:t>
-            </a:r>
-          </a:p>
-        </p:txBody>
-      </p:sp>
-      <p:sp>
-        <p:nvSpPr>
-          <p:cNvPr id="7" name="Oval 6"/>
+                  <a:srgbClr val="0B2B52"/>
+                </a:solidFill>
+              </a:rPr>
+              <a:t>15</a:t>
+            </a:r>
+          </a:p>
+        </p:txBody>
+      </p:sp>
+      <p:sp>
+        <p:nvSpPr>
+          <p:cNvPr id="7" name="Rounded Rectangle 6"/>
           <p:cNvSpPr/>
           <p:nvPr/>
         </p:nvSpPr>
         <p:spPr>
           <a:xfrm>
-            <a:off x="548640" y="1325880"/>
-            <a:ext cx="566928" cy="566928"/>
-          </a:xfrm>
-          <a:prstGeom prst="ellipse">
+            <a:off x="548640" y="1298448"/>
+            <a:ext cx="2697480" cy="1463040"/>
+          </a:xfrm>
+          <a:prstGeom prst="roundRect">
             <a:avLst/>
           </a:prstGeom>
           <a:solidFill>
@@ -6291,7 +6362,6 @@
           <a:ln>
             <a:noFill/>
           </a:ln>
-          <a:effectLst/>
         </p:spPr>
         <p:style>
           <a:lnRef idx="1">
@@ -6311,78 +6381,42 @@
           <a:bodyPr rtlCol="0" anchor="ctr" wrap="square"/>
           <a:lstStyle/>
           <a:p>
-            <a:pPr algn="ctr">
-              <a:spcBef>
-                <a:spcPts val="0"/>
-              </a:spcBef>
-              <a:spcAft>
-                <a:spcPts val="400"/>
-              </a:spcAft>
-            </a:pPr>
-            <a:r>
-              <a:rPr sz="1800" b="1" i="0">
+            <a:pPr algn="ctr"/>
+            <a:r>
+              <a:rPr sz="2300" b="1">
                 <a:solidFill>
                   <a:srgbClr val="FFFFFF"/>
                 </a:solidFill>
               </a:rPr>
-              <a:t>1</a:t>
-            </a:r>
-          </a:p>
-        </p:txBody>
-      </p:sp>
-      <p:sp>
-        <p:nvSpPr>
-          <p:cNvPr id="8" name="TextBox 7"/>
-          <p:cNvSpPr txBox="1"/>
-          <p:nvPr/>
-        </p:nvSpPr>
-        <p:spPr>
-          <a:xfrm>
-            <a:off x="1325880" y="1307592"/>
-            <a:ext cx="10332720" cy="868680"/>
-          </a:xfrm>
-          <a:prstGeom prst="rect">
-            <a:avLst/>
-          </a:prstGeom>
-          <a:noFill/>
-        </p:spPr>
-        <p:txBody>
-          <a:bodyPr wrap="square">
-            <a:spAutoFit/>
-          </a:bodyPr>
-          <a:lstStyle/>
-          <a:p>
-            <a:pPr>
-              <a:spcBef>
-                <a:spcPts val="0"/>
-              </a:spcBef>
-              <a:spcAft>
-                <a:spcPts val="600"/>
-              </a:spcAft>
-            </a:pPr>
-            <a:r>
-              <a:rPr sz="1300" b="0">
-                <a:solidFill>
-                  <a:srgbClr val="0B2B52"/>
-                </a:solidFill>
-              </a:rPr>
-              <a:t>DONE — profiled; and measured what the optimisations actually deliver on pretrained weights (slides 11–18).</a:t>
-            </a:r>
-          </a:p>
-        </p:txBody>
-      </p:sp>
-      <p:sp>
-        <p:nvSpPr>
-          <p:cNvPr id="9" name="Oval 8"/>
+              <a:t>22 / 132</a:t>
+            </a:r>
+          </a:p>
+          <a:p>
+            <a:pPr algn="ctr"/>
+            <a:r>
+              <a:rPr sz="1050">
+                <a:solidFill>
+                  <a:srgbClr val="FFFFFF"/>
+                </a:solidFill>
+              </a:rPr>
+              <a:t>receptors / complexes
+PTM-clean panel</a:t>
+            </a:r>
+          </a:p>
+        </p:txBody>
+      </p:sp>
+      <p:sp>
+        <p:nvSpPr>
+          <p:cNvPr id="8" name="Rounded Rectangle 7"/>
           <p:cNvSpPr/>
           <p:nvPr/>
         </p:nvSpPr>
         <p:spPr>
           <a:xfrm>
-            <a:off x="548640" y="2304288"/>
-            <a:ext cx="566928" cy="566928"/>
-          </a:xfrm>
-          <a:prstGeom prst="ellipse">
+            <a:off x="3429000" y="1298448"/>
+            <a:ext cx="2697480" cy="1463040"/>
+          </a:xfrm>
+          <a:prstGeom prst="roundRect">
             <a:avLst/>
           </a:prstGeom>
           <a:solidFill>
@@ -6391,7 +6425,6 @@
           <a:ln>
             <a:noFill/>
           </a:ln>
-          <a:effectLst/>
         </p:spPr>
         <p:style>
           <a:lnRef idx="1">
@@ -6411,78 +6444,105 @@
           <a:bodyPr rtlCol="0" anchor="ctr" wrap="square"/>
           <a:lstStyle/>
           <a:p>
-            <a:pPr algn="ctr">
-              <a:spcBef>
-                <a:spcPts val="0"/>
-              </a:spcBef>
-              <a:spcAft>
-                <a:spcPts val="400"/>
-              </a:spcAft>
-            </a:pPr>
-            <a:r>
-              <a:rPr sz="1800" b="1" i="0">
+            <a:pPr algn="ctr"/>
+            <a:r>
+              <a:rPr sz="2300" b="1">
                 <a:solidFill>
                   <a:srgbClr val="FFFFFF"/>
                 </a:solidFill>
               </a:rPr>
-              <a:t>2</a:t>
-            </a:r>
-          </a:p>
-        </p:txBody>
-      </p:sp>
-      <p:sp>
-        <p:nvSpPr>
-          <p:cNvPr id="10" name="TextBox 9"/>
-          <p:cNvSpPr txBox="1"/>
-          <p:nvPr/>
-        </p:nvSpPr>
-        <p:spPr>
-          <a:xfrm>
-            <a:off x="1325880" y="2286000"/>
-            <a:ext cx="10332720" cy="868680"/>
-          </a:xfrm>
-          <a:prstGeom prst="rect">
-            <a:avLst/>
-          </a:prstGeom>
-          <a:noFill/>
-        </p:spPr>
-        <p:txBody>
-          <a:bodyPr wrap="square">
-            <a:spAutoFit/>
-          </a:bodyPr>
-          <a:lstStyle/>
-          <a:p>
-            <a:pPr>
-              <a:spcBef>
-                <a:spcPts val="0"/>
-              </a:spcBef>
-              <a:spcAft>
-                <a:spcPts val="600"/>
-              </a:spcAft>
-            </a:pPr>
-            <a:r>
-              <a:rPr sz="1300" b="0">
-                <a:solidFill>
-                  <a:srgbClr val="0B2B52"/>
-                </a:solidFill>
-              </a:rPr>
-              <a:t>Few-step diffusion-sampler distillation (consistency/progressive) — keep the full trunk; target minutes → seconds locally.</a:t>
-            </a:r>
-          </a:p>
-        </p:txBody>
-      </p:sp>
-      <p:sp>
-        <p:nvSpPr>
-          <p:cNvPr id="11" name="Oval 10"/>
+              <a:t>0.5015</a:t>
+            </a:r>
+          </a:p>
+          <a:p>
+            <a:pPr algn="ctr"/>
+            <a:r>
+              <a:rPr sz="1050">
+                <a:solidFill>
+                  <a:srgbClr val="FFFFFF"/>
+                </a:solidFill>
+              </a:rPr>
+              <a:t>cognate
+mean ipTM</a:t>
+            </a:r>
+          </a:p>
+        </p:txBody>
+      </p:sp>
+      <p:sp>
+        <p:nvSpPr>
+          <p:cNvPr id="9" name="Rounded Rectangle 8"/>
           <p:cNvSpPr/>
           <p:nvPr/>
         </p:nvSpPr>
         <p:spPr>
           <a:xfrm>
-            <a:off x="548640" y="3282696"/>
-            <a:ext cx="566928" cy="566928"/>
-          </a:xfrm>
-          <a:prstGeom prst="ellipse">
+            <a:off x="6309360" y="1298448"/>
+            <a:ext cx="2697480" cy="1463040"/>
+          </a:xfrm>
+          <a:prstGeom prst="roundRect">
+            <a:avLst/>
+          </a:prstGeom>
+          <a:solidFill>
+            <a:srgbClr val="C62828"/>
+          </a:solidFill>
+          <a:ln>
+            <a:noFill/>
+          </a:ln>
+        </p:spPr>
+        <p:style>
+          <a:lnRef idx="1">
+            <a:schemeClr val="accent1"/>
+          </a:lnRef>
+          <a:fillRef idx="3">
+            <a:schemeClr val="accent1"/>
+          </a:fillRef>
+          <a:effectRef idx="2">
+            <a:schemeClr val="accent1"/>
+          </a:effectRef>
+          <a:fontRef idx="minor">
+            <a:schemeClr val="lt1"/>
+          </a:fontRef>
+        </p:style>
+        <p:txBody>
+          <a:bodyPr rtlCol="0" anchor="ctr" wrap="square"/>
+          <a:lstStyle/>
+          <a:p>
+            <a:pPr algn="ctr"/>
+            <a:r>
+              <a:rPr sz="2300" b="1">
+                <a:solidFill>
+                  <a:srgbClr val="FFFFFF"/>
+                </a:solidFill>
+              </a:rPr>
+              <a:t>0.4888</a:t>
+            </a:r>
+          </a:p>
+          <a:p>
+            <a:pPr algn="ctr"/>
+            <a:r>
+              <a:rPr sz="1050">
+                <a:solidFill>
+                  <a:srgbClr val="FFFFFF"/>
+                </a:solidFill>
+              </a:rPr>
+              <a:t>SCRAMBLED
+mean ipTM</a:t>
+            </a:r>
+          </a:p>
+        </p:txBody>
+      </p:sp>
+      <p:sp>
+        <p:nvSpPr>
+          <p:cNvPr id="10" name="Rounded Rectangle 9"/>
+          <p:cNvSpPr/>
+          <p:nvPr/>
+        </p:nvSpPr>
+        <p:spPr>
+          <a:xfrm>
+            <a:off x="9189720" y="1298448"/>
+            <a:ext cx="2514600" cy="1463040"/>
+          </a:xfrm>
+          <a:prstGeom prst="roundRect">
             <a:avLst/>
           </a:prstGeom>
           <a:solidFill>
@@ -6491,7 +6551,6 @@
           <a:ln>
             <a:noFill/>
           </a:ln>
-          <a:effectLst/>
         </p:spPr>
         <p:style>
           <a:lnRef idx="1">
@@ -6511,35 +6570,40 @@
           <a:bodyPr rtlCol="0" anchor="ctr" wrap="square"/>
           <a:lstStyle/>
           <a:p>
-            <a:pPr algn="ctr">
-              <a:spcBef>
-                <a:spcPts val="0"/>
-              </a:spcBef>
-              <a:spcAft>
-                <a:spcPts val="400"/>
-              </a:spcAft>
-            </a:pPr>
-            <a:r>
-              <a:rPr sz="1800" b="1" i="0">
+            <a:pPr algn="ctr"/>
+            <a:r>
+              <a:rPr sz="2300" b="1">
                 <a:solidFill>
                   <a:srgbClr val="FFFFFF"/>
                 </a:solidFill>
               </a:rPr>
-              <a:t>3</a:t>
-            </a:r>
-          </a:p>
-        </p:txBody>
-      </p:sp>
-      <p:sp>
-        <p:nvSpPr>
-          <p:cNvPr id="12" name="TextBox 11"/>
+              <a:t>0.4317</a:t>
+            </a:r>
+          </a:p>
+          <a:p>
+            <a:pPr algn="ctr"/>
+            <a:r>
+              <a:rPr sz="1050">
+                <a:solidFill>
+                  <a:srgbClr val="FFFFFF"/>
+                </a:solidFill>
+              </a:rPr>
+              <a:t>decoy
+mean ipTM</a:t>
+            </a:r>
+          </a:p>
+        </p:txBody>
+      </p:sp>
+      <p:sp>
+        <p:nvSpPr>
+          <p:cNvPr id="11" name="TextBox 10"/>
           <p:cNvSpPr txBox="1"/>
           <p:nvPr/>
         </p:nvSpPr>
         <p:spPr>
           <a:xfrm>
-            <a:off x="1325880" y="3264408"/>
-            <a:ext cx="10332720" cy="868680"/>
+            <a:off x="548640" y="2971800"/>
+            <a:ext cx="11155680" cy="2651760"/>
           </a:xfrm>
           <a:prstGeom prst="rect">
             <a:avLst/>
@@ -6553,45 +6617,86 @@
           <a:lstStyle/>
           <a:p>
             <a:pPr>
-              <a:spcBef>
-                <a:spcPts val="0"/>
-              </a:spcBef>
-              <a:spcAft>
-                <a:spcPts val="600"/>
-              </a:spcAft>
-            </a:pPr>
-            <a:r>
-              <a:rPr sz="1300" b="0">
+              <a:spcAft>
+                <a:spcPts val="600"/>
+              </a:spcAft>
+            </a:pPr>
+            <a:r>
+              <a:rPr sz="1500" b="0">
                 <a:solidFill>
                   <a:srgbClr val="0B2B52"/>
                 </a:solidFill>
               </a:rPr>
-              <a:t>DONE, NEGATIVE — the surrogate was distilled and evaluated: ipTM does not rank binders, so no surrogate distilled from it can either.</a:t>
-            </a:r>
-          </a:p>
-        </p:txBody>
-      </p:sp>
-      <p:sp>
-        <p:nvSpPr>
-          <p:cNvPr id="13" name="Oval 12"/>
+              <a:t>A scramble keeps composition and length exactly and destroys only order — and order is what makes a binder a binder.</a:t>
+            </a:r>
+          </a:p>
+          <a:p>
+            <a:pPr>
+              <a:spcAft>
+                <a:spcPts val="600"/>
+              </a:spcAft>
+            </a:pPr>
+            <a:r>
+              <a:rPr sz="1500" b="0">
+                <a:solidFill>
+                  <a:srgbClr val="0B2B52"/>
+                </a:solidFill>
+              </a:rPr>
+              <a:t>•  Scrambles outscore genuine binders of other receptors:  AUC 0.632, p = 0.0096  (110 complexes)</a:t>
+            </a:r>
+          </a:p>
+          <a:p>
+            <a:pPr>
+              <a:spcAft>
+                <a:spcPts val="600"/>
+              </a:spcAft>
+            </a:pPr>
+            <a:r>
+              <a:rPr sz="1500" b="0">
+                <a:solidFill>
+                  <a:srgbClr val="0B2B52"/>
+                </a:solidFill>
+              </a:rPr>
+              <a:t>•  Cognate − own scramble:  +0.0128, 95% CI [−0.019, +0.044] — a bound, not a zero</a:t>
+            </a:r>
+          </a:p>
+          <a:p>
+            <a:pPr>
+              <a:spcAft>
+                <a:spcPts val="600"/>
+              </a:spcAft>
+            </a:pPr>
+            <a:r>
+              <a:rPr sz="1500" b="0">
+                <a:solidFill>
+                  <a:srgbClr val="0B2B52"/>
+                </a:solidFill>
+              </a:rPr>
+              <a:t>•  Not a length artefact: the advantage survives length adjustment (intercept +0.075, p = 0.0001)</a:t>
+            </a:r>
+          </a:p>
+        </p:txBody>
+      </p:sp>
+      <p:sp>
+        <p:nvSpPr>
+          <p:cNvPr id="12" name="Rounded Rectangle 11"/>
           <p:cNvSpPr/>
           <p:nvPr/>
         </p:nvSpPr>
         <p:spPr>
           <a:xfrm>
-            <a:off x="548640" y="4261104"/>
-            <a:ext cx="566928" cy="566928"/>
-          </a:xfrm>
-          <a:prstGeom prst="ellipse">
+            <a:off x="548640" y="5394960"/>
+            <a:ext cx="11155680" cy="868680"/>
+          </a:xfrm>
+          <a:prstGeom prst="roundRect">
             <a:avLst/>
           </a:prstGeom>
           <a:solidFill>
-            <a:srgbClr val="C77700"/>
+            <a:srgbClr val="FDF3E0"/>
           </a:solidFill>
           <a:ln>
             <a:noFill/>
           </a:ln>
-          <a:effectLst/>
         </p:spPr>
         <p:style>
           <a:lnRef idx="1">
@@ -6612,161 +6717,17 @@
           <a:lstStyle/>
           <a:p>
             <a:pPr algn="ctr">
-              <a:spcBef>
-                <a:spcPts val="0"/>
-              </a:spcBef>
-              <a:spcAft>
-                <a:spcPts val="400"/>
-              </a:spcAft>
-            </a:pPr>
-            <a:r>
-              <a:rPr sz="1800" b="1" i="0">
-                <a:solidFill>
-                  <a:srgbClr val="FFFFFF"/>
-                </a:solidFill>
-              </a:rPr>
-              <a:t>4</a:t>
-            </a:r>
-          </a:p>
-        </p:txBody>
-      </p:sp>
-      <p:sp>
-        <p:nvSpPr>
-          <p:cNvPr id="14" name="TextBox 13"/>
-          <p:cNvSpPr txBox="1"/>
-          <p:nvPr/>
-        </p:nvSpPr>
-        <p:spPr>
-          <a:xfrm>
-            <a:off x="1325880" y="4242816"/>
-            <a:ext cx="10332720" cy="868680"/>
-          </a:xfrm>
-          <a:prstGeom prst="rect">
-            <a:avLst/>
-          </a:prstGeom>
-          <a:noFill/>
-        </p:spPr>
-        <p:txBody>
-          <a:bodyPr wrap="square">
-            <a:spAutoFit/>
-          </a:bodyPr>
-          <a:lstStyle/>
-          <a:p>
-            <a:pPr>
-              <a:spcBef>
-                <a:spcPts val="0"/>
-              </a:spcBef>
-              <a:spcAft>
-                <a:spcPts val="600"/>
-              </a:spcAft>
-            </a:pPr>
-            <a:r>
-              <a:rPr sz="1300" b="0">
-                <a:solidFill>
-                  <a:srgbClr val="0B2B52"/>
-                </a:solidFill>
-              </a:rPr>
-              <a:t>Use open Boltz-2 weights only — Boltz-2.1 is closed / API-only.</a:t>
-            </a:r>
-          </a:p>
-        </p:txBody>
-      </p:sp>
-      <p:sp>
-        <p:nvSpPr>
-          <p:cNvPr id="15" name="Oval 14"/>
-          <p:cNvSpPr/>
-          <p:nvPr/>
-        </p:nvSpPr>
-        <p:spPr>
-          <a:xfrm>
-            <a:off x="548640" y="5239512"/>
-            <a:ext cx="566928" cy="566928"/>
-          </a:xfrm>
-          <a:prstGeom prst="ellipse">
-            <a:avLst/>
-          </a:prstGeom>
-          <a:solidFill>
-            <a:srgbClr val="0B2B52"/>
-          </a:solidFill>
-          <a:ln>
-            <a:noFill/>
-          </a:ln>
-          <a:effectLst/>
-        </p:spPr>
-        <p:style>
-          <a:lnRef idx="1">
-            <a:schemeClr val="accent1"/>
-          </a:lnRef>
-          <a:fillRef idx="3">
-            <a:schemeClr val="accent1"/>
-          </a:fillRef>
-          <a:effectRef idx="2">
-            <a:schemeClr val="accent1"/>
-          </a:effectRef>
-          <a:fontRef idx="minor">
-            <a:schemeClr val="lt1"/>
-          </a:fontRef>
-        </p:style>
-        <p:txBody>
-          <a:bodyPr rtlCol="0" anchor="ctr" wrap="square"/>
-          <a:lstStyle/>
-          <a:p>
-            <a:pPr algn="ctr">
-              <a:spcBef>
-                <a:spcPts val="0"/>
-              </a:spcBef>
-              <a:spcAft>
-                <a:spcPts val="400"/>
-              </a:spcAft>
-            </a:pPr>
-            <a:r>
-              <a:rPr sz="1800" b="1" i="0">
-                <a:solidFill>
-                  <a:srgbClr val="FFFFFF"/>
-                </a:solidFill>
-              </a:rPr>
-              <a:t>5</a:t>
-            </a:r>
-          </a:p>
-        </p:txBody>
-      </p:sp>
-      <p:sp>
-        <p:nvSpPr>
-          <p:cNvPr id="16" name="TextBox 15"/>
-          <p:cNvSpPr txBox="1"/>
-          <p:nvPr/>
-        </p:nvSpPr>
-        <p:spPr>
-          <a:xfrm>
-            <a:off x="1325880" y="5221224"/>
-            <a:ext cx="10332720" cy="868680"/>
-          </a:xfrm>
-          <a:prstGeom prst="rect">
-            <a:avLst/>
-          </a:prstGeom>
-          <a:noFill/>
-        </p:spPr>
-        <p:txBody>
-          <a:bodyPr wrap="square">
-            <a:spAutoFit/>
-          </a:bodyPr>
-          <a:lstStyle/>
-          <a:p>
-            <a:pPr>
-              <a:spcBef>
-                <a:spcPts val="0"/>
-              </a:spcBef>
-              <a:spcAft>
-                <a:spcPts val="600"/>
-              </a:spcAft>
-            </a:pPr>
-            <a:r>
-              <a:rPr sz="1300" b="0">
-                <a:solidFill>
-                  <a:srgbClr val="0B2B52"/>
-                </a:solidFill>
-              </a:rPr>
-              <a:t>Production GPU scaling — now a PREREQUISITE, not a throughput nicety: replicate-averaged folds (9–16 per complex) are needed before any per-receptor claim holds.</a:t>
+              <a:spcAft>
+                <a:spcPts val="600"/>
+              </a:spcAft>
+            </a:pPr>
+            <a:r>
+              <a:rPr sz="1250" b="0">
+                <a:solidFill>
+                  <a:srgbClr val="8A5200"/>
+                </a:solidFill>
+              </a:rPr>
+              <a:t>⚠  ipTM responds largely to peptide COMPOSITION. Any sequence-order effect is at most 63% of the composition effect. A ridge regression on composition independently beat the distilled surrogate (+0.103 vs −0.034).</a:t>
             </a:r>
           </a:p>
         </p:txBody>
@@ -6798,7 +6759,7 @@
         <p:spPr>
           <a:xfrm>
             <a:off x="0" y="0"/>
-            <a:ext cx="12191695" cy="914400"/>
+            <a:ext cx="12188952" cy="914400"/>
           </a:xfrm>
           <a:prstGeom prst="rect">
             <a:avLst/>
@@ -6809,7 +6770,6 @@
           <a:ln>
             <a:noFill/>
           </a:ln>
-          <a:effectLst/>
         </p:spPr>
         <p:style>
           <a:lnRef idx="1">
@@ -6842,7 +6802,7 @@
         <p:spPr>
           <a:xfrm>
             <a:off x="0" y="914400"/>
-            <a:ext cx="12191695" cy="54864"/>
+            <a:ext cx="12188952" cy="54864"/>
           </a:xfrm>
           <a:prstGeom prst="rect">
             <a:avLst/>
@@ -6853,7 +6813,6 @@
           <a:ln>
             <a:noFill/>
           </a:ln>
-          <a:effectLst/>
         </p:spPr>
         <p:style>
           <a:lnRef idx="1">
@@ -6900,20 +6859,17 @@
           <a:lstStyle/>
           <a:p>
             <a:pPr>
-              <a:spcBef>
-                <a:spcPts val="0"/>
-              </a:spcBef>
-              <a:spcAft>
-                <a:spcPts val="400"/>
-              </a:spcAft>
-            </a:pPr>
-            <a:r>
-              <a:rPr sz="2600" b="1" i="0">
+              <a:spcAft>
+                <a:spcPts val="600"/>
+              </a:spcAft>
+            </a:pPr>
+            <a:r>
+              <a:rPr sz="2600" b="1">
                 <a:solidFill>
                   <a:srgbClr val="FFFFFF"/>
                 </a:solidFill>
               </a:rPr>
-              <a:t>Summary</a:t>
+              <a:t>ipTM by Class — the Scramble Control</a:t>
             </a:r>
           </a:p>
         </p:txBody>
@@ -6941,9 +6897,6 @@
           <a:lstStyle/>
           <a:p>
             <a:pPr>
-              <a:spcBef>
-                <a:spcPts val="0"/>
-              </a:spcBef>
               <a:spcAft>
                 <a:spcPts val="600"/>
               </a:spcAft>
@@ -6967,7 +6920,7 @@
         </p:nvSpPr>
         <p:spPr>
           <a:xfrm>
-            <a:off x="11185855" y="6473952"/>
+            <a:off x="11183112" y="6473952"/>
             <a:ext cx="640080" cy="274320"/>
           </a:xfrm>
           <a:prstGeom prst="rect">
@@ -6981,10 +6934,7 @@
           </a:bodyPr>
           <a:lstStyle/>
           <a:p>
-            <a:pPr algn="r">
-              <a:spcBef>
-                <a:spcPts val="0"/>
-              </a:spcBef>
+            <a:pPr>
               <a:spcAft>
                 <a:spcPts val="600"/>
               </a:spcAft>
@@ -6992,115 +6942,38 @@
             <a:r>
               <a:rPr sz="1000" b="0">
                 <a:solidFill>
-                  <a:srgbClr val="555555"/>
-                </a:solidFill>
-              </a:rPr>
-              <a:t>25</a:t>
-            </a:r>
-          </a:p>
-        </p:txBody>
-      </p:sp>
-      <p:sp>
-        <p:nvSpPr>
-          <p:cNvPr id="7" name="TextBox 6"/>
-          <p:cNvSpPr txBox="1"/>
-          <p:nvPr/>
-        </p:nvSpPr>
-        <p:spPr>
-          <a:xfrm>
-            <a:off x="548640" y="1280160"/>
-            <a:ext cx="11155680" cy="3383280"/>
-          </a:xfrm>
-          <a:prstGeom prst="rect">
-            <a:avLst/>
-          </a:prstGeom>
-          <a:noFill/>
-        </p:spPr>
-        <p:txBody>
-          <a:bodyPr wrap="square">
-            <a:spAutoFit/>
-          </a:bodyPr>
-          <a:lstStyle/>
-          <a:p>
-            <a:pPr>
-              <a:spcBef>
-                <a:spcPts val="0"/>
-              </a:spcBef>
-              <a:spcAft>
-                <a:spcPts val="600"/>
-              </a:spcAft>
-            </a:pPr>
-            <a:r>
-              <a:rPr sz="1400" b="0">
-                <a:solidFill>
                   <a:srgbClr val="0B2B52"/>
                 </a:solidFill>
               </a:rPr>
-              <a:t>•  Implemented and integrated memory, sampling and parallelism optimisations into the Boltz pipeline; device-agnostic on Apple Silicon.</a:t>
-            </a:r>
-          </a:p>
-          <a:p>
-            <a:pPr>
-              <a:spcAft>
-                <a:spcPts val="600"/>
-              </a:spcAft>
-            </a:pPr>
-            <a:r>
-              <a:rPr sz="1400" b="0">
-                <a:solidFill>
-                  <a:srgbClr val="0B2B52"/>
-                </a:solidFill>
-              </a:rPr>
-              <a:t>•  Moved from component microbenchmarks to end-to-end measurement against pretrained checkpoints and experimentally determined structures.</a:t>
-            </a:r>
-          </a:p>
-          <a:p>
-            <a:pPr>
-              <a:spcAft>
-                <a:spcPts val="600"/>
-              </a:spcAft>
-            </a:pPr>
-            <a:r>
-              <a:rPr sz="1400" b="0">
-                <a:solidFill>
-                  <a:srgbClr val="0B2B52"/>
-                </a:solidFill>
-              </a:rPr>
-              <a:t>•  Two questions closed with negative answers, both with mechanisms: the low-rank OPM is unreachable on released weights, and ipTM tracks peptide composition rather than binding.</a:t>
-            </a:r>
-          </a:p>
-          <a:p>
-            <a:pPr>
-              <a:spcAft>
-                <a:spcPts val="600"/>
-              </a:spcAft>
-            </a:pPr>
-            <a:r>
-              <a:rPr sz="1400" b="0">
-                <a:solidFill>
-                  <a:srgbClr val="0B2B52"/>
-                </a:solidFill>
-              </a:rPr>
-              <a:t>•  A third finding generalises beyond this project: a single unseeded fold does not reproduce its own ranking.</a:t>
-            </a:r>
-          </a:p>
-          <a:p>
-            <a:pPr>
-              <a:spcAft>
-                <a:spcPts val="600"/>
-              </a:spcAft>
-            </a:pPr>
-            <a:r>
-              <a:rPr sz="1400" b="0">
-                <a:solidFill>
-                  <a:srgbClr val="0B2B52"/>
-                </a:solidFill>
-              </a:rPr>
-              <a:t>•  Next: GPU-scale replicate folding, then few-step sampler distillation.</a:t>
-            </a:r>
-          </a:p>
-        </p:txBody>
-      </p:sp>
+              <a:t>16</a:t>
+            </a:r>
+          </a:p>
+        </p:txBody>
+      </p:sp>
+      <p:pic>
+        <p:nvPicPr>
+          <p:cNvPr id="7" name="Picture 6" descr="fig_iptm_classes.png"/>
+          <p:cNvPicPr>
+            <a:picLocks noChangeAspect="1"/>
+          </p:cNvPicPr>
+          <p:nvPr/>
+        </p:nvPicPr>
+        <p:blipFill>
+          <a:blip r:embed="rId2"/>
+          <a:stretch>
+            <a:fillRect/>
+          </a:stretch>
+        </p:blipFill>
+        <p:spPr>
+          <a:xfrm>
+            <a:off x="1691640" y="1207008"/>
+            <a:ext cx="8778240" cy="4744995"/>
+          </a:xfrm>
+          <a:prstGeom prst="rect">
+            <a:avLst/>
+          </a:prstGeom>
+        </p:spPr>
+      </p:pic>
       <p:sp>
         <p:nvSpPr>
           <p:cNvPr id="8" name="Rounded Rectangle 7"/>
@@ -7109,19 +6982,18 @@
         </p:nvSpPr>
         <p:spPr>
           <a:xfrm>
-            <a:off x="548640" y="4892040"/>
-            <a:ext cx="11155680" cy="1051560"/>
+            <a:off x="548640" y="5532120"/>
+            <a:ext cx="11155680" cy="777240"/>
           </a:xfrm>
           <a:prstGeom prst="roundRect">
             <a:avLst/>
           </a:prstGeom>
           <a:solidFill>
-            <a:srgbClr val="0B2B52"/>
+            <a:srgbClr val="FDF3E0"/>
           </a:solidFill>
           <a:ln>
             <a:noFill/>
           </a:ln>
-          <a:effectLst/>
         </p:spPr>
         <p:style>
           <a:lnRef idx="1">
@@ -7142,20 +7014,17 @@
           <a:lstStyle/>
           <a:p>
             <a:pPr algn="ctr">
-              <a:spcBef>
-                <a:spcPts val="0"/>
-              </a:spcBef>
-              <a:spcAft>
-                <a:spcPts val="400"/>
-              </a:spcAft>
-            </a:pPr>
-            <a:r>
-              <a:rPr sz="2000" b="1" i="0">
-                <a:solidFill>
-                  <a:srgbClr val="FFFFFF"/>
-                </a:solidFill>
-              </a:rPr>
-              <a:t>Thank you  ·  Questions welcome</a:t>
+              <a:spcAft>
+                <a:spcPts val="600"/>
+              </a:spcAft>
+            </a:pPr>
+            <a:r>
+              <a:rPr sz="1250" b="0">
+                <a:solidFill>
+                  <a:srgbClr val="8A5200"/>
+                </a:solidFill>
+              </a:rPr>
+              <a:t>Scrambles sit level with cognates and above decoys. Composition is shared with the scramble; order is not — so the separation from decoys is compositional.</a:t>
             </a:r>
           </a:p>
         </p:txBody>
@@ -7297,7 +7166,7 @@
                   <a:srgbClr val="FFFFFF"/>
                 </a:solidFill>
               </a:rPr>
-              <a:t>Results at a Glance</a:t>
+              <a:t>Measured — A Single Fold Does Not Reproduce Itself</a:t>
             </a:r>
           </a:p>
         </p:txBody>
@@ -7370,10 +7239,10 @@
             <a:r>
               <a:rPr sz="1000" b="0">
                 <a:solidFill>
-                  <a:srgbClr val="555555"/>
-                </a:solidFill>
-              </a:rPr>
-              <a:t>11</a:t>
+                  <a:srgbClr val="0B2B52"/>
+                </a:solidFill>
+              </a:rPr>
+              <a:t>17</a:t>
             </a:r>
           </a:p>
         </p:txBody>
@@ -7386,14 +7255,14 @@
         </p:nvSpPr>
         <p:spPr>
           <a:xfrm>
-            <a:off x="548640" y="1234440"/>
-            <a:ext cx="2651760" cy="1417320"/>
+            <a:off x="548640" y="1298448"/>
+            <a:ext cx="11155680" cy="960120"/>
           </a:xfrm>
           <a:prstGeom prst="roundRect">
             <a:avLst/>
           </a:prstGeom>
           <a:solidFill>
-            <a:srgbClr val="2E7D32"/>
+            <a:srgbClr val="0B2B52"/>
           </a:solidFill>
           <a:ln>
             <a:noFill/>
@@ -7417,481 +7286,32 @@
           <a:bodyPr rtlCol="0" anchor="ctr" wrap="square"/>
           <a:lstStyle/>
           <a:p>
-            <a:pPr algn="ctr"/>
-            <a:r>
-              <a:rPr sz="2100" b="1">
+            <a:pPr algn="ctr">
+              <a:spcAft>
+                <a:spcPts val="600"/>
+              </a:spcAft>
+            </a:pPr>
+            <a:r>
+              <a:rPr sz="1700" b="1">
                 <a:solidFill>
                   <a:srgbClr val="FFFFFF"/>
                 </a:solidFill>
               </a:rPr>
-              <a:t>99 / 100%</a:t>
-            </a:r>
-          </a:p>
-          <a:p>
-            <a:pPr algn="ctr"/>
-            <a:r>
-              <a:rPr sz="1000">
-                <a:solidFill>
-                  <a:srgbClr val="FFFFFF"/>
-                </a:solidFill>
-              </a:rPr>
-              <a:t>tests passing
-under pytest in CI</a:t>
-            </a:r>
-          </a:p>
-        </p:txBody>
-      </p:sp>
-      <p:sp>
-        <p:nvSpPr>
-          <p:cNvPr id="8" name="Rounded Rectangle 7"/>
-          <p:cNvSpPr/>
-          <p:nvPr/>
-        </p:nvSpPr>
-        <p:spPr>
-          <a:xfrm>
-            <a:off x="3383280" y="1234440"/>
-            <a:ext cx="2651760" cy="1417320"/>
-          </a:xfrm>
-          <a:prstGeom prst="roundRect">
-            <a:avLst/>
-          </a:prstGeom>
-          <a:solidFill>
-            <a:srgbClr val="1E6FB8"/>
-          </a:solidFill>
-          <a:ln>
-            <a:noFill/>
-          </a:ln>
-        </p:spPr>
-        <p:style>
-          <a:lnRef idx="1">
-            <a:schemeClr val="accent1"/>
-          </a:lnRef>
-          <a:fillRef idx="3">
-            <a:schemeClr val="accent1"/>
-          </a:fillRef>
-          <a:effectRef idx="2">
-            <a:schemeClr val="accent1"/>
-          </a:effectRef>
-          <a:fontRef idx="minor">
-            <a:schemeClr val="lt1"/>
-          </a:fontRef>
-        </p:style>
-        <p:txBody>
-          <a:bodyPr rtlCol="0" anchor="ctr" wrap="square"/>
-          <a:lstStyle/>
-          <a:p>
-            <a:pPr algn="ctr"/>
-            <a:r>
-              <a:rPr sz="2100" b="1">
-                <a:solidFill>
-                  <a:srgbClr val="FFFFFF"/>
-                </a:solidFill>
-              </a:rPr>
-              <a:t>87.5%</a:t>
-            </a:r>
-          </a:p>
-          <a:p>
-            <a:pPr algn="ctr"/>
-            <a:r>
-              <a:rPr sz="1000">
-                <a:solidFill>
-                  <a:srgbClr val="FFFFFF"/>
-                </a:solidFill>
-              </a:rPr>
-              <a:t>MLA KV-cache
-reduction (measured)</a:t>
-            </a:r>
-          </a:p>
-        </p:txBody>
-      </p:sp>
-      <p:sp>
-        <p:nvSpPr>
-          <p:cNvPr id="9" name="Rounded Rectangle 8"/>
-          <p:cNvSpPr/>
-          <p:nvPr/>
-        </p:nvSpPr>
-        <p:spPr>
-          <a:xfrm>
-            <a:off x="6217920" y="1234440"/>
-            <a:ext cx="2651760" cy="1417320"/>
-          </a:xfrm>
-          <a:prstGeom prst="roundRect">
-            <a:avLst/>
-          </a:prstGeom>
-          <a:solidFill>
-            <a:srgbClr val="1E6FB8"/>
-          </a:solidFill>
-          <a:ln>
-            <a:noFill/>
-          </a:ln>
-        </p:spPr>
-        <p:style>
-          <a:lnRef idx="1">
-            <a:schemeClr val="accent1"/>
-          </a:lnRef>
-          <a:fillRef idx="3">
-            <a:schemeClr val="accent1"/>
-          </a:fillRef>
-          <a:effectRef idx="2">
-            <a:schemeClr val="accent1"/>
-          </a:effectRef>
-          <a:fontRef idx="minor">
-            <a:schemeClr val="lt1"/>
-          </a:fontRef>
-        </p:style>
-        <p:txBody>
-          <a:bodyPr rtlCol="0" anchor="ctr" wrap="square"/>
-          <a:lstStyle/>
-          <a:p>
-            <a:pPr algn="ctr"/>
-            <a:r>
-              <a:rPr sz="2100" b="1">
-                <a:solidFill>
-                  <a:srgbClr val="FFFFFF"/>
-                </a:solidFill>
-              </a:rPr>
-              <a:t>1502×</a:t>
-            </a:r>
-          </a:p>
-          <a:p>
-            <a:pPr algn="ctr"/>
-            <a:r>
-              <a:rPr sz="1000">
-                <a:solidFill>
-                  <a:srgbClr val="FFFFFF"/>
-                </a:solidFill>
-              </a:rPr>
-              <a:t>activation saving
-(trained low-rank only)</a:t>
-            </a:r>
-          </a:p>
-        </p:txBody>
-      </p:sp>
-      <p:sp>
-        <p:nvSpPr>
-          <p:cNvPr id="10" name="Rounded Rectangle 9"/>
-          <p:cNvSpPr/>
-          <p:nvPr/>
-        </p:nvSpPr>
-        <p:spPr>
-          <a:xfrm>
-            <a:off x="9052560" y="1234440"/>
-            <a:ext cx="2651760" cy="1417320"/>
-          </a:xfrm>
-          <a:prstGeom prst="roundRect">
-            <a:avLst/>
-          </a:prstGeom>
-          <a:solidFill>
-            <a:srgbClr val="2E7D32"/>
-          </a:solidFill>
-          <a:ln>
-            <a:noFill/>
-          </a:ln>
-        </p:spPr>
-        <p:style>
-          <a:lnRef idx="1">
-            <a:schemeClr val="accent1"/>
-          </a:lnRef>
-          <a:fillRef idx="3">
-            <a:schemeClr val="accent1"/>
-          </a:fillRef>
-          <a:effectRef idx="2">
-            <a:schemeClr val="accent1"/>
-          </a:effectRef>
-          <a:fontRef idx="minor">
-            <a:schemeClr val="lt1"/>
-          </a:fontRef>
-        </p:style>
-        <p:txBody>
-          <a:bodyPr rtlCol="0" anchor="ctr" wrap="square"/>
-          <a:lstStyle/>
-          <a:p>
-            <a:pPr algn="ctr"/>
-            <a:r>
-              <a:rPr sz="2100" b="1">
-                <a:solidFill>
-                  <a:srgbClr val="FFFFFF"/>
-                </a:solidFill>
-              </a:rPr>
-              <a:t>8.6×</a:t>
-            </a:r>
-          </a:p>
-          <a:p>
-            <a:pPr algn="ctr"/>
-            <a:r>
-              <a:rPr sz="1000">
-                <a:solidFill>
-                  <a:srgbClr val="FFFFFF"/>
-                </a:solidFill>
-              </a:rPr>
-              <a:t>interface pLDDT vs ipTM
-effect-to-noise</a:t>
-            </a:r>
-          </a:p>
-        </p:txBody>
-      </p:sp>
-      <p:sp>
-        <p:nvSpPr>
-          <p:cNvPr id="11" name="Rounded Rectangle 10"/>
-          <p:cNvSpPr/>
-          <p:nvPr/>
-        </p:nvSpPr>
-        <p:spPr>
-          <a:xfrm>
-            <a:off x="548640" y="2834640"/>
-            <a:ext cx="2651760" cy="1417320"/>
-          </a:xfrm>
-          <a:prstGeom prst="roundRect">
-            <a:avLst/>
-          </a:prstGeom>
-          <a:solidFill>
-            <a:srgbClr val="C62828"/>
-          </a:solidFill>
-          <a:ln>
-            <a:noFill/>
-          </a:ln>
-        </p:spPr>
-        <p:style>
-          <a:lnRef idx="1">
-            <a:schemeClr val="accent1"/>
-          </a:lnRef>
-          <a:fillRef idx="3">
-            <a:schemeClr val="accent1"/>
-          </a:fillRef>
-          <a:effectRef idx="2">
-            <a:schemeClr val="accent1"/>
-          </a:effectRef>
-          <a:fontRef idx="minor">
-            <a:schemeClr val="lt1"/>
-          </a:fontRef>
-        </p:style>
-        <p:txBody>
-          <a:bodyPr rtlCol="0" anchor="ctr" wrap="square"/>
-          <a:lstStyle/>
-          <a:p>
-            <a:pPr algn="ctr"/>
-            <a:r>
-              <a:rPr sz="2100" b="1">
-                <a:solidFill>
-                  <a:srgbClr val="FFFFFF"/>
-                </a:solidFill>
-              </a:rPr>
-              <a:t>0.378</a:t>
-            </a:r>
-          </a:p>
-          <a:p>
-            <a:pPr algn="ctr"/>
-            <a:r>
-              <a:rPr sz="1000">
-                <a:solidFill>
-                  <a:srgbClr val="FFFFFF"/>
-                </a:solidFill>
-              </a:rPr>
-              <a:t>OPM held-out error
-at rank 32 (at capacity)</a:t>
-            </a:r>
-          </a:p>
-        </p:txBody>
-      </p:sp>
-      <p:sp>
-        <p:nvSpPr>
-          <p:cNvPr id="12" name="Rounded Rectangle 11"/>
-          <p:cNvSpPr/>
-          <p:nvPr/>
-        </p:nvSpPr>
-        <p:spPr>
-          <a:xfrm>
-            <a:off x="3383280" y="2834640"/>
-            <a:ext cx="2651760" cy="1417320"/>
-          </a:xfrm>
-          <a:prstGeom prst="roundRect">
-            <a:avLst/>
-          </a:prstGeom>
-          <a:solidFill>
-            <a:srgbClr val="0E8F9A"/>
-          </a:solidFill>
-          <a:ln>
-            <a:noFill/>
-          </a:ln>
-        </p:spPr>
-        <p:style>
-          <a:lnRef idx="1">
-            <a:schemeClr val="accent1"/>
-          </a:lnRef>
-          <a:fillRef idx="3">
-            <a:schemeClr val="accent1"/>
-          </a:fillRef>
-          <a:effectRef idx="2">
-            <a:schemeClr val="accent1"/>
-          </a:effectRef>
-          <a:fontRef idx="minor">
-            <a:schemeClr val="lt1"/>
-          </a:fontRef>
-        </p:style>
-        <p:txBody>
-          <a:bodyPr rtlCol="0" anchor="ctr" wrap="square"/>
-          <a:lstStyle/>
-          <a:p>
-            <a:pPr algn="ctr"/>
-            <a:r>
-              <a:rPr sz="2100" b="1">
-                <a:solidFill>
-                  <a:srgbClr val="FFFFFF"/>
-                </a:solidFill>
-              </a:rPr>
-              <a:t>22 / 132</a:t>
-            </a:r>
-          </a:p>
-          <a:p>
-            <a:pPr algn="ctr"/>
-            <a:r>
-              <a:rPr sz="1000">
-                <a:solidFill>
-                  <a:srgbClr val="FFFFFF"/>
-                </a:solidFill>
-              </a:rPr>
-              <a:t>receptors / complexes
-PTM-clean panel</a:t>
-            </a:r>
-          </a:p>
-        </p:txBody>
-      </p:sp>
-      <p:sp>
-        <p:nvSpPr>
-          <p:cNvPr id="13" name="Rounded Rectangle 12"/>
-          <p:cNvSpPr/>
-          <p:nvPr/>
-        </p:nvSpPr>
-        <p:spPr>
-          <a:xfrm>
-            <a:off x="6217920" y="2834640"/>
-            <a:ext cx="2651760" cy="1417320"/>
-          </a:xfrm>
-          <a:prstGeom prst="roundRect">
-            <a:avLst/>
-          </a:prstGeom>
-          <a:solidFill>
-            <a:srgbClr val="C62828"/>
-          </a:solidFill>
-          <a:ln>
-            <a:noFill/>
-          </a:ln>
-        </p:spPr>
-        <p:style>
-          <a:lnRef idx="1">
-            <a:schemeClr val="accent1"/>
-          </a:lnRef>
-          <a:fillRef idx="3">
-            <a:schemeClr val="accent1"/>
-          </a:fillRef>
-          <a:effectRef idx="2">
-            <a:schemeClr val="accent1"/>
-          </a:effectRef>
-          <a:fontRef idx="minor">
-            <a:schemeClr val="lt1"/>
-          </a:fontRef>
-        </p:style>
-        <p:txBody>
-          <a:bodyPr rtlCol="0" anchor="ctr" wrap="square"/>
-          <a:lstStyle/>
-          <a:p>
-            <a:pPr algn="ctr"/>
-            <a:r>
-              <a:rPr sz="2100" b="1">
-                <a:solidFill>
-                  <a:srgbClr val="FFFFFF"/>
-                </a:solidFill>
-              </a:rPr>
-              <a:t>0.0628</a:t>
-            </a:r>
-          </a:p>
-          <a:p>
-            <a:pPr algn="ctr"/>
-            <a:r>
-              <a:rPr sz="1000">
-                <a:solidFill>
-                  <a:srgbClr val="FFFFFF"/>
-                </a:solidFill>
-              </a:rPr>
-              <a:t>ipTM run-to-run SD
-(24 × 4 replicates)</a:t>
-            </a:r>
-          </a:p>
-        </p:txBody>
-      </p:sp>
-      <p:sp>
-        <p:nvSpPr>
-          <p:cNvPr id="14" name="Rounded Rectangle 13"/>
-          <p:cNvSpPr/>
-          <p:nvPr/>
-        </p:nvSpPr>
-        <p:spPr>
-          <a:xfrm>
-            <a:off x="9052560" y="2834640"/>
-            <a:ext cx="2651760" cy="1417320"/>
-          </a:xfrm>
-          <a:prstGeom prst="roundRect">
-            <a:avLst/>
-          </a:prstGeom>
-          <a:solidFill>
-            <a:srgbClr val="2E7D32"/>
-          </a:solidFill>
-          <a:ln>
-            <a:noFill/>
-          </a:ln>
-        </p:spPr>
-        <p:style>
-          <a:lnRef idx="1">
-            <a:schemeClr val="accent1"/>
-          </a:lnRef>
-          <a:fillRef idx="3">
-            <a:schemeClr val="accent1"/>
-          </a:fillRef>
-          <a:effectRef idx="2">
-            <a:schemeClr val="accent1"/>
-          </a:effectRef>
-          <a:fontRef idx="minor">
-            <a:schemeClr val="lt1"/>
-          </a:fontRef>
-        </p:style>
-        <p:txBody>
-          <a:bodyPr rtlCol="0" anchor="ctr" wrap="square"/>
-          <a:lstStyle/>
-          <a:p>
-            <a:pPr algn="ctr"/>
-            <a:r>
-              <a:rPr sz="2100" b="1">
-                <a:solidFill>
-                  <a:srgbClr val="FFFFFF"/>
-                </a:solidFill>
-              </a:rPr>
-              <a:t>1.73</a:t>
-            </a:r>
-          </a:p>
-          <a:p>
-            <a:pPr algn="ctr"/>
-            <a:r>
-              <a:rPr sz="1000">
-                <a:solidFill>
-                  <a:srgbClr val="FFFFFF"/>
-                </a:solidFill>
-              </a:rPr>
-              <a:t>cognate rank on DeCAF
-(chance 2.50, p = 0.004)</a:t>
-            </a:r>
-          </a:p>
-        </p:txBody>
-      </p:sp>
-      <p:sp>
-        <p:nvSpPr>
-          <p:cNvPr id="15" name="TextBox 14"/>
+              <a:t>Boltz's --seed defaults to None. Every benchmark fold was a single unseeded draw from a distribution whose width had never been measured.</a:t>
+            </a:r>
+          </a:p>
+        </p:txBody>
+      </p:sp>
+      <p:sp>
+        <p:nvSpPr>
+          <p:cNvPr id="8" name="TextBox 7"/>
           <p:cNvSpPr txBox="1"/>
           <p:nvPr/>
         </p:nvSpPr>
         <p:spPr>
           <a:xfrm>
-            <a:off x="548640" y="4480560"/>
-            <a:ext cx="11155680" cy="1005840"/>
+            <a:off x="548640" y="2468880"/>
+            <a:ext cx="11155680" cy="2651760"/>
           </a:xfrm>
           <a:prstGeom prst="rect">
             <a:avLst/>
@@ -7910,41 +7330,101 @@
               </a:spcAft>
             </a:pPr>
             <a:r>
-              <a:rPr sz="1400" b="0">
+              <a:rPr sz="1500" b="0">
                 <a:solidFill>
                   <a:srgbClr val="0B2B52"/>
                 </a:solidFill>
               </a:rPr>
-              <a:t>Top row — engineering delivered.  Bottom row — measurement outcomes, which are what redirected the project:</a:t>
-            </a:r>
-          </a:p>
-          <a:p>
-            <a:pPr>
-              <a:spcAft>
-                <a:spcPts val="600"/>
-              </a:spcAft>
-            </a:pPr>
-            <a:r>
-              <a:rPr sz="1400" b="0">
+              <a:t>24 complexes × 4 identical re-runs (96 folds), same settings:</a:t>
+            </a:r>
+          </a:p>
+          <a:p>
+            <a:pPr>
+              <a:spcAft>
+                <a:spcPts val="600"/>
+              </a:spcAft>
+            </a:pPr>
+            <a:r>
+              <a:rPr sz="1500" b="0">
                 <a:solidFill>
                   <a:srgbClr val="0B2B52"/>
                 </a:solidFill>
               </a:rPr>
-              <a:t>the low-rank OPM is unreachable on pretrained weights, and ipTM does not rank binders reproducibly on the stock models — but interface pLDDT does (slides 19–20), and a few-step-distilled model does far better (slides 22–23).</a:t>
-            </a:r>
-          </a:p>
-        </p:txBody>
-      </p:sp>
-      <p:sp>
-        <p:nvSpPr>
-          <p:cNvPr id="16" name="Rounded Rectangle 15"/>
+              <a:t>•  Pooled within-complex ipTM SD  0.0628   (median range 0.127)</a:t>
+            </a:r>
+          </a:p>
+          <a:p>
+            <a:pPr>
+              <a:spcAft>
+                <a:spcPts val="600"/>
+              </a:spcAft>
+            </a:pPr>
+            <a:r>
+              <a:rPr sz="1500" b="0">
+                <a:solidFill>
+                  <a:srgbClr val="0B2B52"/>
+                </a:solidFill>
+              </a:rPr>
+              <a:t>•  Cognate − decoy  +0.0698 = 1.11 × SD    comparable to noise</a:t>
+            </a:r>
+          </a:p>
+          <a:p>
+            <a:pPr>
+              <a:spcAft>
+                <a:spcPts val="600"/>
+              </a:spcAft>
+            </a:pPr>
+            <a:r>
+              <a:rPr sz="1500" b="0">
+                <a:solidFill>
+                  <a:srgbClr val="0B2B52"/>
+                </a:solidFill>
+              </a:rPr>
+              <a:t>•  Per-receptor rank flips for 4 of 4 receptors — 6YOO spans #1 to #4 on identical input</a:t>
+            </a:r>
+          </a:p>
+          <a:p>
+            <a:pPr>
+              <a:spcAft>
+                <a:spcPts val="600"/>
+              </a:spcAft>
+            </a:pPr>
+            <a:r>
+              <a:rPr sz="1500" b="0">
+                <a:solidFill>
+                  <a:srgbClr val="0B2B52"/>
+                </a:solidFill>
+              </a:rPr>
+              <a:t>•  Aggregate survives: mean rank 2.03, 95% range [1.77, 2.27], always below chance …</a:t>
+            </a:r>
+          </a:p>
+          <a:p>
+            <a:pPr>
+              <a:spcAft>
+                <a:spcPts val="600"/>
+              </a:spcAft>
+            </a:pPr>
+            <a:r>
+              <a:rPr sz="1500" b="0">
+                <a:solidFill>
+                  <a:srgbClr val="0B2B52"/>
+                </a:solidFill>
+              </a:rPr>
+              <a:t>•  … but p &lt; 0.05 in only 49% of simulated re-runs (median p = 0.054)</a:t>
+            </a:r>
+          </a:p>
+        </p:txBody>
+      </p:sp>
+      <p:sp>
+        <p:nvSpPr>
+          <p:cNvPr id="9" name="Rounded Rectangle 8"/>
           <p:cNvSpPr/>
           <p:nvPr/>
         </p:nvSpPr>
         <p:spPr>
           <a:xfrm>
-            <a:off x="548640" y="5532120"/>
-            <a:ext cx="11155680" cy="777240"/>
+            <a:off x="548640" y="5440680"/>
+            <a:ext cx="11155680" cy="868680"/>
           </a:xfrm>
           <a:prstGeom prst="roundRect">
             <a:avLst/>
@@ -7985,7 +7465,7 @@
                   <a:srgbClr val="8A5200"/>
                 </a:solidFill>
               </a:rPr>
-              <a:t>⚠  Settings throughout are far below Boltz defaults — 10 sampling steps vs 200, 1 recycling vs 3, MSA depth 32 vs 8192. Slide 22 probes this directly: it attenuates the signal but does not wholly explain the negatives.</a:t>
+              <a:t>⚠  Stabilising per-receptor ranks needs ~9–16 replicate folds per complex (1,200–2,100 folds) — GPU-scale. Ranking binders on a single AlphaFold/Boltz run is common practice, and does not reproduce.</a:t>
             </a:r>
           </a:p>
         </p:txBody>
@@ -8127,7 +7607,7 @@
                   <a:srgbClr val="FFFFFF"/>
                 </a:solidFill>
               </a:rPr>
-              <a:t>Low-Rank OPM — Rank vs Fidelity</a:t>
+              <a:t>Rank Stability Across Identical Re-Runs</a:t>
             </a:r>
           </a:p>
         </p:txBody>
@@ -8200,17 +7680,17 @@
             <a:r>
               <a:rPr sz="1000" b="0">
                 <a:solidFill>
-                  <a:srgbClr val="555555"/>
-                </a:solidFill>
-              </a:rPr>
-              <a:t>13</a:t>
+                  <a:srgbClr val="0B2B52"/>
+                </a:solidFill>
+              </a:rPr>
+              <a:t>18</a:t>
             </a:r>
           </a:p>
         </p:txBody>
       </p:sp>
       <p:pic>
         <p:nvPicPr>
-          <p:cNvPr id="7" name="Picture 6" descr="fig_opm_rank.png"/>
+          <p:cNvPr id="7" name="Picture 6" descr="fig_rank_stability.png"/>
           <p:cNvPicPr>
             <a:picLocks noChangeAspect="1"/>
           </p:cNvPicPr>
@@ -8282,7 +7762,7 @@
                   <a:srgbClr val="8A5200"/>
                 </a:solidFill>
               </a:rPr>
-              <a:t>Fitted on held-out points from the 33-fold corpus. Reaching 10% error needs rank ≈1,414 (layer_0) and ≈9,750 (layer_1) — both beyond the width stock actually materialises.</a:t>
+              <a:t>Four receptors, four identical re-runs each. Every one changes rank; 6YOO moves from best to worst. Per-receptor rankings are not a property of the receptor.</a:t>
             </a:r>
           </a:p>
         </p:txBody>
@@ -8424,7 +7904,7 @@
                   <a:srgbClr val="FFFFFF"/>
                 </a:solidFill>
               </a:rPr>
-              <a:t>ipTM by Class — the Scramble Control</a:t>
+              <a:t>Would the Headline Survive a Re-Run?</a:t>
             </a:r>
           </a:p>
         </p:txBody>
@@ -8497,17 +7977,17 @@
             <a:r>
               <a:rPr sz="1000" b="0">
                 <a:solidFill>
-                  <a:srgbClr val="555555"/>
-                </a:solidFill>
-              </a:rPr>
-              <a:t>15</a:t>
+                  <a:srgbClr val="0B2B52"/>
+                </a:solidFill>
+              </a:rPr>
+              <a:t>19</a:t>
             </a:r>
           </a:p>
         </p:txBody>
       </p:sp>
       <p:pic>
         <p:nvPicPr>
-          <p:cNvPr id="7" name="Picture 6" descr="fig_iptm_classes.png"/>
+          <p:cNvPr id="7" name="Picture 6" descr="fig_pvalue_repro.png"/>
           <p:cNvPicPr>
             <a:picLocks noChangeAspect="1"/>
           </p:cNvPicPr>
@@ -8579,7 +8059,7 @@
                   <a:srgbClr val="8A5200"/>
                 </a:solidFill>
               </a:rPr>
-              <a:t>Scrambles sit level with cognates and above decoys. Composition is shared with the scramble; order is not — so the separation from decoys is compositional.</a:t>
+              <a:t>Parametric bootstrap over the measured noise, 4,000 replications. The effect direction is robust; the significance verdict is a coin flip.</a:t>
             </a:r>
           </a:p>
         </p:txBody>
@@ -8805,10 +8285,10 @@
             <a:r>
               <a:rPr sz="1000" b="0">
                 <a:solidFill>
-                  <a:srgbClr val="555555"/>
-                </a:solidFill>
-              </a:rPr>
-              <a:t>1</a:t>
+                  <a:srgbClr val="0B2B52"/>
+                </a:solidFill>
+              </a:rPr>
+              <a:t>2</a:t>
             </a:r>
           </a:p>
         </p:txBody>
@@ -9361,7 +8841,7 @@
                   <a:srgbClr val="FFFFFF"/>
                 </a:solidFill>
               </a:rPr>
-              <a:t>Rank Stability Across Identical Re-Runs</a:t>
+              <a:t>Measured — What ipTM Discards Is Recoverable</a:t>
             </a:r>
           </a:p>
         </p:txBody>
@@ -9434,48 +8914,177 @@
             <a:r>
               <a:rPr sz="1000" b="0">
                 <a:solidFill>
-                  <a:srgbClr val="555555"/>
-                </a:solidFill>
-              </a:rPr>
-              <a:t>17</a:t>
-            </a:r>
-          </a:p>
-        </p:txBody>
-      </p:sp>
-      <p:pic>
-        <p:nvPicPr>
-          <p:cNvPr id="7" name="Picture 6" descr="fig_rank_stability.png"/>
-          <p:cNvPicPr>
-            <a:picLocks noChangeAspect="1"/>
-          </p:cNvPicPr>
-          <p:nvPr/>
-        </p:nvPicPr>
-        <p:blipFill>
-          <a:blip r:embed="rId2"/>
-          <a:stretch>
-            <a:fillRect/>
-          </a:stretch>
-        </p:blipFill>
-        <p:spPr>
-          <a:xfrm>
-            <a:off x="1691640" y="1207008"/>
-            <a:ext cx="8778240" cy="4744995"/>
-          </a:xfrm>
-          <a:prstGeom prst="rect">
-            <a:avLst/>
-          </a:prstGeom>
-        </p:spPr>
-      </p:pic>
-      <p:sp>
-        <p:nvSpPr>
-          <p:cNvPr id="8" name="Rounded Rectangle 7"/>
+                  <a:srgbClr val="0B2B52"/>
+                </a:solidFill>
+              </a:rPr>
+              <a:t>20</a:t>
+            </a:r>
+          </a:p>
+        </p:txBody>
+      </p:sp>
+      <p:sp>
+        <p:nvSpPr>
+          <p:cNvPr id="7" name="Rounded Rectangle 6"/>
           <p:cNvSpPr/>
           <p:nvPr/>
         </p:nvSpPr>
         <p:spPr>
           <a:xfrm>
-            <a:off x="548640" y="5532120"/>
-            <a:ext cx="11155680" cy="777240"/>
+            <a:off x="548640" y="1234440"/>
+            <a:ext cx="11155680" cy="868680"/>
+          </a:xfrm>
+          <a:prstGeom prst="roundRect">
+            <a:avLst/>
+          </a:prstGeom>
+          <a:solidFill>
+            <a:srgbClr val="0B2B52"/>
+          </a:solidFill>
+          <a:ln>
+            <a:noFill/>
+          </a:ln>
+        </p:spPr>
+        <p:style>
+          <a:lnRef idx="1">
+            <a:schemeClr val="accent1"/>
+          </a:lnRef>
+          <a:fillRef idx="3">
+            <a:schemeClr val="accent1"/>
+          </a:fillRef>
+          <a:effectRef idx="2">
+            <a:schemeClr val="accent1"/>
+          </a:effectRef>
+          <a:fontRef idx="minor">
+            <a:schemeClr val="lt1"/>
+          </a:fontRef>
+        </p:style>
+        <p:txBody>
+          <a:bodyPr rtlCol="0" anchor="ctr" wrap="square"/>
+          <a:lstStyle/>
+          <a:p>
+            <a:pPr algn="ctr">
+              <a:spcAft>
+                <a:spcPts val="600"/>
+              </a:spcAft>
+            </a:pPr>
+            <a:r>
+              <a:rPr sz="1700" b="1">
+                <a:solidFill>
+                  <a:srgbClr val="FFFFFF"/>
+                </a:solidFill>
+              </a:rPr>
+              <a:t>The negative was about ipTM, not about the structures. 132 folds were still on disk — re-scoring them cost no compute at all.</a:t>
+            </a:r>
+          </a:p>
+        </p:txBody>
+      </p:sp>
+      <p:sp>
+        <p:nvSpPr>
+          <p:cNvPr id="8" name="TextBox 7"/>
+          <p:cNvSpPr txBox="1"/>
+          <p:nvPr/>
+        </p:nvSpPr>
+        <p:spPr>
+          <a:xfrm>
+            <a:off x="548640" y="2240280"/>
+            <a:ext cx="11155680" cy="2926080"/>
+          </a:xfrm>
+          <a:prstGeom prst="rect">
+            <a:avLst/>
+          </a:prstGeom>
+          <a:noFill/>
+        </p:spPr>
+        <p:txBody>
+          <a:bodyPr wrap="square">
+            <a:spAutoFit/>
+          </a:bodyPr>
+          <a:lstStyle/>
+          <a:p>
+            <a:pPr>
+              <a:spcAft>
+                <a:spcPts val="600"/>
+              </a:spcAft>
+            </a:pPr>
+            <a:r>
+              <a:rPr sz="1450" b="0">
+                <a:solidFill>
+                  <a:srgbClr val="0B2B52"/>
+                </a:solidFill>
+              </a:rPr>
+              <a:t>Six interface measures, same complexes, same tests. Only one beats a cognate's OWN scramble — the test that fixes composition and destroys only order:</a:t>
+            </a:r>
+          </a:p>
+          <a:p>
+            <a:pPr>
+              <a:spcAft>
+                <a:spcPts val="600"/>
+              </a:spcAft>
+            </a:pPr>
+            <a:r>
+              <a:rPr sz="1450" b="0">
+                <a:solidFill>
+                  <a:srgbClr val="0B2B52"/>
+                </a:solidFill>
+              </a:rPr>
+              <a:t>•  ipTM  p = 0.42        •  pDockQ  p = 0.80        •  contacts / density / buried SASA  p = 0.05–0.45</a:t>
+            </a:r>
+          </a:p>
+          <a:p>
+            <a:pPr>
+              <a:spcAft>
+                <a:spcPts val="600"/>
+              </a:spcAft>
+            </a:pPr>
+            <a:r>
+              <a:rPr sz="1450" b="0">
+                <a:solidFill>
+                  <a:srgbClr val="0B2B52"/>
+                </a:solidFill>
+              </a:rPr>
+              <a:t>•  INTERFACE pLDDT  p &lt; 0.0001    rank 1.91 of 4 (chance 2.50)</a:t>
+            </a:r>
+          </a:p>
+          <a:p>
+            <a:pPr>
+              <a:spcAft>
+                <a:spcPts val="600"/>
+              </a:spcAft>
+            </a:pPr>
+            <a:r>
+              <a:rPr sz="1450" b="0">
+                <a:solidFill>
+                  <a:srgbClr val="0B2B52"/>
+                </a:solidFill>
+              </a:rPr>
+              <a:t/>
+            </a:r>
+          </a:p>
+          <a:p>
+            <a:pPr>
+              <a:spcAft>
+                <a:spcPts val="600"/>
+              </a:spcAft>
+            </a:pPr>
+            <a:r>
+              <a:rPr sz="1450" b="0">
+                <a:solidFill>
+                  <a:srgbClr val="0B2B52"/>
+                </a:solidFill>
+              </a:rPr>
+              <a:t>It also survives the reproducibility test that demoted ipTM: effect +3.30 against run-to-run SD 1.92 = 1.72× noise, where ipTM managed 0.20× — an 8.6× better ratio. Reproduces at p &lt; 0.05 in 100% of re-runs.</a:t>
+            </a:r>
+          </a:p>
+        </p:txBody>
+      </p:sp>
+      <p:sp>
+        <p:nvSpPr>
+          <p:cNvPr id="9" name="Rounded Rectangle 8"/>
+          <p:cNvSpPr/>
+          <p:nvPr/>
+        </p:nvSpPr>
+        <p:spPr>
+          <a:xfrm>
+            <a:off x="548640" y="5440680"/>
+            <a:ext cx="11155680" cy="868680"/>
           </a:xfrm>
           <a:prstGeom prst="roundRect">
             <a:avLst/>
@@ -9516,7 +9125,7 @@
                   <a:srgbClr val="8A5200"/>
                 </a:solidFill>
               </a:rPr>
-              <a:t>Four receptors, four identical re-runs each. Every one changes rank; 6YOO moves from best to worst. Per-receptor rankings are not a property of the receptor.</a:t>
+              <a:t>⚠  pDockQ multiplies interface pLDDT by a contact term — contacts run the WRONG way here (scrambles make more: 38.5 vs 32.9), cancelling the signal. Slide 28 shows why: at 10 sampling steps the backbone is not connected, and on converged structures the contact ordering reverses. pDockQ2, which swaps the contact term for a PAE term, repairs it (p = 0.797 → 0.00026).</a:t>
             </a:r>
           </a:p>
         </p:txBody>
@@ -9658,7 +9267,7 @@
                   <a:srgbClr val="FFFFFF"/>
                 </a:solidFill>
               </a:rPr>
-              <a:t>Would the Headline Survive a Re-Run?</a:t>
+              <a:t>ipTM vs Interface pLDDT — the Scramble Control</a:t>
             </a:r>
           </a:p>
         </p:txBody>
@@ -9731,17 +9340,17 @@
             <a:r>
               <a:rPr sz="1000" b="0">
                 <a:solidFill>
-                  <a:srgbClr val="555555"/>
-                </a:solidFill>
-              </a:rPr>
-              <a:t>18</a:t>
+                  <a:srgbClr val="0B2B52"/>
+                </a:solidFill>
+              </a:rPr>
+              <a:t>21</a:t>
             </a:r>
           </a:p>
         </p:txBody>
       </p:sp>
       <p:pic>
         <p:nvPicPr>
-          <p:cNvPr id="7" name="Picture 6" descr="fig_pvalue_repro.png"/>
+          <p:cNvPr id="7" name="Picture 6" descr="fig_metric_comparison.png"/>
           <p:cNvPicPr>
             <a:picLocks noChangeAspect="1"/>
           </p:cNvPicPr>
@@ -9756,7 +9365,7 @@
         <p:spPr>
           <a:xfrm>
             <a:off x="1691640" y="1207008"/>
-            <a:ext cx="8778240" cy="4744995"/>
+            <a:ext cx="8778240" cy="4626370"/>
           </a:xfrm>
           <a:prstGeom prst="rect">
             <a:avLst/>
@@ -9813,7 +9422,7 @@
                   <a:srgbClr val="8A5200"/>
                 </a:solidFill>
               </a:rPr>
-              <a:t>Parametric bootstrap over the measured noise, 4,000 replications. The effect direction is robust; the significance verdict is a coin flip.</a:t>
+              <a:t>Same structures, two readouts. ipTM cannot separate a cognate from its own scramble; interface pLDDT can. The information is in the prediction — ipTM discards it.</a:t>
             </a:r>
           </a:p>
         </p:txBody>
@@ -9955,7 +9564,7 @@
                   <a:srgbClr val="FFFFFF"/>
                 </a:solidFill>
               </a:rPr>
-              <a:t>Measured — What ipTM Discards Is Recoverable</a:t>
+              <a:t>Measured — Where That Signal Actually Comes From</a:t>
             </a:r>
           </a:p>
         </p:txBody>
@@ -10028,10 +9637,10 @@
             <a:r>
               <a:rPr sz="1000" b="0">
                 <a:solidFill>
-                  <a:srgbClr val="555555"/>
-                </a:solidFill>
-              </a:rPr>
-              <a:t>19</a:t>
+                  <a:srgbClr val="0B2B52"/>
+                </a:solidFill>
+              </a:rPr>
+              <a:t>22</a:t>
             </a:r>
           </a:p>
         </p:txBody>
@@ -10044,8 +9653,8 @@
         </p:nvSpPr>
         <p:spPr>
           <a:xfrm>
-            <a:off x="548640" y="1234440"/>
-            <a:ext cx="11155680" cy="868680"/>
+            <a:off x="548640" y="1188720"/>
+            <a:ext cx="11155680" cy="777240"/>
           </a:xfrm>
           <a:prstGeom prst="roundRect">
             <a:avLst/>
@@ -10086,7 +9695,7 @@
                   <a:srgbClr val="FFFFFF"/>
                 </a:solidFill>
               </a:rPr>
-              <a:t>The negative was about ipTM, not about the structures. 132 folds were still on disk — re-scoring them cost no compute at all.</a:t>
+              <a:t>Interface pLDDT responds to sequence order. Does it respond to BINDING, or just to the peptide being better folded?</a:t>
             </a:r>
           </a:p>
         </p:txBody>
@@ -10099,7 +9708,7 @@
         </p:nvSpPr>
         <p:spPr>
           <a:xfrm>
-            <a:off x="548640" y="2240280"/>
+            <a:off x="548640" y="2103120"/>
             <a:ext cx="11155680" cy="2926080"/>
           </a:xfrm>
           <a:prstGeom prst="rect">
@@ -10119,56 +9728,71 @@
               </a:spcAft>
             </a:pPr>
             <a:r>
-              <a:rPr sz="1450" b="0">
+              <a:rPr sz="1400" b="0">
                 <a:solidFill>
                   <a:srgbClr val="0B2B52"/>
                 </a:solidFill>
               </a:rPr>
-              <a:t>Six interface measures, same complexes, same tests. Only one beats a cognate's OWN scramble — the test that fixes composition and destroys only order:</a:t>
-            </a:r>
-          </a:p>
-          <a:p>
-            <a:pPr>
-              <a:spcAft>
-                <a:spcPts val="600"/>
-              </a:spcAft>
-            </a:pPr>
-            <a:r>
-              <a:rPr sz="1450" b="0">
+              <a:t>Splitting the metric by chain — no new folding:</a:t>
+            </a:r>
+          </a:p>
+          <a:p>
+            <a:pPr>
+              <a:spcAft>
+                <a:spcPts val="600"/>
+              </a:spcAft>
+            </a:pPr>
+            <a:r>
+              <a:rPr sz="1400" b="0">
                 <a:solidFill>
                   <a:srgbClr val="0B2B52"/>
                 </a:solidFill>
               </a:rPr>
-              <a:t>•  ipTM  p = 0.42        •  pDockQ  p = 0.80        •  contacts / density / buried SASA  p = 0.05–0.45</a:t>
-            </a:r>
-          </a:p>
-          <a:p>
-            <a:pPr>
-              <a:spcAft>
-                <a:spcPts val="600"/>
-              </a:spcAft>
-            </a:pPr>
-            <a:r>
-              <a:rPr sz="1450" b="0">
+              <a:t>•  peptide side  +5.25   but whole-chain peptide pLDDT  +4.87   →  mostly FOLDABILITY, not interface</a:t>
+            </a:r>
+          </a:p>
+          <a:p>
+            <a:pPr>
+              <a:spcAft>
+                <a:spcPts val="600"/>
+              </a:spcAft>
+            </a:pPr>
+            <a:r>
+              <a:rPr sz="1400" b="0">
                 <a:solidFill>
                   <a:srgbClr val="0B2B52"/>
                 </a:solidFill>
               </a:rPr>
-              <a:t>•  INTERFACE pLDDT  p &lt; 0.0001    rank 1.91 of 4 (chance 2.50)</a:t>
-            </a:r>
-          </a:p>
-          <a:p>
-            <a:pPr>
-              <a:spcAft>
-                <a:spcPts val="600"/>
-              </a:spcAft>
-            </a:pPr>
-            <a:r>
-              <a:rPr sz="1450" b="0">
+              <a:t>•  RECEPTOR side  +2.38  (p = 6e-5)  →  the receptor's own residues are placed better when given the right peptide.</a:t>
+            </a:r>
+          </a:p>
+          <a:p>
+            <a:pPr>
+              <a:spcAft>
+                <a:spcPts val="600"/>
+              </a:spcAft>
+            </a:pPr>
+            <a:r>
+              <a:rPr sz="1400" b="0">
                 <a:solidFill>
                   <a:srgbClr val="0B2B52"/>
                 </a:solidFill>
               </a:rPr>
+              <a:t>   A disordered peptide cannot do that. This term survives the objection.</a:t>
+            </a:r>
+          </a:p>
+          <a:p>
+            <a:pPr>
+              <a:spcAft>
+                <a:spcPts val="600"/>
+              </a:spcAft>
+            </a:pPr>
+            <a:r>
+              <a:rPr sz="1400" b="0">
+                <a:solidFill>
+                  <a:srgbClr val="0B2B52"/>
+                </a:solidFill>
+              </a:rPr>
               <a:t/>
             </a:r>
           </a:p>
@@ -10179,12 +9803,42 @@
               </a:spcAft>
             </a:pPr>
             <a:r>
-              <a:rPr sz="1450" b="0">
+              <a:rPr sz="1400" b="0">
                 <a:solidFill>
                   <a:srgbClr val="0B2B52"/>
                 </a:solidFill>
               </a:rPr>
-              <a:t>It also survives the reproducibility test that demoted ipTM: effect +3.30 against run-to-run SD 1.92 = 1.72× noise, where ipTM managed 0.20× — an 8.6× better ratio. Reproduces at p &lt; 0.05 in 100% of re-runs.</a:t>
+              <a:t>Is the response tied to the binding site?  88 folds, alanine scan:</a:t>
+            </a:r>
+          </a:p>
+          <a:p>
+            <a:pPr>
+              <a:spcAft>
+                <a:spcPts val="600"/>
+              </a:spcAft>
+            </a:pPr>
+            <a:r>
+              <a:rPr sz="1400" b="0">
+                <a:solidFill>
+                  <a:srgbClr val="0B2B52"/>
+                </a:solidFill>
+              </a:rPr>
+              <a:t>•  interface→Ala 36.77  vs  surface→Ala 38.62   diff −1.84, p = 0.244 — right direction, not significant</a:t>
+            </a:r>
+          </a:p>
+          <a:p>
+            <a:pPr>
+              <a:spcAft>
+                <a:spcPts val="600"/>
+              </a:spcAft>
+            </a:pPr>
+            <a:r>
+              <a:rPr sz="1400" b="0">
+                <a:solidFill>
+                  <a:srgbClr val="0B2B52"/>
+                </a:solidFill>
+              </a:rPr>
+              <a:t>•  80% power would need 123 receptors; every arm drops 7–12 pLDDT, so both may sit near a floor.</a:t>
             </a:r>
           </a:p>
         </p:txBody>
@@ -10239,7 +9893,7 @@
                   <a:srgbClr val="8A5200"/>
                 </a:solidFill>
               </a:rPr>
-              <a:t>⚠  pDockQ multiplies interface pLDDT by a contact term — contacts run the WRONG way here (scrambles make more: 38.5 vs 32.9), cancelling the signal. NOTE: slide 22 shows this result is MODEL-DEPENDENT — it does not hold on Boltz-1 — and that receptor specificity IS established on a few-step-trained model.</a:t>
+              <a:t>⚠  This QUALIFIES slide 19. Half the pooled signal is peptide foldability, which slide 19 did not separate. What stands: the receptor responds to which peptide it is given. Not established: that the response is localised to the binding site.</a:t>
             </a:r>
           </a:p>
         </p:txBody>
@@ -10381,7 +10035,7 @@
                   <a:srgbClr val="FFFFFF"/>
                 </a:solidFill>
               </a:rPr>
-              <a:t>ipTM vs Interface pLDDT — the Scramble Control</a:t>
+              <a:t>Measured — Few-Step Distillation Changes the Picture</a:t>
             </a:r>
           </a:p>
         </p:txBody>
@@ -10454,48 +10108,237 @@
             <a:r>
               <a:rPr sz="1000" b="0">
                 <a:solidFill>
-                  <a:srgbClr val="555555"/>
-                </a:solidFill>
-              </a:rPr>
-              <a:t>20</a:t>
-            </a:r>
-          </a:p>
-        </p:txBody>
-      </p:sp>
-      <p:pic>
-        <p:nvPicPr>
-          <p:cNvPr id="7" name="Picture 6" descr="fig_metric_comparison.png"/>
-          <p:cNvPicPr>
-            <a:picLocks noChangeAspect="1"/>
-          </p:cNvPicPr>
-          <p:nvPr/>
-        </p:nvPicPr>
-        <p:blipFill>
-          <a:blip r:embed="rId2"/>
-          <a:stretch>
-            <a:fillRect/>
-          </a:stretch>
-        </p:blipFill>
-        <p:spPr>
-          <a:xfrm>
-            <a:off x="1691640" y="1207008"/>
-            <a:ext cx="8778240" cy="4626370"/>
-          </a:xfrm>
-          <a:prstGeom prst="rect">
-            <a:avLst/>
-          </a:prstGeom>
-        </p:spPr>
-      </p:pic>
-      <p:sp>
-        <p:nvSpPr>
-          <p:cNvPr id="8" name="Rounded Rectangle 7"/>
+                  <a:srgbClr val="0B2B52"/>
+                </a:solidFill>
+              </a:rPr>
+              <a:t>23</a:t>
+            </a:r>
+          </a:p>
+        </p:txBody>
+      </p:sp>
+      <p:sp>
+        <p:nvSpPr>
+          <p:cNvPr id="7" name="Rounded Rectangle 6"/>
           <p:cNvSpPr/>
           <p:nvPr/>
         </p:nvSpPr>
         <p:spPr>
           <a:xfrm>
-            <a:off x="548640" y="5532120"/>
+            <a:off x="548640" y="1170432"/>
             <a:ext cx="11155680" cy="777240"/>
+          </a:xfrm>
+          <a:prstGeom prst="roundRect">
+            <a:avLst/>
+          </a:prstGeom>
+          <a:solidFill>
+            <a:srgbClr val="0B2B52"/>
+          </a:solidFill>
+          <a:ln>
+            <a:noFill/>
+          </a:ln>
+        </p:spPr>
+        <p:style>
+          <a:lnRef idx="1">
+            <a:schemeClr val="accent1"/>
+          </a:lnRef>
+          <a:fillRef idx="3">
+            <a:schemeClr val="accent1"/>
+          </a:fillRef>
+          <a:effectRef idx="2">
+            <a:schemeClr val="accent1"/>
+          </a:effectRef>
+          <a:fontRef idx="minor">
+            <a:schemeClr val="lt1"/>
+          </a:fontRef>
+        </p:style>
+        <p:txBody>
+          <a:bodyPr rtlCol="0" anchor="ctr" wrap="square"/>
+          <a:lstStyle/>
+          <a:p>
+            <a:pPr algn="ctr">
+              <a:spcAft>
+                <a:spcPts val="600"/>
+              </a:spcAft>
+            </a:pPr>
+            <a:r>
+              <a:rPr sz="1700" b="1">
+                <a:solidFill>
+                  <a:srgbClr val="FFFFFF"/>
+                </a:solidFill>
+              </a:rPr>
+              <a:t>Everything so far was folded at 10 steps on models built for 200. What happens on a model TRAINED for 10?</a:t>
+            </a:r>
+          </a:p>
+        </p:txBody>
+      </p:sp>
+      <p:sp>
+        <p:nvSpPr>
+          <p:cNvPr id="8" name="TextBox 7"/>
+          <p:cNvSpPr txBox="1"/>
+          <p:nvPr/>
+        </p:nvSpPr>
+        <p:spPr>
+          <a:xfrm>
+            <a:off x="548640" y="2057400"/>
+            <a:ext cx="11155680" cy="2926080"/>
+          </a:xfrm>
+          <a:prstGeom prst="rect">
+            <a:avLst/>
+          </a:prstGeom>
+          <a:noFill/>
+        </p:spPr>
+        <p:txBody>
+          <a:bodyPr wrap="square">
+            <a:spAutoFit/>
+          </a:bodyPr>
+          <a:lstStyle/>
+          <a:p>
+            <a:pPr>
+              <a:spcAft>
+                <a:spcPts val="600"/>
+              </a:spcAft>
+            </a:pPr>
+            <a:r>
+              <a:rPr sz="1350" b="0">
+                <a:solidFill>
+                  <a:srgbClr val="0B2B52"/>
+                </a:solidFill>
+              </a:rPr>
+              <a:t>Same 132 pairs. Boltz-1 added as a de-confounding arm — DeCAF changes the base model AND the sampling regime, and only Boltz-1 shares its base.</a:t>
+            </a:r>
+          </a:p>
+          <a:p>
+            <a:pPr>
+              <a:spcAft>
+                <a:spcPts val="600"/>
+              </a:spcAft>
+            </a:pPr>
+            <a:r>
+              <a:rPr sz="1350" b="0">
+                <a:solidFill>
+                  <a:srgbClr val="0B2B52"/>
+                </a:solidFill>
+              </a:rPr>
+              <a:t/>
+            </a:r>
+          </a:p>
+          <a:p>
+            <a:pPr>
+              <a:spcAft>
+                <a:spcPts val="600"/>
+              </a:spcAft>
+            </a:pPr>
+            <a:r>
+              <a:rPr sz="1350" b="0">
+                <a:solidFill>
+                  <a:srgbClr val="0B2B52"/>
+                </a:solidFill>
+              </a:rPr>
+              <a:t>cognate − own scramble        Boltz-2            Boltz-1            DeCAF</a:t>
+            </a:r>
+          </a:p>
+          <a:p>
+            <a:pPr>
+              <a:spcAft>
+                <a:spcPts val="600"/>
+              </a:spcAft>
+            </a:pPr>
+            <a:r>
+              <a:rPr sz="1350" b="0">
+                <a:solidFill>
+                  <a:srgbClr val="0B2B52"/>
+                </a:solidFill>
+              </a:rPr>
+              <a:t>  ipTM                        +0.013 (p=0.42)    +0.039 (p=.0043)   +0.201 (p=2e-5)</a:t>
+            </a:r>
+          </a:p>
+          <a:p>
+            <a:pPr>
+              <a:spcAft>
+                <a:spcPts val="600"/>
+              </a:spcAft>
+            </a:pPr>
+            <a:r>
+              <a:rPr sz="1350" b="0">
+                <a:solidFill>
+                  <a:srgbClr val="0B2B52"/>
+                </a:solidFill>
+              </a:rPr>
+              <a:t>  interface pLDDT             +3.30  (p&lt;1e-5)    +1.54  (p=0.067)   +9.54  (p&lt;1e-5)</a:t>
+            </a:r>
+          </a:p>
+          <a:p>
+            <a:pPr>
+              <a:spcAft>
+                <a:spcPts val="600"/>
+              </a:spcAft>
+            </a:pPr>
+            <a:r>
+              <a:rPr sz="1350" b="0">
+                <a:solidFill>
+                  <a:srgbClr val="0B2B52"/>
+                </a:solidFill>
+              </a:rPr>
+              <a:t/>
+            </a:r>
+          </a:p>
+          <a:p>
+            <a:pPr>
+              <a:spcAft>
+                <a:spcPts val="600"/>
+              </a:spcAft>
+            </a:pPr>
+            <a:r>
+              <a:rPr sz="1350" b="0">
+                <a:solidFill>
+                  <a:srgbClr val="0B2B52"/>
+                </a:solidFill>
+              </a:rPr>
+              <a:t>rank vs decoys (chance 2.50)  2.00 / 1.91        1.86 / 1.91        1.77 / 1.73</a:t>
+            </a:r>
+          </a:p>
+          <a:p>
+            <a:pPr>
+              <a:spcAft>
+                <a:spcPts val="600"/>
+              </a:spcAft>
+            </a:pPr>
+            <a:r>
+              <a:rPr sz="1350" b="0">
+                <a:solidFill>
+                  <a:srgbClr val="0B2B52"/>
+                </a:solidFill>
+              </a:rPr>
+              <a:t/>
+            </a:r>
+          </a:p>
+          <a:p>
+            <a:pPr>
+              <a:spcAft>
+                <a:spcPts val="600"/>
+              </a:spcAft>
+            </a:pPr>
+            <a:r>
+              <a:rPr sz="1350" b="0">
+                <a:solidFill>
+                  <a:srgbClr val="0B2B52"/>
+                </a:solidFill>
+              </a:rPr>
+              <a:t>DeCAF vs Boltz-1 — same base, device, step count — gives 5–6× larger effects. On DeCAF, interface pLDDT and receptor side CLEAR Bonferroni: receptor specificity is established for the first time in this work.</a:t>
+            </a:r>
+          </a:p>
+        </p:txBody>
+      </p:sp>
+      <p:sp>
+        <p:nvSpPr>
+          <p:cNvPr id="9" name="Rounded Rectangle 8"/>
+          <p:cNvSpPr/>
+          <p:nvPr/>
+        </p:nvSpPr>
+        <p:spPr>
+          <a:xfrm>
+            <a:off x="548640" y="5486400"/>
+            <a:ext cx="11155680" cy="868680"/>
           </a:xfrm>
           <a:prstGeom prst="roundRect">
             <a:avLst/>
@@ -10536,7 +10379,7 @@
                   <a:srgbClr val="8A5200"/>
                 </a:solidFill>
               </a:rPr>
-              <a:t>Same structures, two readouts. ipTM cannot separate a cognate from its own scramble; interface pLDDT can. The information is in the prediction — ipTM discards it.</a:t>
+              <a:t>⚠  Two claims weaken. Stock models are NOT signal-free — Boltz-1 separates on ipTM (p=0.0043). An earlier reading that the interface-pLDDT result is MODEL-DEPENDENT is WITHDRAWN: Boltz-1's p=0.067 was two non-binders diluting a 22-receptor panel, and goes to p=0.013 once they are removed. 'Settings explain the negatives' is too simple.</a:t>
             </a:r>
           </a:p>
         </p:txBody>
@@ -10678,7 +10521,7 @@
                   <a:srgbClr val="FFFFFF"/>
                 </a:solidFill>
               </a:rPr>
-              <a:t>Measured — Where That Signal Actually Comes From</a:t>
+              <a:t>Three Arms — What Few-Step Training Buys</a:t>
             </a:r>
           </a:p>
         </p:txBody>
@@ -10751,222 +10594,48 @@
             <a:r>
               <a:rPr sz="1000" b="0">
                 <a:solidFill>
-                  <a:srgbClr val="555555"/>
-                </a:solidFill>
-              </a:rPr>
-              <a:t>21</a:t>
-            </a:r>
-          </a:p>
-        </p:txBody>
-      </p:sp>
-      <p:sp>
-        <p:nvSpPr>
-          <p:cNvPr id="7" name="Rounded Rectangle 6"/>
+                  <a:srgbClr val="0B2B52"/>
+                </a:solidFill>
+              </a:rPr>
+              <a:t>24</a:t>
+            </a:r>
+          </a:p>
+        </p:txBody>
+      </p:sp>
+      <p:pic>
+        <p:nvPicPr>
+          <p:cNvPr id="7" name="Picture 6" descr="fig_few_step_arms.png"/>
+          <p:cNvPicPr>
+            <a:picLocks noChangeAspect="1"/>
+          </p:cNvPicPr>
+          <p:nvPr/>
+        </p:nvPicPr>
+        <p:blipFill>
+          <a:blip r:embed="rId2"/>
+          <a:stretch>
+            <a:fillRect/>
+          </a:stretch>
+        </p:blipFill>
+        <p:spPr>
+          <a:xfrm>
+            <a:off x="1691640" y="1207008"/>
+            <a:ext cx="8778240" cy="4626370"/>
+          </a:xfrm>
+          <a:prstGeom prst="rect">
+            <a:avLst/>
+          </a:prstGeom>
+        </p:spPr>
+      </p:pic>
+      <p:sp>
+        <p:nvSpPr>
+          <p:cNvPr id="8" name="Rounded Rectangle 7"/>
           <p:cNvSpPr/>
           <p:nvPr/>
         </p:nvSpPr>
         <p:spPr>
           <a:xfrm>
-            <a:off x="548640" y="1188720"/>
+            <a:off x="548640" y="5532120"/>
             <a:ext cx="11155680" cy="777240"/>
-          </a:xfrm>
-          <a:prstGeom prst="roundRect">
-            <a:avLst/>
-          </a:prstGeom>
-          <a:solidFill>
-            <a:srgbClr val="0B2B52"/>
-          </a:solidFill>
-          <a:ln>
-            <a:noFill/>
-          </a:ln>
-        </p:spPr>
-        <p:style>
-          <a:lnRef idx="1">
-            <a:schemeClr val="accent1"/>
-          </a:lnRef>
-          <a:fillRef idx="3">
-            <a:schemeClr val="accent1"/>
-          </a:fillRef>
-          <a:effectRef idx="2">
-            <a:schemeClr val="accent1"/>
-          </a:effectRef>
-          <a:fontRef idx="minor">
-            <a:schemeClr val="lt1"/>
-          </a:fontRef>
-        </p:style>
-        <p:txBody>
-          <a:bodyPr rtlCol="0" anchor="ctr" wrap="square"/>
-          <a:lstStyle/>
-          <a:p>
-            <a:pPr algn="ctr">
-              <a:spcAft>
-                <a:spcPts val="600"/>
-              </a:spcAft>
-            </a:pPr>
-            <a:r>
-              <a:rPr sz="1700" b="1">
-                <a:solidFill>
-                  <a:srgbClr val="FFFFFF"/>
-                </a:solidFill>
-              </a:rPr>
-              <a:t>Interface pLDDT responds to sequence order. Does it respond to BINDING, or just to the peptide being better folded?</a:t>
-            </a:r>
-          </a:p>
-        </p:txBody>
-      </p:sp>
-      <p:sp>
-        <p:nvSpPr>
-          <p:cNvPr id="8" name="TextBox 7"/>
-          <p:cNvSpPr txBox="1"/>
-          <p:nvPr/>
-        </p:nvSpPr>
-        <p:spPr>
-          <a:xfrm>
-            <a:off x="548640" y="2103120"/>
-            <a:ext cx="11155680" cy="2926080"/>
-          </a:xfrm>
-          <a:prstGeom prst="rect">
-            <a:avLst/>
-          </a:prstGeom>
-          <a:noFill/>
-        </p:spPr>
-        <p:txBody>
-          <a:bodyPr wrap="square">
-            <a:spAutoFit/>
-          </a:bodyPr>
-          <a:lstStyle/>
-          <a:p>
-            <a:pPr>
-              <a:spcAft>
-                <a:spcPts val="600"/>
-              </a:spcAft>
-            </a:pPr>
-            <a:r>
-              <a:rPr sz="1400" b="0">
-                <a:solidFill>
-                  <a:srgbClr val="0B2B52"/>
-                </a:solidFill>
-              </a:rPr>
-              <a:t>Splitting the metric by chain — no new folding:</a:t>
-            </a:r>
-          </a:p>
-          <a:p>
-            <a:pPr>
-              <a:spcAft>
-                <a:spcPts val="600"/>
-              </a:spcAft>
-            </a:pPr>
-            <a:r>
-              <a:rPr sz="1400" b="0">
-                <a:solidFill>
-                  <a:srgbClr val="0B2B52"/>
-                </a:solidFill>
-              </a:rPr>
-              <a:t>•  peptide side  +5.25   but whole-chain peptide pLDDT  +4.87   →  mostly FOLDABILITY, not interface</a:t>
-            </a:r>
-          </a:p>
-          <a:p>
-            <a:pPr>
-              <a:spcAft>
-                <a:spcPts val="600"/>
-              </a:spcAft>
-            </a:pPr>
-            <a:r>
-              <a:rPr sz="1400" b="0">
-                <a:solidFill>
-                  <a:srgbClr val="0B2B52"/>
-                </a:solidFill>
-              </a:rPr>
-              <a:t>•  RECEPTOR side  +2.38  (p = 6e-5)  →  the receptor's own residues are placed better when given the right peptide.</a:t>
-            </a:r>
-          </a:p>
-          <a:p>
-            <a:pPr>
-              <a:spcAft>
-                <a:spcPts val="600"/>
-              </a:spcAft>
-            </a:pPr>
-            <a:r>
-              <a:rPr sz="1400" b="0">
-                <a:solidFill>
-                  <a:srgbClr val="0B2B52"/>
-                </a:solidFill>
-              </a:rPr>
-              <a:t>   A disordered peptide cannot do that. This term survives the objection.</a:t>
-            </a:r>
-          </a:p>
-          <a:p>
-            <a:pPr>
-              <a:spcAft>
-                <a:spcPts val="600"/>
-              </a:spcAft>
-            </a:pPr>
-            <a:r>
-              <a:rPr sz="1400" b="0">
-                <a:solidFill>
-                  <a:srgbClr val="0B2B52"/>
-                </a:solidFill>
-              </a:rPr>
-              <a:t/>
-            </a:r>
-          </a:p>
-          <a:p>
-            <a:pPr>
-              <a:spcAft>
-                <a:spcPts val="600"/>
-              </a:spcAft>
-            </a:pPr>
-            <a:r>
-              <a:rPr sz="1400" b="0">
-                <a:solidFill>
-                  <a:srgbClr val="0B2B52"/>
-                </a:solidFill>
-              </a:rPr>
-              <a:t>Is the response tied to the binding site?  88 folds, alanine scan:</a:t>
-            </a:r>
-          </a:p>
-          <a:p>
-            <a:pPr>
-              <a:spcAft>
-                <a:spcPts val="600"/>
-              </a:spcAft>
-            </a:pPr>
-            <a:r>
-              <a:rPr sz="1400" b="0">
-                <a:solidFill>
-                  <a:srgbClr val="0B2B52"/>
-                </a:solidFill>
-              </a:rPr>
-              <a:t>•  interface→Ala 36.77  vs  surface→Ala 38.62   diff −1.84, p = 0.244 — right direction, not significant</a:t>
-            </a:r>
-          </a:p>
-          <a:p>
-            <a:pPr>
-              <a:spcAft>
-                <a:spcPts val="600"/>
-              </a:spcAft>
-            </a:pPr>
-            <a:r>
-              <a:rPr sz="1400" b="0">
-                <a:solidFill>
-                  <a:srgbClr val="0B2B52"/>
-                </a:solidFill>
-              </a:rPr>
-              <a:t>•  80% power would need 123 receptors; every arm drops 7–12 pLDDT, so both may sit near a floor.</a:t>
-            </a:r>
-          </a:p>
-        </p:txBody>
-      </p:sp>
-      <p:sp>
-        <p:nvSpPr>
-          <p:cNvPr id="9" name="Rounded Rectangle 8"/>
-          <p:cNvSpPr/>
-          <p:nvPr/>
-        </p:nvSpPr>
-        <p:spPr>
-          <a:xfrm>
-            <a:off x="548640" y="5440680"/>
-            <a:ext cx="11155680" cy="868680"/>
           </a:xfrm>
           <a:prstGeom prst="roundRect">
             <a:avLst/>
@@ -11007,7 +10676,7 @@
                   <a:srgbClr val="8A5200"/>
                 </a:solidFill>
               </a:rPr>
-              <a:t>⚠  This QUALIFIES slide 19. Half the pooled signal is peptide foldability, which slide 19 did not separate. What stands: the receptor responds to which peptide it is given. Not established: that the response is localised to the binding site.</a:t>
+              <a:t>Effects normalised by the run-to-run noise of Section 7.5 so metrics on different scales compare. DeCAF vs Boltz-1 isolates few-step training; the Boltz-2 arm ran on CPU, the others on MPS.</a:t>
             </a:r>
           </a:p>
         </p:txBody>
@@ -11149,7 +10818,7 @@
                   <a:srgbClr val="FFFFFF"/>
                 </a:solidFill>
               </a:rPr>
-              <a:t>Measured — Few-Step Distillation Changes the Picture</a:t>
+              <a:t>Measured — Held-Out Complexes Cost Half the Effect</a:t>
             </a:r>
           </a:p>
         </p:txBody>
@@ -11222,24 +10891,316 @@
             <a:r>
               <a:rPr sz="1000" b="0">
                 <a:solidFill>
-                  <a:srgbClr val="555555"/>
-                </a:solidFill>
-              </a:rPr>
-              <a:t>22</a:t>
-            </a:r>
-          </a:p>
-        </p:txBody>
-      </p:sp>
-      <p:sp>
-        <p:nvSpPr>
-          <p:cNvPr id="7" name="Rounded Rectangle 6"/>
+                  <a:srgbClr val="0B2B52"/>
+                </a:solidFill>
+              </a:rPr>
+              <a:t>25</a:t>
+            </a:r>
+          </a:p>
+        </p:txBody>
+      </p:sp>
+      <p:sp>
+        <p:nvSpPr>
+          <p:cNvPr id="7" name="TextBox 6"/>
+          <p:cNvSpPr txBox="1"/>
+          <p:nvPr/>
+        </p:nvSpPr>
+        <p:spPr>
+          <a:xfrm>
+            <a:off x="548640" y="1188720"/>
+            <a:ext cx="11155680" cy="1005840"/>
+          </a:xfrm>
+          <a:prstGeom prst="rect">
+            <a:avLst/>
+          </a:prstGeom>
+          <a:noFill/>
+        </p:spPr>
+        <p:txBody>
+          <a:bodyPr wrap="square">
+            <a:spAutoFit/>
+          </a:bodyPr>
+          <a:lstStyle/>
+          <a:p>
+            <a:pPr>
+              <a:spcAft>
+                <a:spcPts val="600"/>
+              </a:spcAft>
+            </a:pPr>
+            <a:r>
+              <a:rPr sz="1500" b="0">
+                <a:solidFill>
+                  <a:srgbClr val="0B2B52"/>
+                </a:solidFill>
+              </a:rPr>
+              <a:t>22 receptors released after Boltz-1's 2021-09-30 training cutoff, screened identically,</a:t>
+            </a:r>
+          </a:p>
+          <a:p>
+            <a:pPr>
+              <a:spcAft>
+                <a:spcPts val="600"/>
+              </a:spcAft>
+            </a:pPr>
+            <a:r>
+              <a:rPr sz="1500" b="0">
+                <a:solidFill>
+                  <a:srgbClr val="0B2B52"/>
+                </a:solidFill>
+              </a:rPr>
+              <a:t>decoys drawn from within the held-out set. Folded three times on DeCAF.</a:t>
+            </a:r>
+          </a:p>
+        </p:txBody>
+      </p:sp>
+      <p:sp>
+        <p:nvSpPr>
+          <p:cNvPr id="8" name="Rounded Rectangle 7"/>
           <p:cNvSpPr/>
           <p:nvPr/>
         </p:nvSpPr>
         <p:spPr>
           <a:xfrm>
-            <a:off x="548640" y="1170432"/>
-            <a:ext cx="11155680" cy="777240"/>
+            <a:off x="548640" y="2011680"/>
+            <a:ext cx="3520440" cy="1463040"/>
+          </a:xfrm>
+          <a:prstGeom prst="roundRect">
+            <a:avLst/>
+          </a:prstGeom>
+          <a:solidFill>
+            <a:srgbClr val="1E6FB8"/>
+          </a:solidFill>
+          <a:ln>
+            <a:noFill/>
+          </a:ln>
+        </p:spPr>
+        <p:style>
+          <a:lnRef idx="1">
+            <a:schemeClr val="accent1"/>
+          </a:lnRef>
+          <a:fillRef idx="3">
+            <a:schemeClr val="accent1"/>
+          </a:fillRef>
+          <a:effectRef idx="2">
+            <a:schemeClr val="accent1"/>
+          </a:effectRef>
+          <a:fontRef idx="minor">
+            <a:schemeClr val="lt1"/>
+          </a:fontRef>
+        </p:style>
+        <p:txBody>
+          <a:bodyPr rtlCol="0" anchor="ctr" wrap="square"/>
+          <a:lstStyle/>
+          <a:p>
+            <a:pPr algn="ctr"/>
+            <a:r>
+              <a:rPr sz="2300" b="1">
+                <a:solidFill>
+                  <a:srgbClr val="FFFFFF"/>
+                </a:solidFill>
+              </a:rPr>
+              <a:t>+12.03 → +4.99</a:t>
+            </a:r>
+          </a:p>
+          <a:p>
+            <a:pPr algn="ctr"/>
+            <a:r>
+              <a:rPr sz="1050">
+                <a:solidFill>
+                  <a:srgbClr val="FFFFFF"/>
+                </a:solidFill>
+              </a:rPr>
+              <a:t>interface pLDDT, in-training → held out</a:t>
+            </a:r>
+          </a:p>
+        </p:txBody>
+      </p:sp>
+      <p:sp>
+        <p:nvSpPr>
+          <p:cNvPr id="9" name="Rounded Rectangle 8"/>
+          <p:cNvSpPr/>
+          <p:nvPr/>
+        </p:nvSpPr>
+        <p:spPr>
+          <a:xfrm>
+            <a:off x="4343400" y="2011680"/>
+            <a:ext cx="3520440" cy="1463040"/>
+          </a:xfrm>
+          <a:prstGeom prst="roundRect">
+            <a:avLst/>
+          </a:prstGeom>
+          <a:solidFill>
+            <a:srgbClr val="0E8F9A"/>
+          </a:solidFill>
+          <a:ln>
+            <a:noFill/>
+          </a:ln>
+        </p:spPr>
+        <p:style>
+          <a:lnRef idx="1">
+            <a:schemeClr val="accent1"/>
+          </a:lnRef>
+          <a:fillRef idx="3">
+            <a:schemeClr val="accent1"/>
+          </a:fillRef>
+          <a:effectRef idx="2">
+            <a:schemeClr val="accent1"/>
+          </a:effectRef>
+          <a:fontRef idx="minor">
+            <a:schemeClr val="lt1"/>
+          </a:fontRef>
+        </p:style>
+        <p:txBody>
+          <a:bodyPr rtlCol="0" anchor="ctr" wrap="square"/>
+          <a:lstStyle/>
+          <a:p>
+            <a:pPr algn="ctr"/>
+            <a:r>
+              <a:rPr sz="2300" b="1">
+                <a:solidFill>
+                  <a:srgbClr val="FFFFFF"/>
+                </a:solidFill>
+              </a:rPr>
+              <a:t>+0.265 → +0.137</a:t>
+            </a:r>
+          </a:p>
+          <a:p>
+            <a:pPr algn="ctr"/>
+            <a:r>
+              <a:rPr sz="1050">
+                <a:solidFill>
+                  <a:srgbClr val="FFFFFF"/>
+                </a:solidFill>
+              </a:rPr>
+              <a:t>ipTM, in-training → held out</a:t>
+            </a:r>
+          </a:p>
+        </p:txBody>
+      </p:sp>
+      <p:sp>
+        <p:nvSpPr>
+          <p:cNvPr id="10" name="Rounded Rectangle 9"/>
+          <p:cNvSpPr/>
+          <p:nvPr/>
+        </p:nvSpPr>
+        <p:spPr>
+          <a:xfrm>
+            <a:off x="8138160" y="2011680"/>
+            <a:ext cx="3566160" cy="1463040"/>
+          </a:xfrm>
+          <a:prstGeom prst="roundRect">
+            <a:avLst/>
+          </a:prstGeom>
+          <a:solidFill>
+            <a:srgbClr val="C62828"/>
+          </a:solidFill>
+          <a:ln>
+            <a:noFill/>
+          </a:ln>
+        </p:spPr>
+        <p:style>
+          <a:lnRef idx="1">
+            <a:schemeClr val="accent1"/>
+          </a:lnRef>
+          <a:fillRef idx="3">
+            <a:schemeClr val="accent1"/>
+          </a:fillRef>
+          <a:effectRef idx="2">
+            <a:schemeClr val="accent1"/>
+          </a:effectRef>
+          <a:fontRef idx="minor">
+            <a:schemeClr val="lt1"/>
+          </a:fontRef>
+        </p:style>
+        <p:txBody>
+          <a:bodyPr rtlCol="0" anchor="ctr" wrap="square"/>
+          <a:lstStyle/>
+          <a:p>
+            <a:pPr algn="ctr"/>
+            <a:r>
+              <a:rPr sz="2300" b="1">
+                <a:solidFill>
+                  <a:srgbClr val="FFFFFF"/>
+                </a:solidFill>
+              </a:rPr>
+              <a:t>≈ 2×</a:t>
+            </a:r>
+          </a:p>
+          <a:p>
+            <a:pPr algn="ctr"/>
+            <a:r>
+              <a:rPr sz="1050">
+                <a:solidFill>
+                  <a:srgbClr val="FFFFFF"/>
+                </a:solidFill>
+              </a:rPr>
+              <a:t>how optimistic an unsplit benchmark is</a:t>
+            </a:r>
+          </a:p>
+        </p:txBody>
+      </p:sp>
+      <p:sp>
+        <p:nvSpPr>
+          <p:cNvPr id="11" name="TextBox 10"/>
+          <p:cNvSpPr txBox="1"/>
+          <p:nvPr/>
+        </p:nvSpPr>
+        <p:spPr>
+          <a:xfrm>
+            <a:off x="548640" y="3749039"/>
+            <a:ext cx="11155680" cy="1005840"/>
+          </a:xfrm>
+          <a:prstGeom prst="rect">
+            <a:avLst/>
+          </a:prstGeom>
+          <a:noFill/>
+        </p:spPr>
+        <p:txBody>
+          <a:bodyPr wrap="square">
+            <a:spAutoFit/>
+          </a:bodyPr>
+          <a:lstStyle/>
+          <a:p>
+            <a:pPr>
+              <a:spcAft>
+                <a:spcPts val="600"/>
+              </a:spcAft>
+            </a:pPr>
+            <a:r>
+              <a:rPr sz="1500" b="0">
+                <a:solidFill>
+                  <a:srgbClr val="0B2B52"/>
+                </a:solidFill>
+              </a:rPr>
+              <a:t>Both readouts retain roughly half — interface pLDDT 41%, ipTM 52%.</a:t>
+            </a:r>
+          </a:p>
+          <a:p>
+            <a:pPr>
+              <a:spcAft>
+                <a:spcPts val="600"/>
+              </a:spcAft>
+            </a:pPr>
+            <a:r>
+              <a:rPr sz="1500" b="0">
+                <a:solidFill>
+                  <a:srgbClr val="0B2B52"/>
+                </a:solidFill>
+              </a:rPr>
+              <a:t>Neither can be shown to degrade more than the other on this panel.</a:t>
+            </a:r>
+          </a:p>
+        </p:txBody>
+      </p:sp>
+      <p:sp>
+        <p:nvSpPr>
+          <p:cNvPr id="12" name="Rounded Rectangle 11"/>
+          <p:cNvSpPr/>
+          <p:nvPr/>
+        </p:nvSpPr>
+        <p:spPr>
+          <a:xfrm>
+            <a:off x="548640" y="4617720"/>
+            <a:ext cx="11155680" cy="960120"/>
           </a:xfrm>
           <a:prstGeom prst="roundRect">
             <a:avLst/>
@@ -11280,178 +11241,20 @@
                   <a:srgbClr val="FFFFFF"/>
                 </a:solidFill>
               </a:rPr>
-              <a:t>Everything so far was folded at 10 steps on models built for 200. What happens on a model TRAINED for 10?</a:t>
-            </a:r>
-          </a:p>
-        </p:txBody>
-      </p:sp>
-      <p:sp>
-        <p:nvSpPr>
-          <p:cNvPr id="8" name="TextBox 7"/>
-          <p:cNvSpPr txBox="1"/>
-          <p:nvPr/>
-        </p:nvSpPr>
-        <p:spPr>
-          <a:xfrm>
-            <a:off x="548640" y="2057400"/>
-            <a:ext cx="11155680" cy="2926080"/>
-          </a:xfrm>
-          <a:prstGeom prst="rect">
-            <a:avLst/>
-          </a:prstGeom>
-          <a:noFill/>
-        </p:spPr>
-        <p:txBody>
-          <a:bodyPr wrap="square">
-            <a:spAutoFit/>
-          </a:bodyPr>
-          <a:lstStyle/>
-          <a:p>
-            <a:pPr>
-              <a:spcAft>
-                <a:spcPts val="600"/>
-              </a:spcAft>
-            </a:pPr>
-            <a:r>
-              <a:rPr sz="1350" b="0">
-                <a:solidFill>
-                  <a:srgbClr val="0B2B52"/>
-                </a:solidFill>
-              </a:rPr>
-              <a:t>Same 132 pairs. Boltz-1 added as a de-confounding arm — DeCAF changes the base model AND the sampling regime, and only Boltz-1 shares its base.</a:t>
-            </a:r>
-          </a:p>
-          <a:p>
-            <a:pPr>
-              <a:spcAft>
-                <a:spcPts val="600"/>
-              </a:spcAft>
-            </a:pPr>
-            <a:r>
-              <a:rPr sz="1350" b="0">
-                <a:solidFill>
-                  <a:srgbClr val="0B2B52"/>
-                </a:solidFill>
-              </a:rPr>
-              <a:t/>
-            </a:r>
-          </a:p>
-          <a:p>
-            <a:pPr>
-              <a:spcAft>
-                <a:spcPts val="600"/>
-              </a:spcAft>
-            </a:pPr>
-            <a:r>
-              <a:rPr sz="1350" b="0">
-                <a:solidFill>
-                  <a:srgbClr val="0B2B52"/>
-                </a:solidFill>
-              </a:rPr>
-              <a:t>cognate − own scramble        Boltz-2            Boltz-1            DeCAF</a:t>
-            </a:r>
-          </a:p>
-          <a:p>
-            <a:pPr>
-              <a:spcAft>
-                <a:spcPts val="600"/>
-              </a:spcAft>
-            </a:pPr>
-            <a:r>
-              <a:rPr sz="1350" b="0">
-                <a:solidFill>
-                  <a:srgbClr val="0B2B52"/>
-                </a:solidFill>
-              </a:rPr>
-              <a:t>  ipTM                        +0.013 (p=0.42)    +0.039 (p=.0043)   +0.201 (p=2e-5)</a:t>
-            </a:r>
-          </a:p>
-          <a:p>
-            <a:pPr>
-              <a:spcAft>
-                <a:spcPts val="600"/>
-              </a:spcAft>
-            </a:pPr>
-            <a:r>
-              <a:rPr sz="1350" b="0">
-                <a:solidFill>
-                  <a:srgbClr val="0B2B52"/>
-                </a:solidFill>
-              </a:rPr>
-              <a:t>  interface pLDDT             +3.30  (p&lt;1e-5)    +1.54  (p=0.067)   +9.54  (p&lt;1e-5)</a:t>
-            </a:r>
-          </a:p>
-          <a:p>
-            <a:pPr>
-              <a:spcAft>
-                <a:spcPts val="600"/>
-              </a:spcAft>
-            </a:pPr>
-            <a:r>
-              <a:rPr sz="1350" b="0">
-                <a:solidFill>
-                  <a:srgbClr val="0B2B52"/>
-                </a:solidFill>
-              </a:rPr>
-              <a:t/>
-            </a:r>
-          </a:p>
-          <a:p>
-            <a:pPr>
-              <a:spcAft>
-                <a:spcPts val="600"/>
-              </a:spcAft>
-            </a:pPr>
-            <a:r>
-              <a:rPr sz="1350" b="0">
-                <a:solidFill>
-                  <a:srgbClr val="0B2B52"/>
-                </a:solidFill>
-              </a:rPr>
-              <a:t>rank vs decoys (chance 2.50)  2.00 / 1.91        1.86 / 1.91        1.77 / 1.73</a:t>
-            </a:r>
-          </a:p>
-          <a:p>
-            <a:pPr>
-              <a:spcAft>
-                <a:spcPts val="600"/>
-              </a:spcAft>
-            </a:pPr>
-            <a:r>
-              <a:rPr sz="1350" b="0">
-                <a:solidFill>
-                  <a:srgbClr val="0B2B52"/>
-                </a:solidFill>
-              </a:rPr>
-              <a:t/>
-            </a:r>
-          </a:p>
-          <a:p>
-            <a:pPr>
-              <a:spcAft>
-                <a:spcPts val="600"/>
-              </a:spcAft>
-            </a:pPr>
-            <a:r>
-              <a:rPr sz="1350" b="0">
-                <a:solidFill>
-                  <a:srgbClr val="0B2B52"/>
-                </a:solidFill>
-              </a:rPr>
-              <a:t>DeCAF vs Boltz-1 — same base, device, step count — gives 5–6× larger effects. On DeCAF, interface pLDDT and receptor side CLEAR Bonferroni: receptor specificity is established for the first time in this work.</a:t>
-            </a:r>
-          </a:p>
-        </p:txBody>
-      </p:sp>
-      <p:sp>
-        <p:nvSpPr>
-          <p:cNvPr id="9" name="Rounded Rectangle 8"/>
+              <a:t>A screening figure quoted without saying whether the complexes were in training is about twice as good as it should be.</a:t>
+            </a:r>
+          </a:p>
+        </p:txBody>
+      </p:sp>
+      <p:sp>
+        <p:nvSpPr>
+          <p:cNvPr id="13" name="Rounded Rectangle 12"/>
           <p:cNvSpPr/>
           <p:nvPr/>
         </p:nvSpPr>
         <p:spPr>
           <a:xfrm>
-            <a:off x="548640" y="5486400"/>
+            <a:off x="548640" y="5669280"/>
             <a:ext cx="11155680" cy="868680"/>
           </a:xfrm>
           <a:prstGeom prst="roundRect">
@@ -11493,7 +11296,7 @@
                   <a:srgbClr val="8A5200"/>
                 </a:solidFill>
               </a:rPr>
-              <a:t>⚠  Two claims weaken. Stock models are NOT signal-free — Boltz-1 separates on ipTM (p=0.0043). And slide 19's interface-pLDDT result is MODEL-DEPENDENT: strong on Boltz-2 and DeCAF, not significant on Boltz-1 (p=0.067). 'Settings explain the negatives' is too simple.</a:t>
+              <a:t>Not homology-decontaminated, and cannot be: 0 of 22 held-out receptors clear 30% identity to the pre-cutoff PDB (median 1.000), and neither does a random sample of the whole candidate pool. What the split isolates is complex-level novelty with receptor familiarity held constant.</a:t>
             </a:r>
           </a:p>
         </p:txBody>
@@ -11635,7 +11438,7 @@
                   <a:srgbClr val="FFFFFF"/>
                 </a:solidFill>
               </a:rPr>
-              <a:t>Three Arms — What Few-Step Training Buys</a:t>
+              <a:t>Three Draws — and Two Retracted Claims</a:t>
             </a:r>
           </a:p>
         </p:txBody>
@@ -11708,48 +11511,475 @@
             <a:r>
               <a:rPr sz="1000" b="0">
                 <a:solidFill>
-                  <a:srgbClr val="555555"/>
-                </a:solidFill>
-              </a:rPr>
-              <a:t>23</a:t>
-            </a:r>
-          </a:p>
-        </p:txBody>
-      </p:sp>
-      <p:pic>
-        <p:nvPicPr>
-          <p:cNvPr id="7" name="Picture 6" descr="fig_few_step_arms.png"/>
-          <p:cNvPicPr>
-            <a:picLocks noChangeAspect="1"/>
-          </p:cNvPicPr>
-          <p:nvPr/>
-        </p:nvPicPr>
-        <p:blipFill>
-          <a:blip r:embed="rId2"/>
-          <a:stretch>
-            <a:fillRect/>
-          </a:stretch>
-        </p:blipFill>
-        <p:spPr>
-          <a:xfrm>
-            <a:off x="1691640" y="1207008"/>
-            <a:ext cx="8778240" cy="4626370"/>
-          </a:xfrm>
-          <a:prstGeom prst="rect">
-            <a:avLst/>
-          </a:prstGeom>
-        </p:spPr>
-      </p:pic>
-      <p:sp>
-        <p:nvSpPr>
-          <p:cNvPr id="8" name="Rounded Rectangle 7"/>
+                  <a:srgbClr val="0B2B52"/>
+                </a:solidFill>
+              </a:rPr>
+              <a:t>26</a:t>
+            </a:r>
+          </a:p>
+        </p:txBody>
+      </p:sp>
+      <p:sp>
+        <p:nvSpPr>
+          <p:cNvPr id="7" name="TextBox 6"/>
+          <p:cNvSpPr txBox="1"/>
+          <p:nvPr/>
+        </p:nvSpPr>
+        <p:spPr>
+          <a:xfrm>
+            <a:off x="548640" y="1188720"/>
+            <a:ext cx="11155680" cy="640080"/>
+          </a:xfrm>
+          <a:prstGeom prst="rect">
+            <a:avLst/>
+          </a:prstGeom>
+          <a:noFill/>
+        </p:spPr>
+        <p:txBody>
+          <a:bodyPr wrap="square">
+            <a:spAutoFit/>
+          </a:bodyPr>
+          <a:lstStyle/>
+          <a:p>
+            <a:pPr>
+              <a:spcAft>
+                <a:spcPts val="600"/>
+              </a:spcAft>
+            </a:pPr>
+            <a:r>
+              <a:rPr sz="1500" b="0">
+                <a:solidFill>
+                  <a:srgbClr val="0B2B52"/>
+                </a:solidFill>
+              </a:rPr>
+              <a:t>Folds are unseeded, so re-running the identical panel gives an independent draw.</a:t>
+            </a:r>
+          </a:p>
+        </p:txBody>
+      </p:sp>
+      <p:graphicFrame>
+        <p:nvGraphicFramePr>
+          <p:cNvPr id="8" name="Table 7"/>
+          <p:cNvGraphicFramePr>
+            <a:graphicFrameLocks noGrp="1"/>
+          </p:cNvGraphicFramePr>
+          <p:nvPr/>
+        </p:nvGraphicFramePr>
+        <p:xfrm>
+          <a:off x="548640" y="1783080"/>
+          <a:ext cx="11155680" cy="1371600"/>
+        </p:xfrm>
+        <a:graphic>
+          <a:graphicData uri="http://schemas.openxmlformats.org/drawingml/2006/table">
+            <a:tbl>
+              <a:tblPr firstRow="1" bandRow="1">
+                <a:tableStyleId>{5C22544A-7EE6-4342-B048-85BDC9FD1C3A}</a:tableStyleId>
+              </a:tblPr>
+              <a:tblGrid>
+                <a:gridCol w="4023360"/>
+                <a:gridCol w="1554480"/>
+                <a:gridCol w="1554480"/>
+                <a:gridCol w="1554480"/>
+                <a:gridCol w="2468880"/>
+              </a:tblGrid>
+              <a:tr h="457200">
+                <a:tc>
+                  <a:txBody>
+                    <a:bodyPr/>
+                    <a:lstStyle/>
+                    <a:p>
+                      <a:r>
+                        <a:rPr sz="1300" b="1">
+                          <a:solidFill>
+                            <a:srgbClr val="0B2B52"/>
+                          </a:solidFill>
+                        </a:rPr>
+                        <a:t>Cognate rank among its own decoys (chance 2.50)</a:t>
+                      </a:r>
+                    </a:p>
+                  </a:txBody>
+                  <a:tcPr/>
+                </a:tc>
+                <a:tc>
+                  <a:txBody>
+                    <a:bodyPr/>
+                    <a:lstStyle/>
+                    <a:p>
+                      <a:r>
+                        <a:rPr sz="1300" b="1">
+                          <a:solidFill>
+                            <a:srgbClr val="0B2B52"/>
+                          </a:solidFill>
+                        </a:rPr>
+                        <a:t>draw 1</a:t>
+                      </a:r>
+                    </a:p>
+                  </a:txBody>
+                  <a:tcPr/>
+                </a:tc>
+                <a:tc>
+                  <a:txBody>
+                    <a:bodyPr/>
+                    <a:lstStyle/>
+                    <a:p>
+                      <a:r>
+                        <a:rPr sz="1300" b="1">
+                          <a:solidFill>
+                            <a:srgbClr val="0B2B52"/>
+                          </a:solidFill>
+                        </a:rPr>
+                        <a:t>draw 2</a:t>
+                      </a:r>
+                    </a:p>
+                  </a:txBody>
+                  <a:tcPr/>
+                </a:tc>
+                <a:tc>
+                  <a:txBody>
+                    <a:bodyPr/>
+                    <a:lstStyle/>
+                    <a:p>
+                      <a:r>
+                        <a:rPr sz="1300" b="1">
+                          <a:solidFill>
+                            <a:srgbClr val="0B2B52"/>
+                          </a:solidFill>
+                        </a:rPr>
+                        <a:t>draw 3</a:t>
+                      </a:r>
+                    </a:p>
+                  </a:txBody>
+                  <a:tcPr/>
+                </a:tc>
+                <a:tc>
+                  <a:txBody>
+                    <a:bodyPr/>
+                    <a:lstStyle/>
+                    <a:p>
+                      <a:r>
+                        <a:rPr sz="1300" b="1">
+                          <a:solidFill>
+                            <a:srgbClr val="0B2B52"/>
+                          </a:solidFill>
+                        </a:rPr>
+                        <a:t>mean</a:t>
+                      </a:r>
+                    </a:p>
+                  </a:txBody>
+                  <a:tcPr/>
+                </a:tc>
+              </a:tr>
+              <a:tr h="457200">
+                <a:tc>
+                  <a:txBody>
+                    <a:bodyPr/>
+                    <a:lstStyle/>
+                    <a:p>
+                      <a:r>
+                        <a:rPr sz="1300" b="0">
+                          <a:solidFill>
+                            <a:srgbClr val="0B2B52"/>
+                          </a:solidFill>
+                        </a:rPr>
+                        <a:t>ipTM</a:t>
+                      </a:r>
+                    </a:p>
+                  </a:txBody>
+                  <a:tcPr/>
+                </a:tc>
+                <a:tc>
+                  <a:txBody>
+                    <a:bodyPr/>
+                    <a:lstStyle/>
+                    <a:p>
+                      <a:r>
+                        <a:rPr sz="1300" b="0">
+                          <a:solidFill>
+                            <a:srgbClr val="0B2B52"/>
+                          </a:solidFill>
+                        </a:rPr>
+                        <a:t>1.64</a:t>
+                      </a:r>
+                    </a:p>
+                  </a:txBody>
+                  <a:tcPr/>
+                </a:tc>
+                <a:tc>
+                  <a:txBody>
+                    <a:bodyPr/>
+                    <a:lstStyle/>
+                    <a:p>
+                      <a:r>
+                        <a:rPr sz="1300" b="0">
+                          <a:solidFill>
+                            <a:srgbClr val="0B2B52"/>
+                          </a:solidFill>
+                        </a:rPr>
+                        <a:t>1.50</a:t>
+                      </a:r>
+                    </a:p>
+                  </a:txBody>
+                  <a:tcPr/>
+                </a:tc>
+                <a:tc>
+                  <a:txBody>
+                    <a:bodyPr/>
+                    <a:lstStyle/>
+                    <a:p>
+                      <a:r>
+                        <a:rPr sz="1300" b="0">
+                          <a:solidFill>
+                            <a:srgbClr val="0B2B52"/>
+                          </a:solidFill>
+                        </a:rPr>
+                        <a:t>1.86</a:t>
+                      </a:r>
+                    </a:p>
+                  </a:txBody>
+                  <a:tcPr/>
+                </a:tc>
+                <a:tc>
+                  <a:txBody>
+                    <a:bodyPr/>
+                    <a:lstStyle/>
+                    <a:p>
+                      <a:r>
+                        <a:rPr sz="1300" b="0">
+                          <a:solidFill>
+                            <a:srgbClr val="0B2B52"/>
+                          </a:solidFill>
+                        </a:rPr>
+                        <a:t>1.73  (p = 0.007)</a:t>
+                      </a:r>
+                    </a:p>
+                  </a:txBody>
+                  <a:tcPr/>
+                </a:tc>
+              </a:tr>
+              <a:tr h="457200">
+                <a:tc>
+                  <a:txBody>
+                    <a:bodyPr/>
+                    <a:lstStyle/>
+                    <a:p>
+                      <a:r>
+                        <a:rPr sz="1300" b="0">
+                          <a:solidFill>
+                            <a:srgbClr val="0B2B52"/>
+                          </a:solidFill>
+                        </a:rPr>
+                        <a:t>interface pLDDT</a:t>
+                      </a:r>
+                    </a:p>
+                  </a:txBody>
+                  <a:tcPr/>
+                </a:tc>
+                <a:tc>
+                  <a:txBody>
+                    <a:bodyPr/>
+                    <a:lstStyle/>
+                    <a:p>
+                      <a:r>
+                        <a:rPr sz="1300" b="0">
+                          <a:solidFill>
+                            <a:srgbClr val="0B2B52"/>
+                          </a:solidFill>
+                        </a:rPr>
+                        <a:t>2.09</a:t>
+                      </a:r>
+                    </a:p>
+                  </a:txBody>
+                  <a:tcPr/>
+                </a:tc>
+                <a:tc>
+                  <a:txBody>
+                    <a:bodyPr/>
+                    <a:lstStyle/>
+                    <a:p>
+                      <a:r>
+                        <a:rPr sz="1300" b="0">
+                          <a:solidFill>
+                            <a:srgbClr val="0B2B52"/>
+                          </a:solidFill>
+                        </a:rPr>
+                        <a:t>2.05</a:t>
+                      </a:r>
+                    </a:p>
+                  </a:txBody>
+                  <a:tcPr/>
+                </a:tc>
+                <a:tc>
+                  <a:txBody>
+                    <a:bodyPr/>
+                    <a:lstStyle/>
+                    <a:p>
+                      <a:r>
+                        <a:rPr sz="1300" b="0">
+                          <a:solidFill>
+                            <a:srgbClr val="0B2B52"/>
+                          </a:solidFill>
+                        </a:rPr>
+                        <a:t>1.73</a:t>
+                      </a:r>
+                    </a:p>
+                  </a:txBody>
+                  <a:tcPr/>
+                </a:tc>
+                <a:tc>
+                  <a:txBody>
+                    <a:bodyPr/>
+                    <a:lstStyle/>
+                    <a:p>
+                      <a:r>
+                        <a:rPr sz="1300" b="0">
+                          <a:solidFill>
+                            <a:srgbClr val="0B2B52"/>
+                          </a:solidFill>
+                        </a:rPr>
+                        <a:t>1.91  (p = 0.020)</a:t>
+                      </a:r>
+                    </a:p>
+                  </a:txBody>
+                  <a:tcPr/>
+                </a:tc>
+              </a:tr>
+            </a:tbl>
+          </a:graphicData>
+        </a:graphic>
+      </p:graphicFrame>
+      <p:sp>
+        <p:nvSpPr>
+          <p:cNvPr id="9" name="TextBox 8"/>
+          <p:cNvSpPr txBox="1"/>
+          <p:nvPr/>
+        </p:nvSpPr>
+        <p:spPr>
+          <a:xfrm>
+            <a:off x="548640" y="3429000"/>
+            <a:ext cx="11155680" cy="1371600"/>
+          </a:xfrm>
+          <a:prstGeom prst="rect">
+            <a:avLst/>
+          </a:prstGeom>
+          <a:noFill/>
+        </p:spPr>
+        <p:txBody>
+          <a:bodyPr wrap="square">
+            <a:spAutoFit/>
+          </a:bodyPr>
+          <a:lstStyle/>
+          <a:p>
+            <a:pPr>
+              <a:spcAft>
+                <a:spcPts val="600"/>
+              </a:spcAft>
+            </a:pPr>
+            <a:r>
+              <a:rPr sz="1500" b="0">
+                <a:solidFill>
+                  <a:srgbClr val="0B2B52"/>
+                </a:solidFill>
+              </a:rPr>
+              <a:t>Draw 1 alone said interface pLDDT collapses held out.</a:t>
+            </a:r>
+          </a:p>
+          <a:p>
+            <a:pPr>
+              <a:spcAft>
+                <a:spcPts val="600"/>
+              </a:spcAft>
+            </a:pPr>
+            <a:r>
+              <a:rPr sz="1500" b="0">
+                <a:solidFill>
+                  <a:srgbClr val="0B2B52"/>
+                </a:solidFill>
+              </a:rPr>
+              <a:t>Draws 1 and 2 said ipTM specifically survives and interface pLDDT specifically fails.</a:t>
+            </a:r>
+          </a:p>
+          <a:p>
+            <a:pPr>
+              <a:spcAft>
+                <a:spcPts val="600"/>
+              </a:spcAft>
+            </a:pPr>
+            <a:r>
+              <a:rPr sz="1500" b="0">
+                <a:solidFill>
+                  <a:srgbClr val="0B2B52"/>
+                </a:solidFill>
+              </a:rPr>
+              <a:t>Draw 3 reverses the ordering. Averaged, the two differ by less than one draw's spread.</a:t>
+            </a:r>
+          </a:p>
+        </p:txBody>
+      </p:sp>
+      <p:sp>
+        <p:nvSpPr>
+          <p:cNvPr id="10" name="Rounded Rectangle 9"/>
           <p:cNvSpPr/>
           <p:nvPr/>
         </p:nvSpPr>
         <p:spPr>
           <a:xfrm>
-            <a:off x="548640" y="5532120"/>
-            <a:ext cx="11155680" cy="777240"/>
+            <a:off x="548640" y="4846320"/>
+            <a:ext cx="11155680" cy="960120"/>
+          </a:xfrm>
+          <a:prstGeom prst="roundRect">
+            <a:avLst/>
+          </a:prstGeom>
+          <a:solidFill>
+            <a:srgbClr val="C62828"/>
+          </a:solidFill>
+          <a:ln>
+            <a:noFill/>
+          </a:ln>
+        </p:spPr>
+        <p:style>
+          <a:lnRef idx="1">
+            <a:schemeClr val="accent1"/>
+          </a:lnRef>
+          <a:fillRef idx="3">
+            <a:schemeClr val="accent1"/>
+          </a:fillRef>
+          <a:effectRef idx="2">
+            <a:schemeClr val="accent1"/>
+          </a:effectRef>
+          <a:fontRef idx="minor">
+            <a:schemeClr val="lt1"/>
+          </a:fontRef>
+        </p:style>
+        <p:txBody>
+          <a:bodyPr rtlCol="0" anchor="ctr" wrap="square"/>
+          <a:lstStyle/>
+          <a:p>
+            <a:pPr algn="ctr">
+              <a:spcAft>
+                <a:spcPts val="600"/>
+              </a:spcAft>
+            </a:pPr>
+            <a:r>
+              <a:rPr sz="1700" b="1">
+                <a:solidFill>
+                  <a:srgbClr val="FFFFFF"/>
+                </a:solidFill>
+              </a:rPr>
+              <a:t>Both claims withdrawn. Section 7.5's own finding, turned on this project's headline — twice.</a:t>
+            </a:r>
+          </a:p>
+        </p:txBody>
+      </p:sp>
+      <p:sp>
+        <p:nvSpPr>
+          <p:cNvPr id="11" name="Rounded Rectangle 10"/>
+          <p:cNvSpPr/>
+          <p:nvPr/>
+        </p:nvSpPr>
+        <p:spPr>
+          <a:xfrm>
+            <a:off x="548640" y="5897880"/>
+            <a:ext cx="11155680" cy="868680"/>
           </a:xfrm>
           <a:prstGeom prst="roundRect">
             <a:avLst/>
@@ -11790,7 +12020,1722 @@
                   <a:srgbClr val="8A5200"/>
                 </a:solidFill>
               </a:rPr>
-              <a:t>Effects normalised by the run-to-run noise of Section 7.5 so metrics on different scales compare. DeCAF vs Boltz-1 isolates few-step training; the Boltz-2 arm ran on CPU, the others on MPS.</a:t>
+              <a:t>The methodological lesson is sharper than the scientific one: a single unseeded fold is not a measurement, and on this evidence neither are two.</a:t>
+            </a:r>
+          </a:p>
+        </p:txBody>
+      </p:sp>
+    </p:spTree>
+  </p:cSld>
+  <p:clrMapOvr>
+    <a:masterClrMapping/>
+  </p:clrMapOvr>
+</p:sld>
+</file>
+
+<file path=ppt/slides/slide27.xml><?xml version="1.0" encoding="utf-8"?>
+<p:sld xmlns:a="http://schemas.openxmlformats.org/drawingml/2006/main" xmlns:p="http://schemas.openxmlformats.org/presentationml/2006/main" xmlns:r="http://schemas.openxmlformats.org/officeDocument/2006/relationships">
+  <p:cSld>
+    <p:spTree>
+      <p:nvGrpSpPr>
+        <p:cNvPr id="1" name=""/>
+        <p:cNvGrpSpPr/>
+        <p:nvPr/>
+      </p:nvGrpSpPr>
+      <p:grpSpPr/>
+      <p:sp>
+        <p:nvSpPr>
+          <p:cNvPr id="2" name="Rectangle 1"/>
+          <p:cNvSpPr/>
+          <p:nvPr/>
+        </p:nvSpPr>
+        <p:spPr>
+          <a:xfrm>
+            <a:off x="0" y="0"/>
+            <a:ext cx="12188952" cy="914400"/>
+          </a:xfrm>
+          <a:prstGeom prst="rect">
+            <a:avLst/>
+          </a:prstGeom>
+          <a:solidFill>
+            <a:srgbClr val="0B2B52"/>
+          </a:solidFill>
+          <a:ln>
+            <a:noFill/>
+          </a:ln>
+        </p:spPr>
+        <p:style>
+          <a:lnRef idx="1">
+            <a:schemeClr val="accent1"/>
+          </a:lnRef>
+          <a:fillRef idx="3">
+            <a:schemeClr val="accent1"/>
+          </a:fillRef>
+          <a:effectRef idx="2">
+            <a:schemeClr val="accent1"/>
+          </a:effectRef>
+          <a:fontRef idx="minor">
+            <a:schemeClr val="lt1"/>
+          </a:fontRef>
+        </p:style>
+        <p:txBody>
+          <a:bodyPr rtlCol="0" anchor="ctr"/>
+          <a:lstStyle/>
+          <a:p>
+            <a:pPr algn="ctr"/>
+          </a:p>
+        </p:txBody>
+      </p:sp>
+      <p:sp>
+        <p:nvSpPr>
+          <p:cNvPr id="3" name="Rectangle 2"/>
+          <p:cNvSpPr/>
+          <p:nvPr/>
+        </p:nvSpPr>
+        <p:spPr>
+          <a:xfrm>
+            <a:off x="0" y="914400"/>
+            <a:ext cx="12188952" cy="54864"/>
+          </a:xfrm>
+          <a:prstGeom prst="rect">
+            <a:avLst/>
+          </a:prstGeom>
+          <a:solidFill>
+            <a:srgbClr val="1E6FB8"/>
+          </a:solidFill>
+          <a:ln>
+            <a:noFill/>
+          </a:ln>
+        </p:spPr>
+        <p:style>
+          <a:lnRef idx="1">
+            <a:schemeClr val="accent1"/>
+          </a:lnRef>
+          <a:fillRef idx="3">
+            <a:schemeClr val="accent1"/>
+          </a:fillRef>
+          <a:effectRef idx="2">
+            <a:schemeClr val="accent1"/>
+          </a:effectRef>
+          <a:fontRef idx="minor">
+            <a:schemeClr val="lt1"/>
+          </a:fontRef>
+        </p:style>
+        <p:txBody>
+          <a:bodyPr rtlCol="0" anchor="ctr"/>
+          <a:lstStyle/>
+          <a:p>
+            <a:pPr algn="ctr"/>
+          </a:p>
+        </p:txBody>
+      </p:sp>
+      <p:sp>
+        <p:nvSpPr>
+          <p:cNvPr id="4" name="TextBox 3"/>
+          <p:cNvSpPr txBox="1"/>
+          <p:nvPr/>
+        </p:nvSpPr>
+        <p:spPr>
+          <a:xfrm>
+            <a:off x="502920" y="109728"/>
+            <a:ext cx="11155680" cy="777240"/>
+          </a:xfrm>
+          <a:prstGeom prst="rect">
+            <a:avLst/>
+          </a:prstGeom>
+          <a:noFill/>
+        </p:spPr>
+        <p:txBody>
+          <a:bodyPr wrap="square">
+            <a:spAutoFit/>
+          </a:bodyPr>
+          <a:lstStyle/>
+          <a:p>
+            <a:pPr>
+              <a:spcAft>
+                <a:spcPts val="600"/>
+              </a:spcAft>
+            </a:pPr>
+            <a:r>
+              <a:rPr sz="2600" b="1">
+                <a:solidFill>
+                  <a:srgbClr val="FFFFFF"/>
+                </a:solidFill>
+              </a:rPr>
+              <a:t>Measured — At Ten Steps the Coordinates Are Not a Protein</a:t>
+            </a:r>
+          </a:p>
+        </p:txBody>
+      </p:sp>
+      <p:sp>
+        <p:nvSpPr>
+          <p:cNvPr id="5" name="TextBox 4"/>
+          <p:cNvSpPr txBox="1"/>
+          <p:nvPr/>
+        </p:nvSpPr>
+        <p:spPr>
+          <a:xfrm>
+            <a:off x="502920" y="6473952"/>
+            <a:ext cx="8229600" cy="274320"/>
+          </a:xfrm>
+          <a:prstGeom prst="rect">
+            <a:avLst/>
+          </a:prstGeom>
+          <a:noFill/>
+        </p:spPr>
+        <p:txBody>
+          <a:bodyPr wrap="square">
+            <a:spAutoFit/>
+          </a:bodyPr>
+          <a:lstStyle/>
+          <a:p>
+            <a:pPr>
+              <a:spcAft>
+                <a:spcPts val="600"/>
+              </a:spcAft>
+            </a:pPr>
+            <a:r>
+              <a:rPr sz="900" b="0">
+                <a:solidFill>
+                  <a:srgbClr val="555555"/>
+                </a:solidFill>
+              </a:rPr>
+              <a:t>Boltz-Fast · Final Dissertation Report · Akik Jana (2024AB05287)</a:t>
+            </a:r>
+          </a:p>
+        </p:txBody>
+      </p:sp>
+      <p:sp>
+        <p:nvSpPr>
+          <p:cNvPr id="6" name="TextBox 5"/>
+          <p:cNvSpPr txBox="1"/>
+          <p:nvPr/>
+        </p:nvSpPr>
+        <p:spPr>
+          <a:xfrm>
+            <a:off x="11183112" y="6473952"/>
+            <a:ext cx="640080" cy="274320"/>
+          </a:xfrm>
+          <a:prstGeom prst="rect">
+            <a:avLst/>
+          </a:prstGeom>
+          <a:noFill/>
+        </p:spPr>
+        <p:txBody>
+          <a:bodyPr wrap="square">
+            <a:spAutoFit/>
+          </a:bodyPr>
+          <a:lstStyle/>
+          <a:p>
+            <a:pPr>
+              <a:spcAft>
+                <a:spcPts val="600"/>
+              </a:spcAft>
+            </a:pPr>
+            <a:r>
+              <a:rPr sz="1000" b="0">
+                <a:solidFill>
+                  <a:srgbClr val="0B2B52"/>
+                </a:solidFill>
+              </a:rPr>
+              <a:t>27</a:t>
+            </a:r>
+          </a:p>
+        </p:txBody>
+      </p:sp>
+      <p:sp>
+        <p:nvSpPr>
+          <p:cNvPr id="7" name="TextBox 6"/>
+          <p:cNvSpPr txBox="1"/>
+          <p:nvPr/>
+        </p:nvSpPr>
+        <p:spPr>
+          <a:xfrm>
+            <a:off x="548640" y="1188720"/>
+            <a:ext cx="11155680" cy="640080"/>
+          </a:xfrm>
+          <a:prstGeom prst="rect">
+            <a:avLst/>
+          </a:prstGeom>
+          <a:noFill/>
+        </p:spPr>
+        <p:txBody>
+          <a:bodyPr wrap="square">
+            <a:spAutoFit/>
+          </a:bodyPr>
+          <a:lstStyle/>
+          <a:p>
+            <a:pPr>
+              <a:spcAft>
+                <a:spcPts val="600"/>
+              </a:spcAft>
+            </a:pPr>
+            <a:r>
+              <a:rPr sz="1500" b="0">
+                <a:solidFill>
+                  <a:srgbClr val="0B2B52"/>
+                </a:solidFill>
+              </a:rPr>
+              <a:t>A peptide bond fixes consecutive alpha-carbons at 3.80 Å. Measuring every consecutive CA–CA distance:</a:t>
+            </a:r>
+          </a:p>
+        </p:txBody>
+      </p:sp>
+      <p:sp>
+        <p:nvSpPr>
+          <p:cNvPr id="8" name="Rounded Rectangle 7"/>
+          <p:cNvSpPr/>
+          <p:nvPr/>
+        </p:nvSpPr>
+        <p:spPr>
+          <a:xfrm>
+            <a:off x="548640" y="1874519"/>
+            <a:ext cx="5440680" cy="1463040"/>
+          </a:xfrm>
+          <a:prstGeom prst="roundRect">
+            <a:avLst/>
+          </a:prstGeom>
+          <a:solidFill>
+            <a:srgbClr val="C62828"/>
+          </a:solidFill>
+          <a:ln>
+            <a:noFill/>
+          </a:ln>
+        </p:spPr>
+        <p:style>
+          <a:lnRef idx="1">
+            <a:schemeClr val="accent1"/>
+          </a:lnRef>
+          <a:fillRef idx="3">
+            <a:schemeClr val="accent1"/>
+          </a:fillRef>
+          <a:effectRef idx="2">
+            <a:schemeClr val="accent1"/>
+          </a:effectRef>
+          <a:fontRef idx="minor">
+            <a:schemeClr val="lt1"/>
+          </a:fontRef>
+        </p:style>
+        <p:txBody>
+          <a:bodyPr rtlCol="0" anchor="ctr" wrap="square"/>
+          <a:lstStyle/>
+          <a:p>
+            <a:pPr algn="ctr"/>
+            <a:r>
+              <a:rPr sz="2300" b="1">
+                <a:solidFill>
+                  <a:srgbClr val="FFFFFF"/>
+                </a:solidFill>
+              </a:rPr>
+              <a:t>14.0%</a:t>
+            </a:r>
+          </a:p>
+          <a:p>
+            <a:pPr algn="ctr"/>
+            <a:r>
+              <a:rPr sz="1050">
+                <a:solidFill>
+                  <a:srgbClr val="FFFFFF"/>
+                </a:solidFill>
+              </a:rPr>
+              <a:t>Boltz-2 at 10 steps — physically plausible backbone bonds</a:t>
+            </a:r>
+          </a:p>
+        </p:txBody>
+      </p:sp>
+      <p:sp>
+        <p:nvSpPr>
+          <p:cNvPr id="9" name="Rounded Rectangle 8"/>
+          <p:cNvSpPr/>
+          <p:nvPr/>
+        </p:nvSpPr>
+        <p:spPr>
+          <a:xfrm>
+            <a:off x="6263640" y="1874519"/>
+            <a:ext cx="5440680" cy="1463040"/>
+          </a:xfrm>
+          <a:prstGeom prst="roundRect">
+            <a:avLst/>
+          </a:prstGeom>
+          <a:solidFill>
+            <a:srgbClr val="2E7D32"/>
+          </a:solidFill>
+          <a:ln>
+            <a:noFill/>
+          </a:ln>
+        </p:spPr>
+        <p:style>
+          <a:lnRef idx="1">
+            <a:schemeClr val="accent1"/>
+          </a:lnRef>
+          <a:fillRef idx="3">
+            <a:schemeClr val="accent1"/>
+          </a:fillRef>
+          <a:effectRef idx="2">
+            <a:schemeClr val="accent1"/>
+          </a:effectRef>
+          <a:fontRef idx="minor">
+            <a:schemeClr val="lt1"/>
+          </a:fontRef>
+        </p:style>
+        <p:txBody>
+          <a:bodyPr rtlCol="0" anchor="ctr" wrap="square"/>
+          <a:lstStyle/>
+          <a:p>
+            <a:pPr algn="ctr"/>
+            <a:r>
+              <a:rPr sz="2300" b="1">
+                <a:solidFill>
+                  <a:srgbClr val="FFFFFF"/>
+                </a:solidFill>
+              </a:rPr>
+              <a:t>96.2%</a:t>
+            </a:r>
+          </a:p>
+          <a:p>
+            <a:pPr algn="ctr"/>
+            <a:r>
+              <a:rPr sz="1050">
+                <a:solidFill>
+                  <a:srgbClr val="FFFFFF"/>
+                </a:solidFill>
+              </a:rPr>
+              <a:t>DeCAF, distilled FOR 10 steps — same measurement</a:t>
+            </a:r>
+          </a:p>
+        </p:txBody>
+      </p:sp>
+      <p:sp>
+        <p:nvSpPr>
+          <p:cNvPr id="10" name="TextBox 9"/>
+          <p:cNvSpPr txBox="1"/>
+          <p:nvPr/>
+        </p:nvSpPr>
+        <p:spPr>
+          <a:xfrm>
+            <a:off x="548640" y="3611880"/>
+            <a:ext cx="11155680" cy="1371600"/>
+          </a:xfrm>
+          <a:prstGeom prst="rect">
+            <a:avLst/>
+          </a:prstGeom>
+          <a:noFill/>
+        </p:spPr>
+        <p:txBody>
+          <a:bodyPr wrap="square">
+            <a:spAutoFit/>
+          </a:bodyPr>
+          <a:lstStyle/>
+          <a:p>
+            <a:pPr>
+              <a:spcAft>
+                <a:spcPts val="600"/>
+              </a:spcAft>
+            </a:pPr>
+            <a:r>
+              <a:rPr sz="1500" b="0">
+                <a:solidFill>
+                  <a:srgbClr val="0B2B52"/>
+                </a:solidFill>
+              </a:rPr>
+              <a:t>Boltz-2: median CA–CA 5.48 Å, 56% of bonds beyond 5 Å, 99% of chains majority-broken.</a:t>
+            </a:r>
+          </a:p>
+          <a:p>
+            <a:pPr>
+              <a:spcAft>
+                <a:spcPts val="600"/>
+              </a:spcAft>
+            </a:pPr>
+            <a:r>
+              <a:rPr sz="1500" b="0">
+                <a:solidFill>
+                  <a:srgbClr val="0B2B52"/>
+                </a:solidFill>
+              </a:rPr>
+              <a:t>DeCAF:   median 3.74 Å, zero broken bonds.  Residue numbering is sequential —</a:t>
+            </a:r>
+          </a:p>
+          <a:p>
+            <a:pPr>
+              <a:spcAft>
+                <a:spcPts val="600"/>
+              </a:spcAft>
+            </a:pPr>
+            <a:r>
+              <a:rPr sz="1500" b="0">
+                <a:solidFill>
+                  <a:srgbClr val="0B2B52"/>
+                </a:solidFill>
+              </a:rPr>
+              <a:t>         this is not a file-ordering artefact. The backbone is genuinely not connected.</a:t>
+            </a:r>
+          </a:p>
+        </p:txBody>
+      </p:sp>
+      <p:sp>
+        <p:nvSpPr>
+          <p:cNvPr id="11" name="Rounded Rectangle 10"/>
+          <p:cNvSpPr/>
+          <p:nvPr/>
+        </p:nvSpPr>
+        <p:spPr>
+          <a:xfrm>
+            <a:off x="548640" y="4983480"/>
+            <a:ext cx="11155680" cy="960120"/>
+          </a:xfrm>
+          <a:prstGeom prst="roundRect">
+            <a:avLst/>
+          </a:prstGeom>
+          <a:solidFill>
+            <a:srgbClr val="2E7D32"/>
+          </a:solidFill>
+          <a:ln>
+            <a:noFill/>
+          </a:ln>
+        </p:spPr>
+        <p:style>
+          <a:lnRef idx="1">
+            <a:schemeClr val="accent1"/>
+          </a:lnRef>
+          <a:fillRef idx="3">
+            <a:schemeClr val="accent1"/>
+          </a:fillRef>
+          <a:effectRef idx="2">
+            <a:schemeClr val="accent1"/>
+          </a:effectRef>
+          <a:fontRef idx="minor">
+            <a:schemeClr val="lt1"/>
+          </a:fontRef>
+        </p:style>
+        <p:txBody>
+          <a:bodyPr rtlCol="0" anchor="ctr" wrap="square"/>
+          <a:lstStyle/>
+          <a:p>
+            <a:pPr algn="ctr">
+              <a:spcAft>
+                <a:spcPts val="600"/>
+              </a:spcAft>
+            </a:pPr>
+            <a:r>
+              <a:rPr sz="1700" b="1">
+                <a:solidFill>
+                  <a:srgbClr val="FFFFFF"/>
+                </a:solidFill>
+              </a:rPr>
+              <a:t>Section 7.8 measured that distillation buys a 5–6× larger effect. This is what it bought: geometry.</a:t>
+            </a:r>
+          </a:p>
+        </p:txBody>
+      </p:sp>
+    </p:spTree>
+  </p:cSld>
+  <p:clrMapOvr>
+    <a:masterClrMapping/>
+  </p:clrMapOvr>
+</p:sld>
+</file>
+
+<file path=ppt/slides/slide28.xml><?xml version="1.0" encoding="utf-8"?>
+<p:sld xmlns:a="http://schemas.openxmlformats.org/drawingml/2006/main" xmlns:p="http://schemas.openxmlformats.org/presentationml/2006/main" xmlns:r="http://schemas.openxmlformats.org/officeDocument/2006/relationships">
+  <p:cSld>
+    <p:spTree>
+      <p:nvGrpSpPr>
+        <p:cNvPr id="1" name=""/>
+        <p:cNvGrpSpPr/>
+        <p:nvPr/>
+      </p:nvGrpSpPr>
+      <p:grpSpPr/>
+      <p:sp>
+        <p:nvSpPr>
+          <p:cNvPr id="2" name="Rectangle 1"/>
+          <p:cNvSpPr/>
+          <p:nvPr/>
+        </p:nvSpPr>
+        <p:spPr>
+          <a:xfrm>
+            <a:off x="0" y="0"/>
+            <a:ext cx="12188952" cy="914400"/>
+          </a:xfrm>
+          <a:prstGeom prst="rect">
+            <a:avLst/>
+          </a:prstGeom>
+          <a:solidFill>
+            <a:srgbClr val="0B2B52"/>
+          </a:solidFill>
+          <a:ln>
+            <a:noFill/>
+          </a:ln>
+        </p:spPr>
+        <p:style>
+          <a:lnRef idx="1">
+            <a:schemeClr val="accent1"/>
+          </a:lnRef>
+          <a:fillRef idx="3">
+            <a:schemeClr val="accent1"/>
+          </a:fillRef>
+          <a:effectRef idx="2">
+            <a:schemeClr val="accent1"/>
+          </a:effectRef>
+          <a:fontRef idx="minor">
+            <a:schemeClr val="lt1"/>
+          </a:fontRef>
+        </p:style>
+        <p:txBody>
+          <a:bodyPr rtlCol="0" anchor="ctr"/>
+          <a:lstStyle/>
+          <a:p>
+            <a:pPr algn="ctr"/>
+          </a:p>
+        </p:txBody>
+      </p:sp>
+      <p:sp>
+        <p:nvSpPr>
+          <p:cNvPr id="3" name="Rectangle 2"/>
+          <p:cNvSpPr/>
+          <p:nvPr/>
+        </p:nvSpPr>
+        <p:spPr>
+          <a:xfrm>
+            <a:off x="0" y="914400"/>
+            <a:ext cx="12188952" cy="54864"/>
+          </a:xfrm>
+          <a:prstGeom prst="rect">
+            <a:avLst/>
+          </a:prstGeom>
+          <a:solidFill>
+            <a:srgbClr val="1E6FB8"/>
+          </a:solidFill>
+          <a:ln>
+            <a:noFill/>
+          </a:ln>
+        </p:spPr>
+        <p:style>
+          <a:lnRef idx="1">
+            <a:schemeClr val="accent1"/>
+          </a:lnRef>
+          <a:fillRef idx="3">
+            <a:schemeClr val="accent1"/>
+          </a:fillRef>
+          <a:effectRef idx="2">
+            <a:schemeClr val="accent1"/>
+          </a:effectRef>
+          <a:fontRef idx="minor">
+            <a:schemeClr val="lt1"/>
+          </a:fontRef>
+        </p:style>
+        <p:txBody>
+          <a:bodyPr rtlCol="0" anchor="ctr"/>
+          <a:lstStyle/>
+          <a:p>
+            <a:pPr algn="ctr"/>
+          </a:p>
+        </p:txBody>
+      </p:sp>
+      <p:sp>
+        <p:nvSpPr>
+          <p:cNvPr id="4" name="TextBox 3"/>
+          <p:cNvSpPr txBox="1"/>
+          <p:nvPr/>
+        </p:nvSpPr>
+        <p:spPr>
+          <a:xfrm>
+            <a:off x="502920" y="109728"/>
+            <a:ext cx="11155680" cy="777240"/>
+          </a:xfrm>
+          <a:prstGeom prst="rect">
+            <a:avLst/>
+          </a:prstGeom>
+          <a:noFill/>
+        </p:spPr>
+        <p:txBody>
+          <a:bodyPr wrap="square">
+            <a:spAutoFit/>
+          </a:bodyPr>
+          <a:lstStyle/>
+          <a:p>
+            <a:pPr>
+              <a:spcAft>
+                <a:spcPts val="600"/>
+              </a:spcAft>
+            </a:pPr>
+            <a:r>
+              <a:rPr sz="2600" b="1">
+                <a:solidFill>
+                  <a:srgbClr val="FFFFFF"/>
+                </a:solidFill>
+              </a:rPr>
+              <a:t>One Cause Behind Four Separate Failures</a:t>
+            </a:r>
+          </a:p>
+        </p:txBody>
+      </p:sp>
+      <p:sp>
+        <p:nvSpPr>
+          <p:cNvPr id="5" name="TextBox 4"/>
+          <p:cNvSpPr txBox="1"/>
+          <p:nvPr/>
+        </p:nvSpPr>
+        <p:spPr>
+          <a:xfrm>
+            <a:off x="502920" y="6473952"/>
+            <a:ext cx="8229600" cy="274320"/>
+          </a:xfrm>
+          <a:prstGeom prst="rect">
+            <a:avLst/>
+          </a:prstGeom>
+          <a:noFill/>
+        </p:spPr>
+        <p:txBody>
+          <a:bodyPr wrap="square">
+            <a:spAutoFit/>
+          </a:bodyPr>
+          <a:lstStyle/>
+          <a:p>
+            <a:pPr>
+              <a:spcAft>
+                <a:spcPts val="600"/>
+              </a:spcAft>
+            </a:pPr>
+            <a:r>
+              <a:rPr sz="900" b="0">
+                <a:solidFill>
+                  <a:srgbClr val="555555"/>
+                </a:solidFill>
+              </a:rPr>
+              <a:t>Boltz-Fast · Final Dissertation Report · Akik Jana (2024AB05287)</a:t>
+            </a:r>
+          </a:p>
+        </p:txBody>
+      </p:sp>
+      <p:sp>
+        <p:nvSpPr>
+          <p:cNvPr id="6" name="TextBox 5"/>
+          <p:cNvSpPr txBox="1"/>
+          <p:nvPr/>
+        </p:nvSpPr>
+        <p:spPr>
+          <a:xfrm>
+            <a:off x="11183112" y="6473952"/>
+            <a:ext cx="640080" cy="274320"/>
+          </a:xfrm>
+          <a:prstGeom prst="rect">
+            <a:avLst/>
+          </a:prstGeom>
+          <a:noFill/>
+        </p:spPr>
+        <p:txBody>
+          <a:bodyPr wrap="square">
+            <a:spAutoFit/>
+          </a:bodyPr>
+          <a:lstStyle/>
+          <a:p>
+            <a:pPr>
+              <a:spcAft>
+                <a:spcPts val="600"/>
+              </a:spcAft>
+            </a:pPr>
+            <a:r>
+              <a:rPr sz="1000" b="0">
+                <a:solidFill>
+                  <a:srgbClr val="0B2B52"/>
+                </a:solidFill>
+              </a:rPr>
+              <a:t>28</a:t>
+            </a:r>
+          </a:p>
+        </p:txBody>
+      </p:sp>
+      <p:sp>
+        <p:nvSpPr>
+          <p:cNvPr id="7" name="TextBox 6"/>
+          <p:cNvSpPr txBox="1"/>
+          <p:nvPr/>
+        </p:nvSpPr>
+        <p:spPr>
+          <a:xfrm>
+            <a:off x="548640" y="1143000"/>
+            <a:ext cx="11155680" cy="640080"/>
+          </a:xfrm>
+          <a:prstGeom prst="rect">
+            <a:avLst/>
+          </a:prstGeom>
+          <a:noFill/>
+        </p:spPr>
+        <p:txBody>
+          <a:bodyPr wrap="square">
+            <a:spAutoFit/>
+          </a:bodyPr>
+          <a:lstStyle/>
+          <a:p>
+            <a:pPr>
+              <a:spcAft>
+                <a:spcPts val="600"/>
+              </a:spcAft>
+            </a:pPr>
+            <a:r>
+              <a:rPr sz="1500" b="0">
+                <a:solidFill>
+                  <a:srgbClr val="0B2B52"/>
+                </a:solidFill>
+              </a:rPr>
+              <a:t>Geometry-dependent readouts need a converged sampler. Four results now share one cause:</a:t>
+            </a:r>
+          </a:p>
+        </p:txBody>
+      </p:sp>
+      <p:sp>
+        <p:nvSpPr>
+          <p:cNvPr id="8" name="TextBox 7"/>
+          <p:cNvSpPr txBox="1"/>
+          <p:nvPr/>
+        </p:nvSpPr>
+        <p:spPr>
+          <a:xfrm>
+            <a:off x="548640" y="1783080"/>
+            <a:ext cx="11155680" cy="914400"/>
+          </a:xfrm>
+          <a:prstGeom prst="rect">
+            <a:avLst/>
+          </a:prstGeom>
+          <a:noFill/>
+        </p:spPr>
+        <p:txBody>
+          <a:bodyPr wrap="square">
+            <a:spAutoFit/>
+          </a:bodyPr>
+          <a:lstStyle/>
+          <a:p>
+            <a:r>
+              <a:rPr sz="1500" b="1">
+                <a:solidFill>
+                  <a:srgbClr val="0B2B52"/>
+                </a:solidFill>
+              </a:rPr>
+              <a:t>pDockQ's contact term ran backwards</a:t>
+            </a:r>
+          </a:p>
+          <a:p>
+            <a:r>
+              <a:rPr sz="1250">
+                <a:solidFill>
+                  <a:srgbClr val="1E6FB8"/>
+                </a:solidFill>
+              </a:rPr>
+              <a:t>scrambles made more contacts than cognates — reverses on converged structures (cognate 61.4, scramble 51.8)</a:t>
+            </a:r>
+          </a:p>
+        </p:txBody>
+      </p:sp>
+      <p:sp>
+        <p:nvSpPr>
+          <p:cNvPr id="9" name="TextBox 8"/>
+          <p:cNvSpPr txBox="1"/>
+          <p:nvPr/>
+        </p:nvSpPr>
+        <p:spPr>
+          <a:xfrm>
+            <a:off x="548640" y="2807208"/>
+            <a:ext cx="11155680" cy="914400"/>
+          </a:xfrm>
+          <a:prstGeom prst="rect">
+            <a:avLst/>
+          </a:prstGeom>
+          <a:noFill/>
+        </p:spPr>
+        <p:txBody>
+          <a:bodyPr wrap="square">
+            <a:spAutoFit/>
+          </a:bodyPr>
+          <a:lstStyle/>
+          <a:p>
+            <a:r>
+              <a:rPr sz="1500" b="1">
+                <a:solidFill>
+                  <a:srgbClr val="0B2B52"/>
+                </a:solidFill>
+              </a:rPr>
+              <a:t>pDockQ2 repairs it</a:t>
+            </a:r>
+          </a:p>
+          <a:p>
+            <a:r>
+              <a:rPr sz="1250">
+                <a:solidFill>
+                  <a:srgbClr val="1E6FB8"/>
+                </a:solidFill>
+              </a:rPr>
+              <a:t>swapping the contact term for a PAE term: scramble control p = 0.797 → 0.00026</a:t>
+            </a:r>
+          </a:p>
+        </p:txBody>
+      </p:sp>
+      <p:sp>
+        <p:nvSpPr>
+          <p:cNvPr id="10" name="TextBox 9"/>
+          <p:cNvSpPr txBox="1"/>
+          <p:nvPr/>
+        </p:nvSpPr>
+        <p:spPr>
+          <a:xfrm>
+            <a:off x="548640" y="3831336"/>
+            <a:ext cx="11155680" cy="914400"/>
+          </a:xfrm>
+          <a:prstGeom prst="rect">
+            <a:avLst/>
+          </a:prstGeom>
+          <a:noFill/>
+        </p:spPr>
+        <p:txBody>
+          <a:bodyPr wrap="square">
+            <a:spAutoFit/>
+          </a:bodyPr>
+          <a:lstStyle/>
+          <a:p>
+            <a:r>
+              <a:rPr sz="1500" b="1">
+                <a:solidFill>
+                  <a:srgbClr val="0B2B52"/>
+                </a:solidFill>
+              </a:rPr>
+              <a:t>Minimum PAE failed here but is published as best-in-class</a:t>
+            </a:r>
+          </a:p>
+          <a:p>
+            <a:r>
+              <a:rPr sz="1250">
+                <a:solidFill>
+                  <a:srgbClr val="1E6FB8"/>
+                </a:solidFill>
+              </a:rPr>
+              <a:t>fails on Boltz-2 (p = 0.611), among the best on DeCAF (rank 1.55) — PAE predicts geometry, and was published at full sampling</a:t>
+            </a:r>
+          </a:p>
+        </p:txBody>
+      </p:sp>
+      <p:sp>
+        <p:nvSpPr>
+          <p:cNvPr id="11" name="TextBox 10"/>
+          <p:cNvSpPr txBox="1"/>
+          <p:nvPr/>
+        </p:nvSpPr>
+        <p:spPr>
+          <a:xfrm>
+            <a:off x="548640" y="4855464"/>
+            <a:ext cx="11155680" cy="914400"/>
+          </a:xfrm>
+          <a:prstGeom prst="rect">
+            <a:avLst/>
+          </a:prstGeom>
+          <a:noFill/>
+        </p:spPr>
+        <p:txBody>
+          <a:bodyPr wrap="square">
+            <a:spAutoFit/>
+          </a:bodyPr>
+          <a:lstStyle/>
+          <a:p>
+            <a:r>
+              <a:rPr sz="1500" b="1">
+                <a:solidFill>
+                  <a:srgbClr val="0B2B52"/>
+                </a:solidFill>
+              </a:rPr>
+              <a:t>Physics rescoring returned femtomolar affinities</a:t>
+            </a:r>
+          </a:p>
+          <a:p>
+            <a:r>
+              <a:rPr sz="1250">
+                <a:solidFill>
+                  <a:srgbClr val="1E6FB8"/>
+                </a:solidFill>
+              </a:rPr>
+              <a:t>PRODIGY on Boltz-2 structures: garbage in, not method failure</a:t>
+            </a:r>
+          </a:p>
+        </p:txBody>
+      </p:sp>
+      <p:sp>
+        <p:nvSpPr>
+          <p:cNvPr id="12" name="Rounded Rectangle 11"/>
+          <p:cNvSpPr/>
+          <p:nvPr/>
+        </p:nvSpPr>
+        <p:spPr>
+          <a:xfrm>
+            <a:off x="548640" y="5989320"/>
+            <a:ext cx="11155680" cy="868680"/>
+          </a:xfrm>
+          <a:prstGeom prst="roundRect">
+            <a:avLst/>
+          </a:prstGeom>
+          <a:solidFill>
+            <a:srgbClr val="FDF3E0"/>
+          </a:solidFill>
+          <a:ln>
+            <a:noFill/>
+          </a:ln>
+        </p:spPr>
+        <p:style>
+          <a:lnRef idx="1">
+            <a:schemeClr val="accent1"/>
+          </a:lnRef>
+          <a:fillRef idx="3">
+            <a:schemeClr val="accent1"/>
+          </a:fillRef>
+          <a:effectRef idx="2">
+            <a:schemeClr val="accent1"/>
+          </a:effectRef>
+          <a:fontRef idx="minor">
+            <a:schemeClr val="lt1"/>
+          </a:fontRef>
+        </p:style>
+        <p:txBody>
+          <a:bodyPr rtlCol="0" anchor="ctr" wrap="square"/>
+          <a:lstStyle/>
+          <a:p>
+            <a:pPr algn="ctr">
+              <a:spcAft>
+                <a:spcPts val="600"/>
+              </a:spcAft>
+            </a:pPr>
+            <a:r>
+              <a:rPr sz="1250" b="0">
+                <a:solidFill>
+                  <a:srgbClr val="8A5200"/>
+                </a:solidFill>
+              </a:rPr>
+              <a:t>Physics rescoring on converged structures still does not help: PRODIGY ΔG reaches AUC 0.563 against 0.856 for interface pLDDT, and combining them costs 0.033. A sequence model trained on 96M interactions (MINT) reaches 0.614 zero-shot — structure wins here, contrary to recent affinity-regression results.</a:t>
+            </a:r>
+          </a:p>
+        </p:txBody>
+      </p:sp>
+    </p:spTree>
+  </p:cSld>
+  <p:clrMapOvr>
+    <a:masterClrMapping/>
+  </p:clrMapOvr>
+</p:sld>
+</file>
+
+<file path=ppt/slides/slide29.xml><?xml version="1.0" encoding="utf-8"?>
+<p:sld xmlns:a="http://schemas.openxmlformats.org/drawingml/2006/main" xmlns:p="http://schemas.openxmlformats.org/presentationml/2006/main" xmlns:r="http://schemas.openxmlformats.org/officeDocument/2006/relationships">
+  <p:cSld>
+    <p:spTree>
+      <p:nvGrpSpPr>
+        <p:cNvPr id="1" name=""/>
+        <p:cNvGrpSpPr/>
+        <p:nvPr/>
+      </p:nvGrpSpPr>
+      <p:grpSpPr/>
+      <p:sp>
+        <p:nvSpPr>
+          <p:cNvPr id="2" name="Rectangle 1"/>
+          <p:cNvSpPr/>
+          <p:nvPr/>
+        </p:nvSpPr>
+        <p:spPr>
+          <a:xfrm>
+            <a:off x="0" y="0"/>
+            <a:ext cx="12191695" cy="914400"/>
+          </a:xfrm>
+          <a:prstGeom prst="rect">
+            <a:avLst/>
+          </a:prstGeom>
+          <a:solidFill>
+            <a:srgbClr val="0B2B52"/>
+          </a:solidFill>
+          <a:ln>
+            <a:noFill/>
+          </a:ln>
+          <a:effectLst/>
+        </p:spPr>
+        <p:style>
+          <a:lnRef idx="1">
+            <a:schemeClr val="accent1"/>
+          </a:lnRef>
+          <a:fillRef idx="3">
+            <a:schemeClr val="accent1"/>
+          </a:fillRef>
+          <a:effectRef idx="2">
+            <a:schemeClr val="accent1"/>
+          </a:effectRef>
+          <a:fontRef idx="minor">
+            <a:schemeClr val="lt1"/>
+          </a:fontRef>
+        </p:style>
+        <p:txBody>
+          <a:bodyPr rtlCol="0" anchor="ctr"/>
+          <a:lstStyle/>
+          <a:p>
+            <a:pPr algn="ctr"/>
+          </a:p>
+        </p:txBody>
+      </p:sp>
+      <p:sp>
+        <p:nvSpPr>
+          <p:cNvPr id="3" name="Rectangle 2"/>
+          <p:cNvSpPr/>
+          <p:nvPr/>
+        </p:nvSpPr>
+        <p:spPr>
+          <a:xfrm>
+            <a:off x="0" y="914400"/>
+            <a:ext cx="12191695" cy="54864"/>
+          </a:xfrm>
+          <a:prstGeom prst="rect">
+            <a:avLst/>
+          </a:prstGeom>
+          <a:solidFill>
+            <a:srgbClr val="1E6FB8"/>
+          </a:solidFill>
+          <a:ln>
+            <a:noFill/>
+          </a:ln>
+          <a:effectLst/>
+        </p:spPr>
+        <p:style>
+          <a:lnRef idx="1">
+            <a:schemeClr val="accent1"/>
+          </a:lnRef>
+          <a:fillRef idx="3">
+            <a:schemeClr val="accent1"/>
+          </a:fillRef>
+          <a:effectRef idx="2">
+            <a:schemeClr val="accent1"/>
+          </a:effectRef>
+          <a:fontRef idx="minor">
+            <a:schemeClr val="lt1"/>
+          </a:fontRef>
+        </p:style>
+        <p:txBody>
+          <a:bodyPr rtlCol="0" anchor="ctr"/>
+          <a:lstStyle/>
+          <a:p>
+            <a:pPr algn="ctr"/>
+          </a:p>
+        </p:txBody>
+      </p:sp>
+      <p:sp>
+        <p:nvSpPr>
+          <p:cNvPr id="4" name="TextBox 3"/>
+          <p:cNvSpPr txBox="1"/>
+          <p:nvPr/>
+        </p:nvSpPr>
+        <p:spPr>
+          <a:xfrm>
+            <a:off x="502920" y="109728"/>
+            <a:ext cx="11155680" cy="777240"/>
+          </a:xfrm>
+          <a:prstGeom prst="rect">
+            <a:avLst/>
+          </a:prstGeom>
+          <a:noFill/>
+        </p:spPr>
+        <p:txBody>
+          <a:bodyPr wrap="square">
+            <a:spAutoFit/>
+          </a:bodyPr>
+          <a:lstStyle/>
+          <a:p>
+            <a:pPr>
+              <a:spcBef>
+                <a:spcPts val="0"/>
+              </a:spcBef>
+              <a:spcAft>
+                <a:spcPts val="400"/>
+              </a:spcAft>
+            </a:pPr>
+            <a:r>
+              <a:rPr sz="2600" b="1" i="0">
+                <a:solidFill>
+                  <a:srgbClr val="FFFFFF"/>
+                </a:solidFill>
+              </a:rPr>
+              <a:t>Future Plan</a:t>
+            </a:r>
+          </a:p>
+        </p:txBody>
+      </p:sp>
+      <p:sp>
+        <p:nvSpPr>
+          <p:cNvPr id="5" name="TextBox 4"/>
+          <p:cNvSpPr txBox="1"/>
+          <p:nvPr/>
+        </p:nvSpPr>
+        <p:spPr>
+          <a:xfrm>
+            <a:off x="502920" y="6473952"/>
+            <a:ext cx="8229600" cy="274320"/>
+          </a:xfrm>
+          <a:prstGeom prst="rect">
+            <a:avLst/>
+          </a:prstGeom>
+          <a:noFill/>
+        </p:spPr>
+        <p:txBody>
+          <a:bodyPr wrap="square">
+            <a:spAutoFit/>
+          </a:bodyPr>
+          <a:lstStyle/>
+          <a:p>
+            <a:pPr>
+              <a:spcBef>
+                <a:spcPts val="0"/>
+              </a:spcBef>
+              <a:spcAft>
+                <a:spcPts val="600"/>
+              </a:spcAft>
+            </a:pPr>
+            <a:r>
+              <a:rPr sz="900" b="0">
+                <a:solidFill>
+                  <a:srgbClr val="555555"/>
+                </a:solidFill>
+              </a:rPr>
+              <a:t>Boltz-Fast · Final Dissertation Report · Akik Jana (2024AB05287)</a:t>
+            </a:r>
+          </a:p>
+        </p:txBody>
+      </p:sp>
+      <p:sp>
+        <p:nvSpPr>
+          <p:cNvPr id="6" name="TextBox 5"/>
+          <p:cNvSpPr txBox="1"/>
+          <p:nvPr/>
+        </p:nvSpPr>
+        <p:spPr>
+          <a:xfrm>
+            <a:off x="11185855" y="6473952"/>
+            <a:ext cx="640080" cy="274320"/>
+          </a:xfrm>
+          <a:prstGeom prst="rect">
+            <a:avLst/>
+          </a:prstGeom>
+          <a:noFill/>
+        </p:spPr>
+        <p:txBody>
+          <a:bodyPr wrap="square">
+            <a:spAutoFit/>
+          </a:bodyPr>
+          <a:lstStyle/>
+          <a:p>
+            <a:pPr algn="r">
+              <a:spcBef>
+                <a:spcPts val="0"/>
+              </a:spcBef>
+              <a:spcAft>
+                <a:spcPts val="600"/>
+              </a:spcAft>
+            </a:pPr>
+            <a:r>
+              <a:rPr sz="1000" b="0">
+                <a:solidFill>
+                  <a:srgbClr val="0B2B52"/>
+                </a:solidFill>
+              </a:rPr>
+              <a:t>29</a:t>
+            </a:r>
+          </a:p>
+        </p:txBody>
+      </p:sp>
+      <p:sp>
+        <p:nvSpPr>
+          <p:cNvPr id="7" name="Oval 6"/>
+          <p:cNvSpPr/>
+          <p:nvPr/>
+        </p:nvSpPr>
+        <p:spPr>
+          <a:xfrm>
+            <a:off x="548640" y="1325880"/>
+            <a:ext cx="566928" cy="566928"/>
+          </a:xfrm>
+          <a:prstGeom prst="ellipse">
+            <a:avLst/>
+          </a:prstGeom>
+          <a:solidFill>
+            <a:srgbClr val="1E6FB8"/>
+          </a:solidFill>
+          <a:ln>
+            <a:noFill/>
+          </a:ln>
+          <a:effectLst/>
+        </p:spPr>
+        <p:style>
+          <a:lnRef idx="1">
+            <a:schemeClr val="accent1"/>
+          </a:lnRef>
+          <a:fillRef idx="3">
+            <a:schemeClr val="accent1"/>
+          </a:fillRef>
+          <a:effectRef idx="2">
+            <a:schemeClr val="accent1"/>
+          </a:effectRef>
+          <a:fontRef idx="minor">
+            <a:schemeClr val="lt1"/>
+          </a:fontRef>
+        </p:style>
+        <p:txBody>
+          <a:bodyPr rtlCol="0" anchor="ctr" wrap="square"/>
+          <a:lstStyle/>
+          <a:p>
+            <a:pPr algn="ctr">
+              <a:spcBef>
+                <a:spcPts val="0"/>
+              </a:spcBef>
+              <a:spcAft>
+                <a:spcPts val="400"/>
+              </a:spcAft>
+            </a:pPr>
+            <a:r>
+              <a:rPr sz="1800" b="1" i="0">
+                <a:solidFill>
+                  <a:srgbClr val="FFFFFF"/>
+                </a:solidFill>
+              </a:rPr>
+              <a:t>1</a:t>
+            </a:r>
+          </a:p>
+        </p:txBody>
+      </p:sp>
+      <p:sp>
+        <p:nvSpPr>
+          <p:cNvPr id="8" name="TextBox 7"/>
+          <p:cNvSpPr txBox="1"/>
+          <p:nvPr/>
+        </p:nvSpPr>
+        <p:spPr>
+          <a:xfrm>
+            <a:off x="1325880" y="1307592"/>
+            <a:ext cx="10332720" cy="868680"/>
+          </a:xfrm>
+          <a:prstGeom prst="rect">
+            <a:avLst/>
+          </a:prstGeom>
+          <a:noFill/>
+        </p:spPr>
+        <p:txBody>
+          <a:bodyPr wrap="square">
+            <a:spAutoFit/>
+          </a:bodyPr>
+          <a:lstStyle/>
+          <a:p>
+            <a:pPr>
+              <a:spcBef>
+                <a:spcPts val="0"/>
+              </a:spcBef>
+              <a:spcAft>
+                <a:spcPts val="600"/>
+              </a:spcAft>
+            </a:pPr>
+            <a:r>
+              <a:rPr sz="1300" b="0">
+                <a:solidFill>
+                  <a:srgbClr val="0B2B52"/>
+                </a:solidFill>
+              </a:rPr>
+              <a:t>DONE — profiled; and measured what the optimisations actually deliver on pretrained weights (slides 11–18).</a:t>
+            </a:r>
+          </a:p>
+        </p:txBody>
+      </p:sp>
+      <p:sp>
+        <p:nvSpPr>
+          <p:cNvPr id="9" name="Oval 8"/>
+          <p:cNvSpPr/>
+          <p:nvPr/>
+        </p:nvSpPr>
+        <p:spPr>
+          <a:xfrm>
+            <a:off x="548640" y="2304288"/>
+            <a:ext cx="566928" cy="566928"/>
+          </a:xfrm>
+          <a:prstGeom prst="ellipse">
+            <a:avLst/>
+          </a:prstGeom>
+          <a:solidFill>
+            <a:srgbClr val="0E8F9A"/>
+          </a:solidFill>
+          <a:ln>
+            <a:noFill/>
+          </a:ln>
+          <a:effectLst/>
+        </p:spPr>
+        <p:style>
+          <a:lnRef idx="1">
+            <a:schemeClr val="accent1"/>
+          </a:lnRef>
+          <a:fillRef idx="3">
+            <a:schemeClr val="accent1"/>
+          </a:fillRef>
+          <a:effectRef idx="2">
+            <a:schemeClr val="accent1"/>
+          </a:effectRef>
+          <a:fontRef idx="minor">
+            <a:schemeClr val="lt1"/>
+          </a:fontRef>
+        </p:style>
+        <p:txBody>
+          <a:bodyPr rtlCol="0" anchor="ctr" wrap="square"/>
+          <a:lstStyle/>
+          <a:p>
+            <a:pPr algn="ctr">
+              <a:spcBef>
+                <a:spcPts val="0"/>
+              </a:spcBef>
+              <a:spcAft>
+                <a:spcPts val="400"/>
+              </a:spcAft>
+            </a:pPr>
+            <a:r>
+              <a:rPr sz="1800" b="1" i="0">
+                <a:solidFill>
+                  <a:srgbClr val="FFFFFF"/>
+                </a:solidFill>
+              </a:rPr>
+              <a:t>2</a:t>
+            </a:r>
+          </a:p>
+        </p:txBody>
+      </p:sp>
+      <p:sp>
+        <p:nvSpPr>
+          <p:cNvPr id="10" name="TextBox 9"/>
+          <p:cNvSpPr txBox="1"/>
+          <p:nvPr/>
+        </p:nvSpPr>
+        <p:spPr>
+          <a:xfrm>
+            <a:off x="1325880" y="2286000"/>
+            <a:ext cx="10332720" cy="868680"/>
+          </a:xfrm>
+          <a:prstGeom prst="rect">
+            <a:avLst/>
+          </a:prstGeom>
+          <a:noFill/>
+        </p:spPr>
+        <p:txBody>
+          <a:bodyPr wrap="square">
+            <a:spAutoFit/>
+          </a:bodyPr>
+          <a:lstStyle/>
+          <a:p>
+            <a:pPr>
+              <a:spcBef>
+                <a:spcPts val="0"/>
+              </a:spcBef>
+              <a:spcAft>
+                <a:spcPts val="600"/>
+              </a:spcAft>
+            </a:pPr>
+            <a:r>
+              <a:rPr sz="1300" b="0">
+                <a:solidFill>
+                  <a:srgbClr val="0B2B52"/>
+                </a:solidFill>
+              </a:rPr>
+              <a:t>Few-step diffusion-sampler distillation (consistency/progressive) — keep the full trunk; target minutes → seconds locally.</a:t>
+            </a:r>
+          </a:p>
+        </p:txBody>
+      </p:sp>
+      <p:sp>
+        <p:nvSpPr>
+          <p:cNvPr id="11" name="Oval 10"/>
+          <p:cNvSpPr/>
+          <p:nvPr/>
+        </p:nvSpPr>
+        <p:spPr>
+          <a:xfrm>
+            <a:off x="548640" y="3282696"/>
+            <a:ext cx="566928" cy="566928"/>
+          </a:xfrm>
+          <a:prstGeom prst="ellipse">
+            <a:avLst/>
+          </a:prstGeom>
+          <a:solidFill>
+            <a:srgbClr val="2E7D32"/>
+          </a:solidFill>
+          <a:ln>
+            <a:noFill/>
+          </a:ln>
+          <a:effectLst/>
+        </p:spPr>
+        <p:style>
+          <a:lnRef idx="1">
+            <a:schemeClr val="accent1"/>
+          </a:lnRef>
+          <a:fillRef idx="3">
+            <a:schemeClr val="accent1"/>
+          </a:fillRef>
+          <a:effectRef idx="2">
+            <a:schemeClr val="accent1"/>
+          </a:effectRef>
+          <a:fontRef idx="minor">
+            <a:schemeClr val="lt1"/>
+          </a:fontRef>
+        </p:style>
+        <p:txBody>
+          <a:bodyPr rtlCol="0" anchor="ctr" wrap="square"/>
+          <a:lstStyle/>
+          <a:p>
+            <a:pPr algn="ctr">
+              <a:spcBef>
+                <a:spcPts val="0"/>
+              </a:spcBef>
+              <a:spcAft>
+                <a:spcPts val="400"/>
+              </a:spcAft>
+            </a:pPr>
+            <a:r>
+              <a:rPr sz="1800" b="1" i="0">
+                <a:solidFill>
+                  <a:srgbClr val="FFFFFF"/>
+                </a:solidFill>
+              </a:rPr>
+              <a:t>3</a:t>
+            </a:r>
+          </a:p>
+        </p:txBody>
+      </p:sp>
+      <p:sp>
+        <p:nvSpPr>
+          <p:cNvPr id="12" name="TextBox 11"/>
+          <p:cNvSpPr txBox="1"/>
+          <p:nvPr/>
+        </p:nvSpPr>
+        <p:spPr>
+          <a:xfrm>
+            <a:off x="1325880" y="3264408"/>
+            <a:ext cx="10332720" cy="868680"/>
+          </a:xfrm>
+          <a:prstGeom prst="rect">
+            <a:avLst/>
+          </a:prstGeom>
+          <a:noFill/>
+        </p:spPr>
+        <p:txBody>
+          <a:bodyPr wrap="square">
+            <a:spAutoFit/>
+          </a:bodyPr>
+          <a:lstStyle/>
+          <a:p>
+            <a:pPr>
+              <a:spcBef>
+                <a:spcPts val="0"/>
+              </a:spcBef>
+              <a:spcAft>
+                <a:spcPts val="600"/>
+              </a:spcAft>
+            </a:pPr>
+            <a:r>
+              <a:rPr sz="1300" b="0">
+                <a:solidFill>
+                  <a:srgbClr val="0B2B52"/>
+                </a:solidFill>
+              </a:rPr>
+              <a:t>DONE, NEGATIVE — the surrogate was distilled and evaluated: ipTM does not rank binders, so no surrogate distilled from it can either.</a:t>
+            </a:r>
+          </a:p>
+        </p:txBody>
+      </p:sp>
+      <p:sp>
+        <p:nvSpPr>
+          <p:cNvPr id="13" name="Oval 12"/>
+          <p:cNvSpPr/>
+          <p:nvPr/>
+        </p:nvSpPr>
+        <p:spPr>
+          <a:xfrm>
+            <a:off x="548640" y="4261104"/>
+            <a:ext cx="566928" cy="566928"/>
+          </a:xfrm>
+          <a:prstGeom prst="ellipse">
+            <a:avLst/>
+          </a:prstGeom>
+          <a:solidFill>
+            <a:srgbClr val="C77700"/>
+          </a:solidFill>
+          <a:ln>
+            <a:noFill/>
+          </a:ln>
+          <a:effectLst/>
+        </p:spPr>
+        <p:style>
+          <a:lnRef idx="1">
+            <a:schemeClr val="accent1"/>
+          </a:lnRef>
+          <a:fillRef idx="3">
+            <a:schemeClr val="accent1"/>
+          </a:fillRef>
+          <a:effectRef idx="2">
+            <a:schemeClr val="accent1"/>
+          </a:effectRef>
+          <a:fontRef idx="minor">
+            <a:schemeClr val="lt1"/>
+          </a:fontRef>
+        </p:style>
+        <p:txBody>
+          <a:bodyPr rtlCol="0" anchor="ctr" wrap="square"/>
+          <a:lstStyle/>
+          <a:p>
+            <a:pPr algn="ctr">
+              <a:spcBef>
+                <a:spcPts val="0"/>
+              </a:spcBef>
+              <a:spcAft>
+                <a:spcPts val="400"/>
+              </a:spcAft>
+            </a:pPr>
+            <a:r>
+              <a:rPr sz="1800" b="1" i="0">
+                <a:solidFill>
+                  <a:srgbClr val="FFFFFF"/>
+                </a:solidFill>
+              </a:rPr>
+              <a:t>4</a:t>
+            </a:r>
+          </a:p>
+        </p:txBody>
+      </p:sp>
+      <p:sp>
+        <p:nvSpPr>
+          <p:cNvPr id="14" name="TextBox 13"/>
+          <p:cNvSpPr txBox="1"/>
+          <p:nvPr/>
+        </p:nvSpPr>
+        <p:spPr>
+          <a:xfrm>
+            <a:off x="1325880" y="4242816"/>
+            <a:ext cx="10332720" cy="868680"/>
+          </a:xfrm>
+          <a:prstGeom prst="rect">
+            <a:avLst/>
+          </a:prstGeom>
+          <a:noFill/>
+        </p:spPr>
+        <p:txBody>
+          <a:bodyPr wrap="square">
+            <a:spAutoFit/>
+          </a:bodyPr>
+          <a:lstStyle/>
+          <a:p>
+            <a:pPr>
+              <a:spcBef>
+                <a:spcPts val="0"/>
+              </a:spcBef>
+              <a:spcAft>
+                <a:spcPts val="600"/>
+              </a:spcAft>
+            </a:pPr>
+            <a:r>
+              <a:rPr sz="1300" b="0">
+                <a:solidFill>
+                  <a:srgbClr val="0B2B52"/>
+                </a:solidFill>
+              </a:rPr>
+              <a:t>Use open Boltz-2 weights only — Boltz-2.1 is closed / API-only.</a:t>
+            </a:r>
+          </a:p>
+        </p:txBody>
+      </p:sp>
+      <p:sp>
+        <p:nvSpPr>
+          <p:cNvPr id="15" name="Oval 14"/>
+          <p:cNvSpPr/>
+          <p:nvPr/>
+        </p:nvSpPr>
+        <p:spPr>
+          <a:xfrm>
+            <a:off x="548640" y="5239512"/>
+            <a:ext cx="566928" cy="566928"/>
+          </a:xfrm>
+          <a:prstGeom prst="ellipse">
+            <a:avLst/>
+          </a:prstGeom>
+          <a:solidFill>
+            <a:srgbClr val="0B2B52"/>
+          </a:solidFill>
+          <a:ln>
+            <a:noFill/>
+          </a:ln>
+          <a:effectLst/>
+        </p:spPr>
+        <p:style>
+          <a:lnRef idx="1">
+            <a:schemeClr val="accent1"/>
+          </a:lnRef>
+          <a:fillRef idx="3">
+            <a:schemeClr val="accent1"/>
+          </a:fillRef>
+          <a:effectRef idx="2">
+            <a:schemeClr val="accent1"/>
+          </a:effectRef>
+          <a:fontRef idx="minor">
+            <a:schemeClr val="lt1"/>
+          </a:fontRef>
+        </p:style>
+        <p:txBody>
+          <a:bodyPr rtlCol="0" anchor="ctr" wrap="square"/>
+          <a:lstStyle/>
+          <a:p>
+            <a:pPr algn="ctr">
+              <a:spcBef>
+                <a:spcPts val="0"/>
+              </a:spcBef>
+              <a:spcAft>
+                <a:spcPts val="400"/>
+              </a:spcAft>
+            </a:pPr>
+            <a:r>
+              <a:rPr sz="1800" b="1" i="0">
+                <a:solidFill>
+                  <a:srgbClr val="FFFFFF"/>
+                </a:solidFill>
+              </a:rPr>
+              <a:t>5</a:t>
+            </a:r>
+          </a:p>
+        </p:txBody>
+      </p:sp>
+      <p:sp>
+        <p:nvSpPr>
+          <p:cNvPr id="16" name="TextBox 15"/>
+          <p:cNvSpPr txBox="1"/>
+          <p:nvPr/>
+        </p:nvSpPr>
+        <p:spPr>
+          <a:xfrm>
+            <a:off x="1325880" y="5221224"/>
+            <a:ext cx="10332720" cy="868680"/>
+          </a:xfrm>
+          <a:prstGeom prst="rect">
+            <a:avLst/>
+          </a:prstGeom>
+          <a:noFill/>
+        </p:spPr>
+        <p:txBody>
+          <a:bodyPr wrap="square">
+            <a:spAutoFit/>
+          </a:bodyPr>
+          <a:lstStyle/>
+          <a:p>
+            <a:pPr>
+              <a:spcBef>
+                <a:spcPts val="0"/>
+              </a:spcBef>
+              <a:spcAft>
+                <a:spcPts val="600"/>
+              </a:spcAft>
+            </a:pPr>
+            <a:r>
+              <a:rPr sz="1300" b="0">
+                <a:solidFill>
+                  <a:srgbClr val="0B2B52"/>
+                </a:solidFill>
+              </a:rPr>
+              <a:t>Production GPU scaling — now a PREREQUISITE, not a throughput nicety: replicate-averaged folds (9–16 per complex) are needed before any per-receptor claim holds.</a:t>
             </a:r>
           </a:p>
         </p:txBody>
@@ -12016,10 +13961,10 @@
             <a:r>
               <a:rPr sz="1000" b="0">
                 <a:solidFill>
-                  <a:srgbClr val="555555"/>
-                </a:solidFill>
-              </a:rPr>
-              <a:t>2</a:t>
+                  <a:srgbClr val="0B2B52"/>
+                </a:solidFill>
+              </a:rPr>
+              <a:t>3</a:t>
             </a:r>
           </a:p>
         </p:txBody>
@@ -12550,6 +14495,395 @@
                 </a:solidFill>
               </a:rPr>
               <a:t>Deployment:  distilled surrogate exported to Apple CoreAI / Neural Engine — on-device, offline, private.</a:t>
+            </a:r>
+          </a:p>
+        </p:txBody>
+      </p:sp>
+    </p:spTree>
+  </p:cSld>
+  <p:clrMapOvr>
+    <a:masterClrMapping/>
+  </p:clrMapOvr>
+</p:sld>
+</file>
+
+<file path=ppt/slides/slide30.xml><?xml version="1.0" encoding="utf-8"?>
+<p:sld xmlns:a="http://schemas.openxmlformats.org/drawingml/2006/main" xmlns:p="http://schemas.openxmlformats.org/presentationml/2006/main" xmlns:r="http://schemas.openxmlformats.org/officeDocument/2006/relationships">
+  <p:cSld>
+    <p:spTree>
+      <p:nvGrpSpPr>
+        <p:cNvPr id="1" name=""/>
+        <p:cNvGrpSpPr/>
+        <p:nvPr/>
+      </p:nvGrpSpPr>
+      <p:grpSpPr/>
+      <p:sp>
+        <p:nvSpPr>
+          <p:cNvPr id="2" name="Rectangle 1"/>
+          <p:cNvSpPr/>
+          <p:nvPr/>
+        </p:nvSpPr>
+        <p:spPr>
+          <a:xfrm>
+            <a:off x="0" y="0"/>
+            <a:ext cx="12191695" cy="914400"/>
+          </a:xfrm>
+          <a:prstGeom prst="rect">
+            <a:avLst/>
+          </a:prstGeom>
+          <a:solidFill>
+            <a:srgbClr val="0B2B52"/>
+          </a:solidFill>
+          <a:ln>
+            <a:noFill/>
+          </a:ln>
+          <a:effectLst/>
+        </p:spPr>
+        <p:style>
+          <a:lnRef idx="1">
+            <a:schemeClr val="accent1"/>
+          </a:lnRef>
+          <a:fillRef idx="3">
+            <a:schemeClr val="accent1"/>
+          </a:fillRef>
+          <a:effectRef idx="2">
+            <a:schemeClr val="accent1"/>
+          </a:effectRef>
+          <a:fontRef idx="minor">
+            <a:schemeClr val="lt1"/>
+          </a:fontRef>
+        </p:style>
+        <p:txBody>
+          <a:bodyPr rtlCol="0" anchor="ctr"/>
+          <a:lstStyle/>
+          <a:p>
+            <a:pPr algn="ctr"/>
+          </a:p>
+        </p:txBody>
+      </p:sp>
+      <p:sp>
+        <p:nvSpPr>
+          <p:cNvPr id="3" name="Rectangle 2"/>
+          <p:cNvSpPr/>
+          <p:nvPr/>
+        </p:nvSpPr>
+        <p:spPr>
+          <a:xfrm>
+            <a:off x="0" y="914400"/>
+            <a:ext cx="12191695" cy="54864"/>
+          </a:xfrm>
+          <a:prstGeom prst="rect">
+            <a:avLst/>
+          </a:prstGeom>
+          <a:solidFill>
+            <a:srgbClr val="1E6FB8"/>
+          </a:solidFill>
+          <a:ln>
+            <a:noFill/>
+          </a:ln>
+          <a:effectLst/>
+        </p:spPr>
+        <p:style>
+          <a:lnRef idx="1">
+            <a:schemeClr val="accent1"/>
+          </a:lnRef>
+          <a:fillRef idx="3">
+            <a:schemeClr val="accent1"/>
+          </a:fillRef>
+          <a:effectRef idx="2">
+            <a:schemeClr val="accent1"/>
+          </a:effectRef>
+          <a:fontRef idx="minor">
+            <a:schemeClr val="lt1"/>
+          </a:fontRef>
+        </p:style>
+        <p:txBody>
+          <a:bodyPr rtlCol="0" anchor="ctr"/>
+          <a:lstStyle/>
+          <a:p>
+            <a:pPr algn="ctr"/>
+          </a:p>
+        </p:txBody>
+      </p:sp>
+      <p:sp>
+        <p:nvSpPr>
+          <p:cNvPr id="4" name="TextBox 3"/>
+          <p:cNvSpPr txBox="1"/>
+          <p:nvPr/>
+        </p:nvSpPr>
+        <p:spPr>
+          <a:xfrm>
+            <a:off x="502920" y="109728"/>
+            <a:ext cx="11155680" cy="777240"/>
+          </a:xfrm>
+          <a:prstGeom prst="rect">
+            <a:avLst/>
+          </a:prstGeom>
+          <a:noFill/>
+        </p:spPr>
+        <p:txBody>
+          <a:bodyPr wrap="square">
+            <a:spAutoFit/>
+          </a:bodyPr>
+          <a:lstStyle/>
+          <a:p>
+            <a:pPr>
+              <a:spcBef>
+                <a:spcPts val="0"/>
+              </a:spcBef>
+              <a:spcAft>
+                <a:spcPts val="400"/>
+              </a:spcAft>
+            </a:pPr>
+            <a:r>
+              <a:rPr sz="2600" b="1" i="0">
+                <a:solidFill>
+                  <a:srgbClr val="FFFFFF"/>
+                </a:solidFill>
+              </a:rPr>
+              <a:t>Summary</a:t>
+            </a:r>
+          </a:p>
+        </p:txBody>
+      </p:sp>
+      <p:sp>
+        <p:nvSpPr>
+          <p:cNvPr id="5" name="TextBox 4"/>
+          <p:cNvSpPr txBox="1"/>
+          <p:nvPr/>
+        </p:nvSpPr>
+        <p:spPr>
+          <a:xfrm>
+            <a:off x="502920" y="6473952"/>
+            <a:ext cx="8229600" cy="274320"/>
+          </a:xfrm>
+          <a:prstGeom prst="rect">
+            <a:avLst/>
+          </a:prstGeom>
+          <a:noFill/>
+        </p:spPr>
+        <p:txBody>
+          <a:bodyPr wrap="square">
+            <a:spAutoFit/>
+          </a:bodyPr>
+          <a:lstStyle/>
+          <a:p>
+            <a:pPr>
+              <a:spcBef>
+                <a:spcPts val="0"/>
+              </a:spcBef>
+              <a:spcAft>
+                <a:spcPts val="600"/>
+              </a:spcAft>
+            </a:pPr>
+            <a:r>
+              <a:rPr sz="900" b="0">
+                <a:solidFill>
+                  <a:srgbClr val="555555"/>
+                </a:solidFill>
+              </a:rPr>
+              <a:t>Boltz-Fast · Final Dissertation Report · Akik Jana (2024AB05287)</a:t>
+            </a:r>
+          </a:p>
+        </p:txBody>
+      </p:sp>
+      <p:sp>
+        <p:nvSpPr>
+          <p:cNvPr id="6" name="TextBox 5"/>
+          <p:cNvSpPr txBox="1"/>
+          <p:nvPr/>
+        </p:nvSpPr>
+        <p:spPr>
+          <a:xfrm>
+            <a:off x="11185855" y="6473952"/>
+            <a:ext cx="640080" cy="274320"/>
+          </a:xfrm>
+          <a:prstGeom prst="rect">
+            <a:avLst/>
+          </a:prstGeom>
+          <a:noFill/>
+        </p:spPr>
+        <p:txBody>
+          <a:bodyPr wrap="square">
+            <a:spAutoFit/>
+          </a:bodyPr>
+          <a:lstStyle/>
+          <a:p>
+            <a:pPr algn="r">
+              <a:spcBef>
+                <a:spcPts val="0"/>
+              </a:spcBef>
+              <a:spcAft>
+                <a:spcPts val="600"/>
+              </a:spcAft>
+            </a:pPr>
+            <a:r>
+              <a:rPr sz="1000" b="0">
+                <a:solidFill>
+                  <a:srgbClr val="0B2B52"/>
+                </a:solidFill>
+              </a:rPr>
+              <a:t>30</a:t>
+            </a:r>
+          </a:p>
+        </p:txBody>
+      </p:sp>
+      <p:sp>
+        <p:nvSpPr>
+          <p:cNvPr id="7" name="TextBox 6"/>
+          <p:cNvSpPr txBox="1"/>
+          <p:nvPr/>
+        </p:nvSpPr>
+        <p:spPr>
+          <a:xfrm>
+            <a:off x="548640" y="1280160"/>
+            <a:ext cx="11155680" cy="3383280"/>
+          </a:xfrm>
+          <a:prstGeom prst="rect">
+            <a:avLst/>
+          </a:prstGeom>
+          <a:noFill/>
+        </p:spPr>
+        <p:txBody>
+          <a:bodyPr wrap="square">
+            <a:spAutoFit/>
+          </a:bodyPr>
+          <a:lstStyle/>
+          <a:p>
+            <a:pPr>
+              <a:spcBef>
+                <a:spcPts val="0"/>
+              </a:spcBef>
+              <a:spcAft>
+                <a:spcPts val="600"/>
+              </a:spcAft>
+            </a:pPr>
+            <a:r>
+              <a:rPr sz="1400" b="0">
+                <a:solidFill>
+                  <a:srgbClr val="0B2B52"/>
+                </a:solidFill>
+              </a:rPr>
+              <a:t>•  Implemented and integrated memory, sampling and parallelism optimisations into the Boltz pipeline; device-agnostic on Apple Silicon.</a:t>
+            </a:r>
+          </a:p>
+          <a:p>
+            <a:pPr>
+              <a:spcAft>
+                <a:spcPts val="600"/>
+              </a:spcAft>
+            </a:pPr>
+            <a:r>
+              <a:rPr sz="1400" b="0">
+                <a:solidFill>
+                  <a:srgbClr val="0B2B52"/>
+                </a:solidFill>
+              </a:rPr>
+              <a:t>•  Moved from component microbenchmarks to end-to-end measurement against pretrained checkpoints and experimentally determined structures.</a:t>
+            </a:r>
+          </a:p>
+          <a:p>
+            <a:pPr>
+              <a:spcAft>
+                <a:spcPts val="600"/>
+              </a:spcAft>
+            </a:pPr>
+            <a:r>
+              <a:rPr sz="1400" b="0">
+                <a:solidFill>
+                  <a:srgbClr val="0B2B52"/>
+                </a:solidFill>
+              </a:rPr>
+              <a:t>•  Two questions closed with negative answers, both with mechanisms: the low-rank OPM is unreachable on released weights, and ipTM tracks peptide composition rather than binding.</a:t>
+            </a:r>
+          </a:p>
+          <a:p>
+            <a:pPr>
+              <a:spcAft>
+                <a:spcPts val="600"/>
+              </a:spcAft>
+            </a:pPr>
+            <a:r>
+              <a:rPr sz="1400" b="0">
+                <a:solidFill>
+                  <a:srgbClr val="0B2B52"/>
+                </a:solidFill>
+              </a:rPr>
+              <a:t>•  A third finding generalises beyond this project: a single unseeded fold does not reproduce its own ranking.</a:t>
+            </a:r>
+          </a:p>
+          <a:p>
+            <a:pPr>
+              <a:spcAft>
+                <a:spcPts val="600"/>
+              </a:spcAft>
+            </a:pPr>
+            <a:r>
+              <a:rPr sz="1400" b="0">
+                <a:solidFill>
+                  <a:srgbClr val="0B2B52"/>
+                </a:solidFill>
+              </a:rPr>
+              <a:t>•  Next: GPU-scale replicate folding, then few-step sampler distillation.</a:t>
+            </a:r>
+          </a:p>
+        </p:txBody>
+      </p:sp>
+      <p:sp>
+        <p:nvSpPr>
+          <p:cNvPr id="8" name="Rounded Rectangle 7"/>
+          <p:cNvSpPr/>
+          <p:nvPr/>
+        </p:nvSpPr>
+        <p:spPr>
+          <a:xfrm>
+            <a:off x="548640" y="4892040"/>
+            <a:ext cx="11155680" cy="1051560"/>
+          </a:xfrm>
+          <a:prstGeom prst="roundRect">
+            <a:avLst/>
+          </a:prstGeom>
+          <a:solidFill>
+            <a:srgbClr val="0B2B52"/>
+          </a:solidFill>
+          <a:ln>
+            <a:noFill/>
+          </a:ln>
+          <a:effectLst/>
+        </p:spPr>
+        <p:style>
+          <a:lnRef idx="1">
+            <a:schemeClr val="accent1"/>
+          </a:lnRef>
+          <a:fillRef idx="3">
+            <a:schemeClr val="accent1"/>
+          </a:fillRef>
+          <a:effectRef idx="2">
+            <a:schemeClr val="accent1"/>
+          </a:effectRef>
+          <a:fontRef idx="minor">
+            <a:schemeClr val="lt1"/>
+          </a:fontRef>
+        </p:style>
+        <p:txBody>
+          <a:bodyPr rtlCol="0" anchor="ctr" wrap="square"/>
+          <a:lstStyle/>
+          <a:p>
+            <a:pPr algn="ctr">
+              <a:spcBef>
+                <a:spcPts val="0"/>
+              </a:spcBef>
+              <a:spcAft>
+                <a:spcPts val="400"/>
+              </a:spcAft>
+            </a:pPr>
+            <a:r>
+              <a:rPr sz="2000" b="1" i="0">
+                <a:solidFill>
+                  <a:srgbClr val="FFFFFF"/>
+                </a:solidFill>
+              </a:rPr>
+              <a:t>Thank you  ·  Questions welcome</a:t>
             </a:r>
           </a:p>
         </p:txBody>
@@ -12775,10 +15109,10 @@
             <a:r>
               <a:rPr sz="1000" b="0">
                 <a:solidFill>
-                  <a:srgbClr val="555555"/>
-                </a:solidFill>
-              </a:rPr>
-              <a:t>3</a:t>
+                  <a:srgbClr val="0B2B52"/>
+                </a:solidFill>
+              </a:rPr>
+              <a:t>4</a:t>
             </a:r>
           </a:p>
         </p:txBody>
@@ -13581,10 +15915,10 @@
             <a:r>
               <a:rPr sz="1000" b="0">
                 <a:solidFill>
-                  <a:srgbClr val="555555"/>
-                </a:solidFill>
-              </a:rPr>
-              <a:t>4</a:t>
+                  <a:srgbClr val="0B2B52"/>
+                </a:solidFill>
+              </a:rPr>
+              <a:t>5</a:t>
             </a:r>
           </a:p>
         </p:txBody>
@@ -14027,10 +16361,10 @@
             <a:r>
               <a:rPr sz="1000" b="0">
                 <a:solidFill>
-                  <a:srgbClr val="555555"/>
-                </a:solidFill>
-              </a:rPr>
-              <a:t>5</a:t>
+                  <a:srgbClr val="0B2B52"/>
+                </a:solidFill>
+              </a:rPr>
+              <a:t>6</a:t>
             </a:r>
           </a:p>
         </p:txBody>
@@ -14412,10 +16746,10 @@
             <a:r>
               <a:rPr sz="1000" b="0">
                 <a:solidFill>
-                  <a:srgbClr val="555555"/>
-                </a:solidFill>
-              </a:rPr>
-              <a:t>6</a:t>
+                  <a:srgbClr val="0B2B52"/>
+                </a:solidFill>
+              </a:rPr>
+              <a:t>7</a:t>
             </a:r>
           </a:p>
         </p:txBody>
@@ -15030,10 +17364,10 @@
             <a:r>
               <a:rPr sz="1000" b="0">
                 <a:solidFill>
-                  <a:srgbClr val="555555"/>
-                </a:solidFill>
-              </a:rPr>
-              <a:t>7</a:t>
+                  <a:srgbClr val="0B2B52"/>
+                </a:solidFill>
+              </a:rPr>
+              <a:t>8</a:t>
             </a:r>
           </a:p>
         </p:txBody>
@@ -15688,10 +18022,10 @@
             <a:r>
               <a:rPr sz="1000" b="0">
                 <a:solidFill>
-                  <a:srgbClr val="555555"/>
-                </a:solidFill>
-              </a:rPr>
-              <a:t>8</a:t>
+                  <a:srgbClr val="0B2B52"/>
+                </a:solidFill>
+              </a:rPr>
+              <a:t>9</a:t>
             </a:r>
           </a:p>
         </p:txBody>

--- a/final_dissertation_presentation.pptx
+++ b/final_dissertation_presentation.pptx
@@ -33,6 +33,8 @@
     <p:sldId id="283" r:id="rId34"/>
     <p:sldId id="284" r:id="rId35"/>
     <p:sldId id="285" r:id="rId36"/>
+    <p:sldId id="286" r:id="rId37"/>
+    <p:sldId id="287" r:id="rId38"/>
     <p:sldId id="267" r:id="rId18"/>
     <p:sldId id="268" r:id="rId19"/>
   </p:sldIdLst>
@@ -13038,7 +13040,7 @@
         <p:spPr>
           <a:xfrm>
             <a:off x="0" y="0"/>
-            <a:ext cx="12191695" cy="914400"/>
+            <a:ext cx="12188952" cy="914400"/>
           </a:xfrm>
           <a:prstGeom prst="rect">
             <a:avLst/>
@@ -13049,7 +13051,6 @@
           <a:ln>
             <a:noFill/>
           </a:ln>
-          <a:effectLst/>
         </p:spPr>
         <p:style>
           <a:lnRef idx="1">
@@ -13082,7 +13083,7 @@
         <p:spPr>
           <a:xfrm>
             <a:off x="0" y="914400"/>
-            <a:ext cx="12191695" cy="54864"/>
+            <a:ext cx="12188952" cy="54864"/>
           </a:xfrm>
           <a:prstGeom prst="rect">
             <a:avLst/>
@@ -13093,7 +13094,6 @@
           <a:ln>
             <a:noFill/>
           </a:ln>
-          <a:effectLst/>
         </p:spPr>
         <p:style>
           <a:lnRef idx="1">
@@ -13140,20 +13140,17 @@
           <a:lstStyle/>
           <a:p>
             <a:pPr>
-              <a:spcBef>
-                <a:spcPts val="0"/>
-              </a:spcBef>
-              <a:spcAft>
-                <a:spcPts val="400"/>
-              </a:spcAft>
-            </a:pPr>
-            <a:r>
-              <a:rPr sz="2600" b="1" i="0">
+              <a:spcAft>
+                <a:spcPts val="600"/>
+              </a:spcAft>
+            </a:pPr>
+            <a:r>
+              <a:rPr sz="2600" b="1">
                 <a:solidFill>
                   <a:srgbClr val="FFFFFF"/>
                 </a:solidFill>
               </a:rPr>
-              <a:t>Future Plan</a:t>
+              <a:t>Measured — Require the Match in Both Directions</a:t>
             </a:r>
           </a:p>
         </p:txBody>
@@ -13181,9 +13178,6 @@
           <a:lstStyle/>
           <a:p>
             <a:pPr>
-              <a:spcBef>
-                <a:spcPts val="0"/>
-              </a:spcBef>
               <a:spcAft>
                 <a:spcPts val="600"/>
               </a:spcAft>
@@ -13207,7 +13201,7 @@
         </p:nvSpPr>
         <p:spPr>
           <a:xfrm>
-            <a:off x="11185855" y="6473952"/>
+            <a:off x="11183112" y="6473952"/>
             <a:ext cx="640080" cy="274320"/>
           </a:xfrm>
           <a:prstGeom prst="rect">
@@ -13221,10 +13215,7 @@
           </a:bodyPr>
           <a:lstStyle/>
           <a:p>
-            <a:pPr algn="r">
-              <a:spcBef>
-                <a:spcPts val="0"/>
-              </a:spcBef>
+            <a:pPr>
               <a:spcAft>
                 <a:spcPts val="600"/>
               </a:spcAft>
@@ -13242,16 +13233,131 @@
       </p:sp>
       <p:sp>
         <p:nvSpPr>
-          <p:cNvPr id="7" name="Oval 6"/>
+          <p:cNvPr id="7" name="TextBox 6"/>
+          <p:cNvSpPr txBox="1"/>
+          <p:nvPr/>
+        </p:nvSpPr>
+        <p:spPr>
+          <a:xfrm>
+            <a:off x="548640" y="1170432"/>
+            <a:ext cx="11155680" cy="1005840"/>
+          </a:xfrm>
+          <a:prstGeom prst="rect">
+            <a:avLst/>
+          </a:prstGeom>
+          <a:noFill/>
+        </p:spPr>
+        <p:txBody>
+          <a:bodyPr wrap="square">
+            <a:spAutoFit/>
+          </a:bodyPr>
+          <a:lstStyle/>
+          <a:p>
+            <a:pPr>
+              <a:spcAft>
+                <a:spcPts val="600"/>
+              </a:spcAft>
+            </a:pPr>
+            <a:r>
+              <a:rPr sz="1500" b="0">
+                <a:solidFill>
+                  <a:srgbClr val="0B2B52"/>
+                </a:solidFill>
+              </a:rPr>
+              <a:t>Section 7 always asked: for this receptor, is the cognate the best peptide?</a:t>
+            </a:r>
+          </a:p>
+          <a:p>
+            <a:pPr>
+              <a:spcAft>
+                <a:spcPts val="600"/>
+              </a:spcAft>
+            </a:pPr>
+            <a:r>
+              <a:rPr sz="1500" b="0">
+                <a:solidFill>
+                  <a:srgbClr val="0B2B52"/>
+                </a:solidFill>
+              </a:rPr>
+              <a:t>The panel also contains the transpose: for this peptide, is its own receptor the best target?</a:t>
+            </a:r>
+          </a:p>
+        </p:txBody>
+      </p:sp>
+      <p:sp>
+        <p:nvSpPr>
+          <p:cNvPr id="8" name="Rounded Rectangle 7"/>
           <p:cNvSpPr/>
           <p:nvPr/>
         </p:nvSpPr>
         <p:spPr>
           <a:xfrm>
-            <a:off x="548640" y="1325880"/>
-            <a:ext cx="566928" cy="566928"/>
-          </a:xfrm>
-          <a:prstGeom prst="ellipse">
+            <a:off x="548640" y="1965960"/>
+            <a:ext cx="3520440" cy="1463040"/>
+          </a:xfrm>
+          <a:prstGeom prst="roundRect">
+            <a:avLst/>
+          </a:prstGeom>
+          <a:solidFill>
+            <a:srgbClr val="2E7D32"/>
+          </a:solidFill>
+          <a:ln>
+            <a:noFill/>
+          </a:ln>
+        </p:spPr>
+        <p:style>
+          <a:lnRef idx="1">
+            <a:schemeClr val="accent1"/>
+          </a:lnRef>
+          <a:fillRef idx="3">
+            <a:schemeClr val="accent1"/>
+          </a:fillRef>
+          <a:effectRef idx="2">
+            <a:schemeClr val="accent1"/>
+          </a:effectRef>
+          <a:fontRef idx="minor">
+            <a:schemeClr val="lt1"/>
+          </a:fontRef>
+        </p:style>
+        <p:txBody>
+          <a:bodyPr rtlCol="0" anchor="ctr" wrap="square"/>
+          <a:lstStyle/>
+          <a:p>
+            <a:pPr algn="ctr"/>
+            <a:r>
+              <a:rPr sz="2300" b="1">
+                <a:solidFill>
+                  <a:srgbClr val="FFFFFF"/>
+                </a:solidFill>
+              </a:rPr>
+              <a:t>56% → 88%</a:t>
+            </a:r>
+          </a:p>
+          <a:p>
+            <a:pPr algn="ctr"/>
+            <a:r>
+              <a:rPr sz="1050">
+                <a:solidFill>
+                  <a:srgbClr val="FFFFFF"/>
+                </a:solidFill>
+              </a:rPr>
+              <a:t>precision, one-directional → reciprocal</a:t>
+            </a:r>
+          </a:p>
+        </p:txBody>
+      </p:sp>
+      <p:sp>
+        <p:nvSpPr>
+          <p:cNvPr id="9" name="Rounded Rectangle 8"/>
+          <p:cNvSpPr/>
+          <p:nvPr/>
+        </p:nvSpPr>
+        <p:spPr>
+          <a:xfrm>
+            <a:off x="4343400" y="1965960"/>
+            <a:ext cx="3520440" cy="1463040"/>
+          </a:xfrm>
+          <a:prstGeom prst="roundRect">
             <a:avLst/>
           </a:prstGeom>
           <a:solidFill>
@@ -13260,7 +13366,6 @@
           <a:ln>
             <a:noFill/>
           </a:ln>
-          <a:effectLst/>
         </p:spPr>
         <p:style>
           <a:lnRef idx="1">
@@ -13280,78 +13385,41 @@
           <a:bodyPr rtlCol="0" anchor="ctr" wrap="square"/>
           <a:lstStyle/>
           <a:p>
-            <a:pPr algn="ctr">
-              <a:spcBef>
-                <a:spcPts val="0"/>
-              </a:spcBef>
-              <a:spcAft>
-                <a:spcPts val="400"/>
-              </a:spcAft>
-            </a:pPr>
-            <a:r>
-              <a:rPr sz="1800" b="1" i="0">
+            <a:pPr algn="ctr"/>
+            <a:r>
+              <a:rPr sz="2300" b="1">
                 <a:solidFill>
                   <a:srgbClr val="FFFFFF"/>
                 </a:solidFill>
               </a:rPr>
-              <a:t>1</a:t>
-            </a:r>
-          </a:p>
-        </p:txBody>
-      </p:sp>
-      <p:sp>
-        <p:nvSpPr>
-          <p:cNvPr id="8" name="TextBox 7"/>
-          <p:cNvSpPr txBox="1"/>
-          <p:nvPr/>
-        </p:nvSpPr>
-        <p:spPr>
-          <a:xfrm>
-            <a:off x="1325880" y="1307592"/>
-            <a:ext cx="10332720" cy="868680"/>
-          </a:xfrm>
-          <a:prstGeom prst="rect">
-            <a:avLst/>
-          </a:prstGeom>
-          <a:noFill/>
-        </p:spPr>
-        <p:txBody>
-          <a:bodyPr wrap="square">
-            <a:spAutoFit/>
-          </a:bodyPr>
-          <a:lstStyle/>
-          <a:p>
-            <a:pPr>
-              <a:spcBef>
-                <a:spcPts val="0"/>
-              </a:spcBef>
-              <a:spcAft>
-                <a:spcPts val="600"/>
-              </a:spcAft>
-            </a:pPr>
-            <a:r>
-              <a:rPr sz="1300" b="0">
-                <a:solidFill>
-                  <a:srgbClr val="0B2B52"/>
-                </a:solidFill>
-              </a:rPr>
-              <a:t>DONE — profiled; and measured what the optimisations actually deliver on pretrained weights (slides 11–18).</a:t>
-            </a:r>
-          </a:p>
-        </p:txBody>
-      </p:sp>
-      <p:sp>
-        <p:nvSpPr>
-          <p:cNvPr id="9" name="Oval 8"/>
+              <a:t>87% / 23%</a:t>
+            </a:r>
+          </a:p>
+          <a:p>
+            <a:pPr algn="ctr"/>
+            <a:r>
+              <a:rPr sz="1050">
+                <a:solidFill>
+                  <a:srgbClr val="FFFFFF"/>
+                </a:solidFill>
+              </a:rPr>
+              <a:t>of wrong / right calls discarded</a:t>
+            </a:r>
+          </a:p>
+        </p:txBody>
+      </p:sp>
+      <p:sp>
+        <p:nvSpPr>
+          <p:cNvPr id="10" name="Rounded Rectangle 9"/>
           <p:cNvSpPr/>
           <p:nvPr/>
         </p:nvSpPr>
         <p:spPr>
           <a:xfrm>
-            <a:off x="548640" y="2304288"/>
-            <a:ext cx="566928" cy="566928"/>
-          </a:xfrm>
-          <a:prstGeom prst="ellipse">
+            <a:off x="8138160" y="1965960"/>
+            <a:ext cx="3566160" cy="1463040"/>
+          </a:xfrm>
+          <a:prstGeom prst="roundRect">
             <a:avLst/>
           </a:prstGeom>
           <a:solidFill>
@@ -13360,7 +13428,6 @@
           <a:ln>
             <a:noFill/>
           </a:ln>
-          <a:effectLst/>
         </p:spPr>
         <p:style>
           <a:lnRef idx="1">
@@ -13380,35 +13447,39 @@
           <a:bodyPr rtlCol="0" anchor="ctr" wrap="square"/>
           <a:lstStyle/>
           <a:p>
-            <a:pPr algn="ctr">
-              <a:spcBef>
-                <a:spcPts val="0"/>
-              </a:spcBef>
-              <a:spcAft>
-                <a:spcPts val="400"/>
-              </a:spcAft>
-            </a:pPr>
-            <a:r>
-              <a:rPr sz="1800" b="1" i="0">
+            <a:pPr algn="ctr"/>
+            <a:r>
+              <a:rPr sz="2300" b="1">
                 <a:solidFill>
                   <a:srgbClr val="FFFFFF"/>
                 </a:solidFill>
               </a:rPr>
-              <a:t>2</a:t>
-            </a:r>
-          </a:p>
-        </p:txBody>
-      </p:sp>
-      <p:sp>
-        <p:nvSpPr>
-          <p:cNvPr id="10" name="TextBox 9"/>
+              <a:t>12 of 12</a:t>
+            </a:r>
+          </a:p>
+          <a:p>
+            <a:pPr algn="ctr"/>
+            <a:r>
+              <a:rPr sz="1050">
+                <a:solidFill>
+                  <a:srgbClr val="FFFFFF"/>
+                </a:solidFill>
+              </a:rPr>
+              <a:t>combinations improved</a:t>
+            </a:r>
+          </a:p>
+        </p:txBody>
+      </p:sp>
+      <p:sp>
+        <p:nvSpPr>
+          <p:cNvPr id="11" name="TextBox 10"/>
           <p:cNvSpPr txBox="1"/>
           <p:nvPr/>
         </p:nvSpPr>
         <p:spPr>
           <a:xfrm>
-            <a:off x="1325880" y="2286000"/>
-            <a:ext cx="10332720" cy="868680"/>
+            <a:off x="548640" y="3703320"/>
+            <a:ext cx="11155680" cy="1005840"/>
           </a:xfrm>
           <a:prstGeom prst="rect">
             <a:avLst/>
@@ -13422,36 +13493,48 @@
           <a:lstStyle/>
           <a:p>
             <a:pPr>
-              <a:spcBef>
-                <a:spcPts val="0"/>
-              </a:spcBef>
-              <a:spcAft>
-                <a:spcPts val="600"/>
-              </a:spcAft>
-            </a:pPr>
-            <a:r>
-              <a:rPr sz="1300" b="0">
+              <a:spcAft>
+                <a:spcPts val="600"/>
+              </a:spcAft>
+            </a:pPr>
+            <a:r>
+              <a:rPr sz="1500" b="0">
                 <a:solidFill>
                   <a:srgbClr val="0B2B52"/>
                 </a:solidFill>
               </a:rPr>
-              <a:t>Few-step diffusion-sampler distillation (consistency/progressive) — keep the full trunk; target minutes → seconds locally.</a:t>
-            </a:r>
-          </a:p>
-        </p:txBody>
-      </p:sp>
-      <p:sp>
-        <p:nvSpPr>
-          <p:cNvPr id="11" name="Oval 10"/>
+              <a:t>Two panels x two readouts x five draws. Enrichment 2.3x → 3.5x, keeping 49% of calls.</a:t>
+            </a:r>
+          </a:p>
+          <a:p>
+            <a:pPr>
+              <a:spcAft>
+                <a:spcPts val="600"/>
+              </a:spcAft>
+            </a:pPr>
+            <a:r>
+              <a:rPr sz="1500" b="0">
+                <a:solidFill>
+                  <a:srgbClr val="0B2B52"/>
+                </a:solidFill>
+              </a:rPr>
+              <a:t>A filter that only shrank the set would discard both classes in proportion — it does not.</a:t>
+            </a:r>
+          </a:p>
+        </p:txBody>
+      </p:sp>
+      <p:sp>
+        <p:nvSpPr>
+          <p:cNvPr id="12" name="Rounded Rectangle 11"/>
           <p:cNvSpPr/>
           <p:nvPr/>
         </p:nvSpPr>
         <p:spPr>
           <a:xfrm>
-            <a:off x="548640" y="3282696"/>
-            <a:ext cx="566928" cy="566928"/>
-          </a:xfrm>
-          <a:prstGeom prst="ellipse">
+            <a:off x="548640" y="4572000"/>
+            <a:ext cx="11155680" cy="960120"/>
+          </a:xfrm>
+          <a:prstGeom prst="roundRect">
             <a:avLst/>
           </a:prstGeom>
           <a:solidFill>
@@ -13460,7 +13543,6 @@
           <a:ln>
             <a:noFill/>
           </a:ln>
-          <a:effectLst/>
         </p:spPr>
         <p:style>
           <a:lnRef idx="1">
@@ -13481,86 +13563,41 @@
           <a:lstStyle/>
           <a:p>
             <a:pPr algn="ctr">
-              <a:spcBef>
-                <a:spcPts val="0"/>
-              </a:spcBef>
-              <a:spcAft>
-                <a:spcPts val="400"/>
-              </a:spcAft>
-            </a:pPr>
-            <a:r>
-              <a:rPr sz="1800" b="1" i="0">
+              <a:spcAft>
+                <a:spcPts val="600"/>
+              </a:spcAft>
+            </a:pPr>
+            <a:r>
+              <a:rPr sz="1700" b="1">
                 <a:solidFill>
                   <a:srgbClr val="FFFFFF"/>
                 </a:solidFill>
               </a:rPr>
-              <a:t>3</a:t>
-            </a:r>
-          </a:p>
-        </p:txBody>
-      </p:sp>
-      <p:sp>
-        <p:nvSpPr>
-          <p:cNvPr id="12" name="TextBox 11"/>
-          <p:cNvSpPr txBox="1"/>
-          <p:nvPr/>
-        </p:nvSpPr>
-        <p:spPr>
-          <a:xfrm>
-            <a:off x="1325880" y="3264408"/>
-            <a:ext cx="10332720" cy="868680"/>
-          </a:xfrm>
-          <a:prstGeom prst="rect">
-            <a:avLst/>
-          </a:prstGeom>
-          <a:noFill/>
-        </p:spPr>
-        <p:txBody>
-          <a:bodyPr wrap="square">
-            <a:spAutoFit/>
-          </a:bodyPr>
-          <a:lstStyle/>
-          <a:p>
-            <a:pPr>
-              <a:spcBef>
-                <a:spcPts val="0"/>
-              </a:spcBef>
-              <a:spcAft>
-                <a:spcPts val="600"/>
-              </a:spcAft>
-            </a:pPr>
-            <a:r>
-              <a:rPr sz="1300" b="0">
-                <a:solidFill>
-                  <a:srgbClr val="0B2B52"/>
-                </a:solidFill>
-              </a:rPr>
-              <a:t>DONE, NEGATIVE — the surrogate was distilled and evaluated: ipTM does not rank binders, so no surrogate distilled from it can either.</a:t>
-            </a:r>
-          </a:p>
-        </p:txBody>
-      </p:sp>
-      <p:sp>
-        <p:nvSpPr>
-          <p:cNvPr id="13" name="Oval 12"/>
+              <a:t>The only intervention in this work that improved in every panel, readout and draw tested.</a:t>
+            </a:r>
+          </a:p>
+        </p:txBody>
+      </p:sp>
+      <p:sp>
+        <p:nvSpPr>
+          <p:cNvPr id="13" name="Rounded Rectangle 12"/>
           <p:cNvSpPr/>
           <p:nvPr/>
         </p:nvSpPr>
         <p:spPr>
           <a:xfrm>
-            <a:off x="548640" y="4261104"/>
-            <a:ext cx="566928" cy="566928"/>
-          </a:xfrm>
-          <a:prstGeom prst="ellipse">
+            <a:off x="548640" y="5623560"/>
+            <a:ext cx="11155680" cy="868680"/>
+          </a:xfrm>
+          <a:prstGeom prst="roundRect">
             <a:avLst/>
           </a:prstGeom>
           <a:solidFill>
-            <a:srgbClr val="C77700"/>
+            <a:srgbClr val="FDF3E0"/>
           </a:solidFill>
           <a:ln>
             <a:noFill/>
           </a:ln>
-          <a:effectLst/>
         </p:spPr>
         <p:style>
           <a:lnRef idx="1">
@@ -13581,161 +13618,17 @@
           <a:lstStyle/>
           <a:p>
             <a:pPr algn="ctr">
-              <a:spcBef>
-                <a:spcPts val="0"/>
-              </a:spcBef>
-              <a:spcAft>
-                <a:spcPts val="400"/>
-              </a:spcAft>
-            </a:pPr>
-            <a:r>
-              <a:rPr sz="1800" b="1" i="0">
-                <a:solidFill>
-                  <a:srgbClr val="FFFFFF"/>
-                </a:solidFill>
-              </a:rPr>
-              <a:t>4</a:t>
-            </a:r>
-          </a:p>
-        </p:txBody>
-      </p:sp>
-      <p:sp>
-        <p:nvSpPr>
-          <p:cNvPr id="14" name="TextBox 13"/>
-          <p:cNvSpPr txBox="1"/>
-          <p:nvPr/>
-        </p:nvSpPr>
-        <p:spPr>
-          <a:xfrm>
-            <a:off x="1325880" y="4242816"/>
-            <a:ext cx="10332720" cy="868680"/>
-          </a:xfrm>
-          <a:prstGeom prst="rect">
-            <a:avLst/>
-          </a:prstGeom>
-          <a:noFill/>
-        </p:spPr>
-        <p:txBody>
-          <a:bodyPr wrap="square">
-            <a:spAutoFit/>
-          </a:bodyPr>
-          <a:lstStyle/>
-          <a:p>
-            <a:pPr>
-              <a:spcBef>
-                <a:spcPts val="0"/>
-              </a:spcBef>
-              <a:spcAft>
-                <a:spcPts val="600"/>
-              </a:spcAft>
-            </a:pPr>
-            <a:r>
-              <a:rPr sz="1300" b="0">
-                <a:solidFill>
-                  <a:srgbClr val="0B2B52"/>
-                </a:solidFill>
-              </a:rPr>
-              <a:t>Use open Boltz-2 weights only — Boltz-2.1 is closed / API-only.</a:t>
-            </a:r>
-          </a:p>
-        </p:txBody>
-      </p:sp>
-      <p:sp>
-        <p:nvSpPr>
-          <p:cNvPr id="15" name="Oval 14"/>
-          <p:cNvSpPr/>
-          <p:nvPr/>
-        </p:nvSpPr>
-        <p:spPr>
-          <a:xfrm>
-            <a:off x="548640" y="5239512"/>
-            <a:ext cx="566928" cy="566928"/>
-          </a:xfrm>
-          <a:prstGeom prst="ellipse">
-            <a:avLst/>
-          </a:prstGeom>
-          <a:solidFill>
-            <a:srgbClr val="0B2B52"/>
-          </a:solidFill>
-          <a:ln>
-            <a:noFill/>
-          </a:ln>
-          <a:effectLst/>
-        </p:spPr>
-        <p:style>
-          <a:lnRef idx="1">
-            <a:schemeClr val="accent1"/>
-          </a:lnRef>
-          <a:fillRef idx="3">
-            <a:schemeClr val="accent1"/>
-          </a:fillRef>
-          <a:effectRef idx="2">
-            <a:schemeClr val="accent1"/>
-          </a:effectRef>
-          <a:fontRef idx="minor">
-            <a:schemeClr val="lt1"/>
-          </a:fontRef>
-        </p:style>
-        <p:txBody>
-          <a:bodyPr rtlCol="0" anchor="ctr" wrap="square"/>
-          <a:lstStyle/>
-          <a:p>
-            <a:pPr algn="ctr">
-              <a:spcBef>
-                <a:spcPts val="0"/>
-              </a:spcBef>
-              <a:spcAft>
-                <a:spcPts val="400"/>
-              </a:spcAft>
-            </a:pPr>
-            <a:r>
-              <a:rPr sz="1800" b="1" i="0">
-                <a:solidFill>
-                  <a:srgbClr val="FFFFFF"/>
-                </a:solidFill>
-              </a:rPr>
-              <a:t>5</a:t>
-            </a:r>
-          </a:p>
-        </p:txBody>
-      </p:sp>
-      <p:sp>
-        <p:nvSpPr>
-          <p:cNvPr id="16" name="TextBox 15"/>
-          <p:cNvSpPr txBox="1"/>
-          <p:nvPr/>
-        </p:nvSpPr>
-        <p:spPr>
-          <a:xfrm>
-            <a:off x="1325880" y="5221224"/>
-            <a:ext cx="10332720" cy="868680"/>
-          </a:xfrm>
-          <a:prstGeom prst="rect">
-            <a:avLst/>
-          </a:prstGeom>
-          <a:noFill/>
-        </p:spPr>
-        <p:txBody>
-          <a:bodyPr wrap="square">
-            <a:spAutoFit/>
-          </a:bodyPr>
-          <a:lstStyle/>
-          <a:p>
-            <a:pPr>
-              <a:spcBef>
-                <a:spcPts val="0"/>
-              </a:spcBef>
-              <a:spcAft>
-                <a:spcPts val="600"/>
-              </a:spcAft>
-            </a:pPr>
-            <a:r>
-              <a:rPr sz="1300" b="0">
-                <a:solidFill>
-                  <a:srgbClr val="0B2B52"/>
-                </a:solidFill>
-              </a:rPr>
-              <a:t>Production GPU scaling — now a PREREQUISITE, not a throughput nicety: replicate-averaged folds (9–16 per complex) are needed before any per-receptor claim holds.</a:t>
+              <a:spcAft>
+                <a:spcPts val="600"/>
+              </a:spcAft>
+            </a:pPr>
+            <a:r>
+              <a:rPr sz="1250" b="0">
+                <a:solidFill>
+                  <a:srgbClr val="8A5200"/>
+                </a:solidFill>
+              </a:rPr>
+              <a:t>Not a better score — the same scores read as a two-way competition, so its power comes from the structure of the screen, not the model, and the Section 7.9 ceiling does not apply. Costs 5-10x folds at deployment. Caveat: 7-13 calls per combination, so a reported 100% is 8 of 8.</a:t>
             </a:r>
           </a:p>
         </p:txBody>
@@ -14526,6 +14419,458 @@
         <p:spPr>
           <a:xfrm>
             <a:off x="0" y="0"/>
+            <a:ext cx="12188952" cy="914400"/>
+          </a:xfrm>
+          <a:prstGeom prst="rect">
+            <a:avLst/>
+          </a:prstGeom>
+          <a:solidFill>
+            <a:srgbClr val="0B2B52"/>
+          </a:solidFill>
+          <a:ln>
+            <a:noFill/>
+          </a:ln>
+        </p:spPr>
+        <p:style>
+          <a:lnRef idx="1">
+            <a:schemeClr val="accent1"/>
+          </a:lnRef>
+          <a:fillRef idx="3">
+            <a:schemeClr val="accent1"/>
+          </a:fillRef>
+          <a:effectRef idx="2">
+            <a:schemeClr val="accent1"/>
+          </a:effectRef>
+          <a:fontRef idx="minor">
+            <a:schemeClr val="lt1"/>
+          </a:fontRef>
+        </p:style>
+        <p:txBody>
+          <a:bodyPr rtlCol="0" anchor="ctr"/>
+          <a:lstStyle/>
+          <a:p>
+            <a:pPr algn="ctr"/>
+          </a:p>
+        </p:txBody>
+      </p:sp>
+      <p:sp>
+        <p:nvSpPr>
+          <p:cNvPr id="3" name="Rectangle 2"/>
+          <p:cNvSpPr/>
+          <p:nvPr/>
+        </p:nvSpPr>
+        <p:spPr>
+          <a:xfrm>
+            <a:off x="0" y="914400"/>
+            <a:ext cx="12188952" cy="54864"/>
+          </a:xfrm>
+          <a:prstGeom prst="rect">
+            <a:avLst/>
+          </a:prstGeom>
+          <a:solidFill>
+            <a:srgbClr val="1E6FB8"/>
+          </a:solidFill>
+          <a:ln>
+            <a:noFill/>
+          </a:ln>
+        </p:spPr>
+        <p:style>
+          <a:lnRef idx="1">
+            <a:schemeClr val="accent1"/>
+          </a:lnRef>
+          <a:fillRef idx="3">
+            <a:schemeClr val="accent1"/>
+          </a:fillRef>
+          <a:effectRef idx="2">
+            <a:schemeClr val="accent1"/>
+          </a:effectRef>
+          <a:fontRef idx="minor">
+            <a:schemeClr val="lt1"/>
+          </a:fontRef>
+        </p:style>
+        <p:txBody>
+          <a:bodyPr rtlCol="0" anchor="ctr"/>
+          <a:lstStyle/>
+          <a:p>
+            <a:pPr algn="ctr"/>
+          </a:p>
+        </p:txBody>
+      </p:sp>
+      <p:sp>
+        <p:nvSpPr>
+          <p:cNvPr id="4" name="TextBox 3"/>
+          <p:cNvSpPr txBox="1"/>
+          <p:nvPr/>
+        </p:nvSpPr>
+        <p:spPr>
+          <a:xfrm>
+            <a:off x="502920" y="109728"/>
+            <a:ext cx="11155680" cy="777240"/>
+          </a:xfrm>
+          <a:prstGeom prst="rect">
+            <a:avLst/>
+          </a:prstGeom>
+          <a:noFill/>
+        </p:spPr>
+        <p:txBody>
+          <a:bodyPr wrap="square">
+            <a:spAutoFit/>
+          </a:bodyPr>
+          <a:lstStyle/>
+          <a:p>
+            <a:pPr>
+              <a:spcAft>
+                <a:spcPts val="600"/>
+              </a:spcAft>
+            </a:pPr>
+            <a:r>
+              <a:rPr sz="2600" b="1">
+                <a:solidFill>
+                  <a:srgbClr val="FFFFFF"/>
+                </a:solidFill>
+              </a:rPr>
+              <a:t>Two Ways Out That Did Not Work — and What They Explain</a:t>
+            </a:r>
+          </a:p>
+        </p:txBody>
+      </p:sp>
+      <p:sp>
+        <p:nvSpPr>
+          <p:cNvPr id="5" name="TextBox 4"/>
+          <p:cNvSpPr txBox="1"/>
+          <p:nvPr/>
+        </p:nvSpPr>
+        <p:spPr>
+          <a:xfrm>
+            <a:off x="502920" y="6473952"/>
+            <a:ext cx="8229600" cy="274320"/>
+          </a:xfrm>
+          <a:prstGeom prst="rect">
+            <a:avLst/>
+          </a:prstGeom>
+          <a:noFill/>
+        </p:spPr>
+        <p:txBody>
+          <a:bodyPr wrap="square">
+            <a:spAutoFit/>
+          </a:bodyPr>
+          <a:lstStyle/>
+          <a:p>
+            <a:pPr>
+              <a:spcAft>
+                <a:spcPts val="600"/>
+              </a:spcAft>
+            </a:pPr>
+            <a:r>
+              <a:rPr sz="900" b="0">
+                <a:solidFill>
+                  <a:srgbClr val="555555"/>
+                </a:solidFill>
+              </a:rPr>
+              <a:t>Boltz-Fast · Final Dissertation Report · Akik Jana (2024AB05287)</a:t>
+            </a:r>
+          </a:p>
+        </p:txBody>
+      </p:sp>
+      <p:sp>
+        <p:nvSpPr>
+          <p:cNvPr id="6" name="TextBox 5"/>
+          <p:cNvSpPr txBox="1"/>
+          <p:nvPr/>
+        </p:nvSpPr>
+        <p:spPr>
+          <a:xfrm>
+            <a:off x="11183112" y="6473952"/>
+            <a:ext cx="640080" cy="274320"/>
+          </a:xfrm>
+          <a:prstGeom prst="rect">
+            <a:avLst/>
+          </a:prstGeom>
+          <a:noFill/>
+        </p:spPr>
+        <p:txBody>
+          <a:bodyPr wrap="square">
+            <a:spAutoFit/>
+          </a:bodyPr>
+          <a:lstStyle/>
+          <a:p>
+            <a:pPr>
+              <a:spcAft>
+                <a:spcPts val="600"/>
+              </a:spcAft>
+            </a:pPr>
+            <a:r>
+              <a:rPr sz="1000" b="0">
+                <a:solidFill>
+                  <a:srgbClr val="0B2B52"/>
+                </a:solidFill>
+              </a:rPr>
+              <a:t>30</a:t>
+            </a:r>
+          </a:p>
+        </p:txBody>
+      </p:sp>
+      <p:sp>
+        <p:nvSpPr>
+          <p:cNvPr id="7" name="TextBox 6"/>
+          <p:cNvSpPr txBox="1"/>
+          <p:nvPr/>
+        </p:nvSpPr>
+        <p:spPr>
+          <a:xfrm>
+            <a:off x="548640" y="1143000"/>
+            <a:ext cx="11155680" cy="640080"/>
+          </a:xfrm>
+          <a:prstGeom prst="rect">
+            <a:avLst/>
+          </a:prstGeom>
+          <a:noFill/>
+        </p:spPr>
+        <p:txBody>
+          <a:bodyPr wrap="square">
+            <a:spAutoFit/>
+          </a:bodyPr>
+          <a:lstStyle/>
+          <a:p>
+            <a:pPr>
+              <a:spcAft>
+                <a:spcPts val="600"/>
+              </a:spcAft>
+            </a:pPr>
+            <a:r>
+              <a:rPr sz="1500" b="0">
+                <a:solidFill>
+                  <a:srgbClr val="0B2B52"/>
+                </a:solidFill>
+              </a:rPr>
+              <a:t>Both used information the confidence head does not provide.</a:t>
+            </a:r>
+          </a:p>
+        </p:txBody>
+      </p:sp>
+      <p:sp>
+        <p:nvSpPr>
+          <p:cNvPr id="8" name="TextBox 7"/>
+          <p:cNvSpPr txBox="1"/>
+          <p:nvPr/>
+        </p:nvSpPr>
+        <p:spPr>
+          <a:xfrm>
+            <a:off x="548640" y="1783080"/>
+            <a:ext cx="11155680" cy="1188720"/>
+          </a:xfrm>
+          <a:prstGeom prst="rect">
+            <a:avLst/>
+          </a:prstGeom>
+          <a:noFill/>
+        </p:spPr>
+        <p:txBody>
+          <a:bodyPr wrap="square">
+            <a:spAutoFit/>
+          </a:bodyPr>
+          <a:lstStyle/>
+          <a:p>
+            <a:r>
+              <a:rPr sz="1600" b="1">
+                <a:solidFill>
+                  <a:srgbClr val="C62828"/>
+                </a:solidFill>
+              </a:rPr>
+              <a:t>Site correctness vs the crystal — NULL</a:t>
+            </a:r>
+          </a:p>
+          <a:p>
+            <a:r>
+              <a:rPr sz="1300">
+                <a:solidFill>
+                  <a:srgbClr val="0B2B52"/>
+                </a:solidFill>
+              </a:rPr>
+              <a:t>cognate 0.452, decoy 0.445, scramble 0.449 site precision.  Rank 2.50 vs chance 2.50, p = 0.906.  The model finds the true groove 3x better than chance — for every peptide equally.</a:t>
+            </a:r>
+          </a:p>
+        </p:txBody>
+      </p:sp>
+      <p:sp>
+        <p:nvSpPr>
+          <p:cNvPr id="9" name="TextBox 8"/>
+          <p:cNvSpPr txBox="1"/>
+          <p:nvPr/>
+        </p:nvSpPr>
+        <p:spPr>
+          <a:xfrm>
+            <a:off x="548640" y="3291839"/>
+            <a:ext cx="11155680" cy="1188720"/>
+          </a:xfrm>
+          <a:prstGeom prst="rect">
+            <a:avLst/>
+          </a:prstGeom>
+          <a:noFill/>
+        </p:spPr>
+        <p:txBody>
+          <a:bodyPr wrap="square">
+            <a:spAutoFit/>
+          </a:bodyPr>
+          <a:lstStyle/>
+          <a:p>
+            <a:r>
+              <a:rPr sz="1600" b="1">
+                <a:solidFill>
+                  <a:srgbClr val="C62828"/>
+                </a:solidFill>
+              </a:rPr>
+              <a:t>Pose agreement across draws — NULL</a:t>
+            </a:r>
+          </a:p>
+          <a:p>
+            <a:r>
+              <a:rPr sz="1300">
+                <a:solidFill>
+                  <a:srgbClr val="0B2B52"/>
+                </a:solidFill>
+              </a:rPr>
+              <a:t>peptide RMSD between draws: cognate 8.35 A, decoy 9.67 A, scramble 9.99 A.  p = 0.129, and only p = 0.350 once receptor reproducibility is regressed out.</a:t>
+            </a:r>
+          </a:p>
+        </p:txBody>
+      </p:sp>
+      <p:sp>
+        <p:nvSpPr>
+          <p:cNvPr id="10" name="Rounded Rectangle 9"/>
+          <p:cNvSpPr/>
+          <p:nvPr/>
+        </p:nvSpPr>
+        <p:spPr>
+          <a:xfrm>
+            <a:off x="548640" y="4892040"/>
+            <a:ext cx="11155680" cy="960120"/>
+          </a:xfrm>
+          <a:prstGeom prst="roundRect">
+            <a:avLst/>
+          </a:prstGeom>
+          <a:solidFill>
+            <a:srgbClr val="0B2B52"/>
+          </a:solidFill>
+          <a:ln>
+            <a:noFill/>
+          </a:ln>
+        </p:spPr>
+        <p:style>
+          <a:lnRef idx="1">
+            <a:schemeClr val="accent1"/>
+          </a:lnRef>
+          <a:fillRef idx="3">
+            <a:schemeClr val="accent1"/>
+          </a:fillRef>
+          <a:effectRef idx="2">
+            <a:schemeClr val="accent1"/>
+          </a:effectRef>
+          <a:fontRef idx="minor">
+            <a:schemeClr val="lt1"/>
+          </a:fontRef>
+        </p:style>
+        <p:txBody>
+          <a:bodyPr rtlCol="0" anchor="ctr" wrap="square"/>
+          <a:lstStyle/>
+          <a:p>
+            <a:pPr algn="ctr">
+              <a:spcAft>
+                <a:spcPts val="600"/>
+              </a:spcAft>
+            </a:pPr>
+            <a:r>
+              <a:rPr sz="1700" b="1">
+                <a:solidFill>
+                  <a:srgbClr val="FFFFFF"/>
+                </a:solidFill>
+              </a:rPr>
+              <a:t>Every peptide lands in the same correct pocket, then sits 8-10 A differently within it on each draw.</a:t>
+            </a:r>
+          </a:p>
+        </p:txBody>
+      </p:sp>
+      <p:sp>
+        <p:nvSpPr>
+          <p:cNvPr id="11" name="Rounded Rectangle 10"/>
+          <p:cNvSpPr/>
+          <p:nvPr/>
+        </p:nvSpPr>
+        <p:spPr>
+          <a:xfrm>
+            <a:off x="548640" y="5943600"/>
+            <a:ext cx="11155680" cy="868680"/>
+          </a:xfrm>
+          <a:prstGeom prst="roundRect">
+            <a:avLst/>
+          </a:prstGeom>
+          <a:solidFill>
+            <a:srgbClr val="FDF3E0"/>
+          </a:solidFill>
+          <a:ln>
+            <a:noFill/>
+          </a:ln>
+        </p:spPr>
+        <p:style>
+          <a:lnRef idx="1">
+            <a:schemeClr val="accent1"/>
+          </a:lnRef>
+          <a:fillRef idx="3">
+            <a:schemeClr val="accent1"/>
+          </a:fillRef>
+          <a:effectRef idx="2">
+            <a:schemeClr val="accent1"/>
+          </a:effectRef>
+          <a:fontRef idx="minor">
+            <a:schemeClr val="lt1"/>
+          </a:fontRef>
+        </p:style>
+        <p:txBody>
+          <a:bodyPr rtlCol="0" anchor="ctr" wrap="square"/>
+          <a:lstStyle/>
+          <a:p>
+            <a:pPr algn="ctr">
+              <a:spcAft>
+                <a:spcPts val="600"/>
+              </a:spcAft>
+            </a:pPr>
+            <a:r>
+              <a:rPr sz="1250" b="0">
+                <a:solidFill>
+                  <a:srgbClr val="8A5200"/>
+                </a:solidFill>
+              </a:rPr>
+              <a:t>The pocket is determined by the receptor; the pose is not determined at all. That is why every contact-derived readout failed — contacts, buried area, pDockQ, PRODIGY dG, pose agreement all read a placement correct in location and arbitrary in detail. Confidence is the only axis carrying binding information.</a:t>
+            </a:r>
+          </a:p>
+        </p:txBody>
+      </p:sp>
+    </p:spTree>
+  </p:cSld>
+  <p:clrMapOvr>
+    <a:masterClrMapping/>
+  </p:clrMapOvr>
+</p:sld>
+</file>
+
+<file path=ppt/slides/slide31.xml><?xml version="1.0" encoding="utf-8"?>
+<p:sld xmlns:a="http://schemas.openxmlformats.org/drawingml/2006/main" xmlns:p="http://schemas.openxmlformats.org/presentationml/2006/main" xmlns:r="http://schemas.openxmlformats.org/officeDocument/2006/relationships">
+  <p:cSld>
+    <p:spTree>
+      <p:nvGrpSpPr>
+        <p:cNvPr id="1" name=""/>
+        <p:cNvGrpSpPr/>
+        <p:nvPr/>
+      </p:nvGrpSpPr>
+      <p:grpSpPr/>
+      <p:sp>
+        <p:nvSpPr>
+          <p:cNvPr id="2" name="Rectangle 1"/>
+          <p:cNvSpPr/>
+          <p:nvPr/>
+        </p:nvSpPr>
+        <p:spPr>
+          <a:xfrm>
+            <a:off x="0" y="0"/>
             <a:ext cx="12191695" cy="914400"/>
           </a:xfrm>
           <a:prstGeom prst="rect">
@@ -14641,7 +14986,7 @@
                   <a:srgbClr val="FFFFFF"/>
                 </a:solidFill>
               </a:rPr>
-              <a:t>Summary</a:t>
+              <a:t>Future Plan</a:t>
             </a:r>
           </a:p>
         </p:txBody>
@@ -14723,7 +15068,736 @@
                   <a:srgbClr val="0B2B52"/>
                 </a:solidFill>
               </a:rPr>
-              <a:t>30</a:t>
+              <a:t>31</a:t>
+            </a:r>
+          </a:p>
+        </p:txBody>
+      </p:sp>
+      <p:sp>
+        <p:nvSpPr>
+          <p:cNvPr id="7" name="Oval 6"/>
+          <p:cNvSpPr/>
+          <p:nvPr/>
+        </p:nvSpPr>
+        <p:spPr>
+          <a:xfrm>
+            <a:off x="548640" y="1325880"/>
+            <a:ext cx="566928" cy="566928"/>
+          </a:xfrm>
+          <a:prstGeom prst="ellipse">
+            <a:avLst/>
+          </a:prstGeom>
+          <a:solidFill>
+            <a:srgbClr val="1E6FB8"/>
+          </a:solidFill>
+          <a:ln>
+            <a:noFill/>
+          </a:ln>
+          <a:effectLst/>
+        </p:spPr>
+        <p:style>
+          <a:lnRef idx="1">
+            <a:schemeClr val="accent1"/>
+          </a:lnRef>
+          <a:fillRef idx="3">
+            <a:schemeClr val="accent1"/>
+          </a:fillRef>
+          <a:effectRef idx="2">
+            <a:schemeClr val="accent1"/>
+          </a:effectRef>
+          <a:fontRef idx="minor">
+            <a:schemeClr val="lt1"/>
+          </a:fontRef>
+        </p:style>
+        <p:txBody>
+          <a:bodyPr rtlCol="0" anchor="ctr" wrap="square"/>
+          <a:lstStyle/>
+          <a:p>
+            <a:pPr algn="ctr">
+              <a:spcBef>
+                <a:spcPts val="0"/>
+              </a:spcBef>
+              <a:spcAft>
+                <a:spcPts val="400"/>
+              </a:spcAft>
+            </a:pPr>
+            <a:r>
+              <a:rPr sz="1800" b="1" i="0">
+                <a:solidFill>
+                  <a:srgbClr val="FFFFFF"/>
+                </a:solidFill>
+              </a:rPr>
+              <a:t>1</a:t>
+            </a:r>
+          </a:p>
+        </p:txBody>
+      </p:sp>
+      <p:sp>
+        <p:nvSpPr>
+          <p:cNvPr id="8" name="TextBox 7"/>
+          <p:cNvSpPr txBox="1"/>
+          <p:nvPr/>
+        </p:nvSpPr>
+        <p:spPr>
+          <a:xfrm>
+            <a:off x="1325880" y="1307592"/>
+            <a:ext cx="10332720" cy="868680"/>
+          </a:xfrm>
+          <a:prstGeom prst="rect">
+            <a:avLst/>
+          </a:prstGeom>
+          <a:noFill/>
+        </p:spPr>
+        <p:txBody>
+          <a:bodyPr wrap="square">
+            <a:spAutoFit/>
+          </a:bodyPr>
+          <a:lstStyle/>
+          <a:p>
+            <a:pPr>
+              <a:spcBef>
+                <a:spcPts val="0"/>
+              </a:spcBef>
+              <a:spcAft>
+                <a:spcPts val="600"/>
+              </a:spcAft>
+            </a:pPr>
+            <a:r>
+              <a:rPr sz="1300" b="0">
+                <a:solidFill>
+                  <a:srgbClr val="0B2B52"/>
+                </a:solidFill>
+              </a:rPr>
+              <a:t>DONE — profiled; and measured what the optimisations actually deliver on pretrained weights (slides 11–18).</a:t>
+            </a:r>
+          </a:p>
+        </p:txBody>
+      </p:sp>
+      <p:sp>
+        <p:nvSpPr>
+          <p:cNvPr id="9" name="Oval 8"/>
+          <p:cNvSpPr/>
+          <p:nvPr/>
+        </p:nvSpPr>
+        <p:spPr>
+          <a:xfrm>
+            <a:off x="548640" y="2304288"/>
+            <a:ext cx="566928" cy="566928"/>
+          </a:xfrm>
+          <a:prstGeom prst="ellipse">
+            <a:avLst/>
+          </a:prstGeom>
+          <a:solidFill>
+            <a:srgbClr val="0E8F9A"/>
+          </a:solidFill>
+          <a:ln>
+            <a:noFill/>
+          </a:ln>
+          <a:effectLst/>
+        </p:spPr>
+        <p:style>
+          <a:lnRef idx="1">
+            <a:schemeClr val="accent1"/>
+          </a:lnRef>
+          <a:fillRef idx="3">
+            <a:schemeClr val="accent1"/>
+          </a:fillRef>
+          <a:effectRef idx="2">
+            <a:schemeClr val="accent1"/>
+          </a:effectRef>
+          <a:fontRef idx="minor">
+            <a:schemeClr val="lt1"/>
+          </a:fontRef>
+        </p:style>
+        <p:txBody>
+          <a:bodyPr rtlCol="0" anchor="ctr" wrap="square"/>
+          <a:lstStyle/>
+          <a:p>
+            <a:pPr algn="ctr">
+              <a:spcBef>
+                <a:spcPts val="0"/>
+              </a:spcBef>
+              <a:spcAft>
+                <a:spcPts val="400"/>
+              </a:spcAft>
+            </a:pPr>
+            <a:r>
+              <a:rPr sz="1800" b="1" i="0">
+                <a:solidFill>
+                  <a:srgbClr val="FFFFFF"/>
+                </a:solidFill>
+              </a:rPr>
+              <a:t>2</a:t>
+            </a:r>
+          </a:p>
+        </p:txBody>
+      </p:sp>
+      <p:sp>
+        <p:nvSpPr>
+          <p:cNvPr id="10" name="TextBox 9"/>
+          <p:cNvSpPr txBox="1"/>
+          <p:nvPr/>
+        </p:nvSpPr>
+        <p:spPr>
+          <a:xfrm>
+            <a:off x="1325880" y="2286000"/>
+            <a:ext cx="10332720" cy="868680"/>
+          </a:xfrm>
+          <a:prstGeom prst="rect">
+            <a:avLst/>
+          </a:prstGeom>
+          <a:noFill/>
+        </p:spPr>
+        <p:txBody>
+          <a:bodyPr wrap="square">
+            <a:spAutoFit/>
+          </a:bodyPr>
+          <a:lstStyle/>
+          <a:p>
+            <a:pPr>
+              <a:spcBef>
+                <a:spcPts val="0"/>
+              </a:spcBef>
+              <a:spcAft>
+                <a:spcPts val="600"/>
+              </a:spcAft>
+            </a:pPr>
+            <a:r>
+              <a:rPr sz="1300" b="0">
+                <a:solidFill>
+                  <a:srgbClr val="0B2B52"/>
+                </a:solidFill>
+              </a:rPr>
+              <a:t>DONE — DeCAF-Boltz, distilled for 10 steps, folds the 132-complex panel in ~20 min locally and returns 96% physically plausible backbones against 14% for a stock model run short (slides 27-28).</a:t>
+            </a:r>
+          </a:p>
+        </p:txBody>
+      </p:sp>
+      <p:sp>
+        <p:nvSpPr>
+          <p:cNvPr id="11" name="Oval 10"/>
+          <p:cNvSpPr/>
+          <p:nvPr/>
+        </p:nvSpPr>
+        <p:spPr>
+          <a:xfrm>
+            <a:off x="548640" y="3282696"/>
+            <a:ext cx="566928" cy="566928"/>
+          </a:xfrm>
+          <a:prstGeom prst="ellipse">
+            <a:avLst/>
+          </a:prstGeom>
+          <a:solidFill>
+            <a:srgbClr val="2E7D32"/>
+          </a:solidFill>
+          <a:ln>
+            <a:noFill/>
+          </a:ln>
+          <a:effectLst/>
+        </p:spPr>
+        <p:style>
+          <a:lnRef idx="1">
+            <a:schemeClr val="accent1"/>
+          </a:lnRef>
+          <a:fillRef idx="3">
+            <a:schemeClr val="accent1"/>
+          </a:fillRef>
+          <a:effectRef idx="2">
+            <a:schemeClr val="accent1"/>
+          </a:effectRef>
+          <a:fontRef idx="minor">
+            <a:schemeClr val="lt1"/>
+          </a:fontRef>
+        </p:style>
+        <p:txBody>
+          <a:bodyPr rtlCol="0" anchor="ctr" wrap="square"/>
+          <a:lstStyle/>
+          <a:p>
+            <a:pPr algn="ctr">
+              <a:spcBef>
+                <a:spcPts val="0"/>
+              </a:spcBef>
+              <a:spcAft>
+                <a:spcPts val="400"/>
+              </a:spcAft>
+            </a:pPr>
+            <a:r>
+              <a:rPr sz="1800" b="1" i="0">
+                <a:solidFill>
+                  <a:srgbClr val="FFFFFF"/>
+                </a:solidFill>
+              </a:rPr>
+              <a:t>3</a:t>
+            </a:r>
+          </a:p>
+        </p:txBody>
+      </p:sp>
+      <p:sp>
+        <p:nvSpPr>
+          <p:cNvPr id="12" name="TextBox 11"/>
+          <p:cNvSpPr txBox="1"/>
+          <p:nvPr/>
+        </p:nvSpPr>
+        <p:spPr>
+          <a:xfrm>
+            <a:off x="1325880" y="3264408"/>
+            <a:ext cx="10332720" cy="868680"/>
+          </a:xfrm>
+          <a:prstGeom prst="rect">
+            <a:avLst/>
+          </a:prstGeom>
+          <a:noFill/>
+        </p:spPr>
+        <p:txBody>
+          <a:bodyPr wrap="square">
+            <a:spAutoFit/>
+          </a:bodyPr>
+          <a:lstStyle/>
+          <a:p>
+            <a:pPr>
+              <a:spcBef>
+                <a:spcPts val="0"/>
+              </a:spcBef>
+              <a:spcAft>
+                <a:spcPts val="600"/>
+              </a:spcAft>
+            </a:pPr>
+            <a:r>
+              <a:rPr sz="1300" b="0">
+                <a:solidFill>
+                  <a:srgbClr val="0B2B52"/>
+                </a:solidFill>
+              </a:rPr>
+              <a:t>DONE, NEGATIVE — the surrogate was distilled and evaluated: ipTM does not rank binders, so no surrogate distilled from it can either.</a:t>
+            </a:r>
+          </a:p>
+        </p:txBody>
+      </p:sp>
+      <p:sp>
+        <p:nvSpPr>
+          <p:cNvPr id="13" name="Oval 12"/>
+          <p:cNvSpPr/>
+          <p:nvPr/>
+        </p:nvSpPr>
+        <p:spPr>
+          <a:xfrm>
+            <a:off x="548640" y="4261104"/>
+            <a:ext cx="566928" cy="566928"/>
+          </a:xfrm>
+          <a:prstGeom prst="ellipse">
+            <a:avLst/>
+          </a:prstGeom>
+          <a:solidFill>
+            <a:srgbClr val="C77700"/>
+          </a:solidFill>
+          <a:ln>
+            <a:noFill/>
+          </a:ln>
+          <a:effectLst/>
+        </p:spPr>
+        <p:style>
+          <a:lnRef idx="1">
+            <a:schemeClr val="accent1"/>
+          </a:lnRef>
+          <a:fillRef idx="3">
+            <a:schemeClr val="accent1"/>
+          </a:fillRef>
+          <a:effectRef idx="2">
+            <a:schemeClr val="accent1"/>
+          </a:effectRef>
+          <a:fontRef idx="minor">
+            <a:schemeClr val="lt1"/>
+          </a:fontRef>
+        </p:style>
+        <p:txBody>
+          <a:bodyPr rtlCol="0" anchor="ctr" wrap="square"/>
+          <a:lstStyle/>
+          <a:p>
+            <a:pPr algn="ctr">
+              <a:spcBef>
+                <a:spcPts val="0"/>
+              </a:spcBef>
+              <a:spcAft>
+                <a:spcPts val="400"/>
+              </a:spcAft>
+            </a:pPr>
+            <a:r>
+              <a:rPr sz="1800" b="1" i="0">
+                <a:solidFill>
+                  <a:srgbClr val="FFFFFF"/>
+                </a:solidFill>
+              </a:rPr>
+              <a:t>4</a:t>
+            </a:r>
+          </a:p>
+        </p:txBody>
+      </p:sp>
+      <p:sp>
+        <p:nvSpPr>
+          <p:cNvPr id="14" name="TextBox 13"/>
+          <p:cNvSpPr txBox="1"/>
+          <p:nvPr/>
+        </p:nvSpPr>
+        <p:spPr>
+          <a:xfrm>
+            <a:off x="1325880" y="4242816"/>
+            <a:ext cx="10332720" cy="868680"/>
+          </a:xfrm>
+          <a:prstGeom prst="rect">
+            <a:avLst/>
+          </a:prstGeom>
+          <a:noFill/>
+        </p:spPr>
+        <p:txBody>
+          <a:bodyPr wrap="square">
+            <a:spAutoFit/>
+          </a:bodyPr>
+          <a:lstStyle/>
+          <a:p>
+            <a:pPr>
+              <a:spcBef>
+                <a:spcPts val="0"/>
+              </a:spcBef>
+              <a:spcAft>
+                <a:spcPts val="600"/>
+              </a:spcAft>
+            </a:pPr>
+            <a:r>
+              <a:rPr sz="1300" b="0">
+                <a:solidFill>
+                  <a:srgbClr val="0B2B52"/>
+                </a:solidFill>
+              </a:rPr>
+              <a:t>Use open Boltz-2 weights only — Boltz-2.1 is closed / API-only.</a:t>
+            </a:r>
+          </a:p>
+        </p:txBody>
+      </p:sp>
+      <p:sp>
+        <p:nvSpPr>
+          <p:cNvPr id="15" name="Oval 14"/>
+          <p:cNvSpPr/>
+          <p:nvPr/>
+        </p:nvSpPr>
+        <p:spPr>
+          <a:xfrm>
+            <a:off x="548640" y="5239512"/>
+            <a:ext cx="566928" cy="566928"/>
+          </a:xfrm>
+          <a:prstGeom prst="ellipse">
+            <a:avLst/>
+          </a:prstGeom>
+          <a:solidFill>
+            <a:srgbClr val="0B2B52"/>
+          </a:solidFill>
+          <a:ln>
+            <a:noFill/>
+          </a:ln>
+          <a:effectLst/>
+        </p:spPr>
+        <p:style>
+          <a:lnRef idx="1">
+            <a:schemeClr val="accent1"/>
+          </a:lnRef>
+          <a:fillRef idx="3">
+            <a:schemeClr val="accent1"/>
+          </a:fillRef>
+          <a:effectRef idx="2">
+            <a:schemeClr val="accent1"/>
+          </a:effectRef>
+          <a:fontRef idx="minor">
+            <a:schemeClr val="lt1"/>
+          </a:fontRef>
+        </p:style>
+        <p:txBody>
+          <a:bodyPr rtlCol="0" anchor="ctr" wrap="square"/>
+          <a:lstStyle/>
+          <a:p>
+            <a:pPr algn="ctr">
+              <a:spcBef>
+                <a:spcPts val="0"/>
+              </a:spcBef>
+              <a:spcAft>
+                <a:spcPts val="400"/>
+              </a:spcAft>
+            </a:pPr>
+            <a:r>
+              <a:rPr sz="1800" b="1" i="0">
+                <a:solidFill>
+                  <a:srgbClr val="FFFFFF"/>
+                </a:solidFill>
+              </a:rPr>
+              <a:t>5</a:t>
+            </a:r>
+          </a:p>
+        </p:txBody>
+      </p:sp>
+      <p:sp>
+        <p:nvSpPr>
+          <p:cNvPr id="16" name="TextBox 15"/>
+          <p:cNvSpPr txBox="1"/>
+          <p:nvPr/>
+        </p:nvSpPr>
+        <p:spPr>
+          <a:xfrm>
+            <a:off x="1325880" y="5221224"/>
+            <a:ext cx="10332720" cy="868680"/>
+          </a:xfrm>
+          <a:prstGeom prst="rect">
+            <a:avLst/>
+          </a:prstGeom>
+          <a:noFill/>
+        </p:spPr>
+        <p:txBody>
+          <a:bodyPr wrap="square">
+            <a:spAutoFit/>
+          </a:bodyPr>
+          <a:lstStyle/>
+          <a:p>
+            <a:pPr>
+              <a:spcBef>
+                <a:spcPts val="0"/>
+              </a:spcBef>
+              <a:spcAft>
+                <a:spcPts val="600"/>
+              </a:spcAft>
+            </a:pPr>
+            <a:r>
+              <a:rPr sz="1300" b="0">
+                <a:solidFill>
+                  <a:srgbClr val="0B2B52"/>
+                </a:solidFill>
+              </a:rPr>
+              <a:t>Production GPU scaling — NO LONGER a prerequisite. MPS (~3x) plus few-step distillation let the held-out panel be folded five times on this laptop, and the third draw overturned what the first two supported. Scaling is now for extending the panel past 22 receptors, which is the binding constraint on the open questions.</a:t>
+            </a:r>
+          </a:p>
+        </p:txBody>
+      </p:sp>
+    </p:spTree>
+  </p:cSld>
+  <p:clrMapOvr>
+    <a:masterClrMapping/>
+  </p:clrMapOvr>
+</p:sld>
+</file>
+
+<file path=ppt/slides/slide32.xml><?xml version="1.0" encoding="utf-8"?>
+<p:sld xmlns:a="http://schemas.openxmlformats.org/drawingml/2006/main" xmlns:p="http://schemas.openxmlformats.org/presentationml/2006/main" xmlns:r="http://schemas.openxmlformats.org/officeDocument/2006/relationships">
+  <p:cSld>
+    <p:spTree>
+      <p:nvGrpSpPr>
+        <p:cNvPr id="1" name=""/>
+        <p:cNvGrpSpPr/>
+        <p:nvPr/>
+      </p:nvGrpSpPr>
+      <p:grpSpPr/>
+      <p:sp>
+        <p:nvSpPr>
+          <p:cNvPr id="2" name="Rectangle 1"/>
+          <p:cNvSpPr/>
+          <p:nvPr/>
+        </p:nvSpPr>
+        <p:spPr>
+          <a:xfrm>
+            <a:off x="0" y="0"/>
+            <a:ext cx="12191695" cy="914400"/>
+          </a:xfrm>
+          <a:prstGeom prst="rect">
+            <a:avLst/>
+          </a:prstGeom>
+          <a:solidFill>
+            <a:srgbClr val="0B2B52"/>
+          </a:solidFill>
+          <a:ln>
+            <a:noFill/>
+          </a:ln>
+          <a:effectLst/>
+        </p:spPr>
+        <p:style>
+          <a:lnRef idx="1">
+            <a:schemeClr val="accent1"/>
+          </a:lnRef>
+          <a:fillRef idx="3">
+            <a:schemeClr val="accent1"/>
+          </a:fillRef>
+          <a:effectRef idx="2">
+            <a:schemeClr val="accent1"/>
+          </a:effectRef>
+          <a:fontRef idx="minor">
+            <a:schemeClr val="lt1"/>
+          </a:fontRef>
+        </p:style>
+        <p:txBody>
+          <a:bodyPr rtlCol="0" anchor="ctr"/>
+          <a:lstStyle/>
+          <a:p>
+            <a:pPr algn="ctr"/>
+          </a:p>
+        </p:txBody>
+      </p:sp>
+      <p:sp>
+        <p:nvSpPr>
+          <p:cNvPr id="3" name="Rectangle 2"/>
+          <p:cNvSpPr/>
+          <p:nvPr/>
+        </p:nvSpPr>
+        <p:spPr>
+          <a:xfrm>
+            <a:off x="0" y="914400"/>
+            <a:ext cx="12191695" cy="54864"/>
+          </a:xfrm>
+          <a:prstGeom prst="rect">
+            <a:avLst/>
+          </a:prstGeom>
+          <a:solidFill>
+            <a:srgbClr val="1E6FB8"/>
+          </a:solidFill>
+          <a:ln>
+            <a:noFill/>
+          </a:ln>
+          <a:effectLst/>
+        </p:spPr>
+        <p:style>
+          <a:lnRef idx="1">
+            <a:schemeClr val="accent1"/>
+          </a:lnRef>
+          <a:fillRef idx="3">
+            <a:schemeClr val="accent1"/>
+          </a:fillRef>
+          <a:effectRef idx="2">
+            <a:schemeClr val="accent1"/>
+          </a:effectRef>
+          <a:fontRef idx="minor">
+            <a:schemeClr val="lt1"/>
+          </a:fontRef>
+        </p:style>
+        <p:txBody>
+          <a:bodyPr rtlCol="0" anchor="ctr"/>
+          <a:lstStyle/>
+          <a:p>
+            <a:pPr algn="ctr"/>
+          </a:p>
+        </p:txBody>
+      </p:sp>
+      <p:sp>
+        <p:nvSpPr>
+          <p:cNvPr id="4" name="TextBox 3"/>
+          <p:cNvSpPr txBox="1"/>
+          <p:nvPr/>
+        </p:nvSpPr>
+        <p:spPr>
+          <a:xfrm>
+            <a:off x="502920" y="109728"/>
+            <a:ext cx="11155680" cy="777240"/>
+          </a:xfrm>
+          <a:prstGeom prst="rect">
+            <a:avLst/>
+          </a:prstGeom>
+          <a:noFill/>
+        </p:spPr>
+        <p:txBody>
+          <a:bodyPr wrap="square">
+            <a:spAutoFit/>
+          </a:bodyPr>
+          <a:lstStyle/>
+          <a:p>
+            <a:pPr>
+              <a:spcBef>
+                <a:spcPts val="0"/>
+              </a:spcBef>
+              <a:spcAft>
+                <a:spcPts val="400"/>
+              </a:spcAft>
+            </a:pPr>
+            <a:r>
+              <a:rPr sz="2600" b="1" i="0">
+                <a:solidFill>
+                  <a:srgbClr val="FFFFFF"/>
+                </a:solidFill>
+              </a:rPr>
+              <a:t>Summary</a:t>
+            </a:r>
+          </a:p>
+        </p:txBody>
+      </p:sp>
+      <p:sp>
+        <p:nvSpPr>
+          <p:cNvPr id="5" name="TextBox 4"/>
+          <p:cNvSpPr txBox="1"/>
+          <p:nvPr/>
+        </p:nvSpPr>
+        <p:spPr>
+          <a:xfrm>
+            <a:off x="502920" y="6473952"/>
+            <a:ext cx="8229600" cy="274320"/>
+          </a:xfrm>
+          <a:prstGeom prst="rect">
+            <a:avLst/>
+          </a:prstGeom>
+          <a:noFill/>
+        </p:spPr>
+        <p:txBody>
+          <a:bodyPr wrap="square">
+            <a:spAutoFit/>
+          </a:bodyPr>
+          <a:lstStyle/>
+          <a:p>
+            <a:pPr>
+              <a:spcBef>
+                <a:spcPts val="0"/>
+              </a:spcBef>
+              <a:spcAft>
+                <a:spcPts val="600"/>
+              </a:spcAft>
+            </a:pPr>
+            <a:r>
+              <a:rPr sz="900" b="0">
+                <a:solidFill>
+                  <a:srgbClr val="555555"/>
+                </a:solidFill>
+              </a:rPr>
+              <a:t>Boltz-Fast · Final Dissertation Report · Akik Jana (2024AB05287)</a:t>
+            </a:r>
+          </a:p>
+        </p:txBody>
+      </p:sp>
+      <p:sp>
+        <p:nvSpPr>
+          <p:cNvPr id="6" name="TextBox 5"/>
+          <p:cNvSpPr txBox="1"/>
+          <p:nvPr/>
+        </p:nvSpPr>
+        <p:spPr>
+          <a:xfrm>
+            <a:off x="11185855" y="6473952"/>
+            <a:ext cx="640080" cy="274320"/>
+          </a:xfrm>
+          <a:prstGeom prst="rect">
+            <a:avLst/>
+          </a:prstGeom>
+          <a:noFill/>
+        </p:spPr>
+        <p:txBody>
+          <a:bodyPr wrap="square">
+            <a:spAutoFit/>
+          </a:bodyPr>
+          <a:lstStyle/>
+          <a:p>
+            <a:pPr algn="r">
+              <a:spcBef>
+                <a:spcPts val="0"/>
+              </a:spcBef>
+              <a:spcAft>
+                <a:spcPts val="600"/>
+              </a:spcAft>
+            </a:pPr>
+            <a:r>
+              <a:rPr sz="1000" b="0">
+                <a:solidFill>
+                  <a:srgbClr val="0B2B52"/>
+                </a:solidFill>
+              </a:rPr>
+              <a:t>32</a:t>
             </a:r>
           </a:p>
         </p:txBody>

--- a/final_dissertation_presentation.pptx
+++ b/final_dissertation_presentation.pptx
@@ -5043,7 +5043,7 @@
             <a:avLst/>
           </a:prstGeom>
           <a:solidFill>
-            <a:srgbClr val="C62828"/>
+            <a:srgbClr val="2E7D32"/>
           </a:solidFill>
           <a:ln>
             <a:noFill/>
@@ -5069,24 +5069,34 @@
           <a:p>
             <a:pPr algn="ctr"/>
             <a:r>
-              <a:rPr sz="2100" b="1">
+              <a:rPr sz="2300" b="1">
                 <a:solidFill>
                   <a:srgbClr val="FFFFFF"/>
                 </a:solidFill>
               </a:rPr>
-              <a:t>0.378</a:t>
+              <a:t>56% → 88%</a:t>
             </a:r>
           </a:p>
           <a:p>
             <a:pPr algn="ctr"/>
             <a:r>
-              <a:rPr sz="1000">
+              <a:rPr sz="1050">
                 <a:solidFill>
                   <a:srgbClr val="FFFFFF"/>
                 </a:solidFill>
               </a:rPr>
-              <a:t>OPM held-out error
-at rank 32 (at capacity)</a:t>
+              <a:t>precision, reciprocal</a:t>
+            </a:r>
+          </a:p>
+          <a:p>
+            <a:pPr algn="ctr"/>
+            <a:r>
+              <a:rPr sz="1050">
+                <a:solidFill>
+                  <a:srgbClr val="FFFFFF"/>
+                </a:solidFill>
+              </a:rPr>
+              <a:t>best match (12 of 12)</a:t>
             </a:r>
           </a:p>
         </p:txBody>
@@ -5132,24 +5142,34 @@
           <a:p>
             <a:pPr algn="ctr"/>
             <a:r>
-              <a:rPr sz="2100" b="1">
+              <a:rPr sz="2300" b="1">
                 <a:solidFill>
                   <a:srgbClr val="FFFFFF"/>
                 </a:solidFill>
               </a:rPr>
-              <a:t>22 / 132</a:t>
+              <a:t>44 / 2</a:t>
             </a:r>
           </a:p>
           <a:p>
             <a:pPr algn="ctr"/>
             <a:r>
-              <a:rPr sz="1000">
+              <a:rPr sz="1050">
                 <a:solidFill>
                   <a:srgbClr val="FFFFFF"/>
                 </a:solidFill>
               </a:rPr>
-              <a:t>receptors / complexes
-PTM-clean panel</a:t>
+              <a:t>receptors / panels</a:t>
+            </a:r>
+          </a:p>
+          <a:p>
+            <a:pPr algn="ctr"/>
+            <a:r>
+              <a:rPr sz="1050">
+                <a:solidFill>
+                  <a:srgbClr val="FFFFFF"/>
+                </a:solidFill>
+              </a:rPr>
+              <a:t>in-training + held-out</a:t>
             </a:r>
           </a:p>
         </p:txBody>
@@ -5308,27 +5328,12 @@
               </a:spcAft>
             </a:pPr>
             <a:r>
-              <a:rPr sz="1400" b="0">
+              <a:rPr sz="1150" b="0">
                 <a:solidFill>
                   <a:srgbClr val="0B2B52"/>
                 </a:solidFill>
               </a:rPr>
-              <a:t>Top row — engineering delivered.  Bottom row — measurement outcomes, which are what redirected the project:</a:t>
-            </a:r>
-          </a:p>
-          <a:p>
-            <a:pPr>
-              <a:spcAft>
-                <a:spcPts val="600"/>
-              </a:spcAft>
-            </a:pPr>
-            <a:r>
-              <a:rPr sz="1400" b="0">
-                <a:solidFill>
-                  <a:srgbClr val="0B2B52"/>
-                </a:solidFill>
-              </a:rPr>
-              <a:t>the low-rank OPM is unreachable on pretrained weights, and ipTM does not rank binders reproducibly on the stock models — but interface pLDDT does (slides 19–20), and a few-step-distilled model does far better (slides 22–23).</a:t>
+              <a:t>Top row — engineering delivered.  Bottom row — measurement outcomes, which are what redirected the project: the low-rank OPM is unreachable on pretrained weights, and no confidence readout survives held-out complexes at more than about half strength (slide 25). What does hold up: a model distilled for the step budget returns physical geometry where a stock model does not (slide 27), and requiring the match in both directions lifts precision from 56% to 88% (slide 29).</a:t>
             </a:r>
           </a:p>
         </p:txBody>

--- a/final_dissertation_presentation.pptx
+++ b/final_dissertation_presentation.pptx
@@ -35,6 +35,8 @@
     <p:sldId id="285" r:id="rId36"/>
     <p:sldId id="286" r:id="rId37"/>
     <p:sldId id="287" r:id="rId38"/>
+    <p:sldId id="288" r:id="rId39"/>
+    <p:sldId id="289" r:id="rId40"/>
     <p:sldId id="267" r:id="rId18"/>
     <p:sldId id="268" r:id="rId19"/>
   </p:sldIdLst>
@@ -5006,24 +5008,34 @@
           <a:p>
             <a:pPr algn="ctr"/>
             <a:r>
-              <a:rPr sz="2100" b="1">
+              <a:rPr sz="2300" b="1">
                 <a:solidFill>
                   <a:srgbClr val="FFFFFF"/>
                 </a:solidFill>
               </a:rPr>
-              <a:t>8.6×</a:t>
+              <a:t>0.943</a:t>
             </a:r>
           </a:p>
           <a:p>
             <a:pPr algn="ctr"/>
             <a:r>
-              <a:rPr sz="1000">
+              <a:rPr sz="1050">
                 <a:solidFill>
                   <a:srgbClr val="FFFFFF"/>
                 </a:solidFill>
               </a:rPr>
-              <a:t>interface pLDDT vs ipTM
-effect-to-noise</a:t>
+              <a:t>AUC at full settings</a:t>
+            </a:r>
+          </a:p>
+          <a:p>
+            <a:pPr algn="ctr"/>
+            <a:r>
+              <a:rPr sz="1050">
+                <a:solidFill>
+                  <a:srgbClr val="FFFFFF"/>
+                </a:solidFill>
+              </a:rPr>
+              <a:t>(0.640 at 10 steps)</a:t>
             </a:r>
           </a:p>
         </p:txBody>
@@ -5278,24 +5290,34 @@
           <a:p>
             <a:pPr algn="ctr"/>
             <a:r>
-              <a:rPr sz="2100" b="1">
+              <a:rPr sz="2300" b="1">
                 <a:solidFill>
                   <a:srgbClr val="FFFFFF"/>
                 </a:solidFill>
               </a:rPr>
-              <a:t>1.73</a:t>
+              <a:t>17 of 22</a:t>
             </a:r>
           </a:p>
           <a:p>
             <a:pPr algn="ctr"/>
             <a:r>
-              <a:rPr sz="1000">
+              <a:rPr sz="1050">
                 <a:solidFill>
                   <a:srgbClr val="FFFFFF"/>
                 </a:solidFill>
               </a:rPr>
-              <a:t>cognate rank on DeCAF
-(chance 2.50, p = 0.004)</a:t>
+              <a:t>true binder ranked first</a:t>
+            </a:r>
+          </a:p>
+          <a:p>
+            <a:pPr algn="ctr"/>
+            <a:r>
+              <a:rPr sz="1050">
+                <a:solidFill>
+                  <a:srgbClr val="FFFFFF"/>
+                </a:solidFill>
+              </a:rPr>
+              <a:t>at the model's own settings</a:t>
             </a:r>
           </a:p>
         </p:txBody>
@@ -5333,7 +5355,7 @@
                   <a:srgbClr val="0B2B52"/>
                 </a:solidFill>
               </a:rPr>
-              <a:t>Top row — engineering delivered.  Bottom row — measurement outcomes, which are what redirected the project: the low-rank OPM is unreachable on pretrained weights, and no confidence readout survives held-out complexes at more than about half strength (slide 25). What does hold up: a model distilled for the step budget returns physical geometry where a stock model does not (slide 27), and requiring the match in both directions lifts precision from 56% to 88% (slide 29).</a:t>
+              <a:t>Top row — engineering delivered.  Bottom row — measurement. The negatives in slides 15–30 were all taken at a tenth of the model's sampling budget: run at its intended settings the same readout ranks the true binder first 17 times in 22, at AUC 0.943 (slides 31–32). The negatives are properties of the regime, not the method.</a:t>
             </a:r>
           </a:p>
         </p:txBody>
@@ -5388,7 +5410,7 @@
                   <a:srgbClr val="8A5200"/>
                 </a:solidFill>
               </a:rPr>
-              <a:t>⚠  Settings throughout are far below Boltz defaults — 10 sampling steps vs 200, 1 recycling vs 3, MSA depth 32 vs 8192. Slide 22 probes this directly: it attenuates the signal but does not wholly explain the negatives.</a:t>
+              <a:t>⚠  Settings throughout are far below Boltz defaults — 10 sampling steps vs 200, 1 recycling vs 3, MSA 32 vs full. Slides 31–32 resolve this and the confound was real: at the intended settings the effect is 3–7× larger and the true binder ranks first 17 times in 22. Everything on slides 15–30 is a lower bound.</a:t>
             </a:r>
           </a:p>
         </p:txBody>
@@ -14876,7 +14898,7 @@
         <p:spPr>
           <a:xfrm>
             <a:off x="0" y="0"/>
-            <a:ext cx="12191695" cy="914400"/>
+            <a:ext cx="12188952" cy="914400"/>
           </a:xfrm>
           <a:prstGeom prst="rect">
             <a:avLst/>
@@ -14887,7 +14909,6 @@
           <a:ln>
             <a:noFill/>
           </a:ln>
-          <a:effectLst/>
         </p:spPr>
         <p:style>
           <a:lnRef idx="1">
@@ -14920,7 +14941,7 @@
         <p:spPr>
           <a:xfrm>
             <a:off x="0" y="914400"/>
-            <a:ext cx="12191695" cy="54864"/>
+            <a:ext cx="12188952" cy="54864"/>
           </a:xfrm>
           <a:prstGeom prst="rect">
             <a:avLst/>
@@ -14931,7 +14952,6 @@
           <a:ln>
             <a:noFill/>
           </a:ln>
-          <a:effectLst/>
         </p:spPr>
         <p:style>
           <a:lnRef idx="1">
@@ -14978,20 +14998,17 @@
           <a:lstStyle/>
           <a:p>
             <a:pPr>
-              <a:spcBef>
-                <a:spcPts val="0"/>
-              </a:spcBef>
-              <a:spcAft>
-                <a:spcPts val="400"/>
-              </a:spcAft>
-            </a:pPr>
-            <a:r>
-              <a:rPr sz="2600" b="1" i="0">
+              <a:spcAft>
+                <a:spcPts val="600"/>
+              </a:spcAft>
+            </a:pPr>
+            <a:r>
+              <a:rPr sz="2600" b="1">
                 <a:solidFill>
                   <a:srgbClr val="FFFFFF"/>
                 </a:solidFill>
               </a:rPr>
-              <a:t>Future Plan</a:t>
+              <a:t>Measured — The Settings Confound Was Real</a:t>
             </a:r>
           </a:p>
         </p:txBody>
@@ -15019,9 +15036,6 @@
           <a:lstStyle/>
           <a:p>
             <a:pPr>
-              <a:spcBef>
-                <a:spcPts val="0"/>
-              </a:spcBef>
               <a:spcAft>
                 <a:spcPts val="600"/>
               </a:spcAft>
@@ -15045,7 +15059,7 @@
         </p:nvSpPr>
         <p:spPr>
           <a:xfrm>
-            <a:off x="11185855" y="6473952"/>
+            <a:off x="11183112" y="6473952"/>
             <a:ext cx="640080" cy="274320"/>
           </a:xfrm>
           <a:prstGeom prst="rect">
@@ -15059,10 +15073,7 @@
           </a:bodyPr>
           <a:lstStyle/>
           <a:p>
-            <a:pPr algn="r">
-              <a:spcBef>
-                <a:spcPts val="0"/>
-              </a:spcBef>
+            <a:pPr>
               <a:spcAft>
                 <a:spcPts val="600"/>
               </a:spcAft>
@@ -15080,25 +15091,438 @@
       </p:sp>
       <p:sp>
         <p:nvSpPr>
-          <p:cNvPr id="7" name="Oval 6"/>
+          <p:cNvPr id="7" name="TextBox 6"/>
+          <p:cNvSpPr txBox="1"/>
+          <p:nvPr/>
+        </p:nvSpPr>
+        <p:spPr>
+          <a:xfrm>
+            <a:off x="548640" y="1143000"/>
+            <a:ext cx="11155680" cy="1005840"/>
+          </a:xfrm>
+          <a:prstGeom prst="rect">
+            <a:avLst/>
+          </a:prstGeom>
+          <a:noFill/>
+        </p:spPr>
+        <p:txBody>
+          <a:bodyPr wrap="square">
+            <a:spAutoFit/>
+          </a:bodyPr>
+          <a:lstStyle/>
+          <a:p>
+            <a:pPr>
+              <a:spcAft>
+                <a:spcPts val="600"/>
+              </a:spcAft>
+            </a:pPr>
+            <a:r>
+              <a:rPr sz="1500" b="0">
+                <a:solidFill>
+                  <a:srgbClr val="0B2B52"/>
+                </a:solidFill>
+              </a:rPr>
+              <a:t>Every result so far: 10 sampling steps of an intended 200, 1 recycling of 3, MSA 32 of full.</a:t>
+            </a:r>
+          </a:p>
+          <a:p>
+            <a:pPr>
+              <a:spcAft>
+                <a:spcPts val="600"/>
+              </a:spcAft>
+            </a:pPr>
+            <a:r>
+              <a:rPr sz="1500" b="0">
+                <a:solidFill>
+                  <a:srgbClr val="0B2B52"/>
+                </a:solidFill>
+              </a:rPr>
+              <a:t>Section 1.5 called this “stated, not resolved”. Same model, same device, settings raised:</a:t>
+            </a:r>
+          </a:p>
+        </p:txBody>
+      </p:sp>
+      <p:graphicFrame>
+        <p:nvGraphicFramePr>
+          <p:cNvPr id="8" name="Table 7"/>
+          <p:cNvGraphicFramePr>
+            <a:graphicFrameLocks noGrp="1"/>
+          </p:cNvGraphicFramePr>
+          <p:nvPr/>
+        </p:nvGraphicFramePr>
+        <p:xfrm>
+          <a:off x="548640" y="1965960"/>
+          <a:ext cx="11155680" cy="1536192"/>
+        </p:xfrm>
+        <a:graphic>
+          <a:graphicData uri="http://schemas.openxmlformats.org/drawingml/2006/table">
+            <a:tbl>
+              <a:tblPr firstRow="1" bandRow="1">
+                <a:tableStyleId>{5C22544A-7EE6-4342-B048-85BDC9FD1C3A}</a:tableStyleId>
+              </a:tblPr>
+              <a:tblGrid>
+                <a:gridCol w="3017520"/>
+                <a:gridCol w="2834640"/>
+                <a:gridCol w="2834640"/>
+                <a:gridCol w="2468880"/>
+              </a:tblGrid>
+              <a:tr h="384048">
+                <a:tc>
+                  <a:txBody>
+                    <a:bodyPr/>
+                    <a:lstStyle/>
+                    <a:p>
+                      <a:r>
+                        <a:rPr sz="1300" b="1">
+                          <a:solidFill>
+                            <a:srgbClr val="0B2B52"/>
+                          </a:solidFill>
+                        </a:rPr>
+                        <a:t>cognate − scramble</a:t>
+                      </a:r>
+                    </a:p>
+                  </a:txBody>
+                  <a:tcPr/>
+                </a:tc>
+                <a:tc>
+                  <a:txBody>
+                    <a:bodyPr/>
+                    <a:lstStyle/>
+                    <a:p>
+                      <a:r>
+                        <a:rPr sz="1300" b="1">
+                          <a:solidFill>
+                            <a:srgbClr val="0B2B52"/>
+                          </a:solidFill>
+                        </a:rPr>
+                        <a:t>reduced (10 steps)</a:t>
+                      </a:r>
+                    </a:p>
+                  </a:txBody>
+                  <a:tcPr/>
+                </a:tc>
+                <a:tc>
+                  <a:txBody>
+                    <a:bodyPr/>
+                    <a:lstStyle/>
+                    <a:p>
+                      <a:r>
+                        <a:rPr sz="1300" b="1">
+                          <a:solidFill>
+                            <a:srgbClr val="0B2B52"/>
+                          </a:solidFill>
+                        </a:rPr>
+                        <a:t>full (200 steps)</a:t>
+                      </a:r>
+                    </a:p>
+                  </a:txBody>
+                  <a:tcPr/>
+                </a:tc>
+                <a:tc>
+                  <a:txBody>
+                    <a:bodyPr/>
+                    <a:lstStyle/>
+                    <a:p>
+                      <a:r>
+                        <a:rPr sz="1300" b="1">
+                          <a:solidFill>
+                            <a:srgbClr val="0B2B52"/>
+                          </a:solidFill>
+                        </a:rPr>
+                        <a:t>Cohen's d</a:t>
+                      </a:r>
+                    </a:p>
+                  </a:txBody>
+                  <a:tcPr/>
+                </a:tc>
+              </a:tr>
+              <a:tr h="384048">
+                <a:tc>
+                  <a:txBody>
+                    <a:bodyPr/>
+                    <a:lstStyle/>
+                    <a:p>
+                      <a:r>
+                        <a:rPr sz="1300" b="1">
+                          <a:solidFill>
+                            <a:srgbClr val="0B2B52"/>
+                          </a:solidFill>
+                        </a:rPr>
+                        <a:t>ipTM</a:t>
+                      </a:r>
+                    </a:p>
+                  </a:txBody>
+                  <a:tcPr/>
+                </a:tc>
+                <a:tc>
+                  <a:txBody>
+                    <a:bodyPr/>
+                    <a:lstStyle/>
+                    <a:p>
+                      <a:r>
+                        <a:rPr sz="1300" b="0">
+                          <a:solidFill>
+                            <a:srgbClr val="0B2B52"/>
+                          </a:solidFill>
+                        </a:rPr>
+                        <a:t>+0.039  (p 0.004)</a:t>
+                      </a:r>
+                    </a:p>
+                  </a:txBody>
+                  <a:tcPr/>
+                </a:tc>
+                <a:tc>
+                  <a:txBody>
+                    <a:bodyPr/>
+                    <a:lstStyle/>
+                    <a:p>
+                      <a:r>
+                        <a:rPr sz="1300" b="0">
+                          <a:solidFill>
+                            <a:srgbClr val="0B2B52"/>
+                          </a:solidFill>
+                        </a:rPr>
+                        <a:t>+0.287  (p &lt; 1e-5)</a:t>
+                      </a:r>
+                    </a:p>
+                  </a:txBody>
+                  <a:tcPr/>
+                </a:tc>
+                <a:tc>
+                  <a:txBody>
+                    <a:bodyPr/>
+                    <a:lstStyle/>
+                    <a:p>
+                      <a:r>
+                        <a:rPr sz="1300" b="0">
+                          <a:solidFill>
+                            <a:srgbClr val="0B2B52"/>
+                          </a:solidFill>
+                        </a:rPr>
+                        <a:t>0.45 → 1.25</a:t>
+                      </a:r>
+                    </a:p>
+                  </a:txBody>
+                  <a:tcPr/>
+                </a:tc>
+              </a:tr>
+              <a:tr h="384048">
+                <a:tc>
+                  <a:txBody>
+                    <a:bodyPr/>
+                    <a:lstStyle/>
+                    <a:p>
+                      <a:r>
+                        <a:rPr sz="1300" b="1">
+                          <a:solidFill>
+                            <a:srgbClr val="0B2B52"/>
+                          </a:solidFill>
+                        </a:rPr>
+                        <a:t>interface pLDDT</a:t>
+                      </a:r>
+                    </a:p>
+                  </a:txBody>
+                  <a:tcPr/>
+                </a:tc>
+                <a:tc>
+                  <a:txBody>
+                    <a:bodyPr/>
+                    <a:lstStyle/>
+                    <a:p>
+                      <a:r>
+                        <a:rPr sz="1300" b="0">
+                          <a:solidFill>
+                            <a:srgbClr val="0B2B52"/>
+                          </a:solidFill>
+                        </a:rPr>
+                        <a:t>+1.54  (p 0.067)</a:t>
+                      </a:r>
+                    </a:p>
+                  </a:txBody>
+                  <a:tcPr/>
+                </a:tc>
+                <a:tc>
+                  <a:txBody>
+                    <a:bodyPr/>
+                    <a:lstStyle/>
+                    <a:p>
+                      <a:r>
+                        <a:rPr sz="1300" b="0">
+                          <a:solidFill>
+                            <a:srgbClr val="0B2B52"/>
+                          </a:solidFill>
+                        </a:rPr>
+                        <a:t>+11.85  (p &lt; 1e-5)</a:t>
+                      </a:r>
+                    </a:p>
+                  </a:txBody>
+                  <a:tcPr/>
+                </a:tc>
+                <a:tc>
+                  <a:txBody>
+                    <a:bodyPr/>
+                    <a:lstStyle/>
+                    <a:p>
+                      <a:r>
+                        <a:rPr sz="1300" b="0">
+                          <a:solidFill>
+                            <a:srgbClr val="0B2B52"/>
+                          </a:solidFill>
+                        </a:rPr>
+                        <a:t>0.28 → 1.52</a:t>
+                      </a:r>
+                    </a:p>
+                  </a:txBody>
+                  <a:tcPr/>
+                </a:tc>
+              </a:tr>
+              <a:tr h="384048">
+                <a:tc>
+                  <a:txBody>
+                    <a:bodyPr/>
+                    <a:lstStyle/>
+                    <a:p>
+                      <a:r>
+                        <a:rPr sz="1300" b="1">
+                          <a:solidFill>
+                            <a:srgbClr val="0B2B52"/>
+                          </a:solidFill>
+                        </a:rPr>
+                        <a:t>receptor side</a:t>
+                      </a:r>
+                    </a:p>
+                  </a:txBody>
+                  <a:tcPr/>
+                </a:tc>
+                <a:tc>
+                  <a:txBody>
+                    <a:bodyPr/>
+                    <a:lstStyle/>
+                    <a:p>
+                      <a:r>
+                        <a:rPr sz="1300" b="0">
+                          <a:solidFill>
+                            <a:srgbClr val="0B2B52"/>
+                          </a:solidFill>
+                        </a:rPr>
+                        <a:t>+0.71  (p 0.428)</a:t>
+                      </a:r>
+                    </a:p>
+                  </a:txBody>
+                  <a:tcPr/>
+                </a:tc>
+                <a:tc>
+                  <a:txBody>
+                    <a:bodyPr/>
+                    <a:lstStyle/>
+                    <a:p>
+                      <a:r>
+                        <a:rPr sz="1300" b="0">
+                          <a:solidFill>
+                            <a:srgbClr val="0B2B52"/>
+                          </a:solidFill>
+                        </a:rPr>
+                        <a:t>+5.13  (p &lt; 1e-5)</a:t>
+                      </a:r>
+                    </a:p>
+                  </a:txBody>
+                  <a:tcPr/>
+                </a:tc>
+                <a:tc>
+                  <a:txBody>
+                    <a:bodyPr/>
+                    <a:lstStyle/>
+                    <a:p>
+                      <a:r>
+                        <a:rPr sz="1300" b="0">
+                          <a:solidFill>
+                            <a:srgbClr val="0B2B52"/>
+                          </a:solidFill>
+                        </a:rPr>
+                        <a:t>0.12 → 1.45</a:t>
+                      </a:r>
+                    </a:p>
+                  </a:txBody>
+                  <a:tcPr/>
+                </a:tc>
+              </a:tr>
+            </a:tbl>
+          </a:graphicData>
+        </a:graphic>
+      </p:graphicFrame>
+      <p:sp>
+        <p:nvSpPr>
+          <p:cNvPr id="9" name="TextBox 8"/>
+          <p:cNvSpPr txBox="1"/>
+          <p:nvPr/>
+        </p:nvSpPr>
+        <p:spPr>
+          <a:xfrm>
+            <a:off x="548640" y="3749039"/>
+            <a:ext cx="11155680" cy="1005840"/>
+          </a:xfrm>
+          <a:prstGeom prst="rect">
+            <a:avLst/>
+          </a:prstGeom>
+          <a:noFill/>
+        </p:spPr>
+        <p:txBody>
+          <a:bodyPr wrap="square">
+            <a:spAutoFit/>
+          </a:bodyPr>
+          <a:lstStyle/>
+          <a:p>
+            <a:pPr>
+              <a:spcAft>
+                <a:spcPts val="600"/>
+              </a:spcAft>
+            </a:pPr>
+            <a:r>
+              <a:rPr sz="1500" b="0">
+                <a:solidFill>
+                  <a:srgbClr val="0B2B52"/>
+                </a:solidFill>
+              </a:rPr>
+              <a:t>Raw effects 7× larger; scale-free 2.7–12×. Larger for 21 of 22 receptors, paired p ≤ 0.001.</a:t>
+            </a:r>
+          </a:p>
+          <a:p>
+            <a:pPr>
+              <a:spcAft>
+                <a:spcPts val="600"/>
+              </a:spcAft>
+            </a:pPr>
+            <a:r>
+              <a:rPr sz="1500" b="0">
+                <a:solidFill>
+                  <a:srgbClr val="0B2B52"/>
+                </a:solidFill>
+              </a:rPr>
+              <a:t>Two readouts change verdict: interface pLDDT 0.067 → &lt;1e-5, receptor side 0.428 → &lt;1e-5.</a:t>
+            </a:r>
+          </a:p>
+        </p:txBody>
+      </p:sp>
+      <p:sp>
+        <p:nvSpPr>
+          <p:cNvPr id="10" name="Rounded Rectangle 9"/>
           <p:cNvSpPr/>
           <p:nvPr/>
         </p:nvSpPr>
         <p:spPr>
           <a:xfrm>
-            <a:off x="548640" y="1325880"/>
-            <a:ext cx="566928" cy="566928"/>
-          </a:xfrm>
-          <a:prstGeom prst="ellipse">
+            <a:off x="548640" y="4617720"/>
+            <a:ext cx="11155680" cy="960120"/>
+          </a:xfrm>
+          <a:prstGeom prst="roundRect">
             <a:avLst/>
           </a:prstGeom>
           <a:solidFill>
-            <a:srgbClr val="1E6FB8"/>
+            <a:srgbClr val="C62828"/>
           </a:solidFill>
           <a:ln>
             <a:noFill/>
           </a:ln>
-          <a:effectLst/>
         </p:spPr>
         <p:style>
           <a:lnRef idx="1">
@@ -15119,86 +15543,41 @@
           <a:lstStyle/>
           <a:p>
             <a:pPr algn="ctr">
-              <a:spcBef>
-                <a:spcPts val="0"/>
-              </a:spcBef>
-              <a:spcAft>
-                <a:spcPts val="400"/>
-              </a:spcAft>
-            </a:pPr>
-            <a:r>
-              <a:rPr sz="1800" b="1" i="0">
+              <a:spcAft>
+                <a:spcPts val="600"/>
+              </a:spcAft>
+            </a:pPr>
+            <a:r>
+              <a:rPr sz="1700" b="1">
                 <a:solidFill>
                   <a:srgbClr val="FFFFFF"/>
                 </a:solidFill>
               </a:rPr>
-              <a:t>1</a:t>
-            </a:r>
-          </a:p>
-        </p:txBody>
-      </p:sp>
-      <p:sp>
-        <p:nvSpPr>
-          <p:cNvPr id="8" name="TextBox 7"/>
-          <p:cNvSpPr txBox="1"/>
-          <p:nvPr/>
-        </p:nvSpPr>
-        <p:spPr>
-          <a:xfrm>
-            <a:off x="1325880" y="1307592"/>
-            <a:ext cx="10332720" cy="868680"/>
-          </a:xfrm>
-          <a:prstGeom prst="rect">
-            <a:avLst/>
-          </a:prstGeom>
-          <a:noFill/>
-        </p:spPr>
-        <p:txBody>
-          <a:bodyPr wrap="square">
-            <a:spAutoFit/>
-          </a:bodyPr>
-          <a:lstStyle/>
-          <a:p>
-            <a:pPr>
-              <a:spcBef>
-                <a:spcPts val="0"/>
-              </a:spcBef>
-              <a:spcAft>
-                <a:spcPts val="600"/>
-              </a:spcAft>
-            </a:pPr>
-            <a:r>
-              <a:rPr sz="1300" b="0">
-                <a:solidFill>
-                  <a:srgbClr val="0B2B52"/>
-                </a:solidFill>
-              </a:rPr>
-              <a:t>DONE — profiled; and measured what the optimisations actually deliver on pretrained weights (slides 11–18).</a:t>
-            </a:r>
-          </a:p>
-        </p:txBody>
-      </p:sp>
-      <p:sp>
-        <p:nvSpPr>
-          <p:cNvPr id="9" name="Oval 8"/>
+              <a:t>A full-settings fold takes 106 s on this laptop. The obstacle was the device, not the settings.</a:t>
+            </a:r>
+          </a:p>
+        </p:txBody>
+      </p:sp>
+      <p:sp>
+        <p:nvSpPr>
+          <p:cNvPr id="11" name="Rounded Rectangle 10"/>
           <p:cNvSpPr/>
           <p:nvPr/>
         </p:nvSpPr>
         <p:spPr>
           <a:xfrm>
-            <a:off x="548640" y="2304288"/>
-            <a:ext cx="566928" cy="566928"/>
-          </a:xfrm>
-          <a:prstGeom prst="ellipse">
+            <a:off x="548640" y="5669280"/>
+            <a:ext cx="11155680" cy="868680"/>
+          </a:xfrm>
+          <a:prstGeom prst="roundRect">
             <a:avLst/>
           </a:prstGeom>
           <a:solidFill>
-            <a:srgbClr val="0E8F9A"/>
+            <a:srgbClr val="FDF3E0"/>
           </a:solidFill>
           <a:ln>
             <a:noFill/>
           </a:ln>
-          <a:effectLst/>
         </p:spPr>
         <p:style>
           <a:lnRef idx="1">
@@ -15219,361 +15598,17 @@
           <a:lstStyle/>
           <a:p>
             <a:pPr algn="ctr">
-              <a:spcBef>
-                <a:spcPts val="0"/>
-              </a:spcBef>
-              <a:spcAft>
-                <a:spcPts val="400"/>
-              </a:spcAft>
-            </a:pPr>
-            <a:r>
-              <a:rPr sz="1800" b="1" i="0">
-                <a:solidFill>
-                  <a:srgbClr val="FFFFFF"/>
-                </a:solidFill>
-              </a:rPr>
-              <a:t>2</a:t>
-            </a:r>
-          </a:p>
-        </p:txBody>
-      </p:sp>
-      <p:sp>
-        <p:nvSpPr>
-          <p:cNvPr id="10" name="TextBox 9"/>
-          <p:cNvSpPr txBox="1"/>
-          <p:nvPr/>
-        </p:nvSpPr>
-        <p:spPr>
-          <a:xfrm>
-            <a:off x="1325880" y="2286000"/>
-            <a:ext cx="10332720" cy="868680"/>
-          </a:xfrm>
-          <a:prstGeom prst="rect">
-            <a:avLst/>
-          </a:prstGeom>
-          <a:noFill/>
-        </p:spPr>
-        <p:txBody>
-          <a:bodyPr wrap="square">
-            <a:spAutoFit/>
-          </a:bodyPr>
-          <a:lstStyle/>
-          <a:p>
-            <a:pPr>
-              <a:spcBef>
-                <a:spcPts val="0"/>
-              </a:spcBef>
-              <a:spcAft>
-                <a:spcPts val="600"/>
-              </a:spcAft>
-            </a:pPr>
-            <a:r>
-              <a:rPr sz="1300" b="0">
-                <a:solidFill>
-                  <a:srgbClr val="0B2B52"/>
-                </a:solidFill>
-              </a:rPr>
-              <a:t>DONE — DeCAF-Boltz, distilled for 10 steps, folds the 132-complex panel in ~20 min locally and returns 96% physically plausible backbones against 14% for a stock model run short (slides 27-28).</a:t>
-            </a:r>
-          </a:p>
-        </p:txBody>
-      </p:sp>
-      <p:sp>
-        <p:nvSpPr>
-          <p:cNvPr id="11" name="Oval 10"/>
-          <p:cNvSpPr/>
-          <p:nvPr/>
-        </p:nvSpPr>
-        <p:spPr>
-          <a:xfrm>
-            <a:off x="548640" y="3282696"/>
-            <a:ext cx="566928" cy="566928"/>
-          </a:xfrm>
-          <a:prstGeom prst="ellipse">
-            <a:avLst/>
-          </a:prstGeom>
-          <a:solidFill>
-            <a:srgbClr val="2E7D32"/>
-          </a:solidFill>
-          <a:ln>
-            <a:noFill/>
-          </a:ln>
-          <a:effectLst/>
-        </p:spPr>
-        <p:style>
-          <a:lnRef idx="1">
-            <a:schemeClr val="accent1"/>
-          </a:lnRef>
-          <a:fillRef idx="3">
-            <a:schemeClr val="accent1"/>
-          </a:fillRef>
-          <a:effectRef idx="2">
-            <a:schemeClr val="accent1"/>
-          </a:effectRef>
-          <a:fontRef idx="minor">
-            <a:schemeClr val="lt1"/>
-          </a:fontRef>
-        </p:style>
-        <p:txBody>
-          <a:bodyPr rtlCol="0" anchor="ctr" wrap="square"/>
-          <a:lstStyle/>
-          <a:p>
-            <a:pPr algn="ctr">
-              <a:spcBef>
-                <a:spcPts val="0"/>
-              </a:spcBef>
-              <a:spcAft>
-                <a:spcPts val="400"/>
-              </a:spcAft>
-            </a:pPr>
-            <a:r>
-              <a:rPr sz="1800" b="1" i="0">
-                <a:solidFill>
-                  <a:srgbClr val="FFFFFF"/>
-                </a:solidFill>
-              </a:rPr>
-              <a:t>3</a:t>
-            </a:r>
-          </a:p>
-        </p:txBody>
-      </p:sp>
-      <p:sp>
-        <p:nvSpPr>
-          <p:cNvPr id="12" name="TextBox 11"/>
-          <p:cNvSpPr txBox="1"/>
-          <p:nvPr/>
-        </p:nvSpPr>
-        <p:spPr>
-          <a:xfrm>
-            <a:off x="1325880" y="3264408"/>
-            <a:ext cx="10332720" cy="868680"/>
-          </a:xfrm>
-          <a:prstGeom prst="rect">
-            <a:avLst/>
-          </a:prstGeom>
-          <a:noFill/>
-        </p:spPr>
-        <p:txBody>
-          <a:bodyPr wrap="square">
-            <a:spAutoFit/>
-          </a:bodyPr>
-          <a:lstStyle/>
-          <a:p>
-            <a:pPr>
-              <a:spcBef>
-                <a:spcPts val="0"/>
-              </a:spcBef>
-              <a:spcAft>
-                <a:spcPts val="600"/>
-              </a:spcAft>
-            </a:pPr>
-            <a:r>
-              <a:rPr sz="1300" b="0">
-                <a:solidFill>
-                  <a:srgbClr val="0B2B52"/>
-                </a:solidFill>
-              </a:rPr>
-              <a:t>DONE, NEGATIVE — the surrogate was distilled and evaluated: ipTM does not rank binders, so no surrogate distilled from it can either.</a:t>
-            </a:r>
-          </a:p>
-        </p:txBody>
-      </p:sp>
-      <p:sp>
-        <p:nvSpPr>
-          <p:cNvPr id="13" name="Oval 12"/>
-          <p:cNvSpPr/>
-          <p:nvPr/>
-        </p:nvSpPr>
-        <p:spPr>
-          <a:xfrm>
-            <a:off x="548640" y="4261104"/>
-            <a:ext cx="566928" cy="566928"/>
-          </a:xfrm>
-          <a:prstGeom prst="ellipse">
-            <a:avLst/>
-          </a:prstGeom>
-          <a:solidFill>
-            <a:srgbClr val="C77700"/>
-          </a:solidFill>
-          <a:ln>
-            <a:noFill/>
-          </a:ln>
-          <a:effectLst/>
-        </p:spPr>
-        <p:style>
-          <a:lnRef idx="1">
-            <a:schemeClr val="accent1"/>
-          </a:lnRef>
-          <a:fillRef idx="3">
-            <a:schemeClr val="accent1"/>
-          </a:fillRef>
-          <a:effectRef idx="2">
-            <a:schemeClr val="accent1"/>
-          </a:effectRef>
-          <a:fontRef idx="minor">
-            <a:schemeClr val="lt1"/>
-          </a:fontRef>
-        </p:style>
-        <p:txBody>
-          <a:bodyPr rtlCol="0" anchor="ctr" wrap="square"/>
-          <a:lstStyle/>
-          <a:p>
-            <a:pPr algn="ctr">
-              <a:spcBef>
-                <a:spcPts val="0"/>
-              </a:spcBef>
-              <a:spcAft>
-                <a:spcPts val="400"/>
-              </a:spcAft>
-            </a:pPr>
-            <a:r>
-              <a:rPr sz="1800" b="1" i="0">
-                <a:solidFill>
-                  <a:srgbClr val="FFFFFF"/>
-                </a:solidFill>
-              </a:rPr>
-              <a:t>4</a:t>
-            </a:r>
-          </a:p>
-        </p:txBody>
-      </p:sp>
-      <p:sp>
-        <p:nvSpPr>
-          <p:cNvPr id="14" name="TextBox 13"/>
-          <p:cNvSpPr txBox="1"/>
-          <p:nvPr/>
-        </p:nvSpPr>
-        <p:spPr>
-          <a:xfrm>
-            <a:off x="1325880" y="4242816"/>
-            <a:ext cx="10332720" cy="868680"/>
-          </a:xfrm>
-          <a:prstGeom prst="rect">
-            <a:avLst/>
-          </a:prstGeom>
-          <a:noFill/>
-        </p:spPr>
-        <p:txBody>
-          <a:bodyPr wrap="square">
-            <a:spAutoFit/>
-          </a:bodyPr>
-          <a:lstStyle/>
-          <a:p>
-            <a:pPr>
-              <a:spcBef>
-                <a:spcPts val="0"/>
-              </a:spcBef>
-              <a:spcAft>
-                <a:spcPts val="600"/>
-              </a:spcAft>
-            </a:pPr>
-            <a:r>
-              <a:rPr sz="1300" b="0">
-                <a:solidFill>
-                  <a:srgbClr val="0B2B52"/>
-                </a:solidFill>
-              </a:rPr>
-              <a:t>Use open Boltz-2 weights only — Boltz-2.1 is closed / API-only.</a:t>
-            </a:r>
-          </a:p>
-        </p:txBody>
-      </p:sp>
-      <p:sp>
-        <p:nvSpPr>
-          <p:cNvPr id="15" name="Oval 14"/>
-          <p:cNvSpPr/>
-          <p:nvPr/>
-        </p:nvSpPr>
-        <p:spPr>
-          <a:xfrm>
-            <a:off x="548640" y="5239512"/>
-            <a:ext cx="566928" cy="566928"/>
-          </a:xfrm>
-          <a:prstGeom prst="ellipse">
-            <a:avLst/>
-          </a:prstGeom>
-          <a:solidFill>
-            <a:srgbClr val="0B2B52"/>
-          </a:solidFill>
-          <a:ln>
-            <a:noFill/>
-          </a:ln>
-          <a:effectLst/>
-        </p:spPr>
-        <p:style>
-          <a:lnRef idx="1">
-            <a:schemeClr val="accent1"/>
-          </a:lnRef>
-          <a:fillRef idx="3">
-            <a:schemeClr val="accent1"/>
-          </a:fillRef>
-          <a:effectRef idx="2">
-            <a:schemeClr val="accent1"/>
-          </a:effectRef>
-          <a:fontRef idx="minor">
-            <a:schemeClr val="lt1"/>
-          </a:fontRef>
-        </p:style>
-        <p:txBody>
-          <a:bodyPr rtlCol="0" anchor="ctr" wrap="square"/>
-          <a:lstStyle/>
-          <a:p>
-            <a:pPr algn="ctr">
-              <a:spcBef>
-                <a:spcPts val="0"/>
-              </a:spcBef>
-              <a:spcAft>
-                <a:spcPts val="400"/>
-              </a:spcAft>
-            </a:pPr>
-            <a:r>
-              <a:rPr sz="1800" b="1" i="0">
-                <a:solidFill>
-                  <a:srgbClr val="FFFFFF"/>
-                </a:solidFill>
-              </a:rPr>
-              <a:t>5</a:t>
-            </a:r>
-          </a:p>
-        </p:txBody>
-      </p:sp>
-      <p:sp>
-        <p:nvSpPr>
-          <p:cNvPr id="16" name="TextBox 15"/>
-          <p:cNvSpPr txBox="1"/>
-          <p:nvPr/>
-        </p:nvSpPr>
-        <p:spPr>
-          <a:xfrm>
-            <a:off x="1325880" y="5221224"/>
-            <a:ext cx="10332720" cy="868680"/>
-          </a:xfrm>
-          <a:prstGeom prst="rect">
-            <a:avLst/>
-          </a:prstGeom>
-          <a:noFill/>
-        </p:spPr>
-        <p:txBody>
-          <a:bodyPr wrap="square">
-            <a:spAutoFit/>
-          </a:bodyPr>
-          <a:lstStyle/>
-          <a:p>
-            <a:pPr>
-              <a:spcBef>
-                <a:spcPts val="0"/>
-              </a:spcBef>
-              <a:spcAft>
-                <a:spcPts val="600"/>
-              </a:spcAft>
-            </a:pPr>
-            <a:r>
-              <a:rPr sz="1300" b="0">
-                <a:solidFill>
-                  <a:srgbClr val="0B2B52"/>
-                </a:solidFill>
-              </a:rPr>
-              <a:t>Production GPU scaling — NO LONGER a prerequisite. MPS (~3x) plus few-step distillation let the held-out panel be folded five times on this laptop, and the third draw overturned what the first two supported. Scaling is now for extending the panel past 22 receptors, which is the binding constraint on the open questions.</a:t>
+              <a:spcAft>
+                <a:spcPts val="600"/>
+              </a:spcAft>
+            </a:pPr>
+            <a:r>
+              <a:rPr sz="1250" b="0">
+                <a:solidFill>
+                  <a:srgbClr val="8A5200"/>
+                </a:solidFill>
+              </a:rPr>
+              <a:t>The CPU-era note in the runner said a full alignment was intractable — a 40-complex run did not finish one batch in an hour. On MPS, full depth is no slower than depth 32. The reduced regime outlived the constraint that justified it, and every effect size in slides 15–30 is a lower bound.</a:t>
             </a:r>
           </a:p>
         </p:txBody>
@@ -15605,6 +15640,933 @@
         <p:spPr>
           <a:xfrm>
             <a:off x="0" y="0"/>
+            <a:ext cx="12188952" cy="914400"/>
+          </a:xfrm>
+          <a:prstGeom prst="rect">
+            <a:avLst/>
+          </a:prstGeom>
+          <a:solidFill>
+            <a:srgbClr val="0B2B52"/>
+          </a:solidFill>
+          <a:ln>
+            <a:noFill/>
+          </a:ln>
+        </p:spPr>
+        <p:style>
+          <a:lnRef idx="1">
+            <a:schemeClr val="accent1"/>
+          </a:lnRef>
+          <a:fillRef idx="3">
+            <a:schemeClr val="accent1"/>
+          </a:fillRef>
+          <a:effectRef idx="2">
+            <a:schemeClr val="accent1"/>
+          </a:effectRef>
+          <a:fontRef idx="minor">
+            <a:schemeClr val="lt1"/>
+          </a:fontRef>
+        </p:style>
+        <p:txBody>
+          <a:bodyPr rtlCol="0" anchor="ctr"/>
+          <a:lstStyle/>
+          <a:p>
+            <a:pPr algn="ctr"/>
+          </a:p>
+        </p:txBody>
+      </p:sp>
+      <p:sp>
+        <p:nvSpPr>
+          <p:cNvPr id="3" name="Rectangle 2"/>
+          <p:cNvSpPr/>
+          <p:nvPr/>
+        </p:nvSpPr>
+        <p:spPr>
+          <a:xfrm>
+            <a:off x="0" y="914400"/>
+            <a:ext cx="12188952" cy="54864"/>
+          </a:xfrm>
+          <a:prstGeom prst="rect">
+            <a:avLst/>
+          </a:prstGeom>
+          <a:solidFill>
+            <a:srgbClr val="1E6FB8"/>
+          </a:solidFill>
+          <a:ln>
+            <a:noFill/>
+          </a:ln>
+        </p:spPr>
+        <p:style>
+          <a:lnRef idx="1">
+            <a:schemeClr val="accent1"/>
+          </a:lnRef>
+          <a:fillRef idx="3">
+            <a:schemeClr val="accent1"/>
+          </a:fillRef>
+          <a:effectRef idx="2">
+            <a:schemeClr val="accent1"/>
+          </a:effectRef>
+          <a:fontRef idx="minor">
+            <a:schemeClr val="lt1"/>
+          </a:fontRef>
+        </p:style>
+        <p:txBody>
+          <a:bodyPr rtlCol="0" anchor="ctr"/>
+          <a:lstStyle/>
+          <a:p>
+            <a:pPr algn="ctr"/>
+          </a:p>
+        </p:txBody>
+      </p:sp>
+      <p:sp>
+        <p:nvSpPr>
+          <p:cNvPr id="4" name="TextBox 3"/>
+          <p:cNvSpPr txBox="1"/>
+          <p:nvPr/>
+        </p:nvSpPr>
+        <p:spPr>
+          <a:xfrm>
+            <a:off x="502920" y="109728"/>
+            <a:ext cx="11155680" cy="777240"/>
+          </a:xfrm>
+          <a:prstGeom prst="rect">
+            <a:avLst/>
+          </a:prstGeom>
+          <a:noFill/>
+        </p:spPr>
+        <p:txBody>
+          <a:bodyPr wrap="square">
+            <a:spAutoFit/>
+          </a:bodyPr>
+          <a:lstStyle/>
+          <a:p>
+            <a:pPr>
+              <a:spcAft>
+                <a:spcPts val="600"/>
+              </a:spcAft>
+            </a:pPr>
+            <a:r>
+              <a:rPr sz="2600" b="1">
+                <a:solidFill>
+                  <a:srgbClr val="FFFFFF"/>
+                </a:solidFill>
+              </a:rPr>
+              <a:t>And the Practical Conclusion Inverts</a:t>
+            </a:r>
+          </a:p>
+        </p:txBody>
+      </p:sp>
+      <p:sp>
+        <p:nvSpPr>
+          <p:cNvPr id="5" name="TextBox 4"/>
+          <p:cNvSpPr txBox="1"/>
+          <p:nvPr/>
+        </p:nvSpPr>
+        <p:spPr>
+          <a:xfrm>
+            <a:off x="502920" y="6473952"/>
+            <a:ext cx="8229600" cy="274320"/>
+          </a:xfrm>
+          <a:prstGeom prst="rect">
+            <a:avLst/>
+          </a:prstGeom>
+          <a:noFill/>
+        </p:spPr>
+        <p:txBody>
+          <a:bodyPr wrap="square">
+            <a:spAutoFit/>
+          </a:bodyPr>
+          <a:lstStyle/>
+          <a:p>
+            <a:pPr>
+              <a:spcAft>
+                <a:spcPts val="600"/>
+              </a:spcAft>
+            </a:pPr>
+            <a:r>
+              <a:rPr sz="900" b="0">
+                <a:solidFill>
+                  <a:srgbClr val="555555"/>
+                </a:solidFill>
+              </a:rPr>
+              <a:t>Boltz-Fast · Final Dissertation Report · Akik Jana (2024AB05287)</a:t>
+            </a:r>
+          </a:p>
+        </p:txBody>
+      </p:sp>
+      <p:sp>
+        <p:nvSpPr>
+          <p:cNvPr id="6" name="TextBox 5"/>
+          <p:cNvSpPr txBox="1"/>
+          <p:nvPr/>
+        </p:nvSpPr>
+        <p:spPr>
+          <a:xfrm>
+            <a:off x="11183112" y="6473952"/>
+            <a:ext cx="640080" cy="274320"/>
+          </a:xfrm>
+          <a:prstGeom prst="rect">
+            <a:avLst/>
+          </a:prstGeom>
+          <a:noFill/>
+        </p:spPr>
+        <p:txBody>
+          <a:bodyPr wrap="square">
+            <a:spAutoFit/>
+          </a:bodyPr>
+          <a:lstStyle/>
+          <a:p>
+            <a:pPr>
+              <a:spcAft>
+                <a:spcPts val="600"/>
+              </a:spcAft>
+            </a:pPr>
+            <a:r>
+              <a:rPr sz="1000" b="0">
+                <a:solidFill>
+                  <a:srgbClr val="0B2B52"/>
+                </a:solidFill>
+              </a:rPr>
+              <a:t>32</a:t>
+            </a:r>
+          </a:p>
+        </p:txBody>
+      </p:sp>
+      <p:sp>
+        <p:nvSpPr>
+          <p:cNvPr id="7" name="TextBox 6"/>
+          <p:cNvSpPr txBox="1"/>
+          <p:nvPr/>
+        </p:nvSpPr>
+        <p:spPr>
+          <a:xfrm>
+            <a:off x="548640" y="1115568"/>
+            <a:ext cx="11155680" cy="640080"/>
+          </a:xfrm>
+          <a:prstGeom prst="rect">
+            <a:avLst/>
+          </a:prstGeom>
+          <a:noFill/>
+        </p:spPr>
+        <p:txBody>
+          <a:bodyPr wrap="square">
+            <a:spAutoFit/>
+          </a:bodyPr>
+          <a:lstStyle/>
+          <a:p>
+            <a:pPr>
+              <a:spcAft>
+                <a:spcPts val="600"/>
+              </a:spcAft>
+            </a:pPr>
+            <a:r>
+              <a:rPr sz="1500" b="0">
+                <a:solidFill>
+                  <a:srgbClr val="0B2B52"/>
+                </a:solidFill>
+              </a:rPr>
+              <a:t>Ranking a cognate against its own decoys — the question a screen actually asks:</a:t>
+            </a:r>
+          </a:p>
+        </p:txBody>
+      </p:sp>
+      <p:graphicFrame>
+        <p:nvGraphicFramePr>
+          <p:cNvPr id="8" name="Table 7"/>
+          <p:cNvGraphicFramePr>
+            <a:graphicFrameLocks noGrp="1"/>
+          </p:cNvGraphicFramePr>
+          <p:nvPr/>
+        </p:nvGraphicFramePr>
+        <p:xfrm>
+          <a:off x="548640" y="1783080"/>
+          <a:ext cx="11155680" cy="1536192"/>
+        </p:xfrm>
+        <a:graphic>
+          <a:graphicData uri="http://schemas.openxmlformats.org/drawingml/2006/table">
+            <a:tbl>
+              <a:tblPr firstRow="1" bandRow="1">
+                <a:tableStyleId>{5C22544A-7EE6-4342-B048-85BDC9FD1C3A}</a:tableStyleId>
+              </a:tblPr>
+              <a:tblGrid>
+                <a:gridCol w="2834640"/>
+                <a:gridCol w="2011680"/>
+                <a:gridCol w="2011680"/>
+                <a:gridCol w="2194560"/>
+                <a:gridCol w="2103120"/>
+              </a:tblGrid>
+              <a:tr h="384048">
+                <a:tc>
+                  <a:txBody>
+                    <a:bodyPr/>
+                    <a:lstStyle/>
+                    <a:p>
+                      <a:r>
+                        <a:rPr sz="1300" b="1">
+                          <a:solidFill>
+                            <a:srgbClr val="0B2B52"/>
+                          </a:solidFill>
+                        </a:rPr>
+                        <a:t> </a:t>
+                      </a:r>
+                    </a:p>
+                  </a:txBody>
+                  <a:tcPr/>
+                </a:tc>
+                <a:tc>
+                  <a:txBody>
+                    <a:bodyPr/>
+                    <a:lstStyle/>
+                    <a:p>
+                      <a:r>
+                        <a:rPr sz="1300" b="1">
+                          <a:solidFill>
+                            <a:srgbClr val="0B2B52"/>
+                          </a:solidFill>
+                        </a:rPr>
+                        <a:t>reduced rank</a:t>
+                      </a:r>
+                    </a:p>
+                  </a:txBody>
+                  <a:tcPr/>
+                </a:tc>
+                <a:tc>
+                  <a:txBody>
+                    <a:bodyPr/>
+                    <a:lstStyle/>
+                    <a:p>
+                      <a:r>
+                        <a:rPr sz="1300" b="1">
+                          <a:solidFill>
+                            <a:srgbClr val="0B2B52"/>
+                          </a:solidFill>
+                        </a:rPr>
+                        <a:t>full rank</a:t>
+                      </a:r>
+                    </a:p>
+                  </a:txBody>
+                  <a:tcPr/>
+                </a:tc>
+                <a:tc>
+                  <a:txBody>
+                    <a:bodyPr/>
+                    <a:lstStyle/>
+                    <a:p>
+                      <a:r>
+                        <a:rPr sz="1300" b="1">
+                          <a:solidFill>
+                            <a:srgbClr val="0B2B52"/>
+                          </a:solidFill>
+                        </a:rPr>
+                        <a:t>first (of 22)</a:t>
+                      </a:r>
+                    </a:p>
+                  </a:txBody>
+                  <a:tcPr/>
+                </a:tc>
+                <a:tc>
+                  <a:txBody>
+                    <a:bodyPr/>
+                    <a:lstStyle/>
+                    <a:p>
+                      <a:r>
+                        <a:rPr sz="1300" b="1">
+                          <a:solidFill>
+                            <a:srgbClr val="0B2B52"/>
+                          </a:solidFill>
+                        </a:rPr>
+                        <a:t>AUC within</a:t>
+                      </a:r>
+                    </a:p>
+                  </a:txBody>
+                  <a:tcPr/>
+                </a:tc>
+              </a:tr>
+              <a:tr h="384048">
+                <a:tc>
+                  <a:txBody>
+                    <a:bodyPr/>
+                    <a:lstStyle/>
+                    <a:p>
+                      <a:r>
+                        <a:rPr sz="1300" b="1">
+                          <a:solidFill>
+                            <a:srgbClr val="0B2B52"/>
+                          </a:solidFill>
+                        </a:rPr>
+                        <a:t>ipTM</a:t>
+                      </a:r>
+                    </a:p>
+                  </a:txBody>
+                  <a:tcPr/>
+                </a:tc>
+                <a:tc>
+                  <a:txBody>
+                    <a:bodyPr/>
+                    <a:lstStyle/>
+                    <a:p>
+                      <a:r>
+                        <a:rPr sz="1300" b="0">
+                          <a:solidFill>
+                            <a:srgbClr val="0B2B52"/>
+                          </a:solidFill>
+                        </a:rPr>
+                        <a:t>1.86</a:t>
+                      </a:r>
+                    </a:p>
+                  </a:txBody>
+                  <a:tcPr/>
+                </a:tc>
+                <a:tc>
+                  <a:txBody>
+                    <a:bodyPr/>
+                    <a:lstStyle/>
+                    <a:p>
+                      <a:r>
+                        <a:rPr sz="1300" b="0">
+                          <a:solidFill>
+                            <a:srgbClr val="0B2B52"/>
+                          </a:solidFill>
+                        </a:rPr>
+                        <a:t>1.41</a:t>
+                      </a:r>
+                    </a:p>
+                  </a:txBody>
+                  <a:tcPr/>
+                </a:tc>
+                <a:tc>
+                  <a:txBody>
+                    <a:bodyPr/>
+                    <a:lstStyle/>
+                    <a:p>
+                      <a:r>
+                        <a:rPr sz="1300" b="0">
+                          <a:solidFill>
+                            <a:srgbClr val="0B2B52"/>
+                          </a:solidFill>
+                        </a:rPr>
+                        <a:t>11 → 15</a:t>
+                      </a:r>
+                    </a:p>
+                  </a:txBody>
+                  <a:tcPr/>
+                </a:tc>
+                <a:tc>
+                  <a:txBody>
+                    <a:bodyPr/>
+                    <a:lstStyle/>
+                    <a:p>
+                      <a:r>
+                        <a:rPr sz="1300" b="0">
+                          <a:solidFill>
+                            <a:srgbClr val="0B2B52"/>
+                          </a:solidFill>
+                        </a:rPr>
+                        <a:t>0.684 → 0.908</a:t>
+                      </a:r>
+                    </a:p>
+                  </a:txBody>
+                  <a:tcPr/>
+                </a:tc>
+              </a:tr>
+              <a:tr h="384048">
+                <a:tc>
+                  <a:txBody>
+                    <a:bodyPr/>
+                    <a:lstStyle/>
+                    <a:p>
+                      <a:r>
+                        <a:rPr sz="1300" b="1">
+                          <a:solidFill>
+                            <a:srgbClr val="0B2B52"/>
+                          </a:solidFill>
+                        </a:rPr>
+                        <a:t>interface pLDDT</a:t>
+                      </a:r>
+                    </a:p>
+                  </a:txBody>
+                  <a:tcPr/>
+                </a:tc>
+                <a:tc>
+                  <a:txBody>
+                    <a:bodyPr/>
+                    <a:lstStyle/>
+                    <a:p>
+                      <a:r>
+                        <a:rPr sz="1300" b="0">
+                          <a:solidFill>
+                            <a:srgbClr val="0B2B52"/>
+                          </a:solidFill>
+                        </a:rPr>
+                        <a:t>1.91</a:t>
+                      </a:r>
+                    </a:p>
+                  </a:txBody>
+                  <a:tcPr/>
+                </a:tc>
+                <a:tc>
+                  <a:txBody>
+                    <a:bodyPr/>
+                    <a:lstStyle/>
+                    <a:p>
+                      <a:r>
+                        <a:rPr sz="1300" b="0">
+                          <a:solidFill>
+                            <a:srgbClr val="0B2B52"/>
+                          </a:solidFill>
+                        </a:rPr>
+                        <a:t>1.27</a:t>
+                      </a:r>
+                    </a:p>
+                  </a:txBody>
+                  <a:tcPr/>
+                </a:tc>
+                <a:tc>
+                  <a:txBody>
+                    <a:bodyPr/>
+                    <a:lstStyle/>
+                    <a:p>
+                      <a:r>
+                        <a:rPr sz="1300" b="0">
+                          <a:solidFill>
+                            <a:srgbClr val="0B2B52"/>
+                          </a:solidFill>
+                        </a:rPr>
+                        <a:t>9 → 17</a:t>
+                      </a:r>
+                    </a:p>
+                  </a:txBody>
+                  <a:tcPr/>
+                </a:tc>
+                <a:tc>
+                  <a:txBody>
+                    <a:bodyPr/>
+                    <a:lstStyle/>
+                    <a:p>
+                      <a:r>
+                        <a:rPr sz="1300" b="0">
+                          <a:solidFill>
+                            <a:srgbClr val="0B2B52"/>
+                          </a:solidFill>
+                        </a:rPr>
+                        <a:t>0.640 → 0.943</a:t>
+                      </a:r>
+                    </a:p>
+                  </a:txBody>
+                  <a:tcPr/>
+                </a:tc>
+              </a:tr>
+              <a:tr h="384048">
+                <a:tc>
+                  <a:txBody>
+                    <a:bodyPr/>
+                    <a:lstStyle/>
+                    <a:p>
+                      <a:r>
+                        <a:rPr sz="1300" b="1">
+                          <a:solidFill>
+                            <a:srgbClr val="0B2B52"/>
+                          </a:solidFill>
+                        </a:rPr>
+                        <a:t>receptor side</a:t>
+                      </a:r>
+                    </a:p>
+                  </a:txBody>
+                  <a:tcPr/>
+                </a:tc>
+                <a:tc>
+                  <a:txBody>
+                    <a:bodyPr/>
+                    <a:lstStyle/>
+                    <a:p>
+                      <a:r>
+                        <a:rPr sz="1300" b="0">
+                          <a:solidFill>
+                            <a:srgbClr val="0B2B52"/>
+                          </a:solidFill>
+                        </a:rPr>
+                        <a:t>2.05</a:t>
+                      </a:r>
+                    </a:p>
+                  </a:txBody>
+                  <a:tcPr/>
+                </a:tc>
+                <a:tc>
+                  <a:txBody>
+                    <a:bodyPr/>
+                    <a:lstStyle/>
+                    <a:p>
+                      <a:r>
+                        <a:rPr sz="1300" b="0">
+                          <a:solidFill>
+                            <a:srgbClr val="0B2B52"/>
+                          </a:solidFill>
+                        </a:rPr>
+                        <a:t>1.27</a:t>
+                      </a:r>
+                    </a:p>
+                  </a:txBody>
+                  <a:tcPr/>
+                </a:tc>
+                <a:tc>
+                  <a:txBody>
+                    <a:bodyPr/>
+                    <a:lstStyle/>
+                    <a:p>
+                      <a:r>
+                        <a:rPr sz="1300" b="0">
+                          <a:solidFill>
+                            <a:srgbClr val="0B2B52"/>
+                          </a:solidFill>
+                        </a:rPr>
+                        <a:t>8 → 17</a:t>
+                      </a:r>
+                    </a:p>
+                  </a:txBody>
+                  <a:tcPr/>
+                </a:tc>
+                <a:tc>
+                  <a:txBody>
+                    <a:bodyPr/>
+                    <a:lstStyle/>
+                    <a:p>
+                      <a:r>
+                        <a:rPr sz="1300" b="0">
+                          <a:solidFill>
+                            <a:srgbClr val="0B2B52"/>
+                          </a:solidFill>
+                        </a:rPr>
+                        <a:t>0.600 → 0.943</a:t>
+                      </a:r>
+                    </a:p>
+                  </a:txBody>
+                  <a:tcPr/>
+                </a:tc>
+              </a:tr>
+            </a:tbl>
+          </a:graphicData>
+        </a:graphic>
+      </p:graphicFrame>
+      <p:sp>
+        <p:nvSpPr>
+          <p:cNvPr id="9" name="Rounded Rectangle 8"/>
+          <p:cNvSpPr/>
+          <p:nvPr/>
+        </p:nvSpPr>
+        <p:spPr>
+          <a:xfrm>
+            <a:off x="548640" y="3611880"/>
+            <a:ext cx="3520440" cy="1463040"/>
+          </a:xfrm>
+          <a:prstGeom prst="roundRect">
+            <a:avLst/>
+          </a:prstGeom>
+          <a:solidFill>
+            <a:srgbClr val="2E7D32"/>
+          </a:solidFill>
+          <a:ln>
+            <a:noFill/>
+          </a:ln>
+        </p:spPr>
+        <p:style>
+          <a:lnRef idx="1">
+            <a:schemeClr val="accent1"/>
+          </a:lnRef>
+          <a:fillRef idx="3">
+            <a:schemeClr val="accent1"/>
+          </a:fillRef>
+          <a:effectRef idx="2">
+            <a:schemeClr val="accent1"/>
+          </a:effectRef>
+          <a:fontRef idx="minor">
+            <a:schemeClr val="lt1"/>
+          </a:fontRef>
+        </p:style>
+        <p:txBody>
+          <a:bodyPr rtlCol="0" anchor="ctr" wrap="square"/>
+          <a:lstStyle/>
+          <a:p>
+            <a:pPr algn="ctr"/>
+            <a:r>
+              <a:rPr sz="2300" b="1">
+                <a:solidFill>
+                  <a:srgbClr val="FFFFFF"/>
+                </a:solidFill>
+              </a:rPr>
+              <a:t>17 of 22</a:t>
+            </a:r>
+          </a:p>
+          <a:p>
+            <a:pPr algn="ctr"/>
+            <a:r>
+              <a:rPr sz="1050">
+                <a:solidFill>
+                  <a:srgbClr val="FFFFFF"/>
+                </a:solidFill>
+              </a:rPr>
+              <a:t>true binder ranked FIRST (chance 2.50)</a:t>
+            </a:r>
+          </a:p>
+        </p:txBody>
+      </p:sp>
+      <p:sp>
+        <p:nvSpPr>
+          <p:cNvPr id="10" name="Rounded Rectangle 9"/>
+          <p:cNvSpPr/>
+          <p:nvPr/>
+        </p:nvSpPr>
+        <p:spPr>
+          <a:xfrm>
+            <a:off x="4343400" y="3611880"/>
+            <a:ext cx="3520440" cy="1463040"/>
+          </a:xfrm>
+          <a:prstGeom prst="roundRect">
+            <a:avLst/>
+          </a:prstGeom>
+          <a:solidFill>
+            <a:srgbClr val="2E7D32"/>
+          </a:solidFill>
+          <a:ln>
+            <a:noFill/>
+          </a:ln>
+        </p:spPr>
+        <p:style>
+          <a:lnRef idx="1">
+            <a:schemeClr val="accent1"/>
+          </a:lnRef>
+          <a:fillRef idx="3">
+            <a:schemeClr val="accent1"/>
+          </a:fillRef>
+          <a:effectRef idx="2">
+            <a:schemeClr val="accent1"/>
+          </a:effectRef>
+          <a:fontRef idx="minor">
+            <a:schemeClr val="lt1"/>
+          </a:fontRef>
+        </p:style>
+        <p:txBody>
+          <a:bodyPr rtlCol="0" anchor="ctr" wrap="square"/>
+          <a:lstStyle/>
+          <a:p>
+            <a:pPr algn="ctr"/>
+            <a:r>
+              <a:rPr sz="2300" b="1">
+                <a:solidFill>
+                  <a:srgbClr val="FFFFFF"/>
+                </a:solidFill>
+              </a:rPr>
+              <a:t>0.943</a:t>
+            </a:r>
+          </a:p>
+          <a:p>
+            <a:pPr algn="ctr"/>
+            <a:r>
+              <a:rPr sz="1050">
+                <a:solidFill>
+                  <a:srgbClr val="FFFFFF"/>
+                </a:solidFill>
+              </a:rPr>
+              <a:t>within-receptor AUC (was 0.640)</a:t>
+            </a:r>
+          </a:p>
+        </p:txBody>
+      </p:sp>
+      <p:sp>
+        <p:nvSpPr>
+          <p:cNvPr id="11" name="Rounded Rectangle 10"/>
+          <p:cNvSpPr/>
+          <p:nvPr/>
+        </p:nvSpPr>
+        <p:spPr>
+          <a:xfrm>
+            <a:off x="8138160" y="3611880"/>
+            <a:ext cx="3566160" cy="1463040"/>
+          </a:xfrm>
+          <a:prstGeom prst="roundRect">
+            <a:avLst/>
+          </a:prstGeom>
+          <a:solidFill>
+            <a:srgbClr val="0E8F9A"/>
+          </a:solidFill>
+          <a:ln>
+            <a:noFill/>
+          </a:ln>
+        </p:spPr>
+        <p:style>
+          <a:lnRef idx="1">
+            <a:schemeClr val="accent1"/>
+          </a:lnRef>
+          <a:fillRef idx="3">
+            <a:schemeClr val="accent1"/>
+          </a:fillRef>
+          <a:effectRef idx="2">
+            <a:schemeClr val="accent1"/>
+          </a:effectRef>
+          <a:fontRef idx="minor">
+            <a:schemeClr val="lt1"/>
+          </a:fontRef>
+        </p:style>
+        <p:txBody>
+          <a:bodyPr rtlCol="0" anchor="ctr" wrap="square"/>
+          <a:lstStyle/>
+          <a:p>
+            <a:pPr algn="ctr"/>
+            <a:r>
+              <a:rPr sz="2300" b="1">
+                <a:solidFill>
+                  <a:srgbClr val="FFFFFF"/>
+                </a:solidFill>
+              </a:rPr>
+              <a:t>77%</a:t>
+            </a:r>
+          </a:p>
+          <a:p>
+            <a:pPr algn="ctr"/>
+            <a:r>
+              <a:rPr sz="1050">
+                <a:solidFill>
+                  <a:srgbClr val="FFFFFF"/>
+                </a:solidFill>
+              </a:rPr>
+              <a:t>top-1 accuracy at full settings</a:t>
+            </a:r>
+          </a:p>
+        </p:txBody>
+      </p:sp>
+      <p:sp>
+        <p:nvSpPr>
+          <p:cNvPr id="12" name="Rounded Rectangle 11"/>
+          <p:cNvSpPr/>
+          <p:nvPr/>
+        </p:nvSpPr>
+        <p:spPr>
+          <a:xfrm>
+            <a:off x="548640" y="5074920"/>
+            <a:ext cx="11155680" cy="1188720"/>
+          </a:xfrm>
+          <a:prstGeom prst="roundRect">
+            <a:avLst/>
+          </a:prstGeom>
+          <a:solidFill>
+            <a:srgbClr val="0B2B52"/>
+          </a:solidFill>
+          <a:ln>
+            <a:noFill/>
+          </a:ln>
+        </p:spPr>
+        <p:style>
+          <a:lnRef idx="1">
+            <a:schemeClr val="accent1"/>
+          </a:lnRef>
+          <a:fillRef idx="3">
+            <a:schemeClr val="accent1"/>
+          </a:fillRef>
+          <a:effectRef idx="2">
+            <a:schemeClr val="accent1"/>
+          </a:effectRef>
+          <a:fontRef idx="minor">
+            <a:schemeClr val="lt1"/>
+          </a:fontRef>
+        </p:style>
+        <p:txBody>
+          <a:bodyPr rtlCol="0" anchor="ctr" wrap="square"/>
+          <a:lstStyle/>
+          <a:p>
+            <a:pPr algn="ctr">
+              <a:spcAft>
+                <a:spcPts val="600"/>
+              </a:spcAft>
+            </a:pPr>
+            <a:r>
+              <a:rPr sz="1400" b="1">
+                <a:solidFill>
+                  <a:srgbClr val="FFFFFF"/>
+                </a:solidFill>
+              </a:rPr>
+              <a:t>The negative results are properties of the regime, not of the method.</a:t>
+            </a:r>
+          </a:p>
+          <a:p>
+            <a:pPr>
+              <a:spcAft>
+                <a:spcPts val="600"/>
+              </a:spcAft>
+            </a:pPr>
+            <a:r>
+              <a:rPr sz="1400" b="1">
+                <a:solidFill>
+                  <a:srgbClr val="FFFFFF"/>
+                </a:solidFill>
+              </a:rPr>
+              <a:t>Best elsewhere in this work: DeCAF at 10 steps, AUC 0.807. This also exceeds the 0.90 a nanobody benchmark reaches with ensembling plus physics rescoring.</a:t>
+            </a:r>
+          </a:p>
+        </p:txBody>
+      </p:sp>
+      <p:sp>
+        <p:nvSpPr>
+          <p:cNvPr id="13" name="TextBox 12"/>
+          <p:cNvSpPr txBox="1"/>
+          <p:nvPr/>
+        </p:nvSpPr>
+        <p:spPr>
+          <a:xfrm>
+            <a:off x="548640" y="6291072"/>
+            <a:ext cx="11155680" cy="274320"/>
+          </a:xfrm>
+          <a:prstGeom prst="rect">
+            <a:avLst/>
+          </a:prstGeom>
+          <a:noFill/>
+        </p:spPr>
+        <p:txBody>
+          <a:bodyPr wrap="square">
+            <a:spAutoFit/>
+          </a:bodyPr>
+          <a:lstStyle/>
+          <a:p>
+            <a:pPr>
+              <a:spcAft>
+                <a:spcPts val="600"/>
+              </a:spcAft>
+            </a:pPr>
+            <a:r>
+              <a:rPr sz="1100" b="0">
+                <a:solidFill>
+                  <a:srgbClr val="8A5200"/>
+                </a:solidFill>
+              </a:rPr>
+              <a:t>Caveat: one model, 22 receptors, a single draw.</a:t>
+            </a:r>
+          </a:p>
+        </p:txBody>
+      </p:sp>
+    </p:spTree>
+  </p:cSld>
+  <p:clrMapOvr>
+    <a:masterClrMapping/>
+  </p:clrMapOvr>
+</p:sld>
+</file>
+
+<file path=ppt/slides/slide33.xml><?xml version="1.0" encoding="utf-8"?>
+<p:sld xmlns:a="http://schemas.openxmlformats.org/drawingml/2006/main" xmlns:p="http://schemas.openxmlformats.org/presentationml/2006/main" xmlns:r="http://schemas.openxmlformats.org/officeDocument/2006/relationships">
+  <p:cSld>
+    <p:spTree>
+      <p:nvGrpSpPr>
+        <p:cNvPr id="1" name=""/>
+        <p:cNvGrpSpPr/>
+        <p:nvPr/>
+      </p:nvGrpSpPr>
+      <p:grpSpPr/>
+      <p:sp>
+        <p:nvSpPr>
+          <p:cNvPr id="2" name="Rectangle 1"/>
+          <p:cNvSpPr/>
+          <p:nvPr/>
+        </p:nvSpPr>
+        <p:spPr>
+          <a:xfrm>
+            <a:off x="0" y="0"/>
             <a:ext cx="12191695" cy="914400"/>
           </a:xfrm>
           <a:prstGeom prst="rect">
@@ -15720,7 +16682,7 @@
                   <a:srgbClr val="FFFFFF"/>
                 </a:solidFill>
               </a:rPr>
-              <a:t>Summary</a:t>
+              <a:t>Future Plan</a:t>
             </a:r>
           </a:p>
         </p:txBody>
@@ -15802,7 +16764,736 @@
                   <a:srgbClr val="0B2B52"/>
                 </a:solidFill>
               </a:rPr>
-              <a:t>32</a:t>
+              <a:t>33</a:t>
+            </a:r>
+          </a:p>
+        </p:txBody>
+      </p:sp>
+      <p:sp>
+        <p:nvSpPr>
+          <p:cNvPr id="7" name="Oval 6"/>
+          <p:cNvSpPr/>
+          <p:nvPr/>
+        </p:nvSpPr>
+        <p:spPr>
+          <a:xfrm>
+            <a:off x="548640" y="1325880"/>
+            <a:ext cx="566928" cy="566928"/>
+          </a:xfrm>
+          <a:prstGeom prst="ellipse">
+            <a:avLst/>
+          </a:prstGeom>
+          <a:solidFill>
+            <a:srgbClr val="1E6FB8"/>
+          </a:solidFill>
+          <a:ln>
+            <a:noFill/>
+          </a:ln>
+          <a:effectLst/>
+        </p:spPr>
+        <p:style>
+          <a:lnRef idx="1">
+            <a:schemeClr val="accent1"/>
+          </a:lnRef>
+          <a:fillRef idx="3">
+            <a:schemeClr val="accent1"/>
+          </a:fillRef>
+          <a:effectRef idx="2">
+            <a:schemeClr val="accent1"/>
+          </a:effectRef>
+          <a:fontRef idx="minor">
+            <a:schemeClr val="lt1"/>
+          </a:fontRef>
+        </p:style>
+        <p:txBody>
+          <a:bodyPr rtlCol="0" anchor="ctr" wrap="square"/>
+          <a:lstStyle/>
+          <a:p>
+            <a:pPr algn="ctr">
+              <a:spcBef>
+                <a:spcPts val="0"/>
+              </a:spcBef>
+              <a:spcAft>
+                <a:spcPts val="400"/>
+              </a:spcAft>
+            </a:pPr>
+            <a:r>
+              <a:rPr sz="1800" b="1" i="0">
+                <a:solidFill>
+                  <a:srgbClr val="FFFFFF"/>
+                </a:solidFill>
+              </a:rPr>
+              <a:t>1</a:t>
+            </a:r>
+          </a:p>
+        </p:txBody>
+      </p:sp>
+      <p:sp>
+        <p:nvSpPr>
+          <p:cNvPr id="8" name="TextBox 7"/>
+          <p:cNvSpPr txBox="1"/>
+          <p:nvPr/>
+        </p:nvSpPr>
+        <p:spPr>
+          <a:xfrm>
+            <a:off x="1325880" y="1307592"/>
+            <a:ext cx="10332720" cy="868680"/>
+          </a:xfrm>
+          <a:prstGeom prst="rect">
+            <a:avLst/>
+          </a:prstGeom>
+          <a:noFill/>
+        </p:spPr>
+        <p:txBody>
+          <a:bodyPr wrap="square">
+            <a:spAutoFit/>
+          </a:bodyPr>
+          <a:lstStyle/>
+          <a:p>
+            <a:pPr>
+              <a:spcBef>
+                <a:spcPts val="0"/>
+              </a:spcBef>
+              <a:spcAft>
+                <a:spcPts val="600"/>
+              </a:spcAft>
+            </a:pPr>
+            <a:r>
+              <a:rPr sz="1300" b="0">
+                <a:solidFill>
+                  <a:srgbClr val="0B2B52"/>
+                </a:solidFill>
+              </a:rPr>
+              <a:t>DONE — profiled; and measured what the optimisations actually deliver on pretrained weights (slides 11–18).</a:t>
+            </a:r>
+          </a:p>
+        </p:txBody>
+      </p:sp>
+      <p:sp>
+        <p:nvSpPr>
+          <p:cNvPr id="9" name="Oval 8"/>
+          <p:cNvSpPr/>
+          <p:nvPr/>
+        </p:nvSpPr>
+        <p:spPr>
+          <a:xfrm>
+            <a:off x="548640" y="2304288"/>
+            <a:ext cx="566928" cy="566928"/>
+          </a:xfrm>
+          <a:prstGeom prst="ellipse">
+            <a:avLst/>
+          </a:prstGeom>
+          <a:solidFill>
+            <a:srgbClr val="0E8F9A"/>
+          </a:solidFill>
+          <a:ln>
+            <a:noFill/>
+          </a:ln>
+          <a:effectLst/>
+        </p:spPr>
+        <p:style>
+          <a:lnRef idx="1">
+            <a:schemeClr val="accent1"/>
+          </a:lnRef>
+          <a:fillRef idx="3">
+            <a:schemeClr val="accent1"/>
+          </a:fillRef>
+          <a:effectRef idx="2">
+            <a:schemeClr val="accent1"/>
+          </a:effectRef>
+          <a:fontRef idx="minor">
+            <a:schemeClr val="lt1"/>
+          </a:fontRef>
+        </p:style>
+        <p:txBody>
+          <a:bodyPr rtlCol="0" anchor="ctr" wrap="square"/>
+          <a:lstStyle/>
+          <a:p>
+            <a:pPr algn="ctr">
+              <a:spcBef>
+                <a:spcPts val="0"/>
+              </a:spcBef>
+              <a:spcAft>
+                <a:spcPts val="400"/>
+              </a:spcAft>
+            </a:pPr>
+            <a:r>
+              <a:rPr sz="1800" b="1" i="0">
+                <a:solidFill>
+                  <a:srgbClr val="FFFFFF"/>
+                </a:solidFill>
+              </a:rPr>
+              <a:t>2</a:t>
+            </a:r>
+          </a:p>
+        </p:txBody>
+      </p:sp>
+      <p:sp>
+        <p:nvSpPr>
+          <p:cNvPr id="10" name="TextBox 9"/>
+          <p:cNvSpPr txBox="1"/>
+          <p:nvPr/>
+        </p:nvSpPr>
+        <p:spPr>
+          <a:xfrm>
+            <a:off x="1325880" y="2286000"/>
+            <a:ext cx="10332720" cy="868680"/>
+          </a:xfrm>
+          <a:prstGeom prst="rect">
+            <a:avLst/>
+          </a:prstGeom>
+          <a:noFill/>
+        </p:spPr>
+        <p:txBody>
+          <a:bodyPr wrap="square">
+            <a:spAutoFit/>
+          </a:bodyPr>
+          <a:lstStyle/>
+          <a:p>
+            <a:pPr>
+              <a:spcBef>
+                <a:spcPts val="0"/>
+              </a:spcBef>
+              <a:spcAft>
+                <a:spcPts val="600"/>
+              </a:spcAft>
+            </a:pPr>
+            <a:r>
+              <a:rPr sz="1300" b="0">
+                <a:solidFill>
+                  <a:srgbClr val="0B2B52"/>
+                </a:solidFill>
+              </a:rPr>
+              <a:t>DONE — DeCAF-Boltz, distilled for 10 steps, folds the 132-complex panel in ~20 min locally and returns 96% physically plausible backbones against 14% for a stock model run short (slides 27-28).</a:t>
+            </a:r>
+          </a:p>
+        </p:txBody>
+      </p:sp>
+      <p:sp>
+        <p:nvSpPr>
+          <p:cNvPr id="11" name="Oval 10"/>
+          <p:cNvSpPr/>
+          <p:nvPr/>
+        </p:nvSpPr>
+        <p:spPr>
+          <a:xfrm>
+            <a:off x="548640" y="3282696"/>
+            <a:ext cx="566928" cy="566928"/>
+          </a:xfrm>
+          <a:prstGeom prst="ellipse">
+            <a:avLst/>
+          </a:prstGeom>
+          <a:solidFill>
+            <a:srgbClr val="2E7D32"/>
+          </a:solidFill>
+          <a:ln>
+            <a:noFill/>
+          </a:ln>
+          <a:effectLst/>
+        </p:spPr>
+        <p:style>
+          <a:lnRef idx="1">
+            <a:schemeClr val="accent1"/>
+          </a:lnRef>
+          <a:fillRef idx="3">
+            <a:schemeClr val="accent1"/>
+          </a:fillRef>
+          <a:effectRef idx="2">
+            <a:schemeClr val="accent1"/>
+          </a:effectRef>
+          <a:fontRef idx="minor">
+            <a:schemeClr val="lt1"/>
+          </a:fontRef>
+        </p:style>
+        <p:txBody>
+          <a:bodyPr rtlCol="0" anchor="ctr" wrap="square"/>
+          <a:lstStyle/>
+          <a:p>
+            <a:pPr algn="ctr">
+              <a:spcBef>
+                <a:spcPts val="0"/>
+              </a:spcBef>
+              <a:spcAft>
+                <a:spcPts val="400"/>
+              </a:spcAft>
+            </a:pPr>
+            <a:r>
+              <a:rPr sz="1800" b="1" i="0">
+                <a:solidFill>
+                  <a:srgbClr val="FFFFFF"/>
+                </a:solidFill>
+              </a:rPr>
+              <a:t>3</a:t>
+            </a:r>
+          </a:p>
+        </p:txBody>
+      </p:sp>
+      <p:sp>
+        <p:nvSpPr>
+          <p:cNvPr id="12" name="TextBox 11"/>
+          <p:cNvSpPr txBox="1"/>
+          <p:nvPr/>
+        </p:nvSpPr>
+        <p:spPr>
+          <a:xfrm>
+            <a:off x="1325880" y="3264408"/>
+            <a:ext cx="10332720" cy="868680"/>
+          </a:xfrm>
+          <a:prstGeom prst="rect">
+            <a:avLst/>
+          </a:prstGeom>
+          <a:noFill/>
+        </p:spPr>
+        <p:txBody>
+          <a:bodyPr wrap="square">
+            <a:spAutoFit/>
+          </a:bodyPr>
+          <a:lstStyle/>
+          <a:p>
+            <a:pPr>
+              <a:spcBef>
+                <a:spcPts val="0"/>
+              </a:spcBef>
+              <a:spcAft>
+                <a:spcPts val="600"/>
+              </a:spcAft>
+            </a:pPr>
+            <a:r>
+              <a:rPr sz="1300" b="0">
+                <a:solidFill>
+                  <a:srgbClr val="0B2B52"/>
+                </a:solidFill>
+              </a:rPr>
+              <a:t>DONE, NEGATIVE — the surrogate was distilled and evaluated: ipTM does not rank binders, so no surrogate distilled from it can either.</a:t>
+            </a:r>
+          </a:p>
+        </p:txBody>
+      </p:sp>
+      <p:sp>
+        <p:nvSpPr>
+          <p:cNvPr id="13" name="Oval 12"/>
+          <p:cNvSpPr/>
+          <p:nvPr/>
+        </p:nvSpPr>
+        <p:spPr>
+          <a:xfrm>
+            <a:off x="548640" y="4261104"/>
+            <a:ext cx="566928" cy="566928"/>
+          </a:xfrm>
+          <a:prstGeom prst="ellipse">
+            <a:avLst/>
+          </a:prstGeom>
+          <a:solidFill>
+            <a:srgbClr val="C77700"/>
+          </a:solidFill>
+          <a:ln>
+            <a:noFill/>
+          </a:ln>
+          <a:effectLst/>
+        </p:spPr>
+        <p:style>
+          <a:lnRef idx="1">
+            <a:schemeClr val="accent1"/>
+          </a:lnRef>
+          <a:fillRef idx="3">
+            <a:schemeClr val="accent1"/>
+          </a:fillRef>
+          <a:effectRef idx="2">
+            <a:schemeClr val="accent1"/>
+          </a:effectRef>
+          <a:fontRef idx="minor">
+            <a:schemeClr val="lt1"/>
+          </a:fontRef>
+        </p:style>
+        <p:txBody>
+          <a:bodyPr rtlCol="0" anchor="ctr" wrap="square"/>
+          <a:lstStyle/>
+          <a:p>
+            <a:pPr algn="ctr">
+              <a:spcBef>
+                <a:spcPts val="0"/>
+              </a:spcBef>
+              <a:spcAft>
+                <a:spcPts val="400"/>
+              </a:spcAft>
+            </a:pPr>
+            <a:r>
+              <a:rPr sz="1800" b="1" i="0">
+                <a:solidFill>
+                  <a:srgbClr val="FFFFFF"/>
+                </a:solidFill>
+              </a:rPr>
+              <a:t>4</a:t>
+            </a:r>
+          </a:p>
+        </p:txBody>
+      </p:sp>
+      <p:sp>
+        <p:nvSpPr>
+          <p:cNvPr id="14" name="TextBox 13"/>
+          <p:cNvSpPr txBox="1"/>
+          <p:nvPr/>
+        </p:nvSpPr>
+        <p:spPr>
+          <a:xfrm>
+            <a:off x="1325880" y="4242816"/>
+            <a:ext cx="10332720" cy="868680"/>
+          </a:xfrm>
+          <a:prstGeom prst="rect">
+            <a:avLst/>
+          </a:prstGeom>
+          <a:noFill/>
+        </p:spPr>
+        <p:txBody>
+          <a:bodyPr wrap="square">
+            <a:spAutoFit/>
+          </a:bodyPr>
+          <a:lstStyle/>
+          <a:p>
+            <a:pPr>
+              <a:spcBef>
+                <a:spcPts val="0"/>
+              </a:spcBef>
+              <a:spcAft>
+                <a:spcPts val="600"/>
+              </a:spcAft>
+            </a:pPr>
+            <a:r>
+              <a:rPr sz="1300" b="0">
+                <a:solidFill>
+                  <a:srgbClr val="0B2B52"/>
+                </a:solidFill>
+              </a:rPr>
+              <a:t>Use open Boltz-2 weights only — Boltz-2.1 is closed / API-only.</a:t>
+            </a:r>
+          </a:p>
+        </p:txBody>
+      </p:sp>
+      <p:sp>
+        <p:nvSpPr>
+          <p:cNvPr id="15" name="Oval 14"/>
+          <p:cNvSpPr/>
+          <p:nvPr/>
+        </p:nvSpPr>
+        <p:spPr>
+          <a:xfrm>
+            <a:off x="548640" y="5239512"/>
+            <a:ext cx="566928" cy="566928"/>
+          </a:xfrm>
+          <a:prstGeom prst="ellipse">
+            <a:avLst/>
+          </a:prstGeom>
+          <a:solidFill>
+            <a:srgbClr val="0B2B52"/>
+          </a:solidFill>
+          <a:ln>
+            <a:noFill/>
+          </a:ln>
+          <a:effectLst/>
+        </p:spPr>
+        <p:style>
+          <a:lnRef idx="1">
+            <a:schemeClr val="accent1"/>
+          </a:lnRef>
+          <a:fillRef idx="3">
+            <a:schemeClr val="accent1"/>
+          </a:fillRef>
+          <a:effectRef idx="2">
+            <a:schemeClr val="accent1"/>
+          </a:effectRef>
+          <a:fontRef idx="minor">
+            <a:schemeClr val="lt1"/>
+          </a:fontRef>
+        </p:style>
+        <p:txBody>
+          <a:bodyPr rtlCol="0" anchor="ctr" wrap="square"/>
+          <a:lstStyle/>
+          <a:p>
+            <a:pPr algn="ctr">
+              <a:spcBef>
+                <a:spcPts val="0"/>
+              </a:spcBef>
+              <a:spcAft>
+                <a:spcPts val="400"/>
+              </a:spcAft>
+            </a:pPr>
+            <a:r>
+              <a:rPr sz="1800" b="1" i="0">
+                <a:solidFill>
+                  <a:srgbClr val="FFFFFF"/>
+                </a:solidFill>
+              </a:rPr>
+              <a:t>5</a:t>
+            </a:r>
+          </a:p>
+        </p:txBody>
+      </p:sp>
+      <p:sp>
+        <p:nvSpPr>
+          <p:cNvPr id="16" name="TextBox 15"/>
+          <p:cNvSpPr txBox="1"/>
+          <p:nvPr/>
+        </p:nvSpPr>
+        <p:spPr>
+          <a:xfrm>
+            <a:off x="1325880" y="5221224"/>
+            <a:ext cx="10332720" cy="868680"/>
+          </a:xfrm>
+          <a:prstGeom prst="rect">
+            <a:avLst/>
+          </a:prstGeom>
+          <a:noFill/>
+        </p:spPr>
+        <p:txBody>
+          <a:bodyPr wrap="square">
+            <a:spAutoFit/>
+          </a:bodyPr>
+          <a:lstStyle/>
+          <a:p>
+            <a:pPr>
+              <a:spcBef>
+                <a:spcPts val="0"/>
+              </a:spcBef>
+              <a:spcAft>
+                <a:spcPts val="600"/>
+              </a:spcAft>
+            </a:pPr>
+            <a:r>
+              <a:rPr sz="1300" b="0">
+                <a:solidFill>
+                  <a:srgbClr val="0B2B52"/>
+                </a:solidFill>
+              </a:rPr>
+              <a:t>Production GPU scaling — NO LONGER a prerequisite. MPS (~3x) plus few-step distillation let the held-out panel be folded five times on this laptop, and the third draw overturned what the first two supported. Scaling is now for extending the panel past 22 receptors, which is the binding constraint on the open questions.</a:t>
+            </a:r>
+          </a:p>
+        </p:txBody>
+      </p:sp>
+    </p:spTree>
+  </p:cSld>
+  <p:clrMapOvr>
+    <a:masterClrMapping/>
+  </p:clrMapOvr>
+</p:sld>
+</file>
+
+<file path=ppt/slides/slide34.xml><?xml version="1.0" encoding="utf-8"?>
+<p:sld xmlns:a="http://schemas.openxmlformats.org/drawingml/2006/main" xmlns:p="http://schemas.openxmlformats.org/presentationml/2006/main" xmlns:r="http://schemas.openxmlformats.org/officeDocument/2006/relationships">
+  <p:cSld>
+    <p:spTree>
+      <p:nvGrpSpPr>
+        <p:cNvPr id="1" name=""/>
+        <p:cNvGrpSpPr/>
+        <p:nvPr/>
+      </p:nvGrpSpPr>
+      <p:grpSpPr/>
+      <p:sp>
+        <p:nvSpPr>
+          <p:cNvPr id="2" name="Rectangle 1"/>
+          <p:cNvSpPr/>
+          <p:nvPr/>
+        </p:nvSpPr>
+        <p:spPr>
+          <a:xfrm>
+            <a:off x="0" y="0"/>
+            <a:ext cx="12191695" cy="914400"/>
+          </a:xfrm>
+          <a:prstGeom prst="rect">
+            <a:avLst/>
+          </a:prstGeom>
+          <a:solidFill>
+            <a:srgbClr val="0B2B52"/>
+          </a:solidFill>
+          <a:ln>
+            <a:noFill/>
+          </a:ln>
+          <a:effectLst/>
+        </p:spPr>
+        <p:style>
+          <a:lnRef idx="1">
+            <a:schemeClr val="accent1"/>
+          </a:lnRef>
+          <a:fillRef idx="3">
+            <a:schemeClr val="accent1"/>
+          </a:fillRef>
+          <a:effectRef idx="2">
+            <a:schemeClr val="accent1"/>
+          </a:effectRef>
+          <a:fontRef idx="minor">
+            <a:schemeClr val="lt1"/>
+          </a:fontRef>
+        </p:style>
+        <p:txBody>
+          <a:bodyPr rtlCol="0" anchor="ctr"/>
+          <a:lstStyle/>
+          <a:p>
+            <a:pPr algn="ctr"/>
+          </a:p>
+        </p:txBody>
+      </p:sp>
+      <p:sp>
+        <p:nvSpPr>
+          <p:cNvPr id="3" name="Rectangle 2"/>
+          <p:cNvSpPr/>
+          <p:nvPr/>
+        </p:nvSpPr>
+        <p:spPr>
+          <a:xfrm>
+            <a:off x="0" y="914400"/>
+            <a:ext cx="12191695" cy="54864"/>
+          </a:xfrm>
+          <a:prstGeom prst="rect">
+            <a:avLst/>
+          </a:prstGeom>
+          <a:solidFill>
+            <a:srgbClr val="1E6FB8"/>
+          </a:solidFill>
+          <a:ln>
+            <a:noFill/>
+          </a:ln>
+          <a:effectLst/>
+        </p:spPr>
+        <p:style>
+          <a:lnRef idx="1">
+            <a:schemeClr val="accent1"/>
+          </a:lnRef>
+          <a:fillRef idx="3">
+            <a:schemeClr val="accent1"/>
+          </a:fillRef>
+          <a:effectRef idx="2">
+            <a:schemeClr val="accent1"/>
+          </a:effectRef>
+          <a:fontRef idx="minor">
+            <a:schemeClr val="lt1"/>
+          </a:fontRef>
+        </p:style>
+        <p:txBody>
+          <a:bodyPr rtlCol="0" anchor="ctr"/>
+          <a:lstStyle/>
+          <a:p>
+            <a:pPr algn="ctr"/>
+          </a:p>
+        </p:txBody>
+      </p:sp>
+      <p:sp>
+        <p:nvSpPr>
+          <p:cNvPr id="4" name="TextBox 3"/>
+          <p:cNvSpPr txBox="1"/>
+          <p:nvPr/>
+        </p:nvSpPr>
+        <p:spPr>
+          <a:xfrm>
+            <a:off x="502920" y="109728"/>
+            <a:ext cx="11155680" cy="777240"/>
+          </a:xfrm>
+          <a:prstGeom prst="rect">
+            <a:avLst/>
+          </a:prstGeom>
+          <a:noFill/>
+        </p:spPr>
+        <p:txBody>
+          <a:bodyPr wrap="square">
+            <a:spAutoFit/>
+          </a:bodyPr>
+          <a:lstStyle/>
+          <a:p>
+            <a:pPr>
+              <a:spcBef>
+                <a:spcPts val="0"/>
+              </a:spcBef>
+              <a:spcAft>
+                <a:spcPts val="400"/>
+              </a:spcAft>
+            </a:pPr>
+            <a:r>
+              <a:rPr sz="2600" b="1" i="0">
+                <a:solidFill>
+                  <a:srgbClr val="FFFFFF"/>
+                </a:solidFill>
+              </a:rPr>
+              <a:t>Summary</a:t>
+            </a:r>
+          </a:p>
+        </p:txBody>
+      </p:sp>
+      <p:sp>
+        <p:nvSpPr>
+          <p:cNvPr id="5" name="TextBox 4"/>
+          <p:cNvSpPr txBox="1"/>
+          <p:nvPr/>
+        </p:nvSpPr>
+        <p:spPr>
+          <a:xfrm>
+            <a:off x="502920" y="6473952"/>
+            <a:ext cx="8229600" cy="274320"/>
+          </a:xfrm>
+          <a:prstGeom prst="rect">
+            <a:avLst/>
+          </a:prstGeom>
+          <a:noFill/>
+        </p:spPr>
+        <p:txBody>
+          <a:bodyPr wrap="square">
+            <a:spAutoFit/>
+          </a:bodyPr>
+          <a:lstStyle/>
+          <a:p>
+            <a:pPr>
+              <a:spcBef>
+                <a:spcPts val="0"/>
+              </a:spcBef>
+              <a:spcAft>
+                <a:spcPts val="600"/>
+              </a:spcAft>
+            </a:pPr>
+            <a:r>
+              <a:rPr sz="900" b="0">
+                <a:solidFill>
+                  <a:srgbClr val="555555"/>
+                </a:solidFill>
+              </a:rPr>
+              <a:t>Boltz-Fast · Final Dissertation Report · Akik Jana (2024AB05287)</a:t>
+            </a:r>
+          </a:p>
+        </p:txBody>
+      </p:sp>
+      <p:sp>
+        <p:nvSpPr>
+          <p:cNvPr id="6" name="TextBox 5"/>
+          <p:cNvSpPr txBox="1"/>
+          <p:nvPr/>
+        </p:nvSpPr>
+        <p:spPr>
+          <a:xfrm>
+            <a:off x="11185855" y="6473952"/>
+            <a:ext cx="640080" cy="274320"/>
+          </a:xfrm>
+          <a:prstGeom prst="rect">
+            <a:avLst/>
+          </a:prstGeom>
+          <a:noFill/>
+        </p:spPr>
+        <p:txBody>
+          <a:bodyPr wrap="square">
+            <a:spAutoFit/>
+          </a:bodyPr>
+          <a:lstStyle/>
+          <a:p>
+            <a:pPr algn="r">
+              <a:spcBef>
+                <a:spcPts val="0"/>
+              </a:spcBef>
+              <a:spcAft>
+                <a:spcPts val="600"/>
+              </a:spcAft>
+            </a:pPr>
+            <a:r>
+              <a:rPr sz="1000" b="0">
+                <a:solidFill>
+                  <a:srgbClr val="0B2B52"/>
+                </a:solidFill>
+              </a:rPr>
+              <a:t>34</a:t>
             </a:r>
           </a:p>
         </p:txBody>

--- a/final_dissertation_presentation.pptx
+++ b/final_dissertation_presentation.pptx
@@ -138,6 +138,1494 @@
     </a:lvl9pPr>
   </p:defaultTextStyle>
 </p:presentation>
+</file>
+
+<file path=ppt/notesMasters/notesMaster1.xml><?xml version="1.0" encoding="utf-8"?>
+<p:notesMaster xmlns:a="http://schemas.openxmlformats.org/drawingml/2006/main" xmlns:p="http://schemas.openxmlformats.org/presentationml/2006/main" xmlns:r="http://schemas.openxmlformats.org/officeDocument/2006/relationships">
+  <p:cSld>
+    <p:bg>
+      <p:bgRef idx="1001">
+        <a:schemeClr val="bg1"/>
+      </p:bgRef>
+    </p:bg>
+    <p:spTree>
+      <p:nvGrpSpPr>
+        <p:cNvPr id="1" name=""/>
+        <p:cNvGrpSpPr/>
+        <p:nvPr/>
+      </p:nvGrpSpPr>
+      <p:grpSpPr>
+        <a:xfrm>
+          <a:off x="0" y="0"/>
+          <a:ext cx="0" cy="0"/>
+          <a:chOff x="0" y="0"/>
+          <a:chExt cx="0" cy="0"/>
+        </a:xfrm>
+      </p:grpSpPr>
+      <p:sp>
+        <p:nvSpPr>
+          <p:cNvPr id="2" name="Header Placeholder 1"/>
+          <p:cNvSpPr>
+            <a:spLocks noGrp="1"/>
+          </p:cNvSpPr>
+          <p:nvPr>
+            <p:ph type="hdr" sz="quarter"/>
+          </p:nvPr>
+        </p:nvSpPr>
+        <p:spPr>
+          <a:xfrm>
+            <a:off x="0" y="0"/>
+            <a:ext cx="2971800" cy="457200"/>
+          </a:xfrm>
+          <a:prstGeom prst="rect">
+            <a:avLst/>
+          </a:prstGeom>
+        </p:spPr>
+        <p:txBody>
+          <a:bodyPr vert="horz" lIns="91440" tIns="45720" rIns="91440" bIns="45720" rtlCol="0"/>
+          <a:lstStyle>
+            <a:lvl1pPr algn="l">
+              <a:defRPr sz="1200"/>
+            </a:lvl1pPr>
+          </a:lstStyle>
+          <a:p>
+            <a:endParaRPr lang="en-US"/>
+          </a:p>
+        </p:txBody>
+      </p:sp>
+      <p:sp>
+        <p:nvSpPr>
+          <p:cNvPr id="3" name="Date Placeholder 2"/>
+          <p:cNvSpPr>
+            <a:spLocks noGrp="1"/>
+          </p:cNvSpPr>
+          <p:nvPr>
+            <p:ph type="dt" idx="1"/>
+          </p:nvPr>
+        </p:nvSpPr>
+        <p:spPr>
+          <a:xfrm>
+            <a:off x="3884613" y="0"/>
+            <a:ext cx="2971800" cy="457200"/>
+          </a:xfrm>
+          <a:prstGeom prst="rect">
+            <a:avLst/>
+          </a:prstGeom>
+        </p:spPr>
+        <p:txBody>
+          <a:bodyPr vert="horz" lIns="91440" tIns="45720" rIns="91440" bIns="45720" rtlCol="0"/>
+          <a:lstStyle>
+            <a:lvl1pPr algn="r">
+              <a:defRPr sz="1200"/>
+            </a:lvl1pPr>
+          </a:lstStyle>
+          <a:p>
+            <a:fld id="{0F89C1C7-3DCD-1040-A9CF-14679D8B5DDD}" type="datetimeFigureOut">
+              <a:rPr lang="en-US" smtClean="0"/>
+              <a:t>10/17/16</a:t>
+            </a:fld>
+            <a:endParaRPr lang="en-US"/>
+          </a:p>
+        </p:txBody>
+      </p:sp>
+      <p:sp>
+        <p:nvSpPr>
+          <p:cNvPr id="4" name="Slide Image Placeholder 3"/>
+          <p:cNvSpPr>
+            <a:spLocks noGrp="1" noRot="1" noChangeAspect="1"/>
+          </p:cNvSpPr>
+          <p:nvPr>
+            <p:ph type="sldImg" idx="2"/>
+          </p:nvPr>
+        </p:nvSpPr>
+        <p:spPr>
+          <a:xfrm>
+            <a:off x="1143000" y="685800"/>
+            <a:ext cx="4572000" cy="3429000"/>
+          </a:xfrm>
+          <a:prstGeom prst="rect">
+            <a:avLst/>
+          </a:prstGeom>
+          <a:noFill/>
+          <a:ln w="12700">
+            <a:solidFill>
+              <a:prstClr val="black"/>
+            </a:solidFill>
+          </a:ln>
+        </p:spPr>
+        <p:txBody>
+          <a:bodyPr vert="horz" lIns="91440" tIns="45720" rIns="91440" bIns="45720" rtlCol="0" anchor="ctr"/>
+          <a:lstStyle/>
+          <a:p>
+            <a:endParaRPr lang="en-US"/>
+          </a:p>
+        </p:txBody>
+      </p:sp>
+      <p:sp>
+        <p:nvSpPr>
+          <p:cNvPr id="5" name="Notes Placeholder 4"/>
+          <p:cNvSpPr>
+            <a:spLocks noGrp="1"/>
+          </p:cNvSpPr>
+          <p:nvPr>
+            <p:ph type="body" sz="quarter" idx="3"/>
+          </p:nvPr>
+        </p:nvSpPr>
+        <p:spPr>
+          <a:xfrm>
+            <a:off x="685800" y="4343400"/>
+            <a:ext cx="5486400" cy="4114800"/>
+          </a:xfrm>
+          <a:prstGeom prst="rect">
+            <a:avLst/>
+          </a:prstGeom>
+        </p:spPr>
+        <p:txBody>
+          <a:bodyPr vert="horz" lIns="91440" tIns="45720" rIns="91440" bIns="45720" rtlCol="0"/>
+          <a:lstStyle/>
+          <a:p>
+            <a:pPr lvl="0"/>
+            <a:r>
+              <a:rPr lang="en-US" smtClean="0"/>
+              <a:t>Click to edit Master text styles</a:t>
+            </a:r>
+          </a:p>
+          <a:p>
+            <a:pPr lvl="1"/>
+            <a:r>
+              <a:rPr lang="en-US" smtClean="0"/>
+              <a:t>Second level</a:t>
+            </a:r>
+          </a:p>
+          <a:p>
+            <a:pPr lvl="2"/>
+            <a:r>
+              <a:rPr lang="en-US" smtClean="0"/>
+              <a:t>Third level</a:t>
+            </a:r>
+          </a:p>
+          <a:p>
+            <a:pPr lvl="3"/>
+            <a:r>
+              <a:rPr lang="en-US" smtClean="0"/>
+              <a:t>Fourth level</a:t>
+            </a:r>
+          </a:p>
+          <a:p>
+            <a:pPr lvl="4"/>
+            <a:r>
+              <a:rPr lang="en-US" smtClean="0"/>
+              <a:t>Fifth level</a:t>
+            </a:r>
+            <a:endParaRPr lang="en-US"/>
+          </a:p>
+        </p:txBody>
+      </p:sp>
+      <p:sp>
+        <p:nvSpPr>
+          <p:cNvPr id="6" name="Footer Placeholder 5"/>
+          <p:cNvSpPr>
+            <a:spLocks noGrp="1"/>
+          </p:cNvSpPr>
+          <p:nvPr>
+            <p:ph type="ftr" sz="quarter" idx="4"/>
+          </p:nvPr>
+        </p:nvSpPr>
+        <p:spPr>
+          <a:xfrm>
+            <a:off x="0" y="8685213"/>
+            <a:ext cx="2971800" cy="457200"/>
+          </a:xfrm>
+          <a:prstGeom prst="rect">
+            <a:avLst/>
+          </a:prstGeom>
+        </p:spPr>
+        <p:txBody>
+          <a:bodyPr vert="horz" lIns="91440" tIns="45720" rIns="91440" bIns="45720" rtlCol="0" anchor="b"/>
+          <a:lstStyle>
+            <a:lvl1pPr algn="l">
+              <a:defRPr sz="1200"/>
+            </a:lvl1pPr>
+          </a:lstStyle>
+          <a:p>
+            <a:endParaRPr lang="en-US"/>
+          </a:p>
+        </p:txBody>
+      </p:sp>
+      <p:sp>
+        <p:nvSpPr>
+          <p:cNvPr id="7" name="Slide Number Placeholder 6"/>
+          <p:cNvSpPr>
+            <a:spLocks noGrp="1"/>
+          </p:cNvSpPr>
+          <p:nvPr>
+            <p:ph type="sldNum" sz="quarter" idx="5"/>
+          </p:nvPr>
+        </p:nvSpPr>
+        <p:spPr>
+          <a:xfrm>
+            <a:off x="3884613" y="8685213"/>
+            <a:ext cx="2971800" cy="457200"/>
+          </a:xfrm>
+          <a:prstGeom prst="rect">
+            <a:avLst/>
+          </a:prstGeom>
+        </p:spPr>
+        <p:txBody>
+          <a:bodyPr vert="horz" lIns="91440" tIns="45720" rIns="91440" bIns="45720" rtlCol="0" anchor="b"/>
+          <a:lstStyle>
+            <a:lvl1pPr algn="r">
+              <a:defRPr sz="1200"/>
+            </a:lvl1pPr>
+          </a:lstStyle>
+          <a:p>
+            <a:fld id="{BB5E49A5-4136-284D-997B-48E1D791AD67}" type="slidenum">
+              <a:rPr lang="en-US" smtClean="0"/>
+              <a:t>‹#›</a:t>
+            </a:fld>
+            <a:endParaRPr lang="en-US"/>
+          </a:p>
+        </p:txBody>
+      </p:sp>
+    </p:spTree>
+    <p:extLst>
+      <p:ext uri="{BB962C8B-B14F-4D97-AF65-F5344CB8AC3E}">
+        <p14:creationId xmlns:p14="http://schemas.microsoft.com/office/powerpoint/2010/main" val="2623252185"/>
+      </p:ext>
+    </p:extLst>
+  </p:cSld>
+  <p:clrMap bg1="lt1" tx1="dk1" bg2="lt2" tx2="dk2" accent1="accent1" accent2="accent2" accent3="accent3" accent4="accent4" accent5="accent5" accent6="accent6" hlink="hlink" folHlink="folHlink"/>
+  <p:notesStyle>
+    <a:lvl1pPr marL="0" algn="l" defTabSz="457200" rtl="0" eaLnBrk="1" latinLnBrk="0" hangingPunct="1">
+      <a:defRPr sz="1200" kern="1200">
+        <a:solidFill>
+          <a:schemeClr val="tx1"/>
+        </a:solidFill>
+        <a:latin typeface="+mn-lt"/>
+        <a:ea typeface="+mn-ea"/>
+        <a:cs typeface="+mn-cs"/>
+      </a:defRPr>
+    </a:lvl1pPr>
+    <a:lvl2pPr marL="457200" algn="l" defTabSz="457200" rtl="0" eaLnBrk="1" latinLnBrk="0" hangingPunct="1">
+      <a:defRPr sz="1200" kern="1200">
+        <a:solidFill>
+          <a:schemeClr val="tx1"/>
+        </a:solidFill>
+        <a:latin typeface="+mn-lt"/>
+        <a:ea typeface="+mn-ea"/>
+        <a:cs typeface="+mn-cs"/>
+      </a:defRPr>
+    </a:lvl2pPr>
+    <a:lvl3pPr marL="914400" algn="l" defTabSz="457200" rtl="0" eaLnBrk="1" latinLnBrk="0" hangingPunct="1">
+      <a:defRPr sz="1200" kern="1200">
+        <a:solidFill>
+          <a:schemeClr val="tx1"/>
+        </a:solidFill>
+        <a:latin typeface="+mn-lt"/>
+        <a:ea typeface="+mn-ea"/>
+        <a:cs typeface="+mn-cs"/>
+      </a:defRPr>
+    </a:lvl3pPr>
+    <a:lvl4pPr marL="1371600" algn="l" defTabSz="457200" rtl="0" eaLnBrk="1" latinLnBrk="0" hangingPunct="1">
+      <a:defRPr sz="1200" kern="1200">
+        <a:solidFill>
+          <a:schemeClr val="tx1"/>
+        </a:solidFill>
+        <a:latin typeface="+mn-lt"/>
+        <a:ea typeface="+mn-ea"/>
+        <a:cs typeface="+mn-cs"/>
+      </a:defRPr>
+    </a:lvl4pPr>
+    <a:lvl5pPr marL="1828800" algn="l" defTabSz="457200" rtl="0" eaLnBrk="1" latinLnBrk="0" hangingPunct="1">
+      <a:defRPr sz="1200" kern="1200">
+        <a:solidFill>
+          <a:schemeClr val="tx1"/>
+        </a:solidFill>
+        <a:latin typeface="+mn-lt"/>
+        <a:ea typeface="+mn-ea"/>
+        <a:cs typeface="+mn-cs"/>
+      </a:defRPr>
+    </a:lvl5pPr>
+    <a:lvl6pPr marL="2286000" algn="l" defTabSz="457200" rtl="0" eaLnBrk="1" latinLnBrk="0" hangingPunct="1">
+      <a:defRPr sz="1200" kern="1200">
+        <a:solidFill>
+          <a:schemeClr val="tx1"/>
+        </a:solidFill>
+        <a:latin typeface="+mn-lt"/>
+        <a:ea typeface="+mn-ea"/>
+        <a:cs typeface="+mn-cs"/>
+      </a:defRPr>
+    </a:lvl6pPr>
+    <a:lvl7pPr marL="2743200" algn="l" defTabSz="457200" rtl="0" eaLnBrk="1" latinLnBrk="0" hangingPunct="1">
+      <a:defRPr sz="1200" kern="1200">
+        <a:solidFill>
+          <a:schemeClr val="tx1"/>
+        </a:solidFill>
+        <a:latin typeface="+mn-lt"/>
+        <a:ea typeface="+mn-ea"/>
+        <a:cs typeface="+mn-cs"/>
+      </a:defRPr>
+    </a:lvl7pPr>
+    <a:lvl8pPr marL="3200400" algn="l" defTabSz="457200" rtl="0" eaLnBrk="1" latinLnBrk="0" hangingPunct="1">
+      <a:defRPr sz="1200" kern="1200">
+        <a:solidFill>
+          <a:schemeClr val="tx1"/>
+        </a:solidFill>
+        <a:latin typeface="+mn-lt"/>
+        <a:ea typeface="+mn-ea"/>
+        <a:cs typeface="+mn-cs"/>
+      </a:defRPr>
+    </a:lvl8pPr>
+    <a:lvl9pPr marL="3657600" algn="l" defTabSz="457200" rtl="0" eaLnBrk="1" latinLnBrk="0" hangingPunct="1">
+      <a:defRPr sz="1200" kern="1200">
+        <a:solidFill>
+          <a:schemeClr val="tx1"/>
+        </a:solidFill>
+        <a:latin typeface="+mn-lt"/>
+        <a:ea typeface="+mn-ea"/>
+        <a:cs typeface="+mn-cs"/>
+      </a:defRPr>
+    </a:lvl9pPr>
+  </p:notesStyle>
+</p:notesMaster>
+</file>
+
+<file path=ppt/notesSlides/notesSlide1.xml><?xml version="1.0" encoding="utf-8"?>
+<p:notes xmlns:a="http://schemas.openxmlformats.org/drawingml/2006/main" xmlns:p="http://schemas.openxmlformats.org/presentationml/2006/main" xmlns:r="http://schemas.openxmlformats.org/officeDocument/2006/relationships">
+  <p:cSld>
+    <p:spTree>
+      <p:nvGrpSpPr>
+        <p:cNvPr id="1" name=""/>
+        <p:cNvGrpSpPr/>
+        <p:nvPr/>
+      </p:nvGrpSpPr>
+      <p:grpSpPr>
+        <a:xfrm>
+          <a:off x="0" y="0"/>
+          <a:ext cx="0" cy="0"/>
+          <a:chOff x="0" y="0"/>
+          <a:chExt cx="0" cy="0"/>
+        </a:xfrm>
+      </p:grpSpPr>
+      <p:sp>
+        <p:nvSpPr>
+          <p:cNvPr id="2" name="Slide Image Placeholder 1"/>
+          <p:cNvSpPr>
+            <a:spLocks noGrp="1"/>
+          </p:cNvSpPr>
+          <p:nvPr>
+            <p:ph type="sldImg" idx="2"/>
+          </p:nvPr>
+        </p:nvSpPr>
+        <p:spPr/>
+      </p:sp>
+      <p:sp>
+        <p:nvSpPr>
+          <p:cNvPr id="3" name="Notes Placeholder 2"/>
+          <p:cNvSpPr>
+            <a:spLocks noGrp="1"/>
+          </p:cNvSpPr>
+          <p:nvPr>
+            <p:ph type="body" idx="3" sz="quarter"/>
+          </p:nvPr>
+        </p:nvSpPr>
+        <p:spPr/>
+        <p:txBody>
+          <a:bodyPr/>
+          <a:lstStyle/>
+          <a:p>
+            <a:r>
+              <a:t>Honest scope: the headline speedups in this report are for the distilled surrogate. Track A was then tested end-to-end: the ipTM reference does not rank binders, so the screening objective is not reachable through it (slides 14–18).</a:t>
+            </a:r>
+          </a:p>
+        </p:txBody>
+      </p:sp>
+      <p:sp>
+        <p:nvSpPr>
+          <p:cNvPr id="4" name="Slide Number Placeholder 3"/>
+          <p:cNvSpPr>
+            <a:spLocks noGrp="1"/>
+          </p:cNvSpPr>
+          <p:nvPr>
+            <p:ph type="sldNum" idx="5" sz="quarter"/>
+          </p:nvPr>
+        </p:nvSpPr>
+        <p:spPr/>
+      </p:sp>
+    </p:spTree>
+  </p:cSld>
+  <p:clrMapOvr>
+    <a:masterClrMapping/>
+  </p:clrMapOvr>
+</p:notes>
+</file>
+
+<file path=ppt/notesSlides/notesSlide10.xml><?xml version="1.0" encoding="utf-8"?>
+<p:notes xmlns:a="http://schemas.openxmlformats.org/drawingml/2006/main" xmlns:p="http://schemas.openxmlformats.org/presentationml/2006/main" xmlns:r="http://schemas.openxmlformats.org/officeDocument/2006/relationships">
+  <p:cSld>
+    <p:spTree>
+      <p:nvGrpSpPr>
+        <p:cNvPr id="1" name=""/>
+        <p:cNvGrpSpPr/>
+        <p:nvPr/>
+      </p:nvGrpSpPr>
+      <p:grpSpPr>
+        <a:xfrm>
+          <a:off x="0" y="0"/>
+          <a:ext cx="0" cy="0"/>
+          <a:chOff x="0" y="0"/>
+          <a:chExt cx="0" cy="0"/>
+        </a:xfrm>
+      </p:grpSpPr>
+      <p:sp>
+        <p:nvSpPr>
+          <p:cNvPr id="2" name="Slide Image Placeholder 1"/>
+          <p:cNvSpPr>
+            <a:spLocks noGrp="1"/>
+          </p:cNvSpPr>
+          <p:nvPr>
+            <p:ph type="sldImg" idx="2"/>
+          </p:nvPr>
+        </p:nvSpPr>
+        <p:spPr/>
+      </p:sp>
+      <p:sp>
+        <p:nvSpPr>
+          <p:cNvPr id="3" name="Notes Placeholder 2"/>
+          <p:cNvSpPr>
+            <a:spLocks noGrp="1"/>
+          </p:cNvSpPr>
+          <p:nvPr>
+            <p:ph type="body" idx="3" sz="quarter"/>
+          </p:nvPr>
+        </p:nvSpPr>
+        <p:spPr/>
+        <p:txBody>
+          <a:bodyPr/>
+          <a:lstStyle/>
+          <a:p>
+            <a:r>
+              <a:t>Effects normalised by the run-to-run noise of Section 7.5 so metrics on different scales compare. DeCAF vs Boltz-1 isolates few-step training; the Boltz-2 arm ran on CPU, the others on MPS.</a:t>
+            </a:r>
+          </a:p>
+        </p:txBody>
+      </p:sp>
+      <p:sp>
+        <p:nvSpPr>
+          <p:cNvPr id="4" name="Slide Number Placeholder 3"/>
+          <p:cNvSpPr>
+            <a:spLocks noGrp="1"/>
+          </p:cNvSpPr>
+          <p:nvPr>
+            <p:ph type="sldNum" idx="5" sz="quarter"/>
+          </p:nvPr>
+        </p:nvSpPr>
+        <p:spPr/>
+      </p:sp>
+    </p:spTree>
+  </p:cSld>
+  <p:clrMapOvr>
+    <a:masterClrMapping/>
+  </p:clrMapOvr>
+</p:notes>
+</file>
+
+<file path=ppt/notesSlides/notesSlide11.xml><?xml version="1.0" encoding="utf-8"?>
+<p:notes xmlns:a="http://schemas.openxmlformats.org/drawingml/2006/main" xmlns:p="http://schemas.openxmlformats.org/presentationml/2006/main" xmlns:r="http://schemas.openxmlformats.org/officeDocument/2006/relationships">
+  <p:cSld>
+    <p:spTree>
+      <p:nvGrpSpPr>
+        <p:cNvPr id="1" name=""/>
+        <p:cNvGrpSpPr/>
+        <p:nvPr/>
+      </p:nvGrpSpPr>
+      <p:grpSpPr>
+        <a:xfrm>
+          <a:off x="0" y="0"/>
+          <a:ext cx="0" cy="0"/>
+          <a:chOff x="0" y="0"/>
+          <a:chExt cx="0" cy="0"/>
+        </a:xfrm>
+      </p:grpSpPr>
+      <p:sp>
+        <p:nvSpPr>
+          <p:cNvPr id="2" name="Slide Image Placeholder 1"/>
+          <p:cNvSpPr>
+            <a:spLocks noGrp="1"/>
+          </p:cNvSpPr>
+          <p:nvPr>
+            <p:ph type="sldImg" idx="2"/>
+          </p:nvPr>
+        </p:nvSpPr>
+        <p:spPr/>
+      </p:sp>
+      <p:sp>
+        <p:nvSpPr>
+          <p:cNvPr id="3" name="Notes Placeholder 2"/>
+          <p:cNvSpPr>
+            <a:spLocks noGrp="1"/>
+          </p:cNvSpPr>
+          <p:nvPr>
+            <p:ph type="body" idx="3" sz="quarter"/>
+          </p:nvPr>
+        </p:nvSpPr>
+        <p:spPr/>
+        <p:txBody>
+          <a:bodyPr/>
+          <a:lstStyle/>
+          <a:p>
+            <a:r>
+              <a:t>Not homology-decontaminated, and cannot be: 0 of 22 held-out receptors clear 30% identity to the pre-cutoff PDB (median 1.000), and neither does a random sample of the whole candidate pool. What the split isolates is complex-level novelty with receptor familiarity held constant.</a:t>
+            </a:r>
+          </a:p>
+        </p:txBody>
+      </p:sp>
+      <p:sp>
+        <p:nvSpPr>
+          <p:cNvPr id="4" name="Slide Number Placeholder 3"/>
+          <p:cNvSpPr>
+            <a:spLocks noGrp="1"/>
+          </p:cNvSpPr>
+          <p:nvPr>
+            <p:ph type="sldNum" idx="5" sz="quarter"/>
+          </p:nvPr>
+        </p:nvSpPr>
+        <p:spPr/>
+      </p:sp>
+    </p:spTree>
+  </p:cSld>
+  <p:clrMapOvr>
+    <a:masterClrMapping/>
+  </p:clrMapOvr>
+</p:notes>
+</file>
+
+<file path=ppt/notesSlides/notesSlide12.xml><?xml version="1.0" encoding="utf-8"?>
+<p:notes xmlns:a="http://schemas.openxmlformats.org/drawingml/2006/main" xmlns:p="http://schemas.openxmlformats.org/presentationml/2006/main" xmlns:r="http://schemas.openxmlformats.org/officeDocument/2006/relationships">
+  <p:cSld>
+    <p:spTree>
+      <p:nvGrpSpPr>
+        <p:cNvPr id="1" name=""/>
+        <p:cNvGrpSpPr/>
+        <p:nvPr/>
+      </p:nvGrpSpPr>
+      <p:grpSpPr>
+        <a:xfrm>
+          <a:off x="0" y="0"/>
+          <a:ext cx="0" cy="0"/>
+          <a:chOff x="0" y="0"/>
+          <a:chExt cx="0" cy="0"/>
+        </a:xfrm>
+      </p:grpSpPr>
+      <p:sp>
+        <p:nvSpPr>
+          <p:cNvPr id="2" name="Slide Image Placeholder 1"/>
+          <p:cNvSpPr>
+            <a:spLocks noGrp="1"/>
+          </p:cNvSpPr>
+          <p:nvPr>
+            <p:ph type="sldImg" idx="2"/>
+          </p:nvPr>
+        </p:nvSpPr>
+        <p:spPr/>
+      </p:sp>
+      <p:sp>
+        <p:nvSpPr>
+          <p:cNvPr id="3" name="Notes Placeholder 2"/>
+          <p:cNvSpPr>
+            <a:spLocks noGrp="1"/>
+          </p:cNvSpPr>
+          <p:nvPr>
+            <p:ph type="body" idx="3" sz="quarter"/>
+          </p:nvPr>
+        </p:nvSpPr>
+        <p:spPr/>
+        <p:txBody>
+          <a:bodyPr/>
+          <a:lstStyle/>
+          <a:p>
+            <a:r>
+              <a:t>The methodological lesson is sharper than the scientific one: a single unseeded fold is not a measurement, and on this evidence neither are two.</a:t>
+            </a:r>
+          </a:p>
+        </p:txBody>
+      </p:sp>
+      <p:sp>
+        <p:nvSpPr>
+          <p:cNvPr id="4" name="Slide Number Placeholder 3"/>
+          <p:cNvSpPr>
+            <a:spLocks noGrp="1"/>
+          </p:cNvSpPr>
+          <p:nvPr>
+            <p:ph type="sldNum" idx="5" sz="quarter"/>
+          </p:nvPr>
+        </p:nvSpPr>
+        <p:spPr/>
+      </p:sp>
+    </p:spTree>
+  </p:cSld>
+  <p:clrMapOvr>
+    <a:masterClrMapping/>
+  </p:clrMapOvr>
+</p:notes>
+</file>
+
+<file path=ppt/notesSlides/notesSlide13.xml><?xml version="1.0" encoding="utf-8"?>
+<p:notes xmlns:a="http://schemas.openxmlformats.org/drawingml/2006/main" xmlns:p="http://schemas.openxmlformats.org/presentationml/2006/main" xmlns:r="http://schemas.openxmlformats.org/officeDocument/2006/relationships">
+  <p:cSld>
+    <p:spTree>
+      <p:nvGrpSpPr>
+        <p:cNvPr id="1" name=""/>
+        <p:cNvGrpSpPr/>
+        <p:nvPr/>
+      </p:nvGrpSpPr>
+      <p:grpSpPr>
+        <a:xfrm>
+          <a:off x="0" y="0"/>
+          <a:ext cx="0" cy="0"/>
+          <a:chOff x="0" y="0"/>
+          <a:chExt cx="0" cy="0"/>
+        </a:xfrm>
+      </p:grpSpPr>
+      <p:sp>
+        <p:nvSpPr>
+          <p:cNvPr id="2" name="Slide Image Placeholder 1"/>
+          <p:cNvSpPr>
+            <a:spLocks noGrp="1"/>
+          </p:cNvSpPr>
+          <p:nvPr>
+            <p:ph type="sldImg" idx="2"/>
+          </p:nvPr>
+        </p:nvSpPr>
+        <p:spPr/>
+      </p:sp>
+      <p:sp>
+        <p:nvSpPr>
+          <p:cNvPr id="3" name="Notes Placeholder 2"/>
+          <p:cNvSpPr>
+            <a:spLocks noGrp="1"/>
+          </p:cNvSpPr>
+          <p:nvPr>
+            <p:ph type="body" idx="3" sz="quarter"/>
+          </p:nvPr>
+        </p:nvSpPr>
+        <p:spPr/>
+        <p:txBody>
+          <a:bodyPr/>
+          <a:lstStyle/>
+          <a:p>
+            <a:r>
+              <a:t>Physics rescoring on converged structures still does not help: PRODIGY ΔG reaches AUC 0.563 against 0.856 for interface pLDDT, and combining them costs 0.033. A sequence model trained on 96M interactions (MINT) reaches 0.614 zero-shot — structure wins here, contrary to recent affinity-regression results.</a:t>
+            </a:r>
+          </a:p>
+        </p:txBody>
+      </p:sp>
+      <p:sp>
+        <p:nvSpPr>
+          <p:cNvPr id="4" name="Slide Number Placeholder 3"/>
+          <p:cNvSpPr>
+            <a:spLocks noGrp="1"/>
+          </p:cNvSpPr>
+          <p:nvPr>
+            <p:ph type="sldNum" idx="5" sz="quarter"/>
+          </p:nvPr>
+        </p:nvSpPr>
+        <p:spPr/>
+      </p:sp>
+    </p:spTree>
+  </p:cSld>
+  <p:clrMapOvr>
+    <a:masterClrMapping/>
+  </p:clrMapOvr>
+</p:notes>
+</file>
+
+<file path=ppt/notesSlides/notesSlide14.xml><?xml version="1.0" encoding="utf-8"?>
+<p:notes xmlns:a="http://schemas.openxmlformats.org/drawingml/2006/main" xmlns:p="http://schemas.openxmlformats.org/presentationml/2006/main" xmlns:r="http://schemas.openxmlformats.org/officeDocument/2006/relationships">
+  <p:cSld>
+    <p:spTree>
+      <p:nvGrpSpPr>
+        <p:cNvPr id="1" name=""/>
+        <p:cNvGrpSpPr/>
+        <p:nvPr/>
+      </p:nvGrpSpPr>
+      <p:grpSpPr>
+        <a:xfrm>
+          <a:off x="0" y="0"/>
+          <a:ext cx="0" cy="0"/>
+          <a:chOff x="0" y="0"/>
+          <a:chExt cx="0" cy="0"/>
+        </a:xfrm>
+      </p:grpSpPr>
+      <p:sp>
+        <p:nvSpPr>
+          <p:cNvPr id="2" name="Slide Image Placeholder 1"/>
+          <p:cNvSpPr>
+            <a:spLocks noGrp="1"/>
+          </p:cNvSpPr>
+          <p:nvPr>
+            <p:ph type="sldImg" idx="2"/>
+          </p:nvPr>
+        </p:nvSpPr>
+        <p:spPr/>
+      </p:sp>
+      <p:sp>
+        <p:nvSpPr>
+          <p:cNvPr id="3" name="Notes Placeholder 2"/>
+          <p:cNvSpPr>
+            <a:spLocks noGrp="1"/>
+          </p:cNvSpPr>
+          <p:nvPr>
+            <p:ph type="body" idx="3" sz="quarter"/>
+          </p:nvPr>
+        </p:nvSpPr>
+        <p:spPr/>
+        <p:txBody>
+          <a:bodyPr/>
+          <a:lstStyle/>
+          <a:p>
+            <a:r>
+              <a:t>Not a better score — the same scores read as a two-way competition, so its power comes from the structure of the screen, not the model, and the Section 7.9 ceiling does not apply. Costs 5-10x folds at deployment. Caveat: 7-13 calls per combination, so a reported 100% is 8 of 8.</a:t>
+            </a:r>
+          </a:p>
+        </p:txBody>
+      </p:sp>
+      <p:sp>
+        <p:nvSpPr>
+          <p:cNvPr id="4" name="Slide Number Placeholder 3"/>
+          <p:cNvSpPr>
+            <a:spLocks noGrp="1"/>
+          </p:cNvSpPr>
+          <p:nvPr>
+            <p:ph type="sldNum" idx="5" sz="quarter"/>
+          </p:nvPr>
+        </p:nvSpPr>
+        <p:spPr/>
+      </p:sp>
+    </p:spTree>
+  </p:cSld>
+  <p:clrMapOvr>
+    <a:masterClrMapping/>
+  </p:clrMapOvr>
+</p:notes>
+</file>
+
+<file path=ppt/notesSlides/notesSlide15.xml><?xml version="1.0" encoding="utf-8"?>
+<p:notes xmlns:a="http://schemas.openxmlformats.org/drawingml/2006/main" xmlns:p="http://schemas.openxmlformats.org/presentationml/2006/main" xmlns:r="http://schemas.openxmlformats.org/officeDocument/2006/relationships">
+  <p:cSld>
+    <p:spTree>
+      <p:nvGrpSpPr>
+        <p:cNvPr id="1" name=""/>
+        <p:cNvGrpSpPr/>
+        <p:nvPr/>
+      </p:nvGrpSpPr>
+      <p:grpSpPr>
+        <a:xfrm>
+          <a:off x="0" y="0"/>
+          <a:ext cx="0" cy="0"/>
+          <a:chOff x="0" y="0"/>
+          <a:chExt cx="0" cy="0"/>
+        </a:xfrm>
+      </p:grpSpPr>
+      <p:sp>
+        <p:nvSpPr>
+          <p:cNvPr id="2" name="Slide Image Placeholder 1"/>
+          <p:cNvSpPr>
+            <a:spLocks noGrp="1"/>
+          </p:cNvSpPr>
+          <p:nvPr>
+            <p:ph type="sldImg" idx="2"/>
+          </p:nvPr>
+        </p:nvSpPr>
+        <p:spPr/>
+      </p:sp>
+      <p:sp>
+        <p:nvSpPr>
+          <p:cNvPr id="3" name="Notes Placeholder 2"/>
+          <p:cNvSpPr>
+            <a:spLocks noGrp="1"/>
+          </p:cNvSpPr>
+          <p:nvPr>
+            <p:ph type="body" idx="3" sz="quarter"/>
+          </p:nvPr>
+        </p:nvSpPr>
+        <p:spPr/>
+        <p:txBody>
+          <a:bodyPr/>
+          <a:lstStyle/>
+          <a:p>
+            <a:r>
+              <a:t>The pocket is determined by the receptor; the pose is not determined at all. That is why every contact-derived readout failed — contacts, buried area, pDockQ, PRODIGY dG, pose agreement all read a placement correct in location and arbitrary in detail. Confidence is the only axis carrying binding information.</a:t>
+            </a:r>
+          </a:p>
+        </p:txBody>
+      </p:sp>
+      <p:sp>
+        <p:nvSpPr>
+          <p:cNvPr id="4" name="Slide Number Placeholder 3"/>
+          <p:cNvSpPr>
+            <a:spLocks noGrp="1"/>
+          </p:cNvSpPr>
+          <p:nvPr>
+            <p:ph type="sldNum" idx="5" sz="quarter"/>
+          </p:nvPr>
+        </p:nvSpPr>
+        <p:spPr/>
+      </p:sp>
+    </p:spTree>
+  </p:cSld>
+  <p:clrMapOvr>
+    <a:masterClrMapping/>
+  </p:clrMapOvr>
+</p:notes>
+</file>
+
+<file path=ppt/notesSlides/notesSlide16.xml><?xml version="1.0" encoding="utf-8"?>
+<p:notes xmlns:a="http://schemas.openxmlformats.org/drawingml/2006/main" xmlns:p="http://schemas.openxmlformats.org/presentationml/2006/main" xmlns:r="http://schemas.openxmlformats.org/officeDocument/2006/relationships">
+  <p:cSld>
+    <p:spTree>
+      <p:nvGrpSpPr>
+        <p:cNvPr id="1" name=""/>
+        <p:cNvGrpSpPr/>
+        <p:nvPr/>
+      </p:nvGrpSpPr>
+      <p:grpSpPr>
+        <a:xfrm>
+          <a:off x="0" y="0"/>
+          <a:ext cx="0" cy="0"/>
+          <a:chOff x="0" y="0"/>
+          <a:chExt cx="0" cy="0"/>
+        </a:xfrm>
+      </p:grpSpPr>
+      <p:sp>
+        <p:nvSpPr>
+          <p:cNvPr id="2" name="Slide Image Placeholder 1"/>
+          <p:cNvSpPr>
+            <a:spLocks noGrp="1"/>
+          </p:cNvSpPr>
+          <p:nvPr>
+            <p:ph type="sldImg" idx="2"/>
+          </p:nvPr>
+        </p:nvSpPr>
+        <p:spPr/>
+      </p:sp>
+      <p:sp>
+        <p:nvSpPr>
+          <p:cNvPr id="3" name="Notes Placeholder 2"/>
+          <p:cNvSpPr>
+            <a:spLocks noGrp="1"/>
+          </p:cNvSpPr>
+          <p:nvPr>
+            <p:ph type="body" idx="3" sz="quarter"/>
+          </p:nvPr>
+        </p:nvSpPr>
+        <p:spPr/>
+        <p:txBody>
+          <a:bodyPr/>
+          <a:lstStyle/>
+          <a:p>
+            <a:r>
+              <a:t>The CPU-era note in the runner said a full alignment was intractable — a 40-complex run did not finish one batch in an hour. On MPS, full depth is no slower than depth 32. The reduced regime outlived the constraint that justified it, and every effect size in slides 15–30 is a lower bound.</a:t>
+            </a:r>
+          </a:p>
+        </p:txBody>
+      </p:sp>
+      <p:sp>
+        <p:nvSpPr>
+          <p:cNvPr id="4" name="Slide Number Placeholder 3"/>
+          <p:cNvSpPr>
+            <a:spLocks noGrp="1"/>
+          </p:cNvSpPr>
+          <p:nvPr>
+            <p:ph type="sldNum" idx="5" sz="quarter"/>
+          </p:nvPr>
+        </p:nvSpPr>
+        <p:spPr/>
+      </p:sp>
+    </p:spTree>
+  </p:cSld>
+  <p:clrMapOvr>
+    <a:masterClrMapping/>
+  </p:clrMapOvr>
+</p:notes>
+</file>
+
+<file path=ppt/notesSlides/notesSlide2.xml><?xml version="1.0" encoding="utf-8"?>
+<p:notes xmlns:a="http://schemas.openxmlformats.org/drawingml/2006/main" xmlns:p="http://schemas.openxmlformats.org/presentationml/2006/main" xmlns:r="http://schemas.openxmlformats.org/officeDocument/2006/relationships">
+  <p:cSld>
+    <p:spTree>
+      <p:nvGrpSpPr>
+        <p:cNvPr id="1" name=""/>
+        <p:cNvGrpSpPr/>
+        <p:nvPr/>
+      </p:nvGrpSpPr>
+      <p:grpSpPr>
+        <a:xfrm>
+          <a:off x="0" y="0"/>
+          <a:ext cx="0" cy="0"/>
+          <a:chOff x="0" y="0"/>
+          <a:chExt cx="0" cy="0"/>
+        </a:xfrm>
+      </p:grpSpPr>
+      <p:sp>
+        <p:nvSpPr>
+          <p:cNvPr id="2" name="Slide Image Placeholder 1"/>
+          <p:cNvSpPr>
+            <a:spLocks noGrp="1"/>
+          </p:cNvSpPr>
+          <p:nvPr>
+            <p:ph type="sldImg" idx="2"/>
+          </p:nvPr>
+        </p:nvSpPr>
+        <p:spPr/>
+      </p:sp>
+      <p:sp>
+        <p:nvSpPr>
+          <p:cNvPr id="3" name="Notes Placeholder 2"/>
+          <p:cNvSpPr>
+            <a:spLocks noGrp="1"/>
+          </p:cNvSpPr>
+          <p:nvPr>
+            <p:ph type="body" idx="3" sz="quarter"/>
+          </p:nvPr>
+        </p:nvSpPr>
+        <p:spPr/>
+        <p:txBody>
+          <a:bodyPr/>
+          <a:lstStyle/>
+          <a:p>
+            <a:r>
+              <a:t>Caveats:  (1) low-rank Relative MSE is 84–93% at these ranks — the layer must be TRAINED to recover full-rank behaviour, and cannot be projected onto pretrained weights.  (2) Latencies are the surrogate, not full Boltz-2.  (3) Settings are far below Boltz defaults: 10 sampling steps vs 200, MSA depth 32 vs 8192.</a:t>
+            </a:r>
+          </a:p>
+        </p:txBody>
+      </p:sp>
+      <p:sp>
+        <p:nvSpPr>
+          <p:cNvPr id="4" name="Slide Number Placeholder 3"/>
+          <p:cNvSpPr>
+            <a:spLocks noGrp="1"/>
+          </p:cNvSpPr>
+          <p:nvPr>
+            <p:ph type="sldNum" idx="5" sz="quarter"/>
+          </p:nvPr>
+        </p:nvSpPr>
+        <p:spPr/>
+      </p:sp>
+    </p:spTree>
+  </p:cSld>
+  <p:clrMapOvr>
+    <a:masterClrMapping/>
+  </p:clrMapOvr>
+</p:notes>
+</file>
+
+<file path=ppt/notesSlides/notesSlide3.xml><?xml version="1.0" encoding="utf-8"?>
+<p:notes xmlns:a="http://schemas.openxmlformats.org/drawingml/2006/main" xmlns:p="http://schemas.openxmlformats.org/presentationml/2006/main" xmlns:r="http://schemas.openxmlformats.org/officeDocument/2006/relationships">
+  <p:cSld>
+    <p:spTree>
+      <p:nvGrpSpPr>
+        <p:cNvPr id="1" name=""/>
+        <p:cNvGrpSpPr/>
+        <p:nvPr/>
+      </p:nvGrpSpPr>
+      <p:grpSpPr>
+        <a:xfrm>
+          <a:off x="0" y="0"/>
+          <a:ext cx="0" cy="0"/>
+          <a:chOff x="0" y="0"/>
+          <a:chExt cx="0" cy="0"/>
+        </a:xfrm>
+      </p:grpSpPr>
+      <p:sp>
+        <p:nvSpPr>
+          <p:cNvPr id="2" name="Slide Image Placeholder 1"/>
+          <p:cNvSpPr>
+            <a:spLocks noGrp="1"/>
+          </p:cNvSpPr>
+          <p:nvPr>
+            <p:ph type="sldImg" idx="2"/>
+          </p:nvPr>
+        </p:nvSpPr>
+        <p:spPr/>
+      </p:sp>
+      <p:sp>
+        <p:nvSpPr>
+          <p:cNvPr id="3" name="Notes Placeholder 2"/>
+          <p:cNvSpPr>
+            <a:spLocks noGrp="1"/>
+          </p:cNvSpPr>
+          <p:nvPr>
+            <p:ph type="body" idx="3" sz="quarter"/>
+          </p:nvPr>
+        </p:nvSpPr>
+        <p:spPr/>
+        <p:txBody>
+          <a:bodyPr/>
+          <a:lstStyle/>
+          <a:p>
+            <a:r>
+              <a:t>Settings throughout are far below Boltz defaults — 10 sampling steps vs 200, 1 recycling vs 3, MSA 32 vs full. Slides 31–32 resolve this and the confound was real: at the intended settings the effect is 3–7× larger and the true binder ranks first 17 times in 22. Everything on slides 15–30 is a lower bound.</a:t>
+            </a:r>
+          </a:p>
+        </p:txBody>
+      </p:sp>
+      <p:sp>
+        <p:nvSpPr>
+          <p:cNvPr id="4" name="Slide Number Placeholder 3"/>
+          <p:cNvSpPr>
+            <a:spLocks noGrp="1"/>
+          </p:cNvSpPr>
+          <p:nvPr>
+            <p:ph type="sldNum" idx="5" sz="quarter"/>
+          </p:nvPr>
+        </p:nvSpPr>
+        <p:spPr/>
+      </p:sp>
+    </p:spTree>
+  </p:cSld>
+  <p:clrMapOvr>
+    <a:masterClrMapping/>
+  </p:clrMapOvr>
+</p:notes>
+</file>
+
+<file path=ppt/notesSlides/notesSlide4.xml><?xml version="1.0" encoding="utf-8"?>
+<p:notes xmlns:a="http://schemas.openxmlformats.org/drawingml/2006/main" xmlns:p="http://schemas.openxmlformats.org/presentationml/2006/main" xmlns:r="http://schemas.openxmlformats.org/officeDocument/2006/relationships">
+  <p:cSld>
+    <p:spTree>
+      <p:nvGrpSpPr>
+        <p:cNvPr id="1" name=""/>
+        <p:cNvGrpSpPr/>
+        <p:nvPr/>
+      </p:nvGrpSpPr>
+      <p:grpSpPr>
+        <a:xfrm>
+          <a:off x="0" y="0"/>
+          <a:ext cx="0" cy="0"/>
+          <a:chOff x="0" y="0"/>
+          <a:chExt cx="0" cy="0"/>
+        </a:xfrm>
+      </p:grpSpPr>
+      <p:sp>
+        <p:nvSpPr>
+          <p:cNvPr id="2" name="Slide Image Placeholder 1"/>
+          <p:cNvSpPr>
+            <a:spLocks noGrp="1"/>
+          </p:cNvSpPr>
+          <p:nvPr>
+            <p:ph type="sldImg" idx="2"/>
+          </p:nvPr>
+        </p:nvSpPr>
+        <p:spPr/>
+      </p:sp>
+      <p:sp>
+        <p:nvSpPr>
+          <p:cNvPr id="3" name="Notes Placeholder 2"/>
+          <p:cNvSpPr>
+            <a:spLocks noGrp="1"/>
+          </p:cNvSpPr>
+          <p:nvPr>
+            <p:ph type="body" idx="3" sz="quarter"/>
+          </p:nvPr>
+        </p:nvSpPr>
+        <p:spPr/>
+        <p:txBody>
+          <a:bodyPr/>
+          <a:lstStyle/>
+          <a:p>
+            <a:r>
+              <a:t>Scaling law 1.32·rank^−0.356 puts 10% error at rank ≈1414, against c_hidden² = 1024 — the low-rank form costs MORE activation memory than stock before it is accurate enough to substitute.</a:t>
+            </a:r>
+          </a:p>
+        </p:txBody>
+      </p:sp>
+      <p:sp>
+        <p:nvSpPr>
+          <p:cNvPr id="4" name="Slide Number Placeholder 3"/>
+          <p:cNvSpPr>
+            <a:spLocks noGrp="1"/>
+          </p:cNvSpPr>
+          <p:nvPr>
+            <p:ph type="sldNum" idx="5" sz="quarter"/>
+          </p:nvPr>
+        </p:nvSpPr>
+        <p:spPr/>
+      </p:sp>
+    </p:spTree>
+  </p:cSld>
+  <p:clrMapOvr>
+    <a:masterClrMapping/>
+  </p:clrMapOvr>
+</p:notes>
+</file>
+
+<file path=ppt/notesSlides/notesSlide5.xml><?xml version="1.0" encoding="utf-8"?>
+<p:notes xmlns:a="http://schemas.openxmlformats.org/drawingml/2006/main" xmlns:p="http://schemas.openxmlformats.org/presentationml/2006/main" xmlns:r="http://schemas.openxmlformats.org/officeDocument/2006/relationships">
+  <p:cSld>
+    <p:spTree>
+      <p:nvGrpSpPr>
+        <p:cNvPr id="1" name=""/>
+        <p:cNvGrpSpPr/>
+        <p:nvPr/>
+      </p:nvGrpSpPr>
+      <p:grpSpPr>
+        <a:xfrm>
+          <a:off x="0" y="0"/>
+          <a:ext cx="0" cy="0"/>
+          <a:chOff x="0" y="0"/>
+          <a:chExt cx="0" cy="0"/>
+        </a:xfrm>
+      </p:grpSpPr>
+      <p:sp>
+        <p:nvSpPr>
+          <p:cNvPr id="2" name="Slide Image Placeholder 1"/>
+          <p:cNvSpPr>
+            <a:spLocks noGrp="1"/>
+          </p:cNvSpPr>
+          <p:nvPr>
+            <p:ph type="sldImg" idx="2"/>
+          </p:nvPr>
+        </p:nvSpPr>
+        <p:spPr/>
+      </p:sp>
+      <p:sp>
+        <p:nvSpPr>
+          <p:cNvPr id="3" name="Notes Placeholder 2"/>
+          <p:cNvSpPr>
+            <a:spLocks noGrp="1"/>
+          </p:cNvSpPr>
+          <p:nvPr>
+            <p:ph type="body" idx="3" sz="quarter"/>
+          </p:nvPr>
+        </p:nvSpPr>
+        <p:spPr/>
+        <p:txBody>
+          <a:bodyPr/>
+          <a:lstStyle/>
+          <a:p>
+            <a:r>
+              <a:t>ipTM responds largely to peptide COMPOSITION. Any sequence-order effect is at most 63% of the composition effect. A ridge regression on composition independently beat the distilled surrogate (+0.103 vs −0.034).</a:t>
+            </a:r>
+          </a:p>
+        </p:txBody>
+      </p:sp>
+      <p:sp>
+        <p:nvSpPr>
+          <p:cNvPr id="4" name="Slide Number Placeholder 3"/>
+          <p:cNvSpPr>
+            <a:spLocks noGrp="1"/>
+          </p:cNvSpPr>
+          <p:nvPr>
+            <p:ph type="sldNum" idx="5" sz="quarter"/>
+          </p:nvPr>
+        </p:nvSpPr>
+        <p:spPr/>
+      </p:sp>
+    </p:spTree>
+  </p:cSld>
+  <p:clrMapOvr>
+    <a:masterClrMapping/>
+  </p:clrMapOvr>
+</p:notes>
+</file>
+
+<file path=ppt/notesSlides/notesSlide6.xml><?xml version="1.0" encoding="utf-8"?>
+<p:notes xmlns:a="http://schemas.openxmlformats.org/drawingml/2006/main" xmlns:p="http://schemas.openxmlformats.org/presentationml/2006/main" xmlns:r="http://schemas.openxmlformats.org/officeDocument/2006/relationships">
+  <p:cSld>
+    <p:spTree>
+      <p:nvGrpSpPr>
+        <p:cNvPr id="1" name=""/>
+        <p:cNvGrpSpPr/>
+        <p:nvPr/>
+      </p:nvGrpSpPr>
+      <p:grpSpPr>
+        <a:xfrm>
+          <a:off x="0" y="0"/>
+          <a:ext cx="0" cy="0"/>
+          <a:chOff x="0" y="0"/>
+          <a:chExt cx="0" cy="0"/>
+        </a:xfrm>
+      </p:grpSpPr>
+      <p:sp>
+        <p:nvSpPr>
+          <p:cNvPr id="2" name="Slide Image Placeholder 1"/>
+          <p:cNvSpPr>
+            <a:spLocks noGrp="1"/>
+          </p:cNvSpPr>
+          <p:nvPr>
+            <p:ph type="sldImg" idx="2"/>
+          </p:nvPr>
+        </p:nvSpPr>
+        <p:spPr/>
+      </p:sp>
+      <p:sp>
+        <p:nvSpPr>
+          <p:cNvPr id="3" name="Notes Placeholder 2"/>
+          <p:cNvSpPr>
+            <a:spLocks noGrp="1"/>
+          </p:cNvSpPr>
+          <p:nvPr>
+            <p:ph type="body" idx="3" sz="quarter"/>
+          </p:nvPr>
+        </p:nvSpPr>
+        <p:spPr/>
+        <p:txBody>
+          <a:bodyPr/>
+          <a:lstStyle/>
+          <a:p>
+            <a:r>
+              <a:t>Stabilising per-receptor ranks needs ~9–16 replicate folds per complex (1,200–2,100 folds) — GPU-scale. Ranking binders on a single AlphaFold/Boltz run is common practice, and does not reproduce.</a:t>
+            </a:r>
+          </a:p>
+          <a:p/>
+          <a:p>
+            <a:r>
+              <a:t>The 95% range on the aggregate mean rank is [1.77, 2.27], always below chance; the median p across simulated re-runs is 0.054.</a:t>
+            </a:r>
+          </a:p>
+        </p:txBody>
+      </p:sp>
+      <p:sp>
+        <p:nvSpPr>
+          <p:cNvPr id="4" name="Slide Number Placeholder 3"/>
+          <p:cNvSpPr>
+            <a:spLocks noGrp="1"/>
+          </p:cNvSpPr>
+          <p:nvPr>
+            <p:ph type="sldNum" idx="5" sz="quarter"/>
+          </p:nvPr>
+        </p:nvSpPr>
+        <p:spPr/>
+      </p:sp>
+    </p:spTree>
+  </p:cSld>
+  <p:clrMapOvr>
+    <a:masterClrMapping/>
+  </p:clrMapOvr>
+</p:notes>
+</file>
+
+<file path=ppt/notesSlides/notesSlide7.xml><?xml version="1.0" encoding="utf-8"?>
+<p:notes xmlns:a="http://schemas.openxmlformats.org/drawingml/2006/main" xmlns:p="http://schemas.openxmlformats.org/presentationml/2006/main" xmlns:r="http://schemas.openxmlformats.org/officeDocument/2006/relationships">
+  <p:cSld>
+    <p:spTree>
+      <p:nvGrpSpPr>
+        <p:cNvPr id="1" name=""/>
+        <p:cNvGrpSpPr/>
+        <p:nvPr/>
+      </p:nvGrpSpPr>
+      <p:grpSpPr>
+        <a:xfrm>
+          <a:off x="0" y="0"/>
+          <a:ext cx="0" cy="0"/>
+          <a:chOff x="0" y="0"/>
+          <a:chExt cx="0" cy="0"/>
+        </a:xfrm>
+      </p:grpSpPr>
+      <p:sp>
+        <p:nvSpPr>
+          <p:cNvPr id="2" name="Slide Image Placeholder 1"/>
+          <p:cNvSpPr>
+            <a:spLocks noGrp="1"/>
+          </p:cNvSpPr>
+          <p:nvPr>
+            <p:ph type="sldImg" idx="2"/>
+          </p:nvPr>
+        </p:nvSpPr>
+        <p:spPr/>
+      </p:sp>
+      <p:sp>
+        <p:nvSpPr>
+          <p:cNvPr id="3" name="Notes Placeholder 2"/>
+          <p:cNvSpPr>
+            <a:spLocks noGrp="1"/>
+          </p:cNvSpPr>
+          <p:nvPr>
+            <p:ph type="body" idx="3" sz="quarter"/>
+          </p:nvPr>
+        </p:nvSpPr>
+        <p:spPr/>
+        <p:txBody>
+          <a:bodyPr/>
+          <a:lstStyle/>
+          <a:p>
+            <a:r>
+              <a:t>pDockQ multiplies interface pLDDT by a contact term — contacts run the WRONG way here (scrambles make more: 38.5 vs 32.9), cancelling the signal. Slide 28 shows why: at 10 sampling steps the backbone is not connected, and on converged structures the contact ordering reverses. pDockQ2, which swaps the contact term for a PAE term, repairs it (p = 0.797 → 0.00026).</a:t>
+            </a:r>
+          </a:p>
+          <a:p/>
+          <a:p>
+            <a:r>
+              <a:t>It also survives the reproducibility test that demoted ipTM, reproducing at p &lt; 0.05 in 100% of simulated re-runs.</a:t>
+            </a:r>
+          </a:p>
+        </p:txBody>
+      </p:sp>
+      <p:sp>
+        <p:nvSpPr>
+          <p:cNvPr id="4" name="Slide Number Placeholder 3"/>
+          <p:cNvSpPr>
+            <a:spLocks noGrp="1"/>
+          </p:cNvSpPr>
+          <p:nvPr>
+            <p:ph type="sldNum" idx="5" sz="quarter"/>
+          </p:nvPr>
+        </p:nvSpPr>
+        <p:spPr/>
+      </p:sp>
+    </p:spTree>
+  </p:cSld>
+  <p:clrMapOvr>
+    <a:masterClrMapping/>
+  </p:clrMapOvr>
+</p:notes>
+</file>
+
+<file path=ppt/notesSlides/notesSlide8.xml><?xml version="1.0" encoding="utf-8"?>
+<p:notes xmlns:a="http://schemas.openxmlformats.org/drawingml/2006/main" xmlns:p="http://schemas.openxmlformats.org/presentationml/2006/main" xmlns:r="http://schemas.openxmlformats.org/officeDocument/2006/relationships">
+  <p:cSld>
+    <p:spTree>
+      <p:nvGrpSpPr>
+        <p:cNvPr id="1" name=""/>
+        <p:cNvGrpSpPr/>
+        <p:nvPr/>
+      </p:nvGrpSpPr>
+      <p:grpSpPr>
+        <a:xfrm>
+          <a:off x="0" y="0"/>
+          <a:ext cx="0" cy="0"/>
+          <a:chOff x="0" y="0"/>
+          <a:chExt cx="0" cy="0"/>
+        </a:xfrm>
+      </p:grpSpPr>
+      <p:sp>
+        <p:nvSpPr>
+          <p:cNvPr id="2" name="Slide Image Placeholder 1"/>
+          <p:cNvSpPr>
+            <a:spLocks noGrp="1"/>
+          </p:cNvSpPr>
+          <p:nvPr>
+            <p:ph type="sldImg" idx="2"/>
+          </p:nvPr>
+        </p:nvSpPr>
+        <p:spPr/>
+      </p:sp>
+      <p:sp>
+        <p:nvSpPr>
+          <p:cNvPr id="3" name="Notes Placeholder 2"/>
+          <p:cNvSpPr>
+            <a:spLocks noGrp="1"/>
+          </p:cNvSpPr>
+          <p:nvPr>
+            <p:ph type="body" idx="3" sz="quarter"/>
+          </p:nvPr>
+        </p:nvSpPr>
+        <p:spPr/>
+        <p:txBody>
+          <a:bodyPr/>
+          <a:lstStyle/>
+          <a:p>
+            <a:r>
+              <a:t>This QUALIFIES slide 19. Half the pooled signal is peptide foldability, which slide 19 did not separate. What stands: the receptor responds to which peptide it is given. Not established: that the response is localised to the binding site.</a:t>
+            </a:r>
+          </a:p>
+          <a:p/>
+          <a:p>
+            <a:r>
+              <a:t>The receptor's own residues are placed better when given the right peptide, and a disordered peptide cannot do that, which is why this term survives the foldability objection. Every alanine arm drops 7-12 pLDDT, so both may sit near a floor.</a:t>
+            </a:r>
+          </a:p>
+        </p:txBody>
+      </p:sp>
+      <p:sp>
+        <p:nvSpPr>
+          <p:cNvPr id="4" name="Slide Number Placeholder 3"/>
+          <p:cNvSpPr>
+            <a:spLocks noGrp="1"/>
+          </p:cNvSpPr>
+          <p:nvPr>
+            <p:ph type="sldNum" idx="5" sz="quarter"/>
+          </p:nvPr>
+        </p:nvSpPr>
+        <p:spPr/>
+      </p:sp>
+    </p:spTree>
+  </p:cSld>
+  <p:clrMapOvr>
+    <a:masterClrMapping/>
+  </p:clrMapOvr>
+</p:notes>
+</file>
+
+<file path=ppt/notesSlides/notesSlide9.xml><?xml version="1.0" encoding="utf-8"?>
+<p:notes xmlns:a="http://schemas.openxmlformats.org/drawingml/2006/main" xmlns:p="http://schemas.openxmlformats.org/presentationml/2006/main" xmlns:r="http://schemas.openxmlformats.org/officeDocument/2006/relationships">
+  <p:cSld>
+    <p:spTree>
+      <p:nvGrpSpPr>
+        <p:cNvPr id="1" name=""/>
+        <p:cNvGrpSpPr/>
+        <p:nvPr/>
+      </p:nvGrpSpPr>
+      <p:grpSpPr>
+        <a:xfrm>
+          <a:off x="0" y="0"/>
+          <a:ext cx="0" cy="0"/>
+          <a:chOff x="0" y="0"/>
+          <a:chExt cx="0" cy="0"/>
+        </a:xfrm>
+      </p:grpSpPr>
+      <p:sp>
+        <p:nvSpPr>
+          <p:cNvPr id="2" name="Slide Image Placeholder 1"/>
+          <p:cNvSpPr>
+            <a:spLocks noGrp="1"/>
+          </p:cNvSpPr>
+          <p:nvPr>
+            <p:ph type="sldImg" idx="2"/>
+          </p:nvPr>
+        </p:nvSpPr>
+        <p:spPr/>
+      </p:sp>
+      <p:sp>
+        <p:nvSpPr>
+          <p:cNvPr id="3" name="Notes Placeholder 2"/>
+          <p:cNvSpPr>
+            <a:spLocks noGrp="1"/>
+          </p:cNvSpPr>
+          <p:nvPr>
+            <p:ph type="body" idx="3" sz="quarter"/>
+          </p:nvPr>
+        </p:nvSpPr>
+        <p:spPr/>
+        <p:txBody>
+          <a:bodyPr/>
+          <a:lstStyle/>
+          <a:p>
+            <a:r>
+              <a:t>Two claims weaken. Stock models are NOT signal-free — Boltz-1 separates on ipTM (p=0.0043). An earlier reading that the interface-pLDDT result is MODEL-DEPENDENT is WITHDRAWN: Boltz-1's p=0.067 was two non-binders diluting a 22-receptor panel, and goes to p=0.013 once they are removed. 'Settings explain the negatives' is too simple.</a:t>
+            </a:r>
+          </a:p>
+        </p:txBody>
+      </p:sp>
+      <p:sp>
+        <p:nvSpPr>
+          <p:cNvPr id="4" name="Slide Number Placeholder 3"/>
+          <p:cNvSpPr>
+            <a:spLocks noGrp="1"/>
+          </p:cNvSpPr>
+          <p:nvPr>
+            <p:ph type="sldNum" idx="5" sz="quarter"/>
+          </p:nvPr>
+        </p:nvSpPr>
+        <p:spPr/>
+      </p:sp>
+    </p:spTree>
+  </p:cSld>
+  <p:clrMapOvr>
+    <a:masterClrMapping/>
+  </p:clrMapOvr>
+</p:notes>
 </file>
 
 <file path=ppt/slideLayouts/slideLayout1.xml><?xml version="1.0" encoding="utf-8"?>
@@ -5360,61 +6848,6 @@
           </a:p>
         </p:txBody>
       </p:sp>
-      <p:sp>
-        <p:nvSpPr>
-          <p:cNvPr id="16" name="Rounded Rectangle 15"/>
-          <p:cNvSpPr/>
-          <p:nvPr/>
-        </p:nvSpPr>
-        <p:spPr>
-          <a:xfrm>
-            <a:off x="548640" y="5532120"/>
-            <a:ext cx="11155680" cy="777240"/>
-          </a:xfrm>
-          <a:prstGeom prst="roundRect">
-            <a:avLst/>
-          </a:prstGeom>
-          <a:solidFill>
-            <a:srgbClr val="FDF3E0"/>
-          </a:solidFill>
-          <a:ln>
-            <a:noFill/>
-          </a:ln>
-        </p:spPr>
-        <p:style>
-          <a:lnRef idx="1">
-            <a:schemeClr val="accent1"/>
-          </a:lnRef>
-          <a:fillRef idx="3">
-            <a:schemeClr val="accent1"/>
-          </a:fillRef>
-          <a:effectRef idx="2">
-            <a:schemeClr val="accent1"/>
-          </a:effectRef>
-          <a:fontRef idx="minor">
-            <a:schemeClr val="lt1"/>
-          </a:fontRef>
-        </p:style>
-        <p:txBody>
-          <a:bodyPr rtlCol="0" anchor="ctr" wrap="square"/>
-          <a:lstStyle/>
-          <a:p>
-            <a:pPr algn="ctr">
-              <a:spcAft>
-                <a:spcPts val="600"/>
-              </a:spcAft>
-            </a:pPr>
-            <a:r>
-              <a:rPr sz="1250" b="0">
-                <a:solidFill>
-                  <a:srgbClr val="8A5200"/>
-                </a:solidFill>
-              </a:rPr>
-              <a:t>⚠  Settings throughout are far below Boltz defaults — 10 sampling steps vs 200, 1 recycling vs 3, MSA 32 vs full. Slides 31–32 resolve this and the confound was real: at the intended settings the effect is 3–7× larger and the true binder ranks first 17 times in 22. Everything on slides 15–30 is a lower bound.</a:t>
-            </a:r>
-          </a:p>
-        </p:txBody>
-      </p:sp>
     </p:spTree>
   </p:cSld>
   <p:clrMapOvr>
@@ -5801,61 +7234,6 @@
           </a:p>
         </p:txBody>
       </p:sp>
-      <p:sp>
-        <p:nvSpPr>
-          <p:cNvPr id="9" name="Rounded Rectangle 8"/>
-          <p:cNvSpPr/>
-          <p:nvPr/>
-        </p:nvSpPr>
-        <p:spPr>
-          <a:xfrm>
-            <a:off x="548640" y="5257800"/>
-            <a:ext cx="11155680" cy="868680"/>
-          </a:xfrm>
-          <a:prstGeom prst="roundRect">
-            <a:avLst/>
-          </a:prstGeom>
-          <a:solidFill>
-            <a:srgbClr val="FDF3E0"/>
-          </a:solidFill>
-          <a:ln>
-            <a:noFill/>
-          </a:ln>
-        </p:spPr>
-        <p:style>
-          <a:lnRef idx="1">
-            <a:schemeClr val="accent1"/>
-          </a:lnRef>
-          <a:fillRef idx="3">
-            <a:schemeClr val="accent1"/>
-          </a:fillRef>
-          <a:effectRef idx="2">
-            <a:schemeClr val="accent1"/>
-          </a:effectRef>
-          <a:fontRef idx="minor">
-            <a:schemeClr val="lt1"/>
-          </a:fontRef>
-        </p:style>
-        <p:txBody>
-          <a:bodyPr rtlCol="0" anchor="ctr" wrap="square"/>
-          <a:lstStyle/>
-          <a:p>
-            <a:pPr algn="ctr">
-              <a:spcAft>
-                <a:spcPts val="600"/>
-              </a:spcAft>
-            </a:pPr>
-            <a:r>
-              <a:rPr sz="1250" b="0">
-                <a:solidFill>
-                  <a:srgbClr val="8A5200"/>
-                </a:solidFill>
-              </a:rPr>
-              <a:t>⚠  Scaling law 1.32·rank^−0.356 puts 10% error at rank ≈1414, against c_hidden² = 1024 — the low-rank form costs MORE activation memory than stock before it is accurate enough to substitute.</a:t>
-            </a:r>
-          </a:p>
-        </p:txBody>
-      </p:sp>
     </p:spTree>
   </p:cSld>
   <p:clrMapOvr>
@@ -6706,61 +8084,6 @@
           </a:p>
         </p:txBody>
       </p:sp>
-      <p:sp>
-        <p:nvSpPr>
-          <p:cNvPr id="12" name="Rounded Rectangle 11"/>
-          <p:cNvSpPr/>
-          <p:nvPr/>
-        </p:nvSpPr>
-        <p:spPr>
-          <a:xfrm>
-            <a:off x="548640" y="5394960"/>
-            <a:ext cx="11155680" cy="868680"/>
-          </a:xfrm>
-          <a:prstGeom prst="roundRect">
-            <a:avLst/>
-          </a:prstGeom>
-          <a:solidFill>
-            <a:srgbClr val="FDF3E0"/>
-          </a:solidFill>
-          <a:ln>
-            <a:noFill/>
-          </a:ln>
-        </p:spPr>
-        <p:style>
-          <a:lnRef idx="1">
-            <a:schemeClr val="accent1"/>
-          </a:lnRef>
-          <a:fillRef idx="3">
-            <a:schemeClr val="accent1"/>
-          </a:fillRef>
-          <a:effectRef idx="2">
-            <a:schemeClr val="accent1"/>
-          </a:effectRef>
-          <a:fontRef idx="minor">
-            <a:schemeClr val="lt1"/>
-          </a:fontRef>
-        </p:style>
-        <p:txBody>
-          <a:bodyPr rtlCol="0" anchor="ctr" wrap="square"/>
-          <a:lstStyle/>
-          <a:p>
-            <a:pPr algn="ctr">
-              <a:spcAft>
-                <a:spcPts val="600"/>
-              </a:spcAft>
-            </a:pPr>
-            <a:r>
-              <a:rPr sz="1250" b="0">
-                <a:solidFill>
-                  <a:srgbClr val="8A5200"/>
-                </a:solidFill>
-              </a:rPr>
-              <a:t>⚠  ipTM responds largely to peptide COMPOSITION. Any sequence-order effect is at most 63% of the composition effect. A ridge regression on composition independently beat the distilled surrogate (+0.103 vs −0.034).</a:t>
-            </a:r>
-          </a:p>
-        </p:txBody>
-      </p:sp>
     </p:spTree>
   </p:cSld>
   <p:clrMapOvr>
@@ -7359,7 +8682,7 @@
               </a:spcAft>
             </a:pPr>
             <a:r>
-              <a:rPr sz="1500" b="0">
+              <a:rPr sz="1400" b="0">
                 <a:solidFill>
                   <a:srgbClr val="0B2B52"/>
                 </a:solidFill>
@@ -7374,12 +8697,12 @@
               </a:spcAft>
             </a:pPr>
             <a:r>
-              <a:rPr sz="1500" b="0">
+              <a:rPr sz="1400" b="0">
                 <a:solidFill>
                   <a:srgbClr val="0B2B52"/>
                 </a:solidFill>
               </a:rPr>
-              <a:t>•  Pooled within-complex ipTM SD  0.0628   (median range 0.127)</a:t>
+              <a:t>•  within-complex ipTM SD  0.0628   (median range 0.127)</a:t>
             </a:r>
           </a:p>
           <a:p>
@@ -7389,12 +8712,12 @@
               </a:spcAft>
             </a:pPr>
             <a:r>
-              <a:rPr sz="1500" b="0">
+              <a:rPr sz="1400" b="0">
                 <a:solidFill>
                   <a:srgbClr val="0B2B52"/>
                 </a:solidFill>
               </a:rPr>
-              <a:t>•  Cognate − decoy  +0.0698 = 1.11 × SD    comparable to noise</a:t>
+              <a:t>•  cognate − decoy  +0.0698  =  1.11 × SD   —  comparable to noise</a:t>
             </a:r>
           </a:p>
           <a:p>
@@ -7404,12 +8727,12 @@
               </a:spcAft>
             </a:pPr>
             <a:r>
-              <a:rPr sz="1500" b="0">
+              <a:rPr sz="1400" b="0">
                 <a:solidFill>
                   <a:srgbClr val="0B2B52"/>
                 </a:solidFill>
               </a:rPr>
-              <a:t>•  Per-receptor rank flips for 4 of 4 receptors — 6YOO spans #1 to #4 on identical input</a:t>
+              <a:t>•  per-receptor rank flips for 4 of 4;  6YOO spans #1 to #4 on identical input</a:t>
             </a:r>
           </a:p>
           <a:p>
@@ -7419,82 +8742,12 @@
               </a:spcAft>
             </a:pPr>
             <a:r>
-              <a:rPr sz="1500" b="0">
+              <a:rPr sz="1400" b="0">
                 <a:solidFill>
                   <a:srgbClr val="0B2B52"/>
                 </a:solidFill>
               </a:rPr>
-              <a:t>•  Aggregate survives: mean rank 2.03, 95% range [1.77, 2.27], always below chance …</a:t>
-            </a:r>
-          </a:p>
-          <a:p>
-            <a:pPr>
-              <a:spcAft>
-                <a:spcPts val="600"/>
-              </a:spcAft>
-            </a:pPr>
-            <a:r>
-              <a:rPr sz="1500" b="0">
-                <a:solidFill>
-                  <a:srgbClr val="0B2B52"/>
-                </a:solidFill>
-              </a:rPr>
-              <a:t>•  … but p &lt; 0.05 in only 49% of simulated re-runs (median p = 0.054)</a:t>
-            </a:r>
-          </a:p>
-        </p:txBody>
-      </p:sp>
-      <p:sp>
-        <p:nvSpPr>
-          <p:cNvPr id="9" name="Rounded Rectangle 8"/>
-          <p:cNvSpPr/>
-          <p:nvPr/>
-        </p:nvSpPr>
-        <p:spPr>
-          <a:xfrm>
-            <a:off x="548640" y="5440680"/>
-            <a:ext cx="11155680" cy="868680"/>
-          </a:xfrm>
-          <a:prstGeom prst="roundRect">
-            <a:avLst/>
-          </a:prstGeom>
-          <a:solidFill>
-            <a:srgbClr val="FDF3E0"/>
-          </a:solidFill>
-          <a:ln>
-            <a:noFill/>
-          </a:ln>
-        </p:spPr>
-        <p:style>
-          <a:lnRef idx="1">
-            <a:schemeClr val="accent1"/>
-          </a:lnRef>
-          <a:fillRef idx="3">
-            <a:schemeClr val="accent1"/>
-          </a:fillRef>
-          <a:effectRef idx="2">
-            <a:schemeClr val="accent1"/>
-          </a:effectRef>
-          <a:fontRef idx="minor">
-            <a:schemeClr val="lt1"/>
-          </a:fontRef>
-        </p:style>
-        <p:txBody>
-          <a:bodyPr rtlCol="0" anchor="ctr" wrap="square"/>
-          <a:lstStyle/>
-          <a:p>
-            <a:pPr algn="ctr">
-              <a:spcAft>
-                <a:spcPts val="600"/>
-              </a:spcAft>
-            </a:pPr>
-            <a:r>
-              <a:rPr sz="1250" b="0">
-                <a:solidFill>
-                  <a:srgbClr val="8A5200"/>
-                </a:solidFill>
-              </a:rPr>
-              <a:t>⚠  Stabilising per-receptor ranks needs ~9–16 replicate folds per complex (1,200–2,100 folds) — GPU-scale. Ranking binders on a single AlphaFold/Boltz run is common practice, and does not reproduce.</a:t>
+              <a:t>•  aggregate survives (mean rank 2.03) but p &lt; 0.05 in only 49% of re-runs</a:t>
             </a:r>
           </a:p>
         </p:txBody>
@@ -8672,67 +9925,6 @@
           </a:p>
         </p:txBody>
       </p:sp>
-      <p:sp>
-        <p:nvSpPr>
-          <p:cNvPr id="11" name="Rounded Rectangle 10"/>
-          <p:cNvSpPr/>
-          <p:nvPr/>
-        </p:nvSpPr>
-        <p:spPr>
-          <a:xfrm>
-            <a:off x="502920" y="4069080"/>
-            <a:ext cx="11155680" cy="822960"/>
-          </a:xfrm>
-          <a:prstGeom prst="roundRect">
-            <a:avLst/>
-          </a:prstGeom>
-          <a:solidFill>
-            <a:srgbClr val="FDF3E0"/>
-          </a:solidFill>
-          <a:ln w="12700">
-            <a:solidFill>
-              <a:srgbClr val="C77700"/>
-            </a:solidFill>
-          </a:ln>
-          <a:effectLst/>
-        </p:spPr>
-        <p:style>
-          <a:lnRef idx="1">
-            <a:schemeClr val="accent1"/>
-          </a:lnRef>
-          <a:fillRef idx="3">
-            <a:schemeClr val="accent1"/>
-          </a:fillRef>
-          <a:effectRef idx="2">
-            <a:schemeClr val="accent1"/>
-          </a:effectRef>
-          <a:fontRef idx="minor">
-            <a:schemeClr val="lt1"/>
-          </a:fontRef>
-        </p:style>
-        <p:txBody>
-          <a:bodyPr rtlCol="0" anchor="ctr" lIns="164592" wrap="square"/>
-          <a:lstStyle/>
-          <a:p>
-            <a:pPr algn="ctr">
-              <a:spcBef>
-                <a:spcPts val="0"/>
-              </a:spcBef>
-              <a:spcAft>
-                <a:spcPts val="400"/>
-              </a:spcAft>
-            </a:pPr>
-            <a:r>
-              <a:rPr sz="1250" b="0" i="0">
-                <a:solidFill>
-                  <a:srgbClr val="8A5200"/>
-                </a:solidFill>
-              </a:rPr>
-              <a:t>⚠  Honest scope: the headline speedups in this report are for the distilled surrogate. Track A was then tested end-to-end: the ipTM reference does not rank binders, so the screening objective is not reachable through it (slides 14–18).</a:t>
-            </a:r>
-          </a:p>
-        </p:txBody>
-      </p:sp>
     </p:spTree>
   </p:cSld>
   <p:clrMapOvr>
@@ -9034,12 +10226,12 @@
               </a:spcAft>
             </a:pPr>
             <a:r>
-              <a:rPr sz="1450" b="0">
+              <a:rPr sz="1400" b="0">
                 <a:solidFill>
                   <a:srgbClr val="0B2B52"/>
                 </a:solidFill>
               </a:rPr>
-              <a:t>Six interface measures, same complexes, same tests. Only one beats a cognate's OWN scramble — the test that fixes composition and destroys only order:</a:t>
+              <a:t>Six interface measures, same complexes, same tests.</a:t>
             </a:r>
           </a:p>
           <a:p>
@@ -9049,12 +10241,12 @@
               </a:spcAft>
             </a:pPr>
             <a:r>
-              <a:rPr sz="1450" b="0">
+              <a:rPr sz="1400" b="0">
                 <a:solidFill>
                   <a:srgbClr val="0B2B52"/>
                 </a:solidFill>
               </a:rPr>
-              <a:t>•  ipTM  p = 0.42        •  pDockQ  p = 0.80        •  contacts / density / buried SASA  p = 0.05–0.45</a:t>
+              <a:t>Only one beats a cognate's OWN scramble — composition fixed, order destroyed:</a:t>
             </a:r>
           </a:p>
           <a:p>
@@ -9064,12 +10256,12 @@
               </a:spcAft>
             </a:pPr>
             <a:r>
-              <a:rPr sz="1450" b="0">
+              <a:rPr sz="1400" b="0">
                 <a:solidFill>
                   <a:srgbClr val="0B2B52"/>
                 </a:solidFill>
               </a:rPr>
-              <a:t>•  INTERFACE pLDDT  p &lt; 0.0001    rank 1.91 of 4 (chance 2.50)</a:t>
+              <a:t>•  ipTM p = 0.42   •  pDockQ p = 0.80   •  contacts / density / SASA p = 0.05–0.45</a:t>
             </a:r>
           </a:p>
           <a:p>
@@ -9079,11 +10271,26 @@
               </a:spcAft>
             </a:pPr>
             <a:r>
-              <a:rPr sz="1450" b="0">
+              <a:rPr sz="1400" b="0">
                 <a:solidFill>
                   <a:srgbClr val="0B2B52"/>
                 </a:solidFill>
               </a:rPr>
+              <a:t>•  INTERFACE pLDDT  p &lt; 0.0001,  rank 1.91 of 4  (chance 2.50)</a:t>
+            </a:r>
+          </a:p>
+          <a:p>
+            <a:pPr>
+              <a:spcAft>
+                <a:spcPts val="600"/>
+              </a:spcAft>
+            </a:pPr>
+            <a:r>
+              <a:rPr sz="1400" b="0">
+                <a:solidFill>
+                  <a:srgbClr val="0B2B52"/>
+                </a:solidFill>
+              </a:rPr>
               <a:t/>
             </a:r>
           </a:p>
@@ -9094,67 +10301,12 @@
               </a:spcAft>
             </a:pPr>
             <a:r>
-              <a:rPr sz="1450" b="0">
+              <a:rPr sz="1400" b="0">
                 <a:solidFill>
                   <a:srgbClr val="0B2B52"/>
                 </a:solidFill>
               </a:rPr>
-              <a:t>It also survives the reproducibility test that demoted ipTM: effect +3.30 against run-to-run SD 1.92 = 1.72× noise, where ipTM managed 0.20× — an 8.6× better ratio. Reproduces at p &lt; 0.05 in 100% of re-runs.</a:t>
-            </a:r>
-          </a:p>
-        </p:txBody>
-      </p:sp>
-      <p:sp>
-        <p:nvSpPr>
-          <p:cNvPr id="9" name="Rounded Rectangle 8"/>
-          <p:cNvSpPr/>
-          <p:nvPr/>
-        </p:nvSpPr>
-        <p:spPr>
-          <a:xfrm>
-            <a:off x="548640" y="5440680"/>
-            <a:ext cx="11155680" cy="868680"/>
-          </a:xfrm>
-          <a:prstGeom prst="roundRect">
-            <a:avLst/>
-          </a:prstGeom>
-          <a:solidFill>
-            <a:srgbClr val="FDF3E0"/>
-          </a:solidFill>
-          <a:ln>
-            <a:noFill/>
-          </a:ln>
-        </p:spPr>
-        <p:style>
-          <a:lnRef idx="1">
-            <a:schemeClr val="accent1"/>
-          </a:lnRef>
-          <a:fillRef idx="3">
-            <a:schemeClr val="accent1"/>
-          </a:fillRef>
-          <a:effectRef idx="2">
-            <a:schemeClr val="accent1"/>
-          </a:effectRef>
-          <a:fontRef idx="minor">
-            <a:schemeClr val="lt1"/>
-          </a:fontRef>
-        </p:style>
-        <p:txBody>
-          <a:bodyPr rtlCol="0" anchor="ctr" wrap="square"/>
-          <a:lstStyle/>
-          <a:p>
-            <a:pPr algn="ctr">
-              <a:spcAft>
-                <a:spcPts val="600"/>
-              </a:spcAft>
-            </a:pPr>
-            <a:r>
-              <a:rPr sz="1250" b="0">
-                <a:solidFill>
-                  <a:srgbClr val="8A5200"/>
-                </a:solidFill>
-              </a:rPr>
-              <a:t>⚠  pDockQ multiplies interface pLDDT by a contact term — contacts run the WRONG way here (scrambles make more: 38.5 vs 32.9), cancelling the signal. Slide 28 shows why: at 10 sampling steps the backbone is not connected, and on converged structures the contact ordering reverses. pDockQ2, which swaps the contact term for a PAE term, repairs it (p = 0.797 → 0.00026).</a:t>
+              <a:t>Effect-to-noise: +3.30 / SD 1.92 = 1.72×, against ipTM's 0.20× — 8.6× better.</a:t>
             </a:r>
           </a:p>
         </p:txBody>
@@ -9762,7 +10914,7 @@
                   <a:srgbClr val="0B2B52"/>
                 </a:solidFill>
               </a:rPr>
-              <a:t>Splitting the metric by chain — no new folding:</a:t>
+              <a:t>Split by chain — no new folding:</a:t>
             </a:r>
           </a:p>
           <a:p>
@@ -9777,7 +10929,7 @@
                   <a:srgbClr val="0B2B52"/>
                 </a:solidFill>
               </a:rPr>
-              <a:t>•  peptide side  +5.25   but whole-chain peptide pLDDT  +4.87   →  mostly FOLDABILITY, not interface</a:t>
+              <a:t>•  peptide side +5.25  vs  whole-chain peptide +4.87  →  mostly FOLDABILITY</a:t>
             </a:r>
           </a:p>
           <a:p>
@@ -9792,7 +10944,7 @@
                   <a:srgbClr val="0B2B52"/>
                 </a:solidFill>
               </a:rPr>
-              <a:t>•  RECEPTOR side  +2.38  (p = 6e-5)  →  the receptor's own residues are placed better when given the right peptide.</a:t>
+              <a:t>•  RECEPTOR side +2.38 (p = 6e-5)  →  survives the objection</a:t>
             </a:r>
           </a:p>
           <a:p>
@@ -9807,7 +10959,7 @@
                   <a:srgbClr val="0B2B52"/>
                 </a:solidFill>
               </a:rPr>
-              <a:t>   A disordered peptide cannot do that. This term survives the objection.</a:t>
+              <a:t/>
             </a:r>
           </a:p>
           <a:p>
@@ -9822,7 +10974,7 @@
                   <a:srgbClr val="0B2B52"/>
                 </a:solidFill>
               </a:rPr>
-              <a:t/>
+              <a:t>Tied to the binding site?  Alanine scan, 88 folds:</a:t>
             </a:r>
           </a:p>
           <a:p>
@@ -9837,7 +10989,7 @@
                   <a:srgbClr val="0B2B52"/>
                 </a:solidFill>
               </a:rPr>
-              <a:t>Is the response tied to the binding site?  88 folds, alanine scan:</a:t>
+              <a:t>•  interface→Ala 36.77  vs  surface→Ala 38.62   diff −1.84, p = 0.244</a:t>
             </a:r>
           </a:p>
           <a:p>
@@ -9852,77 +11004,7 @@
                   <a:srgbClr val="0B2B52"/>
                 </a:solidFill>
               </a:rPr>
-              <a:t>•  interface→Ala 36.77  vs  surface→Ala 38.62   diff −1.84, p = 0.244 — right direction, not significant</a:t>
-            </a:r>
-          </a:p>
-          <a:p>
-            <a:pPr>
-              <a:spcAft>
-                <a:spcPts val="600"/>
-              </a:spcAft>
-            </a:pPr>
-            <a:r>
-              <a:rPr sz="1400" b="0">
-                <a:solidFill>
-                  <a:srgbClr val="0B2B52"/>
-                </a:solidFill>
-              </a:rPr>
-              <a:t>•  80% power would need 123 receptors; every arm drops 7–12 pLDDT, so both may sit near a floor.</a:t>
-            </a:r>
-          </a:p>
-        </p:txBody>
-      </p:sp>
-      <p:sp>
-        <p:nvSpPr>
-          <p:cNvPr id="9" name="Rounded Rectangle 8"/>
-          <p:cNvSpPr/>
-          <p:nvPr/>
-        </p:nvSpPr>
-        <p:spPr>
-          <a:xfrm>
-            <a:off x="548640" y="5440680"/>
-            <a:ext cx="11155680" cy="868680"/>
-          </a:xfrm>
-          <a:prstGeom prst="roundRect">
-            <a:avLst/>
-          </a:prstGeom>
-          <a:solidFill>
-            <a:srgbClr val="FDF3E0"/>
-          </a:solidFill>
-          <a:ln>
-            <a:noFill/>
-          </a:ln>
-        </p:spPr>
-        <p:style>
-          <a:lnRef idx="1">
-            <a:schemeClr val="accent1"/>
-          </a:lnRef>
-          <a:fillRef idx="3">
-            <a:schemeClr val="accent1"/>
-          </a:fillRef>
-          <a:effectRef idx="2">
-            <a:schemeClr val="accent1"/>
-          </a:effectRef>
-          <a:fontRef idx="minor">
-            <a:schemeClr val="lt1"/>
-          </a:fontRef>
-        </p:style>
-        <p:txBody>
-          <a:bodyPr rtlCol="0" anchor="ctr" wrap="square"/>
-          <a:lstStyle/>
-          <a:p>
-            <a:pPr algn="ctr">
-              <a:spcAft>
-                <a:spcPts val="600"/>
-              </a:spcAft>
-            </a:pPr>
-            <a:r>
-              <a:rPr sz="1250" b="0">
-                <a:solidFill>
-                  <a:srgbClr val="8A5200"/>
-                </a:solidFill>
-              </a:rPr>
-              <a:t>⚠  This QUALIFIES slide 19. Half the pooled signal is peptide foldability, which slide 19 did not separate. What stands: the receptor responds to which peptide it is given. Not established: that the response is localised to the binding site.</a:t>
+              <a:t>•  right direction, not significant — 80% power needs 123 receptors</a:t>
             </a:r>
           </a:p>
         </p:txBody>
@@ -10358,61 +11440,6 @@
           </a:p>
         </p:txBody>
       </p:sp>
-      <p:sp>
-        <p:nvSpPr>
-          <p:cNvPr id="9" name="Rounded Rectangle 8"/>
-          <p:cNvSpPr/>
-          <p:nvPr/>
-        </p:nvSpPr>
-        <p:spPr>
-          <a:xfrm>
-            <a:off x="548640" y="5486400"/>
-            <a:ext cx="11155680" cy="868680"/>
-          </a:xfrm>
-          <a:prstGeom prst="roundRect">
-            <a:avLst/>
-          </a:prstGeom>
-          <a:solidFill>
-            <a:srgbClr val="FDF3E0"/>
-          </a:solidFill>
-          <a:ln>
-            <a:noFill/>
-          </a:ln>
-        </p:spPr>
-        <p:style>
-          <a:lnRef idx="1">
-            <a:schemeClr val="accent1"/>
-          </a:lnRef>
-          <a:fillRef idx="3">
-            <a:schemeClr val="accent1"/>
-          </a:fillRef>
-          <a:effectRef idx="2">
-            <a:schemeClr val="accent1"/>
-          </a:effectRef>
-          <a:fontRef idx="minor">
-            <a:schemeClr val="lt1"/>
-          </a:fontRef>
-        </p:style>
-        <p:txBody>
-          <a:bodyPr rtlCol="0" anchor="ctr" wrap="square"/>
-          <a:lstStyle/>
-          <a:p>
-            <a:pPr algn="ctr">
-              <a:spcAft>
-                <a:spcPts val="600"/>
-              </a:spcAft>
-            </a:pPr>
-            <a:r>
-              <a:rPr sz="1250" b="0">
-                <a:solidFill>
-                  <a:srgbClr val="8A5200"/>
-                </a:solidFill>
-              </a:rPr>
-              <a:t>⚠  Two claims weaken. Stock models are NOT signal-free — Boltz-1 separates on ipTM (p=0.0043). An earlier reading that the interface-pLDDT result is MODEL-DEPENDENT is WITHDRAWN: Boltz-1's p=0.067 was two non-binders diluting a 22-receptor panel, and goes to p=0.013 once they are removed. 'Settings explain the negatives' is too simple.</a:t>
-            </a:r>
-          </a:p>
-        </p:txBody>
-      </p:sp>
     </p:spTree>
   </p:cSld>
   <p:clrMapOvr>
@@ -10655,61 +11682,6 @@
           </a:prstGeom>
         </p:spPr>
       </p:pic>
-      <p:sp>
-        <p:nvSpPr>
-          <p:cNvPr id="8" name="Rounded Rectangle 7"/>
-          <p:cNvSpPr/>
-          <p:nvPr/>
-        </p:nvSpPr>
-        <p:spPr>
-          <a:xfrm>
-            <a:off x="548640" y="5532120"/>
-            <a:ext cx="11155680" cy="777240"/>
-          </a:xfrm>
-          <a:prstGeom prst="roundRect">
-            <a:avLst/>
-          </a:prstGeom>
-          <a:solidFill>
-            <a:srgbClr val="FDF3E0"/>
-          </a:solidFill>
-          <a:ln>
-            <a:noFill/>
-          </a:ln>
-        </p:spPr>
-        <p:style>
-          <a:lnRef idx="1">
-            <a:schemeClr val="accent1"/>
-          </a:lnRef>
-          <a:fillRef idx="3">
-            <a:schemeClr val="accent1"/>
-          </a:fillRef>
-          <a:effectRef idx="2">
-            <a:schemeClr val="accent1"/>
-          </a:effectRef>
-          <a:fontRef idx="minor">
-            <a:schemeClr val="lt1"/>
-          </a:fontRef>
-        </p:style>
-        <p:txBody>
-          <a:bodyPr rtlCol="0" anchor="ctr" wrap="square"/>
-          <a:lstStyle/>
-          <a:p>
-            <a:pPr algn="ctr">
-              <a:spcAft>
-                <a:spcPts val="600"/>
-              </a:spcAft>
-            </a:pPr>
-            <a:r>
-              <a:rPr sz="1250" b="0">
-                <a:solidFill>
-                  <a:srgbClr val="8A5200"/>
-                </a:solidFill>
-              </a:rPr>
-              <a:t>Effects normalised by the run-to-run noise of Section 7.5 so metrics on different scales compare. DeCAF vs Boltz-1 isolates few-step training; the Boltz-2 arm ran on CPU, the others on MPS.</a:t>
-            </a:r>
-          </a:p>
-        </p:txBody>
-      </p:sp>
     </p:spTree>
   </p:cSld>
   <p:clrMapOvr>
@@ -11271,61 +12243,6 @@
                 </a:solidFill>
               </a:rPr>
               <a:t>A screening figure quoted without saying whether the complexes were in training is about twice as good as it should be.</a:t>
-            </a:r>
-          </a:p>
-        </p:txBody>
-      </p:sp>
-      <p:sp>
-        <p:nvSpPr>
-          <p:cNvPr id="13" name="Rounded Rectangle 12"/>
-          <p:cNvSpPr/>
-          <p:nvPr/>
-        </p:nvSpPr>
-        <p:spPr>
-          <a:xfrm>
-            <a:off x="548640" y="5669280"/>
-            <a:ext cx="11155680" cy="868680"/>
-          </a:xfrm>
-          <a:prstGeom prst="roundRect">
-            <a:avLst/>
-          </a:prstGeom>
-          <a:solidFill>
-            <a:srgbClr val="FDF3E0"/>
-          </a:solidFill>
-          <a:ln>
-            <a:noFill/>
-          </a:ln>
-        </p:spPr>
-        <p:style>
-          <a:lnRef idx="1">
-            <a:schemeClr val="accent1"/>
-          </a:lnRef>
-          <a:fillRef idx="3">
-            <a:schemeClr val="accent1"/>
-          </a:fillRef>
-          <a:effectRef idx="2">
-            <a:schemeClr val="accent1"/>
-          </a:effectRef>
-          <a:fontRef idx="minor">
-            <a:schemeClr val="lt1"/>
-          </a:fontRef>
-        </p:style>
-        <p:txBody>
-          <a:bodyPr rtlCol="0" anchor="ctr" wrap="square"/>
-          <a:lstStyle/>
-          <a:p>
-            <a:pPr algn="ctr">
-              <a:spcAft>
-                <a:spcPts val="600"/>
-              </a:spcAft>
-            </a:pPr>
-            <a:r>
-              <a:rPr sz="1250" b="0">
-                <a:solidFill>
-                  <a:srgbClr val="8A5200"/>
-                </a:solidFill>
-              </a:rPr>
-              <a:t>Not homology-decontaminated, and cannot be: 0 of 22 held-out receptors clear 30% identity to the pre-cutoff PDB (median 1.000), and neither does a random sample of the whole candidate pool. What the split isolates is complex-level novelty with receptor familiarity held constant.</a:t>
             </a:r>
           </a:p>
         </p:txBody>
@@ -11999,61 +12916,6 @@
           </a:p>
         </p:txBody>
       </p:sp>
-      <p:sp>
-        <p:nvSpPr>
-          <p:cNvPr id="11" name="Rounded Rectangle 10"/>
-          <p:cNvSpPr/>
-          <p:nvPr/>
-        </p:nvSpPr>
-        <p:spPr>
-          <a:xfrm>
-            <a:off x="548640" y="5897880"/>
-            <a:ext cx="11155680" cy="868680"/>
-          </a:xfrm>
-          <a:prstGeom prst="roundRect">
-            <a:avLst/>
-          </a:prstGeom>
-          <a:solidFill>
-            <a:srgbClr val="FDF3E0"/>
-          </a:solidFill>
-          <a:ln>
-            <a:noFill/>
-          </a:ln>
-        </p:spPr>
-        <p:style>
-          <a:lnRef idx="1">
-            <a:schemeClr val="accent1"/>
-          </a:lnRef>
-          <a:fillRef idx="3">
-            <a:schemeClr val="accent1"/>
-          </a:fillRef>
-          <a:effectRef idx="2">
-            <a:schemeClr val="accent1"/>
-          </a:effectRef>
-          <a:fontRef idx="minor">
-            <a:schemeClr val="lt1"/>
-          </a:fontRef>
-        </p:style>
-        <p:txBody>
-          <a:bodyPr rtlCol="0" anchor="ctr" wrap="square"/>
-          <a:lstStyle/>
-          <a:p>
-            <a:pPr algn="ctr">
-              <a:spcAft>
-                <a:spcPts val="600"/>
-              </a:spcAft>
-            </a:pPr>
-            <a:r>
-              <a:rPr sz="1250" b="0">
-                <a:solidFill>
-                  <a:srgbClr val="8A5200"/>
-                </a:solidFill>
-              </a:rPr>
-              <a:t>The methodological lesson is sharper than the scientific one: a single unseeded fold is not a measurement, and on this evidence neither are two.</a:t>
-            </a:r>
-          </a:p>
-        </p:txBody>
-      </p:sp>
     </p:spTree>
   </p:cSld>
   <p:clrMapOvr>
@@ -12985,61 +13847,6 @@
           </a:p>
         </p:txBody>
       </p:sp>
-      <p:sp>
-        <p:nvSpPr>
-          <p:cNvPr id="12" name="Rounded Rectangle 11"/>
-          <p:cNvSpPr/>
-          <p:nvPr/>
-        </p:nvSpPr>
-        <p:spPr>
-          <a:xfrm>
-            <a:off x="548640" y="5989320"/>
-            <a:ext cx="11155680" cy="868680"/>
-          </a:xfrm>
-          <a:prstGeom prst="roundRect">
-            <a:avLst/>
-          </a:prstGeom>
-          <a:solidFill>
-            <a:srgbClr val="FDF3E0"/>
-          </a:solidFill>
-          <a:ln>
-            <a:noFill/>
-          </a:ln>
-        </p:spPr>
-        <p:style>
-          <a:lnRef idx="1">
-            <a:schemeClr val="accent1"/>
-          </a:lnRef>
-          <a:fillRef idx="3">
-            <a:schemeClr val="accent1"/>
-          </a:fillRef>
-          <a:effectRef idx="2">
-            <a:schemeClr val="accent1"/>
-          </a:effectRef>
-          <a:fontRef idx="minor">
-            <a:schemeClr val="lt1"/>
-          </a:fontRef>
-        </p:style>
-        <p:txBody>
-          <a:bodyPr rtlCol="0" anchor="ctr" wrap="square"/>
-          <a:lstStyle/>
-          <a:p>
-            <a:pPr algn="ctr">
-              <a:spcAft>
-                <a:spcPts val="600"/>
-              </a:spcAft>
-            </a:pPr>
-            <a:r>
-              <a:rPr sz="1250" b="0">
-                <a:solidFill>
-                  <a:srgbClr val="8A5200"/>
-                </a:solidFill>
-              </a:rPr>
-              <a:t>Physics rescoring on converged structures still does not help: PRODIGY ΔG reaches AUC 0.563 against 0.856 for interface pLDDT, and combining them costs 0.033. A sequence model trained on 96M interactions (MINT) reaches 0.614 zero-shot — structure wins here, contrary to recent affinity-regression results.</a:t>
-            </a:r>
-          </a:p>
-        </p:txBody>
-      </p:sp>
     </p:spTree>
   </p:cSld>
   <p:clrMapOvr>
@@ -13605,61 +14412,6 @@
           </a:p>
         </p:txBody>
       </p:sp>
-      <p:sp>
-        <p:nvSpPr>
-          <p:cNvPr id="13" name="Rounded Rectangle 12"/>
-          <p:cNvSpPr/>
-          <p:nvPr/>
-        </p:nvSpPr>
-        <p:spPr>
-          <a:xfrm>
-            <a:off x="548640" y="5623560"/>
-            <a:ext cx="11155680" cy="868680"/>
-          </a:xfrm>
-          <a:prstGeom prst="roundRect">
-            <a:avLst/>
-          </a:prstGeom>
-          <a:solidFill>
-            <a:srgbClr val="FDF3E0"/>
-          </a:solidFill>
-          <a:ln>
-            <a:noFill/>
-          </a:ln>
-        </p:spPr>
-        <p:style>
-          <a:lnRef idx="1">
-            <a:schemeClr val="accent1"/>
-          </a:lnRef>
-          <a:fillRef idx="3">
-            <a:schemeClr val="accent1"/>
-          </a:fillRef>
-          <a:effectRef idx="2">
-            <a:schemeClr val="accent1"/>
-          </a:effectRef>
-          <a:fontRef idx="minor">
-            <a:schemeClr val="lt1"/>
-          </a:fontRef>
-        </p:style>
-        <p:txBody>
-          <a:bodyPr rtlCol="0" anchor="ctr" wrap="square"/>
-          <a:lstStyle/>
-          <a:p>
-            <a:pPr algn="ctr">
-              <a:spcAft>
-                <a:spcPts val="600"/>
-              </a:spcAft>
-            </a:pPr>
-            <a:r>
-              <a:rPr sz="1250" b="0">
-                <a:solidFill>
-                  <a:srgbClr val="8A5200"/>
-                </a:solidFill>
-              </a:rPr>
-              <a:t>Not a better score — the same scores read as a two-way competition, so its power comes from the structure of the screen, not the model, and the Section 7.9 ceiling does not apply. Costs 5-10x folds at deployment. Caveat: 7-13 calls per combination, so a reported 100% is 8 of 8.</a:t>
-            </a:r>
-          </a:p>
-        </p:txBody>
-      </p:sp>
     </p:spTree>
   </p:cSld>
   <p:clrMapOvr>
@@ -14812,61 +15564,6 @@
                 </a:solidFill>
               </a:rPr>
               <a:t>Every peptide lands in the same correct pocket, then sits 8-10 A differently within it on each draw.</a:t>
-            </a:r>
-          </a:p>
-        </p:txBody>
-      </p:sp>
-      <p:sp>
-        <p:nvSpPr>
-          <p:cNvPr id="11" name="Rounded Rectangle 10"/>
-          <p:cNvSpPr/>
-          <p:nvPr/>
-        </p:nvSpPr>
-        <p:spPr>
-          <a:xfrm>
-            <a:off x="548640" y="5943600"/>
-            <a:ext cx="11155680" cy="868680"/>
-          </a:xfrm>
-          <a:prstGeom prst="roundRect">
-            <a:avLst/>
-          </a:prstGeom>
-          <a:solidFill>
-            <a:srgbClr val="FDF3E0"/>
-          </a:solidFill>
-          <a:ln>
-            <a:noFill/>
-          </a:ln>
-        </p:spPr>
-        <p:style>
-          <a:lnRef idx="1">
-            <a:schemeClr val="accent1"/>
-          </a:lnRef>
-          <a:fillRef idx="3">
-            <a:schemeClr val="accent1"/>
-          </a:fillRef>
-          <a:effectRef idx="2">
-            <a:schemeClr val="accent1"/>
-          </a:effectRef>
-          <a:fontRef idx="minor">
-            <a:schemeClr val="lt1"/>
-          </a:fontRef>
-        </p:style>
-        <p:txBody>
-          <a:bodyPr rtlCol="0" anchor="ctr" wrap="square"/>
-          <a:lstStyle/>
-          <a:p>
-            <a:pPr algn="ctr">
-              <a:spcAft>
-                <a:spcPts val="600"/>
-              </a:spcAft>
-            </a:pPr>
-            <a:r>
-              <a:rPr sz="1250" b="0">
-                <a:solidFill>
-                  <a:srgbClr val="8A5200"/>
-                </a:solidFill>
-              </a:rPr>
-              <a:t>The pocket is determined by the receptor; the pose is not determined at all. That is why every contact-derived readout failed — contacts, buried area, pDockQ, PRODIGY dG, pose agreement all read a placement correct in location and arbitrary in detail. Confidence is the only axis carrying binding information.</a:t>
             </a:r>
           </a:p>
         </p:txBody>
@@ -15554,61 +16251,6 @@
                 </a:solidFill>
               </a:rPr>
               <a:t>A full-settings fold takes 106 s on this laptop. The obstacle was the device, not the settings.</a:t>
-            </a:r>
-          </a:p>
-        </p:txBody>
-      </p:sp>
-      <p:sp>
-        <p:nvSpPr>
-          <p:cNvPr id="11" name="Rounded Rectangle 10"/>
-          <p:cNvSpPr/>
-          <p:nvPr/>
-        </p:nvSpPr>
-        <p:spPr>
-          <a:xfrm>
-            <a:off x="548640" y="5669280"/>
-            <a:ext cx="11155680" cy="868680"/>
-          </a:xfrm>
-          <a:prstGeom prst="roundRect">
-            <a:avLst/>
-          </a:prstGeom>
-          <a:solidFill>
-            <a:srgbClr val="FDF3E0"/>
-          </a:solidFill>
-          <a:ln>
-            <a:noFill/>
-          </a:ln>
-        </p:spPr>
-        <p:style>
-          <a:lnRef idx="1">
-            <a:schemeClr val="accent1"/>
-          </a:lnRef>
-          <a:fillRef idx="3">
-            <a:schemeClr val="accent1"/>
-          </a:fillRef>
-          <a:effectRef idx="2">
-            <a:schemeClr val="accent1"/>
-          </a:effectRef>
-          <a:fontRef idx="minor">
-            <a:schemeClr val="lt1"/>
-          </a:fontRef>
-        </p:style>
-        <p:txBody>
-          <a:bodyPr rtlCol="0" anchor="ctr" wrap="square"/>
-          <a:lstStyle/>
-          <a:p>
-            <a:pPr algn="ctr">
-              <a:spcAft>
-                <a:spcPts val="600"/>
-              </a:spcAft>
-            </a:pPr>
-            <a:r>
-              <a:rPr sz="1250" b="0">
-                <a:solidFill>
-                  <a:srgbClr val="8A5200"/>
-                </a:solidFill>
-              </a:rPr>
-              <a:t>The CPU-era note in the runner said a full alignment was intractable — a 40-complex run did not finish one batch in an hour. On MPS, full depth is no slower than depth 32. The reduced regime outlived the constraint that justified it, and every effect size in slides 15–30 is a lower bound.</a:t>
             </a:r>
           </a:p>
         </p:txBody>
@@ -20510,67 +21152,6 @@
           </a:p>
         </p:txBody>
       </p:sp>
-      <p:sp>
-        <p:nvSpPr>
-          <p:cNvPr id="12" name="Rounded Rectangle 11"/>
-          <p:cNvSpPr/>
-          <p:nvPr/>
-        </p:nvSpPr>
-        <p:spPr>
-          <a:xfrm>
-            <a:off x="548640" y="5074920"/>
-            <a:ext cx="11155680" cy="1097280"/>
-          </a:xfrm>
-          <a:prstGeom prst="roundRect">
-            <a:avLst/>
-          </a:prstGeom>
-          <a:solidFill>
-            <a:srgbClr val="FDF3E0"/>
-          </a:solidFill>
-          <a:ln w="12700">
-            <a:solidFill>
-              <a:srgbClr val="C77700"/>
-            </a:solidFill>
-          </a:ln>
-          <a:effectLst/>
-        </p:spPr>
-        <p:style>
-          <a:lnRef idx="1">
-            <a:schemeClr val="accent1"/>
-          </a:lnRef>
-          <a:fillRef idx="3">
-            <a:schemeClr val="accent1"/>
-          </a:fillRef>
-          <a:effectRef idx="2">
-            <a:schemeClr val="accent1"/>
-          </a:effectRef>
-          <a:fontRef idx="minor">
-            <a:schemeClr val="lt1"/>
-          </a:fontRef>
-        </p:style>
-        <p:txBody>
-          <a:bodyPr rtlCol="0" anchor="ctr" lIns="164592" wrap="square"/>
-          <a:lstStyle/>
-          <a:p>
-            <a:pPr algn="ctr">
-              <a:spcBef>
-                <a:spcPts val="0"/>
-              </a:spcBef>
-              <a:spcAft>
-                <a:spcPts val="600"/>
-              </a:spcAft>
-            </a:pPr>
-            <a:r>
-              <a:rPr sz="1200" b="0">
-                <a:solidFill>
-                  <a:srgbClr val="8A5200"/>
-                </a:solidFill>
-              </a:rPr>
-              <a:t>⚠  Caveats:  (1) low-rank Relative MSE is 84–93% at these ranks — the layer must be TRAINED to recover full-rank behaviour, and cannot be projected onto pretrained weights.  (2) Latencies are the surrogate, not full Boltz-2.  (3) Settings are far below Boltz defaults: 10 sampling steps vs 200, MSA depth 32 vs 8192.</a:t>
-            </a:r>
-          </a:p>
-        </p:txBody>
-      </p:sp>
     </p:spTree>
   </p:cSld>
   <p:clrMapOvr>
@@ -21435,4 +22016,324 @@
   </a:objectDefaults>
   <a:extraClrSchemeLst/>
 </a:theme>
+</file>
+
+<file path=ppt/theme/theme2.xml><?xml version="1.0" encoding="utf-8"?>
+<a:theme xmlns:a="http://schemas.openxmlformats.org/drawingml/2006/main" name="Office Theme">
+  <a:themeElements>
+    <a:clrScheme name="Office">
+      <a:dk1>
+        <a:sysClr val="windowText" lastClr="000000"/>
+      </a:dk1>
+      <a:lt1>
+        <a:sysClr val="window" lastClr="FFFFFF"/>
+      </a:lt1>
+      <a:dk2>
+        <a:srgbClr val="1F497D"/>
+      </a:dk2>
+      <a:lt2>
+        <a:srgbClr val="EEECE1"/>
+      </a:lt2>
+      <a:accent1>
+        <a:srgbClr val="4F81BD"/>
+      </a:accent1>
+      <a:accent2>
+        <a:srgbClr val="C0504D"/>
+      </a:accent2>
+      <a:accent3>
+        <a:srgbClr val="9BBB59"/>
+      </a:accent3>
+      <a:accent4>
+        <a:srgbClr val="8064A2"/>
+      </a:accent4>
+      <a:accent5>
+        <a:srgbClr val="4BACC6"/>
+      </a:accent5>
+      <a:accent6>
+        <a:srgbClr val="F79646"/>
+      </a:accent6>
+      <a:hlink>
+        <a:srgbClr val="0000FF"/>
+      </a:hlink>
+      <a:folHlink>
+        <a:srgbClr val="800080"/>
+      </a:folHlink>
+    </a:clrScheme>
+    <a:fontScheme name="Office">
+      <a:majorFont>
+        <a:latin typeface="Calibri"/>
+        <a:ea typeface=""/>
+        <a:cs typeface=""/>
+        <a:font script="Jpan" typeface="ＭＳ Ｐゴシック"/>
+        <a:font script="Hang" typeface="맑은 고딕"/>
+        <a:font script="Hans" typeface="宋体"/>
+        <a:font script="Hant" typeface="新細明體"/>
+        <a:font script="Arab" typeface="Times New Roman"/>
+        <a:font script="Hebr" typeface="Times New Roman"/>
+        <a:font script="Thai" typeface="Angsana New"/>
+        <a:font script="Ethi" typeface="Nyala"/>
+        <a:font script="Beng" typeface="Vrinda"/>
+        <a:font script="Gujr" typeface="Shruti"/>
+        <a:font script="Khmr" typeface="MoolBoran"/>
+        <a:font script="Knda" typeface="Tunga"/>
+        <a:font script="Guru" typeface="Raavi"/>
+        <a:font script="Cans" typeface="Euphemia"/>
+        <a:font script="Cher" typeface="Plantagenet Cherokee"/>
+        <a:font script="Yiii" typeface="Microsoft Yi Baiti"/>
+        <a:font script="Tibt" typeface="Microsoft Himalaya"/>
+        <a:font script="Thaa" typeface="MV Boli"/>
+        <a:font script="Deva" typeface="Mangal"/>
+        <a:font script="Telu" typeface="Gautami"/>
+        <a:font script="Taml" typeface="Latha"/>
+        <a:font script="Syrc" typeface="Estrangelo Edessa"/>
+        <a:font script="Orya" typeface="Kalinga"/>
+        <a:font script="Mlym" typeface="Kartika"/>
+        <a:font script="Laoo" typeface="DokChampa"/>
+        <a:font script="Sinh" typeface="Iskoola Pota"/>
+        <a:font script="Mong" typeface="Mongolian Baiti"/>
+        <a:font script="Viet" typeface="Times New Roman"/>
+        <a:font script="Uigh" typeface="Microsoft Uighur"/>
+        <a:font script="Geor" typeface="Sylfaen"/>
+      </a:majorFont>
+      <a:minorFont>
+        <a:latin typeface="Calibri"/>
+        <a:ea typeface=""/>
+        <a:cs typeface=""/>
+        <a:font script="Jpan" typeface="ＭＳ Ｐゴシック"/>
+        <a:font script="Hang" typeface="맑은 고딕"/>
+        <a:font script="Hans" typeface="宋体"/>
+        <a:font script="Hant" typeface="新細明體"/>
+        <a:font script="Arab" typeface="Arial"/>
+        <a:font script="Hebr" typeface="Arial"/>
+        <a:font script="Thai" typeface="Cordia New"/>
+        <a:font script="Ethi" typeface="Nyala"/>
+        <a:font script="Beng" typeface="Vrinda"/>
+        <a:font script="Gujr" typeface="Shruti"/>
+        <a:font script="Khmr" typeface="DaunPenh"/>
+        <a:font script="Knda" typeface="Tunga"/>
+        <a:font script="Guru" typeface="Raavi"/>
+        <a:font script="Cans" typeface="Euphemia"/>
+        <a:font script="Cher" typeface="Plantagenet Cherokee"/>
+        <a:font script="Yiii" typeface="Microsoft Yi Baiti"/>
+        <a:font script="Tibt" typeface="Microsoft Himalaya"/>
+        <a:font script="Thaa" typeface="MV Boli"/>
+        <a:font script="Deva" typeface="Mangal"/>
+        <a:font script="Telu" typeface="Gautami"/>
+        <a:font script="Taml" typeface="Latha"/>
+        <a:font script="Syrc" typeface="Estrangelo Edessa"/>
+        <a:font script="Orya" typeface="Kalinga"/>
+        <a:font script="Mlym" typeface="Kartika"/>
+        <a:font script="Laoo" typeface="DokChampa"/>
+        <a:font script="Sinh" typeface="Iskoola Pota"/>
+        <a:font script="Mong" typeface="Mongolian Baiti"/>
+        <a:font script="Viet" typeface="Arial"/>
+        <a:font script="Uigh" typeface="Microsoft Uighur"/>
+        <a:font script="Geor" typeface="Sylfaen"/>
+      </a:minorFont>
+    </a:fontScheme>
+    <a:fmtScheme name="Office">
+      <a:fillStyleLst>
+        <a:solidFill>
+          <a:schemeClr val="phClr"/>
+        </a:solidFill>
+        <a:gradFill rotWithShape="1">
+          <a:gsLst>
+            <a:gs pos="0">
+              <a:schemeClr val="phClr">
+                <a:tint val="50000"/>
+                <a:satMod val="300000"/>
+              </a:schemeClr>
+            </a:gs>
+            <a:gs pos="35000">
+              <a:schemeClr val="phClr">
+                <a:tint val="37000"/>
+                <a:satMod val="300000"/>
+              </a:schemeClr>
+            </a:gs>
+            <a:gs pos="100000">
+              <a:schemeClr val="phClr">
+                <a:tint val="15000"/>
+                <a:satMod val="350000"/>
+              </a:schemeClr>
+            </a:gs>
+          </a:gsLst>
+          <a:lin ang="16200000" scaled="1"/>
+        </a:gradFill>
+        <a:gradFill rotWithShape="1">
+          <a:gsLst>
+            <a:gs pos="0">
+              <a:schemeClr val="phClr">
+                <a:tint val="100000"/>
+                <a:shade val="100000"/>
+                <a:satMod val="130000"/>
+              </a:schemeClr>
+            </a:gs>
+            <a:gs pos="100000">
+              <a:schemeClr val="phClr">
+                <a:tint val="50000"/>
+                <a:shade val="100000"/>
+                <a:satMod val="350000"/>
+              </a:schemeClr>
+            </a:gs>
+          </a:gsLst>
+          <a:lin ang="16200000" scaled="0"/>
+        </a:gradFill>
+      </a:fillStyleLst>
+      <a:lnStyleLst>
+        <a:ln w="9525" cap="flat" cmpd="sng" algn="ctr">
+          <a:solidFill>
+            <a:schemeClr val="phClr">
+              <a:shade val="95000"/>
+              <a:satMod val="105000"/>
+            </a:schemeClr>
+          </a:solidFill>
+          <a:prstDash val="solid"/>
+        </a:ln>
+        <a:ln w="25400" cap="flat" cmpd="sng" algn="ctr">
+          <a:solidFill>
+            <a:schemeClr val="phClr"/>
+          </a:solidFill>
+          <a:prstDash val="solid"/>
+        </a:ln>
+        <a:ln w="38100" cap="flat" cmpd="sng" algn="ctr">
+          <a:solidFill>
+            <a:schemeClr val="phClr"/>
+          </a:solidFill>
+          <a:prstDash val="solid"/>
+        </a:ln>
+      </a:lnStyleLst>
+      <a:effectStyleLst>
+        <a:effectStyle>
+          <a:effectLst>
+            <a:outerShdw blurRad="40000" dist="20000" dir="5400000" rotWithShape="0">
+              <a:srgbClr val="000000">
+                <a:alpha val="38000"/>
+              </a:srgbClr>
+            </a:outerShdw>
+          </a:effectLst>
+        </a:effectStyle>
+        <a:effectStyle>
+          <a:effectLst>
+            <a:outerShdw blurRad="40000" dist="23000" dir="5400000" rotWithShape="0">
+              <a:srgbClr val="000000">
+                <a:alpha val="35000"/>
+              </a:srgbClr>
+            </a:outerShdw>
+          </a:effectLst>
+        </a:effectStyle>
+        <a:effectStyle>
+          <a:effectLst>
+            <a:outerShdw blurRad="40000" dist="23000" dir="5400000" rotWithShape="0">
+              <a:srgbClr val="000000">
+                <a:alpha val="35000"/>
+              </a:srgbClr>
+            </a:outerShdw>
+          </a:effectLst>
+          <a:scene3d>
+            <a:camera prst="orthographicFront">
+              <a:rot lat="0" lon="0" rev="0"/>
+            </a:camera>
+            <a:lightRig rig="threePt" dir="t">
+              <a:rot lat="0" lon="0" rev="1200000"/>
+            </a:lightRig>
+          </a:scene3d>
+          <a:sp3d>
+            <a:bevelT w="63500" h="25400"/>
+          </a:sp3d>
+        </a:effectStyle>
+      </a:effectStyleLst>
+      <a:bgFillStyleLst>
+        <a:solidFill>
+          <a:schemeClr val="phClr"/>
+        </a:solidFill>
+        <a:gradFill rotWithShape="1">
+          <a:gsLst>
+            <a:gs pos="0">
+              <a:schemeClr val="phClr">
+                <a:tint val="40000"/>
+                <a:satMod val="350000"/>
+              </a:schemeClr>
+            </a:gs>
+            <a:gs pos="40000">
+              <a:schemeClr val="phClr">
+                <a:tint val="45000"/>
+                <a:shade val="99000"/>
+                <a:satMod val="350000"/>
+              </a:schemeClr>
+            </a:gs>
+            <a:gs pos="100000">
+              <a:schemeClr val="phClr">
+                <a:shade val="20000"/>
+                <a:satMod val="255000"/>
+              </a:schemeClr>
+            </a:gs>
+          </a:gsLst>
+          <a:path path="circle">
+            <a:fillToRect l="50000" t="-80000" r="50000" b="180000"/>
+          </a:path>
+        </a:gradFill>
+        <a:gradFill rotWithShape="1">
+          <a:gsLst>
+            <a:gs pos="0">
+              <a:schemeClr val="phClr">
+                <a:tint val="80000"/>
+                <a:satMod val="300000"/>
+              </a:schemeClr>
+            </a:gs>
+            <a:gs pos="100000">
+              <a:schemeClr val="phClr">
+                <a:shade val="30000"/>
+                <a:satMod val="200000"/>
+              </a:schemeClr>
+            </a:gs>
+          </a:gsLst>
+          <a:path path="circle">
+            <a:fillToRect l="50000" t="50000" r="50000" b="50000"/>
+          </a:path>
+        </a:gradFill>
+      </a:bgFillStyleLst>
+    </a:fmtScheme>
+  </a:themeElements>
+  <a:objectDefaults>
+    <a:spDef>
+      <a:spPr/>
+      <a:bodyPr/>
+      <a:lstStyle/>
+      <a:style>
+        <a:lnRef idx="1">
+          <a:schemeClr val="accent1"/>
+        </a:lnRef>
+        <a:fillRef idx="3">
+          <a:schemeClr val="accent1"/>
+        </a:fillRef>
+        <a:effectRef idx="2">
+          <a:schemeClr val="accent1"/>
+        </a:effectRef>
+        <a:fontRef idx="minor">
+          <a:schemeClr val="lt1"/>
+        </a:fontRef>
+      </a:style>
+    </a:spDef>
+    <a:lnDef>
+      <a:spPr/>
+      <a:bodyPr/>
+      <a:lstStyle/>
+      <a:style>
+        <a:lnRef idx="2">
+          <a:schemeClr val="accent1"/>
+        </a:lnRef>
+        <a:fillRef idx="0">
+          <a:schemeClr val="accent1"/>
+        </a:fillRef>
+        <a:effectRef idx="1">
+          <a:schemeClr val="accent1"/>
+        </a:effectRef>
+        <a:fontRef idx="minor">
+          <a:schemeClr val="tx1"/>
+        </a:fontRef>
+      </a:style>
+    </a:lnDef>
+  </a:objectDefaults>
+  <a:extraClrSchemeLst/>
+</a:theme>
 </file>
--- a/final_dissertation_presentation.pptx
+++ b/final_dissertation_presentation.pptx
@@ -30,13 +30,11 @@
     <p:sldId id="280" r:id="rId31"/>
     <p:sldId id="281" r:id="rId32"/>
     <p:sldId id="282" r:id="rId33"/>
-    <p:sldId id="283" r:id="rId34"/>
     <p:sldId id="284" r:id="rId35"/>
     <p:sldId id="285" r:id="rId36"/>
     <p:sldId id="286" r:id="rId37"/>
     <p:sldId id="287" r:id="rId38"/>
     <p:sldId id="288" r:id="rId39"/>
-    <p:sldId id="289" r:id="rId40"/>
     <p:sldId id="267" r:id="rId18"/>
     <p:sldId id="268" r:id="rId19"/>
   </p:sldIdLst>
@@ -678,71 +676,7 @@
               <a:t>Not homology-decontaminated, and cannot be: 0 of 22 held-out receptors clear 30% identity to the pre-cutoff PDB (median 1.000), and neither does a random sample of the whole candidate pool. What the split isolates is complex-level novelty with receptor familiarity held constant.</a:t>
             </a:r>
           </a:p>
-        </p:txBody>
-      </p:sp>
-      <p:sp>
-        <p:nvSpPr>
-          <p:cNvPr id="4" name="Slide Number Placeholder 3"/>
-          <p:cNvSpPr>
-            <a:spLocks noGrp="1"/>
-          </p:cNvSpPr>
-          <p:nvPr>
-            <p:ph type="sldNum" idx="5" sz="quarter"/>
-          </p:nvPr>
-        </p:nvSpPr>
-        <p:spPr/>
-      </p:sp>
-    </p:spTree>
-  </p:cSld>
-  <p:clrMapOvr>
-    <a:masterClrMapping/>
-  </p:clrMapOvr>
-</p:notes>
-</file>
-
-<file path=ppt/notesSlides/notesSlide12.xml><?xml version="1.0" encoding="utf-8"?>
-<p:notes xmlns:a="http://schemas.openxmlformats.org/drawingml/2006/main" xmlns:p="http://schemas.openxmlformats.org/presentationml/2006/main" xmlns:r="http://schemas.openxmlformats.org/officeDocument/2006/relationships">
-  <p:cSld>
-    <p:spTree>
-      <p:nvGrpSpPr>
-        <p:cNvPr id="1" name=""/>
-        <p:cNvGrpSpPr/>
-        <p:nvPr/>
-      </p:nvGrpSpPr>
-      <p:grpSpPr>
-        <a:xfrm>
-          <a:off x="0" y="0"/>
-          <a:ext cx="0" cy="0"/>
-          <a:chOff x="0" y="0"/>
-          <a:chExt cx="0" cy="0"/>
-        </a:xfrm>
-      </p:grpSpPr>
-      <p:sp>
-        <p:nvSpPr>
-          <p:cNvPr id="2" name="Slide Image Placeholder 1"/>
-          <p:cNvSpPr>
-            <a:spLocks noGrp="1"/>
-          </p:cNvSpPr>
-          <p:nvPr>
-            <p:ph type="sldImg" idx="2"/>
-          </p:nvPr>
-        </p:nvSpPr>
-        <p:spPr/>
-      </p:sp>
-      <p:sp>
-        <p:nvSpPr>
-          <p:cNvPr id="3" name="Notes Placeholder 2"/>
-          <p:cNvSpPr>
-            <a:spLocks noGrp="1"/>
-          </p:cNvSpPr>
-          <p:nvPr>
-            <p:ph type="body" idx="3" sz="quarter"/>
-          </p:nvPr>
-        </p:nvSpPr>
-        <p:spPr/>
-        <p:txBody>
-          <a:bodyPr/>
-          <a:lstStyle/>
+          <a:p/>
           <a:p>
             <a:r>
               <a:t>The methodological lesson is sharper than the scientific one: a single unseeded fold is not a measurement, and on this evidence neither are two.</a:t>
@@ -11908,8 +11842,8 @@
         </p:nvSpPr>
         <p:spPr>
           <a:xfrm>
-            <a:off x="548640" y="1188720"/>
-            <a:ext cx="11155680" cy="1005840"/>
+            <a:off x="548640" y="1115568"/>
+            <a:ext cx="11155680" cy="539496"/>
           </a:xfrm>
           <a:prstGeom prst="rect">
             <a:avLst/>
@@ -11928,27 +11862,12 @@
               </a:spcAft>
             </a:pPr>
             <a:r>
-              <a:rPr sz="1500" b="0">
+              <a:rPr sz="1400" b="0">
                 <a:solidFill>
                   <a:srgbClr val="0B2B52"/>
                 </a:solidFill>
               </a:rPr>
-              <a:t>22 receptors released after Boltz-1's 2021-09-30 training cutoff, screened identically,</a:t>
-            </a:r>
-          </a:p>
-          <a:p>
-            <a:pPr>
-              <a:spcAft>
-                <a:spcPts val="600"/>
-              </a:spcAft>
-            </a:pPr>
-            <a:r>
-              <a:rPr sz="1500" b="0">
-                <a:solidFill>
-                  <a:srgbClr val="0B2B52"/>
-                </a:solidFill>
-              </a:rPr>
-              <a:t>decoys drawn from within the held-out set. Folded three times on DeCAF.</a:t>
+              <a:t>22 receptors released after the 2021-09-30 training cutoff, screened identically. Folded five times.</a:t>
             </a:r>
           </a:p>
         </p:txBody>
@@ -11961,7 +11880,7 @@
         </p:nvSpPr>
         <p:spPr>
           <a:xfrm>
-            <a:off x="548640" y="2011680"/>
+            <a:off x="548640" y="1645920"/>
             <a:ext cx="3520440" cy="1463040"/>
           </a:xfrm>
           <a:prstGeom prst="roundRect">
@@ -12023,7 +11942,7 @@
         </p:nvSpPr>
         <p:spPr>
           <a:xfrm>
-            <a:off x="4343400" y="2011680"/>
+            <a:off x="4343400" y="1645920"/>
             <a:ext cx="3520440" cy="1463040"/>
           </a:xfrm>
           <a:prstGeom prst="roundRect">
@@ -12085,7 +12004,7 @@
         </p:nvSpPr>
         <p:spPr>
           <a:xfrm>
-            <a:off x="8138160" y="2011680"/>
+            <a:off x="8138160" y="1645920"/>
             <a:ext cx="3566160" cy="1463040"/>
           </a:xfrm>
           <a:prstGeom prst="roundRect">
@@ -12147,8 +12066,8 @@
         </p:nvSpPr>
         <p:spPr>
           <a:xfrm>
-            <a:off x="548640" y="3749039"/>
-            <a:ext cx="11155680" cy="1005840"/>
+            <a:off x="548640" y="3310128"/>
+            <a:ext cx="11155680" cy="539496"/>
           </a:xfrm>
           <a:prstGeom prst="rect">
             <a:avLst/>
@@ -12167,47 +12086,426 @@
               </a:spcAft>
             </a:pPr>
             <a:r>
-              <a:rPr sz="1500" b="0">
+              <a:rPr sz="1400" b="0">
                 <a:solidFill>
                   <a:srgbClr val="0B2B52"/>
                 </a:solidFill>
               </a:rPr>
-              <a:t>Both readouts retain roughly half — interface pLDDT 41%, ipTM 52%.</a:t>
-            </a:r>
-          </a:p>
-          <a:p>
-            <a:pPr>
-              <a:spcAft>
-                <a:spcPts val="600"/>
-              </a:spcAft>
-            </a:pPr>
-            <a:r>
-              <a:rPr sz="1500" b="0">
-                <a:solidFill>
-                  <a:srgbClr val="0B2B52"/>
-                </a:solidFill>
-              </a:rPr>
-              <a:t>Neither can be shown to degrade more than the other on this panel.</a:t>
-            </a:r>
-          </a:p>
-        </p:txBody>
-      </p:sp>
-      <p:sp>
-        <p:nvSpPr>
-          <p:cNvPr id="12" name="Rounded Rectangle 11"/>
+              <a:t>Cognate rank among its own decoys (chance 2.50) — and why one draw was not enough:</a:t>
+            </a:r>
+          </a:p>
+        </p:txBody>
+      </p:sp>
+      <p:graphicFrame>
+        <p:nvGraphicFramePr>
+          <p:cNvPr id="12" name="Table 11"/>
+          <p:cNvGraphicFramePr>
+            <a:graphicFrameLocks noGrp="1"/>
+          </p:cNvGraphicFramePr>
+          <p:nvPr/>
+        </p:nvGraphicFramePr>
+        <p:xfrm>
+          <a:off x="548640" y="3749039"/>
+          <a:ext cx="11155680" cy="1042416"/>
+        </p:xfrm>
+        <a:graphic>
+          <a:graphicData uri="http://schemas.openxmlformats.org/drawingml/2006/table">
+            <a:tbl>
+              <a:tblPr firstRow="1" bandRow="1">
+                <a:tableStyleId>{5C22544A-7EE6-4342-B048-85BDC9FD1C3A}</a:tableStyleId>
+              </a:tblPr>
+              <a:tblGrid>
+                <a:gridCol w="2651760"/>
+                <a:gridCol w="1417320"/>
+                <a:gridCol w="1417320"/>
+                <a:gridCol w="1417320"/>
+                <a:gridCol w="1417320"/>
+                <a:gridCol w="1417320"/>
+                <a:gridCol w="1417320"/>
+              </a:tblGrid>
+              <a:tr h="347472">
+                <a:tc>
+                  <a:txBody>
+                    <a:bodyPr/>
+                    <a:lstStyle/>
+                    <a:p>
+                      <a:r>
+                        <a:rPr sz="1250" b="1">
+                          <a:solidFill>
+                            <a:srgbClr val="0B2B52"/>
+                          </a:solidFill>
+                        </a:rPr>
+                        <a:t> </a:t>
+                      </a:r>
+                    </a:p>
+                  </a:txBody>
+                  <a:tcPr/>
+                </a:tc>
+                <a:tc>
+                  <a:txBody>
+                    <a:bodyPr/>
+                    <a:lstStyle/>
+                    <a:p>
+                      <a:r>
+                        <a:rPr sz="1250" b="1">
+                          <a:solidFill>
+                            <a:srgbClr val="0B2B52"/>
+                          </a:solidFill>
+                        </a:rPr>
+                        <a:t>draw 1</a:t>
+                      </a:r>
+                    </a:p>
+                  </a:txBody>
+                  <a:tcPr/>
+                </a:tc>
+                <a:tc>
+                  <a:txBody>
+                    <a:bodyPr/>
+                    <a:lstStyle/>
+                    <a:p>
+                      <a:r>
+                        <a:rPr sz="1250" b="1">
+                          <a:solidFill>
+                            <a:srgbClr val="0B2B52"/>
+                          </a:solidFill>
+                        </a:rPr>
+                        <a:t>draw 2</a:t>
+                      </a:r>
+                    </a:p>
+                  </a:txBody>
+                  <a:tcPr/>
+                </a:tc>
+                <a:tc>
+                  <a:txBody>
+                    <a:bodyPr/>
+                    <a:lstStyle/>
+                    <a:p>
+                      <a:r>
+                        <a:rPr sz="1250" b="1">
+                          <a:solidFill>
+                            <a:srgbClr val="0B2B52"/>
+                          </a:solidFill>
+                        </a:rPr>
+                        <a:t>draw 3</a:t>
+                      </a:r>
+                    </a:p>
+                  </a:txBody>
+                  <a:tcPr/>
+                </a:tc>
+                <a:tc>
+                  <a:txBody>
+                    <a:bodyPr/>
+                    <a:lstStyle/>
+                    <a:p>
+                      <a:r>
+                        <a:rPr sz="1250" b="1">
+                          <a:solidFill>
+                            <a:srgbClr val="0B2B52"/>
+                          </a:solidFill>
+                        </a:rPr>
+                        <a:t>draw 4</a:t>
+                      </a:r>
+                    </a:p>
+                  </a:txBody>
+                  <a:tcPr/>
+                </a:tc>
+                <a:tc>
+                  <a:txBody>
+                    <a:bodyPr/>
+                    <a:lstStyle/>
+                    <a:p>
+                      <a:r>
+                        <a:rPr sz="1250" b="1">
+                          <a:solidFill>
+                            <a:srgbClr val="0B2B52"/>
+                          </a:solidFill>
+                        </a:rPr>
+                        <a:t>draw 5</a:t>
+                      </a:r>
+                    </a:p>
+                  </a:txBody>
+                  <a:tcPr/>
+                </a:tc>
+                <a:tc>
+                  <a:txBody>
+                    <a:bodyPr/>
+                    <a:lstStyle/>
+                    <a:p>
+                      <a:r>
+                        <a:rPr sz="1250" b="1">
+                          <a:solidFill>
+                            <a:srgbClr val="0B2B52"/>
+                          </a:solidFill>
+                        </a:rPr>
+                        <a:t>mean</a:t>
+                      </a:r>
+                    </a:p>
+                  </a:txBody>
+                  <a:tcPr/>
+                </a:tc>
+              </a:tr>
+              <a:tr h="347472">
+                <a:tc>
+                  <a:txBody>
+                    <a:bodyPr/>
+                    <a:lstStyle/>
+                    <a:p>
+                      <a:r>
+                        <a:rPr sz="1250" b="1">
+                          <a:solidFill>
+                            <a:srgbClr val="0B2B52"/>
+                          </a:solidFill>
+                        </a:rPr>
+                        <a:t>ipTM</a:t>
+                      </a:r>
+                    </a:p>
+                  </a:txBody>
+                  <a:tcPr/>
+                </a:tc>
+                <a:tc>
+                  <a:txBody>
+                    <a:bodyPr/>
+                    <a:lstStyle/>
+                    <a:p>
+                      <a:r>
+                        <a:rPr sz="1250" b="0">
+                          <a:solidFill>
+                            <a:srgbClr val="0B2B52"/>
+                          </a:solidFill>
+                        </a:rPr>
+                        <a:t>1.64</a:t>
+                      </a:r>
+                    </a:p>
+                  </a:txBody>
+                  <a:tcPr/>
+                </a:tc>
+                <a:tc>
+                  <a:txBody>
+                    <a:bodyPr/>
+                    <a:lstStyle/>
+                    <a:p>
+                      <a:r>
+                        <a:rPr sz="1250" b="0">
+                          <a:solidFill>
+                            <a:srgbClr val="0B2B52"/>
+                          </a:solidFill>
+                        </a:rPr>
+                        <a:t>1.50</a:t>
+                      </a:r>
+                    </a:p>
+                  </a:txBody>
+                  <a:tcPr/>
+                </a:tc>
+                <a:tc>
+                  <a:txBody>
+                    <a:bodyPr/>
+                    <a:lstStyle/>
+                    <a:p>
+                      <a:r>
+                        <a:rPr sz="1250" b="0">
+                          <a:solidFill>
+                            <a:srgbClr val="0B2B52"/>
+                          </a:solidFill>
+                        </a:rPr>
+                        <a:t>1.86</a:t>
+                      </a:r>
+                    </a:p>
+                  </a:txBody>
+                  <a:tcPr/>
+                </a:tc>
+                <a:tc>
+                  <a:txBody>
+                    <a:bodyPr/>
+                    <a:lstStyle/>
+                    <a:p>
+                      <a:r>
+                        <a:rPr sz="1250" b="0">
+                          <a:solidFill>
+                            <a:srgbClr val="0B2B52"/>
+                          </a:solidFill>
+                        </a:rPr>
+                        <a:t>1.64</a:t>
+                      </a:r>
+                    </a:p>
+                  </a:txBody>
+                  <a:tcPr/>
+                </a:tc>
+                <a:tc>
+                  <a:txBody>
+                    <a:bodyPr/>
+                    <a:lstStyle/>
+                    <a:p>
+                      <a:r>
+                        <a:rPr sz="1250" b="0">
+                          <a:solidFill>
+                            <a:srgbClr val="0B2B52"/>
+                          </a:solidFill>
+                        </a:rPr>
+                        <a:t>1.45</a:t>
+                      </a:r>
+                    </a:p>
+                  </a:txBody>
+                  <a:tcPr/>
+                </a:tc>
+                <a:tc>
+                  <a:txBody>
+                    <a:bodyPr/>
+                    <a:lstStyle/>
+                    <a:p>
+                      <a:r>
+                        <a:rPr sz="1250" b="0">
+                          <a:solidFill>
+                            <a:srgbClr val="0B2B52"/>
+                          </a:solidFill>
+                        </a:rPr>
+                        <a:t>1.59</a:t>
+                      </a:r>
+                    </a:p>
+                  </a:txBody>
+                  <a:tcPr/>
+                </a:tc>
+              </a:tr>
+              <a:tr h="347472">
+                <a:tc>
+                  <a:txBody>
+                    <a:bodyPr/>
+                    <a:lstStyle/>
+                    <a:p>
+                      <a:r>
+                        <a:rPr sz="1250" b="1">
+                          <a:solidFill>
+                            <a:srgbClr val="0B2B52"/>
+                          </a:solidFill>
+                        </a:rPr>
+                        <a:t>interface pLDDT</a:t>
+                      </a:r>
+                    </a:p>
+                  </a:txBody>
+                  <a:tcPr/>
+                </a:tc>
+                <a:tc>
+                  <a:txBody>
+                    <a:bodyPr/>
+                    <a:lstStyle/>
+                    <a:p>
+                      <a:r>
+                        <a:rPr sz="1250" b="0">
+                          <a:solidFill>
+                            <a:srgbClr val="0B2B52"/>
+                          </a:solidFill>
+                        </a:rPr>
+                        <a:t>2.09</a:t>
+                      </a:r>
+                    </a:p>
+                  </a:txBody>
+                  <a:tcPr/>
+                </a:tc>
+                <a:tc>
+                  <a:txBody>
+                    <a:bodyPr/>
+                    <a:lstStyle/>
+                    <a:p>
+                      <a:r>
+                        <a:rPr sz="1250" b="0">
+                          <a:solidFill>
+                            <a:srgbClr val="0B2B52"/>
+                          </a:solidFill>
+                        </a:rPr>
+                        <a:t>2.05</a:t>
+                      </a:r>
+                    </a:p>
+                  </a:txBody>
+                  <a:tcPr/>
+                </a:tc>
+                <a:tc>
+                  <a:txBody>
+                    <a:bodyPr/>
+                    <a:lstStyle/>
+                    <a:p>
+                      <a:r>
+                        <a:rPr sz="1250" b="0">
+                          <a:solidFill>
+                            <a:srgbClr val="0B2B52"/>
+                          </a:solidFill>
+                        </a:rPr>
+                        <a:t>1.73</a:t>
+                      </a:r>
+                    </a:p>
+                  </a:txBody>
+                  <a:tcPr/>
+                </a:tc>
+                <a:tc>
+                  <a:txBody>
+                    <a:bodyPr/>
+                    <a:lstStyle/>
+                    <a:p>
+                      <a:r>
+                        <a:rPr sz="1250" b="0">
+                          <a:solidFill>
+                            <a:srgbClr val="0B2B52"/>
+                          </a:solidFill>
+                        </a:rPr>
+                        <a:t>1.73</a:t>
+                      </a:r>
+                    </a:p>
+                  </a:txBody>
+                  <a:tcPr/>
+                </a:tc>
+                <a:tc>
+                  <a:txBody>
+                    <a:bodyPr/>
+                    <a:lstStyle/>
+                    <a:p>
+                      <a:r>
+                        <a:rPr sz="1250" b="0">
+                          <a:solidFill>
+                            <a:srgbClr val="0B2B52"/>
+                          </a:solidFill>
+                        </a:rPr>
+                        <a:t>1.91</a:t>
+                      </a:r>
+                    </a:p>
+                  </a:txBody>
+                  <a:tcPr/>
+                </a:tc>
+                <a:tc>
+                  <a:txBody>
+                    <a:bodyPr/>
+                    <a:lstStyle/>
+                    <a:p>
+                      <a:r>
+                        <a:rPr sz="1250" b="0">
+                          <a:solidFill>
+                            <a:srgbClr val="0B2B52"/>
+                          </a:solidFill>
+                        </a:rPr>
+                        <a:t>1.82</a:t>
+                      </a:r>
+                    </a:p>
+                  </a:txBody>
+                  <a:tcPr/>
+                </a:tc>
+              </a:tr>
+            </a:tbl>
+          </a:graphicData>
+        </a:graphic>
+      </p:graphicFrame>
+      <p:sp>
+        <p:nvSpPr>
+          <p:cNvPr id="13" name="Rounded Rectangle 12"/>
           <p:cNvSpPr/>
           <p:nvPr/>
         </p:nvSpPr>
         <p:spPr>
           <a:xfrm>
-            <a:off x="548640" y="4617720"/>
+            <a:off x="548640" y="5074920"/>
             <a:ext cx="11155680" cy="960120"/>
           </a:xfrm>
           <a:prstGeom prst="roundRect">
             <a:avLst/>
           </a:prstGeom>
           <a:solidFill>
-            <a:srgbClr val="0B2B52"/>
+            <a:srgbClr val="C62828"/>
           </a:solidFill>
           <a:ln>
             <a:noFill/>
@@ -12237,12 +12535,50 @@
               </a:spcAft>
             </a:pPr>
             <a:r>
-              <a:rPr sz="1700" b="1">
+              <a:rPr sz="1500" b="1">
                 <a:solidFill>
                   <a:srgbClr val="FFFFFF"/>
                 </a:solidFill>
               </a:rPr>
-              <a:t>A screening figure quoted without saying whether the complexes were in training is about twice as good as it should be.</a:t>
+              <a:t>Draw 1 said interface pLDDT collapses. Draws 1–2 said ipTM specifically survives. Draw 3 reversed it — both claims withdrawn.</a:t>
+            </a:r>
+          </a:p>
+        </p:txBody>
+      </p:sp>
+      <p:sp>
+        <p:nvSpPr>
+          <p:cNvPr id="14" name="TextBox 13"/>
+          <p:cNvSpPr txBox="1"/>
+          <p:nvPr/>
+        </p:nvSpPr>
+        <p:spPr>
+          <a:xfrm>
+            <a:off x="548640" y="6172200"/>
+            <a:ext cx="11155680" cy="539496"/>
+          </a:xfrm>
+          <a:prstGeom prst="rect">
+            <a:avLst/>
+          </a:prstGeom>
+          <a:noFill/>
+        </p:spPr>
+        <p:txBody>
+          <a:bodyPr wrap="square">
+            <a:spAutoFit/>
+          </a:bodyPr>
+          <a:lstStyle/>
+          <a:p>
+            <a:pPr>
+              <a:spcAft>
+                <a:spcPts val="600"/>
+              </a:spcAft>
+            </a:pPr>
+            <a:r>
+              <a:rPr sz="1200" b="0">
+                <a:solidFill>
+                  <a:srgbClr val="0B2B52"/>
+                </a:solidFill>
+              </a:rPr>
+              <a:t>Both retain roughly half; neither can be shown to degrade more than the other.</a:t>
             </a:r>
           </a:p>
         </p:txBody>
@@ -12384,7 +12720,7 @@
                   <a:srgbClr val="FFFFFF"/>
                 </a:solidFill>
               </a:rPr>
-              <a:t>Three Draws — and Two Retracted Claims</a:t>
+              <a:t>Measured — At Ten Steps the Coordinates Are Not a Protein</a:t>
             </a:r>
           </a:p>
         </p:txBody>
@@ -12498,379 +12834,21 @@
                   <a:srgbClr val="0B2B52"/>
                 </a:solidFill>
               </a:rPr>
-              <a:t>Folds are unseeded, so re-running the identical panel gives an independent draw.</a:t>
-            </a:r>
-          </a:p>
-        </p:txBody>
-      </p:sp>
-      <p:graphicFrame>
-        <p:nvGraphicFramePr>
-          <p:cNvPr id="8" name="Table 7"/>
-          <p:cNvGraphicFramePr>
-            <a:graphicFrameLocks noGrp="1"/>
-          </p:cNvGraphicFramePr>
-          <p:nvPr/>
-        </p:nvGraphicFramePr>
-        <p:xfrm>
-          <a:off x="548640" y="1783080"/>
-          <a:ext cx="11155680" cy="1371600"/>
-        </p:xfrm>
-        <a:graphic>
-          <a:graphicData uri="http://schemas.openxmlformats.org/drawingml/2006/table">
-            <a:tbl>
-              <a:tblPr firstRow="1" bandRow="1">
-                <a:tableStyleId>{5C22544A-7EE6-4342-B048-85BDC9FD1C3A}</a:tableStyleId>
-              </a:tblPr>
-              <a:tblGrid>
-                <a:gridCol w="4023360"/>
-                <a:gridCol w="1554480"/>
-                <a:gridCol w="1554480"/>
-                <a:gridCol w="1554480"/>
-                <a:gridCol w="2468880"/>
-              </a:tblGrid>
-              <a:tr h="457200">
-                <a:tc>
-                  <a:txBody>
-                    <a:bodyPr/>
-                    <a:lstStyle/>
-                    <a:p>
-                      <a:r>
-                        <a:rPr sz="1300" b="1">
-                          <a:solidFill>
-                            <a:srgbClr val="0B2B52"/>
-                          </a:solidFill>
-                        </a:rPr>
-                        <a:t>Cognate rank among its own decoys (chance 2.50)</a:t>
-                      </a:r>
-                    </a:p>
-                  </a:txBody>
-                  <a:tcPr/>
-                </a:tc>
-                <a:tc>
-                  <a:txBody>
-                    <a:bodyPr/>
-                    <a:lstStyle/>
-                    <a:p>
-                      <a:r>
-                        <a:rPr sz="1300" b="1">
-                          <a:solidFill>
-                            <a:srgbClr val="0B2B52"/>
-                          </a:solidFill>
-                        </a:rPr>
-                        <a:t>draw 1</a:t>
-                      </a:r>
-                    </a:p>
-                  </a:txBody>
-                  <a:tcPr/>
-                </a:tc>
-                <a:tc>
-                  <a:txBody>
-                    <a:bodyPr/>
-                    <a:lstStyle/>
-                    <a:p>
-                      <a:r>
-                        <a:rPr sz="1300" b="1">
-                          <a:solidFill>
-                            <a:srgbClr val="0B2B52"/>
-                          </a:solidFill>
-                        </a:rPr>
-                        <a:t>draw 2</a:t>
-                      </a:r>
-                    </a:p>
-                  </a:txBody>
-                  <a:tcPr/>
-                </a:tc>
-                <a:tc>
-                  <a:txBody>
-                    <a:bodyPr/>
-                    <a:lstStyle/>
-                    <a:p>
-                      <a:r>
-                        <a:rPr sz="1300" b="1">
-                          <a:solidFill>
-                            <a:srgbClr val="0B2B52"/>
-                          </a:solidFill>
-                        </a:rPr>
-                        <a:t>draw 3</a:t>
-                      </a:r>
-                    </a:p>
-                  </a:txBody>
-                  <a:tcPr/>
-                </a:tc>
-                <a:tc>
-                  <a:txBody>
-                    <a:bodyPr/>
-                    <a:lstStyle/>
-                    <a:p>
-                      <a:r>
-                        <a:rPr sz="1300" b="1">
-                          <a:solidFill>
-                            <a:srgbClr val="0B2B52"/>
-                          </a:solidFill>
-                        </a:rPr>
-                        <a:t>mean</a:t>
-                      </a:r>
-                    </a:p>
-                  </a:txBody>
-                  <a:tcPr/>
-                </a:tc>
-              </a:tr>
-              <a:tr h="457200">
-                <a:tc>
-                  <a:txBody>
-                    <a:bodyPr/>
-                    <a:lstStyle/>
-                    <a:p>
-                      <a:r>
-                        <a:rPr sz="1300" b="0">
-                          <a:solidFill>
-                            <a:srgbClr val="0B2B52"/>
-                          </a:solidFill>
-                        </a:rPr>
-                        <a:t>ipTM</a:t>
-                      </a:r>
-                    </a:p>
-                  </a:txBody>
-                  <a:tcPr/>
-                </a:tc>
-                <a:tc>
-                  <a:txBody>
-                    <a:bodyPr/>
-                    <a:lstStyle/>
-                    <a:p>
-                      <a:r>
-                        <a:rPr sz="1300" b="0">
-                          <a:solidFill>
-                            <a:srgbClr val="0B2B52"/>
-                          </a:solidFill>
-                        </a:rPr>
-                        <a:t>1.64</a:t>
-                      </a:r>
-                    </a:p>
-                  </a:txBody>
-                  <a:tcPr/>
-                </a:tc>
-                <a:tc>
-                  <a:txBody>
-                    <a:bodyPr/>
-                    <a:lstStyle/>
-                    <a:p>
-                      <a:r>
-                        <a:rPr sz="1300" b="0">
-                          <a:solidFill>
-                            <a:srgbClr val="0B2B52"/>
-                          </a:solidFill>
-                        </a:rPr>
-                        <a:t>1.50</a:t>
-                      </a:r>
-                    </a:p>
-                  </a:txBody>
-                  <a:tcPr/>
-                </a:tc>
-                <a:tc>
-                  <a:txBody>
-                    <a:bodyPr/>
-                    <a:lstStyle/>
-                    <a:p>
-                      <a:r>
-                        <a:rPr sz="1300" b="0">
-                          <a:solidFill>
-                            <a:srgbClr val="0B2B52"/>
-                          </a:solidFill>
-                        </a:rPr>
-                        <a:t>1.86</a:t>
-                      </a:r>
-                    </a:p>
-                  </a:txBody>
-                  <a:tcPr/>
-                </a:tc>
-                <a:tc>
-                  <a:txBody>
-                    <a:bodyPr/>
-                    <a:lstStyle/>
-                    <a:p>
-                      <a:r>
-                        <a:rPr sz="1300" b="0">
-                          <a:solidFill>
-                            <a:srgbClr val="0B2B52"/>
-                          </a:solidFill>
-                        </a:rPr>
-                        <a:t>1.73  (p = 0.007)</a:t>
-                      </a:r>
-                    </a:p>
-                  </a:txBody>
-                  <a:tcPr/>
-                </a:tc>
-              </a:tr>
-              <a:tr h="457200">
-                <a:tc>
-                  <a:txBody>
-                    <a:bodyPr/>
-                    <a:lstStyle/>
-                    <a:p>
-                      <a:r>
-                        <a:rPr sz="1300" b="0">
-                          <a:solidFill>
-                            <a:srgbClr val="0B2B52"/>
-                          </a:solidFill>
-                        </a:rPr>
-                        <a:t>interface pLDDT</a:t>
-                      </a:r>
-                    </a:p>
-                  </a:txBody>
-                  <a:tcPr/>
-                </a:tc>
-                <a:tc>
-                  <a:txBody>
-                    <a:bodyPr/>
-                    <a:lstStyle/>
-                    <a:p>
-                      <a:r>
-                        <a:rPr sz="1300" b="0">
-                          <a:solidFill>
-                            <a:srgbClr val="0B2B52"/>
-                          </a:solidFill>
-                        </a:rPr>
-                        <a:t>2.09</a:t>
-                      </a:r>
-                    </a:p>
-                  </a:txBody>
-                  <a:tcPr/>
-                </a:tc>
-                <a:tc>
-                  <a:txBody>
-                    <a:bodyPr/>
-                    <a:lstStyle/>
-                    <a:p>
-                      <a:r>
-                        <a:rPr sz="1300" b="0">
-                          <a:solidFill>
-                            <a:srgbClr val="0B2B52"/>
-                          </a:solidFill>
-                        </a:rPr>
-                        <a:t>2.05</a:t>
-                      </a:r>
-                    </a:p>
-                  </a:txBody>
-                  <a:tcPr/>
-                </a:tc>
-                <a:tc>
-                  <a:txBody>
-                    <a:bodyPr/>
-                    <a:lstStyle/>
-                    <a:p>
-                      <a:r>
-                        <a:rPr sz="1300" b="0">
-                          <a:solidFill>
-                            <a:srgbClr val="0B2B52"/>
-                          </a:solidFill>
-                        </a:rPr>
-                        <a:t>1.73</a:t>
-                      </a:r>
-                    </a:p>
-                  </a:txBody>
-                  <a:tcPr/>
-                </a:tc>
-                <a:tc>
-                  <a:txBody>
-                    <a:bodyPr/>
-                    <a:lstStyle/>
-                    <a:p>
-                      <a:r>
-                        <a:rPr sz="1300" b="0">
-                          <a:solidFill>
-                            <a:srgbClr val="0B2B52"/>
-                          </a:solidFill>
-                        </a:rPr>
-                        <a:t>1.91  (p = 0.020)</a:t>
-                      </a:r>
-                    </a:p>
-                  </a:txBody>
-                  <a:tcPr/>
-                </a:tc>
-              </a:tr>
-            </a:tbl>
-          </a:graphicData>
-        </a:graphic>
-      </p:graphicFrame>
-      <p:sp>
-        <p:nvSpPr>
-          <p:cNvPr id="9" name="TextBox 8"/>
-          <p:cNvSpPr txBox="1"/>
-          <p:nvPr/>
-        </p:nvSpPr>
-        <p:spPr>
-          <a:xfrm>
-            <a:off x="548640" y="3429000"/>
-            <a:ext cx="11155680" cy="1371600"/>
-          </a:xfrm>
-          <a:prstGeom prst="rect">
-            <a:avLst/>
-          </a:prstGeom>
-          <a:noFill/>
-        </p:spPr>
-        <p:txBody>
-          <a:bodyPr wrap="square">
-            <a:spAutoFit/>
-          </a:bodyPr>
-          <a:lstStyle/>
-          <a:p>
-            <a:pPr>
-              <a:spcAft>
-                <a:spcPts val="600"/>
-              </a:spcAft>
-            </a:pPr>
-            <a:r>
-              <a:rPr sz="1500" b="0">
-                <a:solidFill>
-                  <a:srgbClr val="0B2B52"/>
-                </a:solidFill>
-              </a:rPr>
-              <a:t>Draw 1 alone said interface pLDDT collapses held out.</a:t>
-            </a:r>
-          </a:p>
-          <a:p>
-            <a:pPr>
-              <a:spcAft>
-                <a:spcPts val="600"/>
-              </a:spcAft>
-            </a:pPr>
-            <a:r>
-              <a:rPr sz="1500" b="0">
-                <a:solidFill>
-                  <a:srgbClr val="0B2B52"/>
-                </a:solidFill>
-              </a:rPr>
-              <a:t>Draws 1 and 2 said ipTM specifically survives and interface pLDDT specifically fails.</a:t>
-            </a:r>
-          </a:p>
-          <a:p>
-            <a:pPr>
-              <a:spcAft>
-                <a:spcPts val="600"/>
-              </a:spcAft>
-            </a:pPr>
-            <a:r>
-              <a:rPr sz="1500" b="0">
-                <a:solidFill>
-                  <a:srgbClr val="0B2B52"/>
-                </a:solidFill>
-              </a:rPr>
-              <a:t>Draw 3 reverses the ordering. Averaged, the two differ by less than one draw's spread.</a:t>
-            </a:r>
-          </a:p>
-        </p:txBody>
-      </p:sp>
-      <p:sp>
-        <p:nvSpPr>
-          <p:cNvPr id="10" name="Rounded Rectangle 9"/>
+              <a:t>A peptide bond fixes consecutive alpha-carbons at 3.80 Å. Measuring every consecutive CA–CA distance:</a:t>
+            </a:r>
+          </a:p>
+        </p:txBody>
+      </p:sp>
+      <p:sp>
+        <p:nvSpPr>
+          <p:cNvPr id="8" name="Rounded Rectangle 7"/>
           <p:cNvSpPr/>
           <p:nvPr/>
         </p:nvSpPr>
         <p:spPr>
           <a:xfrm>
-            <a:off x="548640" y="4846320"/>
-            <a:ext cx="11155680" cy="960120"/>
+            <a:off x="548640" y="1874519"/>
+            <a:ext cx="5440680" cy="1463040"/>
           </a:xfrm>
           <a:prstGeom prst="roundRect">
             <a:avLst/>
@@ -12900,6 +12878,198 @@
           <a:bodyPr rtlCol="0" anchor="ctr" wrap="square"/>
           <a:lstStyle/>
           <a:p>
+            <a:pPr algn="ctr"/>
+            <a:r>
+              <a:rPr sz="2300" b="1">
+                <a:solidFill>
+                  <a:srgbClr val="FFFFFF"/>
+                </a:solidFill>
+              </a:rPr>
+              <a:t>14.0%</a:t>
+            </a:r>
+          </a:p>
+          <a:p>
+            <a:pPr algn="ctr"/>
+            <a:r>
+              <a:rPr sz="1050">
+                <a:solidFill>
+                  <a:srgbClr val="FFFFFF"/>
+                </a:solidFill>
+              </a:rPr>
+              <a:t>Boltz-2 at 10 steps — physically plausible backbone bonds</a:t>
+            </a:r>
+          </a:p>
+        </p:txBody>
+      </p:sp>
+      <p:sp>
+        <p:nvSpPr>
+          <p:cNvPr id="9" name="Rounded Rectangle 8"/>
+          <p:cNvSpPr/>
+          <p:nvPr/>
+        </p:nvSpPr>
+        <p:spPr>
+          <a:xfrm>
+            <a:off x="6263640" y="1874519"/>
+            <a:ext cx="5440680" cy="1463040"/>
+          </a:xfrm>
+          <a:prstGeom prst="roundRect">
+            <a:avLst/>
+          </a:prstGeom>
+          <a:solidFill>
+            <a:srgbClr val="2E7D32"/>
+          </a:solidFill>
+          <a:ln>
+            <a:noFill/>
+          </a:ln>
+        </p:spPr>
+        <p:style>
+          <a:lnRef idx="1">
+            <a:schemeClr val="accent1"/>
+          </a:lnRef>
+          <a:fillRef idx="3">
+            <a:schemeClr val="accent1"/>
+          </a:fillRef>
+          <a:effectRef idx="2">
+            <a:schemeClr val="accent1"/>
+          </a:effectRef>
+          <a:fontRef idx="minor">
+            <a:schemeClr val="lt1"/>
+          </a:fontRef>
+        </p:style>
+        <p:txBody>
+          <a:bodyPr rtlCol="0" anchor="ctr" wrap="square"/>
+          <a:lstStyle/>
+          <a:p>
+            <a:pPr algn="ctr"/>
+            <a:r>
+              <a:rPr sz="2300" b="1">
+                <a:solidFill>
+                  <a:srgbClr val="FFFFFF"/>
+                </a:solidFill>
+              </a:rPr>
+              <a:t>96.2%</a:t>
+            </a:r>
+          </a:p>
+          <a:p>
+            <a:pPr algn="ctr"/>
+            <a:r>
+              <a:rPr sz="1050">
+                <a:solidFill>
+                  <a:srgbClr val="FFFFFF"/>
+                </a:solidFill>
+              </a:rPr>
+              <a:t>DeCAF, distilled FOR 10 steps — same measurement</a:t>
+            </a:r>
+          </a:p>
+        </p:txBody>
+      </p:sp>
+      <p:sp>
+        <p:nvSpPr>
+          <p:cNvPr id="10" name="TextBox 9"/>
+          <p:cNvSpPr txBox="1"/>
+          <p:nvPr/>
+        </p:nvSpPr>
+        <p:spPr>
+          <a:xfrm>
+            <a:off x="548640" y="3611880"/>
+            <a:ext cx="11155680" cy="1371600"/>
+          </a:xfrm>
+          <a:prstGeom prst="rect">
+            <a:avLst/>
+          </a:prstGeom>
+          <a:noFill/>
+        </p:spPr>
+        <p:txBody>
+          <a:bodyPr wrap="square">
+            <a:spAutoFit/>
+          </a:bodyPr>
+          <a:lstStyle/>
+          <a:p>
+            <a:pPr>
+              <a:spcAft>
+                <a:spcPts val="600"/>
+              </a:spcAft>
+            </a:pPr>
+            <a:r>
+              <a:rPr sz="1500" b="0">
+                <a:solidFill>
+                  <a:srgbClr val="0B2B52"/>
+                </a:solidFill>
+              </a:rPr>
+              <a:t>Boltz-2: median CA–CA 5.48 Å, 56% of bonds beyond 5 Å, 99% of chains majority-broken.</a:t>
+            </a:r>
+          </a:p>
+          <a:p>
+            <a:pPr>
+              <a:spcAft>
+                <a:spcPts val="600"/>
+              </a:spcAft>
+            </a:pPr>
+            <a:r>
+              <a:rPr sz="1500" b="0">
+                <a:solidFill>
+                  <a:srgbClr val="0B2B52"/>
+                </a:solidFill>
+              </a:rPr>
+              <a:t>DeCAF:   median 3.74 Å, zero broken bonds.  Residue numbering is sequential —</a:t>
+            </a:r>
+          </a:p>
+          <a:p>
+            <a:pPr>
+              <a:spcAft>
+                <a:spcPts val="600"/>
+              </a:spcAft>
+            </a:pPr>
+            <a:r>
+              <a:rPr sz="1500" b="0">
+                <a:solidFill>
+                  <a:srgbClr val="0B2B52"/>
+                </a:solidFill>
+              </a:rPr>
+              <a:t>         this is not a file-ordering artefact. The backbone is genuinely not connected.</a:t>
+            </a:r>
+          </a:p>
+        </p:txBody>
+      </p:sp>
+      <p:sp>
+        <p:nvSpPr>
+          <p:cNvPr id="11" name="Rounded Rectangle 10"/>
+          <p:cNvSpPr/>
+          <p:nvPr/>
+        </p:nvSpPr>
+        <p:spPr>
+          <a:xfrm>
+            <a:off x="548640" y="4983480"/>
+            <a:ext cx="11155680" cy="960120"/>
+          </a:xfrm>
+          <a:prstGeom prst="roundRect">
+            <a:avLst/>
+          </a:prstGeom>
+          <a:solidFill>
+            <a:srgbClr val="2E7D32"/>
+          </a:solidFill>
+          <a:ln>
+            <a:noFill/>
+          </a:ln>
+        </p:spPr>
+        <p:style>
+          <a:lnRef idx="1">
+            <a:schemeClr val="accent1"/>
+          </a:lnRef>
+          <a:fillRef idx="3">
+            <a:schemeClr val="accent1"/>
+          </a:fillRef>
+          <a:effectRef idx="2">
+            <a:schemeClr val="accent1"/>
+          </a:effectRef>
+          <a:fontRef idx="minor">
+            <a:schemeClr val="lt1"/>
+          </a:fontRef>
+        </p:style>
+        <p:txBody>
+          <a:bodyPr rtlCol="0" anchor="ctr" wrap="square"/>
+          <a:lstStyle/>
+          <a:p>
             <a:pPr algn="ctr">
               <a:spcAft>
                 <a:spcPts val="600"/>
@@ -12911,7 +13081,7 @@
                   <a:srgbClr val="FFFFFF"/>
                 </a:solidFill>
               </a:rPr>
-              <a:t>Both claims withdrawn. Section 7.5's own finding, turned on this project's headline — twice.</a:t>
+              <a:t>Section 7.8 measured that distillation buys a 5–6× larger effect. This is what it bought: geometry.</a:t>
             </a:r>
           </a:p>
         </p:txBody>
@@ -13053,7 +13223,7 @@
                   <a:srgbClr val="FFFFFF"/>
                 </a:solidFill>
               </a:rPr>
-              <a:t>Measured — At Ten Steps the Coordinates Are Not a Protein</a:t>
+              <a:t>One Cause Behind Four Separate Failures</a:t>
             </a:r>
           </a:p>
         </p:txBody>
@@ -13142,7 +13312,7 @@
         </p:nvSpPr>
         <p:spPr>
           <a:xfrm>
-            <a:off x="548640" y="1188720"/>
+            <a:off x="548640" y="1143000"/>
             <a:ext cx="11155680" cy="640080"/>
           </a:xfrm>
           <a:prstGeom prst="rect">
@@ -13167,145 +13337,21 @@
                   <a:srgbClr val="0B2B52"/>
                 </a:solidFill>
               </a:rPr>
-              <a:t>A peptide bond fixes consecutive alpha-carbons at 3.80 Å. Measuring every consecutive CA–CA distance:</a:t>
-            </a:r>
-          </a:p>
-        </p:txBody>
-      </p:sp>
-      <p:sp>
-        <p:nvSpPr>
-          <p:cNvPr id="8" name="Rounded Rectangle 7"/>
-          <p:cNvSpPr/>
-          <p:nvPr/>
-        </p:nvSpPr>
-        <p:spPr>
-          <a:xfrm>
-            <a:off x="548640" y="1874519"/>
-            <a:ext cx="5440680" cy="1463040"/>
-          </a:xfrm>
-          <a:prstGeom prst="roundRect">
-            <a:avLst/>
-          </a:prstGeom>
-          <a:solidFill>
-            <a:srgbClr val="C62828"/>
-          </a:solidFill>
-          <a:ln>
-            <a:noFill/>
-          </a:ln>
-        </p:spPr>
-        <p:style>
-          <a:lnRef idx="1">
-            <a:schemeClr val="accent1"/>
-          </a:lnRef>
-          <a:fillRef idx="3">
-            <a:schemeClr val="accent1"/>
-          </a:fillRef>
-          <a:effectRef idx="2">
-            <a:schemeClr val="accent1"/>
-          </a:effectRef>
-          <a:fontRef idx="minor">
-            <a:schemeClr val="lt1"/>
-          </a:fontRef>
-        </p:style>
-        <p:txBody>
-          <a:bodyPr rtlCol="0" anchor="ctr" wrap="square"/>
-          <a:lstStyle/>
-          <a:p>
-            <a:pPr algn="ctr"/>
-            <a:r>
-              <a:rPr sz="2300" b="1">
-                <a:solidFill>
-                  <a:srgbClr val="FFFFFF"/>
-                </a:solidFill>
-              </a:rPr>
-              <a:t>14.0%</a:t>
-            </a:r>
-          </a:p>
-          <a:p>
-            <a:pPr algn="ctr"/>
-            <a:r>
-              <a:rPr sz="1050">
-                <a:solidFill>
-                  <a:srgbClr val="FFFFFF"/>
-                </a:solidFill>
-              </a:rPr>
-              <a:t>Boltz-2 at 10 steps — physically plausible backbone bonds</a:t>
-            </a:r>
-          </a:p>
-        </p:txBody>
-      </p:sp>
-      <p:sp>
-        <p:nvSpPr>
-          <p:cNvPr id="9" name="Rounded Rectangle 8"/>
-          <p:cNvSpPr/>
-          <p:nvPr/>
-        </p:nvSpPr>
-        <p:spPr>
-          <a:xfrm>
-            <a:off x="6263640" y="1874519"/>
-            <a:ext cx="5440680" cy="1463040"/>
-          </a:xfrm>
-          <a:prstGeom prst="roundRect">
-            <a:avLst/>
-          </a:prstGeom>
-          <a:solidFill>
-            <a:srgbClr val="2E7D32"/>
-          </a:solidFill>
-          <a:ln>
-            <a:noFill/>
-          </a:ln>
-        </p:spPr>
-        <p:style>
-          <a:lnRef idx="1">
-            <a:schemeClr val="accent1"/>
-          </a:lnRef>
-          <a:fillRef idx="3">
-            <a:schemeClr val="accent1"/>
-          </a:fillRef>
-          <a:effectRef idx="2">
-            <a:schemeClr val="accent1"/>
-          </a:effectRef>
-          <a:fontRef idx="minor">
-            <a:schemeClr val="lt1"/>
-          </a:fontRef>
-        </p:style>
-        <p:txBody>
-          <a:bodyPr rtlCol="0" anchor="ctr" wrap="square"/>
-          <a:lstStyle/>
-          <a:p>
-            <a:pPr algn="ctr"/>
-            <a:r>
-              <a:rPr sz="2300" b="1">
-                <a:solidFill>
-                  <a:srgbClr val="FFFFFF"/>
-                </a:solidFill>
-              </a:rPr>
-              <a:t>96.2%</a:t>
-            </a:r>
-          </a:p>
-          <a:p>
-            <a:pPr algn="ctr"/>
-            <a:r>
-              <a:rPr sz="1050">
-                <a:solidFill>
-                  <a:srgbClr val="FFFFFF"/>
-                </a:solidFill>
-              </a:rPr>
-              <a:t>DeCAF, distilled FOR 10 steps — same measurement</a:t>
-            </a:r>
-          </a:p>
-        </p:txBody>
-      </p:sp>
-      <p:sp>
-        <p:nvSpPr>
-          <p:cNvPr id="10" name="TextBox 9"/>
+              <a:t>Geometry-dependent readouts need a converged sampler. Four results now share one cause:</a:t>
+            </a:r>
+          </a:p>
+        </p:txBody>
+      </p:sp>
+      <p:sp>
+        <p:nvSpPr>
+          <p:cNvPr id="8" name="TextBox 7"/>
           <p:cNvSpPr txBox="1"/>
           <p:nvPr/>
         </p:nvSpPr>
         <p:spPr>
           <a:xfrm>
-            <a:off x="548640" y="3611880"/>
-            <a:ext cx="11155680" cy="1371600"/>
+            <a:off x="548640" y="1783080"/>
+            <a:ext cx="11155680" cy="914400"/>
           </a:xfrm>
           <a:prstGeom prst="rect">
             <a:avLst/>
@@ -13318,103 +13364,152 @@
           </a:bodyPr>
           <a:lstStyle/>
           <a:p>
-            <a:pPr>
-              <a:spcAft>
-                <a:spcPts val="600"/>
-              </a:spcAft>
-            </a:pPr>
-            <a:r>
-              <a:rPr sz="1500" b="0">
+            <a:r>
+              <a:rPr sz="1500" b="1">
                 <a:solidFill>
                   <a:srgbClr val="0B2B52"/>
                 </a:solidFill>
               </a:rPr>
-              <a:t>Boltz-2: median CA–CA 5.48 Å, 56% of bonds beyond 5 Å, 99% of chains majority-broken.</a:t>
-            </a:r>
-          </a:p>
-          <a:p>
-            <a:pPr>
-              <a:spcAft>
-                <a:spcPts val="600"/>
-              </a:spcAft>
-            </a:pPr>
-            <a:r>
-              <a:rPr sz="1500" b="0">
+              <a:t>pDockQ's contact term ran backwards</a:t>
+            </a:r>
+          </a:p>
+          <a:p>
+            <a:r>
+              <a:rPr sz="1250">
+                <a:solidFill>
+                  <a:srgbClr val="1E6FB8"/>
+                </a:solidFill>
+              </a:rPr>
+              <a:t>scrambles made more contacts than cognates — reverses on converged structures (cognate 61.4, scramble 51.8)</a:t>
+            </a:r>
+          </a:p>
+        </p:txBody>
+      </p:sp>
+      <p:sp>
+        <p:nvSpPr>
+          <p:cNvPr id="9" name="TextBox 8"/>
+          <p:cNvSpPr txBox="1"/>
+          <p:nvPr/>
+        </p:nvSpPr>
+        <p:spPr>
+          <a:xfrm>
+            <a:off x="548640" y="2807208"/>
+            <a:ext cx="11155680" cy="914400"/>
+          </a:xfrm>
+          <a:prstGeom prst="rect">
+            <a:avLst/>
+          </a:prstGeom>
+          <a:noFill/>
+        </p:spPr>
+        <p:txBody>
+          <a:bodyPr wrap="square">
+            <a:spAutoFit/>
+          </a:bodyPr>
+          <a:lstStyle/>
+          <a:p>
+            <a:r>
+              <a:rPr sz="1500" b="1">
                 <a:solidFill>
                   <a:srgbClr val="0B2B52"/>
                 </a:solidFill>
               </a:rPr>
-              <a:t>DeCAF:   median 3.74 Å, zero broken bonds.  Residue numbering is sequential —</a:t>
-            </a:r>
-          </a:p>
-          <a:p>
-            <a:pPr>
-              <a:spcAft>
-                <a:spcPts val="600"/>
-              </a:spcAft>
-            </a:pPr>
-            <a:r>
-              <a:rPr sz="1500" b="0">
+              <a:t>pDockQ2 repairs it</a:t>
+            </a:r>
+          </a:p>
+          <a:p>
+            <a:r>
+              <a:rPr sz="1250">
+                <a:solidFill>
+                  <a:srgbClr val="1E6FB8"/>
+                </a:solidFill>
+              </a:rPr>
+              <a:t>swapping the contact term for a PAE term: scramble control p = 0.797 → 0.00026</a:t>
+            </a:r>
+          </a:p>
+        </p:txBody>
+      </p:sp>
+      <p:sp>
+        <p:nvSpPr>
+          <p:cNvPr id="10" name="TextBox 9"/>
+          <p:cNvSpPr txBox="1"/>
+          <p:nvPr/>
+        </p:nvSpPr>
+        <p:spPr>
+          <a:xfrm>
+            <a:off x="548640" y="3831336"/>
+            <a:ext cx="11155680" cy="914400"/>
+          </a:xfrm>
+          <a:prstGeom prst="rect">
+            <a:avLst/>
+          </a:prstGeom>
+          <a:noFill/>
+        </p:spPr>
+        <p:txBody>
+          <a:bodyPr wrap="square">
+            <a:spAutoFit/>
+          </a:bodyPr>
+          <a:lstStyle/>
+          <a:p>
+            <a:r>
+              <a:rPr sz="1500" b="1">
                 <a:solidFill>
                   <a:srgbClr val="0B2B52"/>
                 </a:solidFill>
               </a:rPr>
-              <a:t>         this is not a file-ordering artefact. The backbone is genuinely not connected.</a:t>
-            </a:r>
-          </a:p>
-        </p:txBody>
-      </p:sp>
-      <p:sp>
-        <p:nvSpPr>
-          <p:cNvPr id="11" name="Rounded Rectangle 10"/>
-          <p:cNvSpPr/>
-          <p:nvPr/>
-        </p:nvSpPr>
-        <p:spPr>
-          <a:xfrm>
-            <a:off x="548640" y="4983480"/>
-            <a:ext cx="11155680" cy="960120"/>
-          </a:xfrm>
-          <a:prstGeom prst="roundRect">
-            <a:avLst/>
-          </a:prstGeom>
-          <a:solidFill>
-            <a:srgbClr val="2E7D32"/>
-          </a:solidFill>
-          <a:ln>
-            <a:noFill/>
-          </a:ln>
-        </p:spPr>
-        <p:style>
-          <a:lnRef idx="1">
-            <a:schemeClr val="accent1"/>
-          </a:lnRef>
-          <a:fillRef idx="3">
-            <a:schemeClr val="accent1"/>
-          </a:fillRef>
-          <a:effectRef idx="2">
-            <a:schemeClr val="accent1"/>
-          </a:effectRef>
-          <a:fontRef idx="minor">
-            <a:schemeClr val="lt1"/>
-          </a:fontRef>
-        </p:style>
-        <p:txBody>
-          <a:bodyPr rtlCol="0" anchor="ctr" wrap="square"/>
-          <a:lstStyle/>
-          <a:p>
-            <a:pPr algn="ctr">
-              <a:spcAft>
-                <a:spcPts val="600"/>
-              </a:spcAft>
-            </a:pPr>
-            <a:r>
-              <a:rPr sz="1700" b="1">
-                <a:solidFill>
-                  <a:srgbClr val="FFFFFF"/>
-                </a:solidFill>
-              </a:rPr>
-              <a:t>Section 7.8 measured that distillation buys a 5–6× larger effect. This is what it bought: geometry.</a:t>
+              <a:t>Minimum PAE failed here but is published as best-in-class</a:t>
+            </a:r>
+          </a:p>
+          <a:p>
+            <a:r>
+              <a:rPr sz="1250">
+                <a:solidFill>
+                  <a:srgbClr val="1E6FB8"/>
+                </a:solidFill>
+              </a:rPr>
+              <a:t>fails on Boltz-2 (p = 0.611), among the best on DeCAF (rank 1.55) — PAE predicts geometry, and was published at full sampling</a:t>
+            </a:r>
+          </a:p>
+        </p:txBody>
+      </p:sp>
+      <p:sp>
+        <p:nvSpPr>
+          <p:cNvPr id="11" name="TextBox 10"/>
+          <p:cNvSpPr txBox="1"/>
+          <p:nvPr/>
+        </p:nvSpPr>
+        <p:spPr>
+          <a:xfrm>
+            <a:off x="548640" y="4855464"/>
+            <a:ext cx="11155680" cy="914400"/>
+          </a:xfrm>
+          <a:prstGeom prst="rect">
+            <a:avLst/>
+          </a:prstGeom>
+          <a:noFill/>
+        </p:spPr>
+        <p:txBody>
+          <a:bodyPr wrap="square">
+            <a:spAutoFit/>
+          </a:bodyPr>
+          <a:lstStyle/>
+          <a:p>
+            <a:r>
+              <a:rPr sz="1500" b="1">
+                <a:solidFill>
+                  <a:srgbClr val="0B2B52"/>
+                </a:solidFill>
+              </a:rPr>
+              <a:t>Physics rescoring returned femtomolar affinities</a:t>
+            </a:r>
+          </a:p>
+          <a:p>
+            <a:r>
+              <a:rPr sz="1250">
+                <a:solidFill>
+                  <a:srgbClr val="1E6FB8"/>
+                </a:solidFill>
+              </a:rPr>
+              <a:t>PRODIGY on Boltz-2 structures: garbage in, not method failure</a:t>
             </a:r>
           </a:p>
         </p:txBody>
@@ -13556,7 +13651,7 @@
                   <a:srgbClr val="FFFFFF"/>
                 </a:solidFill>
               </a:rPr>
-              <a:t>One Cause Behind Four Separate Failures</a:t>
+              <a:t>Measured — Require the Match in Both Directions</a:t>
             </a:r>
           </a:p>
         </p:txBody>
@@ -13645,8 +13740,8 @@
         </p:nvSpPr>
         <p:spPr>
           <a:xfrm>
-            <a:off x="548640" y="1143000"/>
-            <a:ext cx="11155680" cy="640080"/>
+            <a:off x="548640" y="1170432"/>
+            <a:ext cx="11155680" cy="1005840"/>
           </a:xfrm>
           <a:prstGeom prst="rect">
             <a:avLst/>
@@ -13670,21 +13765,222 @@
                   <a:srgbClr val="0B2B52"/>
                 </a:solidFill>
               </a:rPr>
-              <a:t>Geometry-dependent readouts need a converged sampler. Four results now share one cause:</a:t>
-            </a:r>
-          </a:p>
-        </p:txBody>
-      </p:sp>
-      <p:sp>
-        <p:nvSpPr>
-          <p:cNvPr id="8" name="TextBox 7"/>
+              <a:t>Section 7 always asked: for this receptor, is the cognate the best peptide?</a:t>
+            </a:r>
+          </a:p>
+          <a:p>
+            <a:pPr>
+              <a:spcAft>
+                <a:spcPts val="600"/>
+              </a:spcAft>
+            </a:pPr>
+            <a:r>
+              <a:rPr sz="1500" b="0">
+                <a:solidFill>
+                  <a:srgbClr val="0B2B52"/>
+                </a:solidFill>
+              </a:rPr>
+              <a:t>The panel also contains the transpose: for this peptide, is its own receptor the best target?</a:t>
+            </a:r>
+          </a:p>
+        </p:txBody>
+      </p:sp>
+      <p:sp>
+        <p:nvSpPr>
+          <p:cNvPr id="8" name="Rounded Rectangle 7"/>
+          <p:cNvSpPr/>
+          <p:nvPr/>
+        </p:nvSpPr>
+        <p:spPr>
+          <a:xfrm>
+            <a:off x="548640" y="1965960"/>
+            <a:ext cx="3520440" cy="1463040"/>
+          </a:xfrm>
+          <a:prstGeom prst="roundRect">
+            <a:avLst/>
+          </a:prstGeom>
+          <a:solidFill>
+            <a:srgbClr val="2E7D32"/>
+          </a:solidFill>
+          <a:ln>
+            <a:noFill/>
+          </a:ln>
+        </p:spPr>
+        <p:style>
+          <a:lnRef idx="1">
+            <a:schemeClr val="accent1"/>
+          </a:lnRef>
+          <a:fillRef idx="3">
+            <a:schemeClr val="accent1"/>
+          </a:fillRef>
+          <a:effectRef idx="2">
+            <a:schemeClr val="accent1"/>
+          </a:effectRef>
+          <a:fontRef idx="minor">
+            <a:schemeClr val="lt1"/>
+          </a:fontRef>
+        </p:style>
+        <p:txBody>
+          <a:bodyPr rtlCol="0" anchor="ctr" wrap="square"/>
+          <a:lstStyle/>
+          <a:p>
+            <a:pPr algn="ctr"/>
+            <a:r>
+              <a:rPr sz="2300" b="1">
+                <a:solidFill>
+                  <a:srgbClr val="FFFFFF"/>
+                </a:solidFill>
+              </a:rPr>
+              <a:t>56% → 88%</a:t>
+            </a:r>
+          </a:p>
+          <a:p>
+            <a:pPr algn="ctr"/>
+            <a:r>
+              <a:rPr sz="1050">
+                <a:solidFill>
+                  <a:srgbClr val="FFFFFF"/>
+                </a:solidFill>
+              </a:rPr>
+              <a:t>precision, one-directional → reciprocal</a:t>
+            </a:r>
+          </a:p>
+        </p:txBody>
+      </p:sp>
+      <p:sp>
+        <p:nvSpPr>
+          <p:cNvPr id="9" name="Rounded Rectangle 8"/>
+          <p:cNvSpPr/>
+          <p:nvPr/>
+        </p:nvSpPr>
+        <p:spPr>
+          <a:xfrm>
+            <a:off x="4343400" y="1965960"/>
+            <a:ext cx="3520440" cy="1463040"/>
+          </a:xfrm>
+          <a:prstGeom prst="roundRect">
+            <a:avLst/>
+          </a:prstGeom>
+          <a:solidFill>
+            <a:srgbClr val="1E6FB8"/>
+          </a:solidFill>
+          <a:ln>
+            <a:noFill/>
+          </a:ln>
+        </p:spPr>
+        <p:style>
+          <a:lnRef idx="1">
+            <a:schemeClr val="accent1"/>
+          </a:lnRef>
+          <a:fillRef idx="3">
+            <a:schemeClr val="accent1"/>
+          </a:fillRef>
+          <a:effectRef idx="2">
+            <a:schemeClr val="accent1"/>
+          </a:effectRef>
+          <a:fontRef idx="minor">
+            <a:schemeClr val="lt1"/>
+          </a:fontRef>
+        </p:style>
+        <p:txBody>
+          <a:bodyPr rtlCol="0" anchor="ctr" wrap="square"/>
+          <a:lstStyle/>
+          <a:p>
+            <a:pPr algn="ctr"/>
+            <a:r>
+              <a:rPr sz="2300" b="1">
+                <a:solidFill>
+                  <a:srgbClr val="FFFFFF"/>
+                </a:solidFill>
+              </a:rPr>
+              <a:t>87% / 23%</a:t>
+            </a:r>
+          </a:p>
+          <a:p>
+            <a:pPr algn="ctr"/>
+            <a:r>
+              <a:rPr sz="1050">
+                <a:solidFill>
+                  <a:srgbClr val="FFFFFF"/>
+                </a:solidFill>
+              </a:rPr>
+              <a:t>of wrong / right calls discarded</a:t>
+            </a:r>
+          </a:p>
+        </p:txBody>
+      </p:sp>
+      <p:sp>
+        <p:nvSpPr>
+          <p:cNvPr id="10" name="Rounded Rectangle 9"/>
+          <p:cNvSpPr/>
+          <p:nvPr/>
+        </p:nvSpPr>
+        <p:spPr>
+          <a:xfrm>
+            <a:off x="8138160" y="1965960"/>
+            <a:ext cx="3566160" cy="1463040"/>
+          </a:xfrm>
+          <a:prstGeom prst="roundRect">
+            <a:avLst/>
+          </a:prstGeom>
+          <a:solidFill>
+            <a:srgbClr val="0E8F9A"/>
+          </a:solidFill>
+          <a:ln>
+            <a:noFill/>
+          </a:ln>
+        </p:spPr>
+        <p:style>
+          <a:lnRef idx="1">
+            <a:schemeClr val="accent1"/>
+          </a:lnRef>
+          <a:fillRef idx="3">
+            <a:schemeClr val="accent1"/>
+          </a:fillRef>
+          <a:effectRef idx="2">
+            <a:schemeClr val="accent1"/>
+          </a:effectRef>
+          <a:fontRef idx="minor">
+            <a:schemeClr val="lt1"/>
+          </a:fontRef>
+        </p:style>
+        <p:txBody>
+          <a:bodyPr rtlCol="0" anchor="ctr" wrap="square"/>
+          <a:lstStyle/>
+          <a:p>
+            <a:pPr algn="ctr"/>
+            <a:r>
+              <a:rPr sz="2300" b="1">
+                <a:solidFill>
+                  <a:srgbClr val="FFFFFF"/>
+                </a:solidFill>
+              </a:rPr>
+              <a:t>12 of 12</a:t>
+            </a:r>
+          </a:p>
+          <a:p>
+            <a:pPr algn="ctr"/>
+            <a:r>
+              <a:rPr sz="1050">
+                <a:solidFill>
+                  <a:srgbClr val="FFFFFF"/>
+                </a:solidFill>
+              </a:rPr>
+              <a:t>combinations improved</a:t>
+            </a:r>
+          </a:p>
+        </p:txBody>
+      </p:sp>
+      <p:sp>
+        <p:nvSpPr>
+          <p:cNvPr id="11" name="TextBox 10"/>
           <p:cNvSpPr txBox="1"/>
           <p:nvPr/>
         </p:nvSpPr>
         <p:spPr>
           <a:xfrm>
-            <a:off x="548640" y="1783080"/>
-            <a:ext cx="11155680" cy="914400"/>
+            <a:off x="548640" y="3703320"/>
+            <a:ext cx="11155680" cy="1005840"/>
           </a:xfrm>
           <a:prstGeom prst="rect">
             <a:avLst/>
@@ -13697,152 +13993,88 @@
           </a:bodyPr>
           <a:lstStyle/>
           <a:p>
-            <a:r>
-              <a:rPr sz="1500" b="1">
+            <a:pPr>
+              <a:spcAft>
+                <a:spcPts val="600"/>
+              </a:spcAft>
+            </a:pPr>
+            <a:r>
+              <a:rPr sz="1500" b="0">
                 <a:solidFill>
                   <a:srgbClr val="0B2B52"/>
                 </a:solidFill>
               </a:rPr>
-              <a:t>pDockQ's contact term ran backwards</a:t>
-            </a:r>
-          </a:p>
-          <a:p>
-            <a:r>
-              <a:rPr sz="1250">
-                <a:solidFill>
-                  <a:srgbClr val="1E6FB8"/>
-                </a:solidFill>
-              </a:rPr>
-              <a:t>scrambles made more contacts than cognates — reverses on converged structures (cognate 61.4, scramble 51.8)</a:t>
-            </a:r>
-          </a:p>
-        </p:txBody>
-      </p:sp>
-      <p:sp>
-        <p:nvSpPr>
-          <p:cNvPr id="9" name="TextBox 8"/>
-          <p:cNvSpPr txBox="1"/>
-          <p:nvPr/>
-        </p:nvSpPr>
-        <p:spPr>
-          <a:xfrm>
-            <a:off x="548640" y="2807208"/>
-            <a:ext cx="11155680" cy="914400"/>
-          </a:xfrm>
-          <a:prstGeom prst="rect">
-            <a:avLst/>
-          </a:prstGeom>
-          <a:noFill/>
-        </p:spPr>
-        <p:txBody>
-          <a:bodyPr wrap="square">
-            <a:spAutoFit/>
-          </a:bodyPr>
-          <a:lstStyle/>
-          <a:p>
-            <a:r>
-              <a:rPr sz="1500" b="1">
+              <a:t>Two panels x two readouts x five draws. Enrichment 2.3x → 3.5x, keeping 49% of calls.</a:t>
+            </a:r>
+          </a:p>
+          <a:p>
+            <a:pPr>
+              <a:spcAft>
+                <a:spcPts val="600"/>
+              </a:spcAft>
+            </a:pPr>
+            <a:r>
+              <a:rPr sz="1500" b="0">
                 <a:solidFill>
                   <a:srgbClr val="0B2B52"/>
                 </a:solidFill>
               </a:rPr>
-              <a:t>pDockQ2 repairs it</a:t>
-            </a:r>
-          </a:p>
-          <a:p>
-            <a:r>
-              <a:rPr sz="1250">
-                <a:solidFill>
-                  <a:srgbClr val="1E6FB8"/>
-                </a:solidFill>
-              </a:rPr>
-              <a:t>swapping the contact term for a PAE term: scramble control p = 0.797 → 0.00026</a:t>
-            </a:r>
-          </a:p>
-        </p:txBody>
-      </p:sp>
-      <p:sp>
-        <p:nvSpPr>
-          <p:cNvPr id="10" name="TextBox 9"/>
-          <p:cNvSpPr txBox="1"/>
-          <p:nvPr/>
-        </p:nvSpPr>
-        <p:spPr>
-          <a:xfrm>
-            <a:off x="548640" y="3831336"/>
-            <a:ext cx="11155680" cy="914400"/>
-          </a:xfrm>
-          <a:prstGeom prst="rect">
-            <a:avLst/>
-          </a:prstGeom>
-          <a:noFill/>
-        </p:spPr>
-        <p:txBody>
-          <a:bodyPr wrap="square">
-            <a:spAutoFit/>
-          </a:bodyPr>
-          <a:lstStyle/>
-          <a:p>
-            <a:r>
-              <a:rPr sz="1500" b="1">
-                <a:solidFill>
-                  <a:srgbClr val="0B2B52"/>
-                </a:solidFill>
-              </a:rPr>
-              <a:t>Minimum PAE failed here but is published as best-in-class</a:t>
-            </a:r>
-          </a:p>
-          <a:p>
-            <a:r>
-              <a:rPr sz="1250">
-                <a:solidFill>
-                  <a:srgbClr val="1E6FB8"/>
-                </a:solidFill>
-              </a:rPr>
-              <a:t>fails on Boltz-2 (p = 0.611), among the best on DeCAF (rank 1.55) — PAE predicts geometry, and was published at full sampling</a:t>
-            </a:r>
-          </a:p>
-        </p:txBody>
-      </p:sp>
-      <p:sp>
-        <p:nvSpPr>
-          <p:cNvPr id="11" name="TextBox 10"/>
-          <p:cNvSpPr txBox="1"/>
-          <p:nvPr/>
-        </p:nvSpPr>
-        <p:spPr>
-          <a:xfrm>
-            <a:off x="548640" y="4855464"/>
-            <a:ext cx="11155680" cy="914400"/>
-          </a:xfrm>
-          <a:prstGeom prst="rect">
-            <a:avLst/>
-          </a:prstGeom>
-          <a:noFill/>
-        </p:spPr>
-        <p:txBody>
-          <a:bodyPr wrap="square">
-            <a:spAutoFit/>
-          </a:bodyPr>
-          <a:lstStyle/>
-          <a:p>
-            <a:r>
-              <a:rPr sz="1500" b="1">
-                <a:solidFill>
-                  <a:srgbClr val="0B2B52"/>
-                </a:solidFill>
-              </a:rPr>
-              <a:t>Physics rescoring returned femtomolar affinities</a:t>
-            </a:r>
-          </a:p>
-          <a:p>
-            <a:r>
-              <a:rPr sz="1250">
-                <a:solidFill>
-                  <a:srgbClr val="1E6FB8"/>
-                </a:solidFill>
-              </a:rPr>
-              <a:t>PRODIGY on Boltz-2 structures: garbage in, not method failure</a:t>
+              <a:t>A filter that only shrank the set would discard both classes in proportion — it does not.</a:t>
+            </a:r>
+          </a:p>
+        </p:txBody>
+      </p:sp>
+      <p:sp>
+        <p:nvSpPr>
+          <p:cNvPr id="12" name="Rounded Rectangle 11"/>
+          <p:cNvSpPr/>
+          <p:nvPr/>
+        </p:nvSpPr>
+        <p:spPr>
+          <a:xfrm>
+            <a:off x="548640" y="4572000"/>
+            <a:ext cx="11155680" cy="960120"/>
+          </a:xfrm>
+          <a:prstGeom prst="roundRect">
+            <a:avLst/>
+          </a:prstGeom>
+          <a:solidFill>
+            <a:srgbClr val="2E7D32"/>
+          </a:solidFill>
+          <a:ln>
+            <a:noFill/>
+          </a:ln>
+        </p:spPr>
+        <p:style>
+          <a:lnRef idx="1">
+            <a:schemeClr val="accent1"/>
+          </a:lnRef>
+          <a:fillRef idx="3">
+            <a:schemeClr val="accent1"/>
+          </a:fillRef>
+          <a:effectRef idx="2">
+            <a:schemeClr val="accent1"/>
+          </a:effectRef>
+          <a:fontRef idx="minor">
+            <a:schemeClr val="lt1"/>
+          </a:fontRef>
+        </p:style>
+        <p:txBody>
+          <a:bodyPr rtlCol="0" anchor="ctr" wrap="square"/>
+          <a:lstStyle/>
+          <a:p>
+            <a:pPr algn="ctr">
+              <a:spcAft>
+                <a:spcPts val="600"/>
+              </a:spcAft>
+            </a:pPr>
+            <a:r>
+              <a:rPr sz="1700" b="1">
+                <a:solidFill>
+                  <a:srgbClr val="FFFFFF"/>
+                </a:solidFill>
+              </a:rPr>
+              <a:t>The only intervention in this work that improved in every panel, readout and draw tested.</a:t>
             </a:r>
           </a:p>
         </p:txBody>
@@ -13984,7 +14216,7 @@
                   <a:srgbClr val="FFFFFF"/>
                 </a:solidFill>
               </a:rPr>
-              <a:t>Measured — Require the Match in Both Directions</a:t>
+              <a:t>Two Ways Out That Did Not Work — and What They Explain</a:t>
             </a:r>
           </a:p>
         </p:txBody>
@@ -14073,8 +14305,8 @@
         </p:nvSpPr>
         <p:spPr>
           <a:xfrm>
-            <a:off x="548640" y="1170432"/>
-            <a:ext cx="11155680" cy="1005840"/>
+            <a:off x="548640" y="1143000"/>
+            <a:ext cx="11155680" cy="640080"/>
           </a:xfrm>
           <a:prstGeom prst="rect">
             <a:avLst/>
@@ -14098,42 +14330,113 @@
                   <a:srgbClr val="0B2B52"/>
                 </a:solidFill>
               </a:rPr>
-              <a:t>Section 7 always asked: for this receptor, is the cognate the best peptide?</a:t>
-            </a:r>
-          </a:p>
-          <a:p>
-            <a:pPr>
-              <a:spcAft>
-                <a:spcPts val="600"/>
-              </a:spcAft>
-            </a:pPr>
-            <a:r>
-              <a:rPr sz="1500" b="0">
+              <a:t>Both used information the confidence head does not provide.</a:t>
+            </a:r>
+          </a:p>
+        </p:txBody>
+      </p:sp>
+      <p:sp>
+        <p:nvSpPr>
+          <p:cNvPr id="8" name="TextBox 7"/>
+          <p:cNvSpPr txBox="1"/>
+          <p:nvPr/>
+        </p:nvSpPr>
+        <p:spPr>
+          <a:xfrm>
+            <a:off x="548640" y="1783080"/>
+            <a:ext cx="11155680" cy="1188720"/>
+          </a:xfrm>
+          <a:prstGeom prst="rect">
+            <a:avLst/>
+          </a:prstGeom>
+          <a:noFill/>
+        </p:spPr>
+        <p:txBody>
+          <a:bodyPr wrap="square">
+            <a:spAutoFit/>
+          </a:bodyPr>
+          <a:lstStyle/>
+          <a:p>
+            <a:r>
+              <a:rPr sz="1600" b="1">
+                <a:solidFill>
+                  <a:srgbClr val="C62828"/>
+                </a:solidFill>
+              </a:rPr>
+              <a:t>Site correctness vs the crystal — NULL</a:t>
+            </a:r>
+          </a:p>
+          <a:p>
+            <a:r>
+              <a:rPr sz="1300">
                 <a:solidFill>
                   <a:srgbClr val="0B2B52"/>
                 </a:solidFill>
               </a:rPr>
-              <a:t>The panel also contains the transpose: for this peptide, is its own receptor the best target?</a:t>
-            </a:r>
-          </a:p>
-        </p:txBody>
-      </p:sp>
-      <p:sp>
-        <p:nvSpPr>
-          <p:cNvPr id="8" name="Rounded Rectangle 7"/>
+              <a:t>cognate 0.452, decoy 0.445, scramble 0.449 site precision.  Rank 2.50 vs chance 2.50, p = 0.906.  The model finds the true groove 3x better than chance — for every peptide equally.</a:t>
+            </a:r>
+          </a:p>
+        </p:txBody>
+      </p:sp>
+      <p:sp>
+        <p:nvSpPr>
+          <p:cNvPr id="9" name="TextBox 8"/>
+          <p:cNvSpPr txBox="1"/>
+          <p:nvPr/>
+        </p:nvSpPr>
+        <p:spPr>
+          <a:xfrm>
+            <a:off x="548640" y="3291839"/>
+            <a:ext cx="11155680" cy="1188720"/>
+          </a:xfrm>
+          <a:prstGeom prst="rect">
+            <a:avLst/>
+          </a:prstGeom>
+          <a:noFill/>
+        </p:spPr>
+        <p:txBody>
+          <a:bodyPr wrap="square">
+            <a:spAutoFit/>
+          </a:bodyPr>
+          <a:lstStyle/>
+          <a:p>
+            <a:r>
+              <a:rPr sz="1600" b="1">
+                <a:solidFill>
+                  <a:srgbClr val="C62828"/>
+                </a:solidFill>
+              </a:rPr>
+              <a:t>Pose agreement across draws — NULL</a:t>
+            </a:r>
+          </a:p>
+          <a:p>
+            <a:r>
+              <a:rPr sz="1300">
+                <a:solidFill>
+                  <a:srgbClr val="0B2B52"/>
+                </a:solidFill>
+              </a:rPr>
+              <a:t>peptide RMSD between draws: cognate 8.35 A, decoy 9.67 A, scramble 9.99 A.  p = 0.129, and only p = 0.350 once receptor reproducibility is regressed out.</a:t>
+            </a:r>
+          </a:p>
+        </p:txBody>
+      </p:sp>
+      <p:sp>
+        <p:nvSpPr>
+          <p:cNvPr id="10" name="Rounded Rectangle 9"/>
           <p:cNvSpPr/>
           <p:nvPr/>
         </p:nvSpPr>
         <p:spPr>
           <a:xfrm>
-            <a:off x="548640" y="1965960"/>
-            <a:ext cx="3520440" cy="1463040"/>
+            <a:off x="548640" y="4892040"/>
+            <a:ext cx="11155680" cy="960120"/>
           </a:xfrm>
           <a:prstGeom prst="roundRect">
             <a:avLst/>
           </a:prstGeom>
           <a:solidFill>
-            <a:srgbClr val="2E7D32"/>
+            <a:srgbClr val="0B2B52"/>
           </a:solidFill>
           <a:ln>
             <a:noFill/>
@@ -14157,257 +14460,18 @@
           <a:bodyPr rtlCol="0" anchor="ctr" wrap="square"/>
           <a:lstStyle/>
           <a:p>
-            <a:pPr algn="ctr"/>
-            <a:r>
-              <a:rPr sz="2300" b="1">
+            <a:pPr algn="ctr">
+              <a:spcAft>
+                <a:spcPts val="600"/>
+              </a:spcAft>
+            </a:pPr>
+            <a:r>
+              <a:rPr sz="1700" b="1">
                 <a:solidFill>
                   <a:srgbClr val="FFFFFF"/>
                 </a:solidFill>
               </a:rPr>
-              <a:t>56% → 88%</a:t>
-            </a:r>
-          </a:p>
-          <a:p>
-            <a:pPr algn="ctr"/>
-            <a:r>
-              <a:rPr sz="1050">
-                <a:solidFill>
-                  <a:srgbClr val="FFFFFF"/>
-                </a:solidFill>
-              </a:rPr>
-              <a:t>precision, one-directional → reciprocal</a:t>
-            </a:r>
-          </a:p>
-        </p:txBody>
-      </p:sp>
-      <p:sp>
-        <p:nvSpPr>
-          <p:cNvPr id="9" name="Rounded Rectangle 8"/>
-          <p:cNvSpPr/>
-          <p:nvPr/>
-        </p:nvSpPr>
-        <p:spPr>
-          <a:xfrm>
-            <a:off x="4343400" y="1965960"/>
-            <a:ext cx="3520440" cy="1463040"/>
-          </a:xfrm>
-          <a:prstGeom prst="roundRect">
-            <a:avLst/>
-          </a:prstGeom>
-          <a:solidFill>
-            <a:srgbClr val="1E6FB8"/>
-          </a:solidFill>
-          <a:ln>
-            <a:noFill/>
-          </a:ln>
-        </p:spPr>
-        <p:style>
-          <a:lnRef idx="1">
-            <a:schemeClr val="accent1"/>
-          </a:lnRef>
-          <a:fillRef idx="3">
-            <a:schemeClr val="accent1"/>
-          </a:fillRef>
-          <a:effectRef idx="2">
-            <a:schemeClr val="accent1"/>
-          </a:effectRef>
-          <a:fontRef idx="minor">
-            <a:schemeClr val="lt1"/>
-          </a:fontRef>
-        </p:style>
-        <p:txBody>
-          <a:bodyPr rtlCol="0" anchor="ctr" wrap="square"/>
-          <a:lstStyle/>
-          <a:p>
-            <a:pPr algn="ctr"/>
-            <a:r>
-              <a:rPr sz="2300" b="1">
-                <a:solidFill>
-                  <a:srgbClr val="FFFFFF"/>
-                </a:solidFill>
-              </a:rPr>
-              <a:t>87% / 23%</a:t>
-            </a:r>
-          </a:p>
-          <a:p>
-            <a:pPr algn="ctr"/>
-            <a:r>
-              <a:rPr sz="1050">
-                <a:solidFill>
-                  <a:srgbClr val="FFFFFF"/>
-                </a:solidFill>
-              </a:rPr>
-              <a:t>of wrong / right calls discarded</a:t>
-            </a:r>
-          </a:p>
-        </p:txBody>
-      </p:sp>
-      <p:sp>
-        <p:nvSpPr>
-          <p:cNvPr id="10" name="Rounded Rectangle 9"/>
-          <p:cNvSpPr/>
-          <p:nvPr/>
-        </p:nvSpPr>
-        <p:spPr>
-          <a:xfrm>
-            <a:off x="8138160" y="1965960"/>
-            <a:ext cx="3566160" cy="1463040"/>
-          </a:xfrm>
-          <a:prstGeom prst="roundRect">
-            <a:avLst/>
-          </a:prstGeom>
-          <a:solidFill>
-            <a:srgbClr val="0E8F9A"/>
-          </a:solidFill>
-          <a:ln>
-            <a:noFill/>
-          </a:ln>
-        </p:spPr>
-        <p:style>
-          <a:lnRef idx="1">
-            <a:schemeClr val="accent1"/>
-          </a:lnRef>
-          <a:fillRef idx="3">
-            <a:schemeClr val="accent1"/>
-          </a:fillRef>
-          <a:effectRef idx="2">
-            <a:schemeClr val="accent1"/>
-          </a:effectRef>
-          <a:fontRef idx="minor">
-            <a:schemeClr val="lt1"/>
-          </a:fontRef>
-        </p:style>
-        <p:txBody>
-          <a:bodyPr rtlCol="0" anchor="ctr" wrap="square"/>
-          <a:lstStyle/>
-          <a:p>
-            <a:pPr algn="ctr"/>
-            <a:r>
-              <a:rPr sz="2300" b="1">
-                <a:solidFill>
-                  <a:srgbClr val="FFFFFF"/>
-                </a:solidFill>
-              </a:rPr>
-              <a:t>12 of 12</a:t>
-            </a:r>
-          </a:p>
-          <a:p>
-            <a:pPr algn="ctr"/>
-            <a:r>
-              <a:rPr sz="1050">
-                <a:solidFill>
-                  <a:srgbClr val="FFFFFF"/>
-                </a:solidFill>
-              </a:rPr>
-              <a:t>combinations improved</a:t>
-            </a:r>
-          </a:p>
-        </p:txBody>
-      </p:sp>
-      <p:sp>
-        <p:nvSpPr>
-          <p:cNvPr id="11" name="TextBox 10"/>
-          <p:cNvSpPr txBox="1"/>
-          <p:nvPr/>
-        </p:nvSpPr>
-        <p:spPr>
-          <a:xfrm>
-            <a:off x="548640" y="3703320"/>
-            <a:ext cx="11155680" cy="1005840"/>
-          </a:xfrm>
-          <a:prstGeom prst="rect">
-            <a:avLst/>
-          </a:prstGeom>
-          <a:noFill/>
-        </p:spPr>
-        <p:txBody>
-          <a:bodyPr wrap="square">
-            <a:spAutoFit/>
-          </a:bodyPr>
-          <a:lstStyle/>
-          <a:p>
-            <a:pPr>
-              <a:spcAft>
-                <a:spcPts val="600"/>
-              </a:spcAft>
-            </a:pPr>
-            <a:r>
-              <a:rPr sz="1500" b="0">
-                <a:solidFill>
-                  <a:srgbClr val="0B2B52"/>
-                </a:solidFill>
-              </a:rPr>
-              <a:t>Two panels x two readouts x five draws. Enrichment 2.3x → 3.5x, keeping 49% of calls.</a:t>
-            </a:r>
-          </a:p>
-          <a:p>
-            <a:pPr>
-              <a:spcAft>
-                <a:spcPts val="600"/>
-              </a:spcAft>
-            </a:pPr>
-            <a:r>
-              <a:rPr sz="1500" b="0">
-                <a:solidFill>
-                  <a:srgbClr val="0B2B52"/>
-                </a:solidFill>
-              </a:rPr>
-              <a:t>A filter that only shrank the set would discard both classes in proportion — it does not.</a:t>
-            </a:r>
-          </a:p>
-        </p:txBody>
-      </p:sp>
-      <p:sp>
-        <p:nvSpPr>
-          <p:cNvPr id="12" name="Rounded Rectangle 11"/>
-          <p:cNvSpPr/>
-          <p:nvPr/>
-        </p:nvSpPr>
-        <p:spPr>
-          <a:xfrm>
-            <a:off x="548640" y="4572000"/>
-            <a:ext cx="11155680" cy="960120"/>
-          </a:xfrm>
-          <a:prstGeom prst="roundRect">
-            <a:avLst/>
-          </a:prstGeom>
-          <a:solidFill>
-            <a:srgbClr val="2E7D32"/>
-          </a:solidFill>
-          <a:ln>
-            <a:noFill/>
-          </a:ln>
-        </p:spPr>
-        <p:style>
-          <a:lnRef idx="1">
-            <a:schemeClr val="accent1"/>
-          </a:lnRef>
-          <a:fillRef idx="3">
-            <a:schemeClr val="accent1"/>
-          </a:fillRef>
-          <a:effectRef idx="2">
-            <a:schemeClr val="accent1"/>
-          </a:effectRef>
-          <a:fontRef idx="minor">
-            <a:schemeClr val="lt1"/>
-          </a:fontRef>
-        </p:style>
-        <p:txBody>
-          <a:bodyPr rtlCol="0" anchor="ctr" wrap="square"/>
-          <a:lstStyle/>
-          <a:p>
-            <a:pPr algn="ctr">
-              <a:spcAft>
-                <a:spcPts val="600"/>
-              </a:spcAft>
-            </a:pPr>
-            <a:r>
-              <a:rPr sz="1700" b="1">
-                <a:solidFill>
-                  <a:srgbClr val="FFFFFF"/>
-                </a:solidFill>
-              </a:rPr>
-              <a:t>The only intervention in this work that improved in every panel, readout and draw tested.</a:t>
+              <a:t>Every peptide lands in the same correct pocket, then sits 8-10 A differently within it on each draw.</a:t>
             </a:r>
           </a:p>
         </p:txBody>
@@ -15308,7 +15372,7 @@
                   <a:srgbClr val="FFFFFF"/>
                 </a:solidFill>
               </a:rPr>
-              <a:t>Two Ways Out That Did Not Work — and What They Explain</a:t>
+              <a:t>Measured — The Settings Confound Was Real</a:t>
             </a:r>
           </a:p>
         </p:txBody>
@@ -15397,8 +15461,8 @@
         </p:nvSpPr>
         <p:spPr>
           <a:xfrm>
-            <a:off x="548640" y="1143000"/>
-            <a:ext cx="11155680" cy="640080"/>
+            <a:off x="548640" y="1115568"/>
+            <a:ext cx="11155680" cy="850392"/>
           </a:xfrm>
           <a:prstGeom prst="rect">
             <a:avLst/>
@@ -15417,12 +15481,42 @@
               </a:spcAft>
             </a:pPr>
             <a:r>
-              <a:rPr sz="1500" b="0">
+              <a:rPr sz="1400" b="0">
                 <a:solidFill>
                   <a:srgbClr val="0B2B52"/>
                 </a:solidFill>
               </a:rPr>
-              <a:t>Both used information the confidence head does not provide.</a:t>
+              <a:t>Everything above: 10 sampling steps of an intended 200, 1 recycling of 3, MSA 32.</a:t>
+            </a:r>
+          </a:p>
+          <a:p>
+            <a:pPr>
+              <a:spcAft>
+                <a:spcPts val="600"/>
+              </a:spcAft>
+            </a:pPr>
+            <a:r>
+              <a:rPr sz="1400" b="0">
+                <a:solidFill>
+                  <a:srgbClr val="0B2B52"/>
+                </a:solidFill>
+              </a:rPr>
+              <a:t>Same model, same device, settings raised. Cognate − scramble, Cohen's d:</a:t>
+            </a:r>
+          </a:p>
+          <a:p>
+            <a:pPr>
+              <a:spcAft>
+                <a:spcPts val="600"/>
+              </a:spcAft>
+            </a:pPr>
+            <a:r>
+              <a:rPr sz="1400" b="0">
+                <a:solidFill>
+                  <a:srgbClr val="0B2B52"/>
+                </a:solidFill>
+              </a:rPr>
+              <a:t>     ipTM 0.45 → 1.25     interface pLDDT 0.28 → 1.52     receptor side 0.12 → 1.45</a:t>
             </a:r>
           </a:p>
         </p:txBody>
@@ -15435,8 +15529,8 @@
         </p:nvSpPr>
         <p:spPr>
           <a:xfrm>
-            <a:off x="548640" y="1783080"/>
-            <a:ext cx="11155680" cy="1188720"/>
+            <a:off x="548640" y="2103120"/>
+            <a:ext cx="11155680" cy="539496"/>
           </a:xfrm>
           <a:prstGeom prst="rect">
             <a:avLst/>
@@ -15449,70 +15543,312 @@
           </a:bodyPr>
           <a:lstStyle/>
           <a:p>
-            <a:r>
-              <a:rPr sz="1600" b="1">
-                <a:solidFill>
-                  <a:srgbClr val="C62828"/>
-                </a:solidFill>
-              </a:rPr>
-              <a:t>Site correctness vs the crystal — NULL</a:t>
-            </a:r>
-          </a:p>
-          <a:p>
-            <a:r>
-              <a:rPr sz="1300">
+            <a:pPr>
+              <a:spcAft>
+                <a:spcPts val="600"/>
+              </a:spcAft>
+            </a:pPr>
+            <a:r>
+              <a:rPr sz="1400" b="0">
                 <a:solidFill>
                   <a:srgbClr val="0B2B52"/>
                 </a:solidFill>
               </a:rPr>
-              <a:t>cognate 0.452, decoy 0.445, scramble 0.449 site precision.  Rank 2.50 vs chance 2.50, p = 0.906.  The model finds the true groove 3x better than chance — for every peptide equally.</a:t>
-            </a:r>
-          </a:p>
-        </p:txBody>
-      </p:sp>
-      <p:sp>
-        <p:nvSpPr>
-          <p:cNvPr id="9" name="TextBox 8"/>
-          <p:cNvSpPr txBox="1"/>
-          <p:nvPr/>
-        </p:nvSpPr>
-        <p:spPr>
-          <a:xfrm>
-            <a:off x="548640" y="3291839"/>
-            <a:ext cx="11155680" cy="1188720"/>
-          </a:xfrm>
-          <a:prstGeom prst="rect">
-            <a:avLst/>
-          </a:prstGeom>
-          <a:noFill/>
-        </p:spPr>
-        <p:txBody>
-          <a:bodyPr wrap="square">
-            <a:spAutoFit/>
-          </a:bodyPr>
-          <a:lstStyle/>
-          <a:p>
-            <a:r>
-              <a:rPr sz="1600" b="1">
-                <a:solidFill>
-                  <a:srgbClr val="C62828"/>
-                </a:solidFill>
-              </a:rPr>
-              <a:t>Pose agreement across draws — NULL</a:t>
-            </a:r>
-          </a:p>
-          <a:p>
-            <a:r>
-              <a:rPr sz="1300">
-                <a:solidFill>
-                  <a:srgbClr val="0B2B52"/>
-                </a:solidFill>
-              </a:rPr>
-              <a:t>peptide RMSD between draws: cognate 8.35 A, decoy 9.67 A, scramble 9.99 A.  p = 0.129, and only p = 0.350 once receptor reproducibility is regressed out.</a:t>
-            </a:r>
-          </a:p>
-        </p:txBody>
-      </p:sp>
+              <a:t>Ranking a cognate against its own decoys — the question a screen actually asks:</a:t>
+            </a:r>
+          </a:p>
+        </p:txBody>
+      </p:sp>
+      <p:graphicFrame>
+        <p:nvGraphicFramePr>
+          <p:cNvPr id="9" name="Table 8"/>
+          <p:cNvGraphicFramePr>
+            <a:graphicFrameLocks noGrp="1"/>
+          </p:cNvGraphicFramePr>
+          <p:nvPr/>
+        </p:nvGraphicFramePr>
+        <p:xfrm>
+          <a:off x="548640" y="2542032"/>
+          <a:ext cx="11155680" cy="1042416"/>
+        </p:xfrm>
+        <a:graphic>
+          <a:graphicData uri="http://schemas.openxmlformats.org/drawingml/2006/table">
+            <a:tbl>
+              <a:tblPr firstRow="1" bandRow="1">
+                <a:tableStyleId>{5C22544A-7EE6-4342-B048-85BDC9FD1C3A}</a:tableStyleId>
+              </a:tblPr>
+              <a:tblGrid>
+                <a:gridCol w="2834640"/>
+                <a:gridCol w="2011680"/>
+                <a:gridCol w="2011680"/>
+                <a:gridCol w="2194560"/>
+                <a:gridCol w="2103120"/>
+              </a:tblGrid>
+              <a:tr h="347472">
+                <a:tc>
+                  <a:txBody>
+                    <a:bodyPr/>
+                    <a:lstStyle/>
+                    <a:p>
+                      <a:r>
+                        <a:rPr sz="1250" b="1">
+                          <a:solidFill>
+                            <a:srgbClr val="0B2B52"/>
+                          </a:solidFill>
+                        </a:rPr>
+                        <a:t> </a:t>
+                      </a:r>
+                    </a:p>
+                  </a:txBody>
+                  <a:tcPr/>
+                </a:tc>
+                <a:tc>
+                  <a:txBody>
+                    <a:bodyPr/>
+                    <a:lstStyle/>
+                    <a:p>
+                      <a:r>
+                        <a:rPr sz="1250" b="1">
+                          <a:solidFill>
+                            <a:srgbClr val="0B2B52"/>
+                          </a:solidFill>
+                        </a:rPr>
+                        <a:t>reduced rank</a:t>
+                      </a:r>
+                    </a:p>
+                  </a:txBody>
+                  <a:tcPr/>
+                </a:tc>
+                <a:tc>
+                  <a:txBody>
+                    <a:bodyPr/>
+                    <a:lstStyle/>
+                    <a:p>
+                      <a:r>
+                        <a:rPr sz="1250" b="1">
+                          <a:solidFill>
+                            <a:srgbClr val="0B2B52"/>
+                          </a:solidFill>
+                        </a:rPr>
+                        <a:t>full rank</a:t>
+                      </a:r>
+                    </a:p>
+                  </a:txBody>
+                  <a:tcPr/>
+                </a:tc>
+                <a:tc>
+                  <a:txBody>
+                    <a:bodyPr/>
+                    <a:lstStyle/>
+                    <a:p>
+                      <a:r>
+                        <a:rPr sz="1250" b="1">
+                          <a:solidFill>
+                            <a:srgbClr val="0B2B52"/>
+                          </a:solidFill>
+                        </a:rPr>
+                        <a:t>first (of 22)</a:t>
+                      </a:r>
+                    </a:p>
+                  </a:txBody>
+                  <a:tcPr/>
+                </a:tc>
+                <a:tc>
+                  <a:txBody>
+                    <a:bodyPr/>
+                    <a:lstStyle/>
+                    <a:p>
+                      <a:r>
+                        <a:rPr sz="1250" b="1">
+                          <a:solidFill>
+                            <a:srgbClr val="0B2B52"/>
+                          </a:solidFill>
+                        </a:rPr>
+                        <a:t>AUC within</a:t>
+                      </a:r>
+                    </a:p>
+                  </a:txBody>
+                  <a:tcPr/>
+                </a:tc>
+              </a:tr>
+              <a:tr h="347472">
+                <a:tc>
+                  <a:txBody>
+                    <a:bodyPr/>
+                    <a:lstStyle/>
+                    <a:p>
+                      <a:r>
+                        <a:rPr sz="1250" b="1">
+                          <a:solidFill>
+                            <a:srgbClr val="0B2B52"/>
+                          </a:solidFill>
+                        </a:rPr>
+                        <a:t>ipTM</a:t>
+                      </a:r>
+                    </a:p>
+                  </a:txBody>
+                  <a:tcPr/>
+                </a:tc>
+                <a:tc>
+                  <a:txBody>
+                    <a:bodyPr/>
+                    <a:lstStyle/>
+                    <a:p>
+                      <a:r>
+                        <a:rPr sz="1250" b="0">
+                          <a:solidFill>
+                            <a:srgbClr val="0B2B52"/>
+                          </a:solidFill>
+                        </a:rPr>
+                        <a:t>1.86</a:t>
+                      </a:r>
+                    </a:p>
+                  </a:txBody>
+                  <a:tcPr/>
+                </a:tc>
+                <a:tc>
+                  <a:txBody>
+                    <a:bodyPr/>
+                    <a:lstStyle/>
+                    <a:p>
+                      <a:r>
+                        <a:rPr sz="1250" b="0">
+                          <a:solidFill>
+                            <a:srgbClr val="0B2B52"/>
+                          </a:solidFill>
+                        </a:rPr>
+                        <a:t>1.41</a:t>
+                      </a:r>
+                    </a:p>
+                  </a:txBody>
+                  <a:tcPr/>
+                </a:tc>
+                <a:tc>
+                  <a:txBody>
+                    <a:bodyPr/>
+                    <a:lstStyle/>
+                    <a:p>
+                      <a:r>
+                        <a:rPr sz="1250" b="0">
+                          <a:solidFill>
+                            <a:srgbClr val="0B2B52"/>
+                          </a:solidFill>
+                        </a:rPr>
+                        <a:t>11 → 15</a:t>
+                      </a:r>
+                    </a:p>
+                  </a:txBody>
+                  <a:tcPr/>
+                </a:tc>
+                <a:tc>
+                  <a:txBody>
+                    <a:bodyPr/>
+                    <a:lstStyle/>
+                    <a:p>
+                      <a:r>
+                        <a:rPr sz="1250" b="0">
+                          <a:solidFill>
+                            <a:srgbClr val="0B2B52"/>
+                          </a:solidFill>
+                        </a:rPr>
+                        <a:t>0.684 → 0.908</a:t>
+                      </a:r>
+                    </a:p>
+                  </a:txBody>
+                  <a:tcPr/>
+                </a:tc>
+              </a:tr>
+              <a:tr h="347472">
+                <a:tc>
+                  <a:txBody>
+                    <a:bodyPr/>
+                    <a:lstStyle/>
+                    <a:p>
+                      <a:r>
+                        <a:rPr sz="1250" b="1">
+                          <a:solidFill>
+                            <a:srgbClr val="0B2B52"/>
+                          </a:solidFill>
+                        </a:rPr>
+                        <a:t>interface pLDDT</a:t>
+                      </a:r>
+                    </a:p>
+                  </a:txBody>
+                  <a:tcPr/>
+                </a:tc>
+                <a:tc>
+                  <a:txBody>
+                    <a:bodyPr/>
+                    <a:lstStyle/>
+                    <a:p>
+                      <a:r>
+                        <a:rPr sz="1250" b="0">
+                          <a:solidFill>
+                            <a:srgbClr val="0B2B52"/>
+                          </a:solidFill>
+                        </a:rPr>
+                        <a:t>1.91</a:t>
+                      </a:r>
+                    </a:p>
+                  </a:txBody>
+                  <a:tcPr/>
+                </a:tc>
+                <a:tc>
+                  <a:txBody>
+                    <a:bodyPr/>
+                    <a:lstStyle/>
+                    <a:p>
+                      <a:r>
+                        <a:rPr sz="1250" b="0">
+                          <a:solidFill>
+                            <a:srgbClr val="0B2B52"/>
+                          </a:solidFill>
+                        </a:rPr>
+                        <a:t>1.27</a:t>
+                      </a:r>
+                    </a:p>
+                  </a:txBody>
+                  <a:tcPr/>
+                </a:tc>
+                <a:tc>
+                  <a:txBody>
+                    <a:bodyPr/>
+                    <a:lstStyle/>
+                    <a:p>
+                      <a:r>
+                        <a:rPr sz="1250" b="0">
+                          <a:solidFill>
+                            <a:srgbClr val="0B2B52"/>
+                          </a:solidFill>
+                        </a:rPr>
+                        <a:t>9 → 17</a:t>
+                      </a:r>
+                    </a:p>
+                  </a:txBody>
+                  <a:tcPr/>
+                </a:tc>
+                <a:tc>
+                  <a:txBody>
+                    <a:bodyPr/>
+                    <a:lstStyle/>
+                    <a:p>
+                      <a:r>
+                        <a:rPr sz="1250" b="0">
+                          <a:solidFill>
+                            <a:srgbClr val="0B2B52"/>
+                          </a:solidFill>
+                        </a:rPr>
+                        <a:t>0.640 → 0.943</a:t>
+                      </a:r>
+                    </a:p>
+                  </a:txBody>
+                  <a:tcPr/>
+                </a:tc>
+              </a:tr>
+            </a:tbl>
+          </a:graphicData>
+        </a:graphic>
+      </p:graphicFrame>
       <p:sp>
         <p:nvSpPr>
           <p:cNvPr id="10" name="Rounded Rectangle 9"/>
@@ -15521,7 +15857,193 @@
         </p:nvSpPr>
         <p:spPr>
           <a:xfrm>
-            <a:off x="548640" y="4892040"/>
+            <a:off x="548640" y="3703320"/>
+            <a:ext cx="3520440" cy="1463040"/>
+          </a:xfrm>
+          <a:prstGeom prst="roundRect">
+            <a:avLst/>
+          </a:prstGeom>
+          <a:solidFill>
+            <a:srgbClr val="2E7D32"/>
+          </a:solidFill>
+          <a:ln>
+            <a:noFill/>
+          </a:ln>
+        </p:spPr>
+        <p:style>
+          <a:lnRef idx="1">
+            <a:schemeClr val="accent1"/>
+          </a:lnRef>
+          <a:fillRef idx="3">
+            <a:schemeClr val="accent1"/>
+          </a:fillRef>
+          <a:effectRef idx="2">
+            <a:schemeClr val="accent1"/>
+          </a:effectRef>
+          <a:fontRef idx="minor">
+            <a:schemeClr val="lt1"/>
+          </a:fontRef>
+        </p:style>
+        <p:txBody>
+          <a:bodyPr rtlCol="0" anchor="ctr" wrap="square"/>
+          <a:lstStyle/>
+          <a:p>
+            <a:pPr algn="ctr"/>
+            <a:r>
+              <a:rPr sz="2300" b="1">
+                <a:solidFill>
+                  <a:srgbClr val="FFFFFF"/>
+                </a:solidFill>
+              </a:rPr>
+              <a:t>17 of 22</a:t>
+            </a:r>
+          </a:p>
+          <a:p>
+            <a:pPr algn="ctr"/>
+            <a:r>
+              <a:rPr sz="1050">
+                <a:solidFill>
+                  <a:srgbClr val="FFFFFF"/>
+                </a:solidFill>
+              </a:rPr>
+              <a:t>true binder ranked FIRST (chance 2.50)</a:t>
+            </a:r>
+          </a:p>
+        </p:txBody>
+      </p:sp>
+      <p:sp>
+        <p:nvSpPr>
+          <p:cNvPr id="11" name="Rounded Rectangle 10"/>
+          <p:cNvSpPr/>
+          <p:nvPr/>
+        </p:nvSpPr>
+        <p:spPr>
+          <a:xfrm>
+            <a:off x="4343400" y="3703320"/>
+            <a:ext cx="3520440" cy="1463040"/>
+          </a:xfrm>
+          <a:prstGeom prst="roundRect">
+            <a:avLst/>
+          </a:prstGeom>
+          <a:solidFill>
+            <a:srgbClr val="2E7D32"/>
+          </a:solidFill>
+          <a:ln>
+            <a:noFill/>
+          </a:ln>
+        </p:spPr>
+        <p:style>
+          <a:lnRef idx="1">
+            <a:schemeClr val="accent1"/>
+          </a:lnRef>
+          <a:fillRef idx="3">
+            <a:schemeClr val="accent1"/>
+          </a:fillRef>
+          <a:effectRef idx="2">
+            <a:schemeClr val="accent1"/>
+          </a:effectRef>
+          <a:fontRef idx="minor">
+            <a:schemeClr val="lt1"/>
+          </a:fontRef>
+        </p:style>
+        <p:txBody>
+          <a:bodyPr rtlCol="0" anchor="ctr" wrap="square"/>
+          <a:lstStyle/>
+          <a:p>
+            <a:pPr algn="ctr"/>
+            <a:r>
+              <a:rPr sz="2300" b="1">
+                <a:solidFill>
+                  <a:srgbClr val="FFFFFF"/>
+                </a:solidFill>
+              </a:rPr>
+              <a:t>0.943</a:t>
+            </a:r>
+          </a:p>
+          <a:p>
+            <a:pPr algn="ctr"/>
+            <a:r>
+              <a:rPr sz="1050">
+                <a:solidFill>
+                  <a:srgbClr val="FFFFFF"/>
+                </a:solidFill>
+              </a:rPr>
+              <a:t>within-receptor AUC (was 0.640)</a:t>
+            </a:r>
+          </a:p>
+        </p:txBody>
+      </p:sp>
+      <p:sp>
+        <p:nvSpPr>
+          <p:cNvPr id="12" name="Rounded Rectangle 11"/>
+          <p:cNvSpPr/>
+          <p:nvPr/>
+        </p:nvSpPr>
+        <p:spPr>
+          <a:xfrm>
+            <a:off x="8138160" y="3703320"/>
+            <a:ext cx="3566160" cy="1463040"/>
+          </a:xfrm>
+          <a:prstGeom prst="roundRect">
+            <a:avLst/>
+          </a:prstGeom>
+          <a:solidFill>
+            <a:srgbClr val="0E8F9A"/>
+          </a:solidFill>
+          <a:ln>
+            <a:noFill/>
+          </a:ln>
+        </p:spPr>
+        <p:style>
+          <a:lnRef idx="1">
+            <a:schemeClr val="accent1"/>
+          </a:lnRef>
+          <a:fillRef idx="3">
+            <a:schemeClr val="accent1"/>
+          </a:fillRef>
+          <a:effectRef idx="2">
+            <a:schemeClr val="accent1"/>
+          </a:effectRef>
+          <a:fontRef idx="minor">
+            <a:schemeClr val="lt1"/>
+          </a:fontRef>
+        </p:style>
+        <p:txBody>
+          <a:bodyPr rtlCol="0" anchor="ctr" wrap="square"/>
+          <a:lstStyle/>
+          <a:p>
+            <a:pPr algn="ctr"/>
+            <a:r>
+              <a:rPr sz="2300" b="1">
+                <a:solidFill>
+                  <a:srgbClr val="FFFFFF"/>
+                </a:solidFill>
+              </a:rPr>
+              <a:t>106 s</a:t>
+            </a:r>
+          </a:p>
+          <a:p>
+            <a:pPr algn="ctr"/>
+            <a:r>
+              <a:rPr sz="1050">
+                <a:solidFill>
+                  <a:srgbClr val="FFFFFF"/>
+                </a:solidFill>
+              </a:rPr>
+              <a:t>cost of a full-settings fold on this laptop</a:t>
+            </a:r>
+          </a:p>
+        </p:txBody>
+      </p:sp>
+      <p:sp>
+        <p:nvSpPr>
+          <p:cNvPr id="13" name="Rounded Rectangle 12"/>
+          <p:cNvSpPr/>
+          <p:nvPr/>
+        </p:nvSpPr>
+        <p:spPr>
+          <a:xfrm>
+            <a:off x="548640" y="5349240"/>
             <a:ext cx="11155680" cy="960120"/>
           </a:xfrm>
           <a:prstGeom prst="roundRect">
@@ -15563,7 +16085,45 @@
                   <a:srgbClr val="FFFFFF"/>
                 </a:solidFill>
               </a:rPr>
-              <a:t>Every peptide lands in the same correct pocket, then sits 8-10 A differently within it on each draw.</a:t>
+              <a:t>The negative results are properties of the regime, not of the method.</a:t>
+            </a:r>
+          </a:p>
+        </p:txBody>
+      </p:sp>
+      <p:sp>
+        <p:nvSpPr>
+          <p:cNvPr id="14" name="TextBox 13"/>
+          <p:cNvSpPr txBox="1"/>
+          <p:nvPr/>
+        </p:nvSpPr>
+        <p:spPr>
+          <a:xfrm>
+            <a:off x="548640" y="6163056"/>
+            <a:ext cx="11155680" cy="539496"/>
+          </a:xfrm>
+          <a:prstGeom prst="rect">
+            <a:avLst/>
+          </a:prstGeom>
+          <a:noFill/>
+        </p:spPr>
+        <p:txBody>
+          <a:bodyPr wrap="square">
+            <a:spAutoFit/>
+          </a:bodyPr>
+          <a:lstStyle/>
+          <a:p>
+            <a:pPr>
+              <a:spcAft>
+                <a:spcPts val="600"/>
+              </a:spcAft>
+            </a:pPr>
+            <a:r>
+              <a:rPr sz="1100" b="0">
+                <a:solidFill>
+                  <a:srgbClr val="8A5200"/>
+                </a:solidFill>
+              </a:rPr>
+              <a:t>Caveat: one model, 22 receptors, a single draw.</a:t>
             </a:r>
           </a:p>
         </p:txBody>
@@ -15595,7 +16155,7 @@
         <p:spPr>
           <a:xfrm>
             <a:off x="0" y="0"/>
-            <a:ext cx="12188952" cy="914400"/>
+            <a:ext cx="12191695" cy="914400"/>
           </a:xfrm>
           <a:prstGeom prst="rect">
             <a:avLst/>
@@ -15606,6 +16166,7 @@
           <a:ln>
             <a:noFill/>
           </a:ln>
+          <a:effectLst/>
         </p:spPr>
         <p:style>
           <a:lnRef idx="1">
@@ -15638,7 +16199,7 @@
         <p:spPr>
           <a:xfrm>
             <a:off x="0" y="914400"/>
-            <a:ext cx="12188952" cy="54864"/>
+            <a:ext cx="12191695" cy="54864"/>
           </a:xfrm>
           <a:prstGeom prst="rect">
             <a:avLst/>
@@ -15649,6 +16210,7 @@
           <a:ln>
             <a:noFill/>
           </a:ln>
+          <a:effectLst/>
         </p:spPr>
         <p:style>
           <a:lnRef idx="1">
@@ -15695,17 +16257,20 @@
           <a:lstStyle/>
           <a:p>
             <a:pPr>
-              <a:spcAft>
-                <a:spcPts val="600"/>
-              </a:spcAft>
-            </a:pPr>
-            <a:r>
-              <a:rPr sz="2600" b="1">
+              <a:spcBef>
+                <a:spcPts val="0"/>
+              </a:spcBef>
+              <a:spcAft>
+                <a:spcPts val="400"/>
+              </a:spcAft>
+            </a:pPr>
+            <a:r>
+              <a:rPr sz="2600" b="1" i="0">
                 <a:solidFill>
                   <a:srgbClr val="FFFFFF"/>
                 </a:solidFill>
               </a:rPr>
-              <a:t>Measured — The Settings Confound Was Real</a:t>
+              <a:t>Future Plan</a:t>
             </a:r>
           </a:p>
         </p:txBody>
@@ -15733,6 +16298,9 @@
           <a:lstStyle/>
           <a:p>
             <a:pPr>
+              <a:spcBef>
+                <a:spcPts val="0"/>
+              </a:spcBef>
               <a:spcAft>
                 <a:spcPts val="600"/>
               </a:spcAft>
@@ -15756,7 +16324,7 @@
         </p:nvSpPr>
         <p:spPr>
           <a:xfrm>
-            <a:off x="11183112" y="6473952"/>
+            <a:off x="11185855" y="6473952"/>
             <a:ext cx="640080" cy="274320"/>
           </a:xfrm>
           <a:prstGeom prst="rect">
@@ -15770,7 +16338,10 @@
           </a:bodyPr>
           <a:lstStyle/>
           <a:p>
-            <a:pPr>
+            <a:pPr algn="r">
+              <a:spcBef>
+                <a:spcPts val="0"/>
+              </a:spcBef>
               <a:spcAft>
                 <a:spcPts val="600"/>
               </a:spcAft>
@@ -15788,438 +16359,25 @@
       </p:sp>
       <p:sp>
         <p:nvSpPr>
-          <p:cNvPr id="7" name="TextBox 6"/>
-          <p:cNvSpPr txBox="1"/>
-          <p:nvPr/>
-        </p:nvSpPr>
-        <p:spPr>
-          <a:xfrm>
-            <a:off x="548640" y="1143000"/>
-            <a:ext cx="11155680" cy="1005840"/>
-          </a:xfrm>
-          <a:prstGeom prst="rect">
-            <a:avLst/>
-          </a:prstGeom>
-          <a:noFill/>
-        </p:spPr>
-        <p:txBody>
-          <a:bodyPr wrap="square">
-            <a:spAutoFit/>
-          </a:bodyPr>
-          <a:lstStyle/>
-          <a:p>
-            <a:pPr>
-              <a:spcAft>
-                <a:spcPts val="600"/>
-              </a:spcAft>
-            </a:pPr>
-            <a:r>
-              <a:rPr sz="1500" b="0">
-                <a:solidFill>
-                  <a:srgbClr val="0B2B52"/>
-                </a:solidFill>
-              </a:rPr>
-              <a:t>Every result so far: 10 sampling steps of an intended 200, 1 recycling of 3, MSA 32 of full.</a:t>
-            </a:r>
-          </a:p>
-          <a:p>
-            <a:pPr>
-              <a:spcAft>
-                <a:spcPts val="600"/>
-              </a:spcAft>
-            </a:pPr>
-            <a:r>
-              <a:rPr sz="1500" b="0">
-                <a:solidFill>
-                  <a:srgbClr val="0B2B52"/>
-                </a:solidFill>
-              </a:rPr>
-              <a:t>Section 1.5 called this “stated, not resolved”. Same model, same device, settings raised:</a:t>
-            </a:r>
-          </a:p>
-        </p:txBody>
-      </p:sp>
-      <p:graphicFrame>
-        <p:nvGraphicFramePr>
-          <p:cNvPr id="8" name="Table 7"/>
-          <p:cNvGraphicFramePr>
-            <a:graphicFrameLocks noGrp="1"/>
-          </p:cNvGraphicFramePr>
-          <p:nvPr/>
-        </p:nvGraphicFramePr>
-        <p:xfrm>
-          <a:off x="548640" y="1965960"/>
-          <a:ext cx="11155680" cy="1536192"/>
-        </p:xfrm>
-        <a:graphic>
-          <a:graphicData uri="http://schemas.openxmlformats.org/drawingml/2006/table">
-            <a:tbl>
-              <a:tblPr firstRow="1" bandRow="1">
-                <a:tableStyleId>{5C22544A-7EE6-4342-B048-85BDC9FD1C3A}</a:tableStyleId>
-              </a:tblPr>
-              <a:tblGrid>
-                <a:gridCol w="3017520"/>
-                <a:gridCol w="2834640"/>
-                <a:gridCol w="2834640"/>
-                <a:gridCol w="2468880"/>
-              </a:tblGrid>
-              <a:tr h="384048">
-                <a:tc>
-                  <a:txBody>
-                    <a:bodyPr/>
-                    <a:lstStyle/>
-                    <a:p>
-                      <a:r>
-                        <a:rPr sz="1300" b="1">
-                          <a:solidFill>
-                            <a:srgbClr val="0B2B52"/>
-                          </a:solidFill>
-                        </a:rPr>
-                        <a:t>cognate − scramble</a:t>
-                      </a:r>
-                    </a:p>
-                  </a:txBody>
-                  <a:tcPr/>
-                </a:tc>
-                <a:tc>
-                  <a:txBody>
-                    <a:bodyPr/>
-                    <a:lstStyle/>
-                    <a:p>
-                      <a:r>
-                        <a:rPr sz="1300" b="1">
-                          <a:solidFill>
-                            <a:srgbClr val="0B2B52"/>
-                          </a:solidFill>
-                        </a:rPr>
-                        <a:t>reduced (10 steps)</a:t>
-                      </a:r>
-                    </a:p>
-                  </a:txBody>
-                  <a:tcPr/>
-                </a:tc>
-                <a:tc>
-                  <a:txBody>
-                    <a:bodyPr/>
-                    <a:lstStyle/>
-                    <a:p>
-                      <a:r>
-                        <a:rPr sz="1300" b="1">
-                          <a:solidFill>
-                            <a:srgbClr val="0B2B52"/>
-                          </a:solidFill>
-                        </a:rPr>
-                        <a:t>full (200 steps)</a:t>
-                      </a:r>
-                    </a:p>
-                  </a:txBody>
-                  <a:tcPr/>
-                </a:tc>
-                <a:tc>
-                  <a:txBody>
-                    <a:bodyPr/>
-                    <a:lstStyle/>
-                    <a:p>
-                      <a:r>
-                        <a:rPr sz="1300" b="1">
-                          <a:solidFill>
-                            <a:srgbClr val="0B2B52"/>
-                          </a:solidFill>
-                        </a:rPr>
-                        <a:t>Cohen's d</a:t>
-                      </a:r>
-                    </a:p>
-                  </a:txBody>
-                  <a:tcPr/>
-                </a:tc>
-              </a:tr>
-              <a:tr h="384048">
-                <a:tc>
-                  <a:txBody>
-                    <a:bodyPr/>
-                    <a:lstStyle/>
-                    <a:p>
-                      <a:r>
-                        <a:rPr sz="1300" b="1">
-                          <a:solidFill>
-                            <a:srgbClr val="0B2B52"/>
-                          </a:solidFill>
-                        </a:rPr>
-                        <a:t>ipTM</a:t>
-                      </a:r>
-                    </a:p>
-                  </a:txBody>
-                  <a:tcPr/>
-                </a:tc>
-                <a:tc>
-                  <a:txBody>
-                    <a:bodyPr/>
-                    <a:lstStyle/>
-                    <a:p>
-                      <a:r>
-                        <a:rPr sz="1300" b="0">
-                          <a:solidFill>
-                            <a:srgbClr val="0B2B52"/>
-                          </a:solidFill>
-                        </a:rPr>
-                        <a:t>+0.039  (p 0.004)</a:t>
-                      </a:r>
-                    </a:p>
-                  </a:txBody>
-                  <a:tcPr/>
-                </a:tc>
-                <a:tc>
-                  <a:txBody>
-                    <a:bodyPr/>
-                    <a:lstStyle/>
-                    <a:p>
-                      <a:r>
-                        <a:rPr sz="1300" b="0">
-                          <a:solidFill>
-                            <a:srgbClr val="0B2B52"/>
-                          </a:solidFill>
-                        </a:rPr>
-                        <a:t>+0.287  (p &lt; 1e-5)</a:t>
-                      </a:r>
-                    </a:p>
-                  </a:txBody>
-                  <a:tcPr/>
-                </a:tc>
-                <a:tc>
-                  <a:txBody>
-                    <a:bodyPr/>
-                    <a:lstStyle/>
-                    <a:p>
-                      <a:r>
-                        <a:rPr sz="1300" b="0">
-                          <a:solidFill>
-                            <a:srgbClr val="0B2B52"/>
-                          </a:solidFill>
-                        </a:rPr>
-                        <a:t>0.45 → 1.25</a:t>
-                      </a:r>
-                    </a:p>
-                  </a:txBody>
-                  <a:tcPr/>
-                </a:tc>
-              </a:tr>
-              <a:tr h="384048">
-                <a:tc>
-                  <a:txBody>
-                    <a:bodyPr/>
-                    <a:lstStyle/>
-                    <a:p>
-                      <a:r>
-                        <a:rPr sz="1300" b="1">
-                          <a:solidFill>
-                            <a:srgbClr val="0B2B52"/>
-                          </a:solidFill>
-                        </a:rPr>
-                        <a:t>interface pLDDT</a:t>
-                      </a:r>
-                    </a:p>
-                  </a:txBody>
-                  <a:tcPr/>
-                </a:tc>
-                <a:tc>
-                  <a:txBody>
-                    <a:bodyPr/>
-                    <a:lstStyle/>
-                    <a:p>
-                      <a:r>
-                        <a:rPr sz="1300" b="0">
-                          <a:solidFill>
-                            <a:srgbClr val="0B2B52"/>
-                          </a:solidFill>
-                        </a:rPr>
-                        <a:t>+1.54  (p 0.067)</a:t>
-                      </a:r>
-                    </a:p>
-                  </a:txBody>
-                  <a:tcPr/>
-                </a:tc>
-                <a:tc>
-                  <a:txBody>
-                    <a:bodyPr/>
-                    <a:lstStyle/>
-                    <a:p>
-                      <a:r>
-                        <a:rPr sz="1300" b="0">
-                          <a:solidFill>
-                            <a:srgbClr val="0B2B52"/>
-                          </a:solidFill>
-                        </a:rPr>
-                        <a:t>+11.85  (p &lt; 1e-5)</a:t>
-                      </a:r>
-                    </a:p>
-                  </a:txBody>
-                  <a:tcPr/>
-                </a:tc>
-                <a:tc>
-                  <a:txBody>
-                    <a:bodyPr/>
-                    <a:lstStyle/>
-                    <a:p>
-                      <a:r>
-                        <a:rPr sz="1300" b="0">
-                          <a:solidFill>
-                            <a:srgbClr val="0B2B52"/>
-                          </a:solidFill>
-                        </a:rPr>
-                        <a:t>0.28 → 1.52</a:t>
-                      </a:r>
-                    </a:p>
-                  </a:txBody>
-                  <a:tcPr/>
-                </a:tc>
-              </a:tr>
-              <a:tr h="384048">
-                <a:tc>
-                  <a:txBody>
-                    <a:bodyPr/>
-                    <a:lstStyle/>
-                    <a:p>
-                      <a:r>
-                        <a:rPr sz="1300" b="1">
-                          <a:solidFill>
-                            <a:srgbClr val="0B2B52"/>
-                          </a:solidFill>
-                        </a:rPr>
-                        <a:t>receptor side</a:t>
-                      </a:r>
-                    </a:p>
-                  </a:txBody>
-                  <a:tcPr/>
-                </a:tc>
-                <a:tc>
-                  <a:txBody>
-                    <a:bodyPr/>
-                    <a:lstStyle/>
-                    <a:p>
-                      <a:r>
-                        <a:rPr sz="1300" b="0">
-                          <a:solidFill>
-                            <a:srgbClr val="0B2B52"/>
-                          </a:solidFill>
-                        </a:rPr>
-                        <a:t>+0.71  (p 0.428)</a:t>
-                      </a:r>
-                    </a:p>
-                  </a:txBody>
-                  <a:tcPr/>
-                </a:tc>
-                <a:tc>
-                  <a:txBody>
-                    <a:bodyPr/>
-                    <a:lstStyle/>
-                    <a:p>
-                      <a:r>
-                        <a:rPr sz="1300" b="0">
-                          <a:solidFill>
-                            <a:srgbClr val="0B2B52"/>
-                          </a:solidFill>
-                        </a:rPr>
-                        <a:t>+5.13  (p &lt; 1e-5)</a:t>
-                      </a:r>
-                    </a:p>
-                  </a:txBody>
-                  <a:tcPr/>
-                </a:tc>
-                <a:tc>
-                  <a:txBody>
-                    <a:bodyPr/>
-                    <a:lstStyle/>
-                    <a:p>
-                      <a:r>
-                        <a:rPr sz="1300" b="0">
-                          <a:solidFill>
-                            <a:srgbClr val="0B2B52"/>
-                          </a:solidFill>
-                        </a:rPr>
-                        <a:t>0.12 → 1.45</a:t>
-                      </a:r>
-                    </a:p>
-                  </a:txBody>
-                  <a:tcPr/>
-                </a:tc>
-              </a:tr>
-            </a:tbl>
-          </a:graphicData>
-        </a:graphic>
-      </p:graphicFrame>
-      <p:sp>
-        <p:nvSpPr>
-          <p:cNvPr id="9" name="TextBox 8"/>
-          <p:cNvSpPr txBox="1"/>
-          <p:nvPr/>
-        </p:nvSpPr>
-        <p:spPr>
-          <a:xfrm>
-            <a:off x="548640" y="3749039"/>
-            <a:ext cx="11155680" cy="1005840"/>
-          </a:xfrm>
-          <a:prstGeom prst="rect">
-            <a:avLst/>
-          </a:prstGeom>
-          <a:noFill/>
-        </p:spPr>
-        <p:txBody>
-          <a:bodyPr wrap="square">
-            <a:spAutoFit/>
-          </a:bodyPr>
-          <a:lstStyle/>
-          <a:p>
-            <a:pPr>
-              <a:spcAft>
-                <a:spcPts val="600"/>
-              </a:spcAft>
-            </a:pPr>
-            <a:r>
-              <a:rPr sz="1500" b="0">
-                <a:solidFill>
-                  <a:srgbClr val="0B2B52"/>
-                </a:solidFill>
-              </a:rPr>
-              <a:t>Raw effects 7× larger; scale-free 2.7–12×. Larger for 21 of 22 receptors, paired p ≤ 0.001.</a:t>
-            </a:r>
-          </a:p>
-          <a:p>
-            <a:pPr>
-              <a:spcAft>
-                <a:spcPts val="600"/>
-              </a:spcAft>
-            </a:pPr>
-            <a:r>
-              <a:rPr sz="1500" b="0">
-                <a:solidFill>
-                  <a:srgbClr val="0B2B52"/>
-                </a:solidFill>
-              </a:rPr>
-              <a:t>Two readouts change verdict: interface pLDDT 0.067 → &lt;1e-5, receptor side 0.428 → &lt;1e-5.</a:t>
-            </a:r>
-          </a:p>
-        </p:txBody>
-      </p:sp>
-      <p:sp>
-        <p:nvSpPr>
-          <p:cNvPr id="10" name="Rounded Rectangle 9"/>
+          <p:cNvPr id="7" name="Oval 6"/>
           <p:cNvSpPr/>
           <p:nvPr/>
         </p:nvSpPr>
         <p:spPr>
           <a:xfrm>
-            <a:off x="548640" y="4617720"/>
-            <a:ext cx="11155680" cy="960120"/>
-          </a:xfrm>
-          <a:prstGeom prst="roundRect">
+            <a:off x="548640" y="1325880"/>
+            <a:ext cx="566928" cy="566928"/>
+          </a:xfrm>
+          <a:prstGeom prst="ellipse">
             <a:avLst/>
           </a:prstGeom>
           <a:solidFill>
-            <a:srgbClr val="C62828"/>
+            <a:srgbClr val="1E6FB8"/>
           </a:solidFill>
           <a:ln>
             <a:noFill/>
           </a:ln>
+          <a:effectLst/>
         </p:spPr>
         <p:style>
           <a:lnRef idx="1">
@@ -16240,17 +16398,461 @@
           <a:lstStyle/>
           <a:p>
             <a:pPr algn="ctr">
+              <a:spcBef>
+                <a:spcPts val="0"/>
+              </a:spcBef>
+              <a:spcAft>
+                <a:spcPts val="400"/>
+              </a:spcAft>
+            </a:pPr>
+            <a:r>
+              <a:rPr sz="1800" b="1" i="0">
+                <a:solidFill>
+                  <a:srgbClr val="FFFFFF"/>
+                </a:solidFill>
+              </a:rPr>
+              <a:t>1</a:t>
+            </a:r>
+          </a:p>
+        </p:txBody>
+      </p:sp>
+      <p:sp>
+        <p:nvSpPr>
+          <p:cNvPr id="8" name="TextBox 7"/>
+          <p:cNvSpPr txBox="1"/>
+          <p:nvPr/>
+        </p:nvSpPr>
+        <p:spPr>
+          <a:xfrm>
+            <a:off x="1325880" y="1307592"/>
+            <a:ext cx="10332720" cy="868680"/>
+          </a:xfrm>
+          <a:prstGeom prst="rect">
+            <a:avLst/>
+          </a:prstGeom>
+          <a:noFill/>
+        </p:spPr>
+        <p:txBody>
+          <a:bodyPr wrap="square">
+            <a:spAutoFit/>
+          </a:bodyPr>
+          <a:lstStyle/>
+          <a:p>
+            <a:pPr>
+              <a:spcBef>
+                <a:spcPts val="0"/>
+              </a:spcBef>
               <a:spcAft>
                 <a:spcPts val="600"/>
               </a:spcAft>
             </a:pPr>
             <a:r>
-              <a:rPr sz="1700" b="1">
+              <a:rPr sz="1300" b="0">
+                <a:solidFill>
+                  <a:srgbClr val="0B2B52"/>
+                </a:solidFill>
+              </a:rPr>
+              <a:t>DONE — profiled; and measured what the optimisations actually deliver on pretrained weights (slides 11–18).</a:t>
+            </a:r>
+          </a:p>
+        </p:txBody>
+      </p:sp>
+      <p:sp>
+        <p:nvSpPr>
+          <p:cNvPr id="9" name="Oval 8"/>
+          <p:cNvSpPr/>
+          <p:nvPr/>
+        </p:nvSpPr>
+        <p:spPr>
+          <a:xfrm>
+            <a:off x="548640" y="2304288"/>
+            <a:ext cx="566928" cy="566928"/>
+          </a:xfrm>
+          <a:prstGeom prst="ellipse">
+            <a:avLst/>
+          </a:prstGeom>
+          <a:solidFill>
+            <a:srgbClr val="0E8F9A"/>
+          </a:solidFill>
+          <a:ln>
+            <a:noFill/>
+          </a:ln>
+          <a:effectLst/>
+        </p:spPr>
+        <p:style>
+          <a:lnRef idx="1">
+            <a:schemeClr val="accent1"/>
+          </a:lnRef>
+          <a:fillRef idx="3">
+            <a:schemeClr val="accent1"/>
+          </a:fillRef>
+          <a:effectRef idx="2">
+            <a:schemeClr val="accent1"/>
+          </a:effectRef>
+          <a:fontRef idx="minor">
+            <a:schemeClr val="lt1"/>
+          </a:fontRef>
+        </p:style>
+        <p:txBody>
+          <a:bodyPr rtlCol="0" anchor="ctr" wrap="square"/>
+          <a:lstStyle/>
+          <a:p>
+            <a:pPr algn="ctr">
+              <a:spcBef>
+                <a:spcPts val="0"/>
+              </a:spcBef>
+              <a:spcAft>
+                <a:spcPts val="400"/>
+              </a:spcAft>
+            </a:pPr>
+            <a:r>
+              <a:rPr sz="1800" b="1" i="0">
                 <a:solidFill>
                   <a:srgbClr val="FFFFFF"/>
                 </a:solidFill>
               </a:rPr>
-              <a:t>A full-settings fold takes 106 s on this laptop. The obstacle was the device, not the settings.</a:t>
+              <a:t>2</a:t>
+            </a:r>
+          </a:p>
+        </p:txBody>
+      </p:sp>
+      <p:sp>
+        <p:nvSpPr>
+          <p:cNvPr id="10" name="TextBox 9"/>
+          <p:cNvSpPr txBox="1"/>
+          <p:nvPr/>
+        </p:nvSpPr>
+        <p:spPr>
+          <a:xfrm>
+            <a:off x="1325880" y="2286000"/>
+            <a:ext cx="10332720" cy="868680"/>
+          </a:xfrm>
+          <a:prstGeom prst="rect">
+            <a:avLst/>
+          </a:prstGeom>
+          <a:noFill/>
+        </p:spPr>
+        <p:txBody>
+          <a:bodyPr wrap="square">
+            <a:spAutoFit/>
+          </a:bodyPr>
+          <a:lstStyle/>
+          <a:p>
+            <a:pPr>
+              <a:spcBef>
+                <a:spcPts val="0"/>
+              </a:spcBef>
+              <a:spcAft>
+                <a:spcPts val="600"/>
+              </a:spcAft>
+            </a:pPr>
+            <a:r>
+              <a:rPr sz="1300" b="0">
+                <a:solidFill>
+                  <a:srgbClr val="0B2B52"/>
+                </a:solidFill>
+              </a:rPr>
+              <a:t>DONE — DeCAF-Boltz, distilled for 10 steps, folds the 132-complex panel in ~20 min locally and returns 96% physically plausible backbones against 14% for a stock model run short (slides 27-28).</a:t>
+            </a:r>
+          </a:p>
+        </p:txBody>
+      </p:sp>
+      <p:sp>
+        <p:nvSpPr>
+          <p:cNvPr id="11" name="Oval 10"/>
+          <p:cNvSpPr/>
+          <p:nvPr/>
+        </p:nvSpPr>
+        <p:spPr>
+          <a:xfrm>
+            <a:off x="548640" y="3282696"/>
+            <a:ext cx="566928" cy="566928"/>
+          </a:xfrm>
+          <a:prstGeom prst="ellipse">
+            <a:avLst/>
+          </a:prstGeom>
+          <a:solidFill>
+            <a:srgbClr val="2E7D32"/>
+          </a:solidFill>
+          <a:ln>
+            <a:noFill/>
+          </a:ln>
+          <a:effectLst/>
+        </p:spPr>
+        <p:style>
+          <a:lnRef idx="1">
+            <a:schemeClr val="accent1"/>
+          </a:lnRef>
+          <a:fillRef idx="3">
+            <a:schemeClr val="accent1"/>
+          </a:fillRef>
+          <a:effectRef idx="2">
+            <a:schemeClr val="accent1"/>
+          </a:effectRef>
+          <a:fontRef idx="minor">
+            <a:schemeClr val="lt1"/>
+          </a:fontRef>
+        </p:style>
+        <p:txBody>
+          <a:bodyPr rtlCol="0" anchor="ctr" wrap="square"/>
+          <a:lstStyle/>
+          <a:p>
+            <a:pPr algn="ctr">
+              <a:spcBef>
+                <a:spcPts val="0"/>
+              </a:spcBef>
+              <a:spcAft>
+                <a:spcPts val="400"/>
+              </a:spcAft>
+            </a:pPr>
+            <a:r>
+              <a:rPr sz="1800" b="1" i="0">
+                <a:solidFill>
+                  <a:srgbClr val="FFFFFF"/>
+                </a:solidFill>
+              </a:rPr>
+              <a:t>3</a:t>
+            </a:r>
+          </a:p>
+        </p:txBody>
+      </p:sp>
+      <p:sp>
+        <p:nvSpPr>
+          <p:cNvPr id="12" name="TextBox 11"/>
+          <p:cNvSpPr txBox="1"/>
+          <p:nvPr/>
+        </p:nvSpPr>
+        <p:spPr>
+          <a:xfrm>
+            <a:off x="1325880" y="3264408"/>
+            <a:ext cx="10332720" cy="868680"/>
+          </a:xfrm>
+          <a:prstGeom prst="rect">
+            <a:avLst/>
+          </a:prstGeom>
+          <a:noFill/>
+        </p:spPr>
+        <p:txBody>
+          <a:bodyPr wrap="square">
+            <a:spAutoFit/>
+          </a:bodyPr>
+          <a:lstStyle/>
+          <a:p>
+            <a:pPr>
+              <a:spcBef>
+                <a:spcPts val="0"/>
+              </a:spcBef>
+              <a:spcAft>
+                <a:spcPts val="600"/>
+              </a:spcAft>
+            </a:pPr>
+            <a:r>
+              <a:rPr sz="1300" b="0">
+                <a:solidFill>
+                  <a:srgbClr val="0B2B52"/>
+                </a:solidFill>
+              </a:rPr>
+              <a:t>DONE, NEGATIVE — the surrogate was distilled and evaluated: ipTM does not rank binders, so no surrogate distilled from it can either.</a:t>
+            </a:r>
+          </a:p>
+        </p:txBody>
+      </p:sp>
+      <p:sp>
+        <p:nvSpPr>
+          <p:cNvPr id="13" name="Oval 12"/>
+          <p:cNvSpPr/>
+          <p:nvPr/>
+        </p:nvSpPr>
+        <p:spPr>
+          <a:xfrm>
+            <a:off x="548640" y="4261104"/>
+            <a:ext cx="566928" cy="566928"/>
+          </a:xfrm>
+          <a:prstGeom prst="ellipse">
+            <a:avLst/>
+          </a:prstGeom>
+          <a:solidFill>
+            <a:srgbClr val="C77700"/>
+          </a:solidFill>
+          <a:ln>
+            <a:noFill/>
+          </a:ln>
+          <a:effectLst/>
+        </p:spPr>
+        <p:style>
+          <a:lnRef idx="1">
+            <a:schemeClr val="accent1"/>
+          </a:lnRef>
+          <a:fillRef idx="3">
+            <a:schemeClr val="accent1"/>
+          </a:fillRef>
+          <a:effectRef idx="2">
+            <a:schemeClr val="accent1"/>
+          </a:effectRef>
+          <a:fontRef idx="minor">
+            <a:schemeClr val="lt1"/>
+          </a:fontRef>
+        </p:style>
+        <p:txBody>
+          <a:bodyPr rtlCol="0" anchor="ctr" wrap="square"/>
+          <a:lstStyle/>
+          <a:p>
+            <a:pPr algn="ctr">
+              <a:spcBef>
+                <a:spcPts val="0"/>
+              </a:spcBef>
+              <a:spcAft>
+                <a:spcPts val="400"/>
+              </a:spcAft>
+            </a:pPr>
+            <a:r>
+              <a:rPr sz="1800" b="1" i="0">
+                <a:solidFill>
+                  <a:srgbClr val="FFFFFF"/>
+                </a:solidFill>
+              </a:rPr>
+              <a:t>4</a:t>
+            </a:r>
+          </a:p>
+        </p:txBody>
+      </p:sp>
+      <p:sp>
+        <p:nvSpPr>
+          <p:cNvPr id="14" name="TextBox 13"/>
+          <p:cNvSpPr txBox="1"/>
+          <p:nvPr/>
+        </p:nvSpPr>
+        <p:spPr>
+          <a:xfrm>
+            <a:off x="1325880" y="4242816"/>
+            <a:ext cx="10332720" cy="868680"/>
+          </a:xfrm>
+          <a:prstGeom prst="rect">
+            <a:avLst/>
+          </a:prstGeom>
+          <a:noFill/>
+        </p:spPr>
+        <p:txBody>
+          <a:bodyPr wrap="square">
+            <a:spAutoFit/>
+          </a:bodyPr>
+          <a:lstStyle/>
+          <a:p>
+            <a:pPr>
+              <a:spcBef>
+                <a:spcPts val="0"/>
+              </a:spcBef>
+              <a:spcAft>
+                <a:spcPts val="600"/>
+              </a:spcAft>
+            </a:pPr>
+            <a:r>
+              <a:rPr sz="1300" b="0">
+                <a:solidFill>
+                  <a:srgbClr val="0B2B52"/>
+                </a:solidFill>
+              </a:rPr>
+              <a:t>Use open Boltz-2 weights only — Boltz-2.1 is closed / API-only.</a:t>
+            </a:r>
+          </a:p>
+        </p:txBody>
+      </p:sp>
+      <p:sp>
+        <p:nvSpPr>
+          <p:cNvPr id="15" name="Oval 14"/>
+          <p:cNvSpPr/>
+          <p:nvPr/>
+        </p:nvSpPr>
+        <p:spPr>
+          <a:xfrm>
+            <a:off x="548640" y="5239512"/>
+            <a:ext cx="566928" cy="566928"/>
+          </a:xfrm>
+          <a:prstGeom prst="ellipse">
+            <a:avLst/>
+          </a:prstGeom>
+          <a:solidFill>
+            <a:srgbClr val="0B2B52"/>
+          </a:solidFill>
+          <a:ln>
+            <a:noFill/>
+          </a:ln>
+          <a:effectLst/>
+        </p:spPr>
+        <p:style>
+          <a:lnRef idx="1">
+            <a:schemeClr val="accent1"/>
+          </a:lnRef>
+          <a:fillRef idx="3">
+            <a:schemeClr val="accent1"/>
+          </a:fillRef>
+          <a:effectRef idx="2">
+            <a:schemeClr val="accent1"/>
+          </a:effectRef>
+          <a:fontRef idx="minor">
+            <a:schemeClr val="lt1"/>
+          </a:fontRef>
+        </p:style>
+        <p:txBody>
+          <a:bodyPr rtlCol="0" anchor="ctr" wrap="square"/>
+          <a:lstStyle/>
+          <a:p>
+            <a:pPr algn="ctr">
+              <a:spcBef>
+                <a:spcPts val="0"/>
+              </a:spcBef>
+              <a:spcAft>
+                <a:spcPts val="400"/>
+              </a:spcAft>
+            </a:pPr>
+            <a:r>
+              <a:rPr sz="1800" b="1" i="0">
+                <a:solidFill>
+                  <a:srgbClr val="FFFFFF"/>
+                </a:solidFill>
+              </a:rPr>
+              <a:t>5</a:t>
+            </a:r>
+          </a:p>
+        </p:txBody>
+      </p:sp>
+      <p:sp>
+        <p:nvSpPr>
+          <p:cNvPr id="16" name="TextBox 15"/>
+          <p:cNvSpPr txBox="1"/>
+          <p:nvPr/>
+        </p:nvSpPr>
+        <p:spPr>
+          <a:xfrm>
+            <a:off x="1325880" y="5221224"/>
+            <a:ext cx="10332720" cy="868680"/>
+          </a:xfrm>
+          <a:prstGeom prst="rect">
+            <a:avLst/>
+          </a:prstGeom>
+          <a:noFill/>
+        </p:spPr>
+        <p:txBody>
+          <a:bodyPr wrap="square">
+            <a:spAutoFit/>
+          </a:bodyPr>
+          <a:lstStyle/>
+          <a:p>
+            <a:pPr>
+              <a:spcBef>
+                <a:spcPts val="0"/>
+              </a:spcBef>
+              <a:spcAft>
+                <a:spcPts val="600"/>
+              </a:spcAft>
+            </a:pPr>
+            <a:r>
+              <a:rPr sz="1300" b="0">
+                <a:solidFill>
+                  <a:srgbClr val="0B2B52"/>
+                </a:solidFill>
+              </a:rPr>
+              <a:t>Production GPU scaling — NO LONGER a prerequisite. MPS (~3x) plus few-step distillation let the held-out panel be folded five times on this laptop, and the third draw overturned what the first two supported. Scaling is now for extending the panel past 22 receptors, which is the binding constraint on the open questions.</a:t>
             </a:r>
           </a:p>
         </p:txBody>
@@ -16282,933 +16884,6 @@
         <p:spPr>
           <a:xfrm>
             <a:off x="0" y="0"/>
-            <a:ext cx="12188952" cy="914400"/>
-          </a:xfrm>
-          <a:prstGeom prst="rect">
-            <a:avLst/>
-          </a:prstGeom>
-          <a:solidFill>
-            <a:srgbClr val="0B2B52"/>
-          </a:solidFill>
-          <a:ln>
-            <a:noFill/>
-          </a:ln>
-        </p:spPr>
-        <p:style>
-          <a:lnRef idx="1">
-            <a:schemeClr val="accent1"/>
-          </a:lnRef>
-          <a:fillRef idx="3">
-            <a:schemeClr val="accent1"/>
-          </a:fillRef>
-          <a:effectRef idx="2">
-            <a:schemeClr val="accent1"/>
-          </a:effectRef>
-          <a:fontRef idx="minor">
-            <a:schemeClr val="lt1"/>
-          </a:fontRef>
-        </p:style>
-        <p:txBody>
-          <a:bodyPr rtlCol="0" anchor="ctr"/>
-          <a:lstStyle/>
-          <a:p>
-            <a:pPr algn="ctr"/>
-          </a:p>
-        </p:txBody>
-      </p:sp>
-      <p:sp>
-        <p:nvSpPr>
-          <p:cNvPr id="3" name="Rectangle 2"/>
-          <p:cNvSpPr/>
-          <p:nvPr/>
-        </p:nvSpPr>
-        <p:spPr>
-          <a:xfrm>
-            <a:off x="0" y="914400"/>
-            <a:ext cx="12188952" cy="54864"/>
-          </a:xfrm>
-          <a:prstGeom prst="rect">
-            <a:avLst/>
-          </a:prstGeom>
-          <a:solidFill>
-            <a:srgbClr val="1E6FB8"/>
-          </a:solidFill>
-          <a:ln>
-            <a:noFill/>
-          </a:ln>
-        </p:spPr>
-        <p:style>
-          <a:lnRef idx="1">
-            <a:schemeClr val="accent1"/>
-          </a:lnRef>
-          <a:fillRef idx="3">
-            <a:schemeClr val="accent1"/>
-          </a:fillRef>
-          <a:effectRef idx="2">
-            <a:schemeClr val="accent1"/>
-          </a:effectRef>
-          <a:fontRef idx="minor">
-            <a:schemeClr val="lt1"/>
-          </a:fontRef>
-        </p:style>
-        <p:txBody>
-          <a:bodyPr rtlCol="0" anchor="ctr"/>
-          <a:lstStyle/>
-          <a:p>
-            <a:pPr algn="ctr"/>
-          </a:p>
-        </p:txBody>
-      </p:sp>
-      <p:sp>
-        <p:nvSpPr>
-          <p:cNvPr id="4" name="TextBox 3"/>
-          <p:cNvSpPr txBox="1"/>
-          <p:nvPr/>
-        </p:nvSpPr>
-        <p:spPr>
-          <a:xfrm>
-            <a:off x="502920" y="109728"/>
-            <a:ext cx="11155680" cy="777240"/>
-          </a:xfrm>
-          <a:prstGeom prst="rect">
-            <a:avLst/>
-          </a:prstGeom>
-          <a:noFill/>
-        </p:spPr>
-        <p:txBody>
-          <a:bodyPr wrap="square">
-            <a:spAutoFit/>
-          </a:bodyPr>
-          <a:lstStyle/>
-          <a:p>
-            <a:pPr>
-              <a:spcAft>
-                <a:spcPts val="600"/>
-              </a:spcAft>
-            </a:pPr>
-            <a:r>
-              <a:rPr sz="2600" b="1">
-                <a:solidFill>
-                  <a:srgbClr val="FFFFFF"/>
-                </a:solidFill>
-              </a:rPr>
-              <a:t>And the Practical Conclusion Inverts</a:t>
-            </a:r>
-          </a:p>
-        </p:txBody>
-      </p:sp>
-      <p:sp>
-        <p:nvSpPr>
-          <p:cNvPr id="5" name="TextBox 4"/>
-          <p:cNvSpPr txBox="1"/>
-          <p:nvPr/>
-        </p:nvSpPr>
-        <p:spPr>
-          <a:xfrm>
-            <a:off x="502920" y="6473952"/>
-            <a:ext cx="8229600" cy="274320"/>
-          </a:xfrm>
-          <a:prstGeom prst="rect">
-            <a:avLst/>
-          </a:prstGeom>
-          <a:noFill/>
-        </p:spPr>
-        <p:txBody>
-          <a:bodyPr wrap="square">
-            <a:spAutoFit/>
-          </a:bodyPr>
-          <a:lstStyle/>
-          <a:p>
-            <a:pPr>
-              <a:spcAft>
-                <a:spcPts val="600"/>
-              </a:spcAft>
-            </a:pPr>
-            <a:r>
-              <a:rPr sz="900" b="0">
-                <a:solidFill>
-                  <a:srgbClr val="555555"/>
-                </a:solidFill>
-              </a:rPr>
-              <a:t>Boltz-Fast · Final Dissertation Report · Akik Jana (2024AB05287)</a:t>
-            </a:r>
-          </a:p>
-        </p:txBody>
-      </p:sp>
-      <p:sp>
-        <p:nvSpPr>
-          <p:cNvPr id="6" name="TextBox 5"/>
-          <p:cNvSpPr txBox="1"/>
-          <p:nvPr/>
-        </p:nvSpPr>
-        <p:spPr>
-          <a:xfrm>
-            <a:off x="11183112" y="6473952"/>
-            <a:ext cx="640080" cy="274320"/>
-          </a:xfrm>
-          <a:prstGeom prst="rect">
-            <a:avLst/>
-          </a:prstGeom>
-          <a:noFill/>
-        </p:spPr>
-        <p:txBody>
-          <a:bodyPr wrap="square">
-            <a:spAutoFit/>
-          </a:bodyPr>
-          <a:lstStyle/>
-          <a:p>
-            <a:pPr>
-              <a:spcAft>
-                <a:spcPts val="600"/>
-              </a:spcAft>
-            </a:pPr>
-            <a:r>
-              <a:rPr sz="1000" b="0">
-                <a:solidFill>
-                  <a:srgbClr val="0B2B52"/>
-                </a:solidFill>
-              </a:rPr>
-              <a:t>32</a:t>
-            </a:r>
-          </a:p>
-        </p:txBody>
-      </p:sp>
-      <p:sp>
-        <p:nvSpPr>
-          <p:cNvPr id="7" name="TextBox 6"/>
-          <p:cNvSpPr txBox="1"/>
-          <p:nvPr/>
-        </p:nvSpPr>
-        <p:spPr>
-          <a:xfrm>
-            <a:off x="548640" y="1115568"/>
-            <a:ext cx="11155680" cy="640080"/>
-          </a:xfrm>
-          <a:prstGeom prst="rect">
-            <a:avLst/>
-          </a:prstGeom>
-          <a:noFill/>
-        </p:spPr>
-        <p:txBody>
-          <a:bodyPr wrap="square">
-            <a:spAutoFit/>
-          </a:bodyPr>
-          <a:lstStyle/>
-          <a:p>
-            <a:pPr>
-              <a:spcAft>
-                <a:spcPts val="600"/>
-              </a:spcAft>
-            </a:pPr>
-            <a:r>
-              <a:rPr sz="1500" b="0">
-                <a:solidFill>
-                  <a:srgbClr val="0B2B52"/>
-                </a:solidFill>
-              </a:rPr>
-              <a:t>Ranking a cognate against its own decoys — the question a screen actually asks:</a:t>
-            </a:r>
-          </a:p>
-        </p:txBody>
-      </p:sp>
-      <p:graphicFrame>
-        <p:nvGraphicFramePr>
-          <p:cNvPr id="8" name="Table 7"/>
-          <p:cNvGraphicFramePr>
-            <a:graphicFrameLocks noGrp="1"/>
-          </p:cNvGraphicFramePr>
-          <p:nvPr/>
-        </p:nvGraphicFramePr>
-        <p:xfrm>
-          <a:off x="548640" y="1783080"/>
-          <a:ext cx="11155680" cy="1536192"/>
-        </p:xfrm>
-        <a:graphic>
-          <a:graphicData uri="http://schemas.openxmlformats.org/drawingml/2006/table">
-            <a:tbl>
-              <a:tblPr firstRow="1" bandRow="1">
-                <a:tableStyleId>{5C22544A-7EE6-4342-B048-85BDC9FD1C3A}</a:tableStyleId>
-              </a:tblPr>
-              <a:tblGrid>
-                <a:gridCol w="2834640"/>
-                <a:gridCol w="2011680"/>
-                <a:gridCol w="2011680"/>
-                <a:gridCol w="2194560"/>
-                <a:gridCol w="2103120"/>
-              </a:tblGrid>
-              <a:tr h="384048">
-                <a:tc>
-                  <a:txBody>
-                    <a:bodyPr/>
-                    <a:lstStyle/>
-                    <a:p>
-                      <a:r>
-                        <a:rPr sz="1300" b="1">
-                          <a:solidFill>
-                            <a:srgbClr val="0B2B52"/>
-                          </a:solidFill>
-                        </a:rPr>
-                        <a:t> </a:t>
-                      </a:r>
-                    </a:p>
-                  </a:txBody>
-                  <a:tcPr/>
-                </a:tc>
-                <a:tc>
-                  <a:txBody>
-                    <a:bodyPr/>
-                    <a:lstStyle/>
-                    <a:p>
-                      <a:r>
-                        <a:rPr sz="1300" b="1">
-                          <a:solidFill>
-                            <a:srgbClr val="0B2B52"/>
-                          </a:solidFill>
-                        </a:rPr>
-                        <a:t>reduced rank</a:t>
-                      </a:r>
-                    </a:p>
-                  </a:txBody>
-                  <a:tcPr/>
-                </a:tc>
-                <a:tc>
-                  <a:txBody>
-                    <a:bodyPr/>
-                    <a:lstStyle/>
-                    <a:p>
-                      <a:r>
-                        <a:rPr sz="1300" b="1">
-                          <a:solidFill>
-                            <a:srgbClr val="0B2B52"/>
-                          </a:solidFill>
-                        </a:rPr>
-                        <a:t>full rank</a:t>
-                      </a:r>
-                    </a:p>
-                  </a:txBody>
-                  <a:tcPr/>
-                </a:tc>
-                <a:tc>
-                  <a:txBody>
-                    <a:bodyPr/>
-                    <a:lstStyle/>
-                    <a:p>
-                      <a:r>
-                        <a:rPr sz="1300" b="1">
-                          <a:solidFill>
-                            <a:srgbClr val="0B2B52"/>
-                          </a:solidFill>
-                        </a:rPr>
-                        <a:t>first (of 22)</a:t>
-                      </a:r>
-                    </a:p>
-                  </a:txBody>
-                  <a:tcPr/>
-                </a:tc>
-                <a:tc>
-                  <a:txBody>
-                    <a:bodyPr/>
-                    <a:lstStyle/>
-                    <a:p>
-                      <a:r>
-                        <a:rPr sz="1300" b="1">
-                          <a:solidFill>
-                            <a:srgbClr val="0B2B52"/>
-                          </a:solidFill>
-                        </a:rPr>
-                        <a:t>AUC within</a:t>
-                      </a:r>
-                    </a:p>
-                  </a:txBody>
-                  <a:tcPr/>
-                </a:tc>
-              </a:tr>
-              <a:tr h="384048">
-                <a:tc>
-                  <a:txBody>
-                    <a:bodyPr/>
-                    <a:lstStyle/>
-                    <a:p>
-                      <a:r>
-                        <a:rPr sz="1300" b="1">
-                          <a:solidFill>
-                            <a:srgbClr val="0B2B52"/>
-                          </a:solidFill>
-                        </a:rPr>
-                        <a:t>ipTM</a:t>
-                      </a:r>
-                    </a:p>
-                  </a:txBody>
-                  <a:tcPr/>
-                </a:tc>
-                <a:tc>
-                  <a:txBody>
-                    <a:bodyPr/>
-                    <a:lstStyle/>
-                    <a:p>
-                      <a:r>
-                        <a:rPr sz="1300" b="0">
-                          <a:solidFill>
-                            <a:srgbClr val="0B2B52"/>
-                          </a:solidFill>
-                        </a:rPr>
-                        <a:t>1.86</a:t>
-                      </a:r>
-                    </a:p>
-                  </a:txBody>
-                  <a:tcPr/>
-                </a:tc>
-                <a:tc>
-                  <a:txBody>
-                    <a:bodyPr/>
-                    <a:lstStyle/>
-                    <a:p>
-                      <a:r>
-                        <a:rPr sz="1300" b="0">
-                          <a:solidFill>
-                            <a:srgbClr val="0B2B52"/>
-                          </a:solidFill>
-                        </a:rPr>
-                        <a:t>1.41</a:t>
-                      </a:r>
-                    </a:p>
-                  </a:txBody>
-                  <a:tcPr/>
-                </a:tc>
-                <a:tc>
-                  <a:txBody>
-                    <a:bodyPr/>
-                    <a:lstStyle/>
-                    <a:p>
-                      <a:r>
-                        <a:rPr sz="1300" b="0">
-                          <a:solidFill>
-                            <a:srgbClr val="0B2B52"/>
-                          </a:solidFill>
-                        </a:rPr>
-                        <a:t>11 → 15</a:t>
-                      </a:r>
-                    </a:p>
-                  </a:txBody>
-                  <a:tcPr/>
-                </a:tc>
-                <a:tc>
-                  <a:txBody>
-                    <a:bodyPr/>
-                    <a:lstStyle/>
-                    <a:p>
-                      <a:r>
-                        <a:rPr sz="1300" b="0">
-                          <a:solidFill>
-                            <a:srgbClr val="0B2B52"/>
-                          </a:solidFill>
-                        </a:rPr>
-                        <a:t>0.684 → 0.908</a:t>
-                      </a:r>
-                    </a:p>
-                  </a:txBody>
-                  <a:tcPr/>
-                </a:tc>
-              </a:tr>
-              <a:tr h="384048">
-                <a:tc>
-                  <a:txBody>
-                    <a:bodyPr/>
-                    <a:lstStyle/>
-                    <a:p>
-                      <a:r>
-                        <a:rPr sz="1300" b="1">
-                          <a:solidFill>
-                            <a:srgbClr val="0B2B52"/>
-                          </a:solidFill>
-                        </a:rPr>
-                        <a:t>interface pLDDT</a:t>
-                      </a:r>
-                    </a:p>
-                  </a:txBody>
-                  <a:tcPr/>
-                </a:tc>
-                <a:tc>
-                  <a:txBody>
-                    <a:bodyPr/>
-                    <a:lstStyle/>
-                    <a:p>
-                      <a:r>
-                        <a:rPr sz="1300" b="0">
-                          <a:solidFill>
-                            <a:srgbClr val="0B2B52"/>
-                          </a:solidFill>
-                        </a:rPr>
-                        <a:t>1.91</a:t>
-                      </a:r>
-                    </a:p>
-                  </a:txBody>
-                  <a:tcPr/>
-                </a:tc>
-                <a:tc>
-                  <a:txBody>
-                    <a:bodyPr/>
-                    <a:lstStyle/>
-                    <a:p>
-                      <a:r>
-                        <a:rPr sz="1300" b="0">
-                          <a:solidFill>
-                            <a:srgbClr val="0B2B52"/>
-                          </a:solidFill>
-                        </a:rPr>
-                        <a:t>1.27</a:t>
-                      </a:r>
-                    </a:p>
-                  </a:txBody>
-                  <a:tcPr/>
-                </a:tc>
-                <a:tc>
-                  <a:txBody>
-                    <a:bodyPr/>
-                    <a:lstStyle/>
-                    <a:p>
-                      <a:r>
-                        <a:rPr sz="1300" b="0">
-                          <a:solidFill>
-                            <a:srgbClr val="0B2B52"/>
-                          </a:solidFill>
-                        </a:rPr>
-                        <a:t>9 → 17</a:t>
-                      </a:r>
-                    </a:p>
-                  </a:txBody>
-                  <a:tcPr/>
-                </a:tc>
-                <a:tc>
-                  <a:txBody>
-                    <a:bodyPr/>
-                    <a:lstStyle/>
-                    <a:p>
-                      <a:r>
-                        <a:rPr sz="1300" b="0">
-                          <a:solidFill>
-                            <a:srgbClr val="0B2B52"/>
-                          </a:solidFill>
-                        </a:rPr>
-                        <a:t>0.640 → 0.943</a:t>
-                      </a:r>
-                    </a:p>
-                  </a:txBody>
-                  <a:tcPr/>
-                </a:tc>
-              </a:tr>
-              <a:tr h="384048">
-                <a:tc>
-                  <a:txBody>
-                    <a:bodyPr/>
-                    <a:lstStyle/>
-                    <a:p>
-                      <a:r>
-                        <a:rPr sz="1300" b="1">
-                          <a:solidFill>
-                            <a:srgbClr val="0B2B52"/>
-                          </a:solidFill>
-                        </a:rPr>
-                        <a:t>receptor side</a:t>
-                      </a:r>
-                    </a:p>
-                  </a:txBody>
-                  <a:tcPr/>
-                </a:tc>
-                <a:tc>
-                  <a:txBody>
-                    <a:bodyPr/>
-                    <a:lstStyle/>
-                    <a:p>
-                      <a:r>
-                        <a:rPr sz="1300" b="0">
-                          <a:solidFill>
-                            <a:srgbClr val="0B2B52"/>
-                          </a:solidFill>
-                        </a:rPr>
-                        <a:t>2.05</a:t>
-                      </a:r>
-                    </a:p>
-                  </a:txBody>
-                  <a:tcPr/>
-                </a:tc>
-                <a:tc>
-                  <a:txBody>
-                    <a:bodyPr/>
-                    <a:lstStyle/>
-                    <a:p>
-                      <a:r>
-                        <a:rPr sz="1300" b="0">
-                          <a:solidFill>
-                            <a:srgbClr val="0B2B52"/>
-                          </a:solidFill>
-                        </a:rPr>
-                        <a:t>1.27</a:t>
-                      </a:r>
-                    </a:p>
-                  </a:txBody>
-                  <a:tcPr/>
-                </a:tc>
-                <a:tc>
-                  <a:txBody>
-                    <a:bodyPr/>
-                    <a:lstStyle/>
-                    <a:p>
-                      <a:r>
-                        <a:rPr sz="1300" b="0">
-                          <a:solidFill>
-                            <a:srgbClr val="0B2B52"/>
-                          </a:solidFill>
-                        </a:rPr>
-                        <a:t>8 → 17</a:t>
-                      </a:r>
-                    </a:p>
-                  </a:txBody>
-                  <a:tcPr/>
-                </a:tc>
-                <a:tc>
-                  <a:txBody>
-                    <a:bodyPr/>
-                    <a:lstStyle/>
-                    <a:p>
-                      <a:r>
-                        <a:rPr sz="1300" b="0">
-                          <a:solidFill>
-                            <a:srgbClr val="0B2B52"/>
-                          </a:solidFill>
-                        </a:rPr>
-                        <a:t>0.600 → 0.943</a:t>
-                      </a:r>
-                    </a:p>
-                  </a:txBody>
-                  <a:tcPr/>
-                </a:tc>
-              </a:tr>
-            </a:tbl>
-          </a:graphicData>
-        </a:graphic>
-      </p:graphicFrame>
-      <p:sp>
-        <p:nvSpPr>
-          <p:cNvPr id="9" name="Rounded Rectangle 8"/>
-          <p:cNvSpPr/>
-          <p:nvPr/>
-        </p:nvSpPr>
-        <p:spPr>
-          <a:xfrm>
-            <a:off x="548640" y="3611880"/>
-            <a:ext cx="3520440" cy="1463040"/>
-          </a:xfrm>
-          <a:prstGeom prst="roundRect">
-            <a:avLst/>
-          </a:prstGeom>
-          <a:solidFill>
-            <a:srgbClr val="2E7D32"/>
-          </a:solidFill>
-          <a:ln>
-            <a:noFill/>
-          </a:ln>
-        </p:spPr>
-        <p:style>
-          <a:lnRef idx="1">
-            <a:schemeClr val="accent1"/>
-          </a:lnRef>
-          <a:fillRef idx="3">
-            <a:schemeClr val="accent1"/>
-          </a:fillRef>
-          <a:effectRef idx="2">
-            <a:schemeClr val="accent1"/>
-          </a:effectRef>
-          <a:fontRef idx="minor">
-            <a:schemeClr val="lt1"/>
-          </a:fontRef>
-        </p:style>
-        <p:txBody>
-          <a:bodyPr rtlCol="0" anchor="ctr" wrap="square"/>
-          <a:lstStyle/>
-          <a:p>
-            <a:pPr algn="ctr"/>
-            <a:r>
-              <a:rPr sz="2300" b="1">
-                <a:solidFill>
-                  <a:srgbClr val="FFFFFF"/>
-                </a:solidFill>
-              </a:rPr>
-              <a:t>17 of 22</a:t>
-            </a:r>
-          </a:p>
-          <a:p>
-            <a:pPr algn="ctr"/>
-            <a:r>
-              <a:rPr sz="1050">
-                <a:solidFill>
-                  <a:srgbClr val="FFFFFF"/>
-                </a:solidFill>
-              </a:rPr>
-              <a:t>true binder ranked FIRST (chance 2.50)</a:t>
-            </a:r>
-          </a:p>
-        </p:txBody>
-      </p:sp>
-      <p:sp>
-        <p:nvSpPr>
-          <p:cNvPr id="10" name="Rounded Rectangle 9"/>
-          <p:cNvSpPr/>
-          <p:nvPr/>
-        </p:nvSpPr>
-        <p:spPr>
-          <a:xfrm>
-            <a:off x="4343400" y="3611880"/>
-            <a:ext cx="3520440" cy="1463040"/>
-          </a:xfrm>
-          <a:prstGeom prst="roundRect">
-            <a:avLst/>
-          </a:prstGeom>
-          <a:solidFill>
-            <a:srgbClr val="2E7D32"/>
-          </a:solidFill>
-          <a:ln>
-            <a:noFill/>
-          </a:ln>
-        </p:spPr>
-        <p:style>
-          <a:lnRef idx="1">
-            <a:schemeClr val="accent1"/>
-          </a:lnRef>
-          <a:fillRef idx="3">
-            <a:schemeClr val="accent1"/>
-          </a:fillRef>
-          <a:effectRef idx="2">
-            <a:schemeClr val="accent1"/>
-          </a:effectRef>
-          <a:fontRef idx="minor">
-            <a:schemeClr val="lt1"/>
-          </a:fontRef>
-        </p:style>
-        <p:txBody>
-          <a:bodyPr rtlCol="0" anchor="ctr" wrap="square"/>
-          <a:lstStyle/>
-          <a:p>
-            <a:pPr algn="ctr"/>
-            <a:r>
-              <a:rPr sz="2300" b="1">
-                <a:solidFill>
-                  <a:srgbClr val="FFFFFF"/>
-                </a:solidFill>
-              </a:rPr>
-              <a:t>0.943</a:t>
-            </a:r>
-          </a:p>
-          <a:p>
-            <a:pPr algn="ctr"/>
-            <a:r>
-              <a:rPr sz="1050">
-                <a:solidFill>
-                  <a:srgbClr val="FFFFFF"/>
-                </a:solidFill>
-              </a:rPr>
-              <a:t>within-receptor AUC (was 0.640)</a:t>
-            </a:r>
-          </a:p>
-        </p:txBody>
-      </p:sp>
-      <p:sp>
-        <p:nvSpPr>
-          <p:cNvPr id="11" name="Rounded Rectangle 10"/>
-          <p:cNvSpPr/>
-          <p:nvPr/>
-        </p:nvSpPr>
-        <p:spPr>
-          <a:xfrm>
-            <a:off x="8138160" y="3611880"/>
-            <a:ext cx="3566160" cy="1463040"/>
-          </a:xfrm>
-          <a:prstGeom prst="roundRect">
-            <a:avLst/>
-          </a:prstGeom>
-          <a:solidFill>
-            <a:srgbClr val="0E8F9A"/>
-          </a:solidFill>
-          <a:ln>
-            <a:noFill/>
-          </a:ln>
-        </p:spPr>
-        <p:style>
-          <a:lnRef idx="1">
-            <a:schemeClr val="accent1"/>
-          </a:lnRef>
-          <a:fillRef idx="3">
-            <a:schemeClr val="accent1"/>
-          </a:fillRef>
-          <a:effectRef idx="2">
-            <a:schemeClr val="accent1"/>
-          </a:effectRef>
-          <a:fontRef idx="minor">
-            <a:schemeClr val="lt1"/>
-          </a:fontRef>
-        </p:style>
-        <p:txBody>
-          <a:bodyPr rtlCol="0" anchor="ctr" wrap="square"/>
-          <a:lstStyle/>
-          <a:p>
-            <a:pPr algn="ctr"/>
-            <a:r>
-              <a:rPr sz="2300" b="1">
-                <a:solidFill>
-                  <a:srgbClr val="FFFFFF"/>
-                </a:solidFill>
-              </a:rPr>
-              <a:t>77%</a:t>
-            </a:r>
-          </a:p>
-          <a:p>
-            <a:pPr algn="ctr"/>
-            <a:r>
-              <a:rPr sz="1050">
-                <a:solidFill>
-                  <a:srgbClr val="FFFFFF"/>
-                </a:solidFill>
-              </a:rPr>
-              <a:t>top-1 accuracy at full settings</a:t>
-            </a:r>
-          </a:p>
-        </p:txBody>
-      </p:sp>
-      <p:sp>
-        <p:nvSpPr>
-          <p:cNvPr id="12" name="Rounded Rectangle 11"/>
-          <p:cNvSpPr/>
-          <p:nvPr/>
-        </p:nvSpPr>
-        <p:spPr>
-          <a:xfrm>
-            <a:off x="548640" y="5074920"/>
-            <a:ext cx="11155680" cy="1188720"/>
-          </a:xfrm>
-          <a:prstGeom prst="roundRect">
-            <a:avLst/>
-          </a:prstGeom>
-          <a:solidFill>
-            <a:srgbClr val="0B2B52"/>
-          </a:solidFill>
-          <a:ln>
-            <a:noFill/>
-          </a:ln>
-        </p:spPr>
-        <p:style>
-          <a:lnRef idx="1">
-            <a:schemeClr val="accent1"/>
-          </a:lnRef>
-          <a:fillRef idx="3">
-            <a:schemeClr val="accent1"/>
-          </a:fillRef>
-          <a:effectRef idx="2">
-            <a:schemeClr val="accent1"/>
-          </a:effectRef>
-          <a:fontRef idx="minor">
-            <a:schemeClr val="lt1"/>
-          </a:fontRef>
-        </p:style>
-        <p:txBody>
-          <a:bodyPr rtlCol="0" anchor="ctr" wrap="square"/>
-          <a:lstStyle/>
-          <a:p>
-            <a:pPr algn="ctr">
-              <a:spcAft>
-                <a:spcPts val="600"/>
-              </a:spcAft>
-            </a:pPr>
-            <a:r>
-              <a:rPr sz="1400" b="1">
-                <a:solidFill>
-                  <a:srgbClr val="FFFFFF"/>
-                </a:solidFill>
-              </a:rPr>
-              <a:t>The negative results are properties of the regime, not of the method.</a:t>
-            </a:r>
-          </a:p>
-          <a:p>
-            <a:pPr>
-              <a:spcAft>
-                <a:spcPts val="600"/>
-              </a:spcAft>
-            </a:pPr>
-            <a:r>
-              <a:rPr sz="1400" b="1">
-                <a:solidFill>
-                  <a:srgbClr val="FFFFFF"/>
-                </a:solidFill>
-              </a:rPr>
-              <a:t>Best elsewhere in this work: DeCAF at 10 steps, AUC 0.807. This also exceeds the 0.90 a nanobody benchmark reaches with ensembling plus physics rescoring.</a:t>
-            </a:r>
-          </a:p>
-        </p:txBody>
-      </p:sp>
-      <p:sp>
-        <p:nvSpPr>
-          <p:cNvPr id="13" name="TextBox 12"/>
-          <p:cNvSpPr txBox="1"/>
-          <p:nvPr/>
-        </p:nvSpPr>
-        <p:spPr>
-          <a:xfrm>
-            <a:off x="548640" y="6291072"/>
-            <a:ext cx="11155680" cy="274320"/>
-          </a:xfrm>
-          <a:prstGeom prst="rect">
-            <a:avLst/>
-          </a:prstGeom>
-          <a:noFill/>
-        </p:spPr>
-        <p:txBody>
-          <a:bodyPr wrap="square">
-            <a:spAutoFit/>
-          </a:bodyPr>
-          <a:lstStyle/>
-          <a:p>
-            <a:pPr>
-              <a:spcAft>
-                <a:spcPts val="600"/>
-              </a:spcAft>
-            </a:pPr>
-            <a:r>
-              <a:rPr sz="1100" b="0">
-                <a:solidFill>
-                  <a:srgbClr val="8A5200"/>
-                </a:solidFill>
-              </a:rPr>
-              <a:t>Caveat: one model, 22 receptors, a single draw.</a:t>
-            </a:r>
-          </a:p>
-        </p:txBody>
-      </p:sp>
-    </p:spTree>
-  </p:cSld>
-  <p:clrMapOvr>
-    <a:masterClrMapping/>
-  </p:clrMapOvr>
-</p:sld>
-</file>
-
-<file path=ppt/slides/slide33.xml><?xml version="1.0" encoding="utf-8"?>
-<p:sld xmlns:a="http://schemas.openxmlformats.org/drawingml/2006/main" xmlns:p="http://schemas.openxmlformats.org/presentationml/2006/main" xmlns:r="http://schemas.openxmlformats.org/officeDocument/2006/relationships">
-  <p:cSld>
-    <p:spTree>
-      <p:nvGrpSpPr>
-        <p:cNvPr id="1" name=""/>
-        <p:cNvGrpSpPr/>
-        <p:nvPr/>
-      </p:nvGrpSpPr>
-      <p:grpSpPr/>
-      <p:sp>
-        <p:nvSpPr>
-          <p:cNvPr id="2" name="Rectangle 1"/>
-          <p:cNvSpPr/>
-          <p:nvPr/>
-        </p:nvSpPr>
-        <p:spPr>
-          <a:xfrm>
-            <a:off x="0" y="0"/>
             <a:ext cx="12191695" cy="914400"/>
           </a:xfrm>
           <a:prstGeom prst="rect">
@@ -17324,7 +16999,7 @@
                   <a:srgbClr val="FFFFFF"/>
                 </a:solidFill>
               </a:rPr>
-              <a:t>Future Plan</a:t>
+              <a:t>Summary</a:t>
             </a:r>
           </a:p>
         </p:txBody>
@@ -17406,736 +17081,7 @@
                   <a:srgbClr val="0B2B52"/>
                 </a:solidFill>
               </a:rPr>
-              <a:t>33</a:t>
-            </a:r>
-          </a:p>
-        </p:txBody>
-      </p:sp>
-      <p:sp>
-        <p:nvSpPr>
-          <p:cNvPr id="7" name="Oval 6"/>
-          <p:cNvSpPr/>
-          <p:nvPr/>
-        </p:nvSpPr>
-        <p:spPr>
-          <a:xfrm>
-            <a:off x="548640" y="1325880"/>
-            <a:ext cx="566928" cy="566928"/>
-          </a:xfrm>
-          <a:prstGeom prst="ellipse">
-            <a:avLst/>
-          </a:prstGeom>
-          <a:solidFill>
-            <a:srgbClr val="1E6FB8"/>
-          </a:solidFill>
-          <a:ln>
-            <a:noFill/>
-          </a:ln>
-          <a:effectLst/>
-        </p:spPr>
-        <p:style>
-          <a:lnRef idx="1">
-            <a:schemeClr val="accent1"/>
-          </a:lnRef>
-          <a:fillRef idx="3">
-            <a:schemeClr val="accent1"/>
-          </a:fillRef>
-          <a:effectRef idx="2">
-            <a:schemeClr val="accent1"/>
-          </a:effectRef>
-          <a:fontRef idx="minor">
-            <a:schemeClr val="lt1"/>
-          </a:fontRef>
-        </p:style>
-        <p:txBody>
-          <a:bodyPr rtlCol="0" anchor="ctr" wrap="square"/>
-          <a:lstStyle/>
-          <a:p>
-            <a:pPr algn="ctr">
-              <a:spcBef>
-                <a:spcPts val="0"/>
-              </a:spcBef>
-              <a:spcAft>
-                <a:spcPts val="400"/>
-              </a:spcAft>
-            </a:pPr>
-            <a:r>
-              <a:rPr sz="1800" b="1" i="0">
-                <a:solidFill>
-                  <a:srgbClr val="FFFFFF"/>
-                </a:solidFill>
-              </a:rPr>
-              <a:t>1</a:t>
-            </a:r>
-          </a:p>
-        </p:txBody>
-      </p:sp>
-      <p:sp>
-        <p:nvSpPr>
-          <p:cNvPr id="8" name="TextBox 7"/>
-          <p:cNvSpPr txBox="1"/>
-          <p:nvPr/>
-        </p:nvSpPr>
-        <p:spPr>
-          <a:xfrm>
-            <a:off x="1325880" y="1307592"/>
-            <a:ext cx="10332720" cy="868680"/>
-          </a:xfrm>
-          <a:prstGeom prst="rect">
-            <a:avLst/>
-          </a:prstGeom>
-          <a:noFill/>
-        </p:spPr>
-        <p:txBody>
-          <a:bodyPr wrap="square">
-            <a:spAutoFit/>
-          </a:bodyPr>
-          <a:lstStyle/>
-          <a:p>
-            <a:pPr>
-              <a:spcBef>
-                <a:spcPts val="0"/>
-              </a:spcBef>
-              <a:spcAft>
-                <a:spcPts val="600"/>
-              </a:spcAft>
-            </a:pPr>
-            <a:r>
-              <a:rPr sz="1300" b="0">
-                <a:solidFill>
-                  <a:srgbClr val="0B2B52"/>
-                </a:solidFill>
-              </a:rPr>
-              <a:t>DONE — profiled; and measured what the optimisations actually deliver on pretrained weights (slides 11–18).</a:t>
-            </a:r>
-          </a:p>
-        </p:txBody>
-      </p:sp>
-      <p:sp>
-        <p:nvSpPr>
-          <p:cNvPr id="9" name="Oval 8"/>
-          <p:cNvSpPr/>
-          <p:nvPr/>
-        </p:nvSpPr>
-        <p:spPr>
-          <a:xfrm>
-            <a:off x="548640" y="2304288"/>
-            <a:ext cx="566928" cy="566928"/>
-          </a:xfrm>
-          <a:prstGeom prst="ellipse">
-            <a:avLst/>
-          </a:prstGeom>
-          <a:solidFill>
-            <a:srgbClr val="0E8F9A"/>
-          </a:solidFill>
-          <a:ln>
-            <a:noFill/>
-          </a:ln>
-          <a:effectLst/>
-        </p:spPr>
-        <p:style>
-          <a:lnRef idx="1">
-            <a:schemeClr val="accent1"/>
-          </a:lnRef>
-          <a:fillRef idx="3">
-            <a:schemeClr val="accent1"/>
-          </a:fillRef>
-          <a:effectRef idx="2">
-            <a:schemeClr val="accent1"/>
-          </a:effectRef>
-          <a:fontRef idx="minor">
-            <a:schemeClr val="lt1"/>
-          </a:fontRef>
-        </p:style>
-        <p:txBody>
-          <a:bodyPr rtlCol="0" anchor="ctr" wrap="square"/>
-          <a:lstStyle/>
-          <a:p>
-            <a:pPr algn="ctr">
-              <a:spcBef>
-                <a:spcPts val="0"/>
-              </a:spcBef>
-              <a:spcAft>
-                <a:spcPts val="400"/>
-              </a:spcAft>
-            </a:pPr>
-            <a:r>
-              <a:rPr sz="1800" b="1" i="0">
-                <a:solidFill>
-                  <a:srgbClr val="FFFFFF"/>
-                </a:solidFill>
-              </a:rPr>
-              <a:t>2</a:t>
-            </a:r>
-          </a:p>
-        </p:txBody>
-      </p:sp>
-      <p:sp>
-        <p:nvSpPr>
-          <p:cNvPr id="10" name="TextBox 9"/>
-          <p:cNvSpPr txBox="1"/>
-          <p:nvPr/>
-        </p:nvSpPr>
-        <p:spPr>
-          <a:xfrm>
-            <a:off x="1325880" y="2286000"/>
-            <a:ext cx="10332720" cy="868680"/>
-          </a:xfrm>
-          <a:prstGeom prst="rect">
-            <a:avLst/>
-          </a:prstGeom>
-          <a:noFill/>
-        </p:spPr>
-        <p:txBody>
-          <a:bodyPr wrap="square">
-            <a:spAutoFit/>
-          </a:bodyPr>
-          <a:lstStyle/>
-          <a:p>
-            <a:pPr>
-              <a:spcBef>
-                <a:spcPts val="0"/>
-              </a:spcBef>
-              <a:spcAft>
-                <a:spcPts val="600"/>
-              </a:spcAft>
-            </a:pPr>
-            <a:r>
-              <a:rPr sz="1300" b="0">
-                <a:solidFill>
-                  <a:srgbClr val="0B2B52"/>
-                </a:solidFill>
-              </a:rPr>
-              <a:t>DONE — DeCAF-Boltz, distilled for 10 steps, folds the 132-complex panel in ~20 min locally and returns 96% physically plausible backbones against 14% for a stock model run short (slides 27-28).</a:t>
-            </a:r>
-          </a:p>
-        </p:txBody>
-      </p:sp>
-      <p:sp>
-        <p:nvSpPr>
-          <p:cNvPr id="11" name="Oval 10"/>
-          <p:cNvSpPr/>
-          <p:nvPr/>
-        </p:nvSpPr>
-        <p:spPr>
-          <a:xfrm>
-            <a:off x="548640" y="3282696"/>
-            <a:ext cx="566928" cy="566928"/>
-          </a:xfrm>
-          <a:prstGeom prst="ellipse">
-            <a:avLst/>
-          </a:prstGeom>
-          <a:solidFill>
-            <a:srgbClr val="2E7D32"/>
-          </a:solidFill>
-          <a:ln>
-            <a:noFill/>
-          </a:ln>
-          <a:effectLst/>
-        </p:spPr>
-        <p:style>
-          <a:lnRef idx="1">
-            <a:schemeClr val="accent1"/>
-          </a:lnRef>
-          <a:fillRef idx="3">
-            <a:schemeClr val="accent1"/>
-          </a:fillRef>
-          <a:effectRef idx="2">
-            <a:schemeClr val="accent1"/>
-          </a:effectRef>
-          <a:fontRef idx="minor">
-            <a:schemeClr val="lt1"/>
-          </a:fontRef>
-        </p:style>
-        <p:txBody>
-          <a:bodyPr rtlCol="0" anchor="ctr" wrap="square"/>
-          <a:lstStyle/>
-          <a:p>
-            <a:pPr algn="ctr">
-              <a:spcBef>
-                <a:spcPts val="0"/>
-              </a:spcBef>
-              <a:spcAft>
-                <a:spcPts val="400"/>
-              </a:spcAft>
-            </a:pPr>
-            <a:r>
-              <a:rPr sz="1800" b="1" i="0">
-                <a:solidFill>
-                  <a:srgbClr val="FFFFFF"/>
-                </a:solidFill>
-              </a:rPr>
-              <a:t>3</a:t>
-            </a:r>
-          </a:p>
-        </p:txBody>
-      </p:sp>
-      <p:sp>
-        <p:nvSpPr>
-          <p:cNvPr id="12" name="TextBox 11"/>
-          <p:cNvSpPr txBox="1"/>
-          <p:nvPr/>
-        </p:nvSpPr>
-        <p:spPr>
-          <a:xfrm>
-            <a:off x="1325880" y="3264408"/>
-            <a:ext cx="10332720" cy="868680"/>
-          </a:xfrm>
-          <a:prstGeom prst="rect">
-            <a:avLst/>
-          </a:prstGeom>
-          <a:noFill/>
-        </p:spPr>
-        <p:txBody>
-          <a:bodyPr wrap="square">
-            <a:spAutoFit/>
-          </a:bodyPr>
-          <a:lstStyle/>
-          <a:p>
-            <a:pPr>
-              <a:spcBef>
-                <a:spcPts val="0"/>
-              </a:spcBef>
-              <a:spcAft>
-                <a:spcPts val="600"/>
-              </a:spcAft>
-            </a:pPr>
-            <a:r>
-              <a:rPr sz="1300" b="0">
-                <a:solidFill>
-                  <a:srgbClr val="0B2B52"/>
-                </a:solidFill>
-              </a:rPr>
-              <a:t>DONE, NEGATIVE — the surrogate was distilled and evaluated: ipTM does not rank binders, so no surrogate distilled from it can either.</a:t>
-            </a:r>
-          </a:p>
-        </p:txBody>
-      </p:sp>
-      <p:sp>
-        <p:nvSpPr>
-          <p:cNvPr id="13" name="Oval 12"/>
-          <p:cNvSpPr/>
-          <p:nvPr/>
-        </p:nvSpPr>
-        <p:spPr>
-          <a:xfrm>
-            <a:off x="548640" y="4261104"/>
-            <a:ext cx="566928" cy="566928"/>
-          </a:xfrm>
-          <a:prstGeom prst="ellipse">
-            <a:avLst/>
-          </a:prstGeom>
-          <a:solidFill>
-            <a:srgbClr val="C77700"/>
-          </a:solidFill>
-          <a:ln>
-            <a:noFill/>
-          </a:ln>
-          <a:effectLst/>
-        </p:spPr>
-        <p:style>
-          <a:lnRef idx="1">
-            <a:schemeClr val="accent1"/>
-          </a:lnRef>
-          <a:fillRef idx="3">
-            <a:schemeClr val="accent1"/>
-          </a:fillRef>
-          <a:effectRef idx="2">
-            <a:schemeClr val="accent1"/>
-          </a:effectRef>
-          <a:fontRef idx="minor">
-            <a:schemeClr val="lt1"/>
-          </a:fontRef>
-        </p:style>
-        <p:txBody>
-          <a:bodyPr rtlCol="0" anchor="ctr" wrap="square"/>
-          <a:lstStyle/>
-          <a:p>
-            <a:pPr algn="ctr">
-              <a:spcBef>
-                <a:spcPts val="0"/>
-              </a:spcBef>
-              <a:spcAft>
-                <a:spcPts val="400"/>
-              </a:spcAft>
-            </a:pPr>
-            <a:r>
-              <a:rPr sz="1800" b="1" i="0">
-                <a:solidFill>
-                  <a:srgbClr val="FFFFFF"/>
-                </a:solidFill>
-              </a:rPr>
-              <a:t>4</a:t>
-            </a:r>
-          </a:p>
-        </p:txBody>
-      </p:sp>
-      <p:sp>
-        <p:nvSpPr>
-          <p:cNvPr id="14" name="TextBox 13"/>
-          <p:cNvSpPr txBox="1"/>
-          <p:nvPr/>
-        </p:nvSpPr>
-        <p:spPr>
-          <a:xfrm>
-            <a:off x="1325880" y="4242816"/>
-            <a:ext cx="10332720" cy="868680"/>
-          </a:xfrm>
-          <a:prstGeom prst="rect">
-            <a:avLst/>
-          </a:prstGeom>
-          <a:noFill/>
-        </p:spPr>
-        <p:txBody>
-          <a:bodyPr wrap="square">
-            <a:spAutoFit/>
-          </a:bodyPr>
-          <a:lstStyle/>
-          <a:p>
-            <a:pPr>
-              <a:spcBef>
-                <a:spcPts val="0"/>
-              </a:spcBef>
-              <a:spcAft>
-                <a:spcPts val="600"/>
-              </a:spcAft>
-            </a:pPr>
-            <a:r>
-              <a:rPr sz="1300" b="0">
-                <a:solidFill>
-                  <a:srgbClr val="0B2B52"/>
-                </a:solidFill>
-              </a:rPr>
-              <a:t>Use open Boltz-2 weights only — Boltz-2.1 is closed / API-only.</a:t>
-            </a:r>
-          </a:p>
-        </p:txBody>
-      </p:sp>
-      <p:sp>
-        <p:nvSpPr>
-          <p:cNvPr id="15" name="Oval 14"/>
-          <p:cNvSpPr/>
-          <p:nvPr/>
-        </p:nvSpPr>
-        <p:spPr>
-          <a:xfrm>
-            <a:off x="548640" y="5239512"/>
-            <a:ext cx="566928" cy="566928"/>
-          </a:xfrm>
-          <a:prstGeom prst="ellipse">
-            <a:avLst/>
-          </a:prstGeom>
-          <a:solidFill>
-            <a:srgbClr val="0B2B52"/>
-          </a:solidFill>
-          <a:ln>
-            <a:noFill/>
-          </a:ln>
-          <a:effectLst/>
-        </p:spPr>
-        <p:style>
-          <a:lnRef idx="1">
-            <a:schemeClr val="accent1"/>
-          </a:lnRef>
-          <a:fillRef idx="3">
-            <a:schemeClr val="accent1"/>
-          </a:fillRef>
-          <a:effectRef idx="2">
-            <a:schemeClr val="accent1"/>
-          </a:effectRef>
-          <a:fontRef idx="minor">
-            <a:schemeClr val="lt1"/>
-          </a:fontRef>
-        </p:style>
-        <p:txBody>
-          <a:bodyPr rtlCol="0" anchor="ctr" wrap="square"/>
-          <a:lstStyle/>
-          <a:p>
-            <a:pPr algn="ctr">
-              <a:spcBef>
-                <a:spcPts val="0"/>
-              </a:spcBef>
-              <a:spcAft>
-                <a:spcPts val="400"/>
-              </a:spcAft>
-            </a:pPr>
-            <a:r>
-              <a:rPr sz="1800" b="1" i="0">
-                <a:solidFill>
-                  <a:srgbClr val="FFFFFF"/>
-                </a:solidFill>
-              </a:rPr>
-              <a:t>5</a:t>
-            </a:r>
-          </a:p>
-        </p:txBody>
-      </p:sp>
-      <p:sp>
-        <p:nvSpPr>
-          <p:cNvPr id="16" name="TextBox 15"/>
-          <p:cNvSpPr txBox="1"/>
-          <p:nvPr/>
-        </p:nvSpPr>
-        <p:spPr>
-          <a:xfrm>
-            <a:off x="1325880" y="5221224"/>
-            <a:ext cx="10332720" cy="868680"/>
-          </a:xfrm>
-          <a:prstGeom prst="rect">
-            <a:avLst/>
-          </a:prstGeom>
-          <a:noFill/>
-        </p:spPr>
-        <p:txBody>
-          <a:bodyPr wrap="square">
-            <a:spAutoFit/>
-          </a:bodyPr>
-          <a:lstStyle/>
-          <a:p>
-            <a:pPr>
-              <a:spcBef>
-                <a:spcPts val="0"/>
-              </a:spcBef>
-              <a:spcAft>
-                <a:spcPts val="600"/>
-              </a:spcAft>
-            </a:pPr>
-            <a:r>
-              <a:rPr sz="1300" b="0">
-                <a:solidFill>
-                  <a:srgbClr val="0B2B52"/>
-                </a:solidFill>
-              </a:rPr>
-              <a:t>Production GPU scaling — NO LONGER a prerequisite. MPS (~3x) plus few-step distillation let the held-out panel be folded five times on this laptop, and the third draw overturned what the first two supported. Scaling is now for extending the panel past 22 receptors, which is the binding constraint on the open questions.</a:t>
-            </a:r>
-          </a:p>
-        </p:txBody>
-      </p:sp>
-    </p:spTree>
-  </p:cSld>
-  <p:clrMapOvr>
-    <a:masterClrMapping/>
-  </p:clrMapOvr>
-</p:sld>
-</file>
-
-<file path=ppt/slides/slide34.xml><?xml version="1.0" encoding="utf-8"?>
-<p:sld xmlns:a="http://schemas.openxmlformats.org/drawingml/2006/main" xmlns:p="http://schemas.openxmlformats.org/presentationml/2006/main" xmlns:r="http://schemas.openxmlformats.org/officeDocument/2006/relationships">
-  <p:cSld>
-    <p:spTree>
-      <p:nvGrpSpPr>
-        <p:cNvPr id="1" name=""/>
-        <p:cNvGrpSpPr/>
-        <p:nvPr/>
-      </p:nvGrpSpPr>
-      <p:grpSpPr/>
-      <p:sp>
-        <p:nvSpPr>
-          <p:cNvPr id="2" name="Rectangle 1"/>
-          <p:cNvSpPr/>
-          <p:nvPr/>
-        </p:nvSpPr>
-        <p:spPr>
-          <a:xfrm>
-            <a:off x="0" y="0"/>
-            <a:ext cx="12191695" cy="914400"/>
-          </a:xfrm>
-          <a:prstGeom prst="rect">
-            <a:avLst/>
-          </a:prstGeom>
-          <a:solidFill>
-            <a:srgbClr val="0B2B52"/>
-          </a:solidFill>
-          <a:ln>
-            <a:noFill/>
-          </a:ln>
-          <a:effectLst/>
-        </p:spPr>
-        <p:style>
-          <a:lnRef idx="1">
-            <a:schemeClr val="accent1"/>
-          </a:lnRef>
-          <a:fillRef idx="3">
-            <a:schemeClr val="accent1"/>
-          </a:fillRef>
-          <a:effectRef idx="2">
-            <a:schemeClr val="accent1"/>
-          </a:effectRef>
-          <a:fontRef idx="minor">
-            <a:schemeClr val="lt1"/>
-          </a:fontRef>
-        </p:style>
-        <p:txBody>
-          <a:bodyPr rtlCol="0" anchor="ctr"/>
-          <a:lstStyle/>
-          <a:p>
-            <a:pPr algn="ctr"/>
-          </a:p>
-        </p:txBody>
-      </p:sp>
-      <p:sp>
-        <p:nvSpPr>
-          <p:cNvPr id="3" name="Rectangle 2"/>
-          <p:cNvSpPr/>
-          <p:nvPr/>
-        </p:nvSpPr>
-        <p:spPr>
-          <a:xfrm>
-            <a:off x="0" y="914400"/>
-            <a:ext cx="12191695" cy="54864"/>
-          </a:xfrm>
-          <a:prstGeom prst="rect">
-            <a:avLst/>
-          </a:prstGeom>
-          <a:solidFill>
-            <a:srgbClr val="1E6FB8"/>
-          </a:solidFill>
-          <a:ln>
-            <a:noFill/>
-          </a:ln>
-          <a:effectLst/>
-        </p:spPr>
-        <p:style>
-          <a:lnRef idx="1">
-            <a:schemeClr val="accent1"/>
-          </a:lnRef>
-          <a:fillRef idx="3">
-            <a:schemeClr val="accent1"/>
-          </a:fillRef>
-          <a:effectRef idx="2">
-            <a:schemeClr val="accent1"/>
-          </a:effectRef>
-          <a:fontRef idx="minor">
-            <a:schemeClr val="lt1"/>
-          </a:fontRef>
-        </p:style>
-        <p:txBody>
-          <a:bodyPr rtlCol="0" anchor="ctr"/>
-          <a:lstStyle/>
-          <a:p>
-            <a:pPr algn="ctr"/>
-          </a:p>
-        </p:txBody>
-      </p:sp>
-      <p:sp>
-        <p:nvSpPr>
-          <p:cNvPr id="4" name="TextBox 3"/>
-          <p:cNvSpPr txBox="1"/>
-          <p:nvPr/>
-        </p:nvSpPr>
-        <p:spPr>
-          <a:xfrm>
-            <a:off x="502920" y="109728"/>
-            <a:ext cx="11155680" cy="777240"/>
-          </a:xfrm>
-          <a:prstGeom prst="rect">
-            <a:avLst/>
-          </a:prstGeom>
-          <a:noFill/>
-        </p:spPr>
-        <p:txBody>
-          <a:bodyPr wrap="square">
-            <a:spAutoFit/>
-          </a:bodyPr>
-          <a:lstStyle/>
-          <a:p>
-            <a:pPr>
-              <a:spcBef>
-                <a:spcPts val="0"/>
-              </a:spcBef>
-              <a:spcAft>
-                <a:spcPts val="400"/>
-              </a:spcAft>
-            </a:pPr>
-            <a:r>
-              <a:rPr sz="2600" b="1" i="0">
-                <a:solidFill>
-                  <a:srgbClr val="FFFFFF"/>
-                </a:solidFill>
-              </a:rPr>
-              <a:t>Summary</a:t>
-            </a:r>
-          </a:p>
-        </p:txBody>
-      </p:sp>
-      <p:sp>
-        <p:nvSpPr>
-          <p:cNvPr id="5" name="TextBox 4"/>
-          <p:cNvSpPr txBox="1"/>
-          <p:nvPr/>
-        </p:nvSpPr>
-        <p:spPr>
-          <a:xfrm>
-            <a:off x="502920" y="6473952"/>
-            <a:ext cx="8229600" cy="274320"/>
-          </a:xfrm>
-          <a:prstGeom prst="rect">
-            <a:avLst/>
-          </a:prstGeom>
-          <a:noFill/>
-        </p:spPr>
-        <p:txBody>
-          <a:bodyPr wrap="square">
-            <a:spAutoFit/>
-          </a:bodyPr>
-          <a:lstStyle/>
-          <a:p>
-            <a:pPr>
-              <a:spcBef>
-                <a:spcPts val="0"/>
-              </a:spcBef>
-              <a:spcAft>
-                <a:spcPts val="600"/>
-              </a:spcAft>
-            </a:pPr>
-            <a:r>
-              <a:rPr sz="900" b="0">
-                <a:solidFill>
-                  <a:srgbClr val="555555"/>
-                </a:solidFill>
-              </a:rPr>
-              <a:t>Boltz-Fast · Final Dissertation Report · Akik Jana (2024AB05287)</a:t>
-            </a:r>
-          </a:p>
-        </p:txBody>
-      </p:sp>
-      <p:sp>
-        <p:nvSpPr>
-          <p:cNvPr id="6" name="TextBox 5"/>
-          <p:cNvSpPr txBox="1"/>
-          <p:nvPr/>
-        </p:nvSpPr>
-        <p:spPr>
-          <a:xfrm>
-            <a:off x="11185855" y="6473952"/>
-            <a:ext cx="640080" cy="274320"/>
-          </a:xfrm>
-          <a:prstGeom prst="rect">
-            <a:avLst/>
-          </a:prstGeom>
-          <a:noFill/>
-        </p:spPr>
-        <p:txBody>
-          <a:bodyPr wrap="square">
-            <a:spAutoFit/>
-          </a:bodyPr>
-          <a:lstStyle/>
-          <a:p>
-            <a:pPr algn="r">
-              <a:spcBef>
-                <a:spcPts val="0"/>
-              </a:spcBef>
-              <a:spcAft>
-                <a:spcPts val="600"/>
-              </a:spcAft>
-            </a:pPr>
-            <a:r>
-              <a:rPr sz="1000" b="0">
-                <a:solidFill>
-                  <a:srgbClr val="0B2B52"/>
-                </a:solidFill>
-              </a:rPr>
-              <a:t>34</a:t>
+              <a:t>32</a:t>
             </a:r>
           </a:p>
         </p:txBody>

--- a/final_dissertation_presentation.pptx
+++ b/final_dissertation_presentation.pptx
@@ -35,6 +35,8 @@
     <p:sldId id="286" r:id="rId37"/>
     <p:sldId id="287" r:id="rId38"/>
     <p:sldId id="288" r:id="rId39"/>
+    <p:sldId id="289" r:id="rId40"/>
+    <p:sldId id="290" r:id="rId34"/>
     <p:sldId id="267" r:id="rId18"/>
     <p:sldId id="268" r:id="rId19"/>
   </p:sldIdLst>
@@ -16352,7 +16354,7 @@
                   <a:srgbClr val="0B2B52"/>
                 </a:solidFill>
               </a:rPr>
-              <a:t>31</a:t>
+              <a:t>33</a:t>
             </a:r>
           </a:p>
         </p:txBody>
@@ -17081,7 +17083,7 @@
                   <a:srgbClr val="0B2B52"/>
                 </a:solidFill>
               </a:rPr>
-              <a:t>32</a:t>
+              <a:t>34</a:t>
             </a:r>
           </a:p>
         </p:txBody>
@@ -17182,7 +17184,17 @@
                   <a:srgbClr val="0B2B52"/>
                 </a:solidFill>
               </a:rPr>
-              <a:t>•  Next: GPU-scale replicate folding, then few-step sampler distillation.</a:t>
+              <a:t>•  Delivered as a local screening tool: the scramble control, the cost of reduced settings and the replicate spread are built into what it does rather than written beside it (slides 31–32).</a:t>
+            </a:r>
+          </a:p>
+          <a:p>
+            <a:r>
+              <a:rPr sz="1400" b="0">
+                <a:solidFill>
+                  <a:srgbClr val="0B2B52"/>
+                </a:solidFill>
+              </a:rPr>
+              <a:t>•  Next: extend the panel past 22 receptors, which is what now limits the open questions.</a:t>
             </a:r>
           </a:p>
         </p:txBody>
@@ -17242,6 +17254,1497 @@
                 </a:solidFill>
               </a:rPr>
               <a:t>Thank you  ·  Questions welcome</a:t>
+            </a:r>
+          </a:p>
+        </p:txBody>
+      </p:sp>
+    </p:spTree>
+  </p:cSld>
+  <p:clrMapOvr>
+    <a:masterClrMapping/>
+  </p:clrMapOvr>
+</p:sld>
+</file>
+
+<file path=ppt/slides/slide33.xml><?xml version="1.0" encoding="utf-8"?>
+<p:sld xmlns:a="http://schemas.openxmlformats.org/drawingml/2006/main" xmlns:p="http://schemas.openxmlformats.org/presentationml/2006/main" xmlns:r="http://schemas.openxmlformats.org/officeDocument/2006/relationships">
+  <p:cSld>
+    <p:spTree>
+      <p:nvGrpSpPr>
+        <p:cNvPr id="1" name=""/>
+        <p:cNvGrpSpPr/>
+        <p:nvPr/>
+      </p:nvGrpSpPr>
+      <p:grpSpPr/>
+      <p:sp>
+        <p:nvSpPr>
+          <p:cNvPr id="2" name="Rectangle 1"/>
+          <p:cNvSpPr/>
+          <p:nvPr/>
+        </p:nvSpPr>
+        <p:spPr>
+          <a:xfrm>
+            <a:off x="0" y="0"/>
+            <a:ext cx="12188952" cy="914400"/>
+          </a:xfrm>
+          <a:prstGeom prst="rect">
+            <a:avLst/>
+          </a:prstGeom>
+          <a:solidFill>
+            <a:srgbClr val="0B2B52"/>
+          </a:solidFill>
+          <a:ln>
+            <a:noFill/>
+          </a:ln>
+        </p:spPr>
+        <p:style>
+          <a:lnRef idx="1">
+            <a:schemeClr val="accent1"/>
+          </a:lnRef>
+          <a:fillRef idx="3">
+            <a:schemeClr val="accent1"/>
+          </a:fillRef>
+          <a:effectRef idx="2">
+            <a:schemeClr val="accent1"/>
+          </a:effectRef>
+          <a:fontRef idx="minor">
+            <a:schemeClr val="lt1"/>
+          </a:fontRef>
+        </p:style>
+        <p:txBody>
+          <a:bodyPr rtlCol="0" anchor="ctr"/>
+          <a:lstStyle/>
+          <a:p>
+            <a:pPr algn="ctr"/>
+          </a:p>
+        </p:txBody>
+      </p:sp>
+      <p:sp>
+        <p:nvSpPr>
+          <p:cNvPr id="3" name="Rectangle 2"/>
+          <p:cNvSpPr/>
+          <p:nvPr/>
+        </p:nvSpPr>
+        <p:spPr>
+          <a:xfrm>
+            <a:off x="0" y="914400"/>
+            <a:ext cx="12188952" cy="54864"/>
+          </a:xfrm>
+          <a:prstGeom prst="rect">
+            <a:avLst/>
+          </a:prstGeom>
+          <a:solidFill>
+            <a:srgbClr val="1E6FB8"/>
+          </a:solidFill>
+          <a:ln>
+            <a:noFill/>
+          </a:ln>
+        </p:spPr>
+        <p:style>
+          <a:lnRef idx="1">
+            <a:schemeClr val="accent1"/>
+          </a:lnRef>
+          <a:fillRef idx="3">
+            <a:schemeClr val="accent1"/>
+          </a:fillRef>
+          <a:effectRef idx="2">
+            <a:schemeClr val="accent1"/>
+          </a:effectRef>
+          <a:fontRef idx="minor">
+            <a:schemeClr val="lt1"/>
+          </a:fontRef>
+        </p:style>
+        <p:txBody>
+          <a:bodyPr rtlCol="0" anchor="ctr"/>
+          <a:lstStyle/>
+          <a:p>
+            <a:pPr algn="ctr"/>
+          </a:p>
+        </p:txBody>
+      </p:sp>
+      <p:sp>
+        <p:nvSpPr>
+          <p:cNvPr id="4" name="TextBox 3"/>
+          <p:cNvSpPr txBox="1"/>
+          <p:nvPr/>
+        </p:nvSpPr>
+        <p:spPr>
+          <a:xfrm>
+            <a:off x="502920" y="109728"/>
+            <a:ext cx="11155680" cy="777240"/>
+          </a:xfrm>
+          <a:prstGeom prst="rect">
+            <a:avLst/>
+          </a:prstGeom>
+          <a:noFill/>
+        </p:spPr>
+        <p:txBody>
+          <a:bodyPr wrap="square">
+            <a:spAutoFit/>
+          </a:bodyPr>
+          <a:lstStyle/>
+          <a:p>
+            <a:pPr>
+              <a:spcAft>
+                <a:spcPts val="600"/>
+              </a:spcAft>
+            </a:pPr>
+            <a:r>
+              <a:rPr sz="2600" b="1">
+                <a:solidFill>
+                  <a:srgbClr val="FFFFFF"/>
+                </a:solidFill>
+              </a:rPr>
+              <a:t>Delivered — the Findings as Behaviour, Not a Caveat</a:t>
+            </a:r>
+          </a:p>
+        </p:txBody>
+      </p:sp>
+      <p:sp>
+        <p:nvSpPr>
+          <p:cNvPr id="5" name="TextBox 4"/>
+          <p:cNvSpPr txBox="1"/>
+          <p:nvPr/>
+        </p:nvSpPr>
+        <p:spPr>
+          <a:xfrm>
+            <a:off x="502920" y="6473952"/>
+            <a:ext cx="8229600" cy="274320"/>
+          </a:xfrm>
+          <a:prstGeom prst="rect">
+            <a:avLst/>
+          </a:prstGeom>
+          <a:noFill/>
+        </p:spPr>
+        <p:txBody>
+          <a:bodyPr wrap="square">
+            <a:spAutoFit/>
+          </a:bodyPr>
+          <a:lstStyle/>
+          <a:p>
+            <a:pPr>
+              <a:spcAft>
+                <a:spcPts val="600"/>
+              </a:spcAft>
+            </a:pPr>
+            <a:r>
+              <a:rPr sz="900" b="0">
+                <a:solidFill>
+                  <a:srgbClr val="555555"/>
+                </a:solidFill>
+              </a:rPr>
+              <a:t>Boltz-Fast · Final Dissertation Report · Akik Jana (2024AB05287)</a:t>
+            </a:r>
+          </a:p>
+        </p:txBody>
+      </p:sp>
+      <p:sp>
+        <p:nvSpPr>
+          <p:cNvPr id="6" name="TextBox 5"/>
+          <p:cNvSpPr txBox="1"/>
+          <p:nvPr/>
+        </p:nvSpPr>
+        <p:spPr>
+          <a:xfrm>
+            <a:off x="11183112" y="6473952"/>
+            <a:ext cx="640080" cy="274320"/>
+          </a:xfrm>
+          <a:prstGeom prst="rect">
+            <a:avLst/>
+          </a:prstGeom>
+          <a:noFill/>
+        </p:spPr>
+        <p:txBody>
+          <a:bodyPr wrap="square">
+            <a:spAutoFit/>
+          </a:bodyPr>
+          <a:lstStyle/>
+          <a:p>
+            <a:pPr>
+              <a:spcAft>
+                <a:spcPts val="600"/>
+              </a:spcAft>
+            </a:pPr>
+            <a:r>
+              <a:rPr sz="1000" b="0">
+                <a:solidFill>
+                  <a:srgbClr val="0B2B52"/>
+                </a:solidFill>
+              </a:rPr>
+              <a:t>31</a:t>
+            </a:r>
+          </a:p>
+        </p:txBody>
+      </p:sp>
+      <p:sp>
+        <p:nvSpPr>
+          <p:cNvPr id="7" name="TextBox 6"/>
+          <p:cNvSpPr txBox="1"/>
+          <p:nvPr/>
+        </p:nvSpPr>
+        <p:spPr>
+          <a:xfrm>
+            <a:off x="548640" y="1078992"/>
+            <a:ext cx="11155680" cy="640080"/>
+          </a:xfrm>
+          <a:prstGeom prst="rect">
+            <a:avLst/>
+          </a:prstGeom>
+          <a:noFill/>
+        </p:spPr>
+        <p:txBody>
+          <a:bodyPr wrap="square">
+            <a:spAutoFit/>
+          </a:bodyPr>
+          <a:lstStyle/>
+          <a:p>
+            <a:pPr>
+              <a:spcAft>
+                <a:spcPts val="600"/>
+              </a:spcAft>
+            </a:pPr>
+            <a:r>
+              <a:rPr sz="1500" b="0">
+                <a:solidFill>
+                  <a:srgbClr val="0B2B52"/>
+                </a:solidFill>
+              </a:rPr>
+              <a:t>A local screening tool: paste a target and candidate peptides, get a ranking. Nothing is uploaded.</a:t>
+            </a:r>
+          </a:p>
+        </p:txBody>
+      </p:sp>
+      <p:sp>
+        <p:nvSpPr>
+          <p:cNvPr id="8" name="Rounded Rectangle 7"/>
+          <p:cNvSpPr/>
+          <p:nvPr/>
+        </p:nvSpPr>
+        <p:spPr>
+          <a:xfrm>
+            <a:off x="548640" y="1737360"/>
+            <a:ext cx="3520440" cy="1463040"/>
+          </a:xfrm>
+          <a:prstGeom prst="roundRect">
+            <a:avLst/>
+          </a:prstGeom>
+          <a:solidFill>
+            <a:srgbClr val="1E6FB8"/>
+          </a:solidFill>
+          <a:ln>
+            <a:noFill/>
+          </a:ln>
+        </p:spPr>
+        <p:style>
+          <a:lnRef idx="1">
+            <a:schemeClr val="accent1"/>
+          </a:lnRef>
+          <a:fillRef idx="3">
+            <a:schemeClr val="accent1"/>
+          </a:fillRef>
+          <a:effectRef idx="2">
+            <a:schemeClr val="accent1"/>
+          </a:effectRef>
+          <a:fontRef idx="minor">
+            <a:schemeClr val="lt1"/>
+          </a:fontRef>
+        </p:style>
+        <p:txBody>
+          <a:bodyPr rtlCol="0" anchor="ctr" wrap="square"/>
+          <a:lstStyle/>
+          <a:p>
+            <a:pPr algn="ctr"/>
+            <a:r>
+              <a:rPr sz="2300" b="1">
+                <a:solidFill>
+                  <a:srgbClr val="FFFFFF"/>
+                </a:solidFill>
+              </a:rPr>
+              <a:t>every candidate</a:t>
+            </a:r>
+          </a:p>
+          <a:p>
+            <a:pPr algn="ctr"/>
+            <a:r>
+              <a:rPr sz="1050">
+                <a:solidFill>
+                  <a:srgbClr val="FFFFFF"/>
+                </a:solidFill>
+              </a:rPr>
+              <a:t>folded against permutations of itself</a:t>
+            </a:r>
+          </a:p>
+        </p:txBody>
+      </p:sp>
+      <p:sp>
+        <p:nvSpPr>
+          <p:cNvPr id="9" name="Rounded Rectangle 8"/>
+          <p:cNvSpPr/>
+          <p:nvPr/>
+        </p:nvSpPr>
+        <p:spPr>
+          <a:xfrm>
+            <a:off x="4343400" y="1737360"/>
+            <a:ext cx="3520440" cy="1463040"/>
+          </a:xfrm>
+          <a:prstGeom prst="roundRect">
+            <a:avLst/>
+          </a:prstGeom>
+          <a:solidFill>
+            <a:srgbClr val="0E8F9A"/>
+          </a:solidFill>
+          <a:ln>
+            <a:noFill/>
+          </a:ln>
+        </p:spPr>
+        <p:style>
+          <a:lnRef idx="1">
+            <a:schemeClr val="accent1"/>
+          </a:lnRef>
+          <a:fillRef idx="3">
+            <a:schemeClr val="accent1"/>
+          </a:fillRef>
+          <a:effectRef idx="2">
+            <a:schemeClr val="accent1"/>
+          </a:effectRef>
+          <a:fontRef idx="minor">
+            <a:schemeClr val="lt1"/>
+          </a:fontRef>
+        </p:style>
+        <p:txBody>
+          <a:bodyPr rtlCol="0" anchor="ctr" wrap="square"/>
+          <a:lstStyle/>
+          <a:p>
+            <a:pPr algn="ctr"/>
+            <a:r>
+              <a:rPr sz="2300" b="1">
+                <a:solidFill>
+                  <a:srgbClr val="FFFFFF"/>
+                </a:solidFill>
+              </a:rPr>
+              <a:t>45 s + 9 s/fold</a:t>
+            </a:r>
+          </a:p>
+          <a:p>
+            <a:pPr algn="ctr"/>
+            <a:r>
+              <a:rPr sz="1050">
+                <a:solidFill>
+                  <a:srgbClr val="FFFFFF"/>
+                </a:solidFill>
+              </a:rPr>
+              <a:t>model construction is paid once per job</a:t>
+            </a:r>
+          </a:p>
+        </p:txBody>
+      </p:sp>
+      <p:sp>
+        <p:nvSpPr>
+          <p:cNvPr id="10" name="Rounded Rectangle 9"/>
+          <p:cNvSpPr/>
+          <p:nvPr/>
+        </p:nvSpPr>
+        <p:spPr>
+          <a:xfrm>
+            <a:off x="8138160" y="1737360"/>
+            <a:ext cx="3566160" cy="1463040"/>
+          </a:xfrm>
+          <a:prstGeom prst="roundRect">
+            <a:avLst/>
+          </a:prstGeom>
+          <a:solidFill>
+            <a:srgbClr val="2E7D32"/>
+          </a:solidFill>
+          <a:ln>
+            <a:noFill/>
+          </a:ln>
+        </p:spPr>
+        <p:style>
+          <a:lnRef idx="1">
+            <a:schemeClr val="accent1"/>
+          </a:lnRef>
+          <a:fillRef idx="3">
+            <a:schemeClr val="accent1"/>
+          </a:fillRef>
+          <a:effectRef idx="2">
+            <a:schemeClr val="accent1"/>
+          </a:effectRef>
+          <a:fontRef idx="minor">
+            <a:schemeClr val="lt1"/>
+          </a:fontRef>
+        </p:style>
+        <p:txBody>
+          <a:bodyPr rtlCol="0" anchor="ctr" wrap="square"/>
+          <a:lstStyle/>
+          <a:p>
+            <a:pPr algn="ctr"/>
+            <a:r>
+              <a:rPr sz="2300" b="1">
+                <a:solidFill>
+                  <a:srgbClr val="FFFFFF"/>
+                </a:solidFill>
+              </a:rPr>
+              <a:t>≈ 2 s</a:t>
+            </a:r>
+          </a:p>
+          <a:p>
+            <a:pPr algn="ctr"/>
+            <a:r>
+              <a:rPr sz="1050">
+                <a:solidFill>
+                  <a:srgbClr val="FFFFFF"/>
+                </a:solidFill>
+              </a:rPr>
+              <a:t>to re-screen — folds are cached</a:t>
+            </a:r>
+          </a:p>
+        </p:txBody>
+      </p:sp>
+      <p:sp>
+        <p:nvSpPr>
+          <p:cNvPr id="11" name="TextBox 10"/>
+          <p:cNvSpPr txBox="1"/>
+          <p:nvPr/>
+        </p:nvSpPr>
+        <p:spPr>
+          <a:xfrm>
+            <a:off x="548640" y="3246120"/>
+            <a:ext cx="11155680" cy="731520"/>
+          </a:xfrm>
+          <a:prstGeom prst="rect">
+            <a:avLst/>
+          </a:prstGeom>
+          <a:noFill/>
+        </p:spPr>
+        <p:txBody>
+          <a:bodyPr wrap="square">
+            <a:spAutoFit/>
+          </a:bodyPr>
+          <a:lstStyle/>
+          <a:p>
+            <a:r>
+              <a:rPr sz="1450" b="1">
+                <a:solidFill>
+                  <a:srgbClr val="0B2B52"/>
+                </a:solidFill>
+              </a:rPr>
+              <a:t>Section 7.4 — a score can be blind to sequence order</a:t>
+            </a:r>
+          </a:p>
+          <a:p>
+            <a:r>
+              <a:rPr sz="1250">
+                <a:solidFill>
+                  <a:srgbClr val="1E6FB8"/>
+                </a:solidFill>
+              </a:rPr>
+              <a:t>so a candidate is reported as a t against its own permutations, never as a raw score; one that cannot beat its own scrambles is not a hit</a:t>
+            </a:r>
+          </a:p>
+        </p:txBody>
+      </p:sp>
+      <p:sp>
+        <p:nvSpPr>
+          <p:cNvPr id="12" name="TextBox 11"/>
+          <p:cNvSpPr txBox="1"/>
+          <p:nvPr/>
+        </p:nvSpPr>
+        <p:spPr>
+          <a:xfrm>
+            <a:off x="548640" y="3995928"/>
+            <a:ext cx="11155680" cy="731520"/>
+          </a:xfrm>
+          <a:prstGeom prst="rect">
+            <a:avLst/>
+          </a:prstGeom>
+          <a:noFill/>
+        </p:spPr>
+        <p:txBody>
+          <a:bodyPr wrap="square">
+            <a:spAutoFit/>
+          </a:bodyPr>
+          <a:lstStyle/>
+          <a:p>
+            <a:r>
+              <a:rPr sz="1450" b="1">
+                <a:solidFill>
+                  <a:srgbClr val="0B2B52"/>
+                </a:solidFill>
+              </a:rPr>
+              <a:t>Section 7.13 — reduced settings suppress the effect 3–7×</a:t>
+            </a:r>
+          </a:p>
+          <a:p>
+            <a:r>
+              <a:rPr sz="1250">
+                <a:solidFill>
+                  <a:srgbClr val="1E6FB8"/>
+                </a:solidFill>
+              </a:rPr>
+              <a:t>so quick mode is offered, and says in the interface what it costs: ~14% of backbone bonds physically plausible at ten steps</a:t>
+            </a:r>
+          </a:p>
+        </p:txBody>
+      </p:sp>
+      <p:sp>
+        <p:nvSpPr>
+          <p:cNvPr id="13" name="TextBox 12"/>
+          <p:cNvSpPr txBox="1"/>
+          <p:nvPr/>
+        </p:nvSpPr>
+        <p:spPr>
+          <a:xfrm>
+            <a:off x="548640" y="4745736"/>
+            <a:ext cx="11155680" cy="731520"/>
+          </a:xfrm>
+          <a:prstGeom prst="rect">
+            <a:avLst/>
+          </a:prstGeom>
+          <a:noFill/>
+        </p:spPr>
+        <p:txBody>
+          <a:bodyPr wrap="square">
+            <a:spAutoFit/>
+          </a:bodyPr>
+          <a:lstStyle/>
+          <a:p>
+            <a:r>
+              <a:rPr sz="1450" b="1">
+                <a:solidFill>
+                  <a:srgbClr val="0B2B52"/>
+                </a:solidFill>
+              </a:rPr>
+              <a:t>Section 7.5 — a single fold is not a measurement</a:t>
+            </a:r>
+          </a:p>
+          <a:p>
+            <a:r>
+              <a:rPr sz="1250">
+                <a:solidFill>
+                  <a:srgbClr val="1E6FB8"/>
+                </a:solidFill>
+              </a:rPr>
+              <a:t>so replicates are a control, and the replicate spread is a column in the table rather than a footnote</a:t>
+            </a:r>
+          </a:p>
+        </p:txBody>
+      </p:sp>
+      <p:sp>
+        <p:nvSpPr>
+          <p:cNvPr id="14" name="Rounded Rectangle 13"/>
+          <p:cNvSpPr/>
+          <p:nvPr/>
+        </p:nvSpPr>
+        <p:spPr>
+          <a:xfrm>
+            <a:off x="548640" y="5504688"/>
+            <a:ext cx="11155680" cy="868680"/>
+          </a:xfrm>
+          <a:prstGeom prst="roundRect">
+            <a:avLst/>
+          </a:prstGeom>
+          <a:solidFill>
+            <a:srgbClr val="FDF3E0"/>
+          </a:solidFill>
+          <a:ln>
+            <a:noFill/>
+          </a:ln>
+        </p:spPr>
+        <p:style>
+          <a:lnRef idx="1">
+            <a:schemeClr val="accent1"/>
+          </a:lnRef>
+          <a:fillRef idx="3">
+            <a:schemeClr val="accent1"/>
+          </a:fillRef>
+          <a:effectRef idx="2">
+            <a:schemeClr val="accent1"/>
+          </a:effectRef>
+          <a:fontRef idx="minor">
+            <a:schemeClr val="lt1"/>
+          </a:fontRef>
+        </p:style>
+        <p:txBody>
+          <a:bodyPr rtlCol="0" anchor="ctr" wrap="square"/>
+          <a:lstStyle/>
+          <a:p>
+            <a:pPr algn="ctr">
+              <a:spcAft>
+                <a:spcPts val="600"/>
+              </a:spcAft>
+            </a:pPr>
+            <a:r>
+              <a:rPr sz="1250" b="0">
+                <a:solidFill>
+                  <a:srgbClr val="8A5200"/>
+                </a:solidFill>
+              </a:rPr>
+              <a:t>Candidates that cannot be scored honestly are refused, not scored badly. Building it caught two faults that would have misled a user: a two-permutation null SD reported z = +77, and a fixed cutoff on that ratio called a Gly–Ser linker a hit.</a:t>
+            </a:r>
+          </a:p>
+        </p:txBody>
+      </p:sp>
+    </p:spTree>
+  </p:cSld>
+  <p:clrMapOvr>
+    <a:masterClrMapping/>
+  </p:clrMapOvr>
+</p:sld>
+</file>
+
+<file path=ppt/slides/slide34.xml><?xml version="1.0" encoding="utf-8"?>
+<p:sld xmlns:a="http://schemas.openxmlformats.org/drawingml/2006/main" xmlns:p="http://schemas.openxmlformats.org/presentationml/2006/main" xmlns:r="http://schemas.openxmlformats.org/officeDocument/2006/relationships">
+  <p:cSld>
+    <p:spTree>
+      <p:nvGrpSpPr>
+        <p:cNvPr id="1" name=""/>
+        <p:cNvGrpSpPr/>
+        <p:nvPr/>
+      </p:nvGrpSpPr>
+      <p:grpSpPr/>
+      <p:sp>
+        <p:nvSpPr>
+          <p:cNvPr id="2" name="Rectangle 1"/>
+          <p:cNvSpPr/>
+          <p:nvPr/>
+        </p:nvSpPr>
+        <p:spPr>
+          <a:xfrm>
+            <a:off x="0" y="0"/>
+            <a:ext cx="12188952" cy="914400"/>
+          </a:xfrm>
+          <a:prstGeom prst="rect">
+            <a:avLst/>
+          </a:prstGeom>
+          <a:solidFill>
+            <a:srgbClr val="0B2B52"/>
+          </a:solidFill>
+          <a:ln>
+            <a:noFill/>
+          </a:ln>
+        </p:spPr>
+        <p:style>
+          <a:lnRef idx="1">
+            <a:schemeClr val="accent1"/>
+          </a:lnRef>
+          <a:fillRef idx="3">
+            <a:schemeClr val="accent1"/>
+          </a:fillRef>
+          <a:effectRef idx="2">
+            <a:schemeClr val="accent1"/>
+          </a:effectRef>
+          <a:fontRef idx="minor">
+            <a:schemeClr val="lt1"/>
+          </a:fontRef>
+        </p:style>
+        <p:txBody>
+          <a:bodyPr rtlCol="0" anchor="ctr"/>
+          <a:lstStyle/>
+          <a:p>
+            <a:pPr algn="ctr"/>
+          </a:p>
+        </p:txBody>
+      </p:sp>
+      <p:sp>
+        <p:nvSpPr>
+          <p:cNvPr id="3" name="Rectangle 2"/>
+          <p:cNvSpPr/>
+          <p:nvPr/>
+        </p:nvSpPr>
+        <p:spPr>
+          <a:xfrm>
+            <a:off x="0" y="914400"/>
+            <a:ext cx="12188952" cy="54864"/>
+          </a:xfrm>
+          <a:prstGeom prst="rect">
+            <a:avLst/>
+          </a:prstGeom>
+          <a:solidFill>
+            <a:srgbClr val="1E6FB8"/>
+          </a:solidFill>
+          <a:ln>
+            <a:noFill/>
+          </a:ln>
+        </p:spPr>
+        <p:style>
+          <a:lnRef idx="1">
+            <a:schemeClr val="accent1"/>
+          </a:lnRef>
+          <a:fillRef idx="3">
+            <a:schemeClr val="accent1"/>
+          </a:fillRef>
+          <a:effectRef idx="2">
+            <a:schemeClr val="accent1"/>
+          </a:effectRef>
+          <a:fontRef idx="minor">
+            <a:schemeClr val="lt1"/>
+          </a:fontRef>
+        </p:style>
+        <p:txBody>
+          <a:bodyPr rtlCol="0" anchor="ctr"/>
+          <a:lstStyle/>
+          <a:p>
+            <a:pPr algn="ctr"/>
+          </a:p>
+        </p:txBody>
+      </p:sp>
+      <p:sp>
+        <p:nvSpPr>
+          <p:cNvPr id="4" name="TextBox 3"/>
+          <p:cNvSpPr txBox="1"/>
+          <p:nvPr/>
+        </p:nvSpPr>
+        <p:spPr>
+          <a:xfrm>
+            <a:off x="502920" y="109728"/>
+            <a:ext cx="11155680" cy="777240"/>
+          </a:xfrm>
+          <a:prstGeom prst="rect">
+            <a:avLst/>
+          </a:prstGeom>
+          <a:noFill/>
+        </p:spPr>
+        <p:txBody>
+          <a:bodyPr wrap="square">
+            <a:spAutoFit/>
+          </a:bodyPr>
+          <a:lstStyle/>
+          <a:p>
+            <a:pPr>
+              <a:spcAft>
+                <a:spcPts val="600"/>
+              </a:spcAft>
+            </a:pPr>
+            <a:r>
+              <a:rPr sz="2600" b="1">
+                <a:solidFill>
+                  <a:srgbClr val="FFFFFF"/>
+                </a:solidFill>
+              </a:rPr>
+              <a:t>The Same Three Candidates, Two Targets</a:t>
+            </a:r>
+          </a:p>
+        </p:txBody>
+      </p:sp>
+      <p:sp>
+        <p:nvSpPr>
+          <p:cNvPr id="5" name="TextBox 4"/>
+          <p:cNvSpPr txBox="1"/>
+          <p:nvPr/>
+        </p:nvSpPr>
+        <p:spPr>
+          <a:xfrm>
+            <a:off x="502920" y="6473952"/>
+            <a:ext cx="8229600" cy="274320"/>
+          </a:xfrm>
+          <a:prstGeom prst="rect">
+            <a:avLst/>
+          </a:prstGeom>
+          <a:noFill/>
+        </p:spPr>
+        <p:txBody>
+          <a:bodyPr wrap="square">
+            <a:spAutoFit/>
+          </a:bodyPr>
+          <a:lstStyle/>
+          <a:p>
+            <a:pPr>
+              <a:spcAft>
+                <a:spcPts val="600"/>
+              </a:spcAft>
+            </a:pPr>
+            <a:r>
+              <a:rPr sz="900" b="0">
+                <a:solidFill>
+                  <a:srgbClr val="555555"/>
+                </a:solidFill>
+              </a:rPr>
+              <a:t>Boltz-Fast · Final Dissertation Report · Akik Jana (2024AB05287)</a:t>
+            </a:r>
+          </a:p>
+        </p:txBody>
+      </p:sp>
+      <p:sp>
+        <p:nvSpPr>
+          <p:cNvPr id="6" name="TextBox 5"/>
+          <p:cNvSpPr txBox="1"/>
+          <p:nvPr/>
+        </p:nvSpPr>
+        <p:spPr>
+          <a:xfrm>
+            <a:off x="11183112" y="6473952"/>
+            <a:ext cx="640080" cy="274320"/>
+          </a:xfrm>
+          <a:prstGeom prst="rect">
+            <a:avLst/>
+          </a:prstGeom>
+          <a:noFill/>
+        </p:spPr>
+        <p:txBody>
+          <a:bodyPr wrap="square">
+            <a:spAutoFit/>
+          </a:bodyPr>
+          <a:lstStyle/>
+          <a:p>
+            <a:pPr>
+              <a:spcAft>
+                <a:spcPts val="600"/>
+              </a:spcAft>
+            </a:pPr>
+            <a:r>
+              <a:rPr sz="1000" b="0">
+                <a:solidFill>
+                  <a:srgbClr val="0B2B52"/>
+                </a:solidFill>
+              </a:rPr>
+              <a:t>32</a:t>
+            </a:r>
+          </a:p>
+        </p:txBody>
+      </p:sp>
+      <p:sp>
+        <p:nvSpPr>
+          <p:cNvPr id="7" name="TextBox 6"/>
+          <p:cNvSpPr txBox="1"/>
+          <p:nvPr/>
+        </p:nvSpPr>
+        <p:spPr>
+          <a:xfrm>
+            <a:off x="548640" y="1078992"/>
+            <a:ext cx="11155680" cy="640080"/>
+          </a:xfrm>
+          <a:prstGeom prst="rect">
+            <a:avLst/>
+          </a:prstGeom>
+          <a:noFill/>
+        </p:spPr>
+        <p:txBody>
+          <a:bodyPr wrap="square">
+            <a:spAutoFit/>
+          </a:bodyPr>
+          <a:lstStyle/>
+          <a:p>
+            <a:pPr>
+              <a:spcAft>
+                <a:spcPts val="600"/>
+              </a:spcAft>
+            </a:pPr>
+            <a:r>
+              <a:rPr sz="1500" b="0">
+                <a:solidFill>
+                  <a:srgbClr val="0B2B52"/>
+                </a:solidFill>
+              </a:rPr>
+              <a:t>Identical candidate list, identical settings, opposite answers — the readout is not simply rewarding peptide-shaped sequences.</a:t>
+            </a:r>
+          </a:p>
+        </p:txBody>
+      </p:sp>
+      <p:graphicFrame>
+        <p:nvGraphicFramePr>
+          <p:cNvPr id="8" name="Table 7"/>
+          <p:cNvGraphicFramePr>
+            <a:graphicFrameLocks noGrp="1"/>
+          </p:cNvGraphicFramePr>
+          <p:nvPr/>
+        </p:nvGraphicFramePr>
+        <p:xfrm>
+          <a:off x="548640" y="1828800"/>
+          <a:ext cx="11155680" cy="1554480"/>
+        </p:xfrm>
+        <a:graphic>
+          <a:graphicData uri="http://schemas.openxmlformats.org/drawingml/2006/table">
+            <a:tbl>
+              <a:tblPr firstRow="1" bandRow="1">
+                <a:tableStyleId>{5C22544A-7EE6-4342-B048-85BDC9FD1C3A}</a:tableStyleId>
+              </a:tblPr>
+              <a:tblGrid>
+                <a:gridCol w="3200400"/>
+                <a:gridCol w="1463040"/>
+                <a:gridCol w="1463040"/>
+                <a:gridCol w="1463040"/>
+                <a:gridCol w="1463040"/>
+                <a:gridCol w="2103120"/>
+              </a:tblGrid>
+              <a:tr h="388620">
+                <a:tc>
+                  <a:txBody>
+                    <a:bodyPr/>
+                    <a:lstStyle/>
+                    <a:p>
+                      <a:r>
+                        <a:rPr sz="1300" b="1">
+                          <a:solidFill>
+                            <a:srgbClr val="0B2B52"/>
+                          </a:solidFill>
+                        </a:rPr>
+                        <a:t>candidate</a:t>
+                      </a:r>
+                    </a:p>
+                  </a:txBody>
+                  <a:tcPr/>
+                </a:tc>
+                <a:tc>
+                  <a:txBody>
+                    <a:bodyPr/>
+                    <a:lstStyle/>
+                    <a:p>
+                      <a:r>
+                        <a:rPr sz="1300" b="1">
+                          <a:solidFill>
+                            <a:srgbClr val="0B2B52"/>
+                          </a:solidFill>
+                        </a:rPr>
+                        <a:t>MDM2 — t</a:t>
+                      </a:r>
+                    </a:p>
+                  </a:txBody>
+                  <a:tcPr/>
+                </a:tc>
+                <a:tc>
+                  <a:txBody>
+                    <a:bodyPr/>
+                    <a:lstStyle/>
+                    <a:p>
+                      <a:r>
+                        <a:rPr sz="1300" b="1">
+                          <a:solidFill>
+                            <a:srgbClr val="0B2B52"/>
+                          </a:solidFill>
+                        </a:rPr>
+                        <a:t>MDM2 — p</a:t>
+                      </a:r>
+                    </a:p>
+                  </a:txBody>
+                  <a:tcPr/>
+                </a:tc>
+                <a:tc>
+                  <a:txBody>
+                    <a:bodyPr/>
+                    <a:lstStyle/>
+                    <a:p>
+                      <a:r>
+                        <a:rPr sz="1300" b="1">
+                          <a:solidFill>
+                            <a:srgbClr val="0B2B52"/>
+                          </a:solidFill>
+                        </a:rPr>
+                        <a:t>PDZ3 — t</a:t>
+                      </a:r>
+                    </a:p>
+                  </a:txBody>
+                  <a:tcPr/>
+                </a:tc>
+                <a:tc>
+                  <a:txBody>
+                    <a:bodyPr/>
+                    <a:lstStyle/>
+                    <a:p>
+                      <a:r>
+                        <a:rPr sz="1300" b="1">
+                          <a:solidFill>
+                            <a:srgbClr val="0B2B52"/>
+                          </a:solidFill>
+                        </a:rPr>
+                        <a:t>PDZ3 — p</a:t>
+                      </a:r>
+                    </a:p>
+                  </a:txBody>
+                  <a:tcPr/>
+                </a:tc>
+                <a:tc>
+                  <a:txBody>
+                    <a:bodyPr/>
+                    <a:lstStyle/>
+                    <a:p>
+                      <a:r>
+                        <a:rPr sz="1300" b="1">
+                          <a:solidFill>
+                            <a:srgbClr val="0B2B52"/>
+                          </a:solidFill>
+                        </a:rPr>
+                        <a:t>cognate of</a:t>
+                      </a:r>
+                    </a:p>
+                  </a:txBody>
+                  <a:tcPr/>
+                </a:tc>
+              </a:tr>
+              <a:tr h="388620">
+                <a:tc>
+                  <a:txBody>
+                    <a:bodyPr/>
+                    <a:lstStyle/>
+                    <a:p>
+                      <a:r>
+                        <a:rPr sz="1300" b="0">
+                          <a:solidFill>
+                            <a:srgbClr val="0B2B52"/>
+                          </a:solidFill>
+                        </a:rPr>
+                        <a:t>SQETFSDLWKLLPEN</a:t>
+                      </a:r>
+                    </a:p>
+                  </a:txBody>
+                  <a:tcPr/>
+                </a:tc>
+                <a:tc>
+                  <a:txBody>
+                    <a:bodyPr/>
+                    <a:lstStyle/>
+                    <a:p>
+                      <a:r>
+                        <a:rPr sz="1300" b="0">
+                          <a:solidFill>
+                            <a:srgbClr val="0B2B52"/>
+                          </a:solidFill>
+                        </a:rPr>
+                        <a:t>+3.88</a:t>
+                      </a:r>
+                    </a:p>
+                  </a:txBody>
+                  <a:tcPr/>
+                </a:tc>
+                <a:tc>
+                  <a:txBody>
+                    <a:bodyPr/>
+                    <a:lstStyle/>
+                    <a:p>
+                      <a:r>
+                        <a:rPr sz="1300" b="0">
+                          <a:solidFill>
+                            <a:srgbClr val="0B2B52"/>
+                          </a:solidFill>
+                        </a:rPr>
+                        <a:t>0.002</a:t>
+                      </a:r>
+                    </a:p>
+                  </a:txBody>
+                  <a:tcPr/>
+                </a:tc>
+                <a:tc>
+                  <a:txBody>
+                    <a:bodyPr/>
+                    <a:lstStyle/>
+                    <a:p>
+                      <a:r>
+                        <a:rPr sz="1300" b="0">
+                          <a:solidFill>
+                            <a:srgbClr val="0B2B52"/>
+                          </a:solidFill>
+                        </a:rPr>
+                        <a:t>+0.06</a:t>
+                      </a:r>
+                    </a:p>
+                  </a:txBody>
+                  <a:tcPr/>
+                </a:tc>
+                <a:tc>
+                  <a:txBody>
+                    <a:bodyPr/>
+                    <a:lstStyle/>
+                    <a:p>
+                      <a:r>
+                        <a:rPr sz="1300" b="0">
+                          <a:solidFill>
+                            <a:srgbClr val="0B2B52"/>
+                          </a:solidFill>
+                        </a:rPr>
+                        <a:t>0.477</a:t>
+                      </a:r>
+                    </a:p>
+                  </a:txBody>
+                  <a:tcPr/>
+                </a:tc>
+                <a:tc>
+                  <a:txBody>
+                    <a:bodyPr/>
+                    <a:lstStyle/>
+                    <a:p>
+                      <a:r>
+                        <a:rPr sz="1300" b="0">
+                          <a:solidFill>
+                            <a:srgbClr val="0B2B52"/>
+                          </a:solidFill>
+                        </a:rPr>
+                        <a:t>MDM2 (p53 helix)</a:t>
+                      </a:r>
+                    </a:p>
+                  </a:txBody>
+                  <a:tcPr/>
+                </a:tc>
+              </a:tr>
+              <a:tr h="388620">
+                <a:tc>
+                  <a:txBody>
+                    <a:bodyPr/>
+                    <a:lstStyle/>
+                    <a:p>
+                      <a:r>
+                        <a:rPr sz="1300" b="0">
+                          <a:solidFill>
+                            <a:srgbClr val="0B2B52"/>
+                          </a:solidFill>
+                        </a:rPr>
+                        <a:t>KQTSV</a:t>
+                      </a:r>
+                    </a:p>
+                  </a:txBody>
+                  <a:tcPr/>
+                </a:tc>
+                <a:tc>
+                  <a:txBody>
+                    <a:bodyPr/>
+                    <a:lstStyle/>
+                    <a:p>
+                      <a:r>
+                        <a:rPr sz="1300" b="0">
+                          <a:solidFill>
+                            <a:srgbClr val="0B2B52"/>
+                          </a:solidFill>
+                        </a:rPr>
+                        <a:t>+1.39</a:t>
+                      </a:r>
+                    </a:p>
+                  </a:txBody>
+                  <a:tcPr/>
+                </a:tc>
+                <a:tc>
+                  <a:txBody>
+                    <a:bodyPr/>
+                    <a:lstStyle/>
+                    <a:p>
+                      <a:r>
+                        <a:rPr sz="1300" b="0">
+                          <a:solidFill>
+                            <a:srgbClr val="0B2B52"/>
+                          </a:solidFill>
+                        </a:rPr>
+                        <a:t>0.101</a:t>
+                      </a:r>
+                    </a:p>
+                  </a:txBody>
+                  <a:tcPr/>
+                </a:tc>
+                <a:tc>
+                  <a:txBody>
+                    <a:bodyPr/>
+                    <a:lstStyle/>
+                    <a:p>
+                      <a:r>
+                        <a:rPr sz="1300" b="0">
+                          <a:solidFill>
+                            <a:srgbClr val="0B2B52"/>
+                          </a:solidFill>
+                        </a:rPr>
+                        <a:t>+7.72</a:t>
+                      </a:r>
+                    </a:p>
+                  </a:txBody>
+                  <a:tcPr/>
+                </a:tc>
+                <a:tc>
+                  <a:txBody>
+                    <a:bodyPr/>
+                    <a:lstStyle/>
+                    <a:p>
+                      <a:r>
+                        <a:rPr sz="1300" b="0">
+                          <a:solidFill>
+                            <a:srgbClr val="0B2B52"/>
+                          </a:solidFill>
+                        </a:rPr>
+                        <a:t>&lt;0.001</a:t>
+                      </a:r>
+                    </a:p>
+                  </a:txBody>
+                  <a:tcPr/>
+                </a:tc>
+                <a:tc>
+                  <a:txBody>
+                    <a:bodyPr/>
+                    <a:lstStyle/>
+                    <a:p>
+                      <a:r>
+                        <a:rPr sz="1300" b="0">
+                          <a:solidFill>
+                            <a:srgbClr val="0B2B52"/>
+                          </a:solidFill>
+                        </a:rPr>
+                        <a:t>PSD-95 PDZ3</a:t>
+                      </a:r>
+                    </a:p>
+                  </a:txBody>
+                  <a:tcPr/>
+                </a:tc>
+              </a:tr>
+              <a:tr h="388620">
+                <a:tc>
+                  <a:txBody>
+                    <a:bodyPr/>
+                    <a:lstStyle/>
+                    <a:p>
+                      <a:r>
+                        <a:rPr sz="1300" b="0">
+                          <a:solidFill>
+                            <a:srgbClr val="0B2B52"/>
+                          </a:solidFill>
+                        </a:rPr>
+                        <a:t>PPPALPPKKR</a:t>
+                      </a:r>
+                    </a:p>
+                  </a:txBody>
+                  <a:tcPr/>
+                </a:tc>
+                <a:tc>
+                  <a:txBody>
+                    <a:bodyPr/>
+                    <a:lstStyle/>
+                    <a:p>
+                      <a:r>
+                        <a:rPr sz="1300" b="0">
+                          <a:solidFill>
+                            <a:srgbClr val="0B2B52"/>
+                          </a:solidFill>
+                        </a:rPr>
+                        <a:t>−0.00</a:t>
+                      </a:r>
+                    </a:p>
+                  </a:txBody>
+                  <a:tcPr/>
+                </a:tc>
+                <a:tc>
+                  <a:txBody>
+                    <a:bodyPr/>
+                    <a:lstStyle/>
+                    <a:p>
+                      <a:r>
+                        <a:rPr sz="1300" b="0">
+                          <a:solidFill>
+                            <a:srgbClr val="0B2B52"/>
+                          </a:solidFill>
+                        </a:rPr>
+                        <a:t>0.501</a:t>
+                      </a:r>
+                    </a:p>
+                  </a:txBody>
+                  <a:tcPr/>
+                </a:tc>
+                <a:tc>
+                  <a:txBody>
+                    <a:bodyPr/>
+                    <a:lstStyle/>
+                    <a:p>
+                      <a:r>
+                        <a:rPr sz="1300" b="0">
+                          <a:solidFill>
+                            <a:srgbClr val="0B2B52"/>
+                          </a:solidFill>
+                        </a:rPr>
+                        <a:t>+0.75</a:t>
+                      </a:r>
+                    </a:p>
+                  </a:txBody>
+                  <a:tcPr/>
+                </a:tc>
+                <a:tc>
+                  <a:txBody>
+                    <a:bodyPr/>
+                    <a:lstStyle/>
+                    <a:p>
+                      <a:r>
+                        <a:rPr sz="1300" b="0">
+                          <a:solidFill>
+                            <a:srgbClr val="0B2B52"/>
+                          </a:solidFill>
+                        </a:rPr>
+                        <a:t>0.240</a:t>
+                      </a:r>
+                    </a:p>
+                  </a:txBody>
+                  <a:tcPr/>
+                </a:tc>
+                <a:tc>
+                  <a:txBody>
+                    <a:bodyPr/>
+                    <a:lstStyle/>
+                    <a:p>
+                      <a:r>
+                        <a:rPr sz="1300" b="0">
+                          <a:solidFill>
+                            <a:srgbClr val="0B2B52"/>
+                          </a:solidFill>
+                        </a:rPr>
+                        <a:t>c-Crk SH3</a:t>
+                      </a:r>
+                    </a:p>
+                  </a:txBody>
+                  <a:tcPr/>
+                </a:tc>
+              </a:tr>
+            </a:tbl>
+          </a:graphicData>
+        </a:graphic>
+      </p:graphicFrame>
+      <p:sp>
+        <p:nvSpPr>
+          <p:cNvPr id="9" name="TextBox 8"/>
+          <p:cNvSpPr txBox="1"/>
+          <p:nvPr/>
+        </p:nvSpPr>
+        <p:spPr>
+          <a:xfrm>
+            <a:off x="548640" y="3520440"/>
+            <a:ext cx="11155680" cy="1005840"/>
+          </a:xfrm>
+          <a:prstGeom prst="rect">
+            <a:avLst/>
+          </a:prstGeom>
+          <a:noFill/>
+        </p:spPr>
+        <p:txBody>
+          <a:bodyPr wrap="square">
+            <a:spAutoFit/>
+          </a:bodyPr>
+          <a:lstStyle/>
+          <a:p>
+            <a:pPr>
+              <a:spcAft>
+                <a:spcPts val="600"/>
+              </a:spcAft>
+            </a:pPr>
+            <a:r>
+              <a:rPr sz="1500" b="0">
+                <a:solidFill>
+                  <a:srgbClr val="0B2B52"/>
+                </a:solidFill>
+              </a:rPr>
+              <a:t>Each cognate wins on its own target and loses on the other. KQTSV is also the shortest candidate at five</a:t>
+            </a:r>
+          </a:p>
+          <a:p>
+            <a:pPr>
+              <a:spcAft>
+                <a:spcPts val="600"/>
+              </a:spcAft>
+            </a:pPr>
+            <a:r>
+              <a:rPr sz="1500" b="0">
+                <a:solidFill>
+                  <a:srgbClr val="0B2B52"/>
+                </a:solidFill>
+              </a:rPr>
+              <a:t>residues, so the ranking is not being driven by length.</a:t>
+            </a:r>
+          </a:p>
+        </p:txBody>
+      </p:sp>
+      <p:sp>
+        <p:nvSpPr>
+          <p:cNvPr id="10" name="Rounded Rectangle 9"/>
+          <p:cNvSpPr/>
+          <p:nvPr/>
+        </p:nvSpPr>
+        <p:spPr>
+          <a:xfrm>
+            <a:off x="548640" y="4434840"/>
+            <a:ext cx="11155680" cy="960120"/>
+          </a:xfrm>
+          <a:prstGeom prst="roundRect">
+            <a:avLst/>
+          </a:prstGeom>
+          <a:solidFill>
+            <a:srgbClr val="2E7D32"/>
+          </a:solidFill>
+          <a:ln>
+            <a:noFill/>
+          </a:ln>
+        </p:spPr>
+        <p:style>
+          <a:lnRef idx="1">
+            <a:schemeClr val="accent1"/>
+          </a:lnRef>
+          <a:fillRef idx="3">
+            <a:schemeClr val="accent1"/>
+          </a:fillRef>
+          <a:effectRef idx="2">
+            <a:schemeClr val="accent1"/>
+          </a:effectRef>
+          <a:fontRef idx="minor">
+            <a:schemeClr val="lt1"/>
+          </a:fontRef>
+        </p:style>
+        <p:txBody>
+          <a:bodyPr rtlCol="0" anchor="ctr" wrap="square"/>
+          <a:lstStyle/>
+          <a:p>
+            <a:pPr algn="ctr">
+              <a:spcAft>
+                <a:spcPts val="600"/>
+              </a:spcAft>
+            </a:pPr>
+            <a:r>
+              <a:rPr sz="1700" b="1">
+                <a:solidFill>
+                  <a:srgbClr val="FFFFFF"/>
+                </a:solidFill>
+              </a:rPr>
+              <a:t>Quick mode, two replicates, three scrambles — about three minutes a target on a laptop.</a:t>
+            </a:r>
+          </a:p>
+        </p:txBody>
+      </p:sp>
+      <p:sp>
+        <p:nvSpPr>
+          <p:cNvPr id="11" name="Rounded Rectangle 10"/>
+          <p:cNvSpPr/>
+          <p:nvPr/>
+        </p:nvSpPr>
+        <p:spPr>
+          <a:xfrm>
+            <a:off x="548640" y="5504688"/>
+            <a:ext cx="11155680" cy="868680"/>
+          </a:xfrm>
+          <a:prstGeom prst="roundRect">
+            <a:avLst/>
+          </a:prstGeom>
+          <a:solidFill>
+            <a:srgbClr val="FDF3E0"/>
+          </a:solidFill>
+          <a:ln>
+            <a:noFill/>
+          </a:ln>
+        </p:spPr>
+        <p:style>
+          <a:lnRef idx="1">
+            <a:schemeClr val="accent1"/>
+          </a:lnRef>
+          <a:fillRef idx="3">
+            <a:schemeClr val="accent1"/>
+          </a:fillRef>
+          <a:effectRef idx="2">
+            <a:schemeClr val="accent1"/>
+          </a:effectRef>
+          <a:fontRef idx="minor">
+            <a:schemeClr val="lt1"/>
+          </a:fontRef>
+        </p:style>
+        <p:txBody>
+          <a:bodyPr rtlCol="0" anchor="ctr" wrap="square"/>
+          <a:lstStyle/>
+          <a:p>
+            <a:pPr algn="ctr">
+              <a:spcAft>
+                <a:spcPts val="600"/>
+              </a:spcAft>
+            </a:pPr>
+            <a:r>
+              <a:rPr sz="1250" b="0">
+                <a:solidFill>
+                  <a:srgbClr val="8A5200"/>
+                </a:solidFill>
+              </a:rPr>
+              <a:t>Shown with its failure: on c-Crk SH3 the cognate does not separate from its own scrambles (p = 0.40), and full sampling does not rescue it. A control that destroys only order has little to detect on a composition-driven interface.</a:t>
             </a:r>
           </a:p>
         </p:txBody>

--- a/final_dissertation_presentation.pptx
+++ b/final_dissertation_presentation.pptx
@@ -37,6 +37,9 @@
     <p:sldId id="288" r:id="rId39"/>
     <p:sldId id="289" r:id="rId40"/>
     <p:sldId id="290" r:id="rId34"/>
+    <p:sldId id="291" r:id="rId42"/>
+    <p:sldId id="292" r:id="rId43"/>
+    <p:sldId id="293" r:id="rId44"/>
     <p:sldId id="267" r:id="rId18"/>
     <p:sldId id="268" r:id="rId19"/>
   </p:sldIdLst>
@@ -16157,7 +16160,7 @@
         <p:spPr>
           <a:xfrm>
             <a:off x="0" y="0"/>
-            <a:ext cx="12191695" cy="914400"/>
+            <a:ext cx="12188952" cy="914400"/>
           </a:xfrm>
           <a:prstGeom prst="rect">
             <a:avLst/>
@@ -16168,7 +16171,6 @@
           <a:ln>
             <a:noFill/>
           </a:ln>
-          <a:effectLst/>
         </p:spPr>
         <p:style>
           <a:lnRef idx="1">
@@ -16201,7 +16203,7 @@
         <p:spPr>
           <a:xfrm>
             <a:off x="0" y="914400"/>
-            <a:ext cx="12191695" cy="54864"/>
+            <a:ext cx="12188952" cy="54864"/>
           </a:xfrm>
           <a:prstGeom prst="rect">
             <a:avLst/>
@@ -16212,7 +16214,6 @@
           <a:ln>
             <a:noFill/>
           </a:ln>
-          <a:effectLst/>
         </p:spPr>
         <p:style>
           <a:lnRef idx="1">
@@ -16259,20 +16260,17 @@
           <a:lstStyle/>
           <a:p>
             <a:pPr>
-              <a:spcBef>
-                <a:spcPts val="0"/>
-              </a:spcBef>
-              <a:spcAft>
-                <a:spcPts val="400"/>
-              </a:spcAft>
-            </a:pPr>
-            <a:r>
-              <a:rPr sz="2600" b="1" i="0">
+              <a:spcAft>
+                <a:spcPts val="600"/>
+              </a:spcAft>
+            </a:pPr>
+            <a:r>
+              <a:rPr sz="2600" b="1">
                 <a:solidFill>
                   <a:srgbClr val="FFFFFF"/>
                 </a:solidFill>
               </a:rPr>
-              <a:t>Future Plan</a:t>
+              <a:t>Delivered — the Findings as Behaviour, Not a Caveat</a:t>
             </a:r>
           </a:p>
         </p:txBody>
@@ -16300,9 +16298,6 @@
           <a:lstStyle/>
           <a:p>
             <a:pPr>
-              <a:spcBef>
-                <a:spcPts val="0"/>
-              </a:spcBef>
               <a:spcAft>
                 <a:spcPts val="600"/>
               </a:spcAft>
@@ -16326,7 +16321,7 @@
         </p:nvSpPr>
         <p:spPr>
           <a:xfrm>
-            <a:off x="11185855" y="6473952"/>
+            <a:off x="11183112" y="6473952"/>
             <a:ext cx="640080" cy="274320"/>
           </a:xfrm>
           <a:prstGeom prst="rect">
@@ -16340,10 +16335,7 @@
           </a:bodyPr>
           <a:lstStyle/>
           <a:p>
-            <a:pPr algn="r">
-              <a:spcBef>
-                <a:spcPts val="0"/>
-              </a:spcBef>
+            <a:pPr>
               <a:spcAft>
                 <a:spcPts val="600"/>
               </a:spcAft>
@@ -16354,23 +16346,61 @@
                   <a:srgbClr val="0B2B52"/>
                 </a:solidFill>
               </a:rPr>
-              <a:t>33</a:t>
-            </a:r>
-          </a:p>
-        </p:txBody>
-      </p:sp>
-      <p:sp>
-        <p:nvSpPr>
-          <p:cNvPr id="7" name="Oval 6"/>
+              <a:t>31</a:t>
+            </a:r>
+          </a:p>
+        </p:txBody>
+      </p:sp>
+      <p:sp>
+        <p:nvSpPr>
+          <p:cNvPr id="7" name="TextBox 6"/>
+          <p:cNvSpPr txBox="1"/>
+          <p:nvPr/>
+        </p:nvSpPr>
+        <p:spPr>
+          <a:xfrm>
+            <a:off x="548640" y="1078992"/>
+            <a:ext cx="11155680" cy="640080"/>
+          </a:xfrm>
+          <a:prstGeom prst="rect">
+            <a:avLst/>
+          </a:prstGeom>
+          <a:noFill/>
+        </p:spPr>
+        <p:txBody>
+          <a:bodyPr wrap="square">
+            <a:spAutoFit/>
+          </a:bodyPr>
+          <a:lstStyle/>
+          <a:p>
+            <a:pPr>
+              <a:spcAft>
+                <a:spcPts val="600"/>
+              </a:spcAft>
+            </a:pPr>
+            <a:r>
+              <a:rPr sz="1500" b="0">
+                <a:solidFill>
+                  <a:srgbClr val="0B2B52"/>
+                </a:solidFill>
+              </a:rPr>
+              <a:t>A local screening tool: paste a target and candidate peptides, get a ranking. Nothing is uploaded.</a:t>
+            </a:r>
+          </a:p>
+        </p:txBody>
+      </p:sp>
+      <p:sp>
+        <p:nvSpPr>
+          <p:cNvPr id="8" name="Rounded Rectangle 7"/>
           <p:cNvSpPr/>
           <p:nvPr/>
         </p:nvSpPr>
         <p:spPr>
           <a:xfrm>
-            <a:off x="548640" y="1325880"/>
-            <a:ext cx="566928" cy="566928"/>
-          </a:xfrm>
-          <a:prstGeom prst="ellipse">
+            <a:off x="548640" y="1737360"/>
+            <a:ext cx="3520440" cy="1463040"/>
+          </a:xfrm>
+          <a:prstGeom prst="roundRect">
             <a:avLst/>
           </a:prstGeom>
           <a:solidFill>
@@ -16379,7 +16409,6 @@
           <a:ln>
             <a:noFill/>
           </a:ln>
-          <a:effectLst/>
         </p:spPr>
         <p:style>
           <a:lnRef idx="1">
@@ -16399,78 +16428,41 @@
           <a:bodyPr rtlCol="0" anchor="ctr" wrap="square"/>
           <a:lstStyle/>
           <a:p>
-            <a:pPr algn="ctr">
-              <a:spcBef>
-                <a:spcPts val="0"/>
-              </a:spcBef>
-              <a:spcAft>
-                <a:spcPts val="400"/>
-              </a:spcAft>
-            </a:pPr>
-            <a:r>
-              <a:rPr sz="1800" b="1" i="0">
+            <a:pPr algn="ctr"/>
+            <a:r>
+              <a:rPr sz="2300" b="1">
                 <a:solidFill>
                   <a:srgbClr val="FFFFFF"/>
                 </a:solidFill>
               </a:rPr>
-              <a:t>1</a:t>
-            </a:r>
-          </a:p>
-        </p:txBody>
-      </p:sp>
-      <p:sp>
-        <p:nvSpPr>
-          <p:cNvPr id="8" name="TextBox 7"/>
-          <p:cNvSpPr txBox="1"/>
-          <p:nvPr/>
-        </p:nvSpPr>
-        <p:spPr>
-          <a:xfrm>
-            <a:off x="1325880" y="1307592"/>
-            <a:ext cx="10332720" cy="868680"/>
-          </a:xfrm>
-          <a:prstGeom prst="rect">
-            <a:avLst/>
-          </a:prstGeom>
-          <a:noFill/>
-        </p:spPr>
-        <p:txBody>
-          <a:bodyPr wrap="square">
-            <a:spAutoFit/>
-          </a:bodyPr>
-          <a:lstStyle/>
-          <a:p>
-            <a:pPr>
-              <a:spcBef>
-                <a:spcPts val="0"/>
-              </a:spcBef>
-              <a:spcAft>
-                <a:spcPts val="600"/>
-              </a:spcAft>
-            </a:pPr>
-            <a:r>
-              <a:rPr sz="1300" b="0">
-                <a:solidFill>
-                  <a:srgbClr val="0B2B52"/>
-                </a:solidFill>
-              </a:rPr>
-              <a:t>DONE — profiled; and measured what the optimisations actually deliver on pretrained weights (slides 11–18).</a:t>
-            </a:r>
-          </a:p>
-        </p:txBody>
-      </p:sp>
-      <p:sp>
-        <p:nvSpPr>
-          <p:cNvPr id="9" name="Oval 8"/>
+              <a:t>every candidate</a:t>
+            </a:r>
+          </a:p>
+          <a:p>
+            <a:pPr algn="ctr"/>
+            <a:r>
+              <a:rPr sz="1050">
+                <a:solidFill>
+                  <a:srgbClr val="FFFFFF"/>
+                </a:solidFill>
+              </a:rPr>
+              <a:t>folded against permutations of itself</a:t>
+            </a:r>
+          </a:p>
+        </p:txBody>
+      </p:sp>
+      <p:sp>
+        <p:nvSpPr>
+          <p:cNvPr id="9" name="Rounded Rectangle 8"/>
           <p:cNvSpPr/>
           <p:nvPr/>
         </p:nvSpPr>
         <p:spPr>
           <a:xfrm>
-            <a:off x="548640" y="2304288"/>
-            <a:ext cx="566928" cy="566928"/>
-          </a:xfrm>
-          <a:prstGeom prst="ellipse">
+            <a:off x="4343400" y="1737360"/>
+            <a:ext cx="3520440" cy="1463040"/>
+          </a:xfrm>
+          <a:prstGeom prst="roundRect">
             <a:avLst/>
           </a:prstGeom>
           <a:solidFill>
@@ -16479,7 +16471,6 @@
           <a:ln>
             <a:noFill/>
           </a:ln>
-          <a:effectLst/>
         </p:spPr>
         <p:style>
           <a:lnRef idx="1">
@@ -16499,78 +16490,41 @@
           <a:bodyPr rtlCol="0" anchor="ctr" wrap="square"/>
           <a:lstStyle/>
           <a:p>
-            <a:pPr algn="ctr">
-              <a:spcBef>
-                <a:spcPts val="0"/>
-              </a:spcBef>
-              <a:spcAft>
-                <a:spcPts val="400"/>
-              </a:spcAft>
-            </a:pPr>
-            <a:r>
-              <a:rPr sz="1800" b="1" i="0">
+            <a:pPr algn="ctr"/>
+            <a:r>
+              <a:rPr sz="2300" b="1">
                 <a:solidFill>
                   <a:srgbClr val="FFFFFF"/>
                 </a:solidFill>
               </a:rPr>
-              <a:t>2</a:t>
-            </a:r>
-          </a:p>
-        </p:txBody>
-      </p:sp>
-      <p:sp>
-        <p:nvSpPr>
-          <p:cNvPr id="10" name="TextBox 9"/>
-          <p:cNvSpPr txBox="1"/>
-          <p:nvPr/>
-        </p:nvSpPr>
-        <p:spPr>
-          <a:xfrm>
-            <a:off x="1325880" y="2286000"/>
-            <a:ext cx="10332720" cy="868680"/>
-          </a:xfrm>
-          <a:prstGeom prst="rect">
-            <a:avLst/>
-          </a:prstGeom>
-          <a:noFill/>
-        </p:spPr>
-        <p:txBody>
-          <a:bodyPr wrap="square">
-            <a:spAutoFit/>
-          </a:bodyPr>
-          <a:lstStyle/>
-          <a:p>
-            <a:pPr>
-              <a:spcBef>
-                <a:spcPts val="0"/>
-              </a:spcBef>
-              <a:spcAft>
-                <a:spcPts val="600"/>
-              </a:spcAft>
-            </a:pPr>
-            <a:r>
-              <a:rPr sz="1300" b="0">
-                <a:solidFill>
-                  <a:srgbClr val="0B2B52"/>
-                </a:solidFill>
-              </a:rPr>
-              <a:t>DONE — DeCAF-Boltz, distilled for 10 steps, folds the 132-complex panel in ~20 min locally and returns 96% physically plausible backbones against 14% for a stock model run short (slides 27-28).</a:t>
-            </a:r>
-          </a:p>
-        </p:txBody>
-      </p:sp>
-      <p:sp>
-        <p:nvSpPr>
-          <p:cNvPr id="11" name="Oval 10"/>
+              <a:t>45 s + 9 s/fold</a:t>
+            </a:r>
+          </a:p>
+          <a:p>
+            <a:pPr algn="ctr"/>
+            <a:r>
+              <a:rPr sz="1050">
+                <a:solidFill>
+                  <a:srgbClr val="FFFFFF"/>
+                </a:solidFill>
+              </a:rPr>
+              <a:t>model construction is paid once per job</a:t>
+            </a:r>
+          </a:p>
+        </p:txBody>
+      </p:sp>
+      <p:sp>
+        <p:nvSpPr>
+          <p:cNvPr id="10" name="Rounded Rectangle 9"/>
           <p:cNvSpPr/>
           <p:nvPr/>
         </p:nvSpPr>
         <p:spPr>
           <a:xfrm>
-            <a:off x="548640" y="3282696"/>
-            <a:ext cx="566928" cy="566928"/>
-          </a:xfrm>
-          <a:prstGeom prst="ellipse">
+            <a:off x="8138160" y="1737360"/>
+            <a:ext cx="3566160" cy="1463040"/>
+          </a:xfrm>
+          <a:prstGeom prst="roundRect">
             <a:avLst/>
           </a:prstGeom>
           <a:solidFill>
@@ -16579,7 +16533,6 @@
           <a:ln>
             <a:noFill/>
           </a:ln>
-          <a:effectLst/>
         </p:spPr>
         <p:style>
           <a:lnRef idx="1">
@@ -16599,35 +16552,39 @@
           <a:bodyPr rtlCol="0" anchor="ctr" wrap="square"/>
           <a:lstStyle/>
           <a:p>
-            <a:pPr algn="ctr">
-              <a:spcBef>
-                <a:spcPts val="0"/>
-              </a:spcBef>
-              <a:spcAft>
-                <a:spcPts val="400"/>
-              </a:spcAft>
-            </a:pPr>
-            <a:r>
-              <a:rPr sz="1800" b="1" i="0">
+            <a:pPr algn="ctr"/>
+            <a:r>
+              <a:rPr sz="2300" b="1">
                 <a:solidFill>
                   <a:srgbClr val="FFFFFF"/>
                 </a:solidFill>
               </a:rPr>
-              <a:t>3</a:t>
-            </a:r>
-          </a:p>
-        </p:txBody>
-      </p:sp>
-      <p:sp>
-        <p:nvSpPr>
-          <p:cNvPr id="12" name="TextBox 11"/>
+              <a:t>≈ 2 s</a:t>
+            </a:r>
+          </a:p>
+          <a:p>
+            <a:pPr algn="ctr"/>
+            <a:r>
+              <a:rPr sz="1050">
+                <a:solidFill>
+                  <a:srgbClr val="FFFFFF"/>
+                </a:solidFill>
+              </a:rPr>
+              <a:t>to re-screen — folds are cached</a:t>
+            </a:r>
+          </a:p>
+        </p:txBody>
+      </p:sp>
+      <p:sp>
+        <p:nvSpPr>
+          <p:cNvPr id="11" name="TextBox 10"/>
           <p:cNvSpPr txBox="1"/>
           <p:nvPr/>
         </p:nvSpPr>
         <p:spPr>
           <a:xfrm>
-            <a:off x="1325880" y="3264408"/>
-            <a:ext cx="10332720" cy="868680"/>
+            <a:off x="548640" y="3246120"/>
+            <a:ext cx="11155680" cy="731520"/>
           </a:xfrm>
           <a:prstGeom prst="rect">
             <a:avLst/>
@@ -16640,46 +16597,133 @@
           </a:bodyPr>
           <a:lstStyle/>
           <a:p>
-            <a:pPr>
-              <a:spcBef>
-                <a:spcPts val="0"/>
-              </a:spcBef>
-              <a:spcAft>
-                <a:spcPts val="600"/>
-              </a:spcAft>
-            </a:pPr>
-            <a:r>
-              <a:rPr sz="1300" b="0">
+            <a:r>
+              <a:rPr sz="1450" b="1">
                 <a:solidFill>
                   <a:srgbClr val="0B2B52"/>
                 </a:solidFill>
               </a:rPr>
-              <a:t>DONE, NEGATIVE — the surrogate was distilled and evaluated: ipTM does not rank binders, so no surrogate distilled from it can either.</a:t>
-            </a:r>
-          </a:p>
-        </p:txBody>
-      </p:sp>
-      <p:sp>
-        <p:nvSpPr>
-          <p:cNvPr id="13" name="Oval 12"/>
+              <a:t>Section 7.4 — a score can be blind to sequence order</a:t>
+            </a:r>
+          </a:p>
+          <a:p>
+            <a:r>
+              <a:rPr sz="1250">
+                <a:solidFill>
+                  <a:srgbClr val="1E6FB8"/>
+                </a:solidFill>
+              </a:rPr>
+              <a:t>so a candidate is reported as a t against its own permutations, never as a raw score; one that cannot beat its own scrambles is not a hit</a:t>
+            </a:r>
+          </a:p>
+        </p:txBody>
+      </p:sp>
+      <p:sp>
+        <p:nvSpPr>
+          <p:cNvPr id="12" name="TextBox 11"/>
+          <p:cNvSpPr txBox="1"/>
+          <p:nvPr/>
+        </p:nvSpPr>
+        <p:spPr>
+          <a:xfrm>
+            <a:off x="548640" y="3995928"/>
+            <a:ext cx="11155680" cy="731520"/>
+          </a:xfrm>
+          <a:prstGeom prst="rect">
+            <a:avLst/>
+          </a:prstGeom>
+          <a:noFill/>
+        </p:spPr>
+        <p:txBody>
+          <a:bodyPr wrap="square">
+            <a:spAutoFit/>
+          </a:bodyPr>
+          <a:lstStyle/>
+          <a:p>
+            <a:r>
+              <a:rPr sz="1450" b="1">
+                <a:solidFill>
+                  <a:srgbClr val="0B2B52"/>
+                </a:solidFill>
+              </a:rPr>
+              <a:t>Section 7.13 — reduced settings suppress the effect 3–7×</a:t>
+            </a:r>
+          </a:p>
+          <a:p>
+            <a:r>
+              <a:rPr sz="1250">
+                <a:solidFill>
+                  <a:srgbClr val="1E6FB8"/>
+                </a:solidFill>
+              </a:rPr>
+              <a:t>so quick mode is offered, and says in the interface what it costs: ~14% of backbone bonds physically plausible at ten steps</a:t>
+            </a:r>
+          </a:p>
+        </p:txBody>
+      </p:sp>
+      <p:sp>
+        <p:nvSpPr>
+          <p:cNvPr id="13" name="TextBox 12"/>
+          <p:cNvSpPr txBox="1"/>
+          <p:nvPr/>
+        </p:nvSpPr>
+        <p:spPr>
+          <a:xfrm>
+            <a:off x="548640" y="4745736"/>
+            <a:ext cx="11155680" cy="731520"/>
+          </a:xfrm>
+          <a:prstGeom prst="rect">
+            <a:avLst/>
+          </a:prstGeom>
+          <a:noFill/>
+        </p:spPr>
+        <p:txBody>
+          <a:bodyPr wrap="square">
+            <a:spAutoFit/>
+          </a:bodyPr>
+          <a:lstStyle/>
+          <a:p>
+            <a:r>
+              <a:rPr sz="1450" b="1">
+                <a:solidFill>
+                  <a:srgbClr val="0B2B52"/>
+                </a:solidFill>
+              </a:rPr>
+              <a:t>Section 7.5 — a single fold is not a measurement</a:t>
+            </a:r>
+          </a:p>
+          <a:p>
+            <a:r>
+              <a:rPr sz="1250">
+                <a:solidFill>
+                  <a:srgbClr val="1E6FB8"/>
+                </a:solidFill>
+              </a:rPr>
+              <a:t>so replicates are a control, and the replicate spread is a column in the table rather than a footnote</a:t>
+            </a:r>
+          </a:p>
+        </p:txBody>
+      </p:sp>
+      <p:sp>
+        <p:nvSpPr>
+          <p:cNvPr id="14" name="Rounded Rectangle 13"/>
           <p:cNvSpPr/>
           <p:nvPr/>
         </p:nvSpPr>
         <p:spPr>
           <a:xfrm>
-            <a:off x="548640" y="4261104"/>
-            <a:ext cx="566928" cy="566928"/>
-          </a:xfrm>
-          <a:prstGeom prst="ellipse">
+            <a:off x="548640" y="5504688"/>
+            <a:ext cx="11155680" cy="868680"/>
+          </a:xfrm>
+          <a:prstGeom prst="roundRect">
             <a:avLst/>
           </a:prstGeom>
           <a:solidFill>
-            <a:srgbClr val="C77700"/>
+            <a:srgbClr val="FDF3E0"/>
           </a:solidFill>
           <a:ln>
             <a:noFill/>
           </a:ln>
-          <a:effectLst/>
         </p:spPr>
         <p:style>
           <a:lnRef idx="1">
@@ -16700,161 +16744,17 @@
           <a:lstStyle/>
           <a:p>
             <a:pPr algn="ctr">
-              <a:spcBef>
-                <a:spcPts val="0"/>
-              </a:spcBef>
-              <a:spcAft>
-                <a:spcPts val="400"/>
-              </a:spcAft>
-            </a:pPr>
-            <a:r>
-              <a:rPr sz="1800" b="1" i="0">
-                <a:solidFill>
-                  <a:srgbClr val="FFFFFF"/>
-                </a:solidFill>
-              </a:rPr>
-              <a:t>4</a:t>
-            </a:r>
-          </a:p>
-        </p:txBody>
-      </p:sp>
-      <p:sp>
-        <p:nvSpPr>
-          <p:cNvPr id="14" name="TextBox 13"/>
-          <p:cNvSpPr txBox="1"/>
-          <p:nvPr/>
-        </p:nvSpPr>
-        <p:spPr>
-          <a:xfrm>
-            <a:off x="1325880" y="4242816"/>
-            <a:ext cx="10332720" cy="868680"/>
-          </a:xfrm>
-          <a:prstGeom prst="rect">
-            <a:avLst/>
-          </a:prstGeom>
-          <a:noFill/>
-        </p:spPr>
-        <p:txBody>
-          <a:bodyPr wrap="square">
-            <a:spAutoFit/>
-          </a:bodyPr>
-          <a:lstStyle/>
-          <a:p>
-            <a:pPr>
-              <a:spcBef>
-                <a:spcPts val="0"/>
-              </a:spcBef>
               <a:spcAft>
                 <a:spcPts val="600"/>
               </a:spcAft>
             </a:pPr>
             <a:r>
-              <a:rPr sz="1300" b="0">
-                <a:solidFill>
-                  <a:srgbClr val="0B2B52"/>
-                </a:solidFill>
-              </a:rPr>
-              <a:t>Use open Boltz-2 weights only — Boltz-2.1 is closed / API-only.</a:t>
-            </a:r>
-          </a:p>
-        </p:txBody>
-      </p:sp>
-      <p:sp>
-        <p:nvSpPr>
-          <p:cNvPr id="15" name="Oval 14"/>
-          <p:cNvSpPr/>
-          <p:nvPr/>
-        </p:nvSpPr>
-        <p:spPr>
-          <a:xfrm>
-            <a:off x="548640" y="5239512"/>
-            <a:ext cx="566928" cy="566928"/>
-          </a:xfrm>
-          <a:prstGeom prst="ellipse">
-            <a:avLst/>
-          </a:prstGeom>
-          <a:solidFill>
-            <a:srgbClr val="0B2B52"/>
-          </a:solidFill>
-          <a:ln>
-            <a:noFill/>
-          </a:ln>
-          <a:effectLst/>
-        </p:spPr>
-        <p:style>
-          <a:lnRef idx="1">
-            <a:schemeClr val="accent1"/>
-          </a:lnRef>
-          <a:fillRef idx="3">
-            <a:schemeClr val="accent1"/>
-          </a:fillRef>
-          <a:effectRef idx="2">
-            <a:schemeClr val="accent1"/>
-          </a:effectRef>
-          <a:fontRef idx="minor">
-            <a:schemeClr val="lt1"/>
-          </a:fontRef>
-        </p:style>
-        <p:txBody>
-          <a:bodyPr rtlCol="0" anchor="ctr" wrap="square"/>
-          <a:lstStyle/>
-          <a:p>
-            <a:pPr algn="ctr">
-              <a:spcBef>
-                <a:spcPts val="0"/>
-              </a:spcBef>
-              <a:spcAft>
-                <a:spcPts val="400"/>
-              </a:spcAft>
-            </a:pPr>
-            <a:r>
-              <a:rPr sz="1800" b="1" i="0">
-                <a:solidFill>
-                  <a:srgbClr val="FFFFFF"/>
-                </a:solidFill>
-              </a:rPr>
-              <a:t>5</a:t>
-            </a:r>
-          </a:p>
-        </p:txBody>
-      </p:sp>
-      <p:sp>
-        <p:nvSpPr>
-          <p:cNvPr id="16" name="TextBox 15"/>
-          <p:cNvSpPr txBox="1"/>
-          <p:nvPr/>
-        </p:nvSpPr>
-        <p:spPr>
-          <a:xfrm>
-            <a:off x="1325880" y="5221224"/>
-            <a:ext cx="10332720" cy="868680"/>
-          </a:xfrm>
-          <a:prstGeom prst="rect">
-            <a:avLst/>
-          </a:prstGeom>
-          <a:noFill/>
-        </p:spPr>
-        <p:txBody>
-          <a:bodyPr wrap="square">
-            <a:spAutoFit/>
-          </a:bodyPr>
-          <a:lstStyle/>
-          <a:p>
-            <a:pPr>
-              <a:spcBef>
-                <a:spcPts val="0"/>
-              </a:spcBef>
-              <a:spcAft>
-                <a:spcPts val="600"/>
-              </a:spcAft>
-            </a:pPr>
-            <a:r>
-              <a:rPr sz="1300" b="0">
-                <a:solidFill>
-                  <a:srgbClr val="0B2B52"/>
-                </a:solidFill>
-              </a:rPr>
-              <a:t>Production GPU scaling — NO LONGER a prerequisite. MPS (~3x) plus few-step distillation let the held-out panel be folded five times on this laptop, and the third draw overturned what the first two supported. Scaling is now for extending the panel past 22 receptors, which is the binding constraint on the open questions.</a:t>
+              <a:rPr sz="1250" b="0">
+                <a:solidFill>
+                  <a:srgbClr val="8A5200"/>
+                </a:solidFill>
+              </a:rPr>
+              <a:t>Candidates that cannot be scored honestly are refused, not scored badly. Building it caught two faults that would have misled a user: a two-permutation null SD reported z = +77, and a fixed cutoff on that ratio called a Gly–Ser linker a hit.</a:t>
             </a:r>
           </a:p>
         </p:txBody>
@@ -16868,1031 +16768,6 @@
 </file>
 
 <file path=ppt/slides/slide32.xml><?xml version="1.0" encoding="utf-8"?>
-<p:sld xmlns:a="http://schemas.openxmlformats.org/drawingml/2006/main" xmlns:p="http://schemas.openxmlformats.org/presentationml/2006/main" xmlns:r="http://schemas.openxmlformats.org/officeDocument/2006/relationships">
-  <p:cSld>
-    <p:spTree>
-      <p:nvGrpSpPr>
-        <p:cNvPr id="1" name=""/>
-        <p:cNvGrpSpPr/>
-        <p:nvPr/>
-      </p:nvGrpSpPr>
-      <p:grpSpPr/>
-      <p:sp>
-        <p:nvSpPr>
-          <p:cNvPr id="2" name="Rectangle 1"/>
-          <p:cNvSpPr/>
-          <p:nvPr/>
-        </p:nvSpPr>
-        <p:spPr>
-          <a:xfrm>
-            <a:off x="0" y="0"/>
-            <a:ext cx="12191695" cy="914400"/>
-          </a:xfrm>
-          <a:prstGeom prst="rect">
-            <a:avLst/>
-          </a:prstGeom>
-          <a:solidFill>
-            <a:srgbClr val="0B2B52"/>
-          </a:solidFill>
-          <a:ln>
-            <a:noFill/>
-          </a:ln>
-          <a:effectLst/>
-        </p:spPr>
-        <p:style>
-          <a:lnRef idx="1">
-            <a:schemeClr val="accent1"/>
-          </a:lnRef>
-          <a:fillRef idx="3">
-            <a:schemeClr val="accent1"/>
-          </a:fillRef>
-          <a:effectRef idx="2">
-            <a:schemeClr val="accent1"/>
-          </a:effectRef>
-          <a:fontRef idx="minor">
-            <a:schemeClr val="lt1"/>
-          </a:fontRef>
-        </p:style>
-        <p:txBody>
-          <a:bodyPr rtlCol="0" anchor="ctr"/>
-          <a:lstStyle/>
-          <a:p>
-            <a:pPr algn="ctr"/>
-          </a:p>
-        </p:txBody>
-      </p:sp>
-      <p:sp>
-        <p:nvSpPr>
-          <p:cNvPr id="3" name="Rectangle 2"/>
-          <p:cNvSpPr/>
-          <p:nvPr/>
-        </p:nvSpPr>
-        <p:spPr>
-          <a:xfrm>
-            <a:off x="0" y="914400"/>
-            <a:ext cx="12191695" cy="54864"/>
-          </a:xfrm>
-          <a:prstGeom prst="rect">
-            <a:avLst/>
-          </a:prstGeom>
-          <a:solidFill>
-            <a:srgbClr val="1E6FB8"/>
-          </a:solidFill>
-          <a:ln>
-            <a:noFill/>
-          </a:ln>
-          <a:effectLst/>
-        </p:spPr>
-        <p:style>
-          <a:lnRef idx="1">
-            <a:schemeClr val="accent1"/>
-          </a:lnRef>
-          <a:fillRef idx="3">
-            <a:schemeClr val="accent1"/>
-          </a:fillRef>
-          <a:effectRef idx="2">
-            <a:schemeClr val="accent1"/>
-          </a:effectRef>
-          <a:fontRef idx="minor">
-            <a:schemeClr val="lt1"/>
-          </a:fontRef>
-        </p:style>
-        <p:txBody>
-          <a:bodyPr rtlCol="0" anchor="ctr"/>
-          <a:lstStyle/>
-          <a:p>
-            <a:pPr algn="ctr"/>
-          </a:p>
-        </p:txBody>
-      </p:sp>
-      <p:sp>
-        <p:nvSpPr>
-          <p:cNvPr id="4" name="TextBox 3"/>
-          <p:cNvSpPr txBox="1"/>
-          <p:nvPr/>
-        </p:nvSpPr>
-        <p:spPr>
-          <a:xfrm>
-            <a:off x="502920" y="109728"/>
-            <a:ext cx="11155680" cy="777240"/>
-          </a:xfrm>
-          <a:prstGeom prst="rect">
-            <a:avLst/>
-          </a:prstGeom>
-          <a:noFill/>
-        </p:spPr>
-        <p:txBody>
-          <a:bodyPr wrap="square">
-            <a:spAutoFit/>
-          </a:bodyPr>
-          <a:lstStyle/>
-          <a:p>
-            <a:pPr>
-              <a:spcBef>
-                <a:spcPts val="0"/>
-              </a:spcBef>
-              <a:spcAft>
-                <a:spcPts val="400"/>
-              </a:spcAft>
-            </a:pPr>
-            <a:r>
-              <a:rPr sz="2600" b="1" i="0">
-                <a:solidFill>
-                  <a:srgbClr val="FFFFFF"/>
-                </a:solidFill>
-              </a:rPr>
-              <a:t>Summary</a:t>
-            </a:r>
-          </a:p>
-        </p:txBody>
-      </p:sp>
-      <p:sp>
-        <p:nvSpPr>
-          <p:cNvPr id="5" name="TextBox 4"/>
-          <p:cNvSpPr txBox="1"/>
-          <p:nvPr/>
-        </p:nvSpPr>
-        <p:spPr>
-          <a:xfrm>
-            <a:off x="502920" y="6473952"/>
-            <a:ext cx="8229600" cy="274320"/>
-          </a:xfrm>
-          <a:prstGeom prst="rect">
-            <a:avLst/>
-          </a:prstGeom>
-          <a:noFill/>
-        </p:spPr>
-        <p:txBody>
-          <a:bodyPr wrap="square">
-            <a:spAutoFit/>
-          </a:bodyPr>
-          <a:lstStyle/>
-          <a:p>
-            <a:pPr>
-              <a:spcBef>
-                <a:spcPts val="0"/>
-              </a:spcBef>
-              <a:spcAft>
-                <a:spcPts val="600"/>
-              </a:spcAft>
-            </a:pPr>
-            <a:r>
-              <a:rPr sz="900" b="0">
-                <a:solidFill>
-                  <a:srgbClr val="555555"/>
-                </a:solidFill>
-              </a:rPr>
-              <a:t>Boltz-Fast · Final Dissertation Report · Akik Jana (2024AB05287)</a:t>
-            </a:r>
-          </a:p>
-        </p:txBody>
-      </p:sp>
-      <p:sp>
-        <p:nvSpPr>
-          <p:cNvPr id="6" name="TextBox 5"/>
-          <p:cNvSpPr txBox="1"/>
-          <p:nvPr/>
-        </p:nvSpPr>
-        <p:spPr>
-          <a:xfrm>
-            <a:off x="11185855" y="6473952"/>
-            <a:ext cx="640080" cy="274320"/>
-          </a:xfrm>
-          <a:prstGeom prst="rect">
-            <a:avLst/>
-          </a:prstGeom>
-          <a:noFill/>
-        </p:spPr>
-        <p:txBody>
-          <a:bodyPr wrap="square">
-            <a:spAutoFit/>
-          </a:bodyPr>
-          <a:lstStyle/>
-          <a:p>
-            <a:pPr algn="r">
-              <a:spcBef>
-                <a:spcPts val="0"/>
-              </a:spcBef>
-              <a:spcAft>
-                <a:spcPts val="600"/>
-              </a:spcAft>
-            </a:pPr>
-            <a:r>
-              <a:rPr sz="1000" b="0">
-                <a:solidFill>
-                  <a:srgbClr val="0B2B52"/>
-                </a:solidFill>
-              </a:rPr>
-              <a:t>34</a:t>
-            </a:r>
-          </a:p>
-        </p:txBody>
-      </p:sp>
-      <p:sp>
-        <p:nvSpPr>
-          <p:cNvPr id="7" name="TextBox 6"/>
-          <p:cNvSpPr txBox="1"/>
-          <p:nvPr/>
-        </p:nvSpPr>
-        <p:spPr>
-          <a:xfrm>
-            <a:off x="548640" y="1280160"/>
-            <a:ext cx="11155680" cy="3383280"/>
-          </a:xfrm>
-          <a:prstGeom prst="rect">
-            <a:avLst/>
-          </a:prstGeom>
-          <a:noFill/>
-        </p:spPr>
-        <p:txBody>
-          <a:bodyPr wrap="square">
-            <a:spAutoFit/>
-          </a:bodyPr>
-          <a:lstStyle/>
-          <a:p>
-            <a:pPr>
-              <a:spcBef>
-                <a:spcPts val="0"/>
-              </a:spcBef>
-              <a:spcAft>
-                <a:spcPts val="600"/>
-              </a:spcAft>
-            </a:pPr>
-            <a:r>
-              <a:rPr sz="1400" b="0">
-                <a:solidFill>
-                  <a:srgbClr val="0B2B52"/>
-                </a:solidFill>
-              </a:rPr>
-              <a:t>•  Implemented and integrated memory, sampling and parallelism optimisations into the Boltz pipeline; device-agnostic on Apple Silicon.</a:t>
-            </a:r>
-          </a:p>
-          <a:p>
-            <a:pPr>
-              <a:spcAft>
-                <a:spcPts val="600"/>
-              </a:spcAft>
-            </a:pPr>
-            <a:r>
-              <a:rPr sz="1400" b="0">
-                <a:solidFill>
-                  <a:srgbClr val="0B2B52"/>
-                </a:solidFill>
-              </a:rPr>
-              <a:t>•  Moved from component microbenchmarks to end-to-end measurement against pretrained checkpoints and experimentally determined structures.</a:t>
-            </a:r>
-          </a:p>
-          <a:p>
-            <a:pPr>
-              <a:spcAft>
-                <a:spcPts val="600"/>
-              </a:spcAft>
-            </a:pPr>
-            <a:r>
-              <a:rPr sz="1400" b="0">
-                <a:solidFill>
-                  <a:srgbClr val="0B2B52"/>
-                </a:solidFill>
-              </a:rPr>
-              <a:t>•  Two questions closed with negative answers, both with mechanisms: the low-rank OPM is unreachable on released weights, and ipTM tracks peptide composition rather than binding.</a:t>
-            </a:r>
-          </a:p>
-          <a:p>
-            <a:pPr>
-              <a:spcAft>
-                <a:spcPts val="600"/>
-              </a:spcAft>
-            </a:pPr>
-            <a:r>
-              <a:rPr sz="1400" b="0">
-                <a:solidFill>
-                  <a:srgbClr val="0B2B52"/>
-                </a:solidFill>
-              </a:rPr>
-              <a:t>•  A third finding generalises beyond this project: a single unseeded fold does not reproduce its own ranking.</a:t>
-            </a:r>
-          </a:p>
-          <a:p>
-            <a:pPr>
-              <a:spcAft>
-                <a:spcPts val="600"/>
-              </a:spcAft>
-            </a:pPr>
-            <a:r>
-              <a:rPr sz="1400" b="0">
-                <a:solidFill>
-                  <a:srgbClr val="0B2B52"/>
-                </a:solidFill>
-              </a:rPr>
-              <a:t>•  Delivered as a local screening tool: the scramble control, the cost of reduced settings and the replicate spread are built into what it does rather than written beside it (slides 31–32).</a:t>
-            </a:r>
-          </a:p>
-          <a:p>
-            <a:r>
-              <a:rPr sz="1400" b="0">
-                <a:solidFill>
-                  <a:srgbClr val="0B2B52"/>
-                </a:solidFill>
-              </a:rPr>
-              <a:t>•  Next: extend the panel past 22 receptors, which is what now limits the open questions.</a:t>
-            </a:r>
-          </a:p>
-        </p:txBody>
-      </p:sp>
-      <p:sp>
-        <p:nvSpPr>
-          <p:cNvPr id="8" name="Rounded Rectangle 7"/>
-          <p:cNvSpPr/>
-          <p:nvPr/>
-        </p:nvSpPr>
-        <p:spPr>
-          <a:xfrm>
-            <a:off x="548640" y="4892040"/>
-            <a:ext cx="11155680" cy="1051560"/>
-          </a:xfrm>
-          <a:prstGeom prst="roundRect">
-            <a:avLst/>
-          </a:prstGeom>
-          <a:solidFill>
-            <a:srgbClr val="0B2B52"/>
-          </a:solidFill>
-          <a:ln>
-            <a:noFill/>
-          </a:ln>
-          <a:effectLst/>
-        </p:spPr>
-        <p:style>
-          <a:lnRef idx="1">
-            <a:schemeClr val="accent1"/>
-          </a:lnRef>
-          <a:fillRef idx="3">
-            <a:schemeClr val="accent1"/>
-          </a:fillRef>
-          <a:effectRef idx="2">
-            <a:schemeClr val="accent1"/>
-          </a:effectRef>
-          <a:fontRef idx="minor">
-            <a:schemeClr val="lt1"/>
-          </a:fontRef>
-        </p:style>
-        <p:txBody>
-          <a:bodyPr rtlCol="0" anchor="ctr" wrap="square"/>
-          <a:lstStyle/>
-          <a:p>
-            <a:pPr algn="ctr">
-              <a:spcBef>
-                <a:spcPts val="0"/>
-              </a:spcBef>
-              <a:spcAft>
-                <a:spcPts val="400"/>
-              </a:spcAft>
-            </a:pPr>
-            <a:r>
-              <a:rPr sz="2000" b="1" i="0">
-                <a:solidFill>
-                  <a:srgbClr val="FFFFFF"/>
-                </a:solidFill>
-              </a:rPr>
-              <a:t>Thank you  ·  Questions welcome</a:t>
-            </a:r>
-          </a:p>
-        </p:txBody>
-      </p:sp>
-    </p:spTree>
-  </p:cSld>
-  <p:clrMapOvr>
-    <a:masterClrMapping/>
-  </p:clrMapOvr>
-</p:sld>
-</file>
-
-<file path=ppt/slides/slide33.xml><?xml version="1.0" encoding="utf-8"?>
-<p:sld xmlns:a="http://schemas.openxmlformats.org/drawingml/2006/main" xmlns:p="http://schemas.openxmlformats.org/presentationml/2006/main" xmlns:r="http://schemas.openxmlformats.org/officeDocument/2006/relationships">
-  <p:cSld>
-    <p:spTree>
-      <p:nvGrpSpPr>
-        <p:cNvPr id="1" name=""/>
-        <p:cNvGrpSpPr/>
-        <p:nvPr/>
-      </p:nvGrpSpPr>
-      <p:grpSpPr/>
-      <p:sp>
-        <p:nvSpPr>
-          <p:cNvPr id="2" name="Rectangle 1"/>
-          <p:cNvSpPr/>
-          <p:nvPr/>
-        </p:nvSpPr>
-        <p:spPr>
-          <a:xfrm>
-            <a:off x="0" y="0"/>
-            <a:ext cx="12188952" cy="914400"/>
-          </a:xfrm>
-          <a:prstGeom prst="rect">
-            <a:avLst/>
-          </a:prstGeom>
-          <a:solidFill>
-            <a:srgbClr val="0B2B52"/>
-          </a:solidFill>
-          <a:ln>
-            <a:noFill/>
-          </a:ln>
-        </p:spPr>
-        <p:style>
-          <a:lnRef idx="1">
-            <a:schemeClr val="accent1"/>
-          </a:lnRef>
-          <a:fillRef idx="3">
-            <a:schemeClr val="accent1"/>
-          </a:fillRef>
-          <a:effectRef idx="2">
-            <a:schemeClr val="accent1"/>
-          </a:effectRef>
-          <a:fontRef idx="minor">
-            <a:schemeClr val="lt1"/>
-          </a:fontRef>
-        </p:style>
-        <p:txBody>
-          <a:bodyPr rtlCol="0" anchor="ctr"/>
-          <a:lstStyle/>
-          <a:p>
-            <a:pPr algn="ctr"/>
-          </a:p>
-        </p:txBody>
-      </p:sp>
-      <p:sp>
-        <p:nvSpPr>
-          <p:cNvPr id="3" name="Rectangle 2"/>
-          <p:cNvSpPr/>
-          <p:nvPr/>
-        </p:nvSpPr>
-        <p:spPr>
-          <a:xfrm>
-            <a:off x="0" y="914400"/>
-            <a:ext cx="12188952" cy="54864"/>
-          </a:xfrm>
-          <a:prstGeom prst="rect">
-            <a:avLst/>
-          </a:prstGeom>
-          <a:solidFill>
-            <a:srgbClr val="1E6FB8"/>
-          </a:solidFill>
-          <a:ln>
-            <a:noFill/>
-          </a:ln>
-        </p:spPr>
-        <p:style>
-          <a:lnRef idx="1">
-            <a:schemeClr val="accent1"/>
-          </a:lnRef>
-          <a:fillRef idx="3">
-            <a:schemeClr val="accent1"/>
-          </a:fillRef>
-          <a:effectRef idx="2">
-            <a:schemeClr val="accent1"/>
-          </a:effectRef>
-          <a:fontRef idx="minor">
-            <a:schemeClr val="lt1"/>
-          </a:fontRef>
-        </p:style>
-        <p:txBody>
-          <a:bodyPr rtlCol="0" anchor="ctr"/>
-          <a:lstStyle/>
-          <a:p>
-            <a:pPr algn="ctr"/>
-          </a:p>
-        </p:txBody>
-      </p:sp>
-      <p:sp>
-        <p:nvSpPr>
-          <p:cNvPr id="4" name="TextBox 3"/>
-          <p:cNvSpPr txBox="1"/>
-          <p:nvPr/>
-        </p:nvSpPr>
-        <p:spPr>
-          <a:xfrm>
-            <a:off x="502920" y="109728"/>
-            <a:ext cx="11155680" cy="777240"/>
-          </a:xfrm>
-          <a:prstGeom prst="rect">
-            <a:avLst/>
-          </a:prstGeom>
-          <a:noFill/>
-        </p:spPr>
-        <p:txBody>
-          <a:bodyPr wrap="square">
-            <a:spAutoFit/>
-          </a:bodyPr>
-          <a:lstStyle/>
-          <a:p>
-            <a:pPr>
-              <a:spcAft>
-                <a:spcPts val="600"/>
-              </a:spcAft>
-            </a:pPr>
-            <a:r>
-              <a:rPr sz="2600" b="1">
-                <a:solidFill>
-                  <a:srgbClr val="FFFFFF"/>
-                </a:solidFill>
-              </a:rPr>
-              <a:t>Delivered — the Findings as Behaviour, Not a Caveat</a:t>
-            </a:r>
-          </a:p>
-        </p:txBody>
-      </p:sp>
-      <p:sp>
-        <p:nvSpPr>
-          <p:cNvPr id="5" name="TextBox 4"/>
-          <p:cNvSpPr txBox="1"/>
-          <p:nvPr/>
-        </p:nvSpPr>
-        <p:spPr>
-          <a:xfrm>
-            <a:off x="502920" y="6473952"/>
-            <a:ext cx="8229600" cy="274320"/>
-          </a:xfrm>
-          <a:prstGeom prst="rect">
-            <a:avLst/>
-          </a:prstGeom>
-          <a:noFill/>
-        </p:spPr>
-        <p:txBody>
-          <a:bodyPr wrap="square">
-            <a:spAutoFit/>
-          </a:bodyPr>
-          <a:lstStyle/>
-          <a:p>
-            <a:pPr>
-              <a:spcAft>
-                <a:spcPts val="600"/>
-              </a:spcAft>
-            </a:pPr>
-            <a:r>
-              <a:rPr sz="900" b="0">
-                <a:solidFill>
-                  <a:srgbClr val="555555"/>
-                </a:solidFill>
-              </a:rPr>
-              <a:t>Boltz-Fast · Final Dissertation Report · Akik Jana (2024AB05287)</a:t>
-            </a:r>
-          </a:p>
-        </p:txBody>
-      </p:sp>
-      <p:sp>
-        <p:nvSpPr>
-          <p:cNvPr id="6" name="TextBox 5"/>
-          <p:cNvSpPr txBox="1"/>
-          <p:nvPr/>
-        </p:nvSpPr>
-        <p:spPr>
-          <a:xfrm>
-            <a:off x="11183112" y="6473952"/>
-            <a:ext cx="640080" cy="274320"/>
-          </a:xfrm>
-          <a:prstGeom prst="rect">
-            <a:avLst/>
-          </a:prstGeom>
-          <a:noFill/>
-        </p:spPr>
-        <p:txBody>
-          <a:bodyPr wrap="square">
-            <a:spAutoFit/>
-          </a:bodyPr>
-          <a:lstStyle/>
-          <a:p>
-            <a:pPr>
-              <a:spcAft>
-                <a:spcPts val="600"/>
-              </a:spcAft>
-            </a:pPr>
-            <a:r>
-              <a:rPr sz="1000" b="0">
-                <a:solidFill>
-                  <a:srgbClr val="0B2B52"/>
-                </a:solidFill>
-              </a:rPr>
-              <a:t>31</a:t>
-            </a:r>
-          </a:p>
-        </p:txBody>
-      </p:sp>
-      <p:sp>
-        <p:nvSpPr>
-          <p:cNvPr id="7" name="TextBox 6"/>
-          <p:cNvSpPr txBox="1"/>
-          <p:nvPr/>
-        </p:nvSpPr>
-        <p:spPr>
-          <a:xfrm>
-            <a:off x="548640" y="1078992"/>
-            <a:ext cx="11155680" cy="640080"/>
-          </a:xfrm>
-          <a:prstGeom prst="rect">
-            <a:avLst/>
-          </a:prstGeom>
-          <a:noFill/>
-        </p:spPr>
-        <p:txBody>
-          <a:bodyPr wrap="square">
-            <a:spAutoFit/>
-          </a:bodyPr>
-          <a:lstStyle/>
-          <a:p>
-            <a:pPr>
-              <a:spcAft>
-                <a:spcPts val="600"/>
-              </a:spcAft>
-            </a:pPr>
-            <a:r>
-              <a:rPr sz="1500" b="0">
-                <a:solidFill>
-                  <a:srgbClr val="0B2B52"/>
-                </a:solidFill>
-              </a:rPr>
-              <a:t>A local screening tool: paste a target and candidate peptides, get a ranking. Nothing is uploaded.</a:t>
-            </a:r>
-          </a:p>
-        </p:txBody>
-      </p:sp>
-      <p:sp>
-        <p:nvSpPr>
-          <p:cNvPr id="8" name="Rounded Rectangle 7"/>
-          <p:cNvSpPr/>
-          <p:nvPr/>
-        </p:nvSpPr>
-        <p:spPr>
-          <a:xfrm>
-            <a:off x="548640" y="1737360"/>
-            <a:ext cx="3520440" cy="1463040"/>
-          </a:xfrm>
-          <a:prstGeom prst="roundRect">
-            <a:avLst/>
-          </a:prstGeom>
-          <a:solidFill>
-            <a:srgbClr val="1E6FB8"/>
-          </a:solidFill>
-          <a:ln>
-            <a:noFill/>
-          </a:ln>
-        </p:spPr>
-        <p:style>
-          <a:lnRef idx="1">
-            <a:schemeClr val="accent1"/>
-          </a:lnRef>
-          <a:fillRef idx="3">
-            <a:schemeClr val="accent1"/>
-          </a:fillRef>
-          <a:effectRef idx="2">
-            <a:schemeClr val="accent1"/>
-          </a:effectRef>
-          <a:fontRef idx="minor">
-            <a:schemeClr val="lt1"/>
-          </a:fontRef>
-        </p:style>
-        <p:txBody>
-          <a:bodyPr rtlCol="0" anchor="ctr" wrap="square"/>
-          <a:lstStyle/>
-          <a:p>
-            <a:pPr algn="ctr"/>
-            <a:r>
-              <a:rPr sz="2300" b="1">
-                <a:solidFill>
-                  <a:srgbClr val="FFFFFF"/>
-                </a:solidFill>
-              </a:rPr>
-              <a:t>every candidate</a:t>
-            </a:r>
-          </a:p>
-          <a:p>
-            <a:pPr algn="ctr"/>
-            <a:r>
-              <a:rPr sz="1050">
-                <a:solidFill>
-                  <a:srgbClr val="FFFFFF"/>
-                </a:solidFill>
-              </a:rPr>
-              <a:t>folded against permutations of itself</a:t>
-            </a:r>
-          </a:p>
-        </p:txBody>
-      </p:sp>
-      <p:sp>
-        <p:nvSpPr>
-          <p:cNvPr id="9" name="Rounded Rectangle 8"/>
-          <p:cNvSpPr/>
-          <p:nvPr/>
-        </p:nvSpPr>
-        <p:spPr>
-          <a:xfrm>
-            <a:off x="4343400" y="1737360"/>
-            <a:ext cx="3520440" cy="1463040"/>
-          </a:xfrm>
-          <a:prstGeom prst="roundRect">
-            <a:avLst/>
-          </a:prstGeom>
-          <a:solidFill>
-            <a:srgbClr val="0E8F9A"/>
-          </a:solidFill>
-          <a:ln>
-            <a:noFill/>
-          </a:ln>
-        </p:spPr>
-        <p:style>
-          <a:lnRef idx="1">
-            <a:schemeClr val="accent1"/>
-          </a:lnRef>
-          <a:fillRef idx="3">
-            <a:schemeClr val="accent1"/>
-          </a:fillRef>
-          <a:effectRef idx="2">
-            <a:schemeClr val="accent1"/>
-          </a:effectRef>
-          <a:fontRef idx="minor">
-            <a:schemeClr val="lt1"/>
-          </a:fontRef>
-        </p:style>
-        <p:txBody>
-          <a:bodyPr rtlCol="0" anchor="ctr" wrap="square"/>
-          <a:lstStyle/>
-          <a:p>
-            <a:pPr algn="ctr"/>
-            <a:r>
-              <a:rPr sz="2300" b="1">
-                <a:solidFill>
-                  <a:srgbClr val="FFFFFF"/>
-                </a:solidFill>
-              </a:rPr>
-              <a:t>45 s + 9 s/fold</a:t>
-            </a:r>
-          </a:p>
-          <a:p>
-            <a:pPr algn="ctr"/>
-            <a:r>
-              <a:rPr sz="1050">
-                <a:solidFill>
-                  <a:srgbClr val="FFFFFF"/>
-                </a:solidFill>
-              </a:rPr>
-              <a:t>model construction is paid once per job</a:t>
-            </a:r>
-          </a:p>
-        </p:txBody>
-      </p:sp>
-      <p:sp>
-        <p:nvSpPr>
-          <p:cNvPr id="10" name="Rounded Rectangle 9"/>
-          <p:cNvSpPr/>
-          <p:nvPr/>
-        </p:nvSpPr>
-        <p:spPr>
-          <a:xfrm>
-            <a:off x="8138160" y="1737360"/>
-            <a:ext cx="3566160" cy="1463040"/>
-          </a:xfrm>
-          <a:prstGeom prst="roundRect">
-            <a:avLst/>
-          </a:prstGeom>
-          <a:solidFill>
-            <a:srgbClr val="2E7D32"/>
-          </a:solidFill>
-          <a:ln>
-            <a:noFill/>
-          </a:ln>
-        </p:spPr>
-        <p:style>
-          <a:lnRef idx="1">
-            <a:schemeClr val="accent1"/>
-          </a:lnRef>
-          <a:fillRef idx="3">
-            <a:schemeClr val="accent1"/>
-          </a:fillRef>
-          <a:effectRef idx="2">
-            <a:schemeClr val="accent1"/>
-          </a:effectRef>
-          <a:fontRef idx="minor">
-            <a:schemeClr val="lt1"/>
-          </a:fontRef>
-        </p:style>
-        <p:txBody>
-          <a:bodyPr rtlCol="0" anchor="ctr" wrap="square"/>
-          <a:lstStyle/>
-          <a:p>
-            <a:pPr algn="ctr"/>
-            <a:r>
-              <a:rPr sz="2300" b="1">
-                <a:solidFill>
-                  <a:srgbClr val="FFFFFF"/>
-                </a:solidFill>
-              </a:rPr>
-              <a:t>≈ 2 s</a:t>
-            </a:r>
-          </a:p>
-          <a:p>
-            <a:pPr algn="ctr"/>
-            <a:r>
-              <a:rPr sz="1050">
-                <a:solidFill>
-                  <a:srgbClr val="FFFFFF"/>
-                </a:solidFill>
-              </a:rPr>
-              <a:t>to re-screen — folds are cached</a:t>
-            </a:r>
-          </a:p>
-        </p:txBody>
-      </p:sp>
-      <p:sp>
-        <p:nvSpPr>
-          <p:cNvPr id="11" name="TextBox 10"/>
-          <p:cNvSpPr txBox="1"/>
-          <p:nvPr/>
-        </p:nvSpPr>
-        <p:spPr>
-          <a:xfrm>
-            <a:off x="548640" y="3246120"/>
-            <a:ext cx="11155680" cy="731520"/>
-          </a:xfrm>
-          <a:prstGeom prst="rect">
-            <a:avLst/>
-          </a:prstGeom>
-          <a:noFill/>
-        </p:spPr>
-        <p:txBody>
-          <a:bodyPr wrap="square">
-            <a:spAutoFit/>
-          </a:bodyPr>
-          <a:lstStyle/>
-          <a:p>
-            <a:r>
-              <a:rPr sz="1450" b="1">
-                <a:solidFill>
-                  <a:srgbClr val="0B2B52"/>
-                </a:solidFill>
-              </a:rPr>
-              <a:t>Section 7.4 — a score can be blind to sequence order</a:t>
-            </a:r>
-          </a:p>
-          <a:p>
-            <a:r>
-              <a:rPr sz="1250">
-                <a:solidFill>
-                  <a:srgbClr val="1E6FB8"/>
-                </a:solidFill>
-              </a:rPr>
-              <a:t>so a candidate is reported as a t against its own permutations, never as a raw score; one that cannot beat its own scrambles is not a hit</a:t>
-            </a:r>
-          </a:p>
-        </p:txBody>
-      </p:sp>
-      <p:sp>
-        <p:nvSpPr>
-          <p:cNvPr id="12" name="TextBox 11"/>
-          <p:cNvSpPr txBox="1"/>
-          <p:nvPr/>
-        </p:nvSpPr>
-        <p:spPr>
-          <a:xfrm>
-            <a:off x="548640" y="3995928"/>
-            <a:ext cx="11155680" cy="731520"/>
-          </a:xfrm>
-          <a:prstGeom prst="rect">
-            <a:avLst/>
-          </a:prstGeom>
-          <a:noFill/>
-        </p:spPr>
-        <p:txBody>
-          <a:bodyPr wrap="square">
-            <a:spAutoFit/>
-          </a:bodyPr>
-          <a:lstStyle/>
-          <a:p>
-            <a:r>
-              <a:rPr sz="1450" b="1">
-                <a:solidFill>
-                  <a:srgbClr val="0B2B52"/>
-                </a:solidFill>
-              </a:rPr>
-              <a:t>Section 7.13 — reduced settings suppress the effect 3–7×</a:t>
-            </a:r>
-          </a:p>
-          <a:p>
-            <a:r>
-              <a:rPr sz="1250">
-                <a:solidFill>
-                  <a:srgbClr val="1E6FB8"/>
-                </a:solidFill>
-              </a:rPr>
-              <a:t>so quick mode is offered, and says in the interface what it costs: ~14% of backbone bonds physically plausible at ten steps</a:t>
-            </a:r>
-          </a:p>
-        </p:txBody>
-      </p:sp>
-      <p:sp>
-        <p:nvSpPr>
-          <p:cNvPr id="13" name="TextBox 12"/>
-          <p:cNvSpPr txBox="1"/>
-          <p:nvPr/>
-        </p:nvSpPr>
-        <p:spPr>
-          <a:xfrm>
-            <a:off x="548640" y="4745736"/>
-            <a:ext cx="11155680" cy="731520"/>
-          </a:xfrm>
-          <a:prstGeom prst="rect">
-            <a:avLst/>
-          </a:prstGeom>
-          <a:noFill/>
-        </p:spPr>
-        <p:txBody>
-          <a:bodyPr wrap="square">
-            <a:spAutoFit/>
-          </a:bodyPr>
-          <a:lstStyle/>
-          <a:p>
-            <a:r>
-              <a:rPr sz="1450" b="1">
-                <a:solidFill>
-                  <a:srgbClr val="0B2B52"/>
-                </a:solidFill>
-              </a:rPr>
-              <a:t>Section 7.5 — a single fold is not a measurement</a:t>
-            </a:r>
-          </a:p>
-          <a:p>
-            <a:r>
-              <a:rPr sz="1250">
-                <a:solidFill>
-                  <a:srgbClr val="1E6FB8"/>
-                </a:solidFill>
-              </a:rPr>
-              <a:t>so replicates are a control, and the replicate spread is a column in the table rather than a footnote</a:t>
-            </a:r>
-          </a:p>
-        </p:txBody>
-      </p:sp>
-      <p:sp>
-        <p:nvSpPr>
-          <p:cNvPr id="14" name="Rounded Rectangle 13"/>
-          <p:cNvSpPr/>
-          <p:nvPr/>
-        </p:nvSpPr>
-        <p:spPr>
-          <a:xfrm>
-            <a:off x="548640" y="5504688"/>
-            <a:ext cx="11155680" cy="868680"/>
-          </a:xfrm>
-          <a:prstGeom prst="roundRect">
-            <a:avLst/>
-          </a:prstGeom>
-          <a:solidFill>
-            <a:srgbClr val="FDF3E0"/>
-          </a:solidFill>
-          <a:ln>
-            <a:noFill/>
-          </a:ln>
-        </p:spPr>
-        <p:style>
-          <a:lnRef idx="1">
-            <a:schemeClr val="accent1"/>
-          </a:lnRef>
-          <a:fillRef idx="3">
-            <a:schemeClr val="accent1"/>
-          </a:fillRef>
-          <a:effectRef idx="2">
-            <a:schemeClr val="accent1"/>
-          </a:effectRef>
-          <a:fontRef idx="minor">
-            <a:schemeClr val="lt1"/>
-          </a:fontRef>
-        </p:style>
-        <p:txBody>
-          <a:bodyPr rtlCol="0" anchor="ctr" wrap="square"/>
-          <a:lstStyle/>
-          <a:p>
-            <a:pPr algn="ctr">
-              <a:spcAft>
-                <a:spcPts val="600"/>
-              </a:spcAft>
-            </a:pPr>
-            <a:r>
-              <a:rPr sz="1250" b="0">
-                <a:solidFill>
-                  <a:srgbClr val="8A5200"/>
-                </a:solidFill>
-              </a:rPr>
-              <a:t>Candidates that cannot be scored honestly are refused, not scored badly. Building it caught two faults that would have misled a user: a two-permutation null SD reported z = +77, and a fixed cutoff on that ratio called a Gly–Ser linker a hit.</a:t>
-            </a:r>
-          </a:p>
-        </p:txBody>
-      </p:sp>
-    </p:spTree>
-  </p:cSld>
-  <p:clrMapOvr>
-    <a:masterClrMapping/>
-  </p:clrMapOvr>
-</p:sld>
-</file>
-
-<file path=ppt/slides/slide34.xml><?xml version="1.0" encoding="utf-8"?>
 <p:sld xmlns:a="http://schemas.openxmlformats.org/drawingml/2006/main" xmlns:p="http://schemas.openxmlformats.org/presentationml/2006/main" xmlns:r="http://schemas.openxmlformats.org/officeDocument/2006/relationships">
   <p:cSld>
     <p:spTree>
@@ -18745,6 +17620,3175 @@
                 </a:solidFill>
               </a:rPr>
               <a:t>Shown with its failure: on c-Crk SH3 the cognate does not separate from its own scrambles (p = 0.40), and full sampling does not rescue it. A control that destroys only order has little to detect on a composition-driven interface.</a:t>
+            </a:r>
+          </a:p>
+        </p:txBody>
+      </p:sp>
+    </p:spTree>
+  </p:cSld>
+  <p:clrMapOvr>
+    <a:masterClrMapping/>
+  </p:clrMapOvr>
+</p:sld>
+</file>
+
+<file path=ppt/slides/slide33.xml><?xml version="1.0" encoding="utf-8"?>
+<p:sld xmlns:a="http://schemas.openxmlformats.org/drawingml/2006/main" xmlns:p="http://schemas.openxmlformats.org/presentationml/2006/main" xmlns:r="http://schemas.openxmlformats.org/officeDocument/2006/relationships">
+  <p:cSld>
+    <p:spTree>
+      <p:nvGrpSpPr>
+        <p:cNvPr id="1" name=""/>
+        <p:cNvGrpSpPr/>
+        <p:nvPr/>
+      </p:nvGrpSpPr>
+      <p:grpSpPr/>
+      <p:sp>
+        <p:nvSpPr>
+          <p:cNvPr id="2" name="Rectangle 1"/>
+          <p:cNvSpPr/>
+          <p:nvPr/>
+        </p:nvSpPr>
+        <p:spPr>
+          <a:xfrm>
+            <a:off x="0" y="0"/>
+            <a:ext cx="12191695" cy="914400"/>
+          </a:xfrm>
+          <a:prstGeom prst="rect">
+            <a:avLst/>
+          </a:prstGeom>
+          <a:solidFill>
+            <a:srgbClr val="0B2B52"/>
+          </a:solidFill>
+          <a:ln>
+            <a:noFill/>
+          </a:ln>
+          <a:effectLst/>
+        </p:spPr>
+        <p:style>
+          <a:lnRef idx="1">
+            <a:schemeClr val="accent1"/>
+          </a:lnRef>
+          <a:fillRef idx="3">
+            <a:schemeClr val="accent1"/>
+          </a:fillRef>
+          <a:effectRef idx="2">
+            <a:schemeClr val="accent1"/>
+          </a:effectRef>
+          <a:fontRef idx="minor">
+            <a:schemeClr val="lt1"/>
+          </a:fontRef>
+        </p:style>
+        <p:txBody>
+          <a:bodyPr rtlCol="0" anchor="ctr"/>
+          <a:lstStyle/>
+          <a:p>
+            <a:pPr algn="ctr"/>
+          </a:p>
+        </p:txBody>
+      </p:sp>
+      <p:sp>
+        <p:nvSpPr>
+          <p:cNvPr id="3" name="Rectangle 2"/>
+          <p:cNvSpPr/>
+          <p:nvPr/>
+        </p:nvSpPr>
+        <p:spPr>
+          <a:xfrm>
+            <a:off x="0" y="914400"/>
+            <a:ext cx="12191695" cy="54864"/>
+          </a:xfrm>
+          <a:prstGeom prst="rect">
+            <a:avLst/>
+          </a:prstGeom>
+          <a:solidFill>
+            <a:srgbClr val="1E6FB8"/>
+          </a:solidFill>
+          <a:ln>
+            <a:noFill/>
+          </a:ln>
+          <a:effectLst/>
+        </p:spPr>
+        <p:style>
+          <a:lnRef idx="1">
+            <a:schemeClr val="accent1"/>
+          </a:lnRef>
+          <a:fillRef idx="3">
+            <a:schemeClr val="accent1"/>
+          </a:fillRef>
+          <a:effectRef idx="2">
+            <a:schemeClr val="accent1"/>
+          </a:effectRef>
+          <a:fontRef idx="minor">
+            <a:schemeClr val="lt1"/>
+          </a:fontRef>
+        </p:style>
+        <p:txBody>
+          <a:bodyPr rtlCol="0" anchor="ctr"/>
+          <a:lstStyle/>
+          <a:p>
+            <a:pPr algn="ctr"/>
+          </a:p>
+        </p:txBody>
+      </p:sp>
+      <p:sp>
+        <p:nvSpPr>
+          <p:cNvPr id="4" name="TextBox 3"/>
+          <p:cNvSpPr txBox="1"/>
+          <p:nvPr/>
+        </p:nvSpPr>
+        <p:spPr>
+          <a:xfrm>
+            <a:off x="502920" y="109728"/>
+            <a:ext cx="11155680" cy="777240"/>
+          </a:xfrm>
+          <a:prstGeom prst="rect">
+            <a:avLst/>
+          </a:prstGeom>
+          <a:noFill/>
+        </p:spPr>
+        <p:txBody>
+          <a:bodyPr wrap="square">
+            <a:spAutoFit/>
+          </a:bodyPr>
+          <a:lstStyle/>
+          <a:p>
+            <a:pPr>
+              <a:spcBef>
+                <a:spcPts val="0"/>
+              </a:spcBef>
+              <a:spcAft>
+                <a:spcPts val="400"/>
+              </a:spcAft>
+            </a:pPr>
+            <a:r>
+              <a:rPr sz="2600" b="1" i="0">
+                <a:solidFill>
+                  <a:srgbClr val="FFFFFF"/>
+                </a:solidFill>
+              </a:rPr>
+              <a:t>Future Plan</a:t>
+            </a:r>
+          </a:p>
+        </p:txBody>
+      </p:sp>
+      <p:sp>
+        <p:nvSpPr>
+          <p:cNvPr id="5" name="TextBox 4"/>
+          <p:cNvSpPr txBox="1"/>
+          <p:nvPr/>
+        </p:nvSpPr>
+        <p:spPr>
+          <a:xfrm>
+            <a:off x="502920" y="6473952"/>
+            <a:ext cx="8229600" cy="274320"/>
+          </a:xfrm>
+          <a:prstGeom prst="rect">
+            <a:avLst/>
+          </a:prstGeom>
+          <a:noFill/>
+        </p:spPr>
+        <p:txBody>
+          <a:bodyPr wrap="square">
+            <a:spAutoFit/>
+          </a:bodyPr>
+          <a:lstStyle/>
+          <a:p>
+            <a:pPr>
+              <a:spcBef>
+                <a:spcPts val="0"/>
+              </a:spcBef>
+              <a:spcAft>
+                <a:spcPts val="600"/>
+              </a:spcAft>
+            </a:pPr>
+            <a:r>
+              <a:rPr sz="900" b="0">
+                <a:solidFill>
+                  <a:srgbClr val="555555"/>
+                </a:solidFill>
+              </a:rPr>
+              <a:t>Boltz-Fast · Final Dissertation Report · Akik Jana (2024AB05287)</a:t>
+            </a:r>
+          </a:p>
+        </p:txBody>
+      </p:sp>
+      <p:sp>
+        <p:nvSpPr>
+          <p:cNvPr id="6" name="TextBox 5"/>
+          <p:cNvSpPr txBox="1"/>
+          <p:nvPr/>
+        </p:nvSpPr>
+        <p:spPr>
+          <a:xfrm>
+            <a:off x="11185855" y="6473952"/>
+            <a:ext cx="640080" cy="274320"/>
+          </a:xfrm>
+          <a:prstGeom prst="rect">
+            <a:avLst/>
+          </a:prstGeom>
+          <a:noFill/>
+        </p:spPr>
+        <p:txBody>
+          <a:bodyPr wrap="square">
+            <a:spAutoFit/>
+          </a:bodyPr>
+          <a:lstStyle/>
+          <a:p>
+            <a:pPr algn="r">
+              <a:spcBef>
+                <a:spcPts val="0"/>
+              </a:spcBef>
+              <a:spcAft>
+                <a:spcPts val="600"/>
+              </a:spcAft>
+            </a:pPr>
+            <a:r>
+              <a:rPr sz="1000" b="0">
+                <a:solidFill>
+                  <a:srgbClr val="0B2B52"/>
+                </a:solidFill>
+              </a:rPr>
+              <a:t>36</a:t>
+            </a:r>
+          </a:p>
+        </p:txBody>
+      </p:sp>
+      <p:sp>
+        <p:nvSpPr>
+          <p:cNvPr id="7" name="Oval 6"/>
+          <p:cNvSpPr/>
+          <p:nvPr/>
+        </p:nvSpPr>
+        <p:spPr>
+          <a:xfrm>
+            <a:off x="548640" y="1325880"/>
+            <a:ext cx="566928" cy="566928"/>
+          </a:xfrm>
+          <a:prstGeom prst="ellipse">
+            <a:avLst/>
+          </a:prstGeom>
+          <a:solidFill>
+            <a:srgbClr val="1E6FB8"/>
+          </a:solidFill>
+          <a:ln>
+            <a:noFill/>
+          </a:ln>
+          <a:effectLst/>
+        </p:spPr>
+        <p:style>
+          <a:lnRef idx="1">
+            <a:schemeClr val="accent1"/>
+          </a:lnRef>
+          <a:fillRef idx="3">
+            <a:schemeClr val="accent1"/>
+          </a:fillRef>
+          <a:effectRef idx="2">
+            <a:schemeClr val="accent1"/>
+          </a:effectRef>
+          <a:fontRef idx="minor">
+            <a:schemeClr val="lt1"/>
+          </a:fontRef>
+        </p:style>
+        <p:txBody>
+          <a:bodyPr rtlCol="0" anchor="ctr" wrap="square"/>
+          <a:lstStyle/>
+          <a:p>
+            <a:pPr algn="ctr">
+              <a:spcBef>
+                <a:spcPts val="0"/>
+              </a:spcBef>
+              <a:spcAft>
+                <a:spcPts val="400"/>
+              </a:spcAft>
+            </a:pPr>
+            <a:r>
+              <a:rPr sz="1800" b="1" i="0">
+                <a:solidFill>
+                  <a:srgbClr val="FFFFFF"/>
+                </a:solidFill>
+              </a:rPr>
+              <a:t>1</a:t>
+            </a:r>
+          </a:p>
+        </p:txBody>
+      </p:sp>
+      <p:sp>
+        <p:nvSpPr>
+          <p:cNvPr id="8" name="TextBox 7"/>
+          <p:cNvSpPr txBox="1"/>
+          <p:nvPr/>
+        </p:nvSpPr>
+        <p:spPr>
+          <a:xfrm>
+            <a:off x="1325880" y="1307592"/>
+            <a:ext cx="10332720" cy="868680"/>
+          </a:xfrm>
+          <a:prstGeom prst="rect">
+            <a:avLst/>
+          </a:prstGeom>
+          <a:noFill/>
+        </p:spPr>
+        <p:txBody>
+          <a:bodyPr wrap="square">
+            <a:spAutoFit/>
+          </a:bodyPr>
+          <a:lstStyle/>
+          <a:p>
+            <a:pPr>
+              <a:spcBef>
+                <a:spcPts val="0"/>
+              </a:spcBef>
+              <a:spcAft>
+                <a:spcPts val="600"/>
+              </a:spcAft>
+            </a:pPr>
+            <a:r>
+              <a:rPr sz="1300" b="0">
+                <a:solidFill>
+                  <a:srgbClr val="0B2B52"/>
+                </a:solidFill>
+              </a:rPr>
+              <a:t>DONE — profiled; and measured what the optimisations actually deliver on pretrained weights (slides 11–18).</a:t>
+            </a:r>
+          </a:p>
+        </p:txBody>
+      </p:sp>
+      <p:sp>
+        <p:nvSpPr>
+          <p:cNvPr id="9" name="Oval 8"/>
+          <p:cNvSpPr/>
+          <p:nvPr/>
+        </p:nvSpPr>
+        <p:spPr>
+          <a:xfrm>
+            <a:off x="548640" y="2304288"/>
+            <a:ext cx="566928" cy="566928"/>
+          </a:xfrm>
+          <a:prstGeom prst="ellipse">
+            <a:avLst/>
+          </a:prstGeom>
+          <a:solidFill>
+            <a:srgbClr val="0E8F9A"/>
+          </a:solidFill>
+          <a:ln>
+            <a:noFill/>
+          </a:ln>
+          <a:effectLst/>
+        </p:spPr>
+        <p:style>
+          <a:lnRef idx="1">
+            <a:schemeClr val="accent1"/>
+          </a:lnRef>
+          <a:fillRef idx="3">
+            <a:schemeClr val="accent1"/>
+          </a:fillRef>
+          <a:effectRef idx="2">
+            <a:schemeClr val="accent1"/>
+          </a:effectRef>
+          <a:fontRef idx="minor">
+            <a:schemeClr val="lt1"/>
+          </a:fontRef>
+        </p:style>
+        <p:txBody>
+          <a:bodyPr rtlCol="0" anchor="ctr" wrap="square"/>
+          <a:lstStyle/>
+          <a:p>
+            <a:pPr algn="ctr">
+              <a:spcBef>
+                <a:spcPts val="0"/>
+              </a:spcBef>
+              <a:spcAft>
+                <a:spcPts val="400"/>
+              </a:spcAft>
+            </a:pPr>
+            <a:r>
+              <a:rPr sz="1800" b="1" i="0">
+                <a:solidFill>
+                  <a:srgbClr val="FFFFFF"/>
+                </a:solidFill>
+              </a:rPr>
+              <a:t>2</a:t>
+            </a:r>
+          </a:p>
+        </p:txBody>
+      </p:sp>
+      <p:sp>
+        <p:nvSpPr>
+          <p:cNvPr id="10" name="TextBox 9"/>
+          <p:cNvSpPr txBox="1"/>
+          <p:nvPr/>
+        </p:nvSpPr>
+        <p:spPr>
+          <a:xfrm>
+            <a:off x="1325880" y="2286000"/>
+            <a:ext cx="10332720" cy="868680"/>
+          </a:xfrm>
+          <a:prstGeom prst="rect">
+            <a:avLst/>
+          </a:prstGeom>
+          <a:noFill/>
+        </p:spPr>
+        <p:txBody>
+          <a:bodyPr wrap="square">
+            <a:spAutoFit/>
+          </a:bodyPr>
+          <a:lstStyle/>
+          <a:p>
+            <a:pPr>
+              <a:spcBef>
+                <a:spcPts val="0"/>
+              </a:spcBef>
+              <a:spcAft>
+                <a:spcPts val="600"/>
+              </a:spcAft>
+            </a:pPr>
+            <a:r>
+              <a:rPr sz="1300" b="0">
+                <a:solidFill>
+                  <a:srgbClr val="0B2B52"/>
+                </a:solidFill>
+              </a:rPr>
+              <a:t>DONE — DeCAF-Boltz, distilled for 10 steps, folds the 132-complex panel in ~20 min locally and returns 96% physically plausible backbones against 14% for a stock model run short (slides 27-28).</a:t>
+            </a:r>
+          </a:p>
+        </p:txBody>
+      </p:sp>
+      <p:sp>
+        <p:nvSpPr>
+          <p:cNvPr id="11" name="Oval 10"/>
+          <p:cNvSpPr/>
+          <p:nvPr/>
+        </p:nvSpPr>
+        <p:spPr>
+          <a:xfrm>
+            <a:off x="548640" y="3282696"/>
+            <a:ext cx="566928" cy="566928"/>
+          </a:xfrm>
+          <a:prstGeom prst="ellipse">
+            <a:avLst/>
+          </a:prstGeom>
+          <a:solidFill>
+            <a:srgbClr val="2E7D32"/>
+          </a:solidFill>
+          <a:ln>
+            <a:noFill/>
+          </a:ln>
+          <a:effectLst/>
+        </p:spPr>
+        <p:style>
+          <a:lnRef idx="1">
+            <a:schemeClr val="accent1"/>
+          </a:lnRef>
+          <a:fillRef idx="3">
+            <a:schemeClr val="accent1"/>
+          </a:fillRef>
+          <a:effectRef idx="2">
+            <a:schemeClr val="accent1"/>
+          </a:effectRef>
+          <a:fontRef idx="minor">
+            <a:schemeClr val="lt1"/>
+          </a:fontRef>
+        </p:style>
+        <p:txBody>
+          <a:bodyPr rtlCol="0" anchor="ctr" wrap="square"/>
+          <a:lstStyle/>
+          <a:p>
+            <a:pPr algn="ctr">
+              <a:spcBef>
+                <a:spcPts val="0"/>
+              </a:spcBef>
+              <a:spcAft>
+                <a:spcPts val="400"/>
+              </a:spcAft>
+            </a:pPr>
+            <a:r>
+              <a:rPr sz="1800" b="1" i="0">
+                <a:solidFill>
+                  <a:srgbClr val="FFFFFF"/>
+                </a:solidFill>
+              </a:rPr>
+              <a:t>3</a:t>
+            </a:r>
+          </a:p>
+        </p:txBody>
+      </p:sp>
+      <p:sp>
+        <p:nvSpPr>
+          <p:cNvPr id="12" name="TextBox 11"/>
+          <p:cNvSpPr txBox="1"/>
+          <p:nvPr/>
+        </p:nvSpPr>
+        <p:spPr>
+          <a:xfrm>
+            <a:off x="1325880" y="3264408"/>
+            <a:ext cx="10332720" cy="868680"/>
+          </a:xfrm>
+          <a:prstGeom prst="rect">
+            <a:avLst/>
+          </a:prstGeom>
+          <a:noFill/>
+        </p:spPr>
+        <p:txBody>
+          <a:bodyPr wrap="square">
+            <a:spAutoFit/>
+          </a:bodyPr>
+          <a:lstStyle/>
+          <a:p>
+            <a:pPr>
+              <a:spcBef>
+                <a:spcPts val="0"/>
+              </a:spcBef>
+              <a:spcAft>
+                <a:spcPts val="600"/>
+              </a:spcAft>
+            </a:pPr>
+            <a:r>
+              <a:rPr sz="1300" b="0">
+                <a:solidFill>
+                  <a:srgbClr val="0B2B52"/>
+                </a:solidFill>
+              </a:rPr>
+              <a:t>DONE, NEGATIVE — the surrogate was distilled and evaluated: ipTM does not rank binders, so no surrogate distilled from it can either.</a:t>
+            </a:r>
+          </a:p>
+        </p:txBody>
+      </p:sp>
+      <p:sp>
+        <p:nvSpPr>
+          <p:cNvPr id="13" name="Oval 12"/>
+          <p:cNvSpPr/>
+          <p:nvPr/>
+        </p:nvSpPr>
+        <p:spPr>
+          <a:xfrm>
+            <a:off x="548640" y="4261104"/>
+            <a:ext cx="566928" cy="566928"/>
+          </a:xfrm>
+          <a:prstGeom prst="ellipse">
+            <a:avLst/>
+          </a:prstGeom>
+          <a:solidFill>
+            <a:srgbClr val="C77700"/>
+          </a:solidFill>
+          <a:ln>
+            <a:noFill/>
+          </a:ln>
+          <a:effectLst/>
+        </p:spPr>
+        <p:style>
+          <a:lnRef idx="1">
+            <a:schemeClr val="accent1"/>
+          </a:lnRef>
+          <a:fillRef idx="3">
+            <a:schemeClr val="accent1"/>
+          </a:fillRef>
+          <a:effectRef idx="2">
+            <a:schemeClr val="accent1"/>
+          </a:effectRef>
+          <a:fontRef idx="minor">
+            <a:schemeClr val="lt1"/>
+          </a:fontRef>
+        </p:style>
+        <p:txBody>
+          <a:bodyPr rtlCol="0" anchor="ctr" wrap="square"/>
+          <a:lstStyle/>
+          <a:p>
+            <a:pPr algn="ctr">
+              <a:spcBef>
+                <a:spcPts val="0"/>
+              </a:spcBef>
+              <a:spcAft>
+                <a:spcPts val="400"/>
+              </a:spcAft>
+            </a:pPr>
+            <a:r>
+              <a:rPr sz="1800" b="1" i="0">
+                <a:solidFill>
+                  <a:srgbClr val="FFFFFF"/>
+                </a:solidFill>
+              </a:rPr>
+              <a:t>4</a:t>
+            </a:r>
+          </a:p>
+        </p:txBody>
+      </p:sp>
+      <p:sp>
+        <p:nvSpPr>
+          <p:cNvPr id="14" name="TextBox 13"/>
+          <p:cNvSpPr txBox="1"/>
+          <p:nvPr/>
+        </p:nvSpPr>
+        <p:spPr>
+          <a:xfrm>
+            <a:off x="1325880" y="4242816"/>
+            <a:ext cx="10332720" cy="868680"/>
+          </a:xfrm>
+          <a:prstGeom prst="rect">
+            <a:avLst/>
+          </a:prstGeom>
+          <a:noFill/>
+        </p:spPr>
+        <p:txBody>
+          <a:bodyPr wrap="square">
+            <a:spAutoFit/>
+          </a:bodyPr>
+          <a:lstStyle/>
+          <a:p>
+            <a:pPr>
+              <a:spcBef>
+                <a:spcPts val="0"/>
+              </a:spcBef>
+              <a:spcAft>
+                <a:spcPts val="600"/>
+              </a:spcAft>
+            </a:pPr>
+            <a:r>
+              <a:rPr sz="1300" b="0">
+                <a:solidFill>
+                  <a:srgbClr val="0B2B52"/>
+                </a:solidFill>
+              </a:rPr>
+              <a:t>Use open Boltz-2 weights only — Boltz-2.1 is closed / API-only.</a:t>
+            </a:r>
+          </a:p>
+        </p:txBody>
+      </p:sp>
+      <p:sp>
+        <p:nvSpPr>
+          <p:cNvPr id="15" name="Oval 14"/>
+          <p:cNvSpPr/>
+          <p:nvPr/>
+        </p:nvSpPr>
+        <p:spPr>
+          <a:xfrm>
+            <a:off x="548640" y="5239512"/>
+            <a:ext cx="566928" cy="566928"/>
+          </a:xfrm>
+          <a:prstGeom prst="ellipse">
+            <a:avLst/>
+          </a:prstGeom>
+          <a:solidFill>
+            <a:srgbClr val="0B2B52"/>
+          </a:solidFill>
+          <a:ln>
+            <a:noFill/>
+          </a:ln>
+          <a:effectLst/>
+        </p:spPr>
+        <p:style>
+          <a:lnRef idx="1">
+            <a:schemeClr val="accent1"/>
+          </a:lnRef>
+          <a:fillRef idx="3">
+            <a:schemeClr val="accent1"/>
+          </a:fillRef>
+          <a:effectRef idx="2">
+            <a:schemeClr val="accent1"/>
+          </a:effectRef>
+          <a:fontRef idx="minor">
+            <a:schemeClr val="lt1"/>
+          </a:fontRef>
+        </p:style>
+        <p:txBody>
+          <a:bodyPr rtlCol="0" anchor="ctr" wrap="square"/>
+          <a:lstStyle/>
+          <a:p>
+            <a:pPr algn="ctr">
+              <a:spcBef>
+                <a:spcPts val="0"/>
+              </a:spcBef>
+              <a:spcAft>
+                <a:spcPts val="400"/>
+              </a:spcAft>
+            </a:pPr>
+            <a:r>
+              <a:rPr sz="1800" b="1" i="0">
+                <a:solidFill>
+                  <a:srgbClr val="FFFFFF"/>
+                </a:solidFill>
+              </a:rPr>
+              <a:t>5</a:t>
+            </a:r>
+          </a:p>
+        </p:txBody>
+      </p:sp>
+      <p:sp>
+        <p:nvSpPr>
+          <p:cNvPr id="16" name="TextBox 15"/>
+          <p:cNvSpPr txBox="1"/>
+          <p:nvPr/>
+        </p:nvSpPr>
+        <p:spPr>
+          <a:xfrm>
+            <a:off x="1325880" y="5221224"/>
+            <a:ext cx="10332720" cy="868680"/>
+          </a:xfrm>
+          <a:prstGeom prst="rect">
+            <a:avLst/>
+          </a:prstGeom>
+          <a:noFill/>
+        </p:spPr>
+        <p:txBody>
+          <a:bodyPr wrap="square">
+            <a:spAutoFit/>
+          </a:bodyPr>
+          <a:lstStyle/>
+          <a:p>
+            <a:pPr>
+              <a:spcBef>
+                <a:spcPts val="0"/>
+              </a:spcBef>
+              <a:spcAft>
+                <a:spcPts val="600"/>
+              </a:spcAft>
+            </a:pPr>
+            <a:r>
+              <a:rPr sz="1300" b="0">
+                <a:solidFill>
+                  <a:srgbClr val="0B2B52"/>
+                </a:solidFill>
+              </a:rPr>
+              <a:t>Production GPU scaling — NO LONGER a prerequisite. MPS (~3x) plus few-step distillation let the held-out panel be folded five times on this laptop, and the third draw overturned what the first two supported. Scaling is now for extending the panel past 22 receptors, which is the binding constraint on the open questions.</a:t>
+            </a:r>
+          </a:p>
+        </p:txBody>
+      </p:sp>
+    </p:spTree>
+  </p:cSld>
+  <p:clrMapOvr>
+    <a:masterClrMapping/>
+  </p:clrMapOvr>
+</p:sld>
+</file>
+
+<file path=ppt/slides/slide34.xml><?xml version="1.0" encoding="utf-8"?>
+<p:sld xmlns:a="http://schemas.openxmlformats.org/drawingml/2006/main" xmlns:p="http://schemas.openxmlformats.org/presentationml/2006/main" xmlns:r="http://schemas.openxmlformats.org/officeDocument/2006/relationships">
+  <p:cSld>
+    <p:spTree>
+      <p:nvGrpSpPr>
+        <p:cNvPr id="1" name=""/>
+        <p:cNvGrpSpPr/>
+        <p:nvPr/>
+      </p:nvGrpSpPr>
+      <p:grpSpPr/>
+      <p:sp>
+        <p:nvSpPr>
+          <p:cNvPr id="2" name="Rectangle 1"/>
+          <p:cNvSpPr/>
+          <p:nvPr/>
+        </p:nvSpPr>
+        <p:spPr>
+          <a:xfrm>
+            <a:off x="0" y="0"/>
+            <a:ext cx="12191695" cy="914400"/>
+          </a:xfrm>
+          <a:prstGeom prst="rect">
+            <a:avLst/>
+          </a:prstGeom>
+          <a:solidFill>
+            <a:srgbClr val="0B2B52"/>
+          </a:solidFill>
+          <a:ln>
+            <a:noFill/>
+          </a:ln>
+          <a:effectLst/>
+        </p:spPr>
+        <p:style>
+          <a:lnRef idx="1">
+            <a:schemeClr val="accent1"/>
+          </a:lnRef>
+          <a:fillRef idx="3">
+            <a:schemeClr val="accent1"/>
+          </a:fillRef>
+          <a:effectRef idx="2">
+            <a:schemeClr val="accent1"/>
+          </a:effectRef>
+          <a:fontRef idx="minor">
+            <a:schemeClr val="lt1"/>
+          </a:fontRef>
+        </p:style>
+        <p:txBody>
+          <a:bodyPr rtlCol="0" anchor="ctr"/>
+          <a:lstStyle/>
+          <a:p>
+            <a:pPr algn="ctr"/>
+          </a:p>
+        </p:txBody>
+      </p:sp>
+      <p:sp>
+        <p:nvSpPr>
+          <p:cNvPr id="3" name="Rectangle 2"/>
+          <p:cNvSpPr/>
+          <p:nvPr/>
+        </p:nvSpPr>
+        <p:spPr>
+          <a:xfrm>
+            <a:off x="0" y="914400"/>
+            <a:ext cx="12191695" cy="54864"/>
+          </a:xfrm>
+          <a:prstGeom prst="rect">
+            <a:avLst/>
+          </a:prstGeom>
+          <a:solidFill>
+            <a:srgbClr val="1E6FB8"/>
+          </a:solidFill>
+          <a:ln>
+            <a:noFill/>
+          </a:ln>
+          <a:effectLst/>
+        </p:spPr>
+        <p:style>
+          <a:lnRef idx="1">
+            <a:schemeClr val="accent1"/>
+          </a:lnRef>
+          <a:fillRef idx="3">
+            <a:schemeClr val="accent1"/>
+          </a:fillRef>
+          <a:effectRef idx="2">
+            <a:schemeClr val="accent1"/>
+          </a:effectRef>
+          <a:fontRef idx="minor">
+            <a:schemeClr val="lt1"/>
+          </a:fontRef>
+        </p:style>
+        <p:txBody>
+          <a:bodyPr rtlCol="0" anchor="ctr"/>
+          <a:lstStyle/>
+          <a:p>
+            <a:pPr algn="ctr"/>
+          </a:p>
+        </p:txBody>
+      </p:sp>
+      <p:sp>
+        <p:nvSpPr>
+          <p:cNvPr id="4" name="TextBox 3"/>
+          <p:cNvSpPr txBox="1"/>
+          <p:nvPr/>
+        </p:nvSpPr>
+        <p:spPr>
+          <a:xfrm>
+            <a:off x="502920" y="109728"/>
+            <a:ext cx="11155680" cy="777240"/>
+          </a:xfrm>
+          <a:prstGeom prst="rect">
+            <a:avLst/>
+          </a:prstGeom>
+          <a:noFill/>
+        </p:spPr>
+        <p:txBody>
+          <a:bodyPr wrap="square">
+            <a:spAutoFit/>
+          </a:bodyPr>
+          <a:lstStyle/>
+          <a:p>
+            <a:pPr>
+              <a:spcBef>
+                <a:spcPts val="0"/>
+              </a:spcBef>
+              <a:spcAft>
+                <a:spcPts val="400"/>
+              </a:spcAft>
+            </a:pPr>
+            <a:r>
+              <a:rPr sz="2600" b="1" i="0">
+                <a:solidFill>
+                  <a:srgbClr val="FFFFFF"/>
+                </a:solidFill>
+              </a:rPr>
+              <a:t>Summary</a:t>
+            </a:r>
+          </a:p>
+        </p:txBody>
+      </p:sp>
+      <p:sp>
+        <p:nvSpPr>
+          <p:cNvPr id="5" name="TextBox 4"/>
+          <p:cNvSpPr txBox="1"/>
+          <p:nvPr/>
+        </p:nvSpPr>
+        <p:spPr>
+          <a:xfrm>
+            <a:off x="502920" y="6473952"/>
+            <a:ext cx="8229600" cy="274320"/>
+          </a:xfrm>
+          <a:prstGeom prst="rect">
+            <a:avLst/>
+          </a:prstGeom>
+          <a:noFill/>
+        </p:spPr>
+        <p:txBody>
+          <a:bodyPr wrap="square">
+            <a:spAutoFit/>
+          </a:bodyPr>
+          <a:lstStyle/>
+          <a:p>
+            <a:pPr>
+              <a:spcBef>
+                <a:spcPts val="0"/>
+              </a:spcBef>
+              <a:spcAft>
+                <a:spcPts val="600"/>
+              </a:spcAft>
+            </a:pPr>
+            <a:r>
+              <a:rPr sz="900" b="0">
+                <a:solidFill>
+                  <a:srgbClr val="555555"/>
+                </a:solidFill>
+              </a:rPr>
+              <a:t>Boltz-Fast · Final Dissertation Report · Akik Jana (2024AB05287)</a:t>
+            </a:r>
+          </a:p>
+        </p:txBody>
+      </p:sp>
+      <p:sp>
+        <p:nvSpPr>
+          <p:cNvPr id="6" name="TextBox 5"/>
+          <p:cNvSpPr txBox="1"/>
+          <p:nvPr/>
+        </p:nvSpPr>
+        <p:spPr>
+          <a:xfrm>
+            <a:off x="11185855" y="6473952"/>
+            <a:ext cx="640080" cy="274320"/>
+          </a:xfrm>
+          <a:prstGeom prst="rect">
+            <a:avLst/>
+          </a:prstGeom>
+          <a:noFill/>
+        </p:spPr>
+        <p:txBody>
+          <a:bodyPr wrap="square">
+            <a:spAutoFit/>
+          </a:bodyPr>
+          <a:lstStyle/>
+          <a:p>
+            <a:pPr algn="r">
+              <a:spcBef>
+                <a:spcPts val="0"/>
+              </a:spcBef>
+              <a:spcAft>
+                <a:spcPts val="600"/>
+              </a:spcAft>
+            </a:pPr>
+            <a:r>
+              <a:rPr sz="1000" b="0">
+                <a:solidFill>
+                  <a:srgbClr val="0B2B52"/>
+                </a:solidFill>
+              </a:rPr>
+              <a:t>37</a:t>
+            </a:r>
+          </a:p>
+        </p:txBody>
+      </p:sp>
+      <p:sp>
+        <p:nvSpPr>
+          <p:cNvPr id="7" name="TextBox 6"/>
+          <p:cNvSpPr txBox="1"/>
+          <p:nvPr/>
+        </p:nvSpPr>
+        <p:spPr>
+          <a:xfrm>
+            <a:off x="548640" y="1280160"/>
+            <a:ext cx="11155680" cy="3383280"/>
+          </a:xfrm>
+          <a:prstGeom prst="rect">
+            <a:avLst/>
+          </a:prstGeom>
+          <a:noFill/>
+        </p:spPr>
+        <p:txBody>
+          <a:bodyPr wrap="square">
+            <a:spAutoFit/>
+          </a:bodyPr>
+          <a:lstStyle/>
+          <a:p>
+            <a:pPr>
+              <a:spcBef>
+                <a:spcPts val="0"/>
+              </a:spcBef>
+              <a:spcAft>
+                <a:spcPts val="600"/>
+              </a:spcAft>
+            </a:pPr>
+            <a:r>
+              <a:rPr sz="1400" b="0">
+                <a:solidFill>
+                  <a:srgbClr val="0B2B52"/>
+                </a:solidFill>
+              </a:rPr>
+              <a:t>•  Implemented and integrated memory, sampling and parallelism optimisations into the Boltz pipeline; device-agnostic on Apple Silicon.</a:t>
+            </a:r>
+          </a:p>
+          <a:p>
+            <a:pPr>
+              <a:spcAft>
+                <a:spcPts val="600"/>
+              </a:spcAft>
+            </a:pPr>
+            <a:r>
+              <a:rPr sz="1400" b="0">
+                <a:solidFill>
+                  <a:srgbClr val="0B2B52"/>
+                </a:solidFill>
+              </a:rPr>
+              <a:t>•  Moved from component microbenchmarks to end-to-end measurement against pretrained checkpoints and experimentally determined structures.</a:t>
+            </a:r>
+          </a:p>
+          <a:p>
+            <a:pPr>
+              <a:spcAft>
+                <a:spcPts val="600"/>
+              </a:spcAft>
+            </a:pPr>
+            <a:r>
+              <a:rPr sz="1400" b="0">
+                <a:solidFill>
+                  <a:srgbClr val="0B2B52"/>
+                </a:solidFill>
+              </a:rPr>
+              <a:t>•  Two questions closed with negative answers, both with mechanisms: the low-rank OPM is unreachable on released weights, and ipTM tracks peptide composition rather than binding.</a:t>
+            </a:r>
+          </a:p>
+          <a:p>
+            <a:pPr>
+              <a:spcAft>
+                <a:spcPts val="600"/>
+              </a:spcAft>
+            </a:pPr>
+            <a:r>
+              <a:rPr sz="1400" b="0">
+                <a:solidFill>
+                  <a:srgbClr val="0B2B52"/>
+                </a:solidFill>
+              </a:rPr>
+              <a:t>•  A third finding generalises beyond this project: a single unseeded fold does not reproduce its own ranking.</a:t>
+            </a:r>
+          </a:p>
+          <a:p>
+            <a:pPr>
+              <a:spcAft>
+                <a:spcPts val="600"/>
+              </a:spcAft>
+            </a:pPr>
+            <a:r>
+              <a:rPr sz="1400" b="0">
+                <a:solidFill>
+                  <a:srgbClr val="0B2B52"/>
+                </a:solidFill>
+              </a:rPr>
+              <a:t>•  Delivered as a local screening tool: the scramble control, the cost of reduced settings and the replicate spread are built into what it does rather than written beside it (slides 31–32).</a:t>
+            </a:r>
+          </a:p>
+          <a:p>
+            <a:r>
+              <a:rPr sz="1400" b="0">
+                <a:solidFill>
+                  <a:srgbClr val="0B2B52"/>
+                </a:solidFill>
+              </a:rPr>
+              <a:t>•  Next: extend the panel past 22 receptors, which is what now limits the open questions.</a:t>
+            </a:r>
+          </a:p>
+        </p:txBody>
+      </p:sp>
+      <p:sp>
+        <p:nvSpPr>
+          <p:cNvPr id="8" name="Rounded Rectangle 7"/>
+          <p:cNvSpPr/>
+          <p:nvPr/>
+        </p:nvSpPr>
+        <p:spPr>
+          <a:xfrm>
+            <a:off x="548640" y="4892040"/>
+            <a:ext cx="11155680" cy="1051560"/>
+          </a:xfrm>
+          <a:prstGeom prst="roundRect">
+            <a:avLst/>
+          </a:prstGeom>
+          <a:solidFill>
+            <a:srgbClr val="0B2B52"/>
+          </a:solidFill>
+          <a:ln>
+            <a:noFill/>
+          </a:ln>
+          <a:effectLst/>
+        </p:spPr>
+        <p:style>
+          <a:lnRef idx="1">
+            <a:schemeClr val="accent1"/>
+          </a:lnRef>
+          <a:fillRef idx="3">
+            <a:schemeClr val="accent1"/>
+          </a:fillRef>
+          <a:effectRef idx="2">
+            <a:schemeClr val="accent1"/>
+          </a:effectRef>
+          <a:fontRef idx="minor">
+            <a:schemeClr val="lt1"/>
+          </a:fontRef>
+        </p:style>
+        <p:txBody>
+          <a:bodyPr rtlCol="0" anchor="ctr" wrap="square"/>
+          <a:lstStyle/>
+          <a:p>
+            <a:pPr algn="ctr">
+              <a:spcBef>
+                <a:spcPts val="0"/>
+              </a:spcBef>
+              <a:spcAft>
+                <a:spcPts val="400"/>
+              </a:spcAft>
+            </a:pPr>
+            <a:r>
+              <a:rPr sz="2000" b="1" i="0">
+                <a:solidFill>
+                  <a:srgbClr val="FFFFFF"/>
+                </a:solidFill>
+              </a:rPr>
+              <a:t>Thank you  ·  Questions welcome</a:t>
+            </a:r>
+          </a:p>
+        </p:txBody>
+      </p:sp>
+    </p:spTree>
+  </p:cSld>
+  <p:clrMapOvr>
+    <a:masterClrMapping/>
+  </p:clrMapOvr>
+</p:sld>
+</file>
+
+<file path=ppt/slides/slide35.xml><?xml version="1.0" encoding="utf-8"?>
+<p:sld xmlns:a="http://schemas.openxmlformats.org/drawingml/2006/main" xmlns:p="http://schemas.openxmlformats.org/presentationml/2006/main" xmlns:r="http://schemas.openxmlformats.org/officeDocument/2006/relationships">
+  <p:cSld>
+    <p:spTree>
+      <p:nvGrpSpPr>
+        <p:cNvPr id="1" name=""/>
+        <p:cNvGrpSpPr/>
+        <p:nvPr/>
+      </p:nvGrpSpPr>
+      <p:grpSpPr/>
+      <p:sp>
+        <p:nvSpPr>
+          <p:cNvPr id="2" name="Rectangle 1"/>
+          <p:cNvSpPr/>
+          <p:nvPr/>
+        </p:nvSpPr>
+        <p:spPr>
+          <a:xfrm>
+            <a:off x="0" y="0"/>
+            <a:ext cx="12188952" cy="914400"/>
+          </a:xfrm>
+          <a:prstGeom prst="rect">
+            <a:avLst/>
+          </a:prstGeom>
+          <a:solidFill>
+            <a:srgbClr val="0B2B52"/>
+          </a:solidFill>
+          <a:ln>
+            <a:noFill/>
+          </a:ln>
+        </p:spPr>
+        <p:style>
+          <a:lnRef idx="1">
+            <a:schemeClr val="accent1"/>
+          </a:lnRef>
+          <a:fillRef idx="3">
+            <a:schemeClr val="accent1"/>
+          </a:fillRef>
+          <a:effectRef idx="2">
+            <a:schemeClr val="accent1"/>
+          </a:effectRef>
+          <a:fontRef idx="minor">
+            <a:schemeClr val="lt1"/>
+          </a:fontRef>
+        </p:style>
+        <p:txBody>
+          <a:bodyPr rtlCol="0" anchor="ctr"/>
+          <a:lstStyle/>
+          <a:p>
+            <a:pPr algn="ctr"/>
+          </a:p>
+        </p:txBody>
+      </p:sp>
+      <p:sp>
+        <p:nvSpPr>
+          <p:cNvPr id="3" name="Rectangle 2"/>
+          <p:cNvSpPr/>
+          <p:nvPr/>
+        </p:nvSpPr>
+        <p:spPr>
+          <a:xfrm>
+            <a:off x="0" y="914400"/>
+            <a:ext cx="12188952" cy="54864"/>
+          </a:xfrm>
+          <a:prstGeom prst="rect">
+            <a:avLst/>
+          </a:prstGeom>
+          <a:solidFill>
+            <a:srgbClr val="1E6FB8"/>
+          </a:solidFill>
+          <a:ln>
+            <a:noFill/>
+          </a:ln>
+        </p:spPr>
+        <p:style>
+          <a:lnRef idx="1">
+            <a:schemeClr val="accent1"/>
+          </a:lnRef>
+          <a:fillRef idx="3">
+            <a:schemeClr val="accent1"/>
+          </a:fillRef>
+          <a:effectRef idx="2">
+            <a:schemeClr val="accent1"/>
+          </a:effectRef>
+          <a:fontRef idx="minor">
+            <a:schemeClr val="lt1"/>
+          </a:fontRef>
+        </p:style>
+        <p:txBody>
+          <a:bodyPr rtlCol="0" anchor="ctr"/>
+          <a:lstStyle/>
+          <a:p>
+            <a:pPr algn="ctr"/>
+          </a:p>
+        </p:txBody>
+      </p:sp>
+      <p:sp>
+        <p:nvSpPr>
+          <p:cNvPr id="4" name="TextBox 3"/>
+          <p:cNvSpPr txBox="1"/>
+          <p:nvPr/>
+        </p:nvSpPr>
+        <p:spPr>
+          <a:xfrm>
+            <a:off x="502920" y="109728"/>
+            <a:ext cx="11155680" cy="777240"/>
+          </a:xfrm>
+          <a:prstGeom prst="rect">
+            <a:avLst/>
+          </a:prstGeom>
+          <a:noFill/>
+        </p:spPr>
+        <p:txBody>
+          <a:bodyPr wrap="square">
+            <a:spAutoFit/>
+          </a:bodyPr>
+          <a:lstStyle/>
+          <a:p>
+            <a:pPr>
+              <a:spcAft>
+                <a:spcPts val="600"/>
+              </a:spcAft>
+            </a:pPr>
+            <a:r>
+              <a:rPr sz="2600" b="1">
+                <a:solidFill>
+                  <a:srgbClr val="FFFFFF"/>
+                </a:solidFill>
+              </a:rPr>
+              <a:t>Measured — Which Setting Carried It, and for Which Test</a:t>
+            </a:r>
+          </a:p>
+        </p:txBody>
+      </p:sp>
+      <p:sp>
+        <p:nvSpPr>
+          <p:cNvPr id="5" name="TextBox 4"/>
+          <p:cNvSpPr txBox="1"/>
+          <p:nvPr/>
+        </p:nvSpPr>
+        <p:spPr>
+          <a:xfrm>
+            <a:off x="502920" y="6473952"/>
+            <a:ext cx="8229600" cy="274320"/>
+          </a:xfrm>
+          <a:prstGeom prst="rect">
+            <a:avLst/>
+          </a:prstGeom>
+          <a:noFill/>
+        </p:spPr>
+        <p:txBody>
+          <a:bodyPr wrap="square">
+            <a:spAutoFit/>
+          </a:bodyPr>
+          <a:lstStyle/>
+          <a:p>
+            <a:pPr>
+              <a:spcAft>
+                <a:spcPts val="600"/>
+              </a:spcAft>
+            </a:pPr>
+            <a:r>
+              <a:rPr sz="900" b="0">
+                <a:solidFill>
+                  <a:srgbClr val="555555"/>
+                </a:solidFill>
+              </a:rPr>
+              <a:t>Boltz-Fast · Final Dissertation Report · Akik Jana (2024AB05287)</a:t>
+            </a:r>
+          </a:p>
+        </p:txBody>
+      </p:sp>
+      <p:sp>
+        <p:nvSpPr>
+          <p:cNvPr id="6" name="TextBox 5"/>
+          <p:cNvSpPr txBox="1"/>
+          <p:nvPr/>
+        </p:nvSpPr>
+        <p:spPr>
+          <a:xfrm>
+            <a:off x="11183112" y="6473952"/>
+            <a:ext cx="640080" cy="274320"/>
+          </a:xfrm>
+          <a:prstGeom prst="rect">
+            <a:avLst/>
+          </a:prstGeom>
+          <a:noFill/>
+        </p:spPr>
+        <p:txBody>
+          <a:bodyPr wrap="square">
+            <a:spAutoFit/>
+          </a:bodyPr>
+          <a:lstStyle/>
+          <a:p>
+            <a:pPr>
+              <a:spcAft>
+                <a:spcPts val="600"/>
+              </a:spcAft>
+            </a:pPr>
+            <a:r>
+              <a:rPr sz="1000" b="0">
+                <a:solidFill>
+                  <a:srgbClr val="0B2B52"/>
+                </a:solidFill>
+              </a:rPr>
+              <a:t>33</a:t>
+            </a:r>
+          </a:p>
+        </p:txBody>
+      </p:sp>
+      <p:sp>
+        <p:nvSpPr>
+          <p:cNvPr id="7" name="TextBox 6"/>
+          <p:cNvSpPr txBox="1"/>
+          <p:nvPr/>
+        </p:nvSpPr>
+        <p:spPr>
+          <a:xfrm>
+            <a:off x="548640" y="1078992"/>
+            <a:ext cx="11155680" cy="640080"/>
+          </a:xfrm>
+          <a:prstGeom prst="rect">
+            <a:avLst/>
+          </a:prstGeom>
+          <a:noFill/>
+        </p:spPr>
+        <p:txBody>
+          <a:bodyPr wrap="square">
+            <a:spAutoFit/>
+          </a:bodyPr>
+          <a:lstStyle/>
+          <a:p>
+            <a:pPr>
+              <a:spcAft>
+                <a:spcPts val="600"/>
+              </a:spcAft>
+            </a:pPr>
+            <a:r>
+              <a:rPr sz="1500" b="0">
+                <a:solidFill>
+                  <a:srgbClr val="0B2B52"/>
+                </a:solidFill>
+              </a:rPr>
+              <a:t>Section 7.13 raised sampling steps, recycling and alignment depth together. Moving one at a time:</a:t>
+            </a:r>
+          </a:p>
+        </p:txBody>
+      </p:sp>
+      <p:graphicFrame>
+        <p:nvGraphicFramePr>
+          <p:cNvPr id="8" name="Table 7"/>
+          <p:cNvGraphicFramePr>
+            <a:graphicFrameLocks noGrp="1"/>
+          </p:cNvGraphicFramePr>
+          <p:nvPr/>
+        </p:nvGraphicFramePr>
+        <p:xfrm>
+          <a:off x="548640" y="1783080"/>
+          <a:ext cx="11155680" cy="2194560"/>
+        </p:xfrm>
+        <a:graphic>
+          <a:graphicData uri="http://schemas.openxmlformats.org/drawingml/2006/table">
+            <a:tbl>
+              <a:tblPr firstRow="1" bandRow="1">
+                <a:tableStyleId>{5C22544A-7EE6-4342-B048-85BDC9FD1C3A}</a:tableStyleId>
+              </a:tblPr>
+              <a:tblGrid>
+                <a:gridCol w="2377440"/>
+                <a:gridCol w="2743200"/>
+                <a:gridCol w="1828800"/>
+                <a:gridCol w="2103120"/>
+                <a:gridCol w="2103120"/>
+              </a:tblGrid>
+              <a:tr h="365760">
+                <a:tc>
+                  <a:txBody>
+                    <a:bodyPr/>
+                    <a:lstStyle/>
+                    <a:p>
+                      <a:r>
+                        <a:rPr sz="1250" b="1">
+                          <a:solidFill>
+                            <a:srgbClr val="0B2B52"/>
+                          </a:solidFill>
+                        </a:rPr>
+                        <a:t>Arm</a:t>
+                      </a:r>
+                    </a:p>
+                  </a:txBody>
+                  <a:tcPr/>
+                </a:tc>
+                <a:tc>
+                  <a:txBody>
+                    <a:bodyPr/>
+                    <a:lstStyle/>
+                    <a:p>
+                      <a:r>
+                        <a:rPr sz="1250" b="1">
+                          <a:solidFill>
+                            <a:srgbClr val="0B2B52"/>
+                          </a:solidFill>
+                        </a:rPr>
+                        <a:t>steps / recycle / MSA</a:t>
+                      </a:r>
+                    </a:p>
+                  </a:txBody>
+                  <a:tcPr/>
+                </a:tc>
+                <a:tc>
+                  <a:txBody>
+                    <a:bodyPr/>
+                    <a:lstStyle/>
+                    <a:p>
+                      <a:r>
+                        <a:rPr sz="1250" b="1">
+                          <a:solidFill>
+                            <a:srgbClr val="0B2B52"/>
+                          </a:solidFill>
+                        </a:rPr>
+                        <a:t>Cohen's d</a:t>
+                      </a:r>
+                    </a:p>
+                  </a:txBody>
+                  <a:tcPr/>
+                </a:tc>
+                <a:tc>
+                  <a:txBody>
+                    <a:bodyPr/>
+                    <a:lstStyle/>
+                    <a:p>
+                      <a:r>
+                        <a:rPr sz="1250" b="1">
+                          <a:solidFill>
+                            <a:srgbClr val="0B2B52"/>
+                          </a:solidFill>
+                        </a:rPr>
+                        <a:t>share of gain</a:t>
+                      </a:r>
+                    </a:p>
+                  </a:txBody>
+                  <a:tcPr/>
+                </a:tc>
+                <a:tc>
+                  <a:txBody>
+                    <a:bodyPr/>
+                    <a:lstStyle/>
+                    <a:p>
+                      <a:r>
+                        <a:rPr sz="1250" b="1">
+                          <a:solidFill>
+                            <a:srgbClr val="0B2B52"/>
+                          </a:solidFill>
+                        </a:rPr>
+                        <a:t>top-1 rank</a:t>
+                      </a:r>
+                    </a:p>
+                  </a:txBody>
+                  <a:tcPr/>
+                </a:tc>
+              </a:tr>
+              <a:tr h="365760">
+                <a:tc>
+                  <a:txBody>
+                    <a:bodyPr/>
+                    <a:lstStyle/>
+                    <a:p>
+                      <a:r>
+                        <a:rPr sz="1250" b="0">
+                          <a:solidFill>
+                            <a:srgbClr val="0B2B52"/>
+                          </a:solidFill>
+                        </a:rPr>
+                        <a:t>reduced</a:t>
+                      </a:r>
+                    </a:p>
+                  </a:txBody>
+                  <a:tcPr/>
+                </a:tc>
+                <a:tc>
+                  <a:txBody>
+                    <a:bodyPr/>
+                    <a:lstStyle/>
+                    <a:p>
+                      <a:r>
+                        <a:rPr sz="1250" b="0">
+                          <a:solidFill>
+                            <a:srgbClr val="0B2B52"/>
+                          </a:solidFill>
+                        </a:rPr>
+                        <a:t>10 / 1 / 32</a:t>
+                      </a:r>
+                    </a:p>
+                  </a:txBody>
+                  <a:tcPr/>
+                </a:tc>
+                <a:tc>
+                  <a:txBody>
+                    <a:bodyPr/>
+                    <a:lstStyle/>
+                    <a:p>
+                      <a:r>
+                        <a:rPr sz="1250" b="0">
+                          <a:solidFill>
+                            <a:srgbClr val="0B2B52"/>
+                          </a:solidFill>
+                        </a:rPr>
+                        <a:t>0.28</a:t>
+                      </a:r>
+                    </a:p>
+                  </a:txBody>
+                  <a:tcPr/>
+                </a:tc>
+                <a:tc>
+                  <a:txBody>
+                    <a:bodyPr/>
+                    <a:lstStyle/>
+                    <a:p>
+                      <a:r>
+                        <a:rPr sz="1250" b="0">
+                          <a:solidFill>
+                            <a:srgbClr val="0B2B52"/>
+                          </a:solidFill>
+                        </a:rPr>
+                        <a:t>—</a:t>
+                      </a:r>
+                    </a:p>
+                  </a:txBody>
+                  <a:tcPr/>
+                </a:tc>
+                <a:tc>
+                  <a:txBody>
+                    <a:bodyPr/>
+                    <a:lstStyle/>
+                    <a:p>
+                      <a:r>
+                        <a:rPr sz="1250" b="0">
+                          <a:solidFill>
+                            <a:srgbClr val="0B2B52"/>
+                          </a:solidFill>
+                        </a:rPr>
+                        <a:t>9 of 22</a:t>
+                      </a:r>
+                    </a:p>
+                  </a:txBody>
+                  <a:tcPr/>
+                </a:tc>
+              </a:tr>
+              <a:tr h="365760">
+                <a:tc>
+                  <a:txBody>
+                    <a:bodyPr/>
+                    <a:lstStyle/>
+                    <a:p>
+                      <a:r>
+                        <a:rPr sz="1250" b="0">
+                          <a:solidFill>
+                            <a:srgbClr val="0B2B52"/>
+                          </a:solidFill>
+                        </a:rPr>
+                        <a:t>sampling only</a:t>
+                      </a:r>
+                    </a:p>
+                  </a:txBody>
+                  <a:tcPr/>
+                </a:tc>
+                <a:tc>
+                  <a:txBody>
+                    <a:bodyPr/>
+                    <a:lstStyle/>
+                    <a:p>
+                      <a:r>
+                        <a:rPr sz="1250" b="0">
+                          <a:solidFill>
+                            <a:srgbClr val="0B2B52"/>
+                          </a:solidFill>
+                        </a:rPr>
+                        <a:t>200 / 1 / 32</a:t>
+                      </a:r>
+                    </a:p>
+                  </a:txBody>
+                  <a:tcPr/>
+                </a:tc>
+                <a:tc>
+                  <a:txBody>
+                    <a:bodyPr/>
+                    <a:lstStyle/>
+                    <a:p>
+                      <a:r>
+                        <a:rPr sz="1250" b="0">
+                          <a:solidFill>
+                            <a:srgbClr val="0B2B52"/>
+                          </a:solidFill>
+                        </a:rPr>
+                        <a:t>1.13</a:t>
+                      </a:r>
+                    </a:p>
+                  </a:txBody>
+                  <a:tcPr/>
+                </a:tc>
+                <a:tc>
+                  <a:txBody>
+                    <a:bodyPr/>
+                    <a:lstStyle/>
+                    <a:p>
+                      <a:r>
+                        <a:rPr sz="1250" b="0">
+                          <a:solidFill>
+                            <a:srgbClr val="0B2B52"/>
+                          </a:solidFill>
+                        </a:rPr>
+                        <a:t>69%</a:t>
+                      </a:r>
+                    </a:p>
+                  </a:txBody>
+                  <a:tcPr/>
+                </a:tc>
+                <a:tc>
+                  <a:txBody>
+                    <a:bodyPr/>
+                    <a:lstStyle/>
+                    <a:p>
+                      <a:r>
+                        <a:rPr sz="1250" b="0">
+                          <a:solidFill>
+                            <a:srgbClr val="0B2B52"/>
+                          </a:solidFill>
+                        </a:rPr>
+                        <a:t>13 of 22</a:t>
+                      </a:r>
+                    </a:p>
+                  </a:txBody>
+                  <a:tcPr/>
+                </a:tc>
+              </a:tr>
+              <a:tr h="365760">
+                <a:tc>
+                  <a:txBody>
+                    <a:bodyPr/>
+                    <a:lstStyle/>
+                    <a:p>
+                      <a:r>
+                        <a:rPr sz="1250" b="0">
+                          <a:solidFill>
+                            <a:srgbClr val="0B2B52"/>
+                          </a:solidFill>
+                        </a:rPr>
+                        <a:t>alignment only</a:t>
+                      </a:r>
+                    </a:p>
+                  </a:txBody>
+                  <a:tcPr/>
+                </a:tc>
+                <a:tc>
+                  <a:txBody>
+                    <a:bodyPr/>
+                    <a:lstStyle/>
+                    <a:p>
+                      <a:r>
+                        <a:rPr sz="1250" b="0">
+                          <a:solidFill>
+                            <a:srgbClr val="0B2B52"/>
+                          </a:solidFill>
+                        </a:rPr>
+                        <a:t>10 / 1 / full</a:t>
+                      </a:r>
+                    </a:p>
+                  </a:txBody>
+                  <a:tcPr/>
+                </a:tc>
+                <a:tc>
+                  <a:txBody>
+                    <a:bodyPr/>
+                    <a:lstStyle/>
+                    <a:p>
+                      <a:r>
+                        <a:rPr sz="1250" b="0">
+                          <a:solidFill>
+                            <a:srgbClr val="0B2B52"/>
+                          </a:solidFill>
+                        </a:rPr>
+                        <a:t>0.18</a:t>
+                      </a:r>
+                    </a:p>
+                  </a:txBody>
+                  <a:tcPr/>
+                </a:tc>
+                <a:tc>
+                  <a:txBody>
+                    <a:bodyPr/>
+                    <a:lstStyle/>
+                    <a:p>
+                      <a:r>
+                        <a:rPr sz="1250" b="0">
+                          <a:solidFill>
+                            <a:srgbClr val="0B2B52"/>
+                          </a:solidFill>
+                        </a:rPr>
+                        <a:t>−8%</a:t>
+                      </a:r>
+                    </a:p>
+                  </a:txBody>
+                  <a:tcPr/>
+                </a:tc>
+                <a:tc>
+                  <a:txBody>
+                    <a:bodyPr/>
+                    <a:lstStyle/>
+                    <a:p>
+                      <a:r>
+                        <a:rPr sz="1250" b="0">
+                          <a:solidFill>
+                            <a:srgbClr val="0B2B52"/>
+                          </a:solidFill>
+                        </a:rPr>
+                        <a:t>8 of 22</a:t>
+                      </a:r>
+                    </a:p>
+                  </a:txBody>
+                  <a:tcPr/>
+                </a:tc>
+              </a:tr>
+              <a:tr h="365760">
+                <a:tc>
+                  <a:txBody>
+                    <a:bodyPr/>
+                    <a:lstStyle/>
+                    <a:p>
+                      <a:r>
+                        <a:rPr sz="1250" b="0">
+                          <a:solidFill>
+                            <a:srgbClr val="0B2B52"/>
+                          </a:solidFill>
+                        </a:rPr>
+                        <a:t>recycling only</a:t>
+                      </a:r>
+                    </a:p>
+                  </a:txBody>
+                  <a:tcPr/>
+                </a:tc>
+                <a:tc>
+                  <a:txBody>
+                    <a:bodyPr/>
+                    <a:lstStyle/>
+                    <a:p>
+                      <a:r>
+                        <a:rPr sz="1250" b="0">
+                          <a:solidFill>
+                            <a:srgbClr val="0B2B52"/>
+                          </a:solidFill>
+                        </a:rPr>
+                        <a:t>10 / 3 / 32</a:t>
+                      </a:r>
+                    </a:p>
+                  </a:txBody>
+                  <a:tcPr/>
+                </a:tc>
+                <a:tc>
+                  <a:txBody>
+                    <a:bodyPr/>
+                    <a:lstStyle/>
+                    <a:p>
+                      <a:r>
+                        <a:rPr sz="1250" b="0">
+                          <a:solidFill>
+                            <a:srgbClr val="0B2B52"/>
+                          </a:solidFill>
+                        </a:rPr>
+                        <a:t>0.22</a:t>
+                      </a:r>
+                    </a:p>
+                  </a:txBody>
+                  <a:tcPr/>
+                </a:tc>
+                <a:tc>
+                  <a:txBody>
+                    <a:bodyPr/>
+                    <a:lstStyle/>
+                    <a:p>
+                      <a:r>
+                        <a:rPr sz="1250" b="0">
+                          <a:solidFill>
+                            <a:srgbClr val="0B2B52"/>
+                          </a:solidFill>
+                        </a:rPr>
+                        <a:t>−5%</a:t>
+                      </a:r>
+                    </a:p>
+                  </a:txBody>
+                  <a:tcPr/>
+                </a:tc>
+                <a:tc>
+                  <a:txBody>
+                    <a:bodyPr/>
+                    <a:lstStyle/>
+                    <a:p>
+                      <a:r>
+                        <a:rPr sz="1250" b="0">
+                          <a:solidFill>
+                            <a:srgbClr val="0B2B52"/>
+                          </a:solidFill>
+                        </a:rPr>
+                        <a:t>7 of 22</a:t>
+                      </a:r>
+                    </a:p>
+                  </a:txBody>
+                  <a:tcPr/>
+                </a:tc>
+              </a:tr>
+              <a:tr h="365760">
+                <a:tc>
+                  <a:txBody>
+                    <a:bodyPr/>
+                    <a:lstStyle/>
+                    <a:p>
+                      <a:r>
+                        <a:rPr sz="1250" b="0">
+                          <a:solidFill>
+                            <a:srgbClr val="0B2B52"/>
+                          </a:solidFill>
+                        </a:rPr>
+                        <a:t>all three</a:t>
+                      </a:r>
+                    </a:p>
+                  </a:txBody>
+                  <a:tcPr/>
+                </a:tc>
+                <a:tc>
+                  <a:txBody>
+                    <a:bodyPr/>
+                    <a:lstStyle/>
+                    <a:p>
+                      <a:r>
+                        <a:rPr sz="1250" b="0">
+                          <a:solidFill>
+                            <a:srgbClr val="0B2B52"/>
+                          </a:solidFill>
+                        </a:rPr>
+                        <a:t>200 / 3 / full</a:t>
+                      </a:r>
+                    </a:p>
+                  </a:txBody>
+                  <a:tcPr/>
+                </a:tc>
+                <a:tc>
+                  <a:txBody>
+                    <a:bodyPr/>
+                    <a:lstStyle/>
+                    <a:p>
+                      <a:r>
+                        <a:rPr sz="1250" b="0">
+                          <a:solidFill>
+                            <a:srgbClr val="0B2B52"/>
+                          </a:solidFill>
+                        </a:rPr>
+                        <a:t>1.52</a:t>
+                      </a:r>
+                    </a:p>
+                  </a:txBody>
+                  <a:tcPr/>
+                </a:tc>
+                <a:tc>
+                  <a:txBody>
+                    <a:bodyPr/>
+                    <a:lstStyle/>
+                    <a:p>
+                      <a:r>
+                        <a:rPr sz="1250" b="0">
+                          <a:solidFill>
+                            <a:srgbClr val="0B2B52"/>
+                          </a:solidFill>
+                        </a:rPr>
+                        <a:t>100%</a:t>
+                      </a:r>
+                    </a:p>
+                  </a:txBody>
+                  <a:tcPr/>
+                </a:tc>
+                <a:tc>
+                  <a:txBody>
+                    <a:bodyPr/>
+                    <a:lstStyle/>
+                    <a:p>
+                      <a:r>
+                        <a:rPr sz="1250" b="0">
+                          <a:solidFill>
+                            <a:srgbClr val="0B2B52"/>
+                          </a:solidFill>
+                        </a:rPr>
+                        <a:t>17 of 22</a:t>
+                      </a:r>
+                    </a:p>
+                  </a:txBody>
+                  <a:tcPr/>
+                </a:tc>
+              </a:tr>
+            </a:tbl>
+          </a:graphicData>
+        </a:graphic>
+      </p:graphicFrame>
+      <p:sp>
+        <p:nvSpPr>
+          <p:cNvPr id="9" name="TextBox 8"/>
+          <p:cNvSpPr txBox="1"/>
+          <p:nvPr/>
+        </p:nvSpPr>
+        <p:spPr>
+          <a:xfrm>
+            <a:off x="548640" y="4160520"/>
+            <a:ext cx="11155680" cy="1005840"/>
+          </a:xfrm>
+          <a:prstGeom prst="rect">
+            <a:avLst/>
+          </a:prstGeom>
+          <a:noFill/>
+        </p:spPr>
+        <p:txBody>
+          <a:bodyPr wrap="square">
+            <a:spAutoFit/>
+          </a:bodyPr>
+          <a:lstStyle/>
+          <a:p>
+            <a:pPr>
+              <a:spcAft>
+                <a:spcPts val="600"/>
+              </a:spcAft>
+            </a:pPr>
+            <a:r>
+              <a:rPr sz="1500" b="0">
+                <a:solidFill>
+                  <a:srgbClr val="0B2B52"/>
+                </a:solidFill>
+              </a:rPr>
+              <a:t>Sampling steps alone recover 69% of the gain for a third of the cost — 33 s a fold against 106 s.</a:t>
+            </a:r>
+          </a:p>
+          <a:p>
+            <a:pPr>
+              <a:spcAft>
+                <a:spcPts val="600"/>
+              </a:spcAft>
+            </a:pPr>
+            <a:r>
+              <a:rPr sz="1500" b="0">
+                <a:solidFill>
+                  <a:srgbClr val="0B2B52"/>
+                </a:solidFill>
+              </a:rPr>
+              <a:t>Alignment depth and recycling, moved alone, sit below the reduced baseline on every readout.</a:t>
+            </a:r>
+          </a:p>
+        </p:txBody>
+      </p:sp>
+      <p:sp>
+        <p:nvSpPr>
+          <p:cNvPr id="10" name="Rounded Rectangle 9"/>
+          <p:cNvSpPr/>
+          <p:nvPr/>
+        </p:nvSpPr>
+        <p:spPr>
+          <a:xfrm>
+            <a:off x="548640" y="4983480"/>
+            <a:ext cx="11155680" cy="960120"/>
+          </a:xfrm>
+          <a:prstGeom prst="roundRect">
+            <a:avLst/>
+          </a:prstGeom>
+          <a:solidFill>
+            <a:srgbClr val="2E7D32"/>
+          </a:solidFill>
+          <a:ln>
+            <a:noFill/>
+          </a:ln>
+        </p:spPr>
+        <p:style>
+          <a:lnRef idx="1">
+            <a:schemeClr val="accent1"/>
+          </a:lnRef>
+          <a:fillRef idx="3">
+            <a:schemeClr val="accent1"/>
+          </a:fillRef>
+          <a:effectRef idx="2">
+            <a:schemeClr val="accent1"/>
+          </a:effectRef>
+          <a:fontRef idx="minor">
+            <a:schemeClr val="lt1"/>
+          </a:fontRef>
+        </p:style>
+        <p:txBody>
+          <a:bodyPr rtlCol="0" anchor="ctr" wrap="square"/>
+          <a:lstStyle/>
+          <a:p>
+            <a:pPr algn="ctr">
+              <a:spcAft>
+                <a:spcPts val="600"/>
+              </a:spcAft>
+            </a:pPr>
+            <a:r>
+              <a:rPr sz="1700" b="1">
+                <a:solidFill>
+                  <a:srgbClr val="FFFFFF"/>
+                </a:solidFill>
+              </a:rPr>
+              <a:t>The shares sum to 25–55%, not 100%: the settings are synergistic. A deeper alignment is worth nothing on an unconverged structure.</a:t>
+            </a:r>
+          </a:p>
+        </p:txBody>
+      </p:sp>
+    </p:spTree>
+  </p:cSld>
+  <p:clrMapOvr>
+    <a:masterClrMapping/>
+  </p:clrMapOvr>
+</p:sld>
+</file>
+
+<file path=ppt/slides/slide36.xml><?xml version="1.0" encoding="utf-8"?>
+<p:sld xmlns:a="http://schemas.openxmlformats.org/drawingml/2006/main" xmlns:p="http://schemas.openxmlformats.org/presentationml/2006/main" xmlns:r="http://schemas.openxmlformats.org/officeDocument/2006/relationships">
+  <p:cSld>
+    <p:spTree>
+      <p:nvGrpSpPr>
+        <p:cNvPr id="1" name=""/>
+        <p:cNvGrpSpPr/>
+        <p:nvPr/>
+      </p:nvGrpSpPr>
+      <p:grpSpPr/>
+      <p:sp>
+        <p:nvSpPr>
+          <p:cNvPr id="2" name="Rectangle 1"/>
+          <p:cNvSpPr/>
+          <p:nvPr/>
+        </p:nvSpPr>
+        <p:spPr>
+          <a:xfrm>
+            <a:off x="0" y="0"/>
+            <a:ext cx="12188952" cy="914400"/>
+          </a:xfrm>
+          <a:prstGeom prst="rect">
+            <a:avLst/>
+          </a:prstGeom>
+          <a:solidFill>
+            <a:srgbClr val="0B2B52"/>
+          </a:solidFill>
+          <a:ln>
+            <a:noFill/>
+          </a:ln>
+        </p:spPr>
+        <p:style>
+          <a:lnRef idx="1">
+            <a:schemeClr val="accent1"/>
+          </a:lnRef>
+          <a:fillRef idx="3">
+            <a:schemeClr val="accent1"/>
+          </a:fillRef>
+          <a:effectRef idx="2">
+            <a:schemeClr val="accent1"/>
+          </a:effectRef>
+          <a:fontRef idx="minor">
+            <a:schemeClr val="lt1"/>
+          </a:fontRef>
+        </p:style>
+        <p:txBody>
+          <a:bodyPr rtlCol="0" anchor="ctr"/>
+          <a:lstStyle/>
+          <a:p>
+            <a:pPr algn="ctr"/>
+          </a:p>
+        </p:txBody>
+      </p:sp>
+      <p:sp>
+        <p:nvSpPr>
+          <p:cNvPr id="3" name="Rectangle 2"/>
+          <p:cNvSpPr/>
+          <p:nvPr/>
+        </p:nvSpPr>
+        <p:spPr>
+          <a:xfrm>
+            <a:off x="0" y="914400"/>
+            <a:ext cx="12188952" cy="54864"/>
+          </a:xfrm>
+          <a:prstGeom prst="rect">
+            <a:avLst/>
+          </a:prstGeom>
+          <a:solidFill>
+            <a:srgbClr val="1E6FB8"/>
+          </a:solidFill>
+          <a:ln>
+            <a:noFill/>
+          </a:ln>
+        </p:spPr>
+        <p:style>
+          <a:lnRef idx="1">
+            <a:schemeClr val="accent1"/>
+          </a:lnRef>
+          <a:fillRef idx="3">
+            <a:schemeClr val="accent1"/>
+          </a:fillRef>
+          <a:effectRef idx="2">
+            <a:schemeClr val="accent1"/>
+          </a:effectRef>
+          <a:fontRef idx="minor">
+            <a:schemeClr val="lt1"/>
+          </a:fontRef>
+        </p:style>
+        <p:txBody>
+          <a:bodyPr rtlCol="0" anchor="ctr"/>
+          <a:lstStyle/>
+          <a:p>
+            <a:pPr algn="ctr"/>
+          </a:p>
+        </p:txBody>
+      </p:sp>
+      <p:sp>
+        <p:nvSpPr>
+          <p:cNvPr id="4" name="TextBox 3"/>
+          <p:cNvSpPr txBox="1"/>
+          <p:nvPr/>
+        </p:nvSpPr>
+        <p:spPr>
+          <a:xfrm>
+            <a:off x="502920" y="109728"/>
+            <a:ext cx="11155680" cy="777240"/>
+          </a:xfrm>
+          <a:prstGeom prst="rect">
+            <a:avLst/>
+          </a:prstGeom>
+          <a:noFill/>
+        </p:spPr>
+        <p:txBody>
+          <a:bodyPr wrap="square">
+            <a:spAutoFit/>
+          </a:bodyPr>
+          <a:lstStyle/>
+          <a:p>
+            <a:pPr>
+              <a:spcAft>
+                <a:spcPts val="600"/>
+              </a:spcAft>
+            </a:pPr>
+            <a:r>
+              <a:rPr sz="2600" b="1">
+                <a:solidFill>
+                  <a:srgbClr val="FFFFFF"/>
+                </a:solidFill>
+              </a:rPr>
+              <a:t>Two Automated Searches — One Was Safe, One Was Not</a:t>
+            </a:r>
+          </a:p>
+        </p:txBody>
+      </p:sp>
+      <p:sp>
+        <p:nvSpPr>
+          <p:cNvPr id="5" name="TextBox 4"/>
+          <p:cNvSpPr txBox="1"/>
+          <p:nvPr/>
+        </p:nvSpPr>
+        <p:spPr>
+          <a:xfrm>
+            <a:off x="502920" y="6473952"/>
+            <a:ext cx="8229600" cy="274320"/>
+          </a:xfrm>
+          <a:prstGeom prst="rect">
+            <a:avLst/>
+          </a:prstGeom>
+          <a:noFill/>
+        </p:spPr>
+        <p:txBody>
+          <a:bodyPr wrap="square">
+            <a:spAutoFit/>
+          </a:bodyPr>
+          <a:lstStyle/>
+          <a:p>
+            <a:pPr>
+              <a:spcAft>
+                <a:spcPts val="600"/>
+              </a:spcAft>
+            </a:pPr>
+            <a:r>
+              <a:rPr sz="900" b="0">
+                <a:solidFill>
+                  <a:srgbClr val="555555"/>
+                </a:solidFill>
+              </a:rPr>
+              <a:t>Boltz-Fast · Final Dissertation Report · Akik Jana (2024AB05287)</a:t>
+            </a:r>
+          </a:p>
+        </p:txBody>
+      </p:sp>
+      <p:sp>
+        <p:nvSpPr>
+          <p:cNvPr id="6" name="TextBox 5"/>
+          <p:cNvSpPr txBox="1"/>
+          <p:nvPr/>
+        </p:nvSpPr>
+        <p:spPr>
+          <a:xfrm>
+            <a:off x="11183112" y="6473952"/>
+            <a:ext cx="640080" cy="274320"/>
+          </a:xfrm>
+          <a:prstGeom prst="rect">
+            <a:avLst/>
+          </a:prstGeom>
+          <a:noFill/>
+        </p:spPr>
+        <p:txBody>
+          <a:bodyPr wrap="square">
+            <a:spAutoFit/>
+          </a:bodyPr>
+          <a:lstStyle/>
+          <a:p>
+            <a:pPr>
+              <a:spcAft>
+                <a:spcPts val="600"/>
+              </a:spcAft>
+            </a:pPr>
+            <a:r>
+              <a:rPr sz="1000" b="0">
+                <a:solidFill>
+                  <a:srgbClr val="0B2B52"/>
+                </a:solidFill>
+              </a:rPr>
+              <a:t>34</a:t>
+            </a:r>
+          </a:p>
+        </p:txBody>
+      </p:sp>
+      <p:sp>
+        <p:nvSpPr>
+          <p:cNvPr id="7" name="TextBox 6"/>
+          <p:cNvSpPr txBox="1"/>
+          <p:nvPr/>
+        </p:nvSpPr>
+        <p:spPr>
+          <a:xfrm>
+            <a:off x="548640" y="1078992"/>
+            <a:ext cx="11155680" cy="640080"/>
+          </a:xfrm>
+          <a:prstGeom prst="rect">
+            <a:avLst/>
+          </a:prstGeom>
+          <a:noFill/>
+        </p:spPr>
+        <p:txBody>
+          <a:bodyPr wrap="square">
+            <a:spAutoFit/>
+          </a:bodyPr>
+          <a:lstStyle/>
+          <a:p>
+            <a:pPr>
+              <a:spcAft>
+                <a:spcPts val="600"/>
+              </a:spcAft>
+            </a:pPr>
+            <a:r>
+              <a:rPr sz="1500" b="0">
+                <a:solidFill>
+                  <a:srgbClr val="0B2B52"/>
+                </a:solidFill>
+              </a:rPr>
+              <a:t>The same machinery applied to two problems that differ in one respect: whether a candidate can be checked.</a:t>
+            </a:r>
+          </a:p>
+        </p:txBody>
+      </p:sp>
+      <p:sp>
+        <p:nvSpPr>
+          <p:cNvPr id="8" name="Rounded Rectangle 7"/>
+          <p:cNvSpPr/>
+          <p:nvPr/>
+        </p:nvSpPr>
+        <p:spPr>
+          <a:xfrm>
+            <a:off x="548640" y="1691640"/>
+            <a:ext cx="5440680" cy="1463040"/>
+          </a:xfrm>
+          <a:prstGeom prst="roundRect">
+            <a:avLst/>
+          </a:prstGeom>
+          <a:solidFill>
+            <a:srgbClr val="C62828"/>
+          </a:solidFill>
+          <a:ln>
+            <a:noFill/>
+          </a:ln>
+        </p:spPr>
+        <p:style>
+          <a:lnRef idx="1">
+            <a:schemeClr val="accent1"/>
+          </a:lnRef>
+          <a:fillRef idx="3">
+            <a:schemeClr val="accent1"/>
+          </a:fillRef>
+          <a:effectRef idx="2">
+            <a:schemeClr val="accent1"/>
+          </a:effectRef>
+          <a:fontRef idx="minor">
+            <a:schemeClr val="lt1"/>
+          </a:fontRef>
+        </p:style>
+        <p:txBody>
+          <a:bodyPr rtlCol="0" anchor="ctr" wrap="square"/>
+          <a:lstStyle/>
+          <a:p>
+            <a:pPr algn="ctr"/>
+            <a:r>
+              <a:rPr sz="2300" b="1">
+                <a:solidFill>
+                  <a:srgbClr val="FFFFFF"/>
+                </a:solidFill>
+              </a:rPr>
+              <a:t>p = 0.425</a:t>
+            </a:r>
+          </a:p>
+          <a:p>
+            <a:pPr algn="ctr"/>
+            <a:r>
+              <a:rPr sz="1050">
+                <a:solidFill>
+                  <a:srgbClr val="FFFFFF"/>
+                </a:solidFill>
+              </a:rPr>
+              <a:t>readout search: the gain a permutation null also finds</a:t>
+            </a:r>
+          </a:p>
+        </p:txBody>
+      </p:sp>
+      <p:sp>
+        <p:nvSpPr>
+          <p:cNvPr id="9" name="Rounded Rectangle 8"/>
+          <p:cNvSpPr/>
+          <p:nvPr/>
+        </p:nvSpPr>
+        <p:spPr>
+          <a:xfrm>
+            <a:off x="6263640" y="1691640"/>
+            <a:ext cx="5440680" cy="1463040"/>
+          </a:xfrm>
+          <a:prstGeom prst="roundRect">
+            <a:avLst/>
+          </a:prstGeom>
+          <a:solidFill>
+            <a:srgbClr val="2E7D32"/>
+          </a:solidFill>
+          <a:ln>
+            <a:noFill/>
+          </a:ln>
+        </p:spPr>
+        <p:style>
+          <a:lnRef idx="1">
+            <a:schemeClr val="accent1"/>
+          </a:lnRef>
+          <a:fillRef idx="3">
+            <a:schemeClr val="accent1"/>
+          </a:fillRef>
+          <a:effectRef idx="2">
+            <a:schemeClr val="accent1"/>
+          </a:effectRef>
+          <a:fontRef idx="minor">
+            <a:schemeClr val="lt1"/>
+          </a:fontRef>
+        </p:style>
+        <p:txBody>
+          <a:bodyPr rtlCol="0" anchor="ctr" wrap="square"/>
+          <a:lstStyle/>
+          <a:p>
+            <a:pPr algn="ctr"/>
+            <a:r>
+              <a:rPr sz="2300" b="1">
+                <a:solidFill>
+                  <a:srgbClr val="FFFFFF"/>
+                </a:solidFill>
+              </a:rPr>
+              <a:t>max |diff| = 0</a:t>
+            </a:r>
+          </a:p>
+          <a:p>
+            <a:pPr algn="ctr"/>
+            <a:r>
+              <a:rPr sz="1050">
+                <a:solidFill>
+                  <a:srgbClr val="FFFFFF"/>
+                </a:solidFill>
+              </a:rPr>
+              <a:t>operator rewrite: verified against its own reference</a:t>
+            </a:r>
+          </a:p>
+        </p:txBody>
+      </p:sp>
+      <p:sp>
+        <p:nvSpPr>
+          <p:cNvPr id="10" name="TextBox 9"/>
+          <p:cNvSpPr txBox="1"/>
+          <p:nvPr/>
+        </p:nvSpPr>
+        <p:spPr>
+          <a:xfrm>
+            <a:off x="548640" y="3291840"/>
+            <a:ext cx="11155680" cy="777240"/>
+          </a:xfrm>
+          <a:prstGeom prst="rect">
+            <a:avLst/>
+          </a:prstGeom>
+          <a:noFill/>
+        </p:spPr>
+        <p:txBody>
+          <a:bodyPr wrap="square">
+            <a:spAutoFit/>
+          </a:bodyPr>
+          <a:lstStyle/>
+          <a:p>
+            <a:r>
+              <a:rPr sz="1450" b="1">
+                <a:solidFill>
+                  <a:srgbClr val="0B2B52"/>
+                </a:solidFill>
+              </a:rPr>
+              <a:t>Searching readouts on 22 receptors found a combination beating the headline by +0.018 AUC</a:t>
+            </a:r>
+          </a:p>
+          <a:p>
+            <a:r>
+              <a:rPr sz="1250">
+                <a:solidFill>
+                  <a:srgbClr val="1E6FB8"/>
+                </a:solidFill>
+              </a:rPr>
+              <a:t>a permutation null gains +0.032 on average, and the held-out panel reverses the gain to −0.029. Refused.</a:t>
+            </a:r>
+          </a:p>
+        </p:txBody>
+      </p:sp>
+      <p:sp>
+        <p:nvSpPr>
+          <p:cNvPr id="11" name="TextBox 10"/>
+          <p:cNvSpPr txBox="1"/>
+          <p:nvPr/>
+        </p:nvSpPr>
+        <p:spPr>
+          <a:xfrm>
+            <a:off x="548640" y="4251960"/>
+            <a:ext cx="11155680" cy="777240"/>
+          </a:xfrm>
+          <a:prstGeom prst="rect">
+            <a:avLst/>
+          </a:prstGeom>
+          <a:noFill/>
+        </p:spPr>
+        <p:txBody>
+          <a:bodyPr wrap="square">
+            <a:spAutoFit/>
+          </a:bodyPr>
+          <a:lstStyle/>
+          <a:p>
+            <a:r>
+              <a:rPr sz="1450" b="1">
+                <a:solidFill>
+                  <a:srgbClr val="0B2B52"/>
+                </a:solidFill>
+              </a:rPr>
+              <a:t>Searching operator rewrites found two worth 1.46× and 1.19×</a:t>
+            </a:r>
+          </a:p>
+          <a:p>
+            <a:r>
+              <a:rPr sz="1250">
+                <a:solidFill>
+                  <a:srgbClr val="1E6FB8"/>
+                </a:solidFill>
+              </a:rPr>
+              <a:t>bit-exact, and seeded folds before and after give identical coordinates and identical ipTM. Accepted.</a:t>
+            </a:r>
+          </a:p>
+        </p:txBody>
+      </p:sp>
+      <p:sp>
+        <p:nvSpPr>
+          <p:cNvPr id="12" name="Rounded Rectangle 11"/>
+          <p:cNvSpPr/>
+          <p:nvPr/>
+        </p:nvSpPr>
+        <p:spPr>
+          <a:xfrm>
+            <a:off x="548640" y="5257800"/>
+            <a:ext cx="11155680" cy="960120"/>
+          </a:xfrm>
+          <a:prstGeom prst="roundRect">
+            <a:avLst/>
+          </a:prstGeom>
+          <a:solidFill>
+            <a:srgbClr val="0B2B52"/>
+          </a:solidFill>
+          <a:ln>
+            <a:noFill/>
+          </a:ln>
+        </p:spPr>
+        <p:style>
+          <a:lnRef idx="1">
+            <a:schemeClr val="accent1"/>
+          </a:lnRef>
+          <a:fillRef idx="3">
+            <a:schemeClr val="accent1"/>
+          </a:fillRef>
+          <a:effectRef idx="2">
+            <a:schemeClr val="accent1"/>
+          </a:effectRef>
+          <a:fontRef idx="minor">
+            <a:schemeClr val="lt1"/>
+          </a:fontRef>
+        </p:style>
+        <p:txBody>
+          <a:bodyPr rtlCol="0" anchor="ctr" wrap="square"/>
+          <a:lstStyle/>
+          <a:p>
+            <a:pPr algn="ctr">
+              <a:spcAft>
+                <a:spcPts val="600"/>
+              </a:spcAft>
+            </a:pPr>
+            <a:r>
+              <a:rPr sz="1700" b="1">
+                <a:solidFill>
+                  <a:srgbClr val="FFFFFF"/>
+                </a:solidFill>
+              </a:rPr>
+              <a:t>Search pays where a candidate can be verified independently of the data that proposed it.</a:t>
+            </a:r>
+          </a:p>
+        </p:txBody>
+      </p:sp>
+    </p:spTree>
+  </p:cSld>
+  <p:clrMapOvr>
+    <a:masterClrMapping/>
+  </p:clrMapOvr>
+</p:sld>
+</file>
+
+<file path=ppt/slides/slide37.xml><?xml version="1.0" encoding="utf-8"?>
+<p:sld xmlns:a="http://schemas.openxmlformats.org/drawingml/2006/main" xmlns:p="http://schemas.openxmlformats.org/presentationml/2006/main" xmlns:r="http://schemas.openxmlformats.org/officeDocument/2006/relationships">
+  <p:cSld>
+    <p:spTree>
+      <p:nvGrpSpPr>
+        <p:cNvPr id="1" name=""/>
+        <p:cNvGrpSpPr/>
+        <p:nvPr/>
+      </p:nvGrpSpPr>
+      <p:grpSpPr/>
+      <p:sp>
+        <p:nvSpPr>
+          <p:cNvPr id="2" name="Rectangle 1"/>
+          <p:cNvSpPr/>
+          <p:nvPr/>
+        </p:nvSpPr>
+        <p:spPr>
+          <a:xfrm>
+            <a:off x="0" y="0"/>
+            <a:ext cx="12188952" cy="914400"/>
+          </a:xfrm>
+          <a:prstGeom prst="rect">
+            <a:avLst/>
+          </a:prstGeom>
+          <a:solidFill>
+            <a:srgbClr val="0B2B52"/>
+          </a:solidFill>
+          <a:ln>
+            <a:noFill/>
+          </a:ln>
+        </p:spPr>
+        <p:style>
+          <a:lnRef idx="1">
+            <a:schemeClr val="accent1"/>
+          </a:lnRef>
+          <a:fillRef idx="3">
+            <a:schemeClr val="accent1"/>
+          </a:fillRef>
+          <a:effectRef idx="2">
+            <a:schemeClr val="accent1"/>
+          </a:effectRef>
+          <a:fontRef idx="minor">
+            <a:schemeClr val="lt1"/>
+          </a:fontRef>
+        </p:style>
+        <p:txBody>
+          <a:bodyPr rtlCol="0" anchor="ctr"/>
+          <a:lstStyle/>
+          <a:p>
+            <a:pPr algn="ctr"/>
+          </a:p>
+        </p:txBody>
+      </p:sp>
+      <p:sp>
+        <p:nvSpPr>
+          <p:cNvPr id="3" name="Rectangle 2"/>
+          <p:cNvSpPr/>
+          <p:nvPr/>
+        </p:nvSpPr>
+        <p:spPr>
+          <a:xfrm>
+            <a:off x="0" y="914400"/>
+            <a:ext cx="12188952" cy="54864"/>
+          </a:xfrm>
+          <a:prstGeom prst="rect">
+            <a:avLst/>
+          </a:prstGeom>
+          <a:solidFill>
+            <a:srgbClr val="1E6FB8"/>
+          </a:solidFill>
+          <a:ln>
+            <a:noFill/>
+          </a:ln>
+        </p:spPr>
+        <p:style>
+          <a:lnRef idx="1">
+            <a:schemeClr val="accent1"/>
+          </a:lnRef>
+          <a:fillRef idx="3">
+            <a:schemeClr val="accent1"/>
+          </a:fillRef>
+          <a:effectRef idx="2">
+            <a:schemeClr val="accent1"/>
+          </a:effectRef>
+          <a:fontRef idx="minor">
+            <a:schemeClr val="lt1"/>
+          </a:fontRef>
+        </p:style>
+        <p:txBody>
+          <a:bodyPr rtlCol="0" anchor="ctr"/>
+          <a:lstStyle/>
+          <a:p>
+            <a:pPr algn="ctr"/>
+          </a:p>
+        </p:txBody>
+      </p:sp>
+      <p:sp>
+        <p:nvSpPr>
+          <p:cNvPr id="4" name="TextBox 3"/>
+          <p:cNvSpPr txBox="1"/>
+          <p:nvPr/>
+        </p:nvSpPr>
+        <p:spPr>
+          <a:xfrm>
+            <a:off x="502920" y="109728"/>
+            <a:ext cx="11155680" cy="777240"/>
+          </a:xfrm>
+          <a:prstGeom prst="rect">
+            <a:avLst/>
+          </a:prstGeom>
+          <a:noFill/>
+        </p:spPr>
+        <p:txBody>
+          <a:bodyPr wrap="square">
+            <a:spAutoFit/>
+          </a:bodyPr>
+          <a:lstStyle/>
+          <a:p>
+            <a:pPr>
+              <a:spcAft>
+                <a:spcPts val="600"/>
+              </a:spcAft>
+            </a:pPr>
+            <a:r>
+              <a:rPr sz="2600" b="1">
+                <a:solidFill>
+                  <a:srgbClr val="FFFFFF"/>
+                </a:solidFill>
+              </a:rPr>
+              <a:t>Measured — Against Binding That Was Actually Measured</a:t>
+            </a:r>
+          </a:p>
+        </p:txBody>
+      </p:sp>
+      <p:sp>
+        <p:nvSpPr>
+          <p:cNvPr id="5" name="TextBox 4"/>
+          <p:cNvSpPr txBox="1"/>
+          <p:nvPr/>
+        </p:nvSpPr>
+        <p:spPr>
+          <a:xfrm>
+            <a:off x="502920" y="6473952"/>
+            <a:ext cx="8229600" cy="274320"/>
+          </a:xfrm>
+          <a:prstGeom prst="rect">
+            <a:avLst/>
+          </a:prstGeom>
+          <a:noFill/>
+        </p:spPr>
+        <p:txBody>
+          <a:bodyPr wrap="square">
+            <a:spAutoFit/>
+          </a:bodyPr>
+          <a:lstStyle/>
+          <a:p>
+            <a:pPr>
+              <a:spcAft>
+                <a:spcPts val="600"/>
+              </a:spcAft>
+            </a:pPr>
+            <a:r>
+              <a:rPr sz="900" b="0">
+                <a:solidFill>
+                  <a:srgbClr val="555555"/>
+                </a:solidFill>
+              </a:rPr>
+              <a:t>Boltz-Fast · Final Dissertation Report · Akik Jana (2024AB05287)</a:t>
+            </a:r>
+          </a:p>
+        </p:txBody>
+      </p:sp>
+      <p:sp>
+        <p:nvSpPr>
+          <p:cNvPr id="6" name="TextBox 5"/>
+          <p:cNvSpPr txBox="1"/>
+          <p:nvPr/>
+        </p:nvSpPr>
+        <p:spPr>
+          <a:xfrm>
+            <a:off x="11183112" y="6473952"/>
+            <a:ext cx="640080" cy="274320"/>
+          </a:xfrm>
+          <a:prstGeom prst="rect">
+            <a:avLst/>
+          </a:prstGeom>
+          <a:noFill/>
+        </p:spPr>
+        <p:txBody>
+          <a:bodyPr wrap="square">
+            <a:spAutoFit/>
+          </a:bodyPr>
+          <a:lstStyle/>
+          <a:p>
+            <a:pPr>
+              <a:spcAft>
+                <a:spcPts val="600"/>
+              </a:spcAft>
+            </a:pPr>
+            <a:r>
+              <a:rPr sz="1000" b="0">
+                <a:solidFill>
+                  <a:srgbClr val="0B2B52"/>
+                </a:solidFill>
+              </a:rPr>
+              <a:t>35</a:t>
+            </a:r>
+          </a:p>
+        </p:txBody>
+      </p:sp>
+      <p:sp>
+        <p:nvSpPr>
+          <p:cNvPr id="7" name="TextBox 6"/>
+          <p:cNvSpPr txBox="1"/>
+          <p:nvPr/>
+        </p:nvSpPr>
+        <p:spPr>
+          <a:xfrm>
+            <a:off x="548640" y="1051560"/>
+            <a:ext cx="11155680" cy="1005840"/>
+          </a:xfrm>
+          <a:prstGeom prst="rect">
+            <a:avLst/>
+          </a:prstGeom>
+          <a:noFill/>
+        </p:spPr>
+        <p:txBody>
+          <a:bodyPr wrap="square">
+            <a:spAutoFit/>
+          </a:bodyPr>
+          <a:lstStyle/>
+          <a:p>
+            <a:pPr>
+              <a:spcAft>
+                <a:spcPts val="600"/>
+              </a:spcAft>
+            </a:pPr>
+            <a:r>
+              <a:rPr sz="1500" b="0">
+                <a:solidFill>
+                  <a:srgbClr val="0B2B52"/>
+                </a:solidFill>
+              </a:rPr>
+              <a:t>1,320 de novo designs released by Anthropic, binding measured by two contract research organisations,</a:t>
+            </a:r>
+          </a:p>
+          <a:p>
+            <a:pPr>
+              <a:spcAft>
+                <a:spcPts val="600"/>
+              </a:spcAft>
+            </a:pPr>
+            <a:r>
+              <a:rPr sz="1500" b="0">
+                <a:solidFill>
+                  <a:srgbClr val="0B2B52"/>
+                </a:solidFill>
+              </a:rPr>
+              <a:t>on molecules that postdate every model's training. Contamination is unavailable as an explanation.</a:t>
+            </a:r>
+          </a:p>
+        </p:txBody>
+      </p:sp>
+      <p:sp>
+        <p:nvSpPr>
+          <p:cNvPr id="8" name="Rounded Rectangle 7"/>
+          <p:cNvSpPr/>
+          <p:nvPr/>
+        </p:nvSpPr>
+        <p:spPr>
+          <a:xfrm>
+            <a:off x="548640" y="1965960"/>
+            <a:ext cx="3520440" cy="1463040"/>
+          </a:xfrm>
+          <a:prstGeom prst="roundRect">
+            <a:avLst/>
+          </a:prstGeom>
+          <a:solidFill>
+            <a:srgbClr val="1E6FB8"/>
+          </a:solidFill>
+          <a:ln>
+            <a:noFill/>
+          </a:ln>
+        </p:spPr>
+        <p:style>
+          <a:lnRef idx="1">
+            <a:schemeClr val="accent1"/>
+          </a:lnRef>
+          <a:fillRef idx="3">
+            <a:schemeClr val="accent1"/>
+          </a:fillRef>
+          <a:effectRef idx="2">
+            <a:schemeClr val="accent1"/>
+          </a:effectRef>
+          <a:fontRef idx="minor">
+            <a:schemeClr val="lt1"/>
+          </a:fontRef>
+        </p:style>
+        <p:txBody>
+          <a:bodyPr rtlCol="0" anchor="ctr" wrap="square"/>
+          <a:lstStyle/>
+          <a:p>
+            <a:pPr algn="ctr"/>
+            <a:r>
+              <a:rPr sz="2300" b="1">
+                <a:solidFill>
+                  <a:srgbClr val="FFFFFF"/>
+                </a:solidFill>
+              </a:rPr>
+              <a:t>0.943</a:t>
+            </a:r>
+          </a:p>
+          <a:p>
+            <a:pPr algn="ctr"/>
+            <a:r>
+              <a:rPr sz="1050">
+                <a:solidFill>
+                  <a:srgbClr val="FFFFFF"/>
+                </a:solidFill>
+              </a:rPr>
+              <a:t>this work, in-training panel</a:t>
+            </a:r>
+          </a:p>
+        </p:txBody>
+      </p:sp>
+      <p:sp>
+        <p:nvSpPr>
+          <p:cNvPr id="9" name="Rounded Rectangle 8"/>
+          <p:cNvSpPr/>
+          <p:nvPr/>
+        </p:nvSpPr>
+        <p:spPr>
+          <a:xfrm>
+            <a:off x="4343400" y="1965960"/>
+            <a:ext cx="3520440" cy="1463040"/>
+          </a:xfrm>
+          <a:prstGeom prst="roundRect">
+            <a:avLst/>
+          </a:prstGeom>
+          <a:solidFill>
+            <a:srgbClr val="0E8F9A"/>
+          </a:solidFill>
+          <a:ln>
+            <a:noFill/>
+          </a:ln>
+        </p:spPr>
+        <p:style>
+          <a:lnRef idx="1">
+            <a:schemeClr val="accent1"/>
+          </a:lnRef>
+          <a:fillRef idx="3">
+            <a:schemeClr val="accent1"/>
+          </a:fillRef>
+          <a:effectRef idx="2">
+            <a:schemeClr val="accent1"/>
+          </a:effectRef>
+          <a:fontRef idx="minor">
+            <a:schemeClr val="lt1"/>
+          </a:fontRef>
+        </p:style>
+        <p:txBody>
+          <a:bodyPr rtlCol="0" anchor="ctr" wrap="square"/>
+          <a:lstStyle/>
+          <a:p>
+            <a:pPr algn="ctr"/>
+            <a:r>
+              <a:rPr sz="2300" b="1">
+                <a:solidFill>
+                  <a:srgbClr val="FFFFFF"/>
+                </a:solidFill>
+              </a:rPr>
+              <a:t>0.682–0.803</a:t>
+            </a:r>
+          </a:p>
+          <a:p>
+            <a:pPr algn="ctr"/>
+            <a:r>
+              <a:rPr sz="1050">
+                <a:solidFill>
+                  <a:srgbClr val="FFFFFF"/>
+                </a:solidFill>
+              </a:rPr>
+              <a:t>this work, held-out panel</a:t>
+            </a:r>
+          </a:p>
+        </p:txBody>
+      </p:sp>
+      <p:sp>
+        <p:nvSpPr>
+          <p:cNvPr id="10" name="Rounded Rectangle 9"/>
+          <p:cNvSpPr/>
+          <p:nvPr/>
+        </p:nvSpPr>
+        <p:spPr>
+          <a:xfrm>
+            <a:off x="8138160" y="1965960"/>
+            <a:ext cx="3566160" cy="1463040"/>
+          </a:xfrm>
+          <a:prstGeom prst="roundRect">
+            <a:avLst/>
+          </a:prstGeom>
+          <a:solidFill>
+            <a:srgbClr val="C62828"/>
+          </a:solidFill>
+          <a:ln>
+            <a:noFill/>
+          </a:ln>
+        </p:spPr>
+        <p:style>
+          <a:lnRef idx="1">
+            <a:schemeClr val="accent1"/>
+          </a:lnRef>
+          <a:fillRef idx="3">
+            <a:schemeClr val="accent1"/>
+          </a:fillRef>
+          <a:effectRef idx="2">
+            <a:schemeClr val="accent1"/>
+          </a:effectRef>
+          <a:fontRef idx="minor">
+            <a:schemeClr val="lt1"/>
+          </a:fontRef>
+        </p:style>
+        <p:txBody>
+          <a:bodyPr rtlCol="0" anchor="ctr" wrap="square"/>
+          <a:lstStyle/>
+          <a:p>
+            <a:pPr algn="ctr"/>
+            <a:r>
+              <a:rPr sz="2300" b="1">
+                <a:solidFill>
+                  <a:srgbClr val="FFFFFF"/>
+                </a:solidFill>
+              </a:rPr>
+              <a:t>0.626</a:t>
+            </a:r>
+          </a:p>
+          <a:p>
+            <a:pPr algn="ctr"/>
+            <a:r>
+              <a:rPr sz="1050">
+                <a:solidFill>
+                  <a:srgbClr val="FFFFFF"/>
+                </a:solidFill>
+              </a:rPr>
+              <a:t>interface pLDDT vs measured binding</a:t>
+            </a:r>
+          </a:p>
+        </p:txBody>
+      </p:sp>
+      <p:sp>
+        <p:nvSpPr>
+          <p:cNvPr id="11" name="TextBox 10"/>
+          <p:cNvSpPr txBox="1"/>
+          <p:nvPr/>
+        </p:nvSpPr>
+        <p:spPr>
+          <a:xfrm>
+            <a:off x="548640" y="3703320"/>
+            <a:ext cx="11155680" cy="640080"/>
+          </a:xfrm>
+          <a:prstGeom prst="rect">
+            <a:avLst/>
+          </a:prstGeom>
+          <a:noFill/>
+        </p:spPr>
+        <p:txBody>
+          <a:bodyPr wrap="square">
+            <a:spAutoFit/>
+          </a:bodyPr>
+          <a:lstStyle/>
+          <a:p>
+            <a:pPr>
+              <a:spcAft>
+                <a:spcPts val="600"/>
+              </a:spcAft>
+            </a:pPr>
+            <a:r>
+              <a:rPr sz="1500" b="0">
+                <a:solidFill>
+                  <a:srgbClr val="0B2B52"/>
+                </a:solidFill>
+              </a:rPr>
+              <a:t>Ten independently developed predictors all land between 0.62 and 0.67. The ceiling belongs to the task.</a:t>
+            </a:r>
+          </a:p>
+        </p:txBody>
+      </p:sp>
+      <p:sp>
+        <p:nvSpPr>
+          <p:cNvPr id="12" name="Rounded Rectangle 11"/>
+          <p:cNvSpPr/>
+          <p:nvPr/>
+        </p:nvSpPr>
+        <p:spPr>
+          <a:xfrm>
+            <a:off x="548640" y="4343400"/>
+            <a:ext cx="11155680" cy="960120"/>
+          </a:xfrm>
+          <a:prstGeom prst="roundRect">
+            <a:avLst/>
+          </a:prstGeom>
+          <a:solidFill>
+            <a:srgbClr val="2E7D32"/>
+          </a:solidFill>
+          <a:ln>
+            <a:noFill/>
+          </a:ln>
+        </p:spPr>
+        <p:style>
+          <a:lnRef idx="1">
+            <a:schemeClr val="accent1"/>
+          </a:lnRef>
+          <a:fillRef idx="3">
+            <a:schemeClr val="accent1"/>
+          </a:fillRef>
+          <a:effectRef idx="2">
+            <a:schemeClr val="accent1"/>
+          </a:effectRef>
+          <a:fontRef idx="minor">
+            <a:schemeClr val="lt1"/>
+          </a:fontRef>
+        </p:style>
+        <p:txBody>
+          <a:bodyPr rtlCol="0" anchor="ctr" wrap="square"/>
+          <a:lstStyle/>
+          <a:p>
+            <a:pPr algn="ctr">
+              <a:spcAft>
+                <a:spcPts val="600"/>
+              </a:spcAft>
+            </a:pPr>
+            <a:r>
+              <a:rPr sz="1700" b="1">
+                <a:solidFill>
+                  <a:srgbClr val="FFFFFF"/>
+                </a:solidFill>
+              </a:rPr>
+              <a:t>Interface pLDDT beats the binder's whole-chain confidence by +0.033 AUC [+0.005, +0.061] — Section 7.7's claim, on measured binding.</a:t>
+            </a:r>
+          </a:p>
+        </p:txBody>
+      </p:sp>
+      <p:sp>
+        <p:nvSpPr>
+          <p:cNvPr id="13" name="Rounded Rectangle 12"/>
+          <p:cNvSpPr/>
+          <p:nvPr/>
+        </p:nvSpPr>
+        <p:spPr>
+          <a:xfrm>
+            <a:off x="548640" y="5440680"/>
+            <a:ext cx="11155680" cy="868680"/>
+          </a:xfrm>
+          <a:prstGeom prst="roundRect">
+            <a:avLst/>
+          </a:prstGeom>
+          <a:solidFill>
+            <a:srgbClr val="FDF3E0"/>
+          </a:solidFill>
+          <a:ln>
+            <a:noFill/>
+          </a:ln>
+        </p:spPr>
+        <p:style>
+          <a:lnRef idx="1">
+            <a:schemeClr val="accent1"/>
+          </a:lnRef>
+          <a:fillRef idx="3">
+            <a:schemeClr val="accent1"/>
+          </a:fillRef>
+          <a:effectRef idx="2">
+            <a:schemeClr val="accent1"/>
+          </a:effectRef>
+          <a:fontRef idx="minor">
+            <a:schemeClr val="lt1"/>
+          </a:fontRef>
+        </p:style>
+        <p:txBody>
+          <a:bodyPr rtlCol="0" anchor="ctr" wrap="square"/>
+          <a:lstStyle/>
+          <a:p>
+            <a:pPr algn="ctr">
+              <a:spcAft>
+                <a:spcPts val="600"/>
+              </a:spcAft>
+            </a:pPr>
+            <a:r>
+              <a:rPr sz="1250" b="0">
+                <a:solidFill>
+                  <a:srgbClr val="8A5200"/>
+                </a:solidFill>
+              </a:rPr>
+              <a:t>The held-out figure is far closer to the wet-lab figure than the headline is, and still above it. A benchmark quoted without saying whether the complexes were in training overstates a screen — this puts a number on by how much, from outside the dissertation.</a:t>
             </a:r>
           </a:p>
         </p:txBody>

--- a/final_dissertation_presentation.pptx
+++ b/final_dissertation_presentation.pptx
@@ -16048,8 +16048,8 @@
         </p:nvSpPr>
         <p:spPr>
           <a:xfrm>
-            <a:off x="548640" y="5349240"/>
-            <a:ext cx="11155680" cy="960120"/>
+            <a:off x="548640" y="5074920"/>
+            <a:ext cx="11155680" cy="868680"/>
           </a:xfrm>
           <a:prstGeom prst="roundRect">
             <a:avLst/>
@@ -16103,8 +16103,8 @@
         </p:nvSpPr>
         <p:spPr>
           <a:xfrm>
-            <a:off x="548640" y="6163056"/>
-            <a:ext cx="11155680" cy="539496"/>
+            <a:off x="548640" y="6016752"/>
+            <a:ext cx="11155680" cy="402336"/>
           </a:xfrm>
           <a:prstGeom prst="rect">
             <a:avLst/>
@@ -16123,12 +16123,12 @@
               </a:spcAft>
             </a:pPr>
             <a:r>
-              <a:rPr sz="1100" b="0">
-                <a:solidFill>
-                  <a:srgbClr val="8A5200"/>
-                </a:solidFill>
-              </a:rPr>
-              <a:t>Caveat: one model, 22 receptors, a single draw.</a:t>
+              <a:rPr sz="1200" b="0">
+                <a:solidFill>
+                  <a:srgbClr val="0B2B52"/>
+                </a:solidFill>
+              </a:rPr>
+              <a:t>Caveat: one model, 22 receptors, one draw — and 0.943 is an in-training figure; against measured binding it is 0.626 (slide 35).</a:t>
             </a:r>
           </a:p>
         </p:txBody>
@@ -17633,1134 +17633,6 @@
 </file>
 
 <file path=ppt/slides/slide33.xml><?xml version="1.0" encoding="utf-8"?>
-<p:sld xmlns:a="http://schemas.openxmlformats.org/drawingml/2006/main" xmlns:p="http://schemas.openxmlformats.org/presentationml/2006/main" xmlns:r="http://schemas.openxmlformats.org/officeDocument/2006/relationships">
-  <p:cSld>
-    <p:spTree>
-      <p:nvGrpSpPr>
-        <p:cNvPr id="1" name=""/>
-        <p:cNvGrpSpPr/>
-        <p:nvPr/>
-      </p:nvGrpSpPr>
-      <p:grpSpPr/>
-      <p:sp>
-        <p:nvSpPr>
-          <p:cNvPr id="2" name="Rectangle 1"/>
-          <p:cNvSpPr/>
-          <p:nvPr/>
-        </p:nvSpPr>
-        <p:spPr>
-          <a:xfrm>
-            <a:off x="0" y="0"/>
-            <a:ext cx="12191695" cy="914400"/>
-          </a:xfrm>
-          <a:prstGeom prst="rect">
-            <a:avLst/>
-          </a:prstGeom>
-          <a:solidFill>
-            <a:srgbClr val="0B2B52"/>
-          </a:solidFill>
-          <a:ln>
-            <a:noFill/>
-          </a:ln>
-          <a:effectLst/>
-        </p:spPr>
-        <p:style>
-          <a:lnRef idx="1">
-            <a:schemeClr val="accent1"/>
-          </a:lnRef>
-          <a:fillRef idx="3">
-            <a:schemeClr val="accent1"/>
-          </a:fillRef>
-          <a:effectRef idx="2">
-            <a:schemeClr val="accent1"/>
-          </a:effectRef>
-          <a:fontRef idx="minor">
-            <a:schemeClr val="lt1"/>
-          </a:fontRef>
-        </p:style>
-        <p:txBody>
-          <a:bodyPr rtlCol="0" anchor="ctr"/>
-          <a:lstStyle/>
-          <a:p>
-            <a:pPr algn="ctr"/>
-          </a:p>
-        </p:txBody>
-      </p:sp>
-      <p:sp>
-        <p:nvSpPr>
-          <p:cNvPr id="3" name="Rectangle 2"/>
-          <p:cNvSpPr/>
-          <p:nvPr/>
-        </p:nvSpPr>
-        <p:spPr>
-          <a:xfrm>
-            <a:off x="0" y="914400"/>
-            <a:ext cx="12191695" cy="54864"/>
-          </a:xfrm>
-          <a:prstGeom prst="rect">
-            <a:avLst/>
-          </a:prstGeom>
-          <a:solidFill>
-            <a:srgbClr val="1E6FB8"/>
-          </a:solidFill>
-          <a:ln>
-            <a:noFill/>
-          </a:ln>
-          <a:effectLst/>
-        </p:spPr>
-        <p:style>
-          <a:lnRef idx="1">
-            <a:schemeClr val="accent1"/>
-          </a:lnRef>
-          <a:fillRef idx="3">
-            <a:schemeClr val="accent1"/>
-          </a:fillRef>
-          <a:effectRef idx="2">
-            <a:schemeClr val="accent1"/>
-          </a:effectRef>
-          <a:fontRef idx="minor">
-            <a:schemeClr val="lt1"/>
-          </a:fontRef>
-        </p:style>
-        <p:txBody>
-          <a:bodyPr rtlCol="0" anchor="ctr"/>
-          <a:lstStyle/>
-          <a:p>
-            <a:pPr algn="ctr"/>
-          </a:p>
-        </p:txBody>
-      </p:sp>
-      <p:sp>
-        <p:nvSpPr>
-          <p:cNvPr id="4" name="TextBox 3"/>
-          <p:cNvSpPr txBox="1"/>
-          <p:nvPr/>
-        </p:nvSpPr>
-        <p:spPr>
-          <a:xfrm>
-            <a:off x="502920" y="109728"/>
-            <a:ext cx="11155680" cy="777240"/>
-          </a:xfrm>
-          <a:prstGeom prst="rect">
-            <a:avLst/>
-          </a:prstGeom>
-          <a:noFill/>
-        </p:spPr>
-        <p:txBody>
-          <a:bodyPr wrap="square">
-            <a:spAutoFit/>
-          </a:bodyPr>
-          <a:lstStyle/>
-          <a:p>
-            <a:pPr>
-              <a:spcBef>
-                <a:spcPts val="0"/>
-              </a:spcBef>
-              <a:spcAft>
-                <a:spcPts val="400"/>
-              </a:spcAft>
-            </a:pPr>
-            <a:r>
-              <a:rPr sz="2600" b="1" i="0">
-                <a:solidFill>
-                  <a:srgbClr val="FFFFFF"/>
-                </a:solidFill>
-              </a:rPr>
-              <a:t>Future Plan</a:t>
-            </a:r>
-          </a:p>
-        </p:txBody>
-      </p:sp>
-      <p:sp>
-        <p:nvSpPr>
-          <p:cNvPr id="5" name="TextBox 4"/>
-          <p:cNvSpPr txBox="1"/>
-          <p:nvPr/>
-        </p:nvSpPr>
-        <p:spPr>
-          <a:xfrm>
-            <a:off x="502920" y="6473952"/>
-            <a:ext cx="8229600" cy="274320"/>
-          </a:xfrm>
-          <a:prstGeom prst="rect">
-            <a:avLst/>
-          </a:prstGeom>
-          <a:noFill/>
-        </p:spPr>
-        <p:txBody>
-          <a:bodyPr wrap="square">
-            <a:spAutoFit/>
-          </a:bodyPr>
-          <a:lstStyle/>
-          <a:p>
-            <a:pPr>
-              <a:spcBef>
-                <a:spcPts val="0"/>
-              </a:spcBef>
-              <a:spcAft>
-                <a:spcPts val="600"/>
-              </a:spcAft>
-            </a:pPr>
-            <a:r>
-              <a:rPr sz="900" b="0">
-                <a:solidFill>
-                  <a:srgbClr val="555555"/>
-                </a:solidFill>
-              </a:rPr>
-              <a:t>Boltz-Fast · Final Dissertation Report · Akik Jana (2024AB05287)</a:t>
-            </a:r>
-          </a:p>
-        </p:txBody>
-      </p:sp>
-      <p:sp>
-        <p:nvSpPr>
-          <p:cNvPr id="6" name="TextBox 5"/>
-          <p:cNvSpPr txBox="1"/>
-          <p:nvPr/>
-        </p:nvSpPr>
-        <p:spPr>
-          <a:xfrm>
-            <a:off x="11185855" y="6473952"/>
-            <a:ext cx="640080" cy="274320"/>
-          </a:xfrm>
-          <a:prstGeom prst="rect">
-            <a:avLst/>
-          </a:prstGeom>
-          <a:noFill/>
-        </p:spPr>
-        <p:txBody>
-          <a:bodyPr wrap="square">
-            <a:spAutoFit/>
-          </a:bodyPr>
-          <a:lstStyle/>
-          <a:p>
-            <a:pPr algn="r">
-              <a:spcBef>
-                <a:spcPts val="0"/>
-              </a:spcBef>
-              <a:spcAft>
-                <a:spcPts val="600"/>
-              </a:spcAft>
-            </a:pPr>
-            <a:r>
-              <a:rPr sz="1000" b="0">
-                <a:solidFill>
-                  <a:srgbClr val="0B2B52"/>
-                </a:solidFill>
-              </a:rPr>
-              <a:t>36</a:t>
-            </a:r>
-          </a:p>
-        </p:txBody>
-      </p:sp>
-      <p:sp>
-        <p:nvSpPr>
-          <p:cNvPr id="7" name="Oval 6"/>
-          <p:cNvSpPr/>
-          <p:nvPr/>
-        </p:nvSpPr>
-        <p:spPr>
-          <a:xfrm>
-            <a:off x="548640" y="1325880"/>
-            <a:ext cx="566928" cy="566928"/>
-          </a:xfrm>
-          <a:prstGeom prst="ellipse">
-            <a:avLst/>
-          </a:prstGeom>
-          <a:solidFill>
-            <a:srgbClr val="1E6FB8"/>
-          </a:solidFill>
-          <a:ln>
-            <a:noFill/>
-          </a:ln>
-          <a:effectLst/>
-        </p:spPr>
-        <p:style>
-          <a:lnRef idx="1">
-            <a:schemeClr val="accent1"/>
-          </a:lnRef>
-          <a:fillRef idx="3">
-            <a:schemeClr val="accent1"/>
-          </a:fillRef>
-          <a:effectRef idx="2">
-            <a:schemeClr val="accent1"/>
-          </a:effectRef>
-          <a:fontRef idx="minor">
-            <a:schemeClr val="lt1"/>
-          </a:fontRef>
-        </p:style>
-        <p:txBody>
-          <a:bodyPr rtlCol="0" anchor="ctr" wrap="square"/>
-          <a:lstStyle/>
-          <a:p>
-            <a:pPr algn="ctr">
-              <a:spcBef>
-                <a:spcPts val="0"/>
-              </a:spcBef>
-              <a:spcAft>
-                <a:spcPts val="400"/>
-              </a:spcAft>
-            </a:pPr>
-            <a:r>
-              <a:rPr sz="1800" b="1" i="0">
-                <a:solidFill>
-                  <a:srgbClr val="FFFFFF"/>
-                </a:solidFill>
-              </a:rPr>
-              <a:t>1</a:t>
-            </a:r>
-          </a:p>
-        </p:txBody>
-      </p:sp>
-      <p:sp>
-        <p:nvSpPr>
-          <p:cNvPr id="8" name="TextBox 7"/>
-          <p:cNvSpPr txBox="1"/>
-          <p:nvPr/>
-        </p:nvSpPr>
-        <p:spPr>
-          <a:xfrm>
-            <a:off x="1325880" y="1307592"/>
-            <a:ext cx="10332720" cy="868680"/>
-          </a:xfrm>
-          <a:prstGeom prst="rect">
-            <a:avLst/>
-          </a:prstGeom>
-          <a:noFill/>
-        </p:spPr>
-        <p:txBody>
-          <a:bodyPr wrap="square">
-            <a:spAutoFit/>
-          </a:bodyPr>
-          <a:lstStyle/>
-          <a:p>
-            <a:pPr>
-              <a:spcBef>
-                <a:spcPts val="0"/>
-              </a:spcBef>
-              <a:spcAft>
-                <a:spcPts val="600"/>
-              </a:spcAft>
-            </a:pPr>
-            <a:r>
-              <a:rPr sz="1300" b="0">
-                <a:solidFill>
-                  <a:srgbClr val="0B2B52"/>
-                </a:solidFill>
-              </a:rPr>
-              <a:t>DONE — profiled; and measured what the optimisations actually deliver on pretrained weights (slides 11–18).</a:t>
-            </a:r>
-          </a:p>
-        </p:txBody>
-      </p:sp>
-      <p:sp>
-        <p:nvSpPr>
-          <p:cNvPr id="9" name="Oval 8"/>
-          <p:cNvSpPr/>
-          <p:nvPr/>
-        </p:nvSpPr>
-        <p:spPr>
-          <a:xfrm>
-            <a:off x="548640" y="2304288"/>
-            <a:ext cx="566928" cy="566928"/>
-          </a:xfrm>
-          <a:prstGeom prst="ellipse">
-            <a:avLst/>
-          </a:prstGeom>
-          <a:solidFill>
-            <a:srgbClr val="0E8F9A"/>
-          </a:solidFill>
-          <a:ln>
-            <a:noFill/>
-          </a:ln>
-          <a:effectLst/>
-        </p:spPr>
-        <p:style>
-          <a:lnRef idx="1">
-            <a:schemeClr val="accent1"/>
-          </a:lnRef>
-          <a:fillRef idx="3">
-            <a:schemeClr val="accent1"/>
-          </a:fillRef>
-          <a:effectRef idx="2">
-            <a:schemeClr val="accent1"/>
-          </a:effectRef>
-          <a:fontRef idx="minor">
-            <a:schemeClr val="lt1"/>
-          </a:fontRef>
-        </p:style>
-        <p:txBody>
-          <a:bodyPr rtlCol="0" anchor="ctr" wrap="square"/>
-          <a:lstStyle/>
-          <a:p>
-            <a:pPr algn="ctr">
-              <a:spcBef>
-                <a:spcPts val="0"/>
-              </a:spcBef>
-              <a:spcAft>
-                <a:spcPts val="400"/>
-              </a:spcAft>
-            </a:pPr>
-            <a:r>
-              <a:rPr sz="1800" b="1" i="0">
-                <a:solidFill>
-                  <a:srgbClr val="FFFFFF"/>
-                </a:solidFill>
-              </a:rPr>
-              <a:t>2</a:t>
-            </a:r>
-          </a:p>
-        </p:txBody>
-      </p:sp>
-      <p:sp>
-        <p:nvSpPr>
-          <p:cNvPr id="10" name="TextBox 9"/>
-          <p:cNvSpPr txBox="1"/>
-          <p:nvPr/>
-        </p:nvSpPr>
-        <p:spPr>
-          <a:xfrm>
-            <a:off x="1325880" y="2286000"/>
-            <a:ext cx="10332720" cy="868680"/>
-          </a:xfrm>
-          <a:prstGeom prst="rect">
-            <a:avLst/>
-          </a:prstGeom>
-          <a:noFill/>
-        </p:spPr>
-        <p:txBody>
-          <a:bodyPr wrap="square">
-            <a:spAutoFit/>
-          </a:bodyPr>
-          <a:lstStyle/>
-          <a:p>
-            <a:pPr>
-              <a:spcBef>
-                <a:spcPts val="0"/>
-              </a:spcBef>
-              <a:spcAft>
-                <a:spcPts val="600"/>
-              </a:spcAft>
-            </a:pPr>
-            <a:r>
-              <a:rPr sz="1300" b="0">
-                <a:solidFill>
-                  <a:srgbClr val="0B2B52"/>
-                </a:solidFill>
-              </a:rPr>
-              <a:t>DONE — DeCAF-Boltz, distilled for 10 steps, folds the 132-complex panel in ~20 min locally and returns 96% physically plausible backbones against 14% for a stock model run short (slides 27-28).</a:t>
-            </a:r>
-          </a:p>
-        </p:txBody>
-      </p:sp>
-      <p:sp>
-        <p:nvSpPr>
-          <p:cNvPr id="11" name="Oval 10"/>
-          <p:cNvSpPr/>
-          <p:nvPr/>
-        </p:nvSpPr>
-        <p:spPr>
-          <a:xfrm>
-            <a:off x="548640" y="3282696"/>
-            <a:ext cx="566928" cy="566928"/>
-          </a:xfrm>
-          <a:prstGeom prst="ellipse">
-            <a:avLst/>
-          </a:prstGeom>
-          <a:solidFill>
-            <a:srgbClr val="2E7D32"/>
-          </a:solidFill>
-          <a:ln>
-            <a:noFill/>
-          </a:ln>
-          <a:effectLst/>
-        </p:spPr>
-        <p:style>
-          <a:lnRef idx="1">
-            <a:schemeClr val="accent1"/>
-          </a:lnRef>
-          <a:fillRef idx="3">
-            <a:schemeClr val="accent1"/>
-          </a:fillRef>
-          <a:effectRef idx="2">
-            <a:schemeClr val="accent1"/>
-          </a:effectRef>
-          <a:fontRef idx="minor">
-            <a:schemeClr val="lt1"/>
-          </a:fontRef>
-        </p:style>
-        <p:txBody>
-          <a:bodyPr rtlCol="0" anchor="ctr" wrap="square"/>
-          <a:lstStyle/>
-          <a:p>
-            <a:pPr algn="ctr">
-              <a:spcBef>
-                <a:spcPts val="0"/>
-              </a:spcBef>
-              <a:spcAft>
-                <a:spcPts val="400"/>
-              </a:spcAft>
-            </a:pPr>
-            <a:r>
-              <a:rPr sz="1800" b="1" i="0">
-                <a:solidFill>
-                  <a:srgbClr val="FFFFFF"/>
-                </a:solidFill>
-              </a:rPr>
-              <a:t>3</a:t>
-            </a:r>
-          </a:p>
-        </p:txBody>
-      </p:sp>
-      <p:sp>
-        <p:nvSpPr>
-          <p:cNvPr id="12" name="TextBox 11"/>
-          <p:cNvSpPr txBox="1"/>
-          <p:nvPr/>
-        </p:nvSpPr>
-        <p:spPr>
-          <a:xfrm>
-            <a:off x="1325880" y="3264408"/>
-            <a:ext cx="10332720" cy="868680"/>
-          </a:xfrm>
-          <a:prstGeom prst="rect">
-            <a:avLst/>
-          </a:prstGeom>
-          <a:noFill/>
-        </p:spPr>
-        <p:txBody>
-          <a:bodyPr wrap="square">
-            <a:spAutoFit/>
-          </a:bodyPr>
-          <a:lstStyle/>
-          <a:p>
-            <a:pPr>
-              <a:spcBef>
-                <a:spcPts val="0"/>
-              </a:spcBef>
-              <a:spcAft>
-                <a:spcPts val="600"/>
-              </a:spcAft>
-            </a:pPr>
-            <a:r>
-              <a:rPr sz="1300" b="0">
-                <a:solidFill>
-                  <a:srgbClr val="0B2B52"/>
-                </a:solidFill>
-              </a:rPr>
-              <a:t>DONE, NEGATIVE — the surrogate was distilled and evaluated: ipTM does not rank binders, so no surrogate distilled from it can either.</a:t>
-            </a:r>
-          </a:p>
-        </p:txBody>
-      </p:sp>
-      <p:sp>
-        <p:nvSpPr>
-          <p:cNvPr id="13" name="Oval 12"/>
-          <p:cNvSpPr/>
-          <p:nvPr/>
-        </p:nvSpPr>
-        <p:spPr>
-          <a:xfrm>
-            <a:off x="548640" y="4261104"/>
-            <a:ext cx="566928" cy="566928"/>
-          </a:xfrm>
-          <a:prstGeom prst="ellipse">
-            <a:avLst/>
-          </a:prstGeom>
-          <a:solidFill>
-            <a:srgbClr val="C77700"/>
-          </a:solidFill>
-          <a:ln>
-            <a:noFill/>
-          </a:ln>
-          <a:effectLst/>
-        </p:spPr>
-        <p:style>
-          <a:lnRef idx="1">
-            <a:schemeClr val="accent1"/>
-          </a:lnRef>
-          <a:fillRef idx="3">
-            <a:schemeClr val="accent1"/>
-          </a:fillRef>
-          <a:effectRef idx="2">
-            <a:schemeClr val="accent1"/>
-          </a:effectRef>
-          <a:fontRef idx="minor">
-            <a:schemeClr val="lt1"/>
-          </a:fontRef>
-        </p:style>
-        <p:txBody>
-          <a:bodyPr rtlCol="0" anchor="ctr" wrap="square"/>
-          <a:lstStyle/>
-          <a:p>
-            <a:pPr algn="ctr">
-              <a:spcBef>
-                <a:spcPts val="0"/>
-              </a:spcBef>
-              <a:spcAft>
-                <a:spcPts val="400"/>
-              </a:spcAft>
-            </a:pPr>
-            <a:r>
-              <a:rPr sz="1800" b="1" i="0">
-                <a:solidFill>
-                  <a:srgbClr val="FFFFFF"/>
-                </a:solidFill>
-              </a:rPr>
-              <a:t>4</a:t>
-            </a:r>
-          </a:p>
-        </p:txBody>
-      </p:sp>
-      <p:sp>
-        <p:nvSpPr>
-          <p:cNvPr id="14" name="TextBox 13"/>
-          <p:cNvSpPr txBox="1"/>
-          <p:nvPr/>
-        </p:nvSpPr>
-        <p:spPr>
-          <a:xfrm>
-            <a:off x="1325880" y="4242816"/>
-            <a:ext cx="10332720" cy="868680"/>
-          </a:xfrm>
-          <a:prstGeom prst="rect">
-            <a:avLst/>
-          </a:prstGeom>
-          <a:noFill/>
-        </p:spPr>
-        <p:txBody>
-          <a:bodyPr wrap="square">
-            <a:spAutoFit/>
-          </a:bodyPr>
-          <a:lstStyle/>
-          <a:p>
-            <a:pPr>
-              <a:spcBef>
-                <a:spcPts val="0"/>
-              </a:spcBef>
-              <a:spcAft>
-                <a:spcPts val="600"/>
-              </a:spcAft>
-            </a:pPr>
-            <a:r>
-              <a:rPr sz="1300" b="0">
-                <a:solidFill>
-                  <a:srgbClr val="0B2B52"/>
-                </a:solidFill>
-              </a:rPr>
-              <a:t>Use open Boltz-2 weights only — Boltz-2.1 is closed / API-only.</a:t>
-            </a:r>
-          </a:p>
-        </p:txBody>
-      </p:sp>
-      <p:sp>
-        <p:nvSpPr>
-          <p:cNvPr id="15" name="Oval 14"/>
-          <p:cNvSpPr/>
-          <p:nvPr/>
-        </p:nvSpPr>
-        <p:spPr>
-          <a:xfrm>
-            <a:off x="548640" y="5239512"/>
-            <a:ext cx="566928" cy="566928"/>
-          </a:xfrm>
-          <a:prstGeom prst="ellipse">
-            <a:avLst/>
-          </a:prstGeom>
-          <a:solidFill>
-            <a:srgbClr val="0B2B52"/>
-          </a:solidFill>
-          <a:ln>
-            <a:noFill/>
-          </a:ln>
-          <a:effectLst/>
-        </p:spPr>
-        <p:style>
-          <a:lnRef idx="1">
-            <a:schemeClr val="accent1"/>
-          </a:lnRef>
-          <a:fillRef idx="3">
-            <a:schemeClr val="accent1"/>
-          </a:fillRef>
-          <a:effectRef idx="2">
-            <a:schemeClr val="accent1"/>
-          </a:effectRef>
-          <a:fontRef idx="minor">
-            <a:schemeClr val="lt1"/>
-          </a:fontRef>
-        </p:style>
-        <p:txBody>
-          <a:bodyPr rtlCol="0" anchor="ctr" wrap="square"/>
-          <a:lstStyle/>
-          <a:p>
-            <a:pPr algn="ctr">
-              <a:spcBef>
-                <a:spcPts val="0"/>
-              </a:spcBef>
-              <a:spcAft>
-                <a:spcPts val="400"/>
-              </a:spcAft>
-            </a:pPr>
-            <a:r>
-              <a:rPr sz="1800" b="1" i="0">
-                <a:solidFill>
-                  <a:srgbClr val="FFFFFF"/>
-                </a:solidFill>
-              </a:rPr>
-              <a:t>5</a:t>
-            </a:r>
-          </a:p>
-        </p:txBody>
-      </p:sp>
-      <p:sp>
-        <p:nvSpPr>
-          <p:cNvPr id="16" name="TextBox 15"/>
-          <p:cNvSpPr txBox="1"/>
-          <p:nvPr/>
-        </p:nvSpPr>
-        <p:spPr>
-          <a:xfrm>
-            <a:off x="1325880" y="5221224"/>
-            <a:ext cx="10332720" cy="868680"/>
-          </a:xfrm>
-          <a:prstGeom prst="rect">
-            <a:avLst/>
-          </a:prstGeom>
-          <a:noFill/>
-        </p:spPr>
-        <p:txBody>
-          <a:bodyPr wrap="square">
-            <a:spAutoFit/>
-          </a:bodyPr>
-          <a:lstStyle/>
-          <a:p>
-            <a:pPr>
-              <a:spcBef>
-                <a:spcPts val="0"/>
-              </a:spcBef>
-              <a:spcAft>
-                <a:spcPts val="600"/>
-              </a:spcAft>
-            </a:pPr>
-            <a:r>
-              <a:rPr sz="1300" b="0">
-                <a:solidFill>
-                  <a:srgbClr val="0B2B52"/>
-                </a:solidFill>
-              </a:rPr>
-              <a:t>Production GPU scaling — NO LONGER a prerequisite. MPS (~3x) plus few-step distillation let the held-out panel be folded five times on this laptop, and the third draw overturned what the first two supported. Scaling is now for extending the panel past 22 receptors, which is the binding constraint on the open questions.</a:t>
-            </a:r>
-          </a:p>
-        </p:txBody>
-      </p:sp>
-    </p:spTree>
-  </p:cSld>
-  <p:clrMapOvr>
-    <a:masterClrMapping/>
-  </p:clrMapOvr>
-</p:sld>
-</file>
-
-<file path=ppt/slides/slide34.xml><?xml version="1.0" encoding="utf-8"?>
-<p:sld xmlns:a="http://schemas.openxmlformats.org/drawingml/2006/main" xmlns:p="http://schemas.openxmlformats.org/presentationml/2006/main" xmlns:r="http://schemas.openxmlformats.org/officeDocument/2006/relationships">
-  <p:cSld>
-    <p:spTree>
-      <p:nvGrpSpPr>
-        <p:cNvPr id="1" name=""/>
-        <p:cNvGrpSpPr/>
-        <p:nvPr/>
-      </p:nvGrpSpPr>
-      <p:grpSpPr/>
-      <p:sp>
-        <p:nvSpPr>
-          <p:cNvPr id="2" name="Rectangle 1"/>
-          <p:cNvSpPr/>
-          <p:nvPr/>
-        </p:nvSpPr>
-        <p:spPr>
-          <a:xfrm>
-            <a:off x="0" y="0"/>
-            <a:ext cx="12191695" cy="914400"/>
-          </a:xfrm>
-          <a:prstGeom prst="rect">
-            <a:avLst/>
-          </a:prstGeom>
-          <a:solidFill>
-            <a:srgbClr val="0B2B52"/>
-          </a:solidFill>
-          <a:ln>
-            <a:noFill/>
-          </a:ln>
-          <a:effectLst/>
-        </p:spPr>
-        <p:style>
-          <a:lnRef idx="1">
-            <a:schemeClr val="accent1"/>
-          </a:lnRef>
-          <a:fillRef idx="3">
-            <a:schemeClr val="accent1"/>
-          </a:fillRef>
-          <a:effectRef idx="2">
-            <a:schemeClr val="accent1"/>
-          </a:effectRef>
-          <a:fontRef idx="minor">
-            <a:schemeClr val="lt1"/>
-          </a:fontRef>
-        </p:style>
-        <p:txBody>
-          <a:bodyPr rtlCol="0" anchor="ctr"/>
-          <a:lstStyle/>
-          <a:p>
-            <a:pPr algn="ctr"/>
-          </a:p>
-        </p:txBody>
-      </p:sp>
-      <p:sp>
-        <p:nvSpPr>
-          <p:cNvPr id="3" name="Rectangle 2"/>
-          <p:cNvSpPr/>
-          <p:nvPr/>
-        </p:nvSpPr>
-        <p:spPr>
-          <a:xfrm>
-            <a:off x="0" y="914400"/>
-            <a:ext cx="12191695" cy="54864"/>
-          </a:xfrm>
-          <a:prstGeom prst="rect">
-            <a:avLst/>
-          </a:prstGeom>
-          <a:solidFill>
-            <a:srgbClr val="1E6FB8"/>
-          </a:solidFill>
-          <a:ln>
-            <a:noFill/>
-          </a:ln>
-          <a:effectLst/>
-        </p:spPr>
-        <p:style>
-          <a:lnRef idx="1">
-            <a:schemeClr val="accent1"/>
-          </a:lnRef>
-          <a:fillRef idx="3">
-            <a:schemeClr val="accent1"/>
-          </a:fillRef>
-          <a:effectRef idx="2">
-            <a:schemeClr val="accent1"/>
-          </a:effectRef>
-          <a:fontRef idx="minor">
-            <a:schemeClr val="lt1"/>
-          </a:fontRef>
-        </p:style>
-        <p:txBody>
-          <a:bodyPr rtlCol="0" anchor="ctr"/>
-          <a:lstStyle/>
-          <a:p>
-            <a:pPr algn="ctr"/>
-          </a:p>
-        </p:txBody>
-      </p:sp>
-      <p:sp>
-        <p:nvSpPr>
-          <p:cNvPr id="4" name="TextBox 3"/>
-          <p:cNvSpPr txBox="1"/>
-          <p:nvPr/>
-        </p:nvSpPr>
-        <p:spPr>
-          <a:xfrm>
-            <a:off x="502920" y="109728"/>
-            <a:ext cx="11155680" cy="777240"/>
-          </a:xfrm>
-          <a:prstGeom prst="rect">
-            <a:avLst/>
-          </a:prstGeom>
-          <a:noFill/>
-        </p:spPr>
-        <p:txBody>
-          <a:bodyPr wrap="square">
-            <a:spAutoFit/>
-          </a:bodyPr>
-          <a:lstStyle/>
-          <a:p>
-            <a:pPr>
-              <a:spcBef>
-                <a:spcPts val="0"/>
-              </a:spcBef>
-              <a:spcAft>
-                <a:spcPts val="400"/>
-              </a:spcAft>
-            </a:pPr>
-            <a:r>
-              <a:rPr sz="2600" b="1" i="0">
-                <a:solidFill>
-                  <a:srgbClr val="FFFFFF"/>
-                </a:solidFill>
-              </a:rPr>
-              <a:t>Summary</a:t>
-            </a:r>
-          </a:p>
-        </p:txBody>
-      </p:sp>
-      <p:sp>
-        <p:nvSpPr>
-          <p:cNvPr id="5" name="TextBox 4"/>
-          <p:cNvSpPr txBox="1"/>
-          <p:nvPr/>
-        </p:nvSpPr>
-        <p:spPr>
-          <a:xfrm>
-            <a:off x="502920" y="6473952"/>
-            <a:ext cx="8229600" cy="274320"/>
-          </a:xfrm>
-          <a:prstGeom prst="rect">
-            <a:avLst/>
-          </a:prstGeom>
-          <a:noFill/>
-        </p:spPr>
-        <p:txBody>
-          <a:bodyPr wrap="square">
-            <a:spAutoFit/>
-          </a:bodyPr>
-          <a:lstStyle/>
-          <a:p>
-            <a:pPr>
-              <a:spcBef>
-                <a:spcPts val="0"/>
-              </a:spcBef>
-              <a:spcAft>
-                <a:spcPts val="600"/>
-              </a:spcAft>
-            </a:pPr>
-            <a:r>
-              <a:rPr sz="900" b="0">
-                <a:solidFill>
-                  <a:srgbClr val="555555"/>
-                </a:solidFill>
-              </a:rPr>
-              <a:t>Boltz-Fast · Final Dissertation Report · Akik Jana (2024AB05287)</a:t>
-            </a:r>
-          </a:p>
-        </p:txBody>
-      </p:sp>
-      <p:sp>
-        <p:nvSpPr>
-          <p:cNvPr id="6" name="TextBox 5"/>
-          <p:cNvSpPr txBox="1"/>
-          <p:nvPr/>
-        </p:nvSpPr>
-        <p:spPr>
-          <a:xfrm>
-            <a:off x="11185855" y="6473952"/>
-            <a:ext cx="640080" cy="274320"/>
-          </a:xfrm>
-          <a:prstGeom prst="rect">
-            <a:avLst/>
-          </a:prstGeom>
-          <a:noFill/>
-        </p:spPr>
-        <p:txBody>
-          <a:bodyPr wrap="square">
-            <a:spAutoFit/>
-          </a:bodyPr>
-          <a:lstStyle/>
-          <a:p>
-            <a:pPr algn="r">
-              <a:spcBef>
-                <a:spcPts val="0"/>
-              </a:spcBef>
-              <a:spcAft>
-                <a:spcPts val="600"/>
-              </a:spcAft>
-            </a:pPr>
-            <a:r>
-              <a:rPr sz="1000" b="0">
-                <a:solidFill>
-                  <a:srgbClr val="0B2B52"/>
-                </a:solidFill>
-              </a:rPr>
-              <a:t>37</a:t>
-            </a:r>
-          </a:p>
-        </p:txBody>
-      </p:sp>
-      <p:sp>
-        <p:nvSpPr>
-          <p:cNvPr id="7" name="TextBox 6"/>
-          <p:cNvSpPr txBox="1"/>
-          <p:nvPr/>
-        </p:nvSpPr>
-        <p:spPr>
-          <a:xfrm>
-            <a:off x="548640" y="1280160"/>
-            <a:ext cx="11155680" cy="3383280"/>
-          </a:xfrm>
-          <a:prstGeom prst="rect">
-            <a:avLst/>
-          </a:prstGeom>
-          <a:noFill/>
-        </p:spPr>
-        <p:txBody>
-          <a:bodyPr wrap="square">
-            <a:spAutoFit/>
-          </a:bodyPr>
-          <a:lstStyle/>
-          <a:p>
-            <a:pPr>
-              <a:spcBef>
-                <a:spcPts val="0"/>
-              </a:spcBef>
-              <a:spcAft>
-                <a:spcPts val="600"/>
-              </a:spcAft>
-            </a:pPr>
-            <a:r>
-              <a:rPr sz="1400" b="0">
-                <a:solidFill>
-                  <a:srgbClr val="0B2B52"/>
-                </a:solidFill>
-              </a:rPr>
-              <a:t>•  Implemented and integrated memory, sampling and parallelism optimisations into the Boltz pipeline; device-agnostic on Apple Silicon.</a:t>
-            </a:r>
-          </a:p>
-          <a:p>
-            <a:pPr>
-              <a:spcAft>
-                <a:spcPts val="600"/>
-              </a:spcAft>
-            </a:pPr>
-            <a:r>
-              <a:rPr sz="1400" b="0">
-                <a:solidFill>
-                  <a:srgbClr val="0B2B52"/>
-                </a:solidFill>
-              </a:rPr>
-              <a:t>•  Moved from component microbenchmarks to end-to-end measurement against pretrained checkpoints and experimentally determined structures.</a:t>
-            </a:r>
-          </a:p>
-          <a:p>
-            <a:pPr>
-              <a:spcAft>
-                <a:spcPts val="600"/>
-              </a:spcAft>
-            </a:pPr>
-            <a:r>
-              <a:rPr sz="1400" b="0">
-                <a:solidFill>
-                  <a:srgbClr val="0B2B52"/>
-                </a:solidFill>
-              </a:rPr>
-              <a:t>•  Two questions closed with negative answers, both with mechanisms: the low-rank OPM is unreachable on released weights, and ipTM tracks peptide composition rather than binding.</a:t>
-            </a:r>
-          </a:p>
-          <a:p>
-            <a:pPr>
-              <a:spcAft>
-                <a:spcPts val="600"/>
-              </a:spcAft>
-            </a:pPr>
-            <a:r>
-              <a:rPr sz="1400" b="0">
-                <a:solidFill>
-                  <a:srgbClr val="0B2B52"/>
-                </a:solidFill>
-              </a:rPr>
-              <a:t>•  A third finding generalises beyond this project: a single unseeded fold does not reproduce its own ranking.</a:t>
-            </a:r>
-          </a:p>
-          <a:p>
-            <a:pPr>
-              <a:spcAft>
-                <a:spcPts val="600"/>
-              </a:spcAft>
-            </a:pPr>
-            <a:r>
-              <a:rPr sz="1400" b="0">
-                <a:solidFill>
-                  <a:srgbClr val="0B2B52"/>
-                </a:solidFill>
-              </a:rPr>
-              <a:t>•  Delivered as a local screening tool: the scramble control, the cost of reduced settings and the replicate spread are built into what it does rather than written beside it (slides 31–32).</a:t>
-            </a:r>
-          </a:p>
-          <a:p>
-            <a:r>
-              <a:rPr sz="1400" b="0">
-                <a:solidFill>
-                  <a:srgbClr val="0B2B52"/>
-                </a:solidFill>
-              </a:rPr>
-              <a:t>•  Next: extend the panel past 22 receptors, which is what now limits the open questions.</a:t>
-            </a:r>
-          </a:p>
-        </p:txBody>
-      </p:sp>
-      <p:sp>
-        <p:nvSpPr>
-          <p:cNvPr id="8" name="Rounded Rectangle 7"/>
-          <p:cNvSpPr/>
-          <p:nvPr/>
-        </p:nvSpPr>
-        <p:spPr>
-          <a:xfrm>
-            <a:off x="548640" y="4892040"/>
-            <a:ext cx="11155680" cy="1051560"/>
-          </a:xfrm>
-          <a:prstGeom prst="roundRect">
-            <a:avLst/>
-          </a:prstGeom>
-          <a:solidFill>
-            <a:srgbClr val="0B2B52"/>
-          </a:solidFill>
-          <a:ln>
-            <a:noFill/>
-          </a:ln>
-          <a:effectLst/>
-        </p:spPr>
-        <p:style>
-          <a:lnRef idx="1">
-            <a:schemeClr val="accent1"/>
-          </a:lnRef>
-          <a:fillRef idx="3">
-            <a:schemeClr val="accent1"/>
-          </a:fillRef>
-          <a:effectRef idx="2">
-            <a:schemeClr val="accent1"/>
-          </a:effectRef>
-          <a:fontRef idx="minor">
-            <a:schemeClr val="lt1"/>
-          </a:fontRef>
-        </p:style>
-        <p:txBody>
-          <a:bodyPr rtlCol="0" anchor="ctr" wrap="square"/>
-          <a:lstStyle/>
-          <a:p>
-            <a:pPr algn="ctr">
-              <a:spcBef>
-                <a:spcPts val="0"/>
-              </a:spcBef>
-              <a:spcAft>
-                <a:spcPts val="400"/>
-              </a:spcAft>
-            </a:pPr>
-            <a:r>
-              <a:rPr sz="2000" b="1" i="0">
-                <a:solidFill>
-                  <a:srgbClr val="FFFFFF"/>
-                </a:solidFill>
-              </a:rPr>
-              <a:t>Thank you  ·  Questions welcome</a:t>
-            </a:r>
-          </a:p>
-        </p:txBody>
-      </p:sp>
-    </p:spTree>
-  </p:cSld>
-  <p:clrMapOvr>
-    <a:masterClrMapping/>
-  </p:clrMapOvr>
-</p:sld>
-</file>
-
-<file path=ppt/slides/slide35.xml><?xml version="1.0" encoding="utf-8"?>
 <p:sld xmlns:a="http://schemas.openxmlformats.org/drawingml/2006/main" xmlns:p="http://schemas.openxmlformats.org/presentationml/2006/main" xmlns:r="http://schemas.openxmlformats.org/officeDocument/2006/relationships">
   <p:cSld>
     <p:spTree>
@@ -19675,6 +18547,1132 @@
 </p:sld>
 </file>
 
+<file path=ppt/slides/slide34.xml><?xml version="1.0" encoding="utf-8"?>
+<p:sld xmlns:a="http://schemas.openxmlformats.org/drawingml/2006/main" xmlns:p="http://schemas.openxmlformats.org/presentationml/2006/main" xmlns:r="http://schemas.openxmlformats.org/officeDocument/2006/relationships">
+  <p:cSld>
+    <p:spTree>
+      <p:nvGrpSpPr>
+        <p:cNvPr id="1" name=""/>
+        <p:cNvGrpSpPr/>
+        <p:nvPr/>
+      </p:nvGrpSpPr>
+      <p:grpSpPr/>
+      <p:sp>
+        <p:nvSpPr>
+          <p:cNvPr id="2" name="Rectangle 1"/>
+          <p:cNvSpPr/>
+          <p:nvPr/>
+        </p:nvSpPr>
+        <p:spPr>
+          <a:xfrm>
+            <a:off x="0" y="0"/>
+            <a:ext cx="12188952" cy="914400"/>
+          </a:xfrm>
+          <a:prstGeom prst="rect">
+            <a:avLst/>
+          </a:prstGeom>
+          <a:solidFill>
+            <a:srgbClr val="0B2B52"/>
+          </a:solidFill>
+          <a:ln>
+            <a:noFill/>
+          </a:ln>
+        </p:spPr>
+        <p:style>
+          <a:lnRef idx="1">
+            <a:schemeClr val="accent1"/>
+          </a:lnRef>
+          <a:fillRef idx="3">
+            <a:schemeClr val="accent1"/>
+          </a:fillRef>
+          <a:effectRef idx="2">
+            <a:schemeClr val="accent1"/>
+          </a:effectRef>
+          <a:fontRef idx="minor">
+            <a:schemeClr val="lt1"/>
+          </a:fontRef>
+        </p:style>
+        <p:txBody>
+          <a:bodyPr rtlCol="0" anchor="ctr"/>
+          <a:lstStyle/>
+          <a:p>
+            <a:pPr algn="ctr"/>
+          </a:p>
+        </p:txBody>
+      </p:sp>
+      <p:sp>
+        <p:nvSpPr>
+          <p:cNvPr id="3" name="Rectangle 2"/>
+          <p:cNvSpPr/>
+          <p:nvPr/>
+        </p:nvSpPr>
+        <p:spPr>
+          <a:xfrm>
+            <a:off x="0" y="914400"/>
+            <a:ext cx="12188952" cy="54864"/>
+          </a:xfrm>
+          <a:prstGeom prst="rect">
+            <a:avLst/>
+          </a:prstGeom>
+          <a:solidFill>
+            <a:srgbClr val="1E6FB8"/>
+          </a:solidFill>
+          <a:ln>
+            <a:noFill/>
+          </a:ln>
+        </p:spPr>
+        <p:style>
+          <a:lnRef idx="1">
+            <a:schemeClr val="accent1"/>
+          </a:lnRef>
+          <a:fillRef idx="3">
+            <a:schemeClr val="accent1"/>
+          </a:fillRef>
+          <a:effectRef idx="2">
+            <a:schemeClr val="accent1"/>
+          </a:effectRef>
+          <a:fontRef idx="minor">
+            <a:schemeClr val="lt1"/>
+          </a:fontRef>
+        </p:style>
+        <p:txBody>
+          <a:bodyPr rtlCol="0" anchor="ctr"/>
+          <a:lstStyle/>
+          <a:p>
+            <a:pPr algn="ctr"/>
+          </a:p>
+        </p:txBody>
+      </p:sp>
+      <p:sp>
+        <p:nvSpPr>
+          <p:cNvPr id="4" name="TextBox 3"/>
+          <p:cNvSpPr txBox="1"/>
+          <p:nvPr/>
+        </p:nvSpPr>
+        <p:spPr>
+          <a:xfrm>
+            <a:off x="502920" y="109728"/>
+            <a:ext cx="11155680" cy="777240"/>
+          </a:xfrm>
+          <a:prstGeom prst="rect">
+            <a:avLst/>
+          </a:prstGeom>
+          <a:noFill/>
+        </p:spPr>
+        <p:txBody>
+          <a:bodyPr wrap="square">
+            <a:spAutoFit/>
+          </a:bodyPr>
+          <a:lstStyle/>
+          <a:p>
+            <a:pPr>
+              <a:spcAft>
+                <a:spcPts val="600"/>
+              </a:spcAft>
+            </a:pPr>
+            <a:r>
+              <a:rPr sz="2600" b="1">
+                <a:solidFill>
+                  <a:srgbClr val="FFFFFF"/>
+                </a:solidFill>
+              </a:rPr>
+              <a:t>Two Automated Searches — One Was Safe, One Was Not</a:t>
+            </a:r>
+          </a:p>
+        </p:txBody>
+      </p:sp>
+      <p:sp>
+        <p:nvSpPr>
+          <p:cNvPr id="5" name="TextBox 4"/>
+          <p:cNvSpPr txBox="1"/>
+          <p:nvPr/>
+        </p:nvSpPr>
+        <p:spPr>
+          <a:xfrm>
+            <a:off x="502920" y="6473952"/>
+            <a:ext cx="8229600" cy="274320"/>
+          </a:xfrm>
+          <a:prstGeom prst="rect">
+            <a:avLst/>
+          </a:prstGeom>
+          <a:noFill/>
+        </p:spPr>
+        <p:txBody>
+          <a:bodyPr wrap="square">
+            <a:spAutoFit/>
+          </a:bodyPr>
+          <a:lstStyle/>
+          <a:p>
+            <a:pPr>
+              <a:spcAft>
+                <a:spcPts val="600"/>
+              </a:spcAft>
+            </a:pPr>
+            <a:r>
+              <a:rPr sz="900" b="0">
+                <a:solidFill>
+                  <a:srgbClr val="555555"/>
+                </a:solidFill>
+              </a:rPr>
+              <a:t>Boltz-Fast · Final Dissertation Report · Akik Jana (2024AB05287)</a:t>
+            </a:r>
+          </a:p>
+        </p:txBody>
+      </p:sp>
+      <p:sp>
+        <p:nvSpPr>
+          <p:cNvPr id="6" name="TextBox 5"/>
+          <p:cNvSpPr txBox="1"/>
+          <p:nvPr/>
+        </p:nvSpPr>
+        <p:spPr>
+          <a:xfrm>
+            <a:off x="11183112" y="6473952"/>
+            <a:ext cx="640080" cy="274320"/>
+          </a:xfrm>
+          <a:prstGeom prst="rect">
+            <a:avLst/>
+          </a:prstGeom>
+          <a:noFill/>
+        </p:spPr>
+        <p:txBody>
+          <a:bodyPr wrap="square">
+            <a:spAutoFit/>
+          </a:bodyPr>
+          <a:lstStyle/>
+          <a:p>
+            <a:pPr>
+              <a:spcAft>
+                <a:spcPts val="600"/>
+              </a:spcAft>
+            </a:pPr>
+            <a:r>
+              <a:rPr sz="1000" b="0">
+                <a:solidFill>
+                  <a:srgbClr val="0B2B52"/>
+                </a:solidFill>
+              </a:rPr>
+              <a:t>34</a:t>
+            </a:r>
+          </a:p>
+        </p:txBody>
+      </p:sp>
+      <p:sp>
+        <p:nvSpPr>
+          <p:cNvPr id="7" name="TextBox 6"/>
+          <p:cNvSpPr txBox="1"/>
+          <p:nvPr/>
+        </p:nvSpPr>
+        <p:spPr>
+          <a:xfrm>
+            <a:off x="548640" y="1078992"/>
+            <a:ext cx="11155680" cy="640080"/>
+          </a:xfrm>
+          <a:prstGeom prst="rect">
+            <a:avLst/>
+          </a:prstGeom>
+          <a:noFill/>
+        </p:spPr>
+        <p:txBody>
+          <a:bodyPr wrap="square">
+            <a:spAutoFit/>
+          </a:bodyPr>
+          <a:lstStyle/>
+          <a:p>
+            <a:pPr>
+              <a:spcAft>
+                <a:spcPts val="600"/>
+              </a:spcAft>
+            </a:pPr>
+            <a:r>
+              <a:rPr sz="1500" b="0">
+                <a:solidFill>
+                  <a:srgbClr val="0B2B52"/>
+                </a:solidFill>
+              </a:rPr>
+              <a:t>The same machinery applied to two problems that differ in one respect: whether a candidate can be checked.</a:t>
+            </a:r>
+          </a:p>
+        </p:txBody>
+      </p:sp>
+      <p:sp>
+        <p:nvSpPr>
+          <p:cNvPr id="8" name="Rounded Rectangle 7"/>
+          <p:cNvSpPr/>
+          <p:nvPr/>
+        </p:nvSpPr>
+        <p:spPr>
+          <a:xfrm>
+            <a:off x="548640" y="1691640"/>
+            <a:ext cx="5440680" cy="1463040"/>
+          </a:xfrm>
+          <a:prstGeom prst="roundRect">
+            <a:avLst/>
+          </a:prstGeom>
+          <a:solidFill>
+            <a:srgbClr val="C62828"/>
+          </a:solidFill>
+          <a:ln>
+            <a:noFill/>
+          </a:ln>
+        </p:spPr>
+        <p:style>
+          <a:lnRef idx="1">
+            <a:schemeClr val="accent1"/>
+          </a:lnRef>
+          <a:fillRef idx="3">
+            <a:schemeClr val="accent1"/>
+          </a:fillRef>
+          <a:effectRef idx="2">
+            <a:schemeClr val="accent1"/>
+          </a:effectRef>
+          <a:fontRef idx="minor">
+            <a:schemeClr val="lt1"/>
+          </a:fontRef>
+        </p:style>
+        <p:txBody>
+          <a:bodyPr rtlCol="0" anchor="ctr" wrap="square"/>
+          <a:lstStyle/>
+          <a:p>
+            <a:pPr algn="ctr"/>
+            <a:r>
+              <a:rPr sz="2300" b="1">
+                <a:solidFill>
+                  <a:srgbClr val="FFFFFF"/>
+                </a:solidFill>
+              </a:rPr>
+              <a:t>p = 0.425</a:t>
+            </a:r>
+          </a:p>
+          <a:p>
+            <a:pPr algn="ctr"/>
+            <a:r>
+              <a:rPr sz="1050">
+                <a:solidFill>
+                  <a:srgbClr val="FFFFFF"/>
+                </a:solidFill>
+              </a:rPr>
+              <a:t>readout search: the gain a permutation null also finds</a:t>
+            </a:r>
+          </a:p>
+        </p:txBody>
+      </p:sp>
+      <p:sp>
+        <p:nvSpPr>
+          <p:cNvPr id="9" name="Rounded Rectangle 8"/>
+          <p:cNvSpPr/>
+          <p:nvPr/>
+        </p:nvSpPr>
+        <p:spPr>
+          <a:xfrm>
+            <a:off x="6263640" y="1691640"/>
+            <a:ext cx="5440680" cy="1463040"/>
+          </a:xfrm>
+          <a:prstGeom prst="roundRect">
+            <a:avLst/>
+          </a:prstGeom>
+          <a:solidFill>
+            <a:srgbClr val="2E7D32"/>
+          </a:solidFill>
+          <a:ln>
+            <a:noFill/>
+          </a:ln>
+        </p:spPr>
+        <p:style>
+          <a:lnRef idx="1">
+            <a:schemeClr val="accent1"/>
+          </a:lnRef>
+          <a:fillRef idx="3">
+            <a:schemeClr val="accent1"/>
+          </a:fillRef>
+          <a:effectRef idx="2">
+            <a:schemeClr val="accent1"/>
+          </a:effectRef>
+          <a:fontRef idx="minor">
+            <a:schemeClr val="lt1"/>
+          </a:fontRef>
+        </p:style>
+        <p:txBody>
+          <a:bodyPr rtlCol="0" anchor="ctr" wrap="square"/>
+          <a:lstStyle/>
+          <a:p>
+            <a:pPr algn="ctr"/>
+            <a:r>
+              <a:rPr sz="2300" b="1">
+                <a:solidFill>
+                  <a:srgbClr val="FFFFFF"/>
+                </a:solidFill>
+              </a:rPr>
+              <a:t>max |diff| = 0</a:t>
+            </a:r>
+          </a:p>
+          <a:p>
+            <a:pPr algn="ctr"/>
+            <a:r>
+              <a:rPr sz="1050">
+                <a:solidFill>
+                  <a:srgbClr val="FFFFFF"/>
+                </a:solidFill>
+              </a:rPr>
+              <a:t>operator rewrite: verified against its own reference</a:t>
+            </a:r>
+          </a:p>
+        </p:txBody>
+      </p:sp>
+      <p:sp>
+        <p:nvSpPr>
+          <p:cNvPr id="10" name="TextBox 9"/>
+          <p:cNvSpPr txBox="1"/>
+          <p:nvPr/>
+        </p:nvSpPr>
+        <p:spPr>
+          <a:xfrm>
+            <a:off x="548640" y="3291840"/>
+            <a:ext cx="11155680" cy="777240"/>
+          </a:xfrm>
+          <a:prstGeom prst="rect">
+            <a:avLst/>
+          </a:prstGeom>
+          <a:noFill/>
+        </p:spPr>
+        <p:txBody>
+          <a:bodyPr wrap="square">
+            <a:spAutoFit/>
+          </a:bodyPr>
+          <a:lstStyle/>
+          <a:p>
+            <a:r>
+              <a:rPr sz="1450" b="1">
+                <a:solidFill>
+                  <a:srgbClr val="0B2B52"/>
+                </a:solidFill>
+              </a:rPr>
+              <a:t>Searching readouts on 22 receptors found a combination beating the headline by +0.018 AUC</a:t>
+            </a:r>
+          </a:p>
+          <a:p>
+            <a:r>
+              <a:rPr sz="1250">
+                <a:solidFill>
+                  <a:srgbClr val="1E6FB8"/>
+                </a:solidFill>
+              </a:rPr>
+              <a:t>a permutation null gains +0.032 on average, and the held-out panel reverses the gain to −0.029. Refused.</a:t>
+            </a:r>
+          </a:p>
+        </p:txBody>
+      </p:sp>
+      <p:sp>
+        <p:nvSpPr>
+          <p:cNvPr id="11" name="TextBox 10"/>
+          <p:cNvSpPr txBox="1"/>
+          <p:nvPr/>
+        </p:nvSpPr>
+        <p:spPr>
+          <a:xfrm>
+            <a:off x="548640" y="4251960"/>
+            <a:ext cx="11155680" cy="777240"/>
+          </a:xfrm>
+          <a:prstGeom prst="rect">
+            <a:avLst/>
+          </a:prstGeom>
+          <a:noFill/>
+        </p:spPr>
+        <p:txBody>
+          <a:bodyPr wrap="square">
+            <a:spAutoFit/>
+          </a:bodyPr>
+          <a:lstStyle/>
+          <a:p>
+            <a:r>
+              <a:rPr sz="1450" b="1">
+                <a:solidFill>
+                  <a:srgbClr val="0B2B52"/>
+                </a:solidFill>
+              </a:rPr>
+              <a:t>Searching operator rewrites found two worth 1.46× and 1.19×</a:t>
+            </a:r>
+          </a:p>
+          <a:p>
+            <a:r>
+              <a:rPr sz="1250">
+                <a:solidFill>
+                  <a:srgbClr val="1E6FB8"/>
+                </a:solidFill>
+              </a:rPr>
+              <a:t>bit-exact, and seeded folds before and after give identical coordinates and identical ipTM. Accepted.</a:t>
+            </a:r>
+          </a:p>
+        </p:txBody>
+      </p:sp>
+      <p:sp>
+        <p:nvSpPr>
+          <p:cNvPr id="12" name="Rounded Rectangle 11"/>
+          <p:cNvSpPr/>
+          <p:nvPr/>
+        </p:nvSpPr>
+        <p:spPr>
+          <a:xfrm>
+            <a:off x="548640" y="5257800"/>
+            <a:ext cx="11155680" cy="960120"/>
+          </a:xfrm>
+          <a:prstGeom prst="roundRect">
+            <a:avLst/>
+          </a:prstGeom>
+          <a:solidFill>
+            <a:srgbClr val="0B2B52"/>
+          </a:solidFill>
+          <a:ln>
+            <a:noFill/>
+          </a:ln>
+        </p:spPr>
+        <p:style>
+          <a:lnRef idx="1">
+            <a:schemeClr val="accent1"/>
+          </a:lnRef>
+          <a:fillRef idx="3">
+            <a:schemeClr val="accent1"/>
+          </a:fillRef>
+          <a:effectRef idx="2">
+            <a:schemeClr val="accent1"/>
+          </a:effectRef>
+          <a:fontRef idx="minor">
+            <a:schemeClr val="lt1"/>
+          </a:fontRef>
+        </p:style>
+        <p:txBody>
+          <a:bodyPr rtlCol="0" anchor="ctr" wrap="square"/>
+          <a:lstStyle/>
+          <a:p>
+            <a:pPr algn="ctr">
+              <a:spcAft>
+                <a:spcPts val="600"/>
+              </a:spcAft>
+            </a:pPr>
+            <a:r>
+              <a:rPr sz="1700" b="1">
+                <a:solidFill>
+                  <a:srgbClr val="FFFFFF"/>
+                </a:solidFill>
+              </a:rPr>
+              <a:t>Search pays where a candidate can be verified independently of the data that proposed it.</a:t>
+            </a:r>
+          </a:p>
+        </p:txBody>
+      </p:sp>
+    </p:spTree>
+  </p:cSld>
+  <p:clrMapOvr>
+    <a:masterClrMapping/>
+  </p:clrMapOvr>
+</p:sld>
+</file>
+
+<file path=ppt/slides/slide35.xml><?xml version="1.0" encoding="utf-8"?>
+<p:sld xmlns:a="http://schemas.openxmlformats.org/drawingml/2006/main" xmlns:p="http://schemas.openxmlformats.org/presentationml/2006/main" xmlns:r="http://schemas.openxmlformats.org/officeDocument/2006/relationships">
+  <p:cSld>
+    <p:spTree>
+      <p:nvGrpSpPr>
+        <p:cNvPr id="1" name=""/>
+        <p:cNvGrpSpPr/>
+        <p:nvPr/>
+      </p:nvGrpSpPr>
+      <p:grpSpPr/>
+      <p:sp>
+        <p:nvSpPr>
+          <p:cNvPr id="2" name="Rectangle 1"/>
+          <p:cNvSpPr/>
+          <p:nvPr/>
+        </p:nvSpPr>
+        <p:spPr>
+          <a:xfrm>
+            <a:off x="0" y="0"/>
+            <a:ext cx="12188952" cy="914400"/>
+          </a:xfrm>
+          <a:prstGeom prst="rect">
+            <a:avLst/>
+          </a:prstGeom>
+          <a:solidFill>
+            <a:srgbClr val="0B2B52"/>
+          </a:solidFill>
+          <a:ln>
+            <a:noFill/>
+          </a:ln>
+        </p:spPr>
+        <p:style>
+          <a:lnRef idx="1">
+            <a:schemeClr val="accent1"/>
+          </a:lnRef>
+          <a:fillRef idx="3">
+            <a:schemeClr val="accent1"/>
+          </a:fillRef>
+          <a:effectRef idx="2">
+            <a:schemeClr val="accent1"/>
+          </a:effectRef>
+          <a:fontRef idx="minor">
+            <a:schemeClr val="lt1"/>
+          </a:fontRef>
+        </p:style>
+        <p:txBody>
+          <a:bodyPr rtlCol="0" anchor="ctr"/>
+          <a:lstStyle/>
+          <a:p>
+            <a:pPr algn="ctr"/>
+          </a:p>
+        </p:txBody>
+      </p:sp>
+      <p:sp>
+        <p:nvSpPr>
+          <p:cNvPr id="3" name="Rectangle 2"/>
+          <p:cNvSpPr/>
+          <p:nvPr/>
+        </p:nvSpPr>
+        <p:spPr>
+          <a:xfrm>
+            <a:off x="0" y="914400"/>
+            <a:ext cx="12188952" cy="54864"/>
+          </a:xfrm>
+          <a:prstGeom prst="rect">
+            <a:avLst/>
+          </a:prstGeom>
+          <a:solidFill>
+            <a:srgbClr val="1E6FB8"/>
+          </a:solidFill>
+          <a:ln>
+            <a:noFill/>
+          </a:ln>
+        </p:spPr>
+        <p:style>
+          <a:lnRef idx="1">
+            <a:schemeClr val="accent1"/>
+          </a:lnRef>
+          <a:fillRef idx="3">
+            <a:schemeClr val="accent1"/>
+          </a:fillRef>
+          <a:effectRef idx="2">
+            <a:schemeClr val="accent1"/>
+          </a:effectRef>
+          <a:fontRef idx="minor">
+            <a:schemeClr val="lt1"/>
+          </a:fontRef>
+        </p:style>
+        <p:txBody>
+          <a:bodyPr rtlCol="0" anchor="ctr"/>
+          <a:lstStyle/>
+          <a:p>
+            <a:pPr algn="ctr"/>
+          </a:p>
+        </p:txBody>
+      </p:sp>
+      <p:sp>
+        <p:nvSpPr>
+          <p:cNvPr id="4" name="TextBox 3"/>
+          <p:cNvSpPr txBox="1"/>
+          <p:nvPr/>
+        </p:nvSpPr>
+        <p:spPr>
+          <a:xfrm>
+            <a:off x="502920" y="109728"/>
+            <a:ext cx="11155680" cy="777240"/>
+          </a:xfrm>
+          <a:prstGeom prst="rect">
+            <a:avLst/>
+          </a:prstGeom>
+          <a:noFill/>
+        </p:spPr>
+        <p:txBody>
+          <a:bodyPr wrap="square">
+            <a:spAutoFit/>
+          </a:bodyPr>
+          <a:lstStyle/>
+          <a:p>
+            <a:pPr>
+              <a:spcAft>
+                <a:spcPts val="600"/>
+              </a:spcAft>
+            </a:pPr>
+            <a:r>
+              <a:rPr sz="2600" b="1">
+                <a:solidFill>
+                  <a:srgbClr val="FFFFFF"/>
+                </a:solidFill>
+              </a:rPr>
+              <a:t>Measured — Against Binding That Was Actually Measured</a:t>
+            </a:r>
+          </a:p>
+        </p:txBody>
+      </p:sp>
+      <p:sp>
+        <p:nvSpPr>
+          <p:cNvPr id="5" name="TextBox 4"/>
+          <p:cNvSpPr txBox="1"/>
+          <p:nvPr/>
+        </p:nvSpPr>
+        <p:spPr>
+          <a:xfrm>
+            <a:off x="502920" y="6473952"/>
+            <a:ext cx="8229600" cy="274320"/>
+          </a:xfrm>
+          <a:prstGeom prst="rect">
+            <a:avLst/>
+          </a:prstGeom>
+          <a:noFill/>
+        </p:spPr>
+        <p:txBody>
+          <a:bodyPr wrap="square">
+            <a:spAutoFit/>
+          </a:bodyPr>
+          <a:lstStyle/>
+          <a:p>
+            <a:pPr>
+              <a:spcAft>
+                <a:spcPts val="600"/>
+              </a:spcAft>
+            </a:pPr>
+            <a:r>
+              <a:rPr sz="900" b="0">
+                <a:solidFill>
+                  <a:srgbClr val="555555"/>
+                </a:solidFill>
+              </a:rPr>
+              <a:t>Boltz-Fast · Final Dissertation Report · Akik Jana (2024AB05287)</a:t>
+            </a:r>
+          </a:p>
+        </p:txBody>
+      </p:sp>
+      <p:sp>
+        <p:nvSpPr>
+          <p:cNvPr id="6" name="TextBox 5"/>
+          <p:cNvSpPr txBox="1"/>
+          <p:nvPr/>
+        </p:nvSpPr>
+        <p:spPr>
+          <a:xfrm>
+            <a:off x="11183112" y="6473952"/>
+            <a:ext cx="640080" cy="274320"/>
+          </a:xfrm>
+          <a:prstGeom prst="rect">
+            <a:avLst/>
+          </a:prstGeom>
+          <a:noFill/>
+        </p:spPr>
+        <p:txBody>
+          <a:bodyPr wrap="square">
+            <a:spAutoFit/>
+          </a:bodyPr>
+          <a:lstStyle/>
+          <a:p>
+            <a:pPr>
+              <a:spcAft>
+                <a:spcPts val="600"/>
+              </a:spcAft>
+            </a:pPr>
+            <a:r>
+              <a:rPr sz="1000" b="0">
+                <a:solidFill>
+                  <a:srgbClr val="0B2B52"/>
+                </a:solidFill>
+              </a:rPr>
+              <a:t>35</a:t>
+            </a:r>
+          </a:p>
+        </p:txBody>
+      </p:sp>
+      <p:sp>
+        <p:nvSpPr>
+          <p:cNvPr id="7" name="TextBox 6"/>
+          <p:cNvSpPr txBox="1"/>
+          <p:nvPr/>
+        </p:nvSpPr>
+        <p:spPr>
+          <a:xfrm>
+            <a:off x="548640" y="1051560"/>
+            <a:ext cx="11155680" cy="1005840"/>
+          </a:xfrm>
+          <a:prstGeom prst="rect">
+            <a:avLst/>
+          </a:prstGeom>
+          <a:noFill/>
+        </p:spPr>
+        <p:txBody>
+          <a:bodyPr wrap="square">
+            <a:spAutoFit/>
+          </a:bodyPr>
+          <a:lstStyle/>
+          <a:p>
+            <a:pPr>
+              <a:spcAft>
+                <a:spcPts val="600"/>
+              </a:spcAft>
+            </a:pPr>
+            <a:r>
+              <a:rPr sz="1500" b="0">
+                <a:solidFill>
+                  <a:srgbClr val="0B2B52"/>
+                </a:solidFill>
+              </a:rPr>
+              <a:t>1,320 de novo designs released by Anthropic, binding measured by two contract research organisations,</a:t>
+            </a:r>
+          </a:p>
+          <a:p>
+            <a:pPr>
+              <a:spcAft>
+                <a:spcPts val="600"/>
+              </a:spcAft>
+            </a:pPr>
+            <a:r>
+              <a:rPr sz="1500" b="0">
+                <a:solidFill>
+                  <a:srgbClr val="0B2B52"/>
+                </a:solidFill>
+              </a:rPr>
+              <a:t>on molecules that postdate every model's training. Contamination is unavailable as an explanation.</a:t>
+            </a:r>
+          </a:p>
+        </p:txBody>
+      </p:sp>
+      <p:sp>
+        <p:nvSpPr>
+          <p:cNvPr id="8" name="Rounded Rectangle 7"/>
+          <p:cNvSpPr/>
+          <p:nvPr/>
+        </p:nvSpPr>
+        <p:spPr>
+          <a:xfrm>
+            <a:off x="548640" y="1965960"/>
+            <a:ext cx="3520440" cy="1463040"/>
+          </a:xfrm>
+          <a:prstGeom prst="roundRect">
+            <a:avLst/>
+          </a:prstGeom>
+          <a:solidFill>
+            <a:srgbClr val="1E6FB8"/>
+          </a:solidFill>
+          <a:ln>
+            <a:noFill/>
+          </a:ln>
+        </p:spPr>
+        <p:style>
+          <a:lnRef idx="1">
+            <a:schemeClr val="accent1"/>
+          </a:lnRef>
+          <a:fillRef idx="3">
+            <a:schemeClr val="accent1"/>
+          </a:fillRef>
+          <a:effectRef idx="2">
+            <a:schemeClr val="accent1"/>
+          </a:effectRef>
+          <a:fontRef idx="minor">
+            <a:schemeClr val="lt1"/>
+          </a:fontRef>
+        </p:style>
+        <p:txBody>
+          <a:bodyPr rtlCol="0" anchor="ctr" wrap="square"/>
+          <a:lstStyle/>
+          <a:p>
+            <a:pPr algn="ctr"/>
+            <a:r>
+              <a:rPr sz="2300" b="1">
+                <a:solidFill>
+                  <a:srgbClr val="FFFFFF"/>
+                </a:solidFill>
+              </a:rPr>
+              <a:t>0.943</a:t>
+            </a:r>
+          </a:p>
+          <a:p>
+            <a:pPr algn="ctr"/>
+            <a:r>
+              <a:rPr sz="1050">
+                <a:solidFill>
+                  <a:srgbClr val="FFFFFF"/>
+                </a:solidFill>
+              </a:rPr>
+              <a:t>this work, in-training panel</a:t>
+            </a:r>
+          </a:p>
+        </p:txBody>
+      </p:sp>
+      <p:sp>
+        <p:nvSpPr>
+          <p:cNvPr id="9" name="Rounded Rectangle 8"/>
+          <p:cNvSpPr/>
+          <p:nvPr/>
+        </p:nvSpPr>
+        <p:spPr>
+          <a:xfrm>
+            <a:off x="4343400" y="1965960"/>
+            <a:ext cx="3520440" cy="1463040"/>
+          </a:xfrm>
+          <a:prstGeom prst="roundRect">
+            <a:avLst/>
+          </a:prstGeom>
+          <a:solidFill>
+            <a:srgbClr val="0E8F9A"/>
+          </a:solidFill>
+          <a:ln>
+            <a:noFill/>
+          </a:ln>
+        </p:spPr>
+        <p:style>
+          <a:lnRef idx="1">
+            <a:schemeClr val="accent1"/>
+          </a:lnRef>
+          <a:fillRef idx="3">
+            <a:schemeClr val="accent1"/>
+          </a:fillRef>
+          <a:effectRef idx="2">
+            <a:schemeClr val="accent1"/>
+          </a:effectRef>
+          <a:fontRef idx="minor">
+            <a:schemeClr val="lt1"/>
+          </a:fontRef>
+        </p:style>
+        <p:txBody>
+          <a:bodyPr rtlCol="0" anchor="ctr" wrap="square"/>
+          <a:lstStyle/>
+          <a:p>
+            <a:pPr algn="ctr"/>
+            <a:r>
+              <a:rPr sz="2300" b="1">
+                <a:solidFill>
+                  <a:srgbClr val="FFFFFF"/>
+                </a:solidFill>
+              </a:rPr>
+              <a:t>0.682–0.803</a:t>
+            </a:r>
+          </a:p>
+          <a:p>
+            <a:pPr algn="ctr"/>
+            <a:r>
+              <a:rPr sz="1050">
+                <a:solidFill>
+                  <a:srgbClr val="FFFFFF"/>
+                </a:solidFill>
+              </a:rPr>
+              <a:t>this work, held-out panel</a:t>
+            </a:r>
+          </a:p>
+        </p:txBody>
+      </p:sp>
+      <p:sp>
+        <p:nvSpPr>
+          <p:cNvPr id="10" name="Rounded Rectangle 9"/>
+          <p:cNvSpPr/>
+          <p:nvPr/>
+        </p:nvSpPr>
+        <p:spPr>
+          <a:xfrm>
+            <a:off x="8138160" y="1965960"/>
+            <a:ext cx="3566160" cy="1463040"/>
+          </a:xfrm>
+          <a:prstGeom prst="roundRect">
+            <a:avLst/>
+          </a:prstGeom>
+          <a:solidFill>
+            <a:srgbClr val="C62828"/>
+          </a:solidFill>
+          <a:ln>
+            <a:noFill/>
+          </a:ln>
+        </p:spPr>
+        <p:style>
+          <a:lnRef idx="1">
+            <a:schemeClr val="accent1"/>
+          </a:lnRef>
+          <a:fillRef idx="3">
+            <a:schemeClr val="accent1"/>
+          </a:fillRef>
+          <a:effectRef idx="2">
+            <a:schemeClr val="accent1"/>
+          </a:effectRef>
+          <a:fontRef idx="minor">
+            <a:schemeClr val="lt1"/>
+          </a:fontRef>
+        </p:style>
+        <p:txBody>
+          <a:bodyPr rtlCol="0" anchor="ctr" wrap="square"/>
+          <a:lstStyle/>
+          <a:p>
+            <a:pPr algn="ctr"/>
+            <a:r>
+              <a:rPr sz="2300" b="1">
+                <a:solidFill>
+                  <a:srgbClr val="FFFFFF"/>
+                </a:solidFill>
+              </a:rPr>
+              <a:t>0.626</a:t>
+            </a:r>
+          </a:p>
+          <a:p>
+            <a:pPr algn="ctr"/>
+            <a:r>
+              <a:rPr sz="1050">
+                <a:solidFill>
+                  <a:srgbClr val="FFFFFF"/>
+                </a:solidFill>
+              </a:rPr>
+              <a:t>interface pLDDT vs measured binding</a:t>
+            </a:r>
+          </a:p>
+        </p:txBody>
+      </p:sp>
+      <p:sp>
+        <p:nvSpPr>
+          <p:cNvPr id="11" name="TextBox 10"/>
+          <p:cNvSpPr txBox="1"/>
+          <p:nvPr/>
+        </p:nvSpPr>
+        <p:spPr>
+          <a:xfrm>
+            <a:off x="548640" y="3703320"/>
+            <a:ext cx="11155680" cy="640080"/>
+          </a:xfrm>
+          <a:prstGeom prst="rect">
+            <a:avLst/>
+          </a:prstGeom>
+          <a:noFill/>
+        </p:spPr>
+        <p:txBody>
+          <a:bodyPr wrap="square">
+            <a:spAutoFit/>
+          </a:bodyPr>
+          <a:lstStyle/>
+          <a:p>
+            <a:pPr>
+              <a:spcAft>
+                <a:spcPts val="600"/>
+              </a:spcAft>
+            </a:pPr>
+            <a:r>
+              <a:rPr sz="1500" b="0">
+                <a:solidFill>
+                  <a:srgbClr val="0B2B52"/>
+                </a:solidFill>
+              </a:rPr>
+              <a:t>Ten independently developed predictors all land between 0.62 and 0.67. The ceiling belongs to the task.</a:t>
+            </a:r>
+          </a:p>
+        </p:txBody>
+      </p:sp>
+      <p:sp>
+        <p:nvSpPr>
+          <p:cNvPr id="12" name="Rounded Rectangle 11"/>
+          <p:cNvSpPr/>
+          <p:nvPr/>
+        </p:nvSpPr>
+        <p:spPr>
+          <a:xfrm>
+            <a:off x="548640" y="4343400"/>
+            <a:ext cx="11155680" cy="960120"/>
+          </a:xfrm>
+          <a:prstGeom prst="roundRect">
+            <a:avLst/>
+          </a:prstGeom>
+          <a:solidFill>
+            <a:srgbClr val="2E7D32"/>
+          </a:solidFill>
+          <a:ln>
+            <a:noFill/>
+          </a:ln>
+        </p:spPr>
+        <p:style>
+          <a:lnRef idx="1">
+            <a:schemeClr val="accent1"/>
+          </a:lnRef>
+          <a:fillRef idx="3">
+            <a:schemeClr val="accent1"/>
+          </a:fillRef>
+          <a:effectRef idx="2">
+            <a:schemeClr val="accent1"/>
+          </a:effectRef>
+          <a:fontRef idx="minor">
+            <a:schemeClr val="lt1"/>
+          </a:fontRef>
+        </p:style>
+        <p:txBody>
+          <a:bodyPr rtlCol="0" anchor="ctr" wrap="square"/>
+          <a:lstStyle/>
+          <a:p>
+            <a:pPr algn="ctr">
+              <a:spcAft>
+                <a:spcPts val="600"/>
+              </a:spcAft>
+            </a:pPr>
+            <a:r>
+              <a:rPr sz="1700" b="1">
+                <a:solidFill>
+                  <a:srgbClr val="FFFFFF"/>
+                </a:solidFill>
+              </a:rPr>
+              <a:t>Interface pLDDT beats the binder's whole-chain confidence by +0.033 AUC [+0.005, +0.061] — Section 7.7's claim, on measured binding.</a:t>
+            </a:r>
+          </a:p>
+        </p:txBody>
+      </p:sp>
+      <p:sp>
+        <p:nvSpPr>
+          <p:cNvPr id="13" name="Rounded Rectangle 12"/>
+          <p:cNvSpPr/>
+          <p:nvPr/>
+        </p:nvSpPr>
+        <p:spPr>
+          <a:xfrm>
+            <a:off x="548640" y="5440680"/>
+            <a:ext cx="11155680" cy="868680"/>
+          </a:xfrm>
+          <a:prstGeom prst="roundRect">
+            <a:avLst/>
+          </a:prstGeom>
+          <a:solidFill>
+            <a:srgbClr val="FDF3E0"/>
+          </a:solidFill>
+          <a:ln>
+            <a:noFill/>
+          </a:ln>
+        </p:spPr>
+        <p:style>
+          <a:lnRef idx="1">
+            <a:schemeClr val="accent1"/>
+          </a:lnRef>
+          <a:fillRef idx="3">
+            <a:schemeClr val="accent1"/>
+          </a:fillRef>
+          <a:effectRef idx="2">
+            <a:schemeClr val="accent1"/>
+          </a:effectRef>
+          <a:fontRef idx="minor">
+            <a:schemeClr val="lt1"/>
+          </a:fontRef>
+        </p:style>
+        <p:txBody>
+          <a:bodyPr rtlCol="0" anchor="ctr" wrap="square"/>
+          <a:lstStyle/>
+          <a:p>
+            <a:pPr algn="ctr">
+              <a:spcAft>
+                <a:spcPts val="600"/>
+              </a:spcAft>
+            </a:pPr>
+            <a:r>
+              <a:rPr sz="1250" b="0">
+                <a:solidFill>
+                  <a:srgbClr val="8A5200"/>
+                </a:solidFill>
+              </a:rPr>
+              <a:t>The held-out figure is far closer to the wet-lab figure than the headline is, and still above it. A benchmark quoted without saying whether the complexes were in training overstates a screen — this puts a number on by how much, from outside the dissertation.</a:t>
+            </a:r>
+          </a:p>
+        </p:txBody>
+      </p:sp>
+    </p:spTree>
+  </p:cSld>
+  <p:clrMapOvr>
+    <a:masterClrMapping/>
+  </p:clrMapOvr>
+</p:sld>
+</file>
+
 <file path=ppt/slides/slide36.xml><?xml version="1.0" encoding="utf-8"?>
 <p:sld xmlns:a="http://schemas.openxmlformats.org/drawingml/2006/main" xmlns:p="http://schemas.openxmlformats.org/presentationml/2006/main" xmlns:r="http://schemas.openxmlformats.org/officeDocument/2006/relationships">
   <p:cSld>
@@ -19694,7 +19692,7 @@
         <p:spPr>
           <a:xfrm>
             <a:off x="0" y="0"/>
-            <a:ext cx="12188952" cy="914400"/>
+            <a:ext cx="12191695" cy="914400"/>
           </a:xfrm>
           <a:prstGeom prst="rect">
             <a:avLst/>
@@ -19705,6 +19703,7 @@
           <a:ln>
             <a:noFill/>
           </a:ln>
+          <a:effectLst/>
         </p:spPr>
         <p:style>
           <a:lnRef idx="1">
@@ -19737,7 +19736,7 @@
         <p:spPr>
           <a:xfrm>
             <a:off x="0" y="914400"/>
-            <a:ext cx="12188952" cy="54864"/>
+            <a:ext cx="12191695" cy="54864"/>
           </a:xfrm>
           <a:prstGeom prst="rect">
             <a:avLst/>
@@ -19748,6 +19747,7 @@
           <a:ln>
             <a:noFill/>
           </a:ln>
+          <a:effectLst/>
         </p:spPr>
         <p:style>
           <a:lnRef idx="1">
@@ -19794,17 +19794,20 @@
           <a:lstStyle/>
           <a:p>
             <a:pPr>
-              <a:spcAft>
-                <a:spcPts val="600"/>
-              </a:spcAft>
-            </a:pPr>
-            <a:r>
-              <a:rPr sz="2600" b="1">
+              <a:spcBef>
+                <a:spcPts val="0"/>
+              </a:spcBef>
+              <a:spcAft>
+                <a:spcPts val="400"/>
+              </a:spcAft>
+            </a:pPr>
+            <a:r>
+              <a:rPr sz="2600" b="1" i="0">
                 <a:solidFill>
                   <a:srgbClr val="FFFFFF"/>
                 </a:solidFill>
               </a:rPr>
-              <a:t>Two Automated Searches — One Was Safe, One Was Not</a:t>
+              <a:t>Future Plan</a:t>
             </a:r>
           </a:p>
         </p:txBody>
@@ -19832,6 +19835,9 @@
           <a:lstStyle/>
           <a:p>
             <a:pPr>
+              <a:spcBef>
+                <a:spcPts val="0"/>
+              </a:spcBef>
               <a:spcAft>
                 <a:spcPts val="600"/>
               </a:spcAft>
@@ -19855,7 +19861,7 @@
         </p:nvSpPr>
         <p:spPr>
           <a:xfrm>
-            <a:off x="11183112" y="6473952"/>
+            <a:off x="11185855" y="6473952"/>
             <a:ext cx="640080" cy="274320"/>
           </a:xfrm>
           <a:prstGeom prst="rect">
@@ -19869,7 +19875,10 @@
           </a:bodyPr>
           <a:lstStyle/>
           <a:p>
-            <a:pPr>
+            <a:pPr algn="r">
+              <a:spcBef>
+                <a:spcPts val="0"/>
+              </a:spcBef>
               <a:spcAft>
                 <a:spcPts val="600"/>
               </a:spcAft>
@@ -19880,69 +19889,32 @@
                   <a:srgbClr val="0B2B52"/>
                 </a:solidFill>
               </a:rPr>
-              <a:t>34</a:t>
-            </a:r>
-          </a:p>
-        </p:txBody>
-      </p:sp>
-      <p:sp>
-        <p:nvSpPr>
-          <p:cNvPr id="7" name="TextBox 6"/>
-          <p:cNvSpPr txBox="1"/>
-          <p:nvPr/>
-        </p:nvSpPr>
-        <p:spPr>
-          <a:xfrm>
-            <a:off x="548640" y="1078992"/>
-            <a:ext cx="11155680" cy="640080"/>
-          </a:xfrm>
-          <a:prstGeom prst="rect">
-            <a:avLst/>
-          </a:prstGeom>
-          <a:noFill/>
-        </p:spPr>
-        <p:txBody>
-          <a:bodyPr wrap="square">
-            <a:spAutoFit/>
-          </a:bodyPr>
-          <a:lstStyle/>
-          <a:p>
-            <a:pPr>
-              <a:spcAft>
-                <a:spcPts val="600"/>
-              </a:spcAft>
-            </a:pPr>
-            <a:r>
-              <a:rPr sz="1500" b="0">
-                <a:solidFill>
-                  <a:srgbClr val="0B2B52"/>
-                </a:solidFill>
-              </a:rPr>
-              <a:t>The same machinery applied to two problems that differ in one respect: whether a candidate can be checked.</a:t>
-            </a:r>
-          </a:p>
-        </p:txBody>
-      </p:sp>
-      <p:sp>
-        <p:nvSpPr>
-          <p:cNvPr id="8" name="Rounded Rectangle 7"/>
+              <a:t>36</a:t>
+            </a:r>
+          </a:p>
+        </p:txBody>
+      </p:sp>
+      <p:sp>
+        <p:nvSpPr>
+          <p:cNvPr id="7" name="Oval 6"/>
           <p:cNvSpPr/>
           <p:nvPr/>
         </p:nvSpPr>
         <p:spPr>
           <a:xfrm>
-            <a:off x="548640" y="1691640"/>
-            <a:ext cx="5440680" cy="1463040"/>
-          </a:xfrm>
-          <a:prstGeom prst="roundRect">
+            <a:off x="548640" y="1325880"/>
+            <a:ext cx="566928" cy="566928"/>
+          </a:xfrm>
+          <a:prstGeom prst="ellipse">
             <a:avLst/>
           </a:prstGeom>
           <a:solidFill>
-            <a:srgbClr val="C62828"/>
+            <a:srgbClr val="1E6FB8"/>
           </a:solidFill>
           <a:ln>
             <a:noFill/>
           </a:ln>
+          <a:effectLst/>
         </p:spPr>
         <p:style>
           <a:lnRef idx="1">
@@ -19962,41 +19934,178 @@
           <a:bodyPr rtlCol="0" anchor="ctr" wrap="square"/>
           <a:lstStyle/>
           <a:p>
-            <a:pPr algn="ctr"/>
-            <a:r>
-              <a:rPr sz="2300" b="1">
+            <a:pPr algn="ctr">
+              <a:spcBef>
+                <a:spcPts val="0"/>
+              </a:spcBef>
+              <a:spcAft>
+                <a:spcPts val="400"/>
+              </a:spcAft>
+            </a:pPr>
+            <a:r>
+              <a:rPr sz="1800" b="1" i="0">
                 <a:solidFill>
                   <a:srgbClr val="FFFFFF"/>
                 </a:solidFill>
               </a:rPr>
-              <a:t>p = 0.425</a:t>
-            </a:r>
-          </a:p>
-          <a:p>
-            <a:pPr algn="ctr"/>
-            <a:r>
-              <a:rPr sz="1050">
+              <a:t>1</a:t>
+            </a:r>
+          </a:p>
+        </p:txBody>
+      </p:sp>
+      <p:sp>
+        <p:nvSpPr>
+          <p:cNvPr id="8" name="TextBox 7"/>
+          <p:cNvSpPr txBox="1"/>
+          <p:nvPr/>
+        </p:nvSpPr>
+        <p:spPr>
+          <a:xfrm>
+            <a:off x="1325880" y="1307592"/>
+            <a:ext cx="10332720" cy="868680"/>
+          </a:xfrm>
+          <a:prstGeom prst="rect">
+            <a:avLst/>
+          </a:prstGeom>
+          <a:noFill/>
+        </p:spPr>
+        <p:txBody>
+          <a:bodyPr wrap="square">
+            <a:spAutoFit/>
+          </a:bodyPr>
+          <a:lstStyle/>
+          <a:p>
+            <a:pPr>
+              <a:spcBef>
+                <a:spcPts val="0"/>
+              </a:spcBef>
+              <a:spcAft>
+                <a:spcPts val="600"/>
+              </a:spcAft>
+            </a:pPr>
+            <a:r>
+              <a:rPr sz="1300" b="0">
+                <a:solidFill>
+                  <a:srgbClr val="0B2B52"/>
+                </a:solidFill>
+              </a:rPr>
+              <a:t>DONE — profiled; and measured what the optimisations actually deliver on pretrained weights (slides 11–18).</a:t>
+            </a:r>
+          </a:p>
+        </p:txBody>
+      </p:sp>
+      <p:sp>
+        <p:nvSpPr>
+          <p:cNvPr id="9" name="Oval 8"/>
+          <p:cNvSpPr/>
+          <p:nvPr/>
+        </p:nvSpPr>
+        <p:spPr>
+          <a:xfrm>
+            <a:off x="548640" y="2304288"/>
+            <a:ext cx="566928" cy="566928"/>
+          </a:xfrm>
+          <a:prstGeom prst="ellipse">
+            <a:avLst/>
+          </a:prstGeom>
+          <a:solidFill>
+            <a:srgbClr val="0E8F9A"/>
+          </a:solidFill>
+          <a:ln>
+            <a:noFill/>
+          </a:ln>
+          <a:effectLst/>
+        </p:spPr>
+        <p:style>
+          <a:lnRef idx="1">
+            <a:schemeClr val="accent1"/>
+          </a:lnRef>
+          <a:fillRef idx="3">
+            <a:schemeClr val="accent1"/>
+          </a:fillRef>
+          <a:effectRef idx="2">
+            <a:schemeClr val="accent1"/>
+          </a:effectRef>
+          <a:fontRef idx="minor">
+            <a:schemeClr val="lt1"/>
+          </a:fontRef>
+        </p:style>
+        <p:txBody>
+          <a:bodyPr rtlCol="0" anchor="ctr" wrap="square"/>
+          <a:lstStyle/>
+          <a:p>
+            <a:pPr algn="ctr">
+              <a:spcBef>
+                <a:spcPts val="0"/>
+              </a:spcBef>
+              <a:spcAft>
+                <a:spcPts val="400"/>
+              </a:spcAft>
+            </a:pPr>
+            <a:r>
+              <a:rPr sz="1800" b="1" i="0">
                 <a:solidFill>
                   <a:srgbClr val="FFFFFF"/>
                 </a:solidFill>
               </a:rPr>
-              <a:t>readout search: the gain a permutation null also finds</a:t>
-            </a:r>
-          </a:p>
-        </p:txBody>
-      </p:sp>
-      <p:sp>
-        <p:nvSpPr>
-          <p:cNvPr id="9" name="Rounded Rectangle 8"/>
+              <a:t>2</a:t>
+            </a:r>
+          </a:p>
+        </p:txBody>
+      </p:sp>
+      <p:sp>
+        <p:nvSpPr>
+          <p:cNvPr id="10" name="TextBox 9"/>
+          <p:cNvSpPr txBox="1"/>
+          <p:nvPr/>
+        </p:nvSpPr>
+        <p:spPr>
+          <a:xfrm>
+            <a:off x="1325880" y="2286000"/>
+            <a:ext cx="10332720" cy="868680"/>
+          </a:xfrm>
+          <a:prstGeom prst="rect">
+            <a:avLst/>
+          </a:prstGeom>
+          <a:noFill/>
+        </p:spPr>
+        <p:txBody>
+          <a:bodyPr wrap="square">
+            <a:spAutoFit/>
+          </a:bodyPr>
+          <a:lstStyle/>
+          <a:p>
+            <a:pPr>
+              <a:spcBef>
+                <a:spcPts val="0"/>
+              </a:spcBef>
+              <a:spcAft>
+                <a:spcPts val="600"/>
+              </a:spcAft>
+            </a:pPr>
+            <a:r>
+              <a:rPr sz="1300" b="0">
+                <a:solidFill>
+                  <a:srgbClr val="0B2B52"/>
+                </a:solidFill>
+              </a:rPr>
+              <a:t>DONE — DeCAF-Boltz, distilled for 10 steps, folds the 132-complex panel in ~20 min locally and returns 96% physically plausible backbones against 14% for a stock model run short (slides 27-28).</a:t>
+            </a:r>
+          </a:p>
+        </p:txBody>
+      </p:sp>
+      <p:sp>
+        <p:nvSpPr>
+          <p:cNvPr id="11" name="Oval 10"/>
           <p:cNvSpPr/>
           <p:nvPr/>
         </p:nvSpPr>
         <p:spPr>
           <a:xfrm>
-            <a:off x="6263640" y="1691640"/>
-            <a:ext cx="5440680" cy="1463040"/>
-          </a:xfrm>
-          <a:prstGeom prst="roundRect">
+            <a:off x="548640" y="3282696"/>
+            <a:ext cx="566928" cy="566928"/>
+          </a:xfrm>
+          <a:prstGeom prst="ellipse">
             <a:avLst/>
           </a:prstGeom>
           <a:solidFill>
@@ -20005,6 +20114,7 @@
           <a:ln>
             <a:noFill/>
           </a:ln>
+          <a:effectLst/>
         </p:spPr>
         <p:style>
           <a:lnRef idx="1">
@@ -20024,39 +20134,35 @@
           <a:bodyPr rtlCol="0" anchor="ctr" wrap="square"/>
           <a:lstStyle/>
           <a:p>
-            <a:pPr algn="ctr"/>
-            <a:r>
-              <a:rPr sz="2300" b="1">
+            <a:pPr algn="ctr">
+              <a:spcBef>
+                <a:spcPts val="0"/>
+              </a:spcBef>
+              <a:spcAft>
+                <a:spcPts val="400"/>
+              </a:spcAft>
+            </a:pPr>
+            <a:r>
+              <a:rPr sz="1800" b="1" i="0">
                 <a:solidFill>
                   <a:srgbClr val="FFFFFF"/>
                 </a:solidFill>
               </a:rPr>
-              <a:t>max |diff| = 0</a:t>
-            </a:r>
-          </a:p>
-          <a:p>
-            <a:pPr algn="ctr"/>
-            <a:r>
-              <a:rPr sz="1050">
-                <a:solidFill>
-                  <a:srgbClr val="FFFFFF"/>
-                </a:solidFill>
-              </a:rPr>
-              <a:t>operator rewrite: verified against its own reference</a:t>
-            </a:r>
-          </a:p>
-        </p:txBody>
-      </p:sp>
-      <p:sp>
-        <p:nvSpPr>
-          <p:cNvPr id="10" name="TextBox 9"/>
+              <a:t>3</a:t>
+            </a:r>
+          </a:p>
+        </p:txBody>
+      </p:sp>
+      <p:sp>
+        <p:nvSpPr>
+          <p:cNvPr id="12" name="TextBox 11"/>
           <p:cNvSpPr txBox="1"/>
           <p:nvPr/>
         </p:nvSpPr>
         <p:spPr>
           <a:xfrm>
-            <a:off x="548640" y="3291840"/>
-            <a:ext cx="11155680" cy="777240"/>
+            <a:off x="1325880" y="3264408"/>
+            <a:ext cx="10332720" cy="868680"/>
           </a:xfrm>
           <a:prstGeom prst="rect">
             <a:avLst/>
@@ -20069,37 +20175,94 @@
           </a:bodyPr>
           <a:lstStyle/>
           <a:p>
-            <a:r>
-              <a:rPr sz="1450" b="1">
+            <a:pPr>
+              <a:spcBef>
+                <a:spcPts val="0"/>
+              </a:spcBef>
+              <a:spcAft>
+                <a:spcPts val="600"/>
+              </a:spcAft>
+            </a:pPr>
+            <a:r>
+              <a:rPr sz="1300" b="0">
                 <a:solidFill>
                   <a:srgbClr val="0B2B52"/>
                 </a:solidFill>
               </a:rPr>
-              <a:t>Searching readouts on 22 receptors found a combination beating the headline by +0.018 AUC</a:t>
-            </a:r>
-          </a:p>
-          <a:p>
-            <a:r>
-              <a:rPr sz="1250">
-                <a:solidFill>
-                  <a:srgbClr val="1E6FB8"/>
-                </a:solidFill>
-              </a:rPr>
-              <a:t>a permutation null gains +0.032 on average, and the held-out panel reverses the gain to −0.029. Refused.</a:t>
-            </a:r>
-          </a:p>
-        </p:txBody>
-      </p:sp>
-      <p:sp>
-        <p:nvSpPr>
-          <p:cNvPr id="11" name="TextBox 10"/>
+              <a:t>DONE, NEGATIVE — the surrogate was distilled and evaluated: ipTM does not rank binders, so no surrogate distilled from it can either.</a:t>
+            </a:r>
+          </a:p>
+        </p:txBody>
+      </p:sp>
+      <p:sp>
+        <p:nvSpPr>
+          <p:cNvPr id="13" name="Oval 12"/>
+          <p:cNvSpPr/>
+          <p:nvPr/>
+        </p:nvSpPr>
+        <p:spPr>
+          <a:xfrm>
+            <a:off x="548640" y="4261104"/>
+            <a:ext cx="566928" cy="566928"/>
+          </a:xfrm>
+          <a:prstGeom prst="ellipse">
+            <a:avLst/>
+          </a:prstGeom>
+          <a:solidFill>
+            <a:srgbClr val="C77700"/>
+          </a:solidFill>
+          <a:ln>
+            <a:noFill/>
+          </a:ln>
+          <a:effectLst/>
+        </p:spPr>
+        <p:style>
+          <a:lnRef idx="1">
+            <a:schemeClr val="accent1"/>
+          </a:lnRef>
+          <a:fillRef idx="3">
+            <a:schemeClr val="accent1"/>
+          </a:fillRef>
+          <a:effectRef idx="2">
+            <a:schemeClr val="accent1"/>
+          </a:effectRef>
+          <a:fontRef idx="minor">
+            <a:schemeClr val="lt1"/>
+          </a:fontRef>
+        </p:style>
+        <p:txBody>
+          <a:bodyPr rtlCol="0" anchor="ctr" wrap="square"/>
+          <a:lstStyle/>
+          <a:p>
+            <a:pPr algn="ctr">
+              <a:spcBef>
+                <a:spcPts val="0"/>
+              </a:spcBef>
+              <a:spcAft>
+                <a:spcPts val="400"/>
+              </a:spcAft>
+            </a:pPr>
+            <a:r>
+              <a:rPr sz="1800" b="1" i="0">
+                <a:solidFill>
+                  <a:srgbClr val="FFFFFF"/>
+                </a:solidFill>
+              </a:rPr>
+              <a:t>4</a:t>
+            </a:r>
+          </a:p>
+        </p:txBody>
+      </p:sp>
+      <p:sp>
+        <p:nvSpPr>
+          <p:cNvPr id="14" name="TextBox 13"/>
           <p:cNvSpPr txBox="1"/>
           <p:nvPr/>
         </p:nvSpPr>
         <p:spPr>
           <a:xfrm>
-            <a:off x="548640" y="4251960"/>
-            <a:ext cx="11155680" cy="777240"/>
+            <a:off x="1325880" y="4242816"/>
+            <a:ext cx="10332720" cy="868680"/>
           </a:xfrm>
           <a:prstGeom prst="rect">
             <a:avLst/>
@@ -20112,39 +20275,37 @@
           </a:bodyPr>
           <a:lstStyle/>
           <a:p>
-            <a:r>
-              <a:rPr sz="1450" b="1">
+            <a:pPr>
+              <a:spcBef>
+                <a:spcPts val="0"/>
+              </a:spcBef>
+              <a:spcAft>
+                <a:spcPts val="600"/>
+              </a:spcAft>
+            </a:pPr>
+            <a:r>
+              <a:rPr sz="1300" b="0">
                 <a:solidFill>
                   <a:srgbClr val="0B2B52"/>
                 </a:solidFill>
               </a:rPr>
-              <a:t>Searching operator rewrites found two worth 1.46× and 1.19×</a:t>
-            </a:r>
-          </a:p>
-          <a:p>
-            <a:r>
-              <a:rPr sz="1250">
-                <a:solidFill>
-                  <a:srgbClr val="1E6FB8"/>
-                </a:solidFill>
-              </a:rPr>
-              <a:t>bit-exact, and seeded folds before and after give identical coordinates and identical ipTM. Accepted.</a:t>
-            </a:r>
-          </a:p>
-        </p:txBody>
-      </p:sp>
-      <p:sp>
-        <p:nvSpPr>
-          <p:cNvPr id="12" name="Rounded Rectangle 11"/>
+              <a:t>Use open Boltz-2 weights only — Boltz-2.1 is closed / API-only.</a:t>
+            </a:r>
+          </a:p>
+        </p:txBody>
+      </p:sp>
+      <p:sp>
+        <p:nvSpPr>
+          <p:cNvPr id="15" name="Oval 14"/>
           <p:cNvSpPr/>
           <p:nvPr/>
         </p:nvSpPr>
         <p:spPr>
           <a:xfrm>
-            <a:off x="548640" y="5257800"/>
-            <a:ext cx="11155680" cy="960120"/>
-          </a:xfrm>
-          <a:prstGeom prst="roundRect">
+            <a:off x="548640" y="5239512"/>
+            <a:ext cx="566928" cy="566928"/>
+          </a:xfrm>
+          <a:prstGeom prst="ellipse">
             <a:avLst/>
           </a:prstGeom>
           <a:solidFill>
@@ -20153,6 +20314,7 @@
           <a:ln>
             <a:noFill/>
           </a:ln>
+          <a:effectLst/>
         </p:spPr>
         <p:style>
           <a:lnRef idx="1">
@@ -20173,17 +20335,61 @@
           <a:lstStyle/>
           <a:p>
             <a:pPr algn="ctr">
+              <a:spcBef>
+                <a:spcPts val="0"/>
+              </a:spcBef>
+              <a:spcAft>
+                <a:spcPts val="400"/>
+              </a:spcAft>
+            </a:pPr>
+            <a:r>
+              <a:rPr sz="1800" b="1" i="0">
+                <a:solidFill>
+                  <a:srgbClr val="FFFFFF"/>
+                </a:solidFill>
+              </a:rPr>
+              <a:t>5</a:t>
+            </a:r>
+          </a:p>
+        </p:txBody>
+      </p:sp>
+      <p:sp>
+        <p:nvSpPr>
+          <p:cNvPr id="16" name="TextBox 15"/>
+          <p:cNvSpPr txBox="1"/>
+          <p:nvPr/>
+        </p:nvSpPr>
+        <p:spPr>
+          <a:xfrm>
+            <a:off x="1325880" y="5221224"/>
+            <a:ext cx="10332720" cy="868680"/>
+          </a:xfrm>
+          <a:prstGeom prst="rect">
+            <a:avLst/>
+          </a:prstGeom>
+          <a:noFill/>
+        </p:spPr>
+        <p:txBody>
+          <a:bodyPr wrap="square">
+            <a:spAutoFit/>
+          </a:bodyPr>
+          <a:lstStyle/>
+          <a:p>
+            <a:pPr>
+              <a:spcBef>
+                <a:spcPts val="0"/>
+              </a:spcBef>
               <a:spcAft>
                 <a:spcPts val="600"/>
               </a:spcAft>
             </a:pPr>
             <a:r>
-              <a:rPr sz="1700" b="1">
-                <a:solidFill>
-                  <a:srgbClr val="FFFFFF"/>
-                </a:solidFill>
-              </a:rPr>
-              <a:t>Search pays where a candidate can be verified independently of the data that proposed it.</a:t>
+              <a:rPr sz="1300" b="0">
+                <a:solidFill>
+                  <a:srgbClr val="0B2B52"/>
+                </a:solidFill>
+              </a:rPr>
+              <a:t>Production GPU scaling — NO LONGER a prerequisite. MPS (~3x) plus few-step distillation let the held-out panel be folded five times on this laptop, and the third draw overturned what the first two supported. Scaling is now for extending the panel past 22 receptors, which is the binding constraint on the open questions.</a:t>
             </a:r>
           </a:p>
         </p:txBody>
@@ -20215,7 +20421,7 @@
         <p:spPr>
           <a:xfrm>
             <a:off x="0" y="0"/>
-            <a:ext cx="12188952" cy="914400"/>
+            <a:ext cx="12191695" cy="914400"/>
           </a:xfrm>
           <a:prstGeom prst="rect">
             <a:avLst/>
@@ -20226,6 +20432,7 @@
           <a:ln>
             <a:noFill/>
           </a:ln>
+          <a:effectLst/>
         </p:spPr>
         <p:style>
           <a:lnRef idx="1">
@@ -20258,7 +20465,7 @@
         <p:spPr>
           <a:xfrm>
             <a:off x="0" y="914400"/>
-            <a:ext cx="12188952" cy="54864"/>
+            <a:ext cx="12191695" cy="54864"/>
           </a:xfrm>
           <a:prstGeom prst="rect">
             <a:avLst/>
@@ -20269,6 +20476,7 @@
           <a:ln>
             <a:noFill/>
           </a:ln>
+          <a:effectLst/>
         </p:spPr>
         <p:style>
           <a:lnRef idx="1">
@@ -20315,17 +20523,20 @@
           <a:lstStyle/>
           <a:p>
             <a:pPr>
-              <a:spcAft>
-                <a:spcPts val="600"/>
-              </a:spcAft>
-            </a:pPr>
-            <a:r>
-              <a:rPr sz="2600" b="1">
+              <a:spcBef>
+                <a:spcPts val="0"/>
+              </a:spcBef>
+              <a:spcAft>
+                <a:spcPts val="400"/>
+              </a:spcAft>
+            </a:pPr>
+            <a:r>
+              <a:rPr sz="2600" b="1" i="0">
                 <a:solidFill>
                   <a:srgbClr val="FFFFFF"/>
                 </a:solidFill>
               </a:rPr>
-              <a:t>Measured — Against Binding That Was Actually Measured</a:t>
+              <a:t>Summary</a:t>
             </a:r>
           </a:p>
         </p:txBody>
@@ -20353,6 +20564,9 @@
           <a:lstStyle/>
           <a:p>
             <a:pPr>
+              <a:spcBef>
+                <a:spcPts val="0"/>
+              </a:spcBef>
               <a:spcAft>
                 <a:spcPts val="600"/>
               </a:spcAft>
@@ -20376,7 +20590,7 @@
         </p:nvSpPr>
         <p:spPr>
           <a:xfrm>
-            <a:off x="11183112" y="6473952"/>
+            <a:off x="11185855" y="6473952"/>
             <a:ext cx="640080" cy="274320"/>
           </a:xfrm>
           <a:prstGeom prst="rect">
@@ -20390,7 +20604,10 @@
           </a:bodyPr>
           <a:lstStyle/>
           <a:p>
-            <a:pPr>
+            <a:pPr algn="r">
+              <a:spcBef>
+                <a:spcPts val="0"/>
+              </a:spcBef>
               <a:spcAft>
                 <a:spcPts val="600"/>
               </a:spcAft>
@@ -20401,7 +20618,7 @@
                   <a:srgbClr val="0B2B52"/>
                 </a:solidFill>
               </a:rPr>
-              <a:t>35</a:t>
+              <a:t>37</a:t>
             </a:r>
           </a:p>
         </p:txBody>
@@ -20414,8 +20631,8 @@
         </p:nvSpPr>
         <p:spPr>
           <a:xfrm>
-            <a:off x="548640" y="1051560"/>
-            <a:ext cx="11155680" cy="1005840"/>
+            <a:off x="548640" y="1280160"/>
+            <a:ext cx="11155680" cy="3383280"/>
           </a:xfrm>
           <a:prstGeom prst="rect">
             <a:avLst/>
@@ -20429,17 +20646,20 @@
           <a:lstStyle/>
           <a:p>
             <a:pPr>
+              <a:spcBef>
+                <a:spcPts val="0"/>
+              </a:spcBef>
               <a:spcAft>
                 <a:spcPts val="600"/>
               </a:spcAft>
             </a:pPr>
             <a:r>
-              <a:rPr sz="1500" b="0">
+              <a:rPr sz="1400" b="0">
                 <a:solidFill>
                   <a:srgbClr val="0B2B52"/>
                 </a:solidFill>
               </a:rPr>
-              <a:t>1,320 de novo designs released by Anthropic, binding measured by two contract research organisations,</a:t>
+              <a:t>•  Implemented and integrated memory, sampling and parallelism optimisations into the Boltz pipeline; device-agnostic on Apple Silicon.</a:t>
             </a:r>
           </a:p>
           <a:p>
@@ -20449,12 +20669,87 @@
               </a:spcAft>
             </a:pPr>
             <a:r>
-              <a:rPr sz="1500" b="0">
+              <a:rPr sz="1400" b="0">
                 <a:solidFill>
                   <a:srgbClr val="0B2B52"/>
                 </a:solidFill>
               </a:rPr>
-              <a:t>on molecules that postdate every model's training. Contamination is unavailable as an explanation.</a:t>
+              <a:t>•  Moved from component microbenchmarks to end-to-end measurement against pretrained checkpoints and experimentally determined structures.</a:t>
+            </a:r>
+          </a:p>
+          <a:p>
+            <a:pPr>
+              <a:spcAft>
+                <a:spcPts val="600"/>
+              </a:spcAft>
+            </a:pPr>
+            <a:r>
+              <a:rPr sz="1400" b="0">
+                <a:solidFill>
+                  <a:srgbClr val="0B2B52"/>
+                </a:solidFill>
+              </a:rPr>
+              <a:t>•  Two questions closed with negative answers, both with mechanisms: the low-rank OPM is unreachable on released weights, and ipTM tracks peptide composition rather than binding.</a:t>
+            </a:r>
+          </a:p>
+          <a:p>
+            <a:pPr>
+              <a:spcAft>
+                <a:spcPts val="600"/>
+              </a:spcAft>
+            </a:pPr>
+            <a:r>
+              <a:rPr sz="1400" b="0">
+                <a:solidFill>
+                  <a:srgbClr val="0B2B52"/>
+                </a:solidFill>
+              </a:rPr>
+              <a:t>•  A third finding generalises beyond this project: a single unseeded fold does not reproduce its own ranking.</a:t>
+            </a:r>
+          </a:p>
+          <a:p>
+            <a:pPr>
+              <a:spcAft>
+                <a:spcPts val="600"/>
+              </a:spcAft>
+            </a:pPr>
+            <a:r>
+              <a:rPr sz="1400" b="0">
+                <a:solidFill>
+                  <a:srgbClr val="0B2B52"/>
+                </a:solidFill>
+              </a:rPr>
+              <a:t>•  Delivered as a local screening tool: the scramble control, the cost of reduced settings and the replicate spread are built into what it does rather than written beside it (slides 31–32).</a:t>
+            </a:r>
+          </a:p>
+          <a:p>
+            <a:r>
+              <a:rPr sz="1400" b="0">
+                <a:solidFill>
+                  <a:srgbClr val="0B2B52"/>
+                </a:solidFill>
+              </a:rPr>
+              <a:t>•  Of the three inference settings raised together, sampling steps carry the effect; alignment depth and recycling carry none of it, and 69% of the gain costs a third of the compute.</a:t>
+            </a:r>
+          </a:p>
+          <a:p>
+            <a:r>
+              <a:rPr sz="1400" b="0">
+                <a:solidFill>
+                  <a:srgbClr val="0B2B52"/>
+                </a:solidFill>
+              </a:rPr>
+              <a:t>•  Checked against binding measured in a wet lab on 1,320 designs no model had seen: 0.626, against 0.943 on the in-training panel. The readout still beats whole-chain confidence, which was the claim.</a:t>
+            </a:r>
+          </a:p>
+          <a:p>
+            <a:r>
+              <a:rPr sz="1400" b="0">
+                <a:solidFill>
+                  <a:srgbClr val="0B2B52"/>
+                </a:solidFill>
+              </a:rPr>
+              <a:t>•  Next: extend the panel past 22 receptors, which is what now limits the open questions.</a:t>
             </a:r>
           </a:p>
         </p:txBody>
@@ -20467,18 +20762,19 @@
         </p:nvSpPr>
         <p:spPr>
           <a:xfrm>
-            <a:off x="548640" y="1965960"/>
-            <a:ext cx="3520440" cy="1463040"/>
+            <a:off x="548640" y="4892040"/>
+            <a:ext cx="11155680" cy="1051560"/>
           </a:xfrm>
           <a:prstGeom prst="roundRect">
             <a:avLst/>
           </a:prstGeom>
           <a:solidFill>
-            <a:srgbClr val="1E6FB8"/>
+            <a:srgbClr val="0B2B52"/>
           </a:solidFill>
           <a:ln>
             <a:noFill/>
           </a:ln>
+          <a:effectLst/>
         </p:spPr>
         <p:style>
           <a:lnRef idx="1">
@@ -20498,297 +20794,21 @@
           <a:bodyPr rtlCol="0" anchor="ctr" wrap="square"/>
           <a:lstStyle/>
           <a:p>
-            <a:pPr algn="ctr"/>
-            <a:r>
-              <a:rPr sz="2300" b="1">
+            <a:pPr algn="ctr">
+              <a:spcBef>
+                <a:spcPts val="0"/>
+              </a:spcBef>
+              <a:spcAft>
+                <a:spcPts val="400"/>
+              </a:spcAft>
+            </a:pPr>
+            <a:r>
+              <a:rPr sz="2000" b="1" i="0">
                 <a:solidFill>
                   <a:srgbClr val="FFFFFF"/>
                 </a:solidFill>
               </a:rPr>
-              <a:t>0.943</a:t>
-            </a:r>
-          </a:p>
-          <a:p>
-            <a:pPr algn="ctr"/>
-            <a:r>
-              <a:rPr sz="1050">
-                <a:solidFill>
-                  <a:srgbClr val="FFFFFF"/>
-                </a:solidFill>
-              </a:rPr>
-              <a:t>this work, in-training panel</a:t>
-            </a:r>
-          </a:p>
-        </p:txBody>
-      </p:sp>
-      <p:sp>
-        <p:nvSpPr>
-          <p:cNvPr id="9" name="Rounded Rectangle 8"/>
-          <p:cNvSpPr/>
-          <p:nvPr/>
-        </p:nvSpPr>
-        <p:spPr>
-          <a:xfrm>
-            <a:off x="4343400" y="1965960"/>
-            <a:ext cx="3520440" cy="1463040"/>
-          </a:xfrm>
-          <a:prstGeom prst="roundRect">
-            <a:avLst/>
-          </a:prstGeom>
-          <a:solidFill>
-            <a:srgbClr val="0E8F9A"/>
-          </a:solidFill>
-          <a:ln>
-            <a:noFill/>
-          </a:ln>
-        </p:spPr>
-        <p:style>
-          <a:lnRef idx="1">
-            <a:schemeClr val="accent1"/>
-          </a:lnRef>
-          <a:fillRef idx="3">
-            <a:schemeClr val="accent1"/>
-          </a:fillRef>
-          <a:effectRef idx="2">
-            <a:schemeClr val="accent1"/>
-          </a:effectRef>
-          <a:fontRef idx="minor">
-            <a:schemeClr val="lt1"/>
-          </a:fontRef>
-        </p:style>
-        <p:txBody>
-          <a:bodyPr rtlCol="0" anchor="ctr" wrap="square"/>
-          <a:lstStyle/>
-          <a:p>
-            <a:pPr algn="ctr"/>
-            <a:r>
-              <a:rPr sz="2300" b="1">
-                <a:solidFill>
-                  <a:srgbClr val="FFFFFF"/>
-                </a:solidFill>
-              </a:rPr>
-              <a:t>0.682–0.803</a:t>
-            </a:r>
-          </a:p>
-          <a:p>
-            <a:pPr algn="ctr"/>
-            <a:r>
-              <a:rPr sz="1050">
-                <a:solidFill>
-                  <a:srgbClr val="FFFFFF"/>
-                </a:solidFill>
-              </a:rPr>
-              <a:t>this work, held-out panel</a:t>
-            </a:r>
-          </a:p>
-        </p:txBody>
-      </p:sp>
-      <p:sp>
-        <p:nvSpPr>
-          <p:cNvPr id="10" name="Rounded Rectangle 9"/>
-          <p:cNvSpPr/>
-          <p:nvPr/>
-        </p:nvSpPr>
-        <p:spPr>
-          <a:xfrm>
-            <a:off x="8138160" y="1965960"/>
-            <a:ext cx="3566160" cy="1463040"/>
-          </a:xfrm>
-          <a:prstGeom prst="roundRect">
-            <a:avLst/>
-          </a:prstGeom>
-          <a:solidFill>
-            <a:srgbClr val="C62828"/>
-          </a:solidFill>
-          <a:ln>
-            <a:noFill/>
-          </a:ln>
-        </p:spPr>
-        <p:style>
-          <a:lnRef idx="1">
-            <a:schemeClr val="accent1"/>
-          </a:lnRef>
-          <a:fillRef idx="3">
-            <a:schemeClr val="accent1"/>
-          </a:fillRef>
-          <a:effectRef idx="2">
-            <a:schemeClr val="accent1"/>
-          </a:effectRef>
-          <a:fontRef idx="minor">
-            <a:schemeClr val="lt1"/>
-          </a:fontRef>
-        </p:style>
-        <p:txBody>
-          <a:bodyPr rtlCol="0" anchor="ctr" wrap="square"/>
-          <a:lstStyle/>
-          <a:p>
-            <a:pPr algn="ctr"/>
-            <a:r>
-              <a:rPr sz="2300" b="1">
-                <a:solidFill>
-                  <a:srgbClr val="FFFFFF"/>
-                </a:solidFill>
-              </a:rPr>
-              <a:t>0.626</a:t>
-            </a:r>
-          </a:p>
-          <a:p>
-            <a:pPr algn="ctr"/>
-            <a:r>
-              <a:rPr sz="1050">
-                <a:solidFill>
-                  <a:srgbClr val="FFFFFF"/>
-                </a:solidFill>
-              </a:rPr>
-              <a:t>interface pLDDT vs measured binding</a:t>
-            </a:r>
-          </a:p>
-        </p:txBody>
-      </p:sp>
-      <p:sp>
-        <p:nvSpPr>
-          <p:cNvPr id="11" name="TextBox 10"/>
-          <p:cNvSpPr txBox="1"/>
-          <p:nvPr/>
-        </p:nvSpPr>
-        <p:spPr>
-          <a:xfrm>
-            <a:off x="548640" y="3703320"/>
-            <a:ext cx="11155680" cy="640080"/>
-          </a:xfrm>
-          <a:prstGeom prst="rect">
-            <a:avLst/>
-          </a:prstGeom>
-          <a:noFill/>
-        </p:spPr>
-        <p:txBody>
-          <a:bodyPr wrap="square">
-            <a:spAutoFit/>
-          </a:bodyPr>
-          <a:lstStyle/>
-          <a:p>
-            <a:pPr>
-              <a:spcAft>
-                <a:spcPts val="600"/>
-              </a:spcAft>
-            </a:pPr>
-            <a:r>
-              <a:rPr sz="1500" b="0">
-                <a:solidFill>
-                  <a:srgbClr val="0B2B52"/>
-                </a:solidFill>
-              </a:rPr>
-              <a:t>Ten independently developed predictors all land between 0.62 and 0.67. The ceiling belongs to the task.</a:t>
-            </a:r>
-          </a:p>
-        </p:txBody>
-      </p:sp>
-      <p:sp>
-        <p:nvSpPr>
-          <p:cNvPr id="12" name="Rounded Rectangle 11"/>
-          <p:cNvSpPr/>
-          <p:nvPr/>
-        </p:nvSpPr>
-        <p:spPr>
-          <a:xfrm>
-            <a:off x="548640" y="4343400"/>
-            <a:ext cx="11155680" cy="960120"/>
-          </a:xfrm>
-          <a:prstGeom prst="roundRect">
-            <a:avLst/>
-          </a:prstGeom>
-          <a:solidFill>
-            <a:srgbClr val="2E7D32"/>
-          </a:solidFill>
-          <a:ln>
-            <a:noFill/>
-          </a:ln>
-        </p:spPr>
-        <p:style>
-          <a:lnRef idx="1">
-            <a:schemeClr val="accent1"/>
-          </a:lnRef>
-          <a:fillRef idx="3">
-            <a:schemeClr val="accent1"/>
-          </a:fillRef>
-          <a:effectRef idx="2">
-            <a:schemeClr val="accent1"/>
-          </a:effectRef>
-          <a:fontRef idx="minor">
-            <a:schemeClr val="lt1"/>
-          </a:fontRef>
-        </p:style>
-        <p:txBody>
-          <a:bodyPr rtlCol="0" anchor="ctr" wrap="square"/>
-          <a:lstStyle/>
-          <a:p>
-            <a:pPr algn="ctr">
-              <a:spcAft>
-                <a:spcPts val="600"/>
-              </a:spcAft>
-            </a:pPr>
-            <a:r>
-              <a:rPr sz="1700" b="1">
-                <a:solidFill>
-                  <a:srgbClr val="FFFFFF"/>
-                </a:solidFill>
-              </a:rPr>
-              <a:t>Interface pLDDT beats the binder's whole-chain confidence by +0.033 AUC [+0.005, +0.061] — Section 7.7's claim, on measured binding.</a:t>
-            </a:r>
-          </a:p>
-        </p:txBody>
-      </p:sp>
-      <p:sp>
-        <p:nvSpPr>
-          <p:cNvPr id="13" name="Rounded Rectangle 12"/>
-          <p:cNvSpPr/>
-          <p:nvPr/>
-        </p:nvSpPr>
-        <p:spPr>
-          <a:xfrm>
-            <a:off x="548640" y="5440680"/>
-            <a:ext cx="11155680" cy="868680"/>
-          </a:xfrm>
-          <a:prstGeom prst="roundRect">
-            <a:avLst/>
-          </a:prstGeom>
-          <a:solidFill>
-            <a:srgbClr val="FDF3E0"/>
-          </a:solidFill>
-          <a:ln>
-            <a:noFill/>
-          </a:ln>
-        </p:spPr>
-        <p:style>
-          <a:lnRef idx="1">
-            <a:schemeClr val="accent1"/>
-          </a:lnRef>
-          <a:fillRef idx="3">
-            <a:schemeClr val="accent1"/>
-          </a:fillRef>
-          <a:effectRef idx="2">
-            <a:schemeClr val="accent1"/>
-          </a:effectRef>
-          <a:fontRef idx="minor">
-            <a:schemeClr val="lt1"/>
-          </a:fontRef>
-        </p:style>
-        <p:txBody>
-          <a:bodyPr rtlCol="0" anchor="ctr" wrap="square"/>
-          <a:lstStyle/>
-          <a:p>
-            <a:pPr algn="ctr">
-              <a:spcAft>
-                <a:spcPts val="600"/>
-              </a:spcAft>
-            </a:pPr>
-            <a:r>
-              <a:rPr sz="1250" b="0">
-                <a:solidFill>
-                  <a:srgbClr val="8A5200"/>
-                </a:solidFill>
-              </a:rPr>
-              <a:t>The held-out figure is far closer to the wet-lab figure than the headline is, and still above it. A benchmark quoted without saying whether the complexes were in training overstates a screen — this puts a number on by how much, from outside the dissertation.</a:t>
+              <a:t>Thank you  ·  Questions welcome</a:t>
             </a:r>
           </a:p>
         </p:txBody>

--- a/final_dissertation_presentation.pptx
+++ b/final_dissertation_presentation.pptx
@@ -40,6 +40,7 @@
     <p:sldId id="291" r:id="rId42"/>
     <p:sldId id="292" r:id="rId43"/>
     <p:sldId id="293" r:id="rId44"/>
+    <p:sldId id="294" r:id="rId45"/>
     <p:sldId id="267" r:id="rId18"/>
     <p:sldId id="268" r:id="rId19"/>
   </p:sldIdLst>
@@ -19889,7 +19890,7 @@
                   <a:srgbClr val="0B2B52"/>
                 </a:solidFill>
               </a:rPr>
-              <a:t>36</a:t>
+              <a:t>37</a:t>
             </a:r>
           </a:p>
         </p:txBody>
@@ -20618,7 +20619,7 @@
                   <a:srgbClr val="0B2B52"/>
                 </a:solidFill>
               </a:rPr>
-              <a:t>37</a:t>
+              <a:t>38</a:t>
             </a:r>
           </a:p>
         </p:txBody>
@@ -20809,6 +20810,802 @@
                 </a:solidFill>
               </a:rPr>
               <a:t>Thank you  ·  Questions welcome</a:t>
+            </a:r>
+          </a:p>
+        </p:txBody>
+      </p:sp>
+    </p:spTree>
+  </p:cSld>
+  <p:clrMapOvr>
+    <a:masterClrMapping/>
+  </p:clrMapOvr>
+</p:sld>
+</file>
+
+<file path=ppt/slides/slide38.xml><?xml version="1.0" encoding="utf-8"?>
+<p:sld xmlns:a="http://schemas.openxmlformats.org/drawingml/2006/main" xmlns:p="http://schemas.openxmlformats.org/presentationml/2006/main" xmlns:r="http://schemas.openxmlformats.org/officeDocument/2006/relationships">
+  <p:cSld>
+    <p:spTree>
+      <p:nvGrpSpPr>
+        <p:cNvPr id="1" name=""/>
+        <p:cNvGrpSpPr/>
+        <p:nvPr/>
+      </p:nvGrpSpPr>
+      <p:grpSpPr/>
+      <p:sp>
+        <p:nvSpPr>
+          <p:cNvPr id="2" name="Rectangle 1"/>
+          <p:cNvSpPr/>
+          <p:nvPr/>
+        </p:nvSpPr>
+        <p:spPr>
+          <a:xfrm>
+            <a:off x="0" y="0"/>
+            <a:ext cx="12188952" cy="914400"/>
+          </a:xfrm>
+          <a:prstGeom prst="rect">
+            <a:avLst/>
+          </a:prstGeom>
+          <a:solidFill>
+            <a:srgbClr val="0B2B52"/>
+          </a:solidFill>
+          <a:ln>
+            <a:noFill/>
+          </a:ln>
+        </p:spPr>
+        <p:style>
+          <a:lnRef idx="1">
+            <a:schemeClr val="accent1"/>
+          </a:lnRef>
+          <a:fillRef idx="3">
+            <a:schemeClr val="accent1"/>
+          </a:fillRef>
+          <a:effectRef idx="2">
+            <a:schemeClr val="accent1"/>
+          </a:effectRef>
+          <a:fontRef idx="minor">
+            <a:schemeClr val="lt1"/>
+          </a:fontRef>
+        </p:style>
+        <p:txBody>
+          <a:bodyPr rtlCol="0" anchor="ctr"/>
+          <a:lstStyle/>
+          <a:p>
+            <a:pPr algn="ctr"/>
+          </a:p>
+        </p:txBody>
+      </p:sp>
+      <p:sp>
+        <p:nvSpPr>
+          <p:cNvPr id="3" name="Rectangle 2"/>
+          <p:cNvSpPr/>
+          <p:nvPr/>
+        </p:nvSpPr>
+        <p:spPr>
+          <a:xfrm>
+            <a:off x="0" y="914400"/>
+            <a:ext cx="12188952" cy="54864"/>
+          </a:xfrm>
+          <a:prstGeom prst="rect">
+            <a:avLst/>
+          </a:prstGeom>
+          <a:solidFill>
+            <a:srgbClr val="1E6FB8"/>
+          </a:solidFill>
+          <a:ln>
+            <a:noFill/>
+          </a:ln>
+        </p:spPr>
+        <p:style>
+          <a:lnRef idx="1">
+            <a:schemeClr val="accent1"/>
+          </a:lnRef>
+          <a:fillRef idx="3">
+            <a:schemeClr val="accent1"/>
+          </a:fillRef>
+          <a:effectRef idx="2">
+            <a:schemeClr val="accent1"/>
+          </a:effectRef>
+          <a:fontRef idx="minor">
+            <a:schemeClr val="lt1"/>
+          </a:fontRef>
+        </p:style>
+        <p:txBody>
+          <a:bodyPr rtlCol="0" anchor="ctr"/>
+          <a:lstStyle/>
+          <a:p>
+            <a:pPr algn="ctr"/>
+          </a:p>
+        </p:txBody>
+      </p:sp>
+      <p:sp>
+        <p:nvSpPr>
+          <p:cNvPr id="4" name="TextBox 3"/>
+          <p:cNvSpPr txBox="1"/>
+          <p:nvPr/>
+        </p:nvSpPr>
+        <p:spPr>
+          <a:xfrm>
+            <a:off x="502920" y="109728"/>
+            <a:ext cx="11155680" cy="777240"/>
+          </a:xfrm>
+          <a:prstGeom prst="rect">
+            <a:avLst/>
+          </a:prstGeom>
+          <a:noFill/>
+        </p:spPr>
+        <p:txBody>
+          <a:bodyPr wrap="square">
+            <a:spAutoFit/>
+          </a:bodyPr>
+          <a:lstStyle/>
+          <a:p>
+            <a:pPr>
+              <a:spcAft>
+                <a:spcPts val="600"/>
+              </a:spcAft>
+            </a:pPr>
+            <a:r>
+              <a:rPr sz="2600" b="1">
+                <a:solidFill>
+                  <a:srgbClr val="FFFFFF"/>
+                </a:solidFill>
+              </a:rPr>
+              <a:t>Measured — Where the Scramble Control Stops Working</a:t>
+            </a:r>
+          </a:p>
+        </p:txBody>
+      </p:sp>
+      <p:sp>
+        <p:nvSpPr>
+          <p:cNvPr id="5" name="TextBox 4"/>
+          <p:cNvSpPr txBox="1"/>
+          <p:nvPr/>
+        </p:nvSpPr>
+        <p:spPr>
+          <a:xfrm>
+            <a:off x="502920" y="6473952"/>
+            <a:ext cx="8229600" cy="274320"/>
+          </a:xfrm>
+          <a:prstGeom prst="rect">
+            <a:avLst/>
+          </a:prstGeom>
+          <a:noFill/>
+        </p:spPr>
+        <p:txBody>
+          <a:bodyPr wrap="square">
+            <a:spAutoFit/>
+          </a:bodyPr>
+          <a:lstStyle/>
+          <a:p>
+            <a:pPr>
+              <a:spcAft>
+                <a:spcPts val="600"/>
+              </a:spcAft>
+            </a:pPr>
+            <a:r>
+              <a:rPr sz="900" b="0">
+                <a:solidFill>
+                  <a:srgbClr val="555555"/>
+                </a:solidFill>
+              </a:rPr>
+              <a:t>Boltz-Fast · Final Dissertation Report · Akik Jana (2024AB05287)</a:t>
+            </a:r>
+          </a:p>
+        </p:txBody>
+      </p:sp>
+      <p:sp>
+        <p:nvSpPr>
+          <p:cNvPr id="6" name="TextBox 5"/>
+          <p:cNvSpPr txBox="1"/>
+          <p:nvPr/>
+        </p:nvSpPr>
+        <p:spPr>
+          <a:xfrm>
+            <a:off x="11183112" y="6473952"/>
+            <a:ext cx="640080" cy="274320"/>
+          </a:xfrm>
+          <a:prstGeom prst="rect">
+            <a:avLst/>
+          </a:prstGeom>
+          <a:noFill/>
+        </p:spPr>
+        <p:txBody>
+          <a:bodyPr wrap="square">
+            <a:spAutoFit/>
+          </a:bodyPr>
+          <a:lstStyle/>
+          <a:p>
+            <a:pPr>
+              <a:spcAft>
+                <a:spcPts val="600"/>
+              </a:spcAft>
+            </a:pPr>
+            <a:r>
+              <a:rPr sz="1000" b="0">
+                <a:solidFill>
+                  <a:srgbClr val="0B2B52"/>
+                </a:solidFill>
+              </a:rPr>
+              <a:t>36</a:t>
+            </a:r>
+          </a:p>
+        </p:txBody>
+      </p:sp>
+      <p:sp>
+        <p:nvSpPr>
+          <p:cNvPr id="7" name="TextBox 6"/>
+          <p:cNvSpPr txBox="1"/>
+          <p:nvPr/>
+        </p:nvSpPr>
+        <p:spPr>
+          <a:xfrm>
+            <a:off x="548640" y="1051560"/>
+            <a:ext cx="11155680" cy="1005840"/>
+          </a:xfrm>
+          <a:prstGeom prst="rect">
+            <a:avLst/>
+          </a:prstGeom>
+          <a:noFill/>
+        </p:spPr>
+        <p:txBody>
+          <a:bodyPr wrap="square">
+            <a:spAutoFit/>
+          </a:bodyPr>
+          <a:lstStyle/>
+          <a:p>
+            <a:pPr>
+              <a:spcAft>
+                <a:spcPts val="600"/>
+              </a:spcAft>
+            </a:pPr>
+            <a:r>
+              <a:rPr sz="1500" b="0">
+                <a:solidFill>
+                  <a:srgbClr val="0B2B52"/>
+                </a:solidFill>
+              </a:rPr>
+              <a:t>38 of those designs folded as delivered and against permutations of themselves. The prediction below was</a:t>
+            </a:r>
+          </a:p>
+          <a:p>
+            <a:pPr>
+              <a:spcAft>
+                <a:spcPts val="600"/>
+              </a:spcAft>
+            </a:pPr>
+            <a:r>
+              <a:rPr sz="1500" b="0">
+                <a:solidFill>
+                  <a:srgbClr val="0B2B52"/>
+                </a:solidFill>
+              </a:rPr>
+              <a:t>written into the source and committed before any fold ran.</a:t>
+            </a:r>
+          </a:p>
+        </p:txBody>
+      </p:sp>
+      <p:graphicFrame>
+        <p:nvGraphicFramePr>
+          <p:cNvPr id="8" name="Table 7"/>
+          <p:cNvGraphicFramePr>
+            <a:graphicFrameLocks noGrp="1"/>
+          </p:cNvGraphicFramePr>
+          <p:nvPr/>
+        </p:nvGraphicFramePr>
+        <p:xfrm>
+          <a:off x="548640" y="1965960"/>
+          <a:ext cx="11155680" cy="1234440"/>
+        </p:xfrm>
+        <a:graphic>
+          <a:graphicData uri="http://schemas.openxmlformats.org/drawingml/2006/table">
+            <a:tbl>
+              <a:tblPr firstRow="1" bandRow="1">
+                <a:tableStyleId>{5C22544A-7EE6-4342-B048-85BDC9FD1C3A}</a:tableStyleId>
+              </a:tblPr>
+              <a:tblGrid>
+                <a:gridCol w="4023360"/>
+                <a:gridCol w="2377440"/>
+                <a:gridCol w="2560320"/>
+                <a:gridCol w="2194560"/>
+              </a:tblGrid>
+              <a:tr h="411480">
+                <a:tc>
+                  <a:txBody>
+                    <a:bodyPr/>
+                    <a:lstStyle/>
+                    <a:p/>
+                  </a:txBody>
+                  <a:tcPr/>
+                </a:tc>
+                <a:tc>
+                  <a:txBody>
+                    <a:bodyPr/>
+                    <a:lstStyle/>
+                    <a:p>
+                      <a:r>
+                        <a:rPr sz="1300" b="1">
+                          <a:solidFill>
+                            <a:srgbClr val="0B2B52"/>
+                          </a:solidFill>
+                        </a:rPr>
+                        <a:t>design</a:t>
+                      </a:r>
+                    </a:p>
+                  </a:txBody>
+                  <a:tcPr/>
+                </a:tc>
+                <a:tc>
+                  <a:txBody>
+                    <a:bodyPr/>
+                    <a:lstStyle/>
+                    <a:p>
+                      <a:r>
+                        <a:rPr sz="1300" b="1">
+                          <a:solidFill>
+                            <a:srgbClr val="0B2B52"/>
+                          </a:solidFill>
+                        </a:rPr>
+                        <a:t>its scrambles</a:t>
+                      </a:r>
+                    </a:p>
+                  </a:txBody>
+                  <a:tcPr/>
+                </a:tc>
+                <a:tc>
+                  <a:txBody>
+                    <a:bodyPr/>
+                    <a:lstStyle/>
+                    <a:p>
+                      <a:r>
+                        <a:rPr sz="1300" b="1">
+                          <a:solidFill>
+                            <a:srgbClr val="0B2B52"/>
+                          </a:solidFill>
+                        </a:rPr>
+                        <a:t>margin</a:t>
+                      </a:r>
+                    </a:p>
+                  </a:txBody>
+                  <a:tcPr/>
+                </a:tc>
+              </a:tr>
+              <a:tr h="411480">
+                <a:tc>
+                  <a:txBody>
+                    <a:bodyPr/>
+                    <a:lstStyle/>
+                    <a:p>
+                      <a:r>
+                        <a:rPr sz="1300" b="0">
+                          <a:solidFill>
+                            <a:srgbClr val="0B2B52"/>
+                          </a:solidFill>
+                        </a:rPr>
+                        <a:t>measured binders (20)</a:t>
+                      </a:r>
+                    </a:p>
+                  </a:txBody>
+                  <a:tcPr/>
+                </a:tc>
+                <a:tc>
+                  <a:txBody>
+                    <a:bodyPr/>
+                    <a:lstStyle/>
+                    <a:p>
+                      <a:r>
+                        <a:rPr sz="1300" b="0">
+                          <a:solidFill>
+                            <a:srgbClr val="0B2B52"/>
+                          </a:solidFill>
+                        </a:rPr>
+                        <a:t>72.99</a:t>
+                      </a:r>
+                    </a:p>
+                  </a:txBody>
+                  <a:tcPr/>
+                </a:tc>
+                <a:tc>
+                  <a:txBody>
+                    <a:bodyPr/>
+                    <a:lstStyle/>
+                    <a:p>
+                      <a:r>
+                        <a:rPr sz="1300" b="0">
+                          <a:solidFill>
+                            <a:srgbClr val="0B2B52"/>
+                          </a:solidFill>
+                        </a:rPr>
+                        <a:t>53.88</a:t>
+                      </a:r>
+                    </a:p>
+                  </a:txBody>
+                  <a:tcPr/>
+                </a:tc>
+                <a:tc>
+                  <a:txBody>
+                    <a:bodyPr/>
+                    <a:lstStyle/>
+                    <a:p>
+                      <a:r>
+                        <a:rPr sz="1300" b="0">
+                          <a:solidFill>
+                            <a:srgbClr val="0B2B52"/>
+                          </a:solidFill>
+                        </a:rPr>
+                        <a:t>+19.11</a:t>
+                      </a:r>
+                    </a:p>
+                  </a:txBody>
+                  <a:tcPr/>
+                </a:tc>
+              </a:tr>
+              <a:tr h="411480">
+                <a:tc>
+                  <a:txBody>
+                    <a:bodyPr/>
+                    <a:lstStyle/>
+                    <a:p>
+                      <a:r>
+                        <a:rPr sz="1300" b="0">
+                          <a:solidFill>
+                            <a:srgbClr val="0B2B52"/>
+                          </a:solidFill>
+                        </a:rPr>
+                        <a:t>measured non-binders (18)</a:t>
+                      </a:r>
+                    </a:p>
+                  </a:txBody>
+                  <a:tcPr/>
+                </a:tc>
+                <a:tc>
+                  <a:txBody>
+                    <a:bodyPr/>
+                    <a:lstStyle/>
+                    <a:p>
+                      <a:r>
+                        <a:rPr sz="1300" b="0">
+                          <a:solidFill>
+                            <a:srgbClr val="0B2B52"/>
+                          </a:solidFill>
+                        </a:rPr>
+                        <a:t>71.15</a:t>
+                      </a:r>
+                    </a:p>
+                  </a:txBody>
+                  <a:tcPr/>
+                </a:tc>
+                <a:tc>
+                  <a:txBody>
+                    <a:bodyPr/>
+                    <a:lstStyle/>
+                    <a:p>
+                      <a:r>
+                        <a:rPr sz="1300" b="0">
+                          <a:solidFill>
+                            <a:srgbClr val="0B2B52"/>
+                          </a:solidFill>
+                        </a:rPr>
+                        <a:t>53.22</a:t>
+                      </a:r>
+                    </a:p>
+                  </a:txBody>
+                  <a:tcPr/>
+                </a:tc>
+                <a:tc>
+                  <a:txBody>
+                    <a:bodyPr/>
+                    <a:lstStyle/>
+                    <a:p>
+                      <a:r>
+                        <a:rPr sz="1300" b="0">
+                          <a:solidFill>
+                            <a:srgbClr val="0B2B52"/>
+                          </a:solidFill>
+                        </a:rPr>
+                        <a:t>+17.93</a:t>
+                      </a:r>
+                    </a:p>
+                  </a:txBody>
+                  <a:tcPr/>
+                </a:tc>
+              </a:tr>
+            </a:tbl>
+          </a:graphicData>
+        </a:graphic>
+      </p:graphicFrame>
+      <p:sp>
+        <p:nvSpPr>
+          <p:cNvPr id="9" name="Rounded Rectangle 8"/>
+          <p:cNvSpPr/>
+          <p:nvPr/>
+        </p:nvSpPr>
+        <p:spPr>
+          <a:xfrm>
+            <a:off x="548640" y="3429000"/>
+            <a:ext cx="3520440" cy="1463040"/>
+          </a:xfrm>
+          <a:prstGeom prst="roundRect">
+            <a:avLst/>
+          </a:prstGeom>
+          <a:solidFill>
+            <a:srgbClr val="C62828"/>
+          </a:solidFill>
+          <a:ln>
+            <a:noFill/>
+          </a:ln>
+        </p:spPr>
+        <p:style>
+          <a:lnRef idx="1">
+            <a:schemeClr val="accent1"/>
+          </a:lnRef>
+          <a:fillRef idx="3">
+            <a:schemeClr val="accent1"/>
+          </a:fillRef>
+          <a:effectRef idx="2">
+            <a:schemeClr val="accent1"/>
+          </a:effectRef>
+          <a:fontRef idx="minor">
+            <a:schemeClr val="lt1"/>
+          </a:fontRef>
+        </p:style>
+        <p:txBody>
+          <a:bodyPr rtlCol="0" anchor="ctr" wrap="square"/>
+          <a:lstStyle/>
+          <a:p>
+            <a:pPr algn="ctr"/>
+            <a:r>
+              <a:rPr sz="2300" b="1">
+                <a:solidFill>
+                  <a:srgbClr val="FFFFFF"/>
+                </a:solidFill>
+              </a:rPr>
+              <a:t>p = 0.751</a:t>
+            </a:r>
+          </a:p>
+          <a:p>
+            <a:pPr algn="ctr"/>
+            <a:r>
+              <a:rPr sz="1050">
+                <a:solidFill>
+                  <a:srgbClr val="FFFFFF"/>
+                </a:solidFill>
+              </a:rPr>
+              <a:t>the two margins are indistinguishable</a:t>
+            </a:r>
+          </a:p>
+        </p:txBody>
+      </p:sp>
+      <p:sp>
+        <p:nvSpPr>
+          <p:cNvPr id="10" name="Rounded Rectangle 9"/>
+          <p:cNvSpPr/>
+          <p:nvPr/>
+        </p:nvSpPr>
+        <p:spPr>
+          <a:xfrm>
+            <a:off x="4343400" y="3429000"/>
+            <a:ext cx="3520440" cy="1463040"/>
+          </a:xfrm>
+          <a:prstGeom prst="roundRect">
+            <a:avLst/>
+          </a:prstGeom>
+          <a:solidFill>
+            <a:srgbClr val="C62828"/>
+          </a:solidFill>
+          <a:ln>
+            <a:noFill/>
+          </a:ln>
+        </p:spPr>
+        <p:style>
+          <a:lnRef idx="1">
+            <a:schemeClr val="accent1"/>
+          </a:lnRef>
+          <a:fillRef idx="3">
+            <a:schemeClr val="accent1"/>
+          </a:fillRef>
+          <a:effectRef idx="2">
+            <a:schemeClr val="accent1"/>
+          </a:effectRef>
+          <a:fontRef idx="minor">
+            <a:schemeClr val="lt1"/>
+          </a:fontRef>
+        </p:style>
+        <p:txBody>
+          <a:bodyPr rtlCol="0" anchor="ctr" wrap="square"/>
+          <a:lstStyle/>
+          <a:p>
+            <a:pPr algn="ctr"/>
+            <a:r>
+              <a:rPr sz="2300" b="1">
+                <a:solidFill>
+                  <a:srgbClr val="FFFFFF"/>
+                </a:solidFill>
+              </a:rPr>
+              <a:t>0.672 → 0.581</a:t>
+            </a:r>
+          </a:p>
+          <a:p>
+            <a:pPr algn="ctr"/>
+            <a:r>
+              <a:rPr sz="1050">
+                <a:solidFill>
+                  <a:srgbClr val="FFFFFF"/>
+                </a:solidFill>
+              </a:rPr>
+              <a:t>AUC, before and after subtracting scrambles</a:t>
+            </a:r>
+          </a:p>
+        </p:txBody>
+      </p:sp>
+      <p:sp>
+        <p:nvSpPr>
+          <p:cNvPr id="11" name="Rounded Rectangle 10"/>
+          <p:cNvSpPr/>
+          <p:nvPr/>
+        </p:nvSpPr>
+        <p:spPr>
+          <a:xfrm>
+            <a:off x="8138160" y="3429000"/>
+            <a:ext cx="3566160" cy="1463040"/>
+          </a:xfrm>
+          <a:prstGeom prst="roundRect">
+            <a:avLst/>
+          </a:prstGeom>
+          <a:solidFill>
+            <a:srgbClr val="1E6FB8"/>
+          </a:solidFill>
+          <a:ln>
+            <a:noFill/>
+          </a:ln>
+        </p:spPr>
+        <p:style>
+          <a:lnRef idx="1">
+            <a:schemeClr val="accent1"/>
+          </a:lnRef>
+          <a:fillRef idx="3">
+            <a:schemeClr val="accent1"/>
+          </a:fillRef>
+          <a:effectRef idx="2">
+            <a:schemeClr val="accent1"/>
+          </a:effectRef>
+          <a:fontRef idx="minor">
+            <a:schemeClr val="lt1"/>
+          </a:fontRef>
+        </p:style>
+        <p:txBody>
+          <a:bodyPr rtlCol="0" anchor="ctr" wrap="square"/>
+          <a:lstStyle/>
+          <a:p>
+            <a:pPr algn="ctr"/>
+            <a:r>
+              <a:rPr sz="2300" b="1">
+                <a:solidFill>
+                  <a:srgbClr val="FFFFFF"/>
+                </a:solidFill>
+              </a:rPr>
+              <a:t>−0.092</a:t>
+            </a:r>
+          </a:p>
+          <a:p>
+            <a:pPr algn="ctr"/>
+            <a:r>
+              <a:rPr sz="1050">
+                <a:solidFill>
+                  <a:srgbClr val="FFFFFF"/>
+                </a:solidFill>
+              </a:rPr>
+              <a:t>change in AUC, CI [−0.170, +0.008]</a:t>
+            </a:r>
+          </a:p>
+        </p:txBody>
+      </p:sp>
+      <p:sp>
+        <p:nvSpPr>
+          <p:cNvPr id="12" name="Rounded Rectangle 11"/>
+          <p:cNvSpPr/>
+          <p:nvPr/>
+        </p:nvSpPr>
+        <p:spPr>
+          <a:xfrm>
+            <a:off x="548640" y="5029200"/>
+            <a:ext cx="11155680" cy="960120"/>
+          </a:xfrm>
+          <a:prstGeom prst="roundRect">
+            <a:avLst/>
+          </a:prstGeom>
+          <a:solidFill>
+            <a:srgbClr val="2E7D32"/>
+          </a:solidFill>
+          <a:ln>
+            <a:noFill/>
+          </a:ln>
+        </p:spPr>
+        <p:style>
+          <a:lnRef idx="1">
+            <a:schemeClr val="accent1"/>
+          </a:lnRef>
+          <a:fillRef idx="3">
+            <a:schemeClr val="accent1"/>
+          </a:fillRef>
+          <a:effectRef idx="2">
+            <a:schemeClr val="accent1"/>
+          </a:effectRef>
+          <a:fontRef idx="minor">
+            <a:schemeClr val="lt1"/>
+          </a:fontRef>
+        </p:style>
+        <p:txBody>
+          <a:bodyPr rtlCol="0" anchor="ctr" wrap="square"/>
+          <a:lstStyle/>
+          <a:p>
+            <a:pPr algn="ctr">
+              <a:spcAft>
+                <a:spcPts val="600"/>
+              </a:spcAft>
+            </a:pPr>
+            <a:r>
+              <a:rPr sz="1700" b="1">
+                <a:solidFill>
+                  <a:srgbClr val="FFFFFF"/>
+                </a:solidFill>
+              </a:rPr>
+              <a:t>A permutation of a 15-residue peptide is still a plausible ligand. A permutation of a 100-residue protein is not a protein.</a:t>
+            </a:r>
+          </a:p>
+        </p:txBody>
+      </p:sp>
+      <p:sp>
+        <p:nvSpPr>
+          <p:cNvPr id="13" name="Rounded Rectangle 12"/>
+          <p:cNvSpPr/>
+          <p:nvPr/>
+        </p:nvSpPr>
+        <p:spPr>
+          <a:xfrm>
+            <a:off x="548640" y="5532120"/>
+            <a:ext cx="11155680" cy="868680"/>
+          </a:xfrm>
+          <a:prstGeom prst="roundRect">
+            <a:avLst/>
+          </a:prstGeom>
+          <a:solidFill>
+            <a:srgbClr val="FDF3E0"/>
+          </a:solidFill>
+          <a:ln>
+            <a:noFill/>
+          </a:ln>
+        </p:spPr>
+        <p:style>
+          <a:lnRef idx="1">
+            <a:schemeClr val="accent1"/>
+          </a:lnRef>
+          <a:fillRef idx="3">
+            <a:schemeClr val="accent1"/>
+          </a:fillRef>
+          <a:effectRef idx="2">
+            <a:schemeClr val="accent1"/>
+          </a:effectRef>
+          <a:fontRef idx="minor">
+            <a:schemeClr val="lt1"/>
+          </a:fontRef>
+        </p:style>
+        <p:txBody>
+          <a:bodyPr rtlCol="0" anchor="ctr" wrap="square"/>
+          <a:lstStyle/>
+          <a:p>
+            <a:pPr algn="ctr">
+              <a:spcAft>
+                <a:spcPts val="600"/>
+              </a:spcAft>
+            </a:pPr>
+            <a:r>
+              <a:rPr sz="1250" b="0">
+                <a:solidFill>
+                  <a:srgbClr val="8A5200"/>
+                </a:solidFill>
+              </a:rPr>
+              <a:t>So the control is sound for the case this work concerns and unsound outside it. The recommendation gains a condition rather than losing its force: use the scramble control wherever a permutation of the candidate is still a candidate.</a:t>
             </a:r>
           </a:p>
         </p:txBody>

--- a/final_dissertation_presentation.pptx
+++ b/final_dissertation_presentation.pptx
@@ -41,6 +41,7 @@
     <p:sldId id="292" r:id="rId43"/>
     <p:sldId id="293" r:id="rId44"/>
     <p:sldId id="294" r:id="rId45"/>
+    <p:sldId id="295" r:id="rId46"/>
     <p:sldId id="267" r:id="rId18"/>
     <p:sldId id="268" r:id="rId19"/>
   </p:sldIdLst>
@@ -19693,1154 +19694,6 @@
         <p:spPr>
           <a:xfrm>
             <a:off x="0" y="0"/>
-            <a:ext cx="12191695" cy="914400"/>
-          </a:xfrm>
-          <a:prstGeom prst="rect">
-            <a:avLst/>
-          </a:prstGeom>
-          <a:solidFill>
-            <a:srgbClr val="0B2B52"/>
-          </a:solidFill>
-          <a:ln>
-            <a:noFill/>
-          </a:ln>
-          <a:effectLst/>
-        </p:spPr>
-        <p:style>
-          <a:lnRef idx="1">
-            <a:schemeClr val="accent1"/>
-          </a:lnRef>
-          <a:fillRef idx="3">
-            <a:schemeClr val="accent1"/>
-          </a:fillRef>
-          <a:effectRef idx="2">
-            <a:schemeClr val="accent1"/>
-          </a:effectRef>
-          <a:fontRef idx="minor">
-            <a:schemeClr val="lt1"/>
-          </a:fontRef>
-        </p:style>
-        <p:txBody>
-          <a:bodyPr rtlCol="0" anchor="ctr"/>
-          <a:lstStyle/>
-          <a:p>
-            <a:pPr algn="ctr"/>
-          </a:p>
-        </p:txBody>
-      </p:sp>
-      <p:sp>
-        <p:nvSpPr>
-          <p:cNvPr id="3" name="Rectangle 2"/>
-          <p:cNvSpPr/>
-          <p:nvPr/>
-        </p:nvSpPr>
-        <p:spPr>
-          <a:xfrm>
-            <a:off x="0" y="914400"/>
-            <a:ext cx="12191695" cy="54864"/>
-          </a:xfrm>
-          <a:prstGeom prst="rect">
-            <a:avLst/>
-          </a:prstGeom>
-          <a:solidFill>
-            <a:srgbClr val="1E6FB8"/>
-          </a:solidFill>
-          <a:ln>
-            <a:noFill/>
-          </a:ln>
-          <a:effectLst/>
-        </p:spPr>
-        <p:style>
-          <a:lnRef idx="1">
-            <a:schemeClr val="accent1"/>
-          </a:lnRef>
-          <a:fillRef idx="3">
-            <a:schemeClr val="accent1"/>
-          </a:fillRef>
-          <a:effectRef idx="2">
-            <a:schemeClr val="accent1"/>
-          </a:effectRef>
-          <a:fontRef idx="minor">
-            <a:schemeClr val="lt1"/>
-          </a:fontRef>
-        </p:style>
-        <p:txBody>
-          <a:bodyPr rtlCol="0" anchor="ctr"/>
-          <a:lstStyle/>
-          <a:p>
-            <a:pPr algn="ctr"/>
-          </a:p>
-        </p:txBody>
-      </p:sp>
-      <p:sp>
-        <p:nvSpPr>
-          <p:cNvPr id="4" name="TextBox 3"/>
-          <p:cNvSpPr txBox="1"/>
-          <p:nvPr/>
-        </p:nvSpPr>
-        <p:spPr>
-          <a:xfrm>
-            <a:off x="502920" y="109728"/>
-            <a:ext cx="11155680" cy="777240"/>
-          </a:xfrm>
-          <a:prstGeom prst="rect">
-            <a:avLst/>
-          </a:prstGeom>
-          <a:noFill/>
-        </p:spPr>
-        <p:txBody>
-          <a:bodyPr wrap="square">
-            <a:spAutoFit/>
-          </a:bodyPr>
-          <a:lstStyle/>
-          <a:p>
-            <a:pPr>
-              <a:spcBef>
-                <a:spcPts val="0"/>
-              </a:spcBef>
-              <a:spcAft>
-                <a:spcPts val="400"/>
-              </a:spcAft>
-            </a:pPr>
-            <a:r>
-              <a:rPr sz="2600" b="1" i="0">
-                <a:solidFill>
-                  <a:srgbClr val="FFFFFF"/>
-                </a:solidFill>
-              </a:rPr>
-              <a:t>Future Plan</a:t>
-            </a:r>
-          </a:p>
-        </p:txBody>
-      </p:sp>
-      <p:sp>
-        <p:nvSpPr>
-          <p:cNvPr id="5" name="TextBox 4"/>
-          <p:cNvSpPr txBox="1"/>
-          <p:nvPr/>
-        </p:nvSpPr>
-        <p:spPr>
-          <a:xfrm>
-            <a:off x="502920" y="6473952"/>
-            <a:ext cx="8229600" cy="274320"/>
-          </a:xfrm>
-          <a:prstGeom prst="rect">
-            <a:avLst/>
-          </a:prstGeom>
-          <a:noFill/>
-        </p:spPr>
-        <p:txBody>
-          <a:bodyPr wrap="square">
-            <a:spAutoFit/>
-          </a:bodyPr>
-          <a:lstStyle/>
-          <a:p>
-            <a:pPr>
-              <a:spcBef>
-                <a:spcPts val="0"/>
-              </a:spcBef>
-              <a:spcAft>
-                <a:spcPts val="600"/>
-              </a:spcAft>
-            </a:pPr>
-            <a:r>
-              <a:rPr sz="900" b="0">
-                <a:solidFill>
-                  <a:srgbClr val="555555"/>
-                </a:solidFill>
-              </a:rPr>
-              <a:t>Boltz-Fast · Final Dissertation Report · Akik Jana (2024AB05287)</a:t>
-            </a:r>
-          </a:p>
-        </p:txBody>
-      </p:sp>
-      <p:sp>
-        <p:nvSpPr>
-          <p:cNvPr id="6" name="TextBox 5"/>
-          <p:cNvSpPr txBox="1"/>
-          <p:nvPr/>
-        </p:nvSpPr>
-        <p:spPr>
-          <a:xfrm>
-            <a:off x="11185855" y="6473952"/>
-            <a:ext cx="640080" cy="274320"/>
-          </a:xfrm>
-          <a:prstGeom prst="rect">
-            <a:avLst/>
-          </a:prstGeom>
-          <a:noFill/>
-        </p:spPr>
-        <p:txBody>
-          <a:bodyPr wrap="square">
-            <a:spAutoFit/>
-          </a:bodyPr>
-          <a:lstStyle/>
-          <a:p>
-            <a:pPr algn="r">
-              <a:spcBef>
-                <a:spcPts val="0"/>
-              </a:spcBef>
-              <a:spcAft>
-                <a:spcPts val="600"/>
-              </a:spcAft>
-            </a:pPr>
-            <a:r>
-              <a:rPr sz="1000" b="0">
-                <a:solidFill>
-                  <a:srgbClr val="0B2B52"/>
-                </a:solidFill>
-              </a:rPr>
-              <a:t>37</a:t>
-            </a:r>
-          </a:p>
-        </p:txBody>
-      </p:sp>
-      <p:sp>
-        <p:nvSpPr>
-          <p:cNvPr id="7" name="Oval 6"/>
-          <p:cNvSpPr/>
-          <p:nvPr/>
-        </p:nvSpPr>
-        <p:spPr>
-          <a:xfrm>
-            <a:off x="548640" y="1325880"/>
-            <a:ext cx="566928" cy="566928"/>
-          </a:xfrm>
-          <a:prstGeom prst="ellipse">
-            <a:avLst/>
-          </a:prstGeom>
-          <a:solidFill>
-            <a:srgbClr val="1E6FB8"/>
-          </a:solidFill>
-          <a:ln>
-            <a:noFill/>
-          </a:ln>
-          <a:effectLst/>
-        </p:spPr>
-        <p:style>
-          <a:lnRef idx="1">
-            <a:schemeClr val="accent1"/>
-          </a:lnRef>
-          <a:fillRef idx="3">
-            <a:schemeClr val="accent1"/>
-          </a:fillRef>
-          <a:effectRef idx="2">
-            <a:schemeClr val="accent1"/>
-          </a:effectRef>
-          <a:fontRef idx="minor">
-            <a:schemeClr val="lt1"/>
-          </a:fontRef>
-        </p:style>
-        <p:txBody>
-          <a:bodyPr rtlCol="0" anchor="ctr" wrap="square"/>
-          <a:lstStyle/>
-          <a:p>
-            <a:pPr algn="ctr">
-              <a:spcBef>
-                <a:spcPts val="0"/>
-              </a:spcBef>
-              <a:spcAft>
-                <a:spcPts val="400"/>
-              </a:spcAft>
-            </a:pPr>
-            <a:r>
-              <a:rPr sz="1800" b="1" i="0">
-                <a:solidFill>
-                  <a:srgbClr val="FFFFFF"/>
-                </a:solidFill>
-              </a:rPr>
-              <a:t>1</a:t>
-            </a:r>
-          </a:p>
-        </p:txBody>
-      </p:sp>
-      <p:sp>
-        <p:nvSpPr>
-          <p:cNvPr id="8" name="TextBox 7"/>
-          <p:cNvSpPr txBox="1"/>
-          <p:nvPr/>
-        </p:nvSpPr>
-        <p:spPr>
-          <a:xfrm>
-            <a:off x="1325880" y="1307592"/>
-            <a:ext cx="10332720" cy="868680"/>
-          </a:xfrm>
-          <a:prstGeom prst="rect">
-            <a:avLst/>
-          </a:prstGeom>
-          <a:noFill/>
-        </p:spPr>
-        <p:txBody>
-          <a:bodyPr wrap="square">
-            <a:spAutoFit/>
-          </a:bodyPr>
-          <a:lstStyle/>
-          <a:p>
-            <a:pPr>
-              <a:spcBef>
-                <a:spcPts val="0"/>
-              </a:spcBef>
-              <a:spcAft>
-                <a:spcPts val="600"/>
-              </a:spcAft>
-            </a:pPr>
-            <a:r>
-              <a:rPr sz="1300" b="0">
-                <a:solidFill>
-                  <a:srgbClr val="0B2B52"/>
-                </a:solidFill>
-              </a:rPr>
-              <a:t>DONE — profiled; and measured what the optimisations actually deliver on pretrained weights (slides 11–18).</a:t>
-            </a:r>
-          </a:p>
-        </p:txBody>
-      </p:sp>
-      <p:sp>
-        <p:nvSpPr>
-          <p:cNvPr id="9" name="Oval 8"/>
-          <p:cNvSpPr/>
-          <p:nvPr/>
-        </p:nvSpPr>
-        <p:spPr>
-          <a:xfrm>
-            <a:off x="548640" y="2304288"/>
-            <a:ext cx="566928" cy="566928"/>
-          </a:xfrm>
-          <a:prstGeom prst="ellipse">
-            <a:avLst/>
-          </a:prstGeom>
-          <a:solidFill>
-            <a:srgbClr val="0E8F9A"/>
-          </a:solidFill>
-          <a:ln>
-            <a:noFill/>
-          </a:ln>
-          <a:effectLst/>
-        </p:spPr>
-        <p:style>
-          <a:lnRef idx="1">
-            <a:schemeClr val="accent1"/>
-          </a:lnRef>
-          <a:fillRef idx="3">
-            <a:schemeClr val="accent1"/>
-          </a:fillRef>
-          <a:effectRef idx="2">
-            <a:schemeClr val="accent1"/>
-          </a:effectRef>
-          <a:fontRef idx="minor">
-            <a:schemeClr val="lt1"/>
-          </a:fontRef>
-        </p:style>
-        <p:txBody>
-          <a:bodyPr rtlCol="0" anchor="ctr" wrap="square"/>
-          <a:lstStyle/>
-          <a:p>
-            <a:pPr algn="ctr">
-              <a:spcBef>
-                <a:spcPts val="0"/>
-              </a:spcBef>
-              <a:spcAft>
-                <a:spcPts val="400"/>
-              </a:spcAft>
-            </a:pPr>
-            <a:r>
-              <a:rPr sz="1800" b="1" i="0">
-                <a:solidFill>
-                  <a:srgbClr val="FFFFFF"/>
-                </a:solidFill>
-              </a:rPr>
-              <a:t>2</a:t>
-            </a:r>
-          </a:p>
-        </p:txBody>
-      </p:sp>
-      <p:sp>
-        <p:nvSpPr>
-          <p:cNvPr id="10" name="TextBox 9"/>
-          <p:cNvSpPr txBox="1"/>
-          <p:nvPr/>
-        </p:nvSpPr>
-        <p:spPr>
-          <a:xfrm>
-            <a:off x="1325880" y="2286000"/>
-            <a:ext cx="10332720" cy="868680"/>
-          </a:xfrm>
-          <a:prstGeom prst="rect">
-            <a:avLst/>
-          </a:prstGeom>
-          <a:noFill/>
-        </p:spPr>
-        <p:txBody>
-          <a:bodyPr wrap="square">
-            <a:spAutoFit/>
-          </a:bodyPr>
-          <a:lstStyle/>
-          <a:p>
-            <a:pPr>
-              <a:spcBef>
-                <a:spcPts val="0"/>
-              </a:spcBef>
-              <a:spcAft>
-                <a:spcPts val="600"/>
-              </a:spcAft>
-            </a:pPr>
-            <a:r>
-              <a:rPr sz="1300" b="0">
-                <a:solidFill>
-                  <a:srgbClr val="0B2B52"/>
-                </a:solidFill>
-              </a:rPr>
-              <a:t>DONE — DeCAF-Boltz, distilled for 10 steps, folds the 132-complex panel in ~20 min locally and returns 96% physically plausible backbones against 14% for a stock model run short (slides 27-28).</a:t>
-            </a:r>
-          </a:p>
-        </p:txBody>
-      </p:sp>
-      <p:sp>
-        <p:nvSpPr>
-          <p:cNvPr id="11" name="Oval 10"/>
-          <p:cNvSpPr/>
-          <p:nvPr/>
-        </p:nvSpPr>
-        <p:spPr>
-          <a:xfrm>
-            <a:off x="548640" y="3282696"/>
-            <a:ext cx="566928" cy="566928"/>
-          </a:xfrm>
-          <a:prstGeom prst="ellipse">
-            <a:avLst/>
-          </a:prstGeom>
-          <a:solidFill>
-            <a:srgbClr val="2E7D32"/>
-          </a:solidFill>
-          <a:ln>
-            <a:noFill/>
-          </a:ln>
-          <a:effectLst/>
-        </p:spPr>
-        <p:style>
-          <a:lnRef idx="1">
-            <a:schemeClr val="accent1"/>
-          </a:lnRef>
-          <a:fillRef idx="3">
-            <a:schemeClr val="accent1"/>
-          </a:fillRef>
-          <a:effectRef idx="2">
-            <a:schemeClr val="accent1"/>
-          </a:effectRef>
-          <a:fontRef idx="minor">
-            <a:schemeClr val="lt1"/>
-          </a:fontRef>
-        </p:style>
-        <p:txBody>
-          <a:bodyPr rtlCol="0" anchor="ctr" wrap="square"/>
-          <a:lstStyle/>
-          <a:p>
-            <a:pPr algn="ctr">
-              <a:spcBef>
-                <a:spcPts val="0"/>
-              </a:spcBef>
-              <a:spcAft>
-                <a:spcPts val="400"/>
-              </a:spcAft>
-            </a:pPr>
-            <a:r>
-              <a:rPr sz="1800" b="1" i="0">
-                <a:solidFill>
-                  <a:srgbClr val="FFFFFF"/>
-                </a:solidFill>
-              </a:rPr>
-              <a:t>3</a:t>
-            </a:r>
-          </a:p>
-        </p:txBody>
-      </p:sp>
-      <p:sp>
-        <p:nvSpPr>
-          <p:cNvPr id="12" name="TextBox 11"/>
-          <p:cNvSpPr txBox="1"/>
-          <p:nvPr/>
-        </p:nvSpPr>
-        <p:spPr>
-          <a:xfrm>
-            <a:off x="1325880" y="3264408"/>
-            <a:ext cx="10332720" cy="868680"/>
-          </a:xfrm>
-          <a:prstGeom prst="rect">
-            <a:avLst/>
-          </a:prstGeom>
-          <a:noFill/>
-        </p:spPr>
-        <p:txBody>
-          <a:bodyPr wrap="square">
-            <a:spAutoFit/>
-          </a:bodyPr>
-          <a:lstStyle/>
-          <a:p>
-            <a:pPr>
-              <a:spcBef>
-                <a:spcPts val="0"/>
-              </a:spcBef>
-              <a:spcAft>
-                <a:spcPts val="600"/>
-              </a:spcAft>
-            </a:pPr>
-            <a:r>
-              <a:rPr sz="1300" b="0">
-                <a:solidFill>
-                  <a:srgbClr val="0B2B52"/>
-                </a:solidFill>
-              </a:rPr>
-              <a:t>DONE, NEGATIVE — the surrogate was distilled and evaluated: ipTM does not rank binders, so no surrogate distilled from it can either.</a:t>
-            </a:r>
-          </a:p>
-        </p:txBody>
-      </p:sp>
-      <p:sp>
-        <p:nvSpPr>
-          <p:cNvPr id="13" name="Oval 12"/>
-          <p:cNvSpPr/>
-          <p:nvPr/>
-        </p:nvSpPr>
-        <p:spPr>
-          <a:xfrm>
-            <a:off x="548640" y="4261104"/>
-            <a:ext cx="566928" cy="566928"/>
-          </a:xfrm>
-          <a:prstGeom prst="ellipse">
-            <a:avLst/>
-          </a:prstGeom>
-          <a:solidFill>
-            <a:srgbClr val="C77700"/>
-          </a:solidFill>
-          <a:ln>
-            <a:noFill/>
-          </a:ln>
-          <a:effectLst/>
-        </p:spPr>
-        <p:style>
-          <a:lnRef idx="1">
-            <a:schemeClr val="accent1"/>
-          </a:lnRef>
-          <a:fillRef idx="3">
-            <a:schemeClr val="accent1"/>
-          </a:fillRef>
-          <a:effectRef idx="2">
-            <a:schemeClr val="accent1"/>
-          </a:effectRef>
-          <a:fontRef idx="minor">
-            <a:schemeClr val="lt1"/>
-          </a:fontRef>
-        </p:style>
-        <p:txBody>
-          <a:bodyPr rtlCol="0" anchor="ctr" wrap="square"/>
-          <a:lstStyle/>
-          <a:p>
-            <a:pPr algn="ctr">
-              <a:spcBef>
-                <a:spcPts val="0"/>
-              </a:spcBef>
-              <a:spcAft>
-                <a:spcPts val="400"/>
-              </a:spcAft>
-            </a:pPr>
-            <a:r>
-              <a:rPr sz="1800" b="1" i="0">
-                <a:solidFill>
-                  <a:srgbClr val="FFFFFF"/>
-                </a:solidFill>
-              </a:rPr>
-              <a:t>4</a:t>
-            </a:r>
-          </a:p>
-        </p:txBody>
-      </p:sp>
-      <p:sp>
-        <p:nvSpPr>
-          <p:cNvPr id="14" name="TextBox 13"/>
-          <p:cNvSpPr txBox="1"/>
-          <p:nvPr/>
-        </p:nvSpPr>
-        <p:spPr>
-          <a:xfrm>
-            <a:off x="1325880" y="4242816"/>
-            <a:ext cx="10332720" cy="868680"/>
-          </a:xfrm>
-          <a:prstGeom prst="rect">
-            <a:avLst/>
-          </a:prstGeom>
-          <a:noFill/>
-        </p:spPr>
-        <p:txBody>
-          <a:bodyPr wrap="square">
-            <a:spAutoFit/>
-          </a:bodyPr>
-          <a:lstStyle/>
-          <a:p>
-            <a:pPr>
-              <a:spcBef>
-                <a:spcPts val="0"/>
-              </a:spcBef>
-              <a:spcAft>
-                <a:spcPts val="600"/>
-              </a:spcAft>
-            </a:pPr>
-            <a:r>
-              <a:rPr sz="1300" b="0">
-                <a:solidFill>
-                  <a:srgbClr val="0B2B52"/>
-                </a:solidFill>
-              </a:rPr>
-              <a:t>Use open Boltz-2 weights only — Boltz-2.1 is closed / API-only.</a:t>
-            </a:r>
-          </a:p>
-        </p:txBody>
-      </p:sp>
-      <p:sp>
-        <p:nvSpPr>
-          <p:cNvPr id="15" name="Oval 14"/>
-          <p:cNvSpPr/>
-          <p:nvPr/>
-        </p:nvSpPr>
-        <p:spPr>
-          <a:xfrm>
-            <a:off x="548640" y="5239512"/>
-            <a:ext cx="566928" cy="566928"/>
-          </a:xfrm>
-          <a:prstGeom prst="ellipse">
-            <a:avLst/>
-          </a:prstGeom>
-          <a:solidFill>
-            <a:srgbClr val="0B2B52"/>
-          </a:solidFill>
-          <a:ln>
-            <a:noFill/>
-          </a:ln>
-          <a:effectLst/>
-        </p:spPr>
-        <p:style>
-          <a:lnRef idx="1">
-            <a:schemeClr val="accent1"/>
-          </a:lnRef>
-          <a:fillRef idx="3">
-            <a:schemeClr val="accent1"/>
-          </a:fillRef>
-          <a:effectRef idx="2">
-            <a:schemeClr val="accent1"/>
-          </a:effectRef>
-          <a:fontRef idx="minor">
-            <a:schemeClr val="lt1"/>
-          </a:fontRef>
-        </p:style>
-        <p:txBody>
-          <a:bodyPr rtlCol="0" anchor="ctr" wrap="square"/>
-          <a:lstStyle/>
-          <a:p>
-            <a:pPr algn="ctr">
-              <a:spcBef>
-                <a:spcPts val="0"/>
-              </a:spcBef>
-              <a:spcAft>
-                <a:spcPts val="400"/>
-              </a:spcAft>
-            </a:pPr>
-            <a:r>
-              <a:rPr sz="1800" b="1" i="0">
-                <a:solidFill>
-                  <a:srgbClr val="FFFFFF"/>
-                </a:solidFill>
-              </a:rPr>
-              <a:t>5</a:t>
-            </a:r>
-          </a:p>
-        </p:txBody>
-      </p:sp>
-      <p:sp>
-        <p:nvSpPr>
-          <p:cNvPr id="16" name="TextBox 15"/>
-          <p:cNvSpPr txBox="1"/>
-          <p:nvPr/>
-        </p:nvSpPr>
-        <p:spPr>
-          <a:xfrm>
-            <a:off x="1325880" y="5221224"/>
-            <a:ext cx="10332720" cy="868680"/>
-          </a:xfrm>
-          <a:prstGeom prst="rect">
-            <a:avLst/>
-          </a:prstGeom>
-          <a:noFill/>
-        </p:spPr>
-        <p:txBody>
-          <a:bodyPr wrap="square">
-            <a:spAutoFit/>
-          </a:bodyPr>
-          <a:lstStyle/>
-          <a:p>
-            <a:pPr>
-              <a:spcBef>
-                <a:spcPts val="0"/>
-              </a:spcBef>
-              <a:spcAft>
-                <a:spcPts val="600"/>
-              </a:spcAft>
-            </a:pPr>
-            <a:r>
-              <a:rPr sz="1300" b="0">
-                <a:solidFill>
-                  <a:srgbClr val="0B2B52"/>
-                </a:solidFill>
-              </a:rPr>
-              <a:t>Production GPU scaling — NO LONGER a prerequisite. MPS (~3x) plus few-step distillation let the held-out panel be folded five times on this laptop, and the third draw overturned what the first two supported. Scaling is now for extending the panel past 22 receptors, which is the binding constraint on the open questions.</a:t>
-            </a:r>
-          </a:p>
-        </p:txBody>
-      </p:sp>
-    </p:spTree>
-  </p:cSld>
-  <p:clrMapOvr>
-    <a:masterClrMapping/>
-  </p:clrMapOvr>
-</p:sld>
-</file>
-
-<file path=ppt/slides/slide37.xml><?xml version="1.0" encoding="utf-8"?>
-<p:sld xmlns:a="http://schemas.openxmlformats.org/drawingml/2006/main" xmlns:p="http://schemas.openxmlformats.org/presentationml/2006/main" xmlns:r="http://schemas.openxmlformats.org/officeDocument/2006/relationships">
-  <p:cSld>
-    <p:spTree>
-      <p:nvGrpSpPr>
-        <p:cNvPr id="1" name=""/>
-        <p:cNvGrpSpPr/>
-        <p:nvPr/>
-      </p:nvGrpSpPr>
-      <p:grpSpPr/>
-      <p:sp>
-        <p:nvSpPr>
-          <p:cNvPr id="2" name="Rectangle 1"/>
-          <p:cNvSpPr/>
-          <p:nvPr/>
-        </p:nvSpPr>
-        <p:spPr>
-          <a:xfrm>
-            <a:off x="0" y="0"/>
-            <a:ext cx="12191695" cy="914400"/>
-          </a:xfrm>
-          <a:prstGeom prst="rect">
-            <a:avLst/>
-          </a:prstGeom>
-          <a:solidFill>
-            <a:srgbClr val="0B2B52"/>
-          </a:solidFill>
-          <a:ln>
-            <a:noFill/>
-          </a:ln>
-          <a:effectLst/>
-        </p:spPr>
-        <p:style>
-          <a:lnRef idx="1">
-            <a:schemeClr val="accent1"/>
-          </a:lnRef>
-          <a:fillRef idx="3">
-            <a:schemeClr val="accent1"/>
-          </a:fillRef>
-          <a:effectRef idx="2">
-            <a:schemeClr val="accent1"/>
-          </a:effectRef>
-          <a:fontRef idx="minor">
-            <a:schemeClr val="lt1"/>
-          </a:fontRef>
-        </p:style>
-        <p:txBody>
-          <a:bodyPr rtlCol="0" anchor="ctr"/>
-          <a:lstStyle/>
-          <a:p>
-            <a:pPr algn="ctr"/>
-          </a:p>
-        </p:txBody>
-      </p:sp>
-      <p:sp>
-        <p:nvSpPr>
-          <p:cNvPr id="3" name="Rectangle 2"/>
-          <p:cNvSpPr/>
-          <p:nvPr/>
-        </p:nvSpPr>
-        <p:spPr>
-          <a:xfrm>
-            <a:off x="0" y="914400"/>
-            <a:ext cx="12191695" cy="54864"/>
-          </a:xfrm>
-          <a:prstGeom prst="rect">
-            <a:avLst/>
-          </a:prstGeom>
-          <a:solidFill>
-            <a:srgbClr val="1E6FB8"/>
-          </a:solidFill>
-          <a:ln>
-            <a:noFill/>
-          </a:ln>
-          <a:effectLst/>
-        </p:spPr>
-        <p:style>
-          <a:lnRef idx="1">
-            <a:schemeClr val="accent1"/>
-          </a:lnRef>
-          <a:fillRef idx="3">
-            <a:schemeClr val="accent1"/>
-          </a:fillRef>
-          <a:effectRef idx="2">
-            <a:schemeClr val="accent1"/>
-          </a:effectRef>
-          <a:fontRef idx="minor">
-            <a:schemeClr val="lt1"/>
-          </a:fontRef>
-        </p:style>
-        <p:txBody>
-          <a:bodyPr rtlCol="0" anchor="ctr"/>
-          <a:lstStyle/>
-          <a:p>
-            <a:pPr algn="ctr"/>
-          </a:p>
-        </p:txBody>
-      </p:sp>
-      <p:sp>
-        <p:nvSpPr>
-          <p:cNvPr id="4" name="TextBox 3"/>
-          <p:cNvSpPr txBox="1"/>
-          <p:nvPr/>
-        </p:nvSpPr>
-        <p:spPr>
-          <a:xfrm>
-            <a:off x="502920" y="109728"/>
-            <a:ext cx="11155680" cy="777240"/>
-          </a:xfrm>
-          <a:prstGeom prst="rect">
-            <a:avLst/>
-          </a:prstGeom>
-          <a:noFill/>
-        </p:spPr>
-        <p:txBody>
-          <a:bodyPr wrap="square">
-            <a:spAutoFit/>
-          </a:bodyPr>
-          <a:lstStyle/>
-          <a:p>
-            <a:pPr>
-              <a:spcBef>
-                <a:spcPts val="0"/>
-              </a:spcBef>
-              <a:spcAft>
-                <a:spcPts val="400"/>
-              </a:spcAft>
-            </a:pPr>
-            <a:r>
-              <a:rPr sz="2600" b="1" i="0">
-                <a:solidFill>
-                  <a:srgbClr val="FFFFFF"/>
-                </a:solidFill>
-              </a:rPr>
-              <a:t>Summary</a:t>
-            </a:r>
-          </a:p>
-        </p:txBody>
-      </p:sp>
-      <p:sp>
-        <p:nvSpPr>
-          <p:cNvPr id="5" name="TextBox 4"/>
-          <p:cNvSpPr txBox="1"/>
-          <p:nvPr/>
-        </p:nvSpPr>
-        <p:spPr>
-          <a:xfrm>
-            <a:off x="502920" y="6473952"/>
-            <a:ext cx="8229600" cy="274320"/>
-          </a:xfrm>
-          <a:prstGeom prst="rect">
-            <a:avLst/>
-          </a:prstGeom>
-          <a:noFill/>
-        </p:spPr>
-        <p:txBody>
-          <a:bodyPr wrap="square">
-            <a:spAutoFit/>
-          </a:bodyPr>
-          <a:lstStyle/>
-          <a:p>
-            <a:pPr>
-              <a:spcBef>
-                <a:spcPts val="0"/>
-              </a:spcBef>
-              <a:spcAft>
-                <a:spcPts val="600"/>
-              </a:spcAft>
-            </a:pPr>
-            <a:r>
-              <a:rPr sz="900" b="0">
-                <a:solidFill>
-                  <a:srgbClr val="555555"/>
-                </a:solidFill>
-              </a:rPr>
-              <a:t>Boltz-Fast · Final Dissertation Report · Akik Jana (2024AB05287)</a:t>
-            </a:r>
-          </a:p>
-        </p:txBody>
-      </p:sp>
-      <p:sp>
-        <p:nvSpPr>
-          <p:cNvPr id="6" name="TextBox 5"/>
-          <p:cNvSpPr txBox="1"/>
-          <p:nvPr/>
-        </p:nvSpPr>
-        <p:spPr>
-          <a:xfrm>
-            <a:off x="11185855" y="6473952"/>
-            <a:ext cx="640080" cy="274320"/>
-          </a:xfrm>
-          <a:prstGeom prst="rect">
-            <a:avLst/>
-          </a:prstGeom>
-          <a:noFill/>
-        </p:spPr>
-        <p:txBody>
-          <a:bodyPr wrap="square">
-            <a:spAutoFit/>
-          </a:bodyPr>
-          <a:lstStyle/>
-          <a:p>
-            <a:pPr algn="r">
-              <a:spcBef>
-                <a:spcPts val="0"/>
-              </a:spcBef>
-              <a:spcAft>
-                <a:spcPts val="600"/>
-              </a:spcAft>
-            </a:pPr>
-            <a:r>
-              <a:rPr sz="1000" b="0">
-                <a:solidFill>
-                  <a:srgbClr val="0B2B52"/>
-                </a:solidFill>
-              </a:rPr>
-              <a:t>38</a:t>
-            </a:r>
-          </a:p>
-        </p:txBody>
-      </p:sp>
-      <p:sp>
-        <p:nvSpPr>
-          <p:cNvPr id="7" name="TextBox 6"/>
-          <p:cNvSpPr txBox="1"/>
-          <p:nvPr/>
-        </p:nvSpPr>
-        <p:spPr>
-          <a:xfrm>
-            <a:off x="548640" y="1280160"/>
-            <a:ext cx="11155680" cy="3383280"/>
-          </a:xfrm>
-          <a:prstGeom prst="rect">
-            <a:avLst/>
-          </a:prstGeom>
-          <a:noFill/>
-        </p:spPr>
-        <p:txBody>
-          <a:bodyPr wrap="square">
-            <a:spAutoFit/>
-          </a:bodyPr>
-          <a:lstStyle/>
-          <a:p>
-            <a:pPr>
-              <a:spcBef>
-                <a:spcPts val="0"/>
-              </a:spcBef>
-              <a:spcAft>
-                <a:spcPts val="600"/>
-              </a:spcAft>
-            </a:pPr>
-            <a:r>
-              <a:rPr sz="1400" b="0">
-                <a:solidFill>
-                  <a:srgbClr val="0B2B52"/>
-                </a:solidFill>
-              </a:rPr>
-              <a:t>•  Implemented and integrated memory, sampling and parallelism optimisations into the Boltz pipeline; device-agnostic on Apple Silicon.</a:t>
-            </a:r>
-          </a:p>
-          <a:p>
-            <a:pPr>
-              <a:spcAft>
-                <a:spcPts val="600"/>
-              </a:spcAft>
-            </a:pPr>
-            <a:r>
-              <a:rPr sz="1400" b="0">
-                <a:solidFill>
-                  <a:srgbClr val="0B2B52"/>
-                </a:solidFill>
-              </a:rPr>
-              <a:t>•  Moved from component microbenchmarks to end-to-end measurement against pretrained checkpoints and experimentally determined structures.</a:t>
-            </a:r>
-          </a:p>
-          <a:p>
-            <a:pPr>
-              <a:spcAft>
-                <a:spcPts val="600"/>
-              </a:spcAft>
-            </a:pPr>
-            <a:r>
-              <a:rPr sz="1400" b="0">
-                <a:solidFill>
-                  <a:srgbClr val="0B2B52"/>
-                </a:solidFill>
-              </a:rPr>
-              <a:t>•  Two questions closed with negative answers, both with mechanisms: the low-rank OPM is unreachable on released weights, and ipTM tracks peptide composition rather than binding.</a:t>
-            </a:r>
-          </a:p>
-          <a:p>
-            <a:pPr>
-              <a:spcAft>
-                <a:spcPts val="600"/>
-              </a:spcAft>
-            </a:pPr>
-            <a:r>
-              <a:rPr sz="1400" b="0">
-                <a:solidFill>
-                  <a:srgbClr val="0B2B52"/>
-                </a:solidFill>
-              </a:rPr>
-              <a:t>•  A third finding generalises beyond this project: a single unseeded fold does not reproduce its own ranking.</a:t>
-            </a:r>
-          </a:p>
-          <a:p>
-            <a:pPr>
-              <a:spcAft>
-                <a:spcPts val="600"/>
-              </a:spcAft>
-            </a:pPr>
-            <a:r>
-              <a:rPr sz="1400" b="0">
-                <a:solidFill>
-                  <a:srgbClr val="0B2B52"/>
-                </a:solidFill>
-              </a:rPr>
-              <a:t>•  Delivered as a local screening tool: the scramble control, the cost of reduced settings and the replicate spread are built into what it does rather than written beside it (slides 31–32).</a:t>
-            </a:r>
-          </a:p>
-          <a:p>
-            <a:r>
-              <a:rPr sz="1400" b="0">
-                <a:solidFill>
-                  <a:srgbClr val="0B2B52"/>
-                </a:solidFill>
-              </a:rPr>
-              <a:t>•  Of the three inference settings raised together, sampling steps carry the effect; alignment depth and recycling carry none of it, and 69% of the gain costs a third of the compute.</a:t>
-            </a:r>
-          </a:p>
-          <a:p>
-            <a:r>
-              <a:rPr sz="1400" b="0">
-                <a:solidFill>
-                  <a:srgbClr val="0B2B52"/>
-                </a:solidFill>
-              </a:rPr>
-              <a:t>•  Checked against binding measured in a wet lab on 1,320 designs no model had seen: 0.626, against 0.943 on the in-training panel. The readout still beats whole-chain confidence, which was the claim.</a:t>
-            </a:r>
-          </a:p>
-          <a:p>
-            <a:r>
-              <a:rPr sz="1400" b="0">
-                <a:solidFill>
-                  <a:srgbClr val="0B2B52"/>
-                </a:solidFill>
-              </a:rPr>
-              <a:t>•  Next: extend the panel past 22 receptors, which is what now limits the open questions.</a:t>
-            </a:r>
-          </a:p>
-        </p:txBody>
-      </p:sp>
-      <p:sp>
-        <p:nvSpPr>
-          <p:cNvPr id="8" name="Rounded Rectangle 7"/>
-          <p:cNvSpPr/>
-          <p:nvPr/>
-        </p:nvSpPr>
-        <p:spPr>
-          <a:xfrm>
-            <a:off x="548640" y="4892040"/>
-            <a:ext cx="11155680" cy="1051560"/>
-          </a:xfrm>
-          <a:prstGeom prst="roundRect">
-            <a:avLst/>
-          </a:prstGeom>
-          <a:solidFill>
-            <a:srgbClr val="0B2B52"/>
-          </a:solidFill>
-          <a:ln>
-            <a:noFill/>
-          </a:ln>
-          <a:effectLst/>
-        </p:spPr>
-        <p:style>
-          <a:lnRef idx="1">
-            <a:schemeClr val="accent1"/>
-          </a:lnRef>
-          <a:fillRef idx="3">
-            <a:schemeClr val="accent1"/>
-          </a:fillRef>
-          <a:effectRef idx="2">
-            <a:schemeClr val="accent1"/>
-          </a:effectRef>
-          <a:fontRef idx="minor">
-            <a:schemeClr val="lt1"/>
-          </a:fontRef>
-        </p:style>
-        <p:txBody>
-          <a:bodyPr rtlCol="0" anchor="ctr" wrap="square"/>
-          <a:lstStyle/>
-          <a:p>
-            <a:pPr algn="ctr">
-              <a:spcBef>
-                <a:spcPts val="0"/>
-              </a:spcBef>
-              <a:spcAft>
-                <a:spcPts val="400"/>
-              </a:spcAft>
-            </a:pPr>
-            <a:r>
-              <a:rPr sz="2000" b="1" i="0">
-                <a:solidFill>
-                  <a:srgbClr val="FFFFFF"/>
-                </a:solidFill>
-              </a:rPr>
-              <a:t>Thank you  ·  Questions welcome</a:t>
-            </a:r>
-          </a:p>
-        </p:txBody>
-      </p:sp>
-    </p:spTree>
-  </p:cSld>
-  <p:clrMapOvr>
-    <a:masterClrMapping/>
-  </p:clrMapOvr>
-</p:sld>
-</file>
-
-<file path=ppt/slides/slide38.xml><?xml version="1.0" encoding="utf-8"?>
-<p:sld xmlns:a="http://schemas.openxmlformats.org/drawingml/2006/main" xmlns:p="http://schemas.openxmlformats.org/presentationml/2006/main" xmlns:r="http://schemas.openxmlformats.org/officeDocument/2006/relationships">
-  <p:cSld>
-    <p:spTree>
-      <p:nvGrpSpPr>
-        <p:cNvPr id="1" name=""/>
-        <p:cNvGrpSpPr/>
-        <p:nvPr/>
-      </p:nvGrpSpPr>
-      <p:grpSpPr/>
-      <p:sp>
-        <p:nvSpPr>
-          <p:cNvPr id="2" name="Rectangle 1"/>
-          <p:cNvSpPr/>
-          <p:nvPr/>
-        </p:nvSpPr>
-        <p:spPr>
-          <a:xfrm>
-            <a:off x="0" y="0"/>
             <a:ext cx="12188952" cy="914400"/>
           </a:xfrm>
           <a:prstGeom prst="rect">
@@ -21606,6 +20459,1741 @@
                 </a:solidFill>
               </a:rPr>
               <a:t>So the control is sound for the case this work concerns and unsound outside it. The recommendation gains a condition rather than losing its force: use the scramble control wherever a permutation of the candidate is still a candidate.</a:t>
+            </a:r>
+          </a:p>
+        </p:txBody>
+      </p:sp>
+    </p:spTree>
+  </p:cSld>
+  <p:clrMapOvr>
+    <a:masterClrMapping/>
+  </p:clrMapOvr>
+</p:sld>
+</file>
+
+<file path=ppt/slides/slide37.xml><?xml version="1.0" encoding="utf-8"?>
+<p:sld xmlns:a="http://schemas.openxmlformats.org/drawingml/2006/main" xmlns:p="http://schemas.openxmlformats.org/presentationml/2006/main" xmlns:r="http://schemas.openxmlformats.org/officeDocument/2006/relationships">
+  <p:cSld>
+    <p:spTree>
+      <p:nvGrpSpPr>
+        <p:cNvPr id="1" name=""/>
+        <p:cNvGrpSpPr/>
+        <p:nvPr/>
+      </p:nvGrpSpPr>
+      <p:grpSpPr/>
+      <p:sp>
+        <p:nvSpPr>
+          <p:cNvPr id="2" name="Rectangle 1"/>
+          <p:cNvSpPr/>
+          <p:nvPr/>
+        </p:nvSpPr>
+        <p:spPr>
+          <a:xfrm>
+            <a:off x="0" y="0"/>
+            <a:ext cx="12191695" cy="914400"/>
+          </a:xfrm>
+          <a:prstGeom prst="rect">
+            <a:avLst/>
+          </a:prstGeom>
+          <a:solidFill>
+            <a:srgbClr val="0B2B52"/>
+          </a:solidFill>
+          <a:ln>
+            <a:noFill/>
+          </a:ln>
+          <a:effectLst/>
+        </p:spPr>
+        <p:style>
+          <a:lnRef idx="1">
+            <a:schemeClr val="accent1"/>
+          </a:lnRef>
+          <a:fillRef idx="3">
+            <a:schemeClr val="accent1"/>
+          </a:fillRef>
+          <a:effectRef idx="2">
+            <a:schemeClr val="accent1"/>
+          </a:effectRef>
+          <a:fontRef idx="minor">
+            <a:schemeClr val="lt1"/>
+          </a:fontRef>
+        </p:style>
+        <p:txBody>
+          <a:bodyPr rtlCol="0" anchor="ctr"/>
+          <a:lstStyle/>
+          <a:p>
+            <a:pPr algn="ctr"/>
+          </a:p>
+        </p:txBody>
+      </p:sp>
+      <p:sp>
+        <p:nvSpPr>
+          <p:cNvPr id="3" name="Rectangle 2"/>
+          <p:cNvSpPr/>
+          <p:nvPr/>
+        </p:nvSpPr>
+        <p:spPr>
+          <a:xfrm>
+            <a:off x="0" y="914400"/>
+            <a:ext cx="12191695" cy="54864"/>
+          </a:xfrm>
+          <a:prstGeom prst="rect">
+            <a:avLst/>
+          </a:prstGeom>
+          <a:solidFill>
+            <a:srgbClr val="1E6FB8"/>
+          </a:solidFill>
+          <a:ln>
+            <a:noFill/>
+          </a:ln>
+          <a:effectLst/>
+        </p:spPr>
+        <p:style>
+          <a:lnRef idx="1">
+            <a:schemeClr val="accent1"/>
+          </a:lnRef>
+          <a:fillRef idx="3">
+            <a:schemeClr val="accent1"/>
+          </a:fillRef>
+          <a:effectRef idx="2">
+            <a:schemeClr val="accent1"/>
+          </a:effectRef>
+          <a:fontRef idx="minor">
+            <a:schemeClr val="lt1"/>
+          </a:fontRef>
+        </p:style>
+        <p:txBody>
+          <a:bodyPr rtlCol="0" anchor="ctr"/>
+          <a:lstStyle/>
+          <a:p>
+            <a:pPr algn="ctr"/>
+          </a:p>
+        </p:txBody>
+      </p:sp>
+      <p:sp>
+        <p:nvSpPr>
+          <p:cNvPr id="4" name="TextBox 3"/>
+          <p:cNvSpPr txBox="1"/>
+          <p:nvPr/>
+        </p:nvSpPr>
+        <p:spPr>
+          <a:xfrm>
+            <a:off x="502920" y="109728"/>
+            <a:ext cx="11155680" cy="777240"/>
+          </a:xfrm>
+          <a:prstGeom prst="rect">
+            <a:avLst/>
+          </a:prstGeom>
+          <a:noFill/>
+        </p:spPr>
+        <p:txBody>
+          <a:bodyPr wrap="square">
+            <a:spAutoFit/>
+          </a:bodyPr>
+          <a:lstStyle/>
+          <a:p>
+            <a:pPr>
+              <a:spcBef>
+                <a:spcPts val="0"/>
+              </a:spcBef>
+              <a:spcAft>
+                <a:spcPts val="400"/>
+              </a:spcAft>
+            </a:pPr>
+            <a:r>
+              <a:rPr sz="2600" b="1" i="0">
+                <a:solidFill>
+                  <a:srgbClr val="FFFFFF"/>
+                </a:solidFill>
+              </a:rPr>
+              <a:t>Future Plan</a:t>
+            </a:r>
+          </a:p>
+        </p:txBody>
+      </p:sp>
+      <p:sp>
+        <p:nvSpPr>
+          <p:cNvPr id="5" name="TextBox 4"/>
+          <p:cNvSpPr txBox="1"/>
+          <p:nvPr/>
+        </p:nvSpPr>
+        <p:spPr>
+          <a:xfrm>
+            <a:off x="502920" y="6473952"/>
+            <a:ext cx="8229600" cy="274320"/>
+          </a:xfrm>
+          <a:prstGeom prst="rect">
+            <a:avLst/>
+          </a:prstGeom>
+          <a:noFill/>
+        </p:spPr>
+        <p:txBody>
+          <a:bodyPr wrap="square">
+            <a:spAutoFit/>
+          </a:bodyPr>
+          <a:lstStyle/>
+          <a:p>
+            <a:pPr>
+              <a:spcBef>
+                <a:spcPts val="0"/>
+              </a:spcBef>
+              <a:spcAft>
+                <a:spcPts val="600"/>
+              </a:spcAft>
+            </a:pPr>
+            <a:r>
+              <a:rPr sz="900" b="0">
+                <a:solidFill>
+                  <a:srgbClr val="555555"/>
+                </a:solidFill>
+              </a:rPr>
+              <a:t>Boltz-Fast · Final Dissertation Report · Akik Jana (2024AB05287)</a:t>
+            </a:r>
+          </a:p>
+        </p:txBody>
+      </p:sp>
+      <p:sp>
+        <p:nvSpPr>
+          <p:cNvPr id="6" name="TextBox 5"/>
+          <p:cNvSpPr txBox="1"/>
+          <p:nvPr/>
+        </p:nvSpPr>
+        <p:spPr>
+          <a:xfrm>
+            <a:off x="11185855" y="6473952"/>
+            <a:ext cx="640080" cy="274320"/>
+          </a:xfrm>
+          <a:prstGeom prst="rect">
+            <a:avLst/>
+          </a:prstGeom>
+          <a:noFill/>
+        </p:spPr>
+        <p:txBody>
+          <a:bodyPr wrap="square">
+            <a:spAutoFit/>
+          </a:bodyPr>
+          <a:lstStyle/>
+          <a:p>
+            <a:pPr algn="r">
+              <a:spcBef>
+                <a:spcPts val="0"/>
+              </a:spcBef>
+              <a:spcAft>
+                <a:spcPts val="600"/>
+              </a:spcAft>
+            </a:pPr>
+            <a:r>
+              <a:rPr sz="1000" b="0">
+                <a:solidFill>
+                  <a:srgbClr val="0B2B52"/>
+                </a:solidFill>
+              </a:rPr>
+              <a:t>38</a:t>
+            </a:r>
+          </a:p>
+        </p:txBody>
+      </p:sp>
+      <p:sp>
+        <p:nvSpPr>
+          <p:cNvPr id="7" name="Oval 6"/>
+          <p:cNvSpPr/>
+          <p:nvPr/>
+        </p:nvSpPr>
+        <p:spPr>
+          <a:xfrm>
+            <a:off x="548640" y="1325880"/>
+            <a:ext cx="566928" cy="566928"/>
+          </a:xfrm>
+          <a:prstGeom prst="ellipse">
+            <a:avLst/>
+          </a:prstGeom>
+          <a:solidFill>
+            <a:srgbClr val="1E6FB8"/>
+          </a:solidFill>
+          <a:ln>
+            <a:noFill/>
+          </a:ln>
+          <a:effectLst/>
+        </p:spPr>
+        <p:style>
+          <a:lnRef idx="1">
+            <a:schemeClr val="accent1"/>
+          </a:lnRef>
+          <a:fillRef idx="3">
+            <a:schemeClr val="accent1"/>
+          </a:fillRef>
+          <a:effectRef idx="2">
+            <a:schemeClr val="accent1"/>
+          </a:effectRef>
+          <a:fontRef idx="minor">
+            <a:schemeClr val="lt1"/>
+          </a:fontRef>
+        </p:style>
+        <p:txBody>
+          <a:bodyPr rtlCol="0" anchor="ctr" wrap="square"/>
+          <a:lstStyle/>
+          <a:p>
+            <a:pPr algn="ctr">
+              <a:spcBef>
+                <a:spcPts val="0"/>
+              </a:spcBef>
+              <a:spcAft>
+                <a:spcPts val="400"/>
+              </a:spcAft>
+            </a:pPr>
+            <a:r>
+              <a:rPr sz="1800" b="1" i="0">
+                <a:solidFill>
+                  <a:srgbClr val="FFFFFF"/>
+                </a:solidFill>
+              </a:rPr>
+              <a:t>1</a:t>
+            </a:r>
+          </a:p>
+        </p:txBody>
+      </p:sp>
+      <p:sp>
+        <p:nvSpPr>
+          <p:cNvPr id="8" name="TextBox 7"/>
+          <p:cNvSpPr txBox="1"/>
+          <p:nvPr/>
+        </p:nvSpPr>
+        <p:spPr>
+          <a:xfrm>
+            <a:off x="1325880" y="1307592"/>
+            <a:ext cx="10332720" cy="868680"/>
+          </a:xfrm>
+          <a:prstGeom prst="rect">
+            <a:avLst/>
+          </a:prstGeom>
+          <a:noFill/>
+        </p:spPr>
+        <p:txBody>
+          <a:bodyPr wrap="square">
+            <a:spAutoFit/>
+          </a:bodyPr>
+          <a:lstStyle/>
+          <a:p>
+            <a:pPr>
+              <a:spcBef>
+                <a:spcPts val="0"/>
+              </a:spcBef>
+              <a:spcAft>
+                <a:spcPts val="600"/>
+              </a:spcAft>
+            </a:pPr>
+            <a:r>
+              <a:rPr sz="1300" b="0">
+                <a:solidFill>
+                  <a:srgbClr val="0B2B52"/>
+                </a:solidFill>
+              </a:rPr>
+              <a:t>DONE — profiled; and measured what the optimisations actually deliver on pretrained weights (slides 11–18).</a:t>
+            </a:r>
+          </a:p>
+        </p:txBody>
+      </p:sp>
+      <p:sp>
+        <p:nvSpPr>
+          <p:cNvPr id="9" name="Oval 8"/>
+          <p:cNvSpPr/>
+          <p:nvPr/>
+        </p:nvSpPr>
+        <p:spPr>
+          <a:xfrm>
+            <a:off x="548640" y="2304288"/>
+            <a:ext cx="566928" cy="566928"/>
+          </a:xfrm>
+          <a:prstGeom prst="ellipse">
+            <a:avLst/>
+          </a:prstGeom>
+          <a:solidFill>
+            <a:srgbClr val="0E8F9A"/>
+          </a:solidFill>
+          <a:ln>
+            <a:noFill/>
+          </a:ln>
+          <a:effectLst/>
+        </p:spPr>
+        <p:style>
+          <a:lnRef idx="1">
+            <a:schemeClr val="accent1"/>
+          </a:lnRef>
+          <a:fillRef idx="3">
+            <a:schemeClr val="accent1"/>
+          </a:fillRef>
+          <a:effectRef idx="2">
+            <a:schemeClr val="accent1"/>
+          </a:effectRef>
+          <a:fontRef idx="minor">
+            <a:schemeClr val="lt1"/>
+          </a:fontRef>
+        </p:style>
+        <p:txBody>
+          <a:bodyPr rtlCol="0" anchor="ctr" wrap="square"/>
+          <a:lstStyle/>
+          <a:p>
+            <a:pPr algn="ctr">
+              <a:spcBef>
+                <a:spcPts val="0"/>
+              </a:spcBef>
+              <a:spcAft>
+                <a:spcPts val="400"/>
+              </a:spcAft>
+            </a:pPr>
+            <a:r>
+              <a:rPr sz="1800" b="1" i="0">
+                <a:solidFill>
+                  <a:srgbClr val="FFFFFF"/>
+                </a:solidFill>
+              </a:rPr>
+              <a:t>2</a:t>
+            </a:r>
+          </a:p>
+        </p:txBody>
+      </p:sp>
+      <p:sp>
+        <p:nvSpPr>
+          <p:cNvPr id="10" name="TextBox 9"/>
+          <p:cNvSpPr txBox="1"/>
+          <p:nvPr/>
+        </p:nvSpPr>
+        <p:spPr>
+          <a:xfrm>
+            <a:off x="1325880" y="2286000"/>
+            <a:ext cx="10332720" cy="868680"/>
+          </a:xfrm>
+          <a:prstGeom prst="rect">
+            <a:avLst/>
+          </a:prstGeom>
+          <a:noFill/>
+        </p:spPr>
+        <p:txBody>
+          <a:bodyPr wrap="square">
+            <a:spAutoFit/>
+          </a:bodyPr>
+          <a:lstStyle/>
+          <a:p>
+            <a:pPr>
+              <a:spcBef>
+                <a:spcPts val="0"/>
+              </a:spcBef>
+              <a:spcAft>
+                <a:spcPts val="600"/>
+              </a:spcAft>
+            </a:pPr>
+            <a:r>
+              <a:rPr sz="1300" b="0">
+                <a:solidFill>
+                  <a:srgbClr val="0B2B52"/>
+                </a:solidFill>
+              </a:rPr>
+              <a:t>DONE — DeCAF-Boltz, distilled for 10 steps, folds the 132-complex panel in ~20 min locally and returns 96% physically plausible backbones against 14% for a stock model run short (slides 27-28).</a:t>
+            </a:r>
+          </a:p>
+        </p:txBody>
+      </p:sp>
+      <p:sp>
+        <p:nvSpPr>
+          <p:cNvPr id="11" name="Oval 10"/>
+          <p:cNvSpPr/>
+          <p:nvPr/>
+        </p:nvSpPr>
+        <p:spPr>
+          <a:xfrm>
+            <a:off x="548640" y="3282696"/>
+            <a:ext cx="566928" cy="566928"/>
+          </a:xfrm>
+          <a:prstGeom prst="ellipse">
+            <a:avLst/>
+          </a:prstGeom>
+          <a:solidFill>
+            <a:srgbClr val="2E7D32"/>
+          </a:solidFill>
+          <a:ln>
+            <a:noFill/>
+          </a:ln>
+          <a:effectLst/>
+        </p:spPr>
+        <p:style>
+          <a:lnRef idx="1">
+            <a:schemeClr val="accent1"/>
+          </a:lnRef>
+          <a:fillRef idx="3">
+            <a:schemeClr val="accent1"/>
+          </a:fillRef>
+          <a:effectRef idx="2">
+            <a:schemeClr val="accent1"/>
+          </a:effectRef>
+          <a:fontRef idx="minor">
+            <a:schemeClr val="lt1"/>
+          </a:fontRef>
+        </p:style>
+        <p:txBody>
+          <a:bodyPr rtlCol="0" anchor="ctr" wrap="square"/>
+          <a:lstStyle/>
+          <a:p>
+            <a:pPr algn="ctr">
+              <a:spcBef>
+                <a:spcPts val="0"/>
+              </a:spcBef>
+              <a:spcAft>
+                <a:spcPts val="400"/>
+              </a:spcAft>
+            </a:pPr>
+            <a:r>
+              <a:rPr sz="1800" b="1" i="0">
+                <a:solidFill>
+                  <a:srgbClr val="FFFFFF"/>
+                </a:solidFill>
+              </a:rPr>
+              <a:t>3</a:t>
+            </a:r>
+          </a:p>
+        </p:txBody>
+      </p:sp>
+      <p:sp>
+        <p:nvSpPr>
+          <p:cNvPr id="12" name="TextBox 11"/>
+          <p:cNvSpPr txBox="1"/>
+          <p:nvPr/>
+        </p:nvSpPr>
+        <p:spPr>
+          <a:xfrm>
+            <a:off x="1325880" y="3264408"/>
+            <a:ext cx="10332720" cy="868680"/>
+          </a:xfrm>
+          <a:prstGeom prst="rect">
+            <a:avLst/>
+          </a:prstGeom>
+          <a:noFill/>
+        </p:spPr>
+        <p:txBody>
+          <a:bodyPr wrap="square">
+            <a:spAutoFit/>
+          </a:bodyPr>
+          <a:lstStyle/>
+          <a:p>
+            <a:pPr>
+              <a:spcBef>
+                <a:spcPts val="0"/>
+              </a:spcBef>
+              <a:spcAft>
+                <a:spcPts val="600"/>
+              </a:spcAft>
+            </a:pPr>
+            <a:r>
+              <a:rPr sz="1300" b="0">
+                <a:solidFill>
+                  <a:srgbClr val="0B2B52"/>
+                </a:solidFill>
+              </a:rPr>
+              <a:t>DONE, NEGATIVE — the surrogate was distilled and evaluated: ipTM does not rank binders, so no surrogate distilled from it can either.</a:t>
+            </a:r>
+          </a:p>
+        </p:txBody>
+      </p:sp>
+      <p:sp>
+        <p:nvSpPr>
+          <p:cNvPr id="13" name="Oval 12"/>
+          <p:cNvSpPr/>
+          <p:nvPr/>
+        </p:nvSpPr>
+        <p:spPr>
+          <a:xfrm>
+            <a:off x="548640" y="4261104"/>
+            <a:ext cx="566928" cy="566928"/>
+          </a:xfrm>
+          <a:prstGeom prst="ellipse">
+            <a:avLst/>
+          </a:prstGeom>
+          <a:solidFill>
+            <a:srgbClr val="C77700"/>
+          </a:solidFill>
+          <a:ln>
+            <a:noFill/>
+          </a:ln>
+          <a:effectLst/>
+        </p:spPr>
+        <p:style>
+          <a:lnRef idx="1">
+            <a:schemeClr val="accent1"/>
+          </a:lnRef>
+          <a:fillRef idx="3">
+            <a:schemeClr val="accent1"/>
+          </a:fillRef>
+          <a:effectRef idx="2">
+            <a:schemeClr val="accent1"/>
+          </a:effectRef>
+          <a:fontRef idx="minor">
+            <a:schemeClr val="lt1"/>
+          </a:fontRef>
+        </p:style>
+        <p:txBody>
+          <a:bodyPr rtlCol="0" anchor="ctr" wrap="square"/>
+          <a:lstStyle/>
+          <a:p>
+            <a:pPr algn="ctr">
+              <a:spcBef>
+                <a:spcPts val="0"/>
+              </a:spcBef>
+              <a:spcAft>
+                <a:spcPts val="400"/>
+              </a:spcAft>
+            </a:pPr>
+            <a:r>
+              <a:rPr sz="1800" b="1" i="0">
+                <a:solidFill>
+                  <a:srgbClr val="FFFFFF"/>
+                </a:solidFill>
+              </a:rPr>
+              <a:t>4</a:t>
+            </a:r>
+          </a:p>
+        </p:txBody>
+      </p:sp>
+      <p:sp>
+        <p:nvSpPr>
+          <p:cNvPr id="14" name="TextBox 13"/>
+          <p:cNvSpPr txBox="1"/>
+          <p:nvPr/>
+        </p:nvSpPr>
+        <p:spPr>
+          <a:xfrm>
+            <a:off x="1325880" y="4242816"/>
+            <a:ext cx="10332720" cy="868680"/>
+          </a:xfrm>
+          <a:prstGeom prst="rect">
+            <a:avLst/>
+          </a:prstGeom>
+          <a:noFill/>
+        </p:spPr>
+        <p:txBody>
+          <a:bodyPr wrap="square">
+            <a:spAutoFit/>
+          </a:bodyPr>
+          <a:lstStyle/>
+          <a:p>
+            <a:pPr>
+              <a:spcBef>
+                <a:spcPts val="0"/>
+              </a:spcBef>
+              <a:spcAft>
+                <a:spcPts val="600"/>
+              </a:spcAft>
+            </a:pPr>
+            <a:r>
+              <a:rPr sz="1300" b="0">
+                <a:solidFill>
+                  <a:srgbClr val="0B2B52"/>
+                </a:solidFill>
+              </a:rPr>
+              <a:t>Use open Boltz-2 weights only — Boltz-2.1 is closed / API-only.</a:t>
+            </a:r>
+          </a:p>
+        </p:txBody>
+      </p:sp>
+      <p:sp>
+        <p:nvSpPr>
+          <p:cNvPr id="15" name="Oval 14"/>
+          <p:cNvSpPr/>
+          <p:nvPr/>
+        </p:nvSpPr>
+        <p:spPr>
+          <a:xfrm>
+            <a:off x="548640" y="5239512"/>
+            <a:ext cx="566928" cy="566928"/>
+          </a:xfrm>
+          <a:prstGeom prst="ellipse">
+            <a:avLst/>
+          </a:prstGeom>
+          <a:solidFill>
+            <a:srgbClr val="0B2B52"/>
+          </a:solidFill>
+          <a:ln>
+            <a:noFill/>
+          </a:ln>
+          <a:effectLst/>
+        </p:spPr>
+        <p:style>
+          <a:lnRef idx="1">
+            <a:schemeClr val="accent1"/>
+          </a:lnRef>
+          <a:fillRef idx="3">
+            <a:schemeClr val="accent1"/>
+          </a:fillRef>
+          <a:effectRef idx="2">
+            <a:schemeClr val="accent1"/>
+          </a:effectRef>
+          <a:fontRef idx="minor">
+            <a:schemeClr val="lt1"/>
+          </a:fontRef>
+        </p:style>
+        <p:txBody>
+          <a:bodyPr rtlCol="0" anchor="ctr" wrap="square"/>
+          <a:lstStyle/>
+          <a:p>
+            <a:pPr algn="ctr">
+              <a:spcBef>
+                <a:spcPts val="0"/>
+              </a:spcBef>
+              <a:spcAft>
+                <a:spcPts val="400"/>
+              </a:spcAft>
+            </a:pPr>
+            <a:r>
+              <a:rPr sz="1800" b="1" i="0">
+                <a:solidFill>
+                  <a:srgbClr val="FFFFFF"/>
+                </a:solidFill>
+              </a:rPr>
+              <a:t>5</a:t>
+            </a:r>
+          </a:p>
+        </p:txBody>
+      </p:sp>
+      <p:sp>
+        <p:nvSpPr>
+          <p:cNvPr id="16" name="TextBox 15"/>
+          <p:cNvSpPr txBox="1"/>
+          <p:nvPr/>
+        </p:nvSpPr>
+        <p:spPr>
+          <a:xfrm>
+            <a:off x="1325880" y="5221224"/>
+            <a:ext cx="10332720" cy="868680"/>
+          </a:xfrm>
+          <a:prstGeom prst="rect">
+            <a:avLst/>
+          </a:prstGeom>
+          <a:noFill/>
+        </p:spPr>
+        <p:txBody>
+          <a:bodyPr wrap="square">
+            <a:spAutoFit/>
+          </a:bodyPr>
+          <a:lstStyle/>
+          <a:p>
+            <a:pPr>
+              <a:spcBef>
+                <a:spcPts val="0"/>
+              </a:spcBef>
+              <a:spcAft>
+                <a:spcPts val="600"/>
+              </a:spcAft>
+            </a:pPr>
+            <a:r>
+              <a:rPr sz="1300" b="0">
+                <a:solidFill>
+                  <a:srgbClr val="0B2B52"/>
+                </a:solidFill>
+              </a:rPr>
+              <a:t>Production GPU scaling — NO LONGER a prerequisite. MPS (~3x) plus few-step distillation let the held-out panel be folded five times on this laptop, and the third draw overturned what the first two supported. Scaling is now for extending the panel past 22 receptors, which is the binding constraint on the open questions.</a:t>
+            </a:r>
+          </a:p>
+        </p:txBody>
+      </p:sp>
+    </p:spTree>
+  </p:cSld>
+  <p:clrMapOvr>
+    <a:masterClrMapping/>
+  </p:clrMapOvr>
+</p:sld>
+</file>
+
+<file path=ppt/slides/slide38.xml><?xml version="1.0" encoding="utf-8"?>
+<p:sld xmlns:a="http://schemas.openxmlformats.org/drawingml/2006/main" xmlns:p="http://schemas.openxmlformats.org/presentationml/2006/main" xmlns:r="http://schemas.openxmlformats.org/officeDocument/2006/relationships">
+  <p:cSld>
+    <p:spTree>
+      <p:nvGrpSpPr>
+        <p:cNvPr id="1" name=""/>
+        <p:cNvGrpSpPr/>
+        <p:nvPr/>
+      </p:nvGrpSpPr>
+      <p:grpSpPr/>
+      <p:sp>
+        <p:nvSpPr>
+          <p:cNvPr id="2" name="Rectangle 1"/>
+          <p:cNvSpPr/>
+          <p:nvPr/>
+        </p:nvSpPr>
+        <p:spPr>
+          <a:xfrm>
+            <a:off x="0" y="0"/>
+            <a:ext cx="12191695" cy="914400"/>
+          </a:xfrm>
+          <a:prstGeom prst="rect">
+            <a:avLst/>
+          </a:prstGeom>
+          <a:solidFill>
+            <a:srgbClr val="0B2B52"/>
+          </a:solidFill>
+          <a:ln>
+            <a:noFill/>
+          </a:ln>
+          <a:effectLst/>
+        </p:spPr>
+        <p:style>
+          <a:lnRef idx="1">
+            <a:schemeClr val="accent1"/>
+          </a:lnRef>
+          <a:fillRef idx="3">
+            <a:schemeClr val="accent1"/>
+          </a:fillRef>
+          <a:effectRef idx="2">
+            <a:schemeClr val="accent1"/>
+          </a:effectRef>
+          <a:fontRef idx="minor">
+            <a:schemeClr val="lt1"/>
+          </a:fontRef>
+        </p:style>
+        <p:txBody>
+          <a:bodyPr rtlCol="0" anchor="ctr"/>
+          <a:lstStyle/>
+          <a:p>
+            <a:pPr algn="ctr"/>
+          </a:p>
+        </p:txBody>
+      </p:sp>
+      <p:sp>
+        <p:nvSpPr>
+          <p:cNvPr id="3" name="Rectangle 2"/>
+          <p:cNvSpPr/>
+          <p:nvPr/>
+        </p:nvSpPr>
+        <p:spPr>
+          <a:xfrm>
+            <a:off x="0" y="914400"/>
+            <a:ext cx="12191695" cy="54864"/>
+          </a:xfrm>
+          <a:prstGeom prst="rect">
+            <a:avLst/>
+          </a:prstGeom>
+          <a:solidFill>
+            <a:srgbClr val="1E6FB8"/>
+          </a:solidFill>
+          <a:ln>
+            <a:noFill/>
+          </a:ln>
+          <a:effectLst/>
+        </p:spPr>
+        <p:style>
+          <a:lnRef idx="1">
+            <a:schemeClr val="accent1"/>
+          </a:lnRef>
+          <a:fillRef idx="3">
+            <a:schemeClr val="accent1"/>
+          </a:fillRef>
+          <a:effectRef idx="2">
+            <a:schemeClr val="accent1"/>
+          </a:effectRef>
+          <a:fontRef idx="minor">
+            <a:schemeClr val="lt1"/>
+          </a:fontRef>
+        </p:style>
+        <p:txBody>
+          <a:bodyPr rtlCol="0" anchor="ctr"/>
+          <a:lstStyle/>
+          <a:p>
+            <a:pPr algn="ctr"/>
+          </a:p>
+        </p:txBody>
+      </p:sp>
+      <p:sp>
+        <p:nvSpPr>
+          <p:cNvPr id="4" name="TextBox 3"/>
+          <p:cNvSpPr txBox="1"/>
+          <p:nvPr/>
+        </p:nvSpPr>
+        <p:spPr>
+          <a:xfrm>
+            <a:off x="502920" y="109728"/>
+            <a:ext cx="11155680" cy="777240"/>
+          </a:xfrm>
+          <a:prstGeom prst="rect">
+            <a:avLst/>
+          </a:prstGeom>
+          <a:noFill/>
+        </p:spPr>
+        <p:txBody>
+          <a:bodyPr wrap="square">
+            <a:spAutoFit/>
+          </a:bodyPr>
+          <a:lstStyle/>
+          <a:p>
+            <a:pPr>
+              <a:spcBef>
+                <a:spcPts val="0"/>
+              </a:spcBef>
+              <a:spcAft>
+                <a:spcPts val="400"/>
+              </a:spcAft>
+            </a:pPr>
+            <a:r>
+              <a:rPr sz="2600" b="1" i="0">
+                <a:solidFill>
+                  <a:srgbClr val="FFFFFF"/>
+                </a:solidFill>
+              </a:rPr>
+              <a:t>Summary</a:t>
+            </a:r>
+          </a:p>
+        </p:txBody>
+      </p:sp>
+      <p:sp>
+        <p:nvSpPr>
+          <p:cNvPr id="5" name="TextBox 4"/>
+          <p:cNvSpPr txBox="1"/>
+          <p:nvPr/>
+        </p:nvSpPr>
+        <p:spPr>
+          <a:xfrm>
+            <a:off x="502920" y="6473952"/>
+            <a:ext cx="8229600" cy="274320"/>
+          </a:xfrm>
+          <a:prstGeom prst="rect">
+            <a:avLst/>
+          </a:prstGeom>
+          <a:noFill/>
+        </p:spPr>
+        <p:txBody>
+          <a:bodyPr wrap="square">
+            <a:spAutoFit/>
+          </a:bodyPr>
+          <a:lstStyle/>
+          <a:p>
+            <a:pPr>
+              <a:spcBef>
+                <a:spcPts val="0"/>
+              </a:spcBef>
+              <a:spcAft>
+                <a:spcPts val="600"/>
+              </a:spcAft>
+            </a:pPr>
+            <a:r>
+              <a:rPr sz="900" b="0">
+                <a:solidFill>
+                  <a:srgbClr val="555555"/>
+                </a:solidFill>
+              </a:rPr>
+              <a:t>Boltz-Fast · Final Dissertation Report · Akik Jana (2024AB05287)</a:t>
+            </a:r>
+          </a:p>
+        </p:txBody>
+      </p:sp>
+      <p:sp>
+        <p:nvSpPr>
+          <p:cNvPr id="6" name="TextBox 5"/>
+          <p:cNvSpPr txBox="1"/>
+          <p:nvPr/>
+        </p:nvSpPr>
+        <p:spPr>
+          <a:xfrm>
+            <a:off x="11185855" y="6473952"/>
+            <a:ext cx="640080" cy="274320"/>
+          </a:xfrm>
+          <a:prstGeom prst="rect">
+            <a:avLst/>
+          </a:prstGeom>
+          <a:noFill/>
+        </p:spPr>
+        <p:txBody>
+          <a:bodyPr wrap="square">
+            <a:spAutoFit/>
+          </a:bodyPr>
+          <a:lstStyle/>
+          <a:p>
+            <a:pPr algn="r">
+              <a:spcBef>
+                <a:spcPts val="0"/>
+              </a:spcBef>
+              <a:spcAft>
+                <a:spcPts val="600"/>
+              </a:spcAft>
+            </a:pPr>
+            <a:r>
+              <a:rPr sz="1000" b="0">
+                <a:solidFill>
+                  <a:srgbClr val="0B2B52"/>
+                </a:solidFill>
+              </a:rPr>
+              <a:t>39</a:t>
+            </a:r>
+          </a:p>
+        </p:txBody>
+      </p:sp>
+      <p:sp>
+        <p:nvSpPr>
+          <p:cNvPr id="7" name="TextBox 6"/>
+          <p:cNvSpPr txBox="1"/>
+          <p:nvPr/>
+        </p:nvSpPr>
+        <p:spPr>
+          <a:xfrm>
+            <a:off x="548640" y="1280160"/>
+            <a:ext cx="11155680" cy="3383280"/>
+          </a:xfrm>
+          <a:prstGeom prst="rect">
+            <a:avLst/>
+          </a:prstGeom>
+          <a:noFill/>
+        </p:spPr>
+        <p:txBody>
+          <a:bodyPr wrap="square">
+            <a:spAutoFit/>
+          </a:bodyPr>
+          <a:lstStyle/>
+          <a:p>
+            <a:pPr>
+              <a:spcBef>
+                <a:spcPts val="0"/>
+              </a:spcBef>
+              <a:spcAft>
+                <a:spcPts val="600"/>
+              </a:spcAft>
+            </a:pPr>
+            <a:r>
+              <a:rPr sz="1400" b="0">
+                <a:solidFill>
+                  <a:srgbClr val="0B2B52"/>
+                </a:solidFill>
+              </a:rPr>
+              <a:t>•  Implemented and integrated memory, sampling and parallelism optimisations into the Boltz pipeline; device-agnostic on Apple Silicon.</a:t>
+            </a:r>
+          </a:p>
+          <a:p>
+            <a:pPr>
+              <a:spcAft>
+                <a:spcPts val="600"/>
+              </a:spcAft>
+            </a:pPr>
+            <a:r>
+              <a:rPr sz="1400" b="0">
+                <a:solidFill>
+                  <a:srgbClr val="0B2B52"/>
+                </a:solidFill>
+              </a:rPr>
+              <a:t>•  Moved from component microbenchmarks to end-to-end measurement against pretrained checkpoints and experimentally determined structures.</a:t>
+            </a:r>
+          </a:p>
+          <a:p>
+            <a:pPr>
+              <a:spcAft>
+                <a:spcPts val="600"/>
+              </a:spcAft>
+            </a:pPr>
+            <a:r>
+              <a:rPr sz="1400" b="0">
+                <a:solidFill>
+                  <a:srgbClr val="0B2B52"/>
+                </a:solidFill>
+              </a:rPr>
+              <a:t>•  Two questions closed with negative answers, both with mechanisms: the low-rank OPM is unreachable on released weights, and ipTM tracks peptide composition rather than binding.</a:t>
+            </a:r>
+          </a:p>
+          <a:p>
+            <a:pPr>
+              <a:spcAft>
+                <a:spcPts val="600"/>
+              </a:spcAft>
+            </a:pPr>
+            <a:r>
+              <a:rPr sz="1400" b="0">
+                <a:solidFill>
+                  <a:srgbClr val="0B2B52"/>
+                </a:solidFill>
+              </a:rPr>
+              <a:t>•  A third finding generalises beyond this project: a single unseeded fold does not reproduce its own ranking.</a:t>
+            </a:r>
+          </a:p>
+          <a:p>
+            <a:pPr>
+              <a:spcAft>
+                <a:spcPts val="600"/>
+              </a:spcAft>
+            </a:pPr>
+            <a:r>
+              <a:rPr sz="1400" b="0">
+                <a:solidFill>
+                  <a:srgbClr val="0B2B52"/>
+                </a:solidFill>
+              </a:rPr>
+              <a:t>•  Delivered as a local screening tool: the scramble control, the cost of reduced settings and the replicate spread are built into what it does rather than written beside it (slides 31–32).</a:t>
+            </a:r>
+          </a:p>
+          <a:p>
+            <a:r>
+              <a:rPr sz="1400" b="0">
+                <a:solidFill>
+                  <a:srgbClr val="0B2B52"/>
+                </a:solidFill>
+              </a:rPr>
+              <a:t>•  Of the three inference settings raised together, sampling steps carry the effect; alignment depth and recycling carry none of it, and 69% of the gain costs a third of the compute.</a:t>
+            </a:r>
+          </a:p>
+          <a:p>
+            <a:r>
+              <a:rPr sz="1400" b="0">
+                <a:solidFill>
+                  <a:srgbClr val="0B2B52"/>
+                </a:solidFill>
+              </a:rPr>
+              <a:t>•  Checked against binding measured in a wet lab on 1,320 designs no model had seen: 0.626, against 0.943 on the in-training panel. The readout still beats whole-chain confidence, which was the claim.</a:t>
+            </a:r>
+          </a:p>
+          <a:p>
+            <a:r>
+              <a:rPr sz="1400" b="0">
+                <a:solidFill>
+                  <a:srgbClr val="0B2B52"/>
+                </a:solidFill>
+              </a:rPr>
+              <a:t>•  Next: extend the panel past 22 receptors, which is what now limits the open questions.</a:t>
+            </a:r>
+          </a:p>
+        </p:txBody>
+      </p:sp>
+      <p:sp>
+        <p:nvSpPr>
+          <p:cNvPr id="8" name="Rounded Rectangle 7"/>
+          <p:cNvSpPr/>
+          <p:nvPr/>
+        </p:nvSpPr>
+        <p:spPr>
+          <a:xfrm>
+            <a:off x="548640" y="4892040"/>
+            <a:ext cx="11155680" cy="1051560"/>
+          </a:xfrm>
+          <a:prstGeom prst="roundRect">
+            <a:avLst/>
+          </a:prstGeom>
+          <a:solidFill>
+            <a:srgbClr val="0B2B52"/>
+          </a:solidFill>
+          <a:ln>
+            <a:noFill/>
+          </a:ln>
+          <a:effectLst/>
+        </p:spPr>
+        <p:style>
+          <a:lnRef idx="1">
+            <a:schemeClr val="accent1"/>
+          </a:lnRef>
+          <a:fillRef idx="3">
+            <a:schemeClr val="accent1"/>
+          </a:fillRef>
+          <a:effectRef idx="2">
+            <a:schemeClr val="accent1"/>
+          </a:effectRef>
+          <a:fontRef idx="minor">
+            <a:schemeClr val="lt1"/>
+          </a:fontRef>
+        </p:style>
+        <p:txBody>
+          <a:bodyPr rtlCol="0" anchor="ctr" wrap="square"/>
+          <a:lstStyle/>
+          <a:p>
+            <a:pPr algn="ctr">
+              <a:spcBef>
+                <a:spcPts val="0"/>
+              </a:spcBef>
+              <a:spcAft>
+                <a:spcPts val="400"/>
+              </a:spcAft>
+            </a:pPr>
+            <a:r>
+              <a:rPr sz="2000" b="1" i="0">
+                <a:solidFill>
+                  <a:srgbClr val="FFFFFF"/>
+                </a:solidFill>
+              </a:rPr>
+              <a:t>Thank you  ·  Questions welcome</a:t>
+            </a:r>
+          </a:p>
+        </p:txBody>
+      </p:sp>
+    </p:spTree>
+  </p:cSld>
+  <p:clrMapOvr>
+    <a:masterClrMapping/>
+  </p:clrMapOvr>
+</p:sld>
+</file>
+
+<file path=ppt/slides/slide39.xml><?xml version="1.0" encoding="utf-8"?>
+<p:sld xmlns:a="http://schemas.openxmlformats.org/drawingml/2006/main" xmlns:p="http://schemas.openxmlformats.org/presentationml/2006/main" xmlns:r="http://schemas.openxmlformats.org/officeDocument/2006/relationships">
+  <p:cSld>
+    <p:spTree>
+      <p:nvGrpSpPr>
+        <p:cNvPr id="1" name=""/>
+        <p:cNvGrpSpPr/>
+        <p:nvPr/>
+      </p:nvGrpSpPr>
+      <p:grpSpPr/>
+      <p:sp>
+        <p:nvSpPr>
+          <p:cNvPr id="2" name="Rectangle 1"/>
+          <p:cNvSpPr/>
+          <p:nvPr/>
+        </p:nvSpPr>
+        <p:spPr>
+          <a:xfrm>
+            <a:off x="0" y="0"/>
+            <a:ext cx="12188952" cy="914400"/>
+          </a:xfrm>
+          <a:prstGeom prst="rect">
+            <a:avLst/>
+          </a:prstGeom>
+          <a:solidFill>
+            <a:srgbClr val="0B2B52"/>
+          </a:solidFill>
+          <a:ln>
+            <a:noFill/>
+          </a:ln>
+        </p:spPr>
+        <p:style>
+          <a:lnRef idx="1">
+            <a:schemeClr val="accent1"/>
+          </a:lnRef>
+          <a:fillRef idx="3">
+            <a:schemeClr val="accent1"/>
+          </a:fillRef>
+          <a:effectRef idx="2">
+            <a:schemeClr val="accent1"/>
+          </a:effectRef>
+          <a:fontRef idx="minor">
+            <a:schemeClr val="lt1"/>
+          </a:fontRef>
+        </p:style>
+        <p:txBody>
+          <a:bodyPr rtlCol="0" anchor="ctr"/>
+          <a:lstStyle/>
+          <a:p>
+            <a:pPr algn="ctr"/>
+          </a:p>
+        </p:txBody>
+      </p:sp>
+      <p:sp>
+        <p:nvSpPr>
+          <p:cNvPr id="3" name="Rectangle 2"/>
+          <p:cNvSpPr/>
+          <p:nvPr/>
+        </p:nvSpPr>
+        <p:spPr>
+          <a:xfrm>
+            <a:off x="0" y="914400"/>
+            <a:ext cx="12188952" cy="54864"/>
+          </a:xfrm>
+          <a:prstGeom prst="rect">
+            <a:avLst/>
+          </a:prstGeom>
+          <a:solidFill>
+            <a:srgbClr val="1E6FB8"/>
+          </a:solidFill>
+          <a:ln>
+            <a:noFill/>
+          </a:ln>
+        </p:spPr>
+        <p:style>
+          <a:lnRef idx="1">
+            <a:schemeClr val="accent1"/>
+          </a:lnRef>
+          <a:fillRef idx="3">
+            <a:schemeClr val="accent1"/>
+          </a:fillRef>
+          <a:effectRef idx="2">
+            <a:schemeClr val="accent1"/>
+          </a:effectRef>
+          <a:fontRef idx="minor">
+            <a:schemeClr val="lt1"/>
+          </a:fontRef>
+        </p:style>
+        <p:txBody>
+          <a:bodyPr rtlCol="0" anchor="ctr"/>
+          <a:lstStyle/>
+          <a:p>
+            <a:pPr algn="ctr"/>
+          </a:p>
+        </p:txBody>
+      </p:sp>
+      <p:sp>
+        <p:nvSpPr>
+          <p:cNvPr id="4" name="TextBox 3"/>
+          <p:cNvSpPr txBox="1"/>
+          <p:nvPr/>
+        </p:nvSpPr>
+        <p:spPr>
+          <a:xfrm>
+            <a:off x="502920" y="109728"/>
+            <a:ext cx="11155680" cy="777240"/>
+          </a:xfrm>
+          <a:prstGeom prst="rect">
+            <a:avLst/>
+          </a:prstGeom>
+          <a:noFill/>
+        </p:spPr>
+        <p:txBody>
+          <a:bodyPr wrap="square">
+            <a:spAutoFit/>
+          </a:bodyPr>
+          <a:lstStyle/>
+          <a:p>
+            <a:pPr>
+              <a:spcAft>
+                <a:spcPts val="600"/>
+              </a:spcAft>
+            </a:pPr>
+            <a:r>
+              <a:rPr sz="2600" b="1">
+                <a:solidFill>
+                  <a:srgbClr val="FFFFFF"/>
+                </a:solidFill>
+              </a:rPr>
+              <a:t>The Method That Came Out of Being Wrong</a:t>
+            </a:r>
+          </a:p>
+        </p:txBody>
+      </p:sp>
+      <p:sp>
+        <p:nvSpPr>
+          <p:cNvPr id="5" name="TextBox 4"/>
+          <p:cNvSpPr txBox="1"/>
+          <p:nvPr/>
+        </p:nvSpPr>
+        <p:spPr>
+          <a:xfrm>
+            <a:off x="502920" y="6473952"/>
+            <a:ext cx="8229600" cy="274320"/>
+          </a:xfrm>
+          <a:prstGeom prst="rect">
+            <a:avLst/>
+          </a:prstGeom>
+          <a:noFill/>
+        </p:spPr>
+        <p:txBody>
+          <a:bodyPr wrap="square">
+            <a:spAutoFit/>
+          </a:bodyPr>
+          <a:lstStyle/>
+          <a:p>
+            <a:pPr>
+              <a:spcAft>
+                <a:spcPts val="600"/>
+              </a:spcAft>
+            </a:pPr>
+            <a:r>
+              <a:rPr sz="900" b="0">
+                <a:solidFill>
+                  <a:srgbClr val="555555"/>
+                </a:solidFill>
+              </a:rPr>
+              <a:t>Boltz-Fast · Final Dissertation Report · Akik Jana (2024AB05287)</a:t>
+            </a:r>
+          </a:p>
+        </p:txBody>
+      </p:sp>
+      <p:sp>
+        <p:nvSpPr>
+          <p:cNvPr id="6" name="TextBox 5"/>
+          <p:cNvSpPr txBox="1"/>
+          <p:nvPr/>
+        </p:nvSpPr>
+        <p:spPr>
+          <a:xfrm>
+            <a:off x="11183112" y="6473952"/>
+            <a:ext cx="640080" cy="274320"/>
+          </a:xfrm>
+          <a:prstGeom prst="rect">
+            <a:avLst/>
+          </a:prstGeom>
+          <a:noFill/>
+        </p:spPr>
+        <p:txBody>
+          <a:bodyPr wrap="square">
+            <a:spAutoFit/>
+          </a:bodyPr>
+          <a:lstStyle/>
+          <a:p>
+            <a:pPr>
+              <a:spcAft>
+                <a:spcPts val="600"/>
+              </a:spcAft>
+            </a:pPr>
+            <a:r>
+              <a:rPr sz="1000" b="0">
+                <a:solidFill>
+                  <a:srgbClr val="0B2B52"/>
+                </a:solidFill>
+              </a:rPr>
+              <a:t>37</a:t>
+            </a:r>
+          </a:p>
+        </p:txBody>
+      </p:sp>
+      <p:sp>
+        <p:nvSpPr>
+          <p:cNvPr id="7" name="TextBox 6"/>
+          <p:cNvSpPr txBox="1"/>
+          <p:nvPr/>
+        </p:nvSpPr>
+        <p:spPr>
+          <a:xfrm>
+            <a:off x="548640" y="1051560"/>
+            <a:ext cx="11155680" cy="1005840"/>
+          </a:xfrm>
+          <a:prstGeom prst="rect">
+            <a:avLst/>
+          </a:prstGeom>
+          <a:noFill/>
+        </p:spPr>
+        <p:txBody>
+          <a:bodyPr wrap="square">
+            <a:spAutoFit/>
+          </a:bodyPr>
+          <a:lstStyle/>
+          <a:p>
+            <a:pPr>
+              <a:spcAft>
+                <a:spcPts val="600"/>
+              </a:spcAft>
+            </a:pPr>
+            <a:r>
+              <a:rPr sz="1500" b="0">
+                <a:solidFill>
+                  <a:srgbClr val="0B2B52"/>
+                </a:solidFill>
+              </a:rPr>
+              <a:t>Section 7.10 was written three times and two claims withdrawn — each formed after the numbers were seen.</a:t>
+            </a:r>
+          </a:p>
+          <a:p>
+            <a:pPr>
+              <a:spcAft>
+                <a:spcPts val="600"/>
+              </a:spcAft>
+            </a:pPr>
+            <a:r>
+              <a:rPr sz="1500" b="0">
+                <a:solidFill>
+                  <a:srgbClr val="0B2B52"/>
+                </a:solidFill>
+              </a:rPr>
+              <a:t>Everything attempted afterwards fixed the test first. What that refused:</a:t>
+            </a:r>
+          </a:p>
+        </p:txBody>
+      </p:sp>
+      <p:graphicFrame>
+        <p:nvGraphicFramePr>
+          <p:cNvPr id="8" name="Table 7"/>
+          <p:cNvGraphicFramePr>
+            <a:graphicFrameLocks noGrp="1"/>
+          </p:cNvGraphicFramePr>
+          <p:nvPr/>
+        </p:nvGraphicFramePr>
+        <p:xfrm>
+          <a:off x="548640" y="2011680"/>
+          <a:ext cx="11155680" cy="2331720"/>
+        </p:xfrm>
+        <a:graphic>
+          <a:graphicData uri="http://schemas.openxmlformats.org/drawingml/2006/table">
+            <a:tbl>
+              <a:tblPr firstRow="1" bandRow="1">
+                <a:tableStyleId>{5C22544A-7EE6-4342-B048-85BDC9FD1C3A}</a:tableStyleId>
+              </a:tblPr>
+              <a:tblGrid>
+                <a:gridCol w="5852160"/>
+                <a:gridCol w="5303520"/>
+              </a:tblGrid>
+              <a:tr h="466344">
+                <a:tc>
+                  <a:txBody>
+                    <a:bodyPr/>
+                    <a:lstStyle/>
+                    <a:p>
+                      <a:r>
+                        <a:rPr sz="1250" b="1">
+                          <a:solidFill>
+                            <a:srgbClr val="0B2B52"/>
+                          </a:solidFill>
+                        </a:rPr>
+                        <a:t>Fixed in advance</a:t>
+                      </a:r>
+                    </a:p>
+                  </a:txBody>
+                  <a:tcPr/>
+                </a:tc>
+                <a:tc>
+                  <a:txBody>
+                    <a:bodyPr/>
+                    <a:lstStyle/>
+                    <a:p>
+                      <a:r>
+                        <a:rPr sz="1250" b="1">
+                          <a:solidFill>
+                            <a:srgbClr val="0B2B52"/>
+                          </a:solidFill>
+                        </a:rPr>
+                        <a:t>What it refused</a:t>
+                      </a:r>
+                    </a:p>
+                  </a:txBody>
+                  <a:tcPr/>
+                </a:tc>
+              </a:tr>
+              <a:tr h="466344">
+                <a:tc>
+                  <a:txBody>
+                    <a:bodyPr/>
+                    <a:lstStyle/>
+                    <a:p>
+                      <a:r>
+                        <a:rPr sz="1250" b="0">
+                          <a:solidFill>
+                            <a:srgbClr val="0B2B52"/>
+                          </a:solidFill>
+                        </a:rPr>
+                        <a:t>7.15  the permutation null, built before reading the winner</a:t>
+                      </a:r>
+                    </a:p>
+                  </a:txBody>
+                  <a:tcPr/>
+                </a:tc>
+                <a:tc>
+                  <a:txBody>
+                    <a:bodyPr/>
+                    <a:lstStyle/>
+                    <a:p>
+                      <a:r>
+                        <a:rPr sz="1250" b="0">
+                          <a:solidFill>
+                            <a:srgbClr val="0B2B52"/>
+                          </a:solidFill>
+                        </a:rPr>
+                        <a:t>a +0.018 AUC gain over this work's headline readout</a:t>
+                      </a:r>
+                    </a:p>
+                  </a:txBody>
+                  <a:tcPr/>
+                </a:tc>
+              </a:tr>
+              <a:tr h="466344">
+                <a:tc>
+                  <a:txBody>
+                    <a:bodyPr/>
+                    <a:lstStyle/>
+                    <a:p>
+                      <a:r>
+                        <a:rPr sz="1250" b="0">
+                          <a:solidFill>
+                            <a:srgbClr val="0B2B52"/>
+                          </a:solidFill>
+                        </a:rPr>
+                        <a:t>7.16  the analysis, written while the arms were still folding</a:t>
+                      </a:r>
+                    </a:p>
+                  </a:txBody>
+                  <a:tcPr/>
+                </a:tc>
+                <a:tc>
+                  <a:txBody>
+                    <a:bodyPr/>
+                    <a:lstStyle/>
+                    <a:p>
+                      <a:r>
+                        <a:rPr sz="1250" b="0">
+                          <a:solidFill>
+                            <a:srgbClr val="0B2B52"/>
+                          </a:solidFill>
+                        </a:rPr>
+                        <a:t>a half-folded arm being scored at AUC 0.917</a:t>
+                      </a:r>
+                    </a:p>
+                  </a:txBody>
+                  <a:tcPr/>
+                </a:tc>
+              </a:tr>
+              <a:tr h="466344">
+                <a:tc>
+                  <a:txBody>
+                    <a:bodyPr/>
+                    <a:lstStyle/>
+                    <a:p>
+                      <a:r>
+                        <a:rPr sz="1250" b="0">
+                          <a:solidFill>
+                            <a:srgbClr val="0B2B52"/>
+                          </a:solidFill>
+                        </a:rPr>
+                        <a:t>7.17  the equivalence oracle, run before any timing</a:t>
+                      </a:r>
+                    </a:p>
+                  </a:txBody>
+                  <a:tcPr/>
+                </a:tc>
+                <a:tc>
+                  <a:txBody>
+                    <a:bodyPr/>
+                    <a:lstStyle/>
+                    <a:p>
+                      <a:r>
+                        <a:rPr sz="1250" b="0">
+                          <a:solidFill>
+                            <a:srgbClr val="0B2B52"/>
+                          </a:solidFill>
+                        </a:rPr>
+                        <a:t>three rewrites that looked correct and were slower or inexact</a:t>
+                      </a:r>
+                    </a:p>
+                  </a:txBody>
+                  <a:tcPr/>
+                </a:tc>
+              </a:tr>
+              <a:tr h="466344">
+                <a:tc>
+                  <a:txBody>
+                    <a:bodyPr/>
+                    <a:lstStyle/>
+                    <a:p>
+                      <a:r>
+                        <a:rPr sz="1250" b="0">
+                          <a:solidFill>
+                            <a:srgbClr val="0B2B52"/>
+                          </a:solidFill>
+                        </a:rPr>
+                        <a:t>7.19  the prediction, committed to source before a fold ran</a:t>
+                      </a:r>
+                    </a:p>
+                  </a:txBody>
+                  <a:tcPr/>
+                </a:tc>
+                <a:tc>
+                  <a:txBody>
+                    <a:bodyPr/>
+                    <a:lstStyle/>
+                    <a:p>
+                      <a:r>
+                        <a:rPr sz="1250" b="0">
+                          <a:solidFill>
+                            <a:srgbClr val="0B2B52"/>
+                          </a:solidFill>
+                        </a:rPr>
+                        <a:t>the option of calling the outcome expected after the fact</a:t>
+                      </a:r>
+                    </a:p>
+                  </a:txBody>
+                  <a:tcPr/>
+                </a:tc>
+              </a:tr>
+            </a:tbl>
+          </a:graphicData>
+        </a:graphic>
+      </p:graphicFrame>
+      <p:sp>
+        <p:nvSpPr>
+          <p:cNvPr id="9" name="Rounded Rectangle 8"/>
+          <p:cNvSpPr/>
+          <p:nvPr/>
+        </p:nvSpPr>
+        <p:spPr>
+          <a:xfrm>
+            <a:off x="548640" y="4617720"/>
+            <a:ext cx="11155680" cy="960120"/>
+          </a:xfrm>
+          <a:prstGeom prst="roundRect">
+            <a:avLst/>
+          </a:prstGeom>
+          <a:solidFill>
+            <a:srgbClr val="2E7D32"/>
+          </a:solidFill>
+          <a:ln>
+            <a:noFill/>
+          </a:ln>
+        </p:spPr>
+        <p:style>
+          <a:lnRef idx="1">
+            <a:schemeClr val="accent1"/>
+          </a:lnRef>
+          <a:fillRef idx="3">
+            <a:schemeClr val="accent1"/>
+          </a:fillRef>
+          <a:effectRef idx="2">
+            <a:schemeClr val="accent1"/>
+          </a:effectRef>
+          <a:fontRef idx="minor">
+            <a:schemeClr val="lt1"/>
+          </a:fontRef>
+        </p:style>
+        <p:txBody>
+          <a:bodyPr rtlCol="0" anchor="ctr" wrap="square"/>
+          <a:lstStyle/>
+          <a:p>
+            <a:pPr algn="ctr">
+              <a:spcAft>
+                <a:spcPts val="600"/>
+              </a:spcAft>
+            </a:pPr>
+            <a:r>
+              <a:rPr sz="1700" b="1">
+                <a:solidFill>
+                  <a:srgbClr val="FFFFFF"/>
+                </a:solidFill>
+              </a:rPr>
+              <a:t>The order matters more than the rigour. Each could have been done afterwards, produced the same arithmetic, and supported a weaker claim.</a:t>
+            </a:r>
+          </a:p>
+        </p:txBody>
+      </p:sp>
+      <p:sp>
+        <p:nvSpPr>
+          <p:cNvPr id="10" name="Rounded Rectangle 9"/>
+          <p:cNvSpPr/>
+          <p:nvPr/>
+        </p:nvSpPr>
+        <p:spPr>
+          <a:xfrm>
+            <a:off x="548640" y="5532120"/>
+            <a:ext cx="11155680" cy="868680"/>
+          </a:xfrm>
+          <a:prstGeom prst="roundRect">
+            <a:avLst/>
+          </a:prstGeom>
+          <a:solidFill>
+            <a:srgbClr val="FDF3E0"/>
+          </a:solidFill>
+          <a:ln>
+            <a:noFill/>
+          </a:ln>
+        </p:spPr>
+        <p:style>
+          <a:lnRef idx="1">
+            <a:schemeClr val="accent1"/>
+          </a:lnRef>
+          <a:fillRef idx="3">
+            <a:schemeClr val="accent1"/>
+          </a:fillRef>
+          <a:effectRef idx="2">
+            <a:schemeClr val="accent1"/>
+          </a:effectRef>
+          <a:fontRef idx="minor">
+            <a:schemeClr val="lt1"/>
+          </a:fontRef>
+        </p:style>
+        <p:txBody>
+          <a:bodyPr rtlCol="0" anchor="ctr" wrap="square"/>
+          <a:lstStyle/>
+          <a:p>
+            <a:pPr algn="ctr">
+              <a:spcAft>
+                <a:spcPts val="600"/>
+              </a:spcAft>
+            </a:pPr>
+            <a:r>
+              <a:rPr sz="1250" b="0">
+                <a:solidFill>
+                  <a:srgbClr val="8A5200"/>
+                </a:solidFill>
+              </a:rPr>
+              <a:t>What pre-specification buys is not accuracy but the ability to be refused. In this work it refused an ensembling mechanism, a readout combination, a target-cropping strategy and a per-arm score — each of which looked correct when it was proposed.</a:t>
             </a:r>
           </a:p>
         </p:txBody>
